--- a/1_statistics for machine learning.pptx
+++ b/1_statistics for machine learning.pptx
@@ -5,46 +5,54 @@
     <p:sldMasterId id="2147483648" r:id="rId4"/>
   </p:sldMasterIdLst>
   <p:notesMasterIdLst>
-    <p:notesMasterId r:id="rId39"/>
+    <p:notesMasterId r:id="rId47"/>
   </p:notesMasterIdLst>
   <p:handoutMasterIdLst>
-    <p:handoutMasterId r:id="rId40"/>
+    <p:handoutMasterId r:id="rId48"/>
   </p:handoutMasterIdLst>
   <p:sldIdLst>
     <p:sldId id="256" r:id="rId5"/>
     <p:sldId id="270" r:id="rId6"/>
-    <p:sldId id="271" r:id="rId7"/>
-    <p:sldId id="282" r:id="rId8"/>
-    <p:sldId id="279" r:id="rId9"/>
-    <p:sldId id="280" r:id="rId10"/>
-    <p:sldId id="281" r:id="rId11"/>
-    <p:sldId id="299" r:id="rId12"/>
-    <p:sldId id="300" r:id="rId13"/>
-    <p:sldId id="272" r:id="rId14"/>
-    <p:sldId id="301" r:id="rId15"/>
-    <p:sldId id="273" r:id="rId16"/>
-    <p:sldId id="274" r:id="rId17"/>
-    <p:sldId id="276" r:id="rId18"/>
-    <p:sldId id="275" r:id="rId19"/>
-    <p:sldId id="277" r:id="rId20"/>
-    <p:sldId id="278" r:id="rId21"/>
-    <p:sldId id="283" r:id="rId22"/>
-    <p:sldId id="284" r:id="rId23"/>
-    <p:sldId id="285" r:id="rId24"/>
-    <p:sldId id="286" r:id="rId25"/>
-    <p:sldId id="302" r:id="rId26"/>
-    <p:sldId id="287" r:id="rId27"/>
-    <p:sldId id="288" r:id="rId28"/>
-    <p:sldId id="289" r:id="rId29"/>
-    <p:sldId id="290" r:id="rId30"/>
-    <p:sldId id="291" r:id="rId31"/>
-    <p:sldId id="292" r:id="rId32"/>
-    <p:sldId id="293" r:id="rId33"/>
-    <p:sldId id="294" r:id="rId34"/>
-    <p:sldId id="295" r:id="rId35"/>
-    <p:sldId id="296" r:id="rId36"/>
-    <p:sldId id="297" r:id="rId37"/>
-    <p:sldId id="298" r:id="rId38"/>
+    <p:sldId id="305" r:id="rId7"/>
+    <p:sldId id="304" r:id="rId8"/>
+    <p:sldId id="306" r:id="rId9"/>
+    <p:sldId id="271" r:id="rId10"/>
+    <p:sldId id="282" r:id="rId11"/>
+    <p:sldId id="279" r:id="rId12"/>
+    <p:sldId id="280" r:id="rId13"/>
+    <p:sldId id="281" r:id="rId14"/>
+    <p:sldId id="308" r:id="rId15"/>
+    <p:sldId id="307" r:id="rId16"/>
+    <p:sldId id="272" r:id="rId17"/>
+    <p:sldId id="309" r:id="rId18"/>
+    <p:sldId id="273" r:id="rId19"/>
+    <p:sldId id="274" r:id="rId20"/>
+    <p:sldId id="299" r:id="rId21"/>
+    <p:sldId id="300" r:id="rId22"/>
+    <p:sldId id="301" r:id="rId23"/>
+    <p:sldId id="276" r:id="rId24"/>
+    <p:sldId id="275" r:id="rId25"/>
+    <p:sldId id="277" r:id="rId26"/>
+    <p:sldId id="278" r:id="rId27"/>
+    <p:sldId id="283" r:id="rId28"/>
+    <p:sldId id="284" r:id="rId29"/>
+    <p:sldId id="285" r:id="rId30"/>
+    <p:sldId id="286" r:id="rId31"/>
+    <p:sldId id="302" r:id="rId32"/>
+    <p:sldId id="287" r:id="rId33"/>
+    <p:sldId id="288" r:id="rId34"/>
+    <p:sldId id="289" r:id="rId35"/>
+    <p:sldId id="290" r:id="rId36"/>
+    <p:sldId id="291" r:id="rId37"/>
+    <p:sldId id="292" r:id="rId38"/>
+    <p:sldId id="310" r:id="rId39"/>
+    <p:sldId id="293" r:id="rId40"/>
+    <p:sldId id="294" r:id="rId41"/>
+    <p:sldId id="295" r:id="rId42"/>
+    <p:sldId id="296" r:id="rId43"/>
+    <p:sldId id="297" r:id="rId44"/>
+    <p:sldId id="298" r:id="rId45"/>
+    <p:sldId id="303" r:id="rId46"/>
   </p:sldIdLst>
   <p:sldSz cx="12188825" cy="6858000"/>
   <p:notesSz cx="6858000" cy="9144000"/>
@@ -266,7 +274,7 @@
                 <a:latin typeface="맑은 고딕" panose="020B0503020000020004" pitchFamily="50" charset="-127"/>
                 <a:ea typeface="맑은 고딕" panose="020B0503020000020004" pitchFamily="50" charset="-127"/>
               </a:rPr>
-              <a:t>2026-02-28</a:t>
+              <a:t>2026-03-11</a:t>
             </a:fld>
             <a:endParaRPr lang="ko-KR" altLang="en-US" dirty="0">
               <a:latin typeface="맑은 고딕" panose="020B0503020000020004" pitchFamily="50" charset="-127"/>
@@ -453,7 +461,7 @@
             <a:fld id="{39DBE7D5-AA2D-4B26-8C69-8B60D39FD5EE}" type="datetime1">
               <a:rPr lang="ko-KR" altLang="en-US" smtClean="0"/>
               <a:pPr/>
-              <a:t>2026-02-28</a:t>
+              <a:t>2026-03-11</a:t>
             </a:fld>
             <a:endParaRPr lang="ko-KR" altLang="en-US" dirty="0"/>
           </a:p>
@@ -819,10 +827,95 @@
   <p:cSld>
     <p:spTree>
       <p:nvGrpSpPr>
+        <p:cNvPr id="1" name=""/>
+        <p:cNvGrpSpPr/>
+        <p:nvPr/>
+      </p:nvGrpSpPr>
+      <p:grpSpPr>
+        <a:xfrm>
+          <a:off x="0" y="0"/>
+          <a:ext cx="0" cy="0"/>
+          <a:chOff x="0" y="0"/>
+          <a:chExt cx="0" cy="0"/>
+        </a:xfrm>
+      </p:grpSpPr>
+      <p:sp>
+        <p:nvSpPr>
+          <p:cNvPr id="2" name="슬라이드 이미지 개체 틀 1"/>
+          <p:cNvSpPr>
+            <a:spLocks noGrp="1" noRot="1" noChangeAspect="1"/>
+          </p:cNvSpPr>
+          <p:nvPr>
+            <p:ph type="sldImg"/>
+          </p:nvPr>
+        </p:nvSpPr>
+        <p:spPr/>
+      </p:sp>
+      <p:sp>
+        <p:nvSpPr>
+          <p:cNvPr id="3" name="슬라이드 노트 개체 틀 2"/>
+          <p:cNvSpPr>
+            <a:spLocks noGrp="1"/>
+          </p:cNvSpPr>
+          <p:nvPr>
+            <p:ph type="body" idx="1"/>
+          </p:nvPr>
+        </p:nvSpPr>
+        <p:spPr/>
+        <p:txBody>
+          <a:bodyPr/>
+          <a:lstStyle/>
+          <a:p>
+            <a:endParaRPr lang="ko-KR" altLang="en-US" dirty="0"/>
+          </a:p>
+        </p:txBody>
+      </p:sp>
+      <p:sp>
+        <p:nvSpPr>
+          <p:cNvPr id="4" name="슬라이드 번호 개체 틀 3"/>
+          <p:cNvSpPr>
+            <a:spLocks noGrp="1"/>
+          </p:cNvSpPr>
+          <p:nvPr>
+            <p:ph type="sldNum" sz="quarter" idx="10"/>
+          </p:nvPr>
+        </p:nvSpPr>
+        <p:spPr/>
+        <p:txBody>
+          <a:bodyPr/>
+          <a:lstStyle/>
+          <a:p>
+            <a:pPr rtl="0"/>
+            <a:fld id="{5FB91549-43BF-425A-AF25-75262019208C}" type="slidenum">
+              <a:rPr lang="en-US" altLang="ko-KR" smtClean="0"/>
+              <a:t>10</a:t>
+            </a:fld>
+            <a:endParaRPr lang="ko-KR" altLang="en-US" dirty="0"/>
+          </a:p>
+        </p:txBody>
+      </p:sp>
+    </p:spTree>
+    <p:extLst>
+      <p:ext uri="{BB962C8B-B14F-4D97-AF65-F5344CB8AC3E}">
+        <p14:creationId xmlns:p14="http://schemas.microsoft.com/office/powerpoint/2010/main" val="1885669057"/>
+      </p:ext>
+    </p:extLst>
+  </p:cSld>
+  <p:clrMapOvr>
+    <a:masterClrMapping/>
+  </p:clrMapOvr>
+</p:notes>
+</file>
+
+<file path=ppt/notesSlides/notesSlide11.xml><?xml version="1.0" encoding="utf-8"?>
+<p:notes xmlns:a="http://schemas.openxmlformats.org/drawingml/2006/main" xmlns:r="http://schemas.openxmlformats.org/officeDocument/2006/relationships" xmlns:p="http://schemas.openxmlformats.org/presentationml/2006/main">
+  <p:cSld>
+    <p:spTree>
+      <p:nvGrpSpPr>
         <p:cNvPr id="1" name="">
           <a:extLst>
             <a:ext uri="{FF2B5EF4-FFF2-40B4-BE49-F238E27FC236}">
-              <a16:creationId xmlns:a16="http://schemas.microsoft.com/office/drawing/2014/main" id="{B0B7DACE-676E-EE7D-4489-0639BF654EEA}"/>
+              <a16:creationId xmlns:a16="http://schemas.microsoft.com/office/drawing/2014/main" id="{714B8705-3323-DCA1-0DE1-5AD2BD0661F9}"/>
             </a:ext>
           </a:extLst>
         </p:cNvPr>
@@ -842,7 +935,7 @@
           <p:cNvPr id="2" name="슬라이드 이미지 개체 틀 1">
             <a:extLst>
               <a:ext uri="{FF2B5EF4-FFF2-40B4-BE49-F238E27FC236}">
-                <a16:creationId xmlns:a16="http://schemas.microsoft.com/office/drawing/2014/main" id="{95970EBA-85AC-C86A-802E-95C40DF114E7}"/>
+                <a16:creationId xmlns:a16="http://schemas.microsoft.com/office/drawing/2014/main" id="{A23B6D09-2392-C501-F78E-115D46EC8F0C}"/>
               </a:ext>
             </a:extLst>
           </p:cNvPr>
@@ -860,7 +953,7 @@
           <p:cNvPr id="3" name="슬라이드 노트 개체 틀 2">
             <a:extLst>
               <a:ext uri="{FF2B5EF4-FFF2-40B4-BE49-F238E27FC236}">
-                <a16:creationId xmlns:a16="http://schemas.microsoft.com/office/drawing/2014/main" id="{0EF62820-CC7D-57C3-8FFF-E03C09D0E3E7}"/>
+                <a16:creationId xmlns:a16="http://schemas.microsoft.com/office/drawing/2014/main" id="{076F2958-1387-E1C8-A718-1878C5B170C9}"/>
               </a:ext>
             </a:extLst>
           </p:cNvPr>
@@ -885,7 +978,7 @@
           <p:cNvPr id="4" name="슬라이드 번호 개체 틀 3">
             <a:extLst>
               <a:ext uri="{FF2B5EF4-FFF2-40B4-BE49-F238E27FC236}">
-                <a16:creationId xmlns:a16="http://schemas.microsoft.com/office/drawing/2014/main" id="{BB4FAD6A-CE9A-4DC2-EC6C-6C654F6B0975}"/>
+                <a16:creationId xmlns:a16="http://schemas.microsoft.com/office/drawing/2014/main" id="{44C5C12B-A408-3EA1-287B-968825FD92A6}"/>
               </a:ext>
             </a:extLst>
           </p:cNvPr>
@@ -913,92 +1006,7 @@
     </p:spTree>
     <p:extLst>
       <p:ext uri="{BB962C8B-B14F-4D97-AF65-F5344CB8AC3E}">
-        <p14:creationId xmlns:p14="http://schemas.microsoft.com/office/powerpoint/2010/main" val="1144858924"/>
-      </p:ext>
-    </p:extLst>
-  </p:cSld>
-  <p:clrMapOvr>
-    <a:masterClrMapping/>
-  </p:clrMapOvr>
-</p:notes>
-</file>
-
-<file path=ppt/notesSlides/notesSlide11.xml><?xml version="1.0" encoding="utf-8"?>
-<p:notes xmlns:a="http://schemas.openxmlformats.org/drawingml/2006/main" xmlns:r="http://schemas.openxmlformats.org/officeDocument/2006/relationships" xmlns:p="http://schemas.openxmlformats.org/presentationml/2006/main">
-  <p:cSld>
-    <p:spTree>
-      <p:nvGrpSpPr>
-        <p:cNvPr id="1" name=""/>
-        <p:cNvGrpSpPr/>
-        <p:nvPr/>
-      </p:nvGrpSpPr>
-      <p:grpSpPr>
-        <a:xfrm>
-          <a:off x="0" y="0"/>
-          <a:ext cx="0" cy="0"/>
-          <a:chOff x="0" y="0"/>
-          <a:chExt cx="0" cy="0"/>
-        </a:xfrm>
-      </p:grpSpPr>
-      <p:sp>
-        <p:nvSpPr>
-          <p:cNvPr id="2" name="슬라이드 이미지 개체 틀 1"/>
-          <p:cNvSpPr>
-            <a:spLocks noGrp="1" noRot="1" noChangeAspect="1"/>
-          </p:cNvSpPr>
-          <p:nvPr>
-            <p:ph type="sldImg"/>
-          </p:nvPr>
-        </p:nvSpPr>
-        <p:spPr/>
-      </p:sp>
-      <p:sp>
-        <p:nvSpPr>
-          <p:cNvPr id="3" name="슬라이드 노트 개체 틀 2"/>
-          <p:cNvSpPr>
-            <a:spLocks noGrp="1"/>
-          </p:cNvSpPr>
-          <p:nvPr>
-            <p:ph type="body" idx="1"/>
-          </p:nvPr>
-        </p:nvSpPr>
-        <p:spPr/>
-        <p:txBody>
-          <a:bodyPr/>
-          <a:lstStyle/>
-          <a:p>
-            <a:endParaRPr lang="ko-KR" altLang="en-US" dirty="0"/>
-          </a:p>
-        </p:txBody>
-      </p:sp>
-      <p:sp>
-        <p:nvSpPr>
-          <p:cNvPr id="4" name="슬라이드 번호 개체 틀 3"/>
-          <p:cNvSpPr>
-            <a:spLocks noGrp="1"/>
-          </p:cNvSpPr>
-          <p:nvPr>
-            <p:ph type="sldNum" sz="quarter" idx="10"/>
-          </p:nvPr>
-        </p:nvSpPr>
-        <p:spPr/>
-        <p:txBody>
-          <a:bodyPr/>
-          <a:lstStyle/>
-          <a:p>
-            <a:pPr rtl="0"/>
-            <a:fld id="{5FB91549-43BF-425A-AF25-75262019208C}" type="slidenum">
-              <a:rPr lang="en-US" altLang="ko-KR" smtClean="0"/>
-              <a:t>12</a:t>
-            </a:fld>
-            <a:endParaRPr lang="ko-KR" altLang="en-US" dirty="0"/>
-          </a:p>
-        </p:txBody>
-      </p:sp>
-    </p:spTree>
-    <p:extLst>
-      <p:ext uri="{BB962C8B-B14F-4D97-AF65-F5344CB8AC3E}">
-        <p14:creationId xmlns:p14="http://schemas.microsoft.com/office/powerpoint/2010/main" val="1060011471"/>
+        <p14:creationId xmlns:p14="http://schemas.microsoft.com/office/powerpoint/2010/main" val="4081539220"/>
       </p:ext>
     </p:extLst>
   </p:cSld>
@@ -1013,7 +1021,13 @@
   <p:cSld>
     <p:spTree>
       <p:nvGrpSpPr>
-        <p:cNvPr id="1" name=""/>
+        <p:cNvPr id="1" name="">
+          <a:extLst>
+            <a:ext uri="{FF2B5EF4-FFF2-40B4-BE49-F238E27FC236}">
+              <a16:creationId xmlns:a16="http://schemas.microsoft.com/office/drawing/2014/main" id="{B5E8EB20-F00D-DEA0-4BED-25CB3B72D91F}"/>
+            </a:ext>
+          </a:extLst>
+        </p:cNvPr>
         <p:cNvGrpSpPr/>
         <p:nvPr/>
       </p:nvGrpSpPr>
@@ -1027,7 +1041,13 @@
       </p:grpSpPr>
       <p:sp>
         <p:nvSpPr>
-          <p:cNvPr id="2" name="슬라이드 이미지 개체 틀 1"/>
+          <p:cNvPr id="2" name="슬라이드 이미지 개체 틀 1">
+            <a:extLst>
+              <a:ext uri="{FF2B5EF4-FFF2-40B4-BE49-F238E27FC236}">
+                <a16:creationId xmlns:a16="http://schemas.microsoft.com/office/drawing/2014/main" id="{EED47328-A892-BAC3-1A9A-42A9149317C5}"/>
+              </a:ext>
+            </a:extLst>
+          </p:cNvPr>
           <p:cNvSpPr>
             <a:spLocks noGrp="1" noRot="1" noChangeAspect="1"/>
           </p:cNvSpPr>
@@ -1039,7 +1059,13 @@
       </p:sp>
       <p:sp>
         <p:nvSpPr>
-          <p:cNvPr id="3" name="슬라이드 노트 개체 틀 2"/>
+          <p:cNvPr id="3" name="슬라이드 노트 개체 틀 2">
+            <a:extLst>
+              <a:ext uri="{FF2B5EF4-FFF2-40B4-BE49-F238E27FC236}">
+                <a16:creationId xmlns:a16="http://schemas.microsoft.com/office/drawing/2014/main" id="{AB9FBE53-6A4F-7626-0C4B-01CCAD3CCFF4}"/>
+              </a:ext>
+            </a:extLst>
+          </p:cNvPr>
           <p:cNvSpPr>
             <a:spLocks noGrp="1"/>
           </p:cNvSpPr>
@@ -1058,7 +1084,13 @@
       </p:sp>
       <p:sp>
         <p:nvSpPr>
-          <p:cNvPr id="4" name="슬라이드 번호 개체 틀 3"/>
+          <p:cNvPr id="4" name="슬라이드 번호 개체 틀 3">
+            <a:extLst>
+              <a:ext uri="{FF2B5EF4-FFF2-40B4-BE49-F238E27FC236}">
+                <a16:creationId xmlns:a16="http://schemas.microsoft.com/office/drawing/2014/main" id="{7A94D185-85B9-85CC-370A-1DDF51499E22}"/>
+              </a:ext>
+            </a:extLst>
+          </p:cNvPr>
           <p:cNvSpPr>
             <a:spLocks noGrp="1"/>
           </p:cNvSpPr>
@@ -1074,7 +1106,7 @@
             <a:pPr rtl="0"/>
             <a:fld id="{5FB91549-43BF-425A-AF25-75262019208C}" type="slidenum">
               <a:rPr lang="en-US" altLang="ko-KR" smtClean="0"/>
-              <a:t>13</a:t>
+              <a:t>12</a:t>
             </a:fld>
             <a:endParaRPr lang="ko-KR" altLang="en-US" dirty="0"/>
           </a:p>
@@ -1083,7 +1115,7 @@
     </p:spTree>
     <p:extLst>
       <p:ext uri="{BB962C8B-B14F-4D97-AF65-F5344CB8AC3E}">
-        <p14:creationId xmlns:p14="http://schemas.microsoft.com/office/powerpoint/2010/main" val="4043882338"/>
+        <p14:creationId xmlns:p14="http://schemas.microsoft.com/office/powerpoint/2010/main" val="3367812892"/>
       </p:ext>
     </p:extLst>
   </p:cSld>
@@ -1159,7 +1191,7 @@
             <a:pPr rtl="0"/>
             <a:fld id="{5FB91549-43BF-425A-AF25-75262019208C}" type="slidenum">
               <a:rPr lang="en-US" altLang="ko-KR" smtClean="0"/>
-              <a:t>14</a:t>
+              <a:t>13</a:t>
             </a:fld>
             <a:endParaRPr lang="ko-KR" altLang="en-US" dirty="0"/>
           </a:p>
@@ -1168,7 +1200,7 @@
     </p:spTree>
     <p:extLst>
       <p:ext uri="{BB962C8B-B14F-4D97-AF65-F5344CB8AC3E}">
-        <p14:creationId xmlns:p14="http://schemas.microsoft.com/office/powerpoint/2010/main" val="2662501191"/>
+        <p14:creationId xmlns:p14="http://schemas.microsoft.com/office/powerpoint/2010/main" val="3285654640"/>
       </p:ext>
     </p:extLst>
   </p:cSld>
@@ -1183,7 +1215,13 @@
   <p:cSld>
     <p:spTree>
       <p:nvGrpSpPr>
-        <p:cNvPr id="1" name=""/>
+        <p:cNvPr id="1" name="">
+          <a:extLst>
+            <a:ext uri="{FF2B5EF4-FFF2-40B4-BE49-F238E27FC236}">
+              <a16:creationId xmlns:a16="http://schemas.microsoft.com/office/drawing/2014/main" id="{D9CC92F7-5E09-EF99-47BD-B6AA75D50FF0}"/>
+            </a:ext>
+          </a:extLst>
+        </p:cNvPr>
         <p:cNvGrpSpPr/>
         <p:nvPr/>
       </p:nvGrpSpPr>
@@ -1197,7 +1235,13 @@
       </p:grpSpPr>
       <p:sp>
         <p:nvSpPr>
-          <p:cNvPr id="2" name="슬라이드 이미지 개체 틀 1"/>
+          <p:cNvPr id="2" name="슬라이드 이미지 개체 틀 1">
+            <a:extLst>
+              <a:ext uri="{FF2B5EF4-FFF2-40B4-BE49-F238E27FC236}">
+                <a16:creationId xmlns:a16="http://schemas.microsoft.com/office/drawing/2014/main" id="{6879BCBC-B622-8D81-8E3F-180A1B5A9C24}"/>
+              </a:ext>
+            </a:extLst>
+          </p:cNvPr>
           <p:cNvSpPr>
             <a:spLocks noGrp="1" noRot="1" noChangeAspect="1"/>
           </p:cNvSpPr>
@@ -1209,7 +1253,13 @@
       </p:sp>
       <p:sp>
         <p:nvSpPr>
-          <p:cNvPr id="3" name="슬라이드 노트 개체 틀 2"/>
+          <p:cNvPr id="3" name="슬라이드 노트 개체 틀 2">
+            <a:extLst>
+              <a:ext uri="{FF2B5EF4-FFF2-40B4-BE49-F238E27FC236}">
+                <a16:creationId xmlns:a16="http://schemas.microsoft.com/office/drawing/2014/main" id="{F1C83144-DBA9-E550-3C13-C53BCD252F34}"/>
+              </a:ext>
+            </a:extLst>
+          </p:cNvPr>
           <p:cNvSpPr>
             <a:spLocks noGrp="1"/>
           </p:cNvSpPr>
@@ -1228,7 +1278,13 @@
       </p:sp>
       <p:sp>
         <p:nvSpPr>
-          <p:cNvPr id="4" name="슬라이드 번호 개체 틀 3"/>
+          <p:cNvPr id="4" name="슬라이드 번호 개체 틀 3">
+            <a:extLst>
+              <a:ext uri="{FF2B5EF4-FFF2-40B4-BE49-F238E27FC236}">
+                <a16:creationId xmlns:a16="http://schemas.microsoft.com/office/drawing/2014/main" id="{2C43121F-45D2-12D3-F7A7-56AE6E48D189}"/>
+              </a:ext>
+            </a:extLst>
+          </p:cNvPr>
           <p:cNvSpPr>
             <a:spLocks noGrp="1"/>
           </p:cNvSpPr>
@@ -1244,7 +1300,7 @@
             <a:pPr rtl="0"/>
             <a:fld id="{5FB91549-43BF-425A-AF25-75262019208C}" type="slidenum">
               <a:rPr lang="en-US" altLang="ko-KR" smtClean="0"/>
-              <a:t>15</a:t>
+              <a:t>14</a:t>
             </a:fld>
             <a:endParaRPr lang="ko-KR" altLang="en-US" dirty="0"/>
           </a:p>
@@ -1253,7 +1309,7 @@
     </p:spTree>
     <p:extLst>
       <p:ext uri="{BB962C8B-B14F-4D97-AF65-F5344CB8AC3E}">
-        <p14:creationId xmlns:p14="http://schemas.microsoft.com/office/powerpoint/2010/main" val="3202627251"/>
+        <p14:creationId xmlns:p14="http://schemas.microsoft.com/office/powerpoint/2010/main" val="3706159502"/>
       </p:ext>
     </p:extLst>
   </p:cSld>
@@ -1329,7 +1385,7 @@
             <a:pPr rtl="0"/>
             <a:fld id="{5FB91549-43BF-425A-AF25-75262019208C}" type="slidenum">
               <a:rPr lang="en-US" altLang="ko-KR" smtClean="0"/>
-              <a:t>16</a:t>
+              <a:t>15</a:t>
             </a:fld>
             <a:endParaRPr lang="ko-KR" altLang="en-US" dirty="0"/>
           </a:p>
@@ -1338,7 +1394,7 @@
     </p:spTree>
     <p:extLst>
       <p:ext uri="{BB962C8B-B14F-4D97-AF65-F5344CB8AC3E}">
-        <p14:creationId xmlns:p14="http://schemas.microsoft.com/office/powerpoint/2010/main" val="3009003689"/>
+        <p14:creationId xmlns:p14="http://schemas.microsoft.com/office/powerpoint/2010/main" val="1060011471"/>
       </p:ext>
     </p:extLst>
   </p:cSld>
@@ -1414,7 +1470,7 @@
             <a:pPr rtl="0"/>
             <a:fld id="{5FB91549-43BF-425A-AF25-75262019208C}" type="slidenum">
               <a:rPr lang="en-US" altLang="ko-KR" smtClean="0"/>
-              <a:t>17</a:t>
+              <a:t>16</a:t>
             </a:fld>
             <a:endParaRPr lang="ko-KR" altLang="en-US" dirty="0"/>
           </a:p>
@@ -1423,7 +1479,7 @@
     </p:spTree>
     <p:extLst>
       <p:ext uri="{BB962C8B-B14F-4D97-AF65-F5344CB8AC3E}">
-        <p14:creationId xmlns:p14="http://schemas.microsoft.com/office/powerpoint/2010/main" val="1952608349"/>
+        <p14:creationId xmlns:p14="http://schemas.microsoft.com/office/powerpoint/2010/main" val="4043882338"/>
       </p:ext>
     </p:extLst>
   </p:cSld>
@@ -1438,7 +1494,13 @@
   <p:cSld>
     <p:spTree>
       <p:nvGrpSpPr>
-        <p:cNvPr id="1" name=""/>
+        <p:cNvPr id="1" name="">
+          <a:extLst>
+            <a:ext uri="{FF2B5EF4-FFF2-40B4-BE49-F238E27FC236}">
+              <a16:creationId xmlns:a16="http://schemas.microsoft.com/office/drawing/2014/main" id="{48E11AD0-4C3D-624F-60D5-D6B10979AFDE}"/>
+            </a:ext>
+          </a:extLst>
+        </p:cNvPr>
         <p:cNvGrpSpPr/>
         <p:nvPr/>
       </p:nvGrpSpPr>
@@ -1452,7 +1514,13 @@
       </p:grpSpPr>
       <p:sp>
         <p:nvSpPr>
-          <p:cNvPr id="2" name="슬라이드 이미지 개체 틀 1"/>
+          <p:cNvPr id="2" name="슬라이드 이미지 개체 틀 1">
+            <a:extLst>
+              <a:ext uri="{FF2B5EF4-FFF2-40B4-BE49-F238E27FC236}">
+                <a16:creationId xmlns:a16="http://schemas.microsoft.com/office/drawing/2014/main" id="{C92E39F4-6A0C-4A9C-8B5C-ABADDEE59DFD}"/>
+              </a:ext>
+            </a:extLst>
+          </p:cNvPr>
           <p:cNvSpPr>
             <a:spLocks noGrp="1" noRot="1" noChangeAspect="1"/>
           </p:cNvSpPr>
@@ -1464,7 +1532,13 @@
       </p:sp>
       <p:sp>
         <p:nvSpPr>
-          <p:cNvPr id="3" name="슬라이드 노트 개체 틀 2"/>
+          <p:cNvPr id="3" name="슬라이드 노트 개체 틀 2">
+            <a:extLst>
+              <a:ext uri="{FF2B5EF4-FFF2-40B4-BE49-F238E27FC236}">
+                <a16:creationId xmlns:a16="http://schemas.microsoft.com/office/drawing/2014/main" id="{CC6EE43D-9CFD-3468-D78B-FF731CBFE365}"/>
+              </a:ext>
+            </a:extLst>
+          </p:cNvPr>
           <p:cNvSpPr>
             <a:spLocks noGrp="1"/>
           </p:cNvSpPr>
@@ -1483,7 +1557,13 @@
       </p:sp>
       <p:sp>
         <p:nvSpPr>
-          <p:cNvPr id="4" name="슬라이드 번호 개체 틀 3"/>
+          <p:cNvPr id="4" name="슬라이드 번호 개체 틀 3">
+            <a:extLst>
+              <a:ext uri="{FF2B5EF4-FFF2-40B4-BE49-F238E27FC236}">
+                <a16:creationId xmlns:a16="http://schemas.microsoft.com/office/drawing/2014/main" id="{B00231CF-5B5C-C65B-77E3-2B290203E180}"/>
+              </a:ext>
+            </a:extLst>
+          </p:cNvPr>
           <p:cNvSpPr>
             <a:spLocks noGrp="1"/>
           </p:cNvSpPr>
@@ -1499,7 +1579,7 @@
             <a:pPr rtl="0"/>
             <a:fld id="{5FB91549-43BF-425A-AF25-75262019208C}" type="slidenum">
               <a:rPr lang="en-US" altLang="ko-KR" smtClean="0"/>
-              <a:t>18</a:t>
+              <a:t>17</a:t>
             </a:fld>
             <a:endParaRPr lang="ko-KR" altLang="en-US" dirty="0"/>
           </a:p>
@@ -1508,7 +1588,7 @@
     </p:spTree>
     <p:extLst>
       <p:ext uri="{BB962C8B-B14F-4D97-AF65-F5344CB8AC3E}">
-        <p14:creationId xmlns:p14="http://schemas.microsoft.com/office/powerpoint/2010/main" val="3730326455"/>
+        <p14:creationId xmlns:p14="http://schemas.microsoft.com/office/powerpoint/2010/main" val="2763135010"/>
       </p:ext>
     </p:extLst>
   </p:cSld>
@@ -1523,7 +1603,13 @@
   <p:cSld>
     <p:spTree>
       <p:nvGrpSpPr>
-        <p:cNvPr id="1" name=""/>
+        <p:cNvPr id="1" name="">
+          <a:extLst>
+            <a:ext uri="{FF2B5EF4-FFF2-40B4-BE49-F238E27FC236}">
+              <a16:creationId xmlns:a16="http://schemas.microsoft.com/office/drawing/2014/main" id="{B0B7DACE-676E-EE7D-4489-0639BF654EEA}"/>
+            </a:ext>
+          </a:extLst>
+        </p:cNvPr>
         <p:cNvGrpSpPr/>
         <p:nvPr/>
       </p:nvGrpSpPr>
@@ -1537,7 +1623,13 @@
       </p:grpSpPr>
       <p:sp>
         <p:nvSpPr>
-          <p:cNvPr id="2" name="슬라이드 이미지 개체 틀 1"/>
+          <p:cNvPr id="2" name="슬라이드 이미지 개체 틀 1">
+            <a:extLst>
+              <a:ext uri="{FF2B5EF4-FFF2-40B4-BE49-F238E27FC236}">
+                <a16:creationId xmlns:a16="http://schemas.microsoft.com/office/drawing/2014/main" id="{95970EBA-85AC-C86A-802E-95C40DF114E7}"/>
+              </a:ext>
+            </a:extLst>
+          </p:cNvPr>
           <p:cNvSpPr>
             <a:spLocks noGrp="1" noRot="1" noChangeAspect="1"/>
           </p:cNvSpPr>
@@ -1549,7 +1641,13 @@
       </p:sp>
       <p:sp>
         <p:nvSpPr>
-          <p:cNvPr id="3" name="슬라이드 노트 개체 틀 2"/>
+          <p:cNvPr id="3" name="슬라이드 노트 개체 틀 2">
+            <a:extLst>
+              <a:ext uri="{FF2B5EF4-FFF2-40B4-BE49-F238E27FC236}">
+                <a16:creationId xmlns:a16="http://schemas.microsoft.com/office/drawing/2014/main" id="{0EF62820-CC7D-57C3-8FFF-E03C09D0E3E7}"/>
+              </a:ext>
+            </a:extLst>
+          </p:cNvPr>
           <p:cNvSpPr>
             <a:spLocks noGrp="1"/>
           </p:cNvSpPr>
@@ -1568,7 +1666,13 @@
       </p:sp>
       <p:sp>
         <p:nvSpPr>
-          <p:cNvPr id="4" name="슬라이드 번호 개체 틀 3"/>
+          <p:cNvPr id="4" name="슬라이드 번호 개체 틀 3">
+            <a:extLst>
+              <a:ext uri="{FF2B5EF4-FFF2-40B4-BE49-F238E27FC236}">
+                <a16:creationId xmlns:a16="http://schemas.microsoft.com/office/drawing/2014/main" id="{BB4FAD6A-CE9A-4DC2-EC6C-6C654F6B0975}"/>
+              </a:ext>
+            </a:extLst>
+          </p:cNvPr>
           <p:cNvSpPr>
             <a:spLocks noGrp="1"/>
           </p:cNvSpPr>
@@ -1593,7 +1697,7 @@
     </p:spTree>
     <p:extLst>
       <p:ext uri="{BB962C8B-B14F-4D97-AF65-F5344CB8AC3E}">
-        <p14:creationId xmlns:p14="http://schemas.microsoft.com/office/powerpoint/2010/main" val="1068008489"/>
+        <p14:creationId xmlns:p14="http://schemas.microsoft.com/office/powerpoint/2010/main" val="1144858924"/>
       </p:ext>
     </p:extLst>
   </p:cSld>
@@ -1678,7 +1782,7 @@
     </p:spTree>
     <p:extLst>
       <p:ext uri="{BB962C8B-B14F-4D97-AF65-F5344CB8AC3E}">
-        <p14:creationId xmlns:p14="http://schemas.microsoft.com/office/powerpoint/2010/main" val="2800487701"/>
+        <p14:creationId xmlns:p14="http://schemas.microsoft.com/office/powerpoint/2010/main" val="2662501191"/>
       </p:ext>
     </p:extLst>
   </p:cSld>
@@ -1848,7 +1952,7 @@
     </p:spTree>
     <p:extLst>
       <p:ext uri="{BB962C8B-B14F-4D97-AF65-F5344CB8AC3E}">
-        <p14:creationId xmlns:p14="http://schemas.microsoft.com/office/powerpoint/2010/main" val="1460944233"/>
+        <p14:creationId xmlns:p14="http://schemas.microsoft.com/office/powerpoint/2010/main" val="3202627251"/>
       </p:ext>
     </p:extLst>
   </p:cSld>
@@ -1863,13 +1967,7 @@
   <p:cSld>
     <p:spTree>
       <p:nvGrpSpPr>
-        <p:cNvPr id="1" name="">
-          <a:extLst>
-            <a:ext uri="{FF2B5EF4-FFF2-40B4-BE49-F238E27FC236}">
-              <a16:creationId xmlns:a16="http://schemas.microsoft.com/office/drawing/2014/main" id="{E1987794-7F4C-FBBC-7428-7C4A74582B53}"/>
-            </a:ext>
-          </a:extLst>
-        </p:cNvPr>
+        <p:cNvPr id="1" name=""/>
         <p:cNvGrpSpPr/>
         <p:nvPr/>
       </p:nvGrpSpPr>
@@ -1883,13 +1981,7 @@
       </p:grpSpPr>
       <p:sp>
         <p:nvSpPr>
-          <p:cNvPr id="2" name="슬라이드 이미지 개체 틀 1">
-            <a:extLst>
-              <a:ext uri="{FF2B5EF4-FFF2-40B4-BE49-F238E27FC236}">
-                <a16:creationId xmlns:a16="http://schemas.microsoft.com/office/drawing/2014/main" id="{16A9AF46-C1E7-9C2F-5BD3-50E4E5C762E3}"/>
-              </a:ext>
-            </a:extLst>
-          </p:cNvPr>
+          <p:cNvPr id="2" name="슬라이드 이미지 개체 틀 1"/>
           <p:cNvSpPr>
             <a:spLocks noGrp="1" noRot="1" noChangeAspect="1"/>
           </p:cNvSpPr>
@@ -1901,13 +1993,7 @@
       </p:sp>
       <p:sp>
         <p:nvSpPr>
-          <p:cNvPr id="3" name="슬라이드 노트 개체 틀 2">
-            <a:extLst>
-              <a:ext uri="{FF2B5EF4-FFF2-40B4-BE49-F238E27FC236}">
-                <a16:creationId xmlns:a16="http://schemas.microsoft.com/office/drawing/2014/main" id="{4AE690E3-75E4-E1B2-ED5A-033983FA577A}"/>
-              </a:ext>
-            </a:extLst>
-          </p:cNvPr>
+          <p:cNvPr id="3" name="슬라이드 노트 개체 틀 2"/>
           <p:cNvSpPr>
             <a:spLocks noGrp="1"/>
           </p:cNvSpPr>
@@ -1926,13 +2012,7 @@
       </p:sp>
       <p:sp>
         <p:nvSpPr>
-          <p:cNvPr id="4" name="슬라이드 번호 개체 틀 3">
-            <a:extLst>
-              <a:ext uri="{FF2B5EF4-FFF2-40B4-BE49-F238E27FC236}">
-                <a16:creationId xmlns:a16="http://schemas.microsoft.com/office/drawing/2014/main" id="{A9C442F9-0B07-43B1-2110-481AFC032759}"/>
-              </a:ext>
-            </a:extLst>
-          </p:cNvPr>
+          <p:cNvPr id="4" name="슬라이드 번호 개체 틀 3"/>
           <p:cNvSpPr>
             <a:spLocks noGrp="1"/>
           </p:cNvSpPr>
@@ -1957,7 +2037,7 @@
     </p:spTree>
     <p:extLst>
       <p:ext uri="{BB962C8B-B14F-4D97-AF65-F5344CB8AC3E}">
-        <p14:creationId xmlns:p14="http://schemas.microsoft.com/office/powerpoint/2010/main" val="3693412520"/>
+        <p14:creationId xmlns:p14="http://schemas.microsoft.com/office/powerpoint/2010/main" val="3009003689"/>
       </p:ext>
     </p:extLst>
   </p:cSld>
@@ -2042,7 +2122,7 @@
     </p:spTree>
     <p:extLst>
       <p:ext uri="{BB962C8B-B14F-4D97-AF65-F5344CB8AC3E}">
-        <p14:creationId xmlns:p14="http://schemas.microsoft.com/office/powerpoint/2010/main" val="1676481021"/>
+        <p14:creationId xmlns:p14="http://schemas.microsoft.com/office/powerpoint/2010/main" val="1952608349"/>
       </p:ext>
     </p:extLst>
   </p:cSld>
@@ -2127,7 +2207,7 @@
     </p:spTree>
     <p:extLst>
       <p:ext uri="{BB962C8B-B14F-4D97-AF65-F5344CB8AC3E}">
-        <p14:creationId xmlns:p14="http://schemas.microsoft.com/office/powerpoint/2010/main" val="1911418281"/>
+        <p14:creationId xmlns:p14="http://schemas.microsoft.com/office/powerpoint/2010/main" val="3730326455"/>
       </p:ext>
     </p:extLst>
   </p:cSld>
@@ -2212,7 +2292,7 @@
     </p:spTree>
     <p:extLst>
       <p:ext uri="{BB962C8B-B14F-4D97-AF65-F5344CB8AC3E}">
-        <p14:creationId xmlns:p14="http://schemas.microsoft.com/office/powerpoint/2010/main" val="1161407819"/>
+        <p14:creationId xmlns:p14="http://schemas.microsoft.com/office/powerpoint/2010/main" val="1068008489"/>
       </p:ext>
     </p:extLst>
   </p:cSld>
@@ -2297,7 +2377,7 @@
     </p:spTree>
     <p:extLst>
       <p:ext uri="{BB962C8B-B14F-4D97-AF65-F5344CB8AC3E}">
-        <p14:creationId xmlns:p14="http://schemas.microsoft.com/office/powerpoint/2010/main" val="2169422644"/>
+        <p14:creationId xmlns:p14="http://schemas.microsoft.com/office/powerpoint/2010/main" val="2800487701"/>
       </p:ext>
     </p:extLst>
   </p:cSld>
@@ -2382,7 +2462,7 @@
     </p:spTree>
     <p:extLst>
       <p:ext uri="{BB962C8B-B14F-4D97-AF65-F5344CB8AC3E}">
-        <p14:creationId xmlns:p14="http://schemas.microsoft.com/office/powerpoint/2010/main" val="691486688"/>
+        <p14:creationId xmlns:p14="http://schemas.microsoft.com/office/powerpoint/2010/main" val="1460944233"/>
       </p:ext>
     </p:extLst>
   </p:cSld>
@@ -2397,7 +2477,13 @@
   <p:cSld>
     <p:spTree>
       <p:nvGrpSpPr>
-        <p:cNvPr id="1" name=""/>
+        <p:cNvPr id="1" name="">
+          <a:extLst>
+            <a:ext uri="{FF2B5EF4-FFF2-40B4-BE49-F238E27FC236}">
+              <a16:creationId xmlns:a16="http://schemas.microsoft.com/office/drawing/2014/main" id="{E1987794-7F4C-FBBC-7428-7C4A74582B53}"/>
+            </a:ext>
+          </a:extLst>
+        </p:cNvPr>
         <p:cNvGrpSpPr/>
         <p:nvPr/>
       </p:nvGrpSpPr>
@@ -2411,7 +2497,13 @@
       </p:grpSpPr>
       <p:sp>
         <p:nvSpPr>
-          <p:cNvPr id="2" name="슬라이드 이미지 개체 틀 1"/>
+          <p:cNvPr id="2" name="슬라이드 이미지 개체 틀 1">
+            <a:extLst>
+              <a:ext uri="{FF2B5EF4-FFF2-40B4-BE49-F238E27FC236}">
+                <a16:creationId xmlns:a16="http://schemas.microsoft.com/office/drawing/2014/main" id="{16A9AF46-C1E7-9C2F-5BD3-50E4E5C762E3}"/>
+              </a:ext>
+            </a:extLst>
+          </p:cNvPr>
           <p:cNvSpPr>
             <a:spLocks noGrp="1" noRot="1" noChangeAspect="1"/>
           </p:cNvSpPr>
@@ -2423,7 +2515,13 @@
       </p:sp>
       <p:sp>
         <p:nvSpPr>
-          <p:cNvPr id="3" name="슬라이드 노트 개체 틀 2"/>
+          <p:cNvPr id="3" name="슬라이드 노트 개체 틀 2">
+            <a:extLst>
+              <a:ext uri="{FF2B5EF4-FFF2-40B4-BE49-F238E27FC236}">
+                <a16:creationId xmlns:a16="http://schemas.microsoft.com/office/drawing/2014/main" id="{4AE690E3-75E4-E1B2-ED5A-033983FA577A}"/>
+              </a:ext>
+            </a:extLst>
+          </p:cNvPr>
           <p:cNvSpPr>
             <a:spLocks noGrp="1"/>
           </p:cNvSpPr>
@@ -2442,7 +2540,13 @@
       </p:sp>
       <p:sp>
         <p:nvSpPr>
-          <p:cNvPr id="4" name="슬라이드 번호 개체 틀 3"/>
+          <p:cNvPr id="4" name="슬라이드 번호 개체 틀 3">
+            <a:extLst>
+              <a:ext uri="{FF2B5EF4-FFF2-40B4-BE49-F238E27FC236}">
+                <a16:creationId xmlns:a16="http://schemas.microsoft.com/office/drawing/2014/main" id="{A9C442F9-0B07-43B1-2110-481AFC032759}"/>
+              </a:ext>
+            </a:extLst>
+          </p:cNvPr>
           <p:cNvSpPr>
             <a:spLocks noGrp="1"/>
           </p:cNvSpPr>
@@ -2467,7 +2571,7 @@
     </p:spTree>
     <p:extLst>
       <p:ext uri="{BB962C8B-B14F-4D97-AF65-F5344CB8AC3E}">
-        <p14:creationId xmlns:p14="http://schemas.microsoft.com/office/powerpoint/2010/main" val="818649102"/>
+        <p14:creationId xmlns:p14="http://schemas.microsoft.com/office/powerpoint/2010/main" val="3693412520"/>
       </p:ext>
     </p:extLst>
   </p:cSld>
@@ -2552,7 +2656,7 @@
     </p:spTree>
     <p:extLst>
       <p:ext uri="{BB962C8B-B14F-4D97-AF65-F5344CB8AC3E}">
-        <p14:creationId xmlns:p14="http://schemas.microsoft.com/office/powerpoint/2010/main" val="3264954647"/>
+        <p14:creationId xmlns:p14="http://schemas.microsoft.com/office/powerpoint/2010/main" val="1676481021"/>
       </p:ext>
     </p:extLst>
   </p:cSld>
@@ -2637,7 +2741,7 @@
     </p:spTree>
     <p:extLst>
       <p:ext uri="{BB962C8B-B14F-4D97-AF65-F5344CB8AC3E}">
-        <p14:creationId xmlns:p14="http://schemas.microsoft.com/office/powerpoint/2010/main" val="3825577867"/>
+        <p14:creationId xmlns:p14="http://schemas.microsoft.com/office/powerpoint/2010/main" val="1911418281"/>
       </p:ext>
     </p:extLst>
   </p:cSld>
@@ -2652,7 +2756,13 @@
   <p:cSld>
     <p:spTree>
       <p:nvGrpSpPr>
-        <p:cNvPr id="1" name=""/>
+        <p:cNvPr id="1" name="">
+          <a:extLst>
+            <a:ext uri="{FF2B5EF4-FFF2-40B4-BE49-F238E27FC236}">
+              <a16:creationId xmlns:a16="http://schemas.microsoft.com/office/drawing/2014/main" id="{290C8F37-DCD9-3001-E354-B3A6D1C1CD83}"/>
+            </a:ext>
+          </a:extLst>
+        </p:cNvPr>
         <p:cNvGrpSpPr/>
         <p:nvPr/>
       </p:nvGrpSpPr>
@@ -2666,7 +2776,13 @@
       </p:grpSpPr>
       <p:sp>
         <p:nvSpPr>
-          <p:cNvPr id="2" name="슬라이드 이미지 개체 틀 1"/>
+          <p:cNvPr id="2" name="슬라이드 이미지 개체 틀 1">
+            <a:extLst>
+              <a:ext uri="{FF2B5EF4-FFF2-40B4-BE49-F238E27FC236}">
+                <a16:creationId xmlns:a16="http://schemas.microsoft.com/office/drawing/2014/main" id="{036D4E07-A396-E1F7-0919-72AF00F19233}"/>
+              </a:ext>
+            </a:extLst>
+          </p:cNvPr>
           <p:cNvSpPr>
             <a:spLocks noGrp="1" noRot="1" noChangeAspect="1"/>
           </p:cNvSpPr>
@@ -2678,7 +2794,13 @@
       </p:sp>
       <p:sp>
         <p:nvSpPr>
-          <p:cNvPr id="3" name="슬라이드 노트 개체 틀 2"/>
+          <p:cNvPr id="3" name="슬라이드 노트 개체 틀 2">
+            <a:extLst>
+              <a:ext uri="{FF2B5EF4-FFF2-40B4-BE49-F238E27FC236}">
+                <a16:creationId xmlns:a16="http://schemas.microsoft.com/office/drawing/2014/main" id="{8C8E06E1-13C1-3C32-46CB-92506A498BD4}"/>
+              </a:ext>
+            </a:extLst>
+          </p:cNvPr>
           <p:cNvSpPr>
             <a:spLocks noGrp="1"/>
           </p:cNvSpPr>
@@ -2697,7 +2819,13 @@
       </p:sp>
       <p:sp>
         <p:nvSpPr>
-          <p:cNvPr id="4" name="슬라이드 번호 개체 틀 3"/>
+          <p:cNvPr id="4" name="슬라이드 번호 개체 틀 3">
+            <a:extLst>
+              <a:ext uri="{FF2B5EF4-FFF2-40B4-BE49-F238E27FC236}">
+                <a16:creationId xmlns:a16="http://schemas.microsoft.com/office/drawing/2014/main" id="{7B1BFDC5-8668-119F-E940-FF2F60314DD8}"/>
+              </a:ext>
+            </a:extLst>
+          </p:cNvPr>
           <p:cNvSpPr>
             <a:spLocks noGrp="1"/>
           </p:cNvSpPr>
@@ -2722,7 +2850,7 @@
     </p:spTree>
     <p:extLst>
       <p:ext uri="{BB962C8B-B14F-4D97-AF65-F5344CB8AC3E}">
-        <p14:creationId xmlns:p14="http://schemas.microsoft.com/office/powerpoint/2010/main" val="2950374360"/>
+        <p14:creationId xmlns:p14="http://schemas.microsoft.com/office/powerpoint/2010/main" val="1187571306"/>
       </p:ext>
     </p:extLst>
   </p:cSld>
@@ -2807,7 +2935,7 @@
     </p:spTree>
     <p:extLst>
       <p:ext uri="{BB962C8B-B14F-4D97-AF65-F5344CB8AC3E}">
-        <p14:creationId xmlns:p14="http://schemas.microsoft.com/office/powerpoint/2010/main" val="3388233507"/>
+        <p14:creationId xmlns:p14="http://schemas.microsoft.com/office/powerpoint/2010/main" val="1161407819"/>
       </p:ext>
     </p:extLst>
   </p:cSld>
@@ -2892,7 +3020,7 @@
     </p:spTree>
     <p:extLst>
       <p:ext uri="{BB962C8B-B14F-4D97-AF65-F5344CB8AC3E}">
-        <p14:creationId xmlns:p14="http://schemas.microsoft.com/office/powerpoint/2010/main" val="1326431871"/>
+        <p14:creationId xmlns:p14="http://schemas.microsoft.com/office/powerpoint/2010/main" val="2169422644"/>
       </p:ext>
     </p:extLst>
   </p:cSld>
@@ -2977,7 +3105,7 @@
     </p:spTree>
     <p:extLst>
       <p:ext uri="{BB962C8B-B14F-4D97-AF65-F5344CB8AC3E}">
-        <p14:creationId xmlns:p14="http://schemas.microsoft.com/office/powerpoint/2010/main" val="1277359177"/>
+        <p14:creationId xmlns:p14="http://schemas.microsoft.com/office/powerpoint/2010/main" val="691486688"/>
       </p:ext>
     </p:extLst>
   </p:cSld>
@@ -3062,7 +3190,7 @@
     </p:spTree>
     <p:extLst>
       <p:ext uri="{BB962C8B-B14F-4D97-AF65-F5344CB8AC3E}">
-        <p14:creationId xmlns:p14="http://schemas.microsoft.com/office/powerpoint/2010/main" val="3893411825"/>
+        <p14:creationId xmlns:p14="http://schemas.microsoft.com/office/powerpoint/2010/main" val="818649102"/>
       </p:ext>
     </p:extLst>
   </p:cSld>
@@ -3072,7 +3200,116 @@
 </p:notes>
 </file>
 
-<file path=ppt/notesSlides/notesSlide4.xml><?xml version="1.0" encoding="utf-8"?>
+<file path=ppt/notesSlides/notesSlide34.xml><?xml version="1.0" encoding="utf-8"?>
+<p:notes xmlns:a="http://schemas.openxmlformats.org/drawingml/2006/main" xmlns:r="http://schemas.openxmlformats.org/officeDocument/2006/relationships" xmlns:p="http://schemas.openxmlformats.org/presentationml/2006/main">
+  <p:cSld>
+    <p:spTree>
+      <p:nvGrpSpPr>
+        <p:cNvPr id="1" name="">
+          <a:extLst>
+            <a:ext uri="{FF2B5EF4-FFF2-40B4-BE49-F238E27FC236}">
+              <a16:creationId xmlns:a16="http://schemas.microsoft.com/office/drawing/2014/main" id="{2980F7D5-C22A-F6A0-8F4D-A9C4289295C0}"/>
+            </a:ext>
+          </a:extLst>
+        </p:cNvPr>
+        <p:cNvGrpSpPr/>
+        <p:nvPr/>
+      </p:nvGrpSpPr>
+      <p:grpSpPr>
+        <a:xfrm>
+          <a:off x="0" y="0"/>
+          <a:ext cx="0" cy="0"/>
+          <a:chOff x="0" y="0"/>
+          <a:chExt cx="0" cy="0"/>
+        </a:xfrm>
+      </p:grpSpPr>
+      <p:sp>
+        <p:nvSpPr>
+          <p:cNvPr id="2" name="슬라이드 이미지 개체 틀 1">
+            <a:extLst>
+              <a:ext uri="{FF2B5EF4-FFF2-40B4-BE49-F238E27FC236}">
+                <a16:creationId xmlns:a16="http://schemas.microsoft.com/office/drawing/2014/main" id="{6A6EE3B1-1F6C-7141-239F-D92858EEB806}"/>
+              </a:ext>
+            </a:extLst>
+          </p:cNvPr>
+          <p:cNvSpPr>
+            <a:spLocks noGrp="1" noRot="1" noChangeAspect="1"/>
+          </p:cNvSpPr>
+          <p:nvPr>
+            <p:ph type="sldImg"/>
+          </p:nvPr>
+        </p:nvSpPr>
+        <p:spPr/>
+      </p:sp>
+      <p:sp>
+        <p:nvSpPr>
+          <p:cNvPr id="3" name="슬라이드 노트 개체 틀 2">
+            <a:extLst>
+              <a:ext uri="{FF2B5EF4-FFF2-40B4-BE49-F238E27FC236}">
+                <a16:creationId xmlns:a16="http://schemas.microsoft.com/office/drawing/2014/main" id="{DCDAB149-C659-B05E-E59D-CD0CD014AA4B}"/>
+              </a:ext>
+            </a:extLst>
+          </p:cNvPr>
+          <p:cNvSpPr>
+            <a:spLocks noGrp="1"/>
+          </p:cNvSpPr>
+          <p:nvPr>
+            <p:ph type="body" idx="1"/>
+          </p:nvPr>
+        </p:nvSpPr>
+        <p:spPr/>
+        <p:txBody>
+          <a:bodyPr/>
+          <a:lstStyle/>
+          <a:p>
+            <a:endParaRPr lang="ko-KR" altLang="en-US" dirty="0"/>
+          </a:p>
+        </p:txBody>
+      </p:sp>
+      <p:sp>
+        <p:nvSpPr>
+          <p:cNvPr id="4" name="슬라이드 번호 개체 틀 3">
+            <a:extLst>
+              <a:ext uri="{FF2B5EF4-FFF2-40B4-BE49-F238E27FC236}">
+                <a16:creationId xmlns:a16="http://schemas.microsoft.com/office/drawing/2014/main" id="{8F92CF23-145C-6645-6053-9BE8686C7F48}"/>
+              </a:ext>
+            </a:extLst>
+          </p:cNvPr>
+          <p:cNvSpPr>
+            <a:spLocks noGrp="1"/>
+          </p:cNvSpPr>
+          <p:nvPr>
+            <p:ph type="sldNum" sz="quarter" idx="10"/>
+          </p:nvPr>
+        </p:nvSpPr>
+        <p:spPr/>
+        <p:txBody>
+          <a:bodyPr/>
+          <a:lstStyle/>
+          <a:p>
+            <a:pPr rtl="0"/>
+            <a:fld id="{5FB91549-43BF-425A-AF25-75262019208C}" type="slidenum">
+              <a:rPr lang="en-US" altLang="ko-KR" smtClean="0"/>
+              <a:t>35</a:t>
+            </a:fld>
+            <a:endParaRPr lang="ko-KR" altLang="en-US" dirty="0"/>
+          </a:p>
+        </p:txBody>
+      </p:sp>
+    </p:spTree>
+    <p:extLst>
+      <p:ext uri="{BB962C8B-B14F-4D97-AF65-F5344CB8AC3E}">
+        <p14:creationId xmlns:p14="http://schemas.microsoft.com/office/powerpoint/2010/main" val="1872387892"/>
+      </p:ext>
+    </p:extLst>
+  </p:cSld>
+  <p:clrMapOvr>
+    <a:masterClrMapping/>
+  </p:clrMapOvr>
+</p:notes>
+</file>
+
+<file path=ppt/notesSlides/notesSlide35.xml><?xml version="1.0" encoding="utf-8"?>
 <p:notes xmlns:a="http://schemas.openxmlformats.org/drawingml/2006/main" xmlns:r="http://schemas.openxmlformats.org/officeDocument/2006/relationships" xmlns:p="http://schemas.openxmlformats.org/presentationml/2006/main">
   <p:cSld>
     <p:spTree>
@@ -3138,7 +3375,7 @@
             <a:pPr rtl="0"/>
             <a:fld id="{5FB91549-43BF-425A-AF25-75262019208C}" type="slidenum">
               <a:rPr lang="en-US" altLang="ko-KR" smtClean="0"/>
-              <a:t>4</a:t>
+              <a:t>36</a:t>
             </a:fld>
             <a:endParaRPr lang="ko-KR" altLang="en-US" dirty="0"/>
           </a:p>
@@ -3147,7 +3384,7 @@
     </p:spTree>
     <p:extLst>
       <p:ext uri="{BB962C8B-B14F-4D97-AF65-F5344CB8AC3E}">
-        <p14:creationId xmlns:p14="http://schemas.microsoft.com/office/powerpoint/2010/main" val="2272406497"/>
+        <p14:creationId xmlns:p14="http://schemas.microsoft.com/office/powerpoint/2010/main" val="3264954647"/>
       </p:ext>
     </p:extLst>
   </p:cSld>
@@ -3157,7 +3394,7 @@
 </p:notes>
 </file>
 
-<file path=ppt/notesSlides/notesSlide5.xml><?xml version="1.0" encoding="utf-8"?>
+<file path=ppt/notesSlides/notesSlide36.xml><?xml version="1.0" encoding="utf-8"?>
 <p:notes xmlns:a="http://schemas.openxmlformats.org/drawingml/2006/main" xmlns:r="http://schemas.openxmlformats.org/officeDocument/2006/relationships" xmlns:p="http://schemas.openxmlformats.org/presentationml/2006/main">
   <p:cSld>
     <p:spTree>
@@ -3223,6 +3460,673 @@
             <a:pPr rtl="0"/>
             <a:fld id="{5FB91549-43BF-425A-AF25-75262019208C}" type="slidenum">
               <a:rPr lang="en-US" altLang="ko-KR" smtClean="0"/>
+              <a:t>37</a:t>
+            </a:fld>
+            <a:endParaRPr lang="ko-KR" altLang="en-US" dirty="0"/>
+          </a:p>
+        </p:txBody>
+      </p:sp>
+    </p:spTree>
+    <p:extLst>
+      <p:ext uri="{BB962C8B-B14F-4D97-AF65-F5344CB8AC3E}">
+        <p14:creationId xmlns:p14="http://schemas.microsoft.com/office/powerpoint/2010/main" val="3825577867"/>
+      </p:ext>
+    </p:extLst>
+  </p:cSld>
+  <p:clrMapOvr>
+    <a:masterClrMapping/>
+  </p:clrMapOvr>
+</p:notes>
+</file>
+
+<file path=ppt/notesSlides/notesSlide37.xml><?xml version="1.0" encoding="utf-8"?>
+<p:notes xmlns:a="http://schemas.openxmlformats.org/drawingml/2006/main" xmlns:r="http://schemas.openxmlformats.org/officeDocument/2006/relationships" xmlns:p="http://schemas.openxmlformats.org/presentationml/2006/main">
+  <p:cSld>
+    <p:spTree>
+      <p:nvGrpSpPr>
+        <p:cNvPr id="1" name=""/>
+        <p:cNvGrpSpPr/>
+        <p:nvPr/>
+      </p:nvGrpSpPr>
+      <p:grpSpPr>
+        <a:xfrm>
+          <a:off x="0" y="0"/>
+          <a:ext cx="0" cy="0"/>
+          <a:chOff x="0" y="0"/>
+          <a:chExt cx="0" cy="0"/>
+        </a:xfrm>
+      </p:grpSpPr>
+      <p:sp>
+        <p:nvSpPr>
+          <p:cNvPr id="2" name="슬라이드 이미지 개체 틀 1"/>
+          <p:cNvSpPr>
+            <a:spLocks noGrp="1" noRot="1" noChangeAspect="1"/>
+          </p:cNvSpPr>
+          <p:nvPr>
+            <p:ph type="sldImg"/>
+          </p:nvPr>
+        </p:nvSpPr>
+        <p:spPr/>
+      </p:sp>
+      <p:sp>
+        <p:nvSpPr>
+          <p:cNvPr id="3" name="슬라이드 노트 개체 틀 2"/>
+          <p:cNvSpPr>
+            <a:spLocks noGrp="1"/>
+          </p:cNvSpPr>
+          <p:nvPr>
+            <p:ph type="body" idx="1"/>
+          </p:nvPr>
+        </p:nvSpPr>
+        <p:spPr/>
+        <p:txBody>
+          <a:bodyPr/>
+          <a:lstStyle/>
+          <a:p>
+            <a:endParaRPr lang="ko-KR" altLang="en-US" dirty="0"/>
+          </a:p>
+        </p:txBody>
+      </p:sp>
+      <p:sp>
+        <p:nvSpPr>
+          <p:cNvPr id="4" name="슬라이드 번호 개체 틀 3"/>
+          <p:cNvSpPr>
+            <a:spLocks noGrp="1"/>
+          </p:cNvSpPr>
+          <p:nvPr>
+            <p:ph type="sldNum" sz="quarter" idx="10"/>
+          </p:nvPr>
+        </p:nvSpPr>
+        <p:spPr/>
+        <p:txBody>
+          <a:bodyPr/>
+          <a:lstStyle/>
+          <a:p>
+            <a:pPr rtl="0"/>
+            <a:fld id="{5FB91549-43BF-425A-AF25-75262019208C}" type="slidenum">
+              <a:rPr lang="en-US" altLang="ko-KR" smtClean="0"/>
+              <a:t>38</a:t>
+            </a:fld>
+            <a:endParaRPr lang="ko-KR" altLang="en-US" dirty="0"/>
+          </a:p>
+        </p:txBody>
+      </p:sp>
+    </p:spTree>
+    <p:extLst>
+      <p:ext uri="{BB962C8B-B14F-4D97-AF65-F5344CB8AC3E}">
+        <p14:creationId xmlns:p14="http://schemas.microsoft.com/office/powerpoint/2010/main" val="3388233507"/>
+      </p:ext>
+    </p:extLst>
+  </p:cSld>
+  <p:clrMapOvr>
+    <a:masterClrMapping/>
+  </p:clrMapOvr>
+</p:notes>
+</file>
+
+<file path=ppt/notesSlides/notesSlide38.xml><?xml version="1.0" encoding="utf-8"?>
+<p:notes xmlns:a="http://schemas.openxmlformats.org/drawingml/2006/main" xmlns:r="http://schemas.openxmlformats.org/officeDocument/2006/relationships" xmlns:p="http://schemas.openxmlformats.org/presentationml/2006/main">
+  <p:cSld>
+    <p:spTree>
+      <p:nvGrpSpPr>
+        <p:cNvPr id="1" name=""/>
+        <p:cNvGrpSpPr/>
+        <p:nvPr/>
+      </p:nvGrpSpPr>
+      <p:grpSpPr>
+        <a:xfrm>
+          <a:off x="0" y="0"/>
+          <a:ext cx="0" cy="0"/>
+          <a:chOff x="0" y="0"/>
+          <a:chExt cx="0" cy="0"/>
+        </a:xfrm>
+      </p:grpSpPr>
+      <p:sp>
+        <p:nvSpPr>
+          <p:cNvPr id="2" name="슬라이드 이미지 개체 틀 1"/>
+          <p:cNvSpPr>
+            <a:spLocks noGrp="1" noRot="1" noChangeAspect="1"/>
+          </p:cNvSpPr>
+          <p:nvPr>
+            <p:ph type="sldImg"/>
+          </p:nvPr>
+        </p:nvSpPr>
+        <p:spPr/>
+      </p:sp>
+      <p:sp>
+        <p:nvSpPr>
+          <p:cNvPr id="3" name="슬라이드 노트 개체 틀 2"/>
+          <p:cNvSpPr>
+            <a:spLocks noGrp="1"/>
+          </p:cNvSpPr>
+          <p:nvPr>
+            <p:ph type="body" idx="1"/>
+          </p:nvPr>
+        </p:nvSpPr>
+        <p:spPr/>
+        <p:txBody>
+          <a:bodyPr/>
+          <a:lstStyle/>
+          <a:p>
+            <a:endParaRPr lang="ko-KR" altLang="en-US" dirty="0"/>
+          </a:p>
+        </p:txBody>
+      </p:sp>
+      <p:sp>
+        <p:nvSpPr>
+          <p:cNvPr id="4" name="슬라이드 번호 개체 틀 3"/>
+          <p:cNvSpPr>
+            <a:spLocks noGrp="1"/>
+          </p:cNvSpPr>
+          <p:nvPr>
+            <p:ph type="sldNum" sz="quarter" idx="10"/>
+          </p:nvPr>
+        </p:nvSpPr>
+        <p:spPr/>
+        <p:txBody>
+          <a:bodyPr/>
+          <a:lstStyle/>
+          <a:p>
+            <a:pPr rtl="0"/>
+            <a:fld id="{5FB91549-43BF-425A-AF25-75262019208C}" type="slidenum">
+              <a:rPr lang="en-US" altLang="ko-KR" smtClean="0"/>
+              <a:t>39</a:t>
+            </a:fld>
+            <a:endParaRPr lang="ko-KR" altLang="en-US" dirty="0"/>
+          </a:p>
+        </p:txBody>
+      </p:sp>
+    </p:spTree>
+    <p:extLst>
+      <p:ext uri="{BB962C8B-B14F-4D97-AF65-F5344CB8AC3E}">
+        <p14:creationId xmlns:p14="http://schemas.microsoft.com/office/powerpoint/2010/main" val="1326431871"/>
+      </p:ext>
+    </p:extLst>
+  </p:cSld>
+  <p:clrMapOvr>
+    <a:masterClrMapping/>
+  </p:clrMapOvr>
+</p:notes>
+</file>
+
+<file path=ppt/notesSlides/notesSlide39.xml><?xml version="1.0" encoding="utf-8"?>
+<p:notes xmlns:a="http://schemas.openxmlformats.org/drawingml/2006/main" xmlns:r="http://schemas.openxmlformats.org/officeDocument/2006/relationships" xmlns:p="http://schemas.openxmlformats.org/presentationml/2006/main">
+  <p:cSld>
+    <p:spTree>
+      <p:nvGrpSpPr>
+        <p:cNvPr id="1" name=""/>
+        <p:cNvGrpSpPr/>
+        <p:nvPr/>
+      </p:nvGrpSpPr>
+      <p:grpSpPr>
+        <a:xfrm>
+          <a:off x="0" y="0"/>
+          <a:ext cx="0" cy="0"/>
+          <a:chOff x="0" y="0"/>
+          <a:chExt cx="0" cy="0"/>
+        </a:xfrm>
+      </p:grpSpPr>
+      <p:sp>
+        <p:nvSpPr>
+          <p:cNvPr id="2" name="슬라이드 이미지 개체 틀 1"/>
+          <p:cNvSpPr>
+            <a:spLocks noGrp="1" noRot="1" noChangeAspect="1"/>
+          </p:cNvSpPr>
+          <p:nvPr>
+            <p:ph type="sldImg"/>
+          </p:nvPr>
+        </p:nvSpPr>
+        <p:spPr/>
+      </p:sp>
+      <p:sp>
+        <p:nvSpPr>
+          <p:cNvPr id="3" name="슬라이드 노트 개체 틀 2"/>
+          <p:cNvSpPr>
+            <a:spLocks noGrp="1"/>
+          </p:cNvSpPr>
+          <p:nvPr>
+            <p:ph type="body" idx="1"/>
+          </p:nvPr>
+        </p:nvSpPr>
+        <p:spPr/>
+        <p:txBody>
+          <a:bodyPr/>
+          <a:lstStyle/>
+          <a:p>
+            <a:endParaRPr lang="ko-KR" altLang="en-US" dirty="0"/>
+          </a:p>
+        </p:txBody>
+      </p:sp>
+      <p:sp>
+        <p:nvSpPr>
+          <p:cNvPr id="4" name="슬라이드 번호 개체 틀 3"/>
+          <p:cNvSpPr>
+            <a:spLocks noGrp="1"/>
+          </p:cNvSpPr>
+          <p:nvPr>
+            <p:ph type="sldNum" sz="quarter" idx="10"/>
+          </p:nvPr>
+        </p:nvSpPr>
+        <p:spPr/>
+        <p:txBody>
+          <a:bodyPr/>
+          <a:lstStyle/>
+          <a:p>
+            <a:pPr rtl="0"/>
+            <a:fld id="{5FB91549-43BF-425A-AF25-75262019208C}" type="slidenum">
+              <a:rPr lang="en-US" altLang="ko-KR" smtClean="0"/>
+              <a:t>40</a:t>
+            </a:fld>
+            <a:endParaRPr lang="ko-KR" altLang="en-US" dirty="0"/>
+          </a:p>
+        </p:txBody>
+      </p:sp>
+    </p:spTree>
+    <p:extLst>
+      <p:ext uri="{BB962C8B-B14F-4D97-AF65-F5344CB8AC3E}">
+        <p14:creationId xmlns:p14="http://schemas.microsoft.com/office/powerpoint/2010/main" val="1277359177"/>
+      </p:ext>
+    </p:extLst>
+  </p:cSld>
+  <p:clrMapOvr>
+    <a:masterClrMapping/>
+  </p:clrMapOvr>
+</p:notes>
+</file>
+
+<file path=ppt/notesSlides/notesSlide4.xml><?xml version="1.0" encoding="utf-8"?>
+<p:notes xmlns:a="http://schemas.openxmlformats.org/drawingml/2006/main" xmlns:r="http://schemas.openxmlformats.org/officeDocument/2006/relationships" xmlns:p="http://schemas.openxmlformats.org/presentationml/2006/main">
+  <p:cSld>
+    <p:spTree>
+      <p:nvGrpSpPr>
+        <p:cNvPr id="1" name="">
+          <a:extLst>
+            <a:ext uri="{FF2B5EF4-FFF2-40B4-BE49-F238E27FC236}">
+              <a16:creationId xmlns:a16="http://schemas.microsoft.com/office/drawing/2014/main" id="{82D3B65B-4D46-A4B6-4A55-CF7F725D8967}"/>
+            </a:ext>
+          </a:extLst>
+        </p:cNvPr>
+        <p:cNvGrpSpPr/>
+        <p:nvPr/>
+      </p:nvGrpSpPr>
+      <p:grpSpPr>
+        <a:xfrm>
+          <a:off x="0" y="0"/>
+          <a:ext cx="0" cy="0"/>
+          <a:chOff x="0" y="0"/>
+          <a:chExt cx="0" cy="0"/>
+        </a:xfrm>
+      </p:grpSpPr>
+      <p:sp>
+        <p:nvSpPr>
+          <p:cNvPr id="2" name="슬라이드 이미지 개체 틀 1">
+            <a:extLst>
+              <a:ext uri="{FF2B5EF4-FFF2-40B4-BE49-F238E27FC236}">
+                <a16:creationId xmlns:a16="http://schemas.microsoft.com/office/drawing/2014/main" id="{E2EC8E50-C409-8198-1011-7B049358C5D2}"/>
+              </a:ext>
+            </a:extLst>
+          </p:cNvPr>
+          <p:cNvSpPr>
+            <a:spLocks noGrp="1" noRot="1" noChangeAspect="1"/>
+          </p:cNvSpPr>
+          <p:nvPr>
+            <p:ph type="sldImg"/>
+          </p:nvPr>
+        </p:nvSpPr>
+        <p:spPr/>
+      </p:sp>
+      <p:sp>
+        <p:nvSpPr>
+          <p:cNvPr id="3" name="슬라이드 노트 개체 틀 2">
+            <a:extLst>
+              <a:ext uri="{FF2B5EF4-FFF2-40B4-BE49-F238E27FC236}">
+                <a16:creationId xmlns:a16="http://schemas.microsoft.com/office/drawing/2014/main" id="{8EBC7159-0CFA-4FF6-3C88-1A3B88DBE009}"/>
+              </a:ext>
+            </a:extLst>
+          </p:cNvPr>
+          <p:cNvSpPr>
+            <a:spLocks noGrp="1"/>
+          </p:cNvSpPr>
+          <p:nvPr>
+            <p:ph type="body" idx="1"/>
+          </p:nvPr>
+        </p:nvSpPr>
+        <p:spPr/>
+        <p:txBody>
+          <a:bodyPr/>
+          <a:lstStyle/>
+          <a:p>
+            <a:endParaRPr lang="ko-KR" altLang="en-US" dirty="0"/>
+          </a:p>
+        </p:txBody>
+      </p:sp>
+      <p:sp>
+        <p:nvSpPr>
+          <p:cNvPr id="4" name="슬라이드 번호 개체 틀 3">
+            <a:extLst>
+              <a:ext uri="{FF2B5EF4-FFF2-40B4-BE49-F238E27FC236}">
+                <a16:creationId xmlns:a16="http://schemas.microsoft.com/office/drawing/2014/main" id="{38F161A9-E2C3-ED47-AF62-F9F227017675}"/>
+              </a:ext>
+            </a:extLst>
+          </p:cNvPr>
+          <p:cNvSpPr>
+            <a:spLocks noGrp="1"/>
+          </p:cNvSpPr>
+          <p:nvPr>
+            <p:ph type="sldNum" sz="quarter" idx="10"/>
+          </p:nvPr>
+        </p:nvSpPr>
+        <p:spPr/>
+        <p:txBody>
+          <a:bodyPr/>
+          <a:lstStyle/>
+          <a:p>
+            <a:pPr rtl="0"/>
+            <a:fld id="{5FB91549-43BF-425A-AF25-75262019208C}" type="slidenum">
+              <a:rPr lang="en-US" altLang="ko-KR" smtClean="0"/>
+              <a:t>4</a:t>
+            </a:fld>
+            <a:endParaRPr lang="ko-KR" altLang="en-US" dirty="0"/>
+          </a:p>
+        </p:txBody>
+      </p:sp>
+    </p:spTree>
+    <p:extLst>
+      <p:ext uri="{BB962C8B-B14F-4D97-AF65-F5344CB8AC3E}">
+        <p14:creationId xmlns:p14="http://schemas.microsoft.com/office/powerpoint/2010/main" val="1167275013"/>
+      </p:ext>
+    </p:extLst>
+  </p:cSld>
+  <p:clrMapOvr>
+    <a:masterClrMapping/>
+  </p:clrMapOvr>
+</p:notes>
+</file>
+
+<file path=ppt/notesSlides/notesSlide40.xml><?xml version="1.0" encoding="utf-8"?>
+<p:notes xmlns:a="http://schemas.openxmlformats.org/drawingml/2006/main" xmlns:r="http://schemas.openxmlformats.org/officeDocument/2006/relationships" xmlns:p="http://schemas.openxmlformats.org/presentationml/2006/main">
+  <p:cSld>
+    <p:spTree>
+      <p:nvGrpSpPr>
+        <p:cNvPr id="1" name=""/>
+        <p:cNvGrpSpPr/>
+        <p:nvPr/>
+      </p:nvGrpSpPr>
+      <p:grpSpPr>
+        <a:xfrm>
+          <a:off x="0" y="0"/>
+          <a:ext cx="0" cy="0"/>
+          <a:chOff x="0" y="0"/>
+          <a:chExt cx="0" cy="0"/>
+        </a:xfrm>
+      </p:grpSpPr>
+      <p:sp>
+        <p:nvSpPr>
+          <p:cNvPr id="2" name="슬라이드 이미지 개체 틀 1"/>
+          <p:cNvSpPr>
+            <a:spLocks noGrp="1" noRot="1" noChangeAspect="1"/>
+          </p:cNvSpPr>
+          <p:nvPr>
+            <p:ph type="sldImg"/>
+          </p:nvPr>
+        </p:nvSpPr>
+        <p:spPr/>
+      </p:sp>
+      <p:sp>
+        <p:nvSpPr>
+          <p:cNvPr id="3" name="슬라이드 노트 개체 틀 2"/>
+          <p:cNvSpPr>
+            <a:spLocks noGrp="1"/>
+          </p:cNvSpPr>
+          <p:nvPr>
+            <p:ph type="body" idx="1"/>
+          </p:nvPr>
+        </p:nvSpPr>
+        <p:spPr/>
+        <p:txBody>
+          <a:bodyPr/>
+          <a:lstStyle/>
+          <a:p>
+            <a:endParaRPr lang="ko-KR" altLang="en-US" dirty="0"/>
+          </a:p>
+        </p:txBody>
+      </p:sp>
+      <p:sp>
+        <p:nvSpPr>
+          <p:cNvPr id="4" name="슬라이드 번호 개체 틀 3"/>
+          <p:cNvSpPr>
+            <a:spLocks noGrp="1"/>
+          </p:cNvSpPr>
+          <p:nvPr>
+            <p:ph type="sldNum" sz="quarter" idx="10"/>
+          </p:nvPr>
+        </p:nvSpPr>
+        <p:spPr/>
+        <p:txBody>
+          <a:bodyPr/>
+          <a:lstStyle/>
+          <a:p>
+            <a:pPr rtl="0"/>
+            <a:fld id="{5FB91549-43BF-425A-AF25-75262019208C}" type="slidenum">
+              <a:rPr lang="en-US" altLang="ko-KR" smtClean="0"/>
+              <a:t>41</a:t>
+            </a:fld>
+            <a:endParaRPr lang="ko-KR" altLang="en-US" dirty="0"/>
+          </a:p>
+        </p:txBody>
+      </p:sp>
+    </p:spTree>
+    <p:extLst>
+      <p:ext uri="{BB962C8B-B14F-4D97-AF65-F5344CB8AC3E}">
+        <p14:creationId xmlns:p14="http://schemas.microsoft.com/office/powerpoint/2010/main" val="3893411825"/>
+      </p:ext>
+    </p:extLst>
+  </p:cSld>
+  <p:clrMapOvr>
+    <a:masterClrMapping/>
+  </p:clrMapOvr>
+</p:notes>
+</file>
+
+<file path=ppt/notesSlides/notesSlide41.xml><?xml version="1.0" encoding="utf-8"?>
+<p:notes xmlns:a="http://schemas.openxmlformats.org/drawingml/2006/main" xmlns:r="http://schemas.openxmlformats.org/officeDocument/2006/relationships" xmlns:p="http://schemas.openxmlformats.org/presentationml/2006/main">
+  <p:cSld>
+    <p:spTree>
+      <p:nvGrpSpPr>
+        <p:cNvPr id="1" name="">
+          <a:extLst>
+            <a:ext uri="{FF2B5EF4-FFF2-40B4-BE49-F238E27FC236}">
+              <a16:creationId xmlns:a16="http://schemas.microsoft.com/office/drawing/2014/main" id="{05EBCEC8-47FC-8EA7-A538-153CB379BB4C}"/>
+            </a:ext>
+          </a:extLst>
+        </p:cNvPr>
+        <p:cNvGrpSpPr/>
+        <p:nvPr/>
+      </p:nvGrpSpPr>
+      <p:grpSpPr>
+        <a:xfrm>
+          <a:off x="0" y="0"/>
+          <a:ext cx="0" cy="0"/>
+          <a:chOff x="0" y="0"/>
+          <a:chExt cx="0" cy="0"/>
+        </a:xfrm>
+      </p:grpSpPr>
+      <p:sp>
+        <p:nvSpPr>
+          <p:cNvPr id="2" name="슬라이드 이미지 개체 틀 1">
+            <a:extLst>
+              <a:ext uri="{FF2B5EF4-FFF2-40B4-BE49-F238E27FC236}">
+                <a16:creationId xmlns:a16="http://schemas.microsoft.com/office/drawing/2014/main" id="{61E14DEB-2EF3-81ED-B6D5-98AC346A25B2}"/>
+              </a:ext>
+            </a:extLst>
+          </p:cNvPr>
+          <p:cNvSpPr>
+            <a:spLocks noGrp="1" noRot="1" noChangeAspect="1"/>
+          </p:cNvSpPr>
+          <p:nvPr>
+            <p:ph type="sldImg"/>
+          </p:nvPr>
+        </p:nvSpPr>
+        <p:spPr/>
+      </p:sp>
+      <p:sp>
+        <p:nvSpPr>
+          <p:cNvPr id="3" name="슬라이드 노트 개체 틀 2">
+            <a:extLst>
+              <a:ext uri="{FF2B5EF4-FFF2-40B4-BE49-F238E27FC236}">
+                <a16:creationId xmlns:a16="http://schemas.microsoft.com/office/drawing/2014/main" id="{C8D84B77-79E6-B42A-E6DC-29E695D3AFC2}"/>
+              </a:ext>
+            </a:extLst>
+          </p:cNvPr>
+          <p:cNvSpPr>
+            <a:spLocks noGrp="1"/>
+          </p:cNvSpPr>
+          <p:nvPr>
+            <p:ph type="body" idx="1"/>
+          </p:nvPr>
+        </p:nvSpPr>
+        <p:spPr/>
+        <p:txBody>
+          <a:bodyPr/>
+          <a:lstStyle/>
+          <a:p>
+            <a:endParaRPr lang="ko-KR" altLang="en-US" dirty="0"/>
+          </a:p>
+        </p:txBody>
+      </p:sp>
+      <p:sp>
+        <p:nvSpPr>
+          <p:cNvPr id="4" name="슬라이드 번호 개체 틀 3">
+            <a:extLst>
+              <a:ext uri="{FF2B5EF4-FFF2-40B4-BE49-F238E27FC236}">
+                <a16:creationId xmlns:a16="http://schemas.microsoft.com/office/drawing/2014/main" id="{9959EEB8-1602-2D8E-C1AB-E9B99027D222}"/>
+              </a:ext>
+            </a:extLst>
+          </p:cNvPr>
+          <p:cNvSpPr>
+            <a:spLocks noGrp="1"/>
+          </p:cNvSpPr>
+          <p:nvPr>
+            <p:ph type="sldNum" sz="quarter" idx="10"/>
+          </p:nvPr>
+        </p:nvSpPr>
+        <p:spPr/>
+        <p:txBody>
+          <a:bodyPr/>
+          <a:lstStyle/>
+          <a:p>
+            <a:pPr rtl="0"/>
+            <a:fld id="{5FB91549-43BF-425A-AF25-75262019208C}" type="slidenum">
+              <a:rPr lang="en-US" altLang="ko-KR" smtClean="0"/>
+              <a:t>42</a:t>
+            </a:fld>
+            <a:endParaRPr lang="ko-KR" altLang="en-US" dirty="0"/>
+          </a:p>
+        </p:txBody>
+      </p:sp>
+    </p:spTree>
+    <p:extLst>
+      <p:ext uri="{BB962C8B-B14F-4D97-AF65-F5344CB8AC3E}">
+        <p14:creationId xmlns:p14="http://schemas.microsoft.com/office/powerpoint/2010/main" val="2959041691"/>
+      </p:ext>
+    </p:extLst>
+  </p:cSld>
+  <p:clrMapOvr>
+    <a:masterClrMapping/>
+  </p:clrMapOvr>
+</p:notes>
+</file>
+
+<file path=ppt/notesSlides/notesSlide5.xml><?xml version="1.0" encoding="utf-8"?>
+<p:notes xmlns:a="http://schemas.openxmlformats.org/drawingml/2006/main" xmlns:r="http://schemas.openxmlformats.org/officeDocument/2006/relationships" xmlns:p="http://schemas.openxmlformats.org/presentationml/2006/main">
+  <p:cSld>
+    <p:spTree>
+      <p:nvGrpSpPr>
+        <p:cNvPr id="1" name="">
+          <a:extLst>
+            <a:ext uri="{FF2B5EF4-FFF2-40B4-BE49-F238E27FC236}">
+              <a16:creationId xmlns:a16="http://schemas.microsoft.com/office/drawing/2014/main" id="{7FF46FAF-F5C9-E6E3-DFBE-CAF50E4187D7}"/>
+            </a:ext>
+          </a:extLst>
+        </p:cNvPr>
+        <p:cNvGrpSpPr/>
+        <p:nvPr/>
+      </p:nvGrpSpPr>
+      <p:grpSpPr>
+        <a:xfrm>
+          <a:off x="0" y="0"/>
+          <a:ext cx="0" cy="0"/>
+          <a:chOff x="0" y="0"/>
+          <a:chExt cx="0" cy="0"/>
+        </a:xfrm>
+      </p:grpSpPr>
+      <p:sp>
+        <p:nvSpPr>
+          <p:cNvPr id="2" name="슬라이드 이미지 개체 틀 1">
+            <a:extLst>
+              <a:ext uri="{FF2B5EF4-FFF2-40B4-BE49-F238E27FC236}">
+                <a16:creationId xmlns:a16="http://schemas.microsoft.com/office/drawing/2014/main" id="{C5F61900-29D4-9358-2581-3584102BBBC9}"/>
+              </a:ext>
+            </a:extLst>
+          </p:cNvPr>
+          <p:cNvSpPr>
+            <a:spLocks noGrp="1" noRot="1" noChangeAspect="1"/>
+          </p:cNvSpPr>
+          <p:nvPr>
+            <p:ph type="sldImg"/>
+          </p:nvPr>
+        </p:nvSpPr>
+        <p:spPr/>
+      </p:sp>
+      <p:sp>
+        <p:nvSpPr>
+          <p:cNvPr id="3" name="슬라이드 노트 개체 틀 2">
+            <a:extLst>
+              <a:ext uri="{FF2B5EF4-FFF2-40B4-BE49-F238E27FC236}">
+                <a16:creationId xmlns:a16="http://schemas.microsoft.com/office/drawing/2014/main" id="{BF4D4FEB-BF65-8687-D65F-39EEFC9E8839}"/>
+              </a:ext>
+            </a:extLst>
+          </p:cNvPr>
+          <p:cNvSpPr>
+            <a:spLocks noGrp="1"/>
+          </p:cNvSpPr>
+          <p:nvPr>
+            <p:ph type="body" idx="1"/>
+          </p:nvPr>
+        </p:nvSpPr>
+        <p:spPr/>
+        <p:txBody>
+          <a:bodyPr/>
+          <a:lstStyle/>
+          <a:p>
+            <a:endParaRPr lang="ko-KR" altLang="en-US" dirty="0"/>
+          </a:p>
+        </p:txBody>
+      </p:sp>
+      <p:sp>
+        <p:nvSpPr>
+          <p:cNvPr id="4" name="슬라이드 번호 개체 틀 3">
+            <a:extLst>
+              <a:ext uri="{FF2B5EF4-FFF2-40B4-BE49-F238E27FC236}">
+                <a16:creationId xmlns:a16="http://schemas.microsoft.com/office/drawing/2014/main" id="{61976CCA-EF32-D18C-500B-FF8E302B9353}"/>
+              </a:ext>
+            </a:extLst>
+          </p:cNvPr>
+          <p:cNvSpPr>
+            <a:spLocks noGrp="1"/>
+          </p:cNvSpPr>
+          <p:nvPr>
+            <p:ph type="sldNum" sz="quarter" idx="10"/>
+          </p:nvPr>
+        </p:nvSpPr>
+        <p:spPr/>
+        <p:txBody>
+          <a:bodyPr/>
+          <a:lstStyle/>
+          <a:p>
+            <a:pPr rtl="0"/>
+            <a:fld id="{5FB91549-43BF-425A-AF25-75262019208C}" type="slidenum">
+              <a:rPr lang="en-US" altLang="ko-KR" smtClean="0"/>
               <a:t>5</a:t>
             </a:fld>
             <a:endParaRPr lang="ko-KR" altLang="en-US" dirty="0"/>
@@ -3232,7 +4136,7 @@
     </p:spTree>
     <p:extLst>
       <p:ext uri="{BB962C8B-B14F-4D97-AF65-F5344CB8AC3E}">
-        <p14:creationId xmlns:p14="http://schemas.microsoft.com/office/powerpoint/2010/main" val="1229129113"/>
+        <p14:creationId xmlns:p14="http://schemas.microsoft.com/office/powerpoint/2010/main" val="4157777088"/>
       </p:ext>
     </p:extLst>
   </p:cSld>
@@ -3317,7 +4221,7 @@
     </p:spTree>
     <p:extLst>
       <p:ext uri="{BB962C8B-B14F-4D97-AF65-F5344CB8AC3E}">
-        <p14:creationId xmlns:p14="http://schemas.microsoft.com/office/powerpoint/2010/main" val="2897626452"/>
+        <p14:creationId xmlns:p14="http://schemas.microsoft.com/office/powerpoint/2010/main" val="2950374360"/>
       </p:ext>
     </p:extLst>
   </p:cSld>
@@ -3402,7 +4306,7 @@
     </p:spTree>
     <p:extLst>
       <p:ext uri="{BB962C8B-B14F-4D97-AF65-F5344CB8AC3E}">
-        <p14:creationId xmlns:p14="http://schemas.microsoft.com/office/powerpoint/2010/main" val="1885669057"/>
+        <p14:creationId xmlns:p14="http://schemas.microsoft.com/office/powerpoint/2010/main" val="2272406497"/>
       </p:ext>
     </p:extLst>
   </p:cSld>
@@ -3417,13 +4321,7 @@
   <p:cSld>
     <p:spTree>
       <p:nvGrpSpPr>
-        <p:cNvPr id="1" name="">
-          <a:extLst>
-            <a:ext uri="{FF2B5EF4-FFF2-40B4-BE49-F238E27FC236}">
-              <a16:creationId xmlns:a16="http://schemas.microsoft.com/office/drawing/2014/main" id="{48E11AD0-4C3D-624F-60D5-D6B10979AFDE}"/>
-            </a:ext>
-          </a:extLst>
-        </p:cNvPr>
+        <p:cNvPr id="1" name=""/>
         <p:cNvGrpSpPr/>
         <p:nvPr/>
       </p:nvGrpSpPr>
@@ -3437,13 +4335,7 @@
       </p:grpSpPr>
       <p:sp>
         <p:nvSpPr>
-          <p:cNvPr id="2" name="슬라이드 이미지 개체 틀 1">
-            <a:extLst>
-              <a:ext uri="{FF2B5EF4-FFF2-40B4-BE49-F238E27FC236}">
-                <a16:creationId xmlns:a16="http://schemas.microsoft.com/office/drawing/2014/main" id="{C92E39F4-6A0C-4A9C-8B5C-ABADDEE59DFD}"/>
-              </a:ext>
-            </a:extLst>
-          </p:cNvPr>
+          <p:cNvPr id="2" name="슬라이드 이미지 개체 틀 1"/>
           <p:cNvSpPr>
             <a:spLocks noGrp="1" noRot="1" noChangeAspect="1"/>
           </p:cNvSpPr>
@@ -3455,13 +4347,7 @@
       </p:sp>
       <p:sp>
         <p:nvSpPr>
-          <p:cNvPr id="3" name="슬라이드 노트 개체 틀 2">
-            <a:extLst>
-              <a:ext uri="{FF2B5EF4-FFF2-40B4-BE49-F238E27FC236}">
-                <a16:creationId xmlns:a16="http://schemas.microsoft.com/office/drawing/2014/main" id="{CC6EE43D-9CFD-3468-D78B-FF731CBFE365}"/>
-              </a:ext>
-            </a:extLst>
-          </p:cNvPr>
+          <p:cNvPr id="3" name="슬라이드 노트 개체 틀 2"/>
           <p:cNvSpPr>
             <a:spLocks noGrp="1"/>
           </p:cNvSpPr>
@@ -3480,13 +4366,7 @@
       </p:sp>
       <p:sp>
         <p:nvSpPr>
-          <p:cNvPr id="4" name="슬라이드 번호 개체 틀 3">
-            <a:extLst>
-              <a:ext uri="{FF2B5EF4-FFF2-40B4-BE49-F238E27FC236}">
-                <a16:creationId xmlns:a16="http://schemas.microsoft.com/office/drawing/2014/main" id="{B00231CF-5B5C-C65B-77E3-2B290203E180}"/>
-              </a:ext>
-            </a:extLst>
-          </p:cNvPr>
+          <p:cNvPr id="4" name="슬라이드 번호 개체 틀 3"/>
           <p:cNvSpPr>
             <a:spLocks noGrp="1"/>
           </p:cNvSpPr>
@@ -3511,7 +4391,7 @@
     </p:spTree>
     <p:extLst>
       <p:ext uri="{BB962C8B-B14F-4D97-AF65-F5344CB8AC3E}">
-        <p14:creationId xmlns:p14="http://schemas.microsoft.com/office/powerpoint/2010/main" val="2763135010"/>
+        <p14:creationId xmlns:p14="http://schemas.microsoft.com/office/powerpoint/2010/main" val="1229129113"/>
       </p:ext>
     </p:extLst>
   </p:cSld>
@@ -3587,7 +4467,7 @@
             <a:pPr rtl="0"/>
             <a:fld id="{5FB91549-43BF-425A-AF25-75262019208C}" type="slidenum">
               <a:rPr lang="en-US" altLang="ko-KR" smtClean="0"/>
-              <a:t>10</a:t>
+              <a:t>9</a:t>
             </a:fld>
             <a:endParaRPr lang="ko-KR" altLang="en-US" dirty="0"/>
           </a:p>
@@ -3596,7 +4476,7 @@
     </p:spTree>
     <p:extLst>
       <p:ext uri="{BB962C8B-B14F-4D97-AF65-F5344CB8AC3E}">
-        <p14:creationId xmlns:p14="http://schemas.microsoft.com/office/powerpoint/2010/main" val="3285654640"/>
+        <p14:creationId xmlns:p14="http://schemas.microsoft.com/office/powerpoint/2010/main" val="2897626452"/>
       </p:ext>
     </p:extLst>
   </p:cSld>
@@ -3844,7 +4724,7 @@
           <a:p>
             <a:fld id="{4B229CEB-779D-4AB3-81CB-8FCEEAE03F61}" type="datetime1">
               <a:rPr lang="ko-KR" altLang="en-US" smtClean="0"/>
-              <a:t>2026-02-28</a:t>
+              <a:t>2026-03-11</a:t>
             </a:fld>
             <a:endParaRPr lang="ko-KR" altLang="en-US" dirty="0"/>
           </a:p>
@@ -4082,7 +4962,7 @@
             <a:pPr rtl="0"/>
             <a:fld id="{C3B7A883-0BF0-4B4B-84D5-D747A0111A56}" type="datetime1">
               <a:rPr lang="ko-KR" altLang="en-US" noProof="0" smtClean="0"/>
-              <a:t>2026-02-28</a:t>
+              <a:t>2026-03-11</a:t>
             </a:fld>
             <a:endParaRPr lang="ko-KR" altLang="en-US" noProof="0" dirty="0"/>
           </a:p>
@@ -4300,7 +5180,7 @@
             <a:pPr rtl="0"/>
             <a:fld id="{3DA7EA29-F2BB-4FB1-BB4B-C55A7FA3FC5C}" type="datetime1">
               <a:rPr lang="ko-KR" altLang="en-US" noProof="0" smtClean="0"/>
-              <a:t>2026-02-28</a:t>
+              <a:t>2026-03-11</a:t>
             </a:fld>
             <a:endParaRPr lang="ko-KR" altLang="en-US" noProof="0" dirty="0"/>
           </a:p>
@@ -4509,7 +5389,7 @@
             <a:pPr rtl="0"/>
             <a:fld id="{D76306AB-75A0-421C-B431-0E4E30A5C28E}" type="datetime1">
               <a:rPr lang="ko-KR" altLang="en-US" noProof="0" smtClean="0"/>
-              <a:t>2026-02-28</a:t>
+              <a:t>2026-03-11</a:t>
             </a:fld>
             <a:endParaRPr lang="ko-KR" altLang="en-US" noProof="0" dirty="0"/>
           </a:p>
@@ -4779,7 +5659,7 @@
             <a:pPr rtl="0"/>
             <a:fld id="{E1D969EE-F1EB-462E-B70D-5B36B3806A4E}" type="datetime1">
               <a:rPr lang="ko-KR" altLang="en-US" noProof="0" smtClean="0"/>
-              <a:t>2026-02-28</a:t>
+              <a:t>2026-03-11</a:t>
             </a:fld>
             <a:endParaRPr lang="ko-KR" altLang="en-US" noProof="0" dirty="0"/>
           </a:p>
@@ -5087,7 +5967,7 @@
             <a:pPr rtl="0"/>
             <a:fld id="{E8CBB1B7-E0A1-46A3-B5B5-C69931095FF6}" type="datetime1">
               <a:rPr lang="ko-KR" altLang="en-US" noProof="0" smtClean="0"/>
-              <a:t>2026-02-28</a:t>
+              <a:t>2026-03-11</a:t>
             </a:fld>
             <a:endParaRPr lang="ko-KR" altLang="en-US" noProof="0" dirty="0"/>
           </a:p>
@@ -5538,7 +6418,7 @@
             <a:pPr rtl="0"/>
             <a:fld id="{DAFC0E65-06AB-44D7-AAEE-8F4C7ED84A0C}" type="datetime1">
               <a:rPr lang="ko-KR" altLang="en-US" noProof="0" smtClean="0"/>
-              <a:t>2026-02-28</a:t>
+              <a:t>2026-03-11</a:t>
             </a:fld>
             <a:endParaRPr lang="ko-KR" altLang="en-US" noProof="0" dirty="0"/>
           </a:p>
@@ -5675,7 +6555,7 @@
             <a:pPr rtl="0"/>
             <a:fld id="{30189E66-D439-4767-B911-EB49CB20E313}" type="datetime1">
               <a:rPr lang="ko-KR" altLang="en-US" noProof="0" smtClean="0"/>
-              <a:t>2026-02-28</a:t>
+              <a:t>2026-03-11</a:t>
             </a:fld>
             <a:endParaRPr lang="ko-KR" altLang="en-US" noProof="0" dirty="0"/>
           </a:p>
@@ -5788,7 +6668,7 @@
             <a:pPr rtl="0"/>
             <a:fld id="{D4E4FFC0-DB28-4291-80A0-63DBF8428320}" type="datetime1">
               <a:rPr lang="ko-KR" altLang="en-US" noProof="0" smtClean="0"/>
-              <a:t>2026-02-28</a:t>
+              <a:t>2026-03-11</a:t>
             </a:fld>
             <a:endParaRPr lang="ko-KR" altLang="en-US" noProof="0" dirty="0"/>
           </a:p>
@@ -6093,7 +6973,7 @@
             <a:pPr rtl="0"/>
             <a:fld id="{3AB5804B-C38E-4214-93DF-3E6DA00134E8}" type="datetime1">
               <a:rPr lang="ko-KR" altLang="en-US" noProof="0" smtClean="0"/>
-              <a:t>2026-02-28</a:t>
+              <a:t>2026-03-11</a:t>
             </a:fld>
             <a:endParaRPr lang="ko-KR" altLang="en-US" noProof="0" dirty="0"/>
           </a:p>
@@ -6387,7 +7267,7 @@
             <a:pPr rtl="0"/>
             <a:fld id="{CABEE384-F18F-4153-AC21-608599869F84}" type="datetime1">
               <a:rPr lang="ko-KR" altLang="en-US" noProof="0" smtClean="0"/>
-              <a:t>2026-02-28</a:t>
+              <a:t>2026-03-11</a:t>
             </a:fld>
             <a:endParaRPr lang="ko-KR" altLang="en-US" noProof="0" dirty="0"/>
           </a:p>
@@ -6619,7 +7499,7 @@
           <a:p>
             <a:fld id="{667A4C69-65FB-481C-AC2A-84D254D33675}" type="datetime1">
               <a:rPr lang="ko-KR" altLang="en-US" smtClean="0"/>
-              <a:t>2026-02-28</a:t>
+              <a:t>2026-03-11</a:t>
             </a:fld>
             <a:endParaRPr lang="ko-KR" altLang="en-US" dirty="0"/>
           </a:p>
@@ -7283,7 +8163,7 @@
       </p:grpSpPr>
       <p:sp>
         <p:nvSpPr>
-          <p:cNvPr id="29" name="슬라이드 번호 개체 틀 28"/>
+          <p:cNvPr id="2" name="슬라이드 번호 개체 틀 1"/>
           <p:cNvSpPr>
             <a:spLocks noGrp="1"/>
           </p:cNvSpPr>
@@ -7300,6 +8180,630 @@
             <a:fld id="{A3F31473-23EB-4724-8B59-FE6D21D89FA4}" type="slidenum">
               <a:rPr lang="en-US" altLang="ko-KR" noProof="0" smtClean="0"/>
               <a:t>10</a:t>
+            </a:fld>
+            <a:endParaRPr lang="en-US" altLang="ko-KR" noProof="0" dirty="0"/>
+          </a:p>
+        </p:txBody>
+      </p:sp>
+      <p:pic>
+        <p:nvPicPr>
+          <p:cNvPr id="3" name="그림 2"/>
+          <p:cNvPicPr>
+            <a:picLocks noChangeAspect="1"/>
+          </p:cNvPicPr>
+          <p:nvPr/>
+        </p:nvPicPr>
+        <p:blipFill>
+          <a:blip r:embed="rId3"/>
+          <a:stretch>
+            <a:fillRect/>
+          </a:stretch>
+        </p:blipFill>
+        <p:spPr>
+          <a:xfrm>
+            <a:off x="1053852" y="908720"/>
+            <a:ext cx="9046658" cy="3651317"/>
+          </a:xfrm>
+          <a:prstGeom prst="rect">
+            <a:avLst/>
+          </a:prstGeom>
+        </p:spPr>
+      </p:pic>
+    </p:spTree>
+    <p:extLst>
+      <p:ext uri="{BB962C8B-B14F-4D97-AF65-F5344CB8AC3E}">
+        <p14:creationId xmlns:p14="http://schemas.microsoft.com/office/powerpoint/2010/main" val="2766095449"/>
+      </p:ext>
+    </p:extLst>
+  </p:cSld>
+  <p:clrMapOvr>
+    <a:masterClrMapping/>
+  </p:clrMapOvr>
+  <mc:AlternateContent xmlns:mc="http://schemas.openxmlformats.org/markup-compatibility/2006" xmlns:p14="http://schemas.microsoft.com/office/powerpoint/2010/main">
+    <mc:Choice Requires="p14">
+      <p:transition spd="med" p14:dur="700">
+        <p:fade/>
+      </p:transition>
+    </mc:Choice>
+    <mc:Fallback xmlns="">
+      <p:transition spd="med">
+        <p:fade/>
+      </p:transition>
+    </mc:Fallback>
+  </mc:AlternateContent>
+</p:sld>
+</file>
+
+<file path=ppt/slides/slide11.xml><?xml version="1.0" encoding="utf-8"?>
+<p:sld xmlns:a="http://schemas.openxmlformats.org/drawingml/2006/main" xmlns:r="http://schemas.openxmlformats.org/officeDocument/2006/relationships" xmlns:p="http://schemas.openxmlformats.org/presentationml/2006/main">
+  <p:cSld>
+    <p:spTree>
+      <p:nvGrpSpPr>
+        <p:cNvPr id="1" name="">
+          <a:extLst>
+            <a:ext uri="{FF2B5EF4-FFF2-40B4-BE49-F238E27FC236}">
+              <a16:creationId xmlns:a16="http://schemas.microsoft.com/office/drawing/2014/main" id="{CA6BEF4C-6207-0B57-AF4B-DEDBA47134A1}"/>
+            </a:ext>
+          </a:extLst>
+        </p:cNvPr>
+        <p:cNvGrpSpPr/>
+        <p:nvPr/>
+      </p:nvGrpSpPr>
+      <p:grpSpPr>
+        <a:xfrm>
+          <a:off x="0" y="0"/>
+          <a:ext cx="0" cy="0"/>
+          <a:chOff x="0" y="0"/>
+          <a:chExt cx="0" cy="0"/>
+        </a:xfrm>
+      </p:grpSpPr>
+      <p:sp>
+        <p:nvSpPr>
+          <p:cNvPr id="2" name="슬라이드 번호 개체 틀 1">
+            <a:extLst>
+              <a:ext uri="{FF2B5EF4-FFF2-40B4-BE49-F238E27FC236}">
+                <a16:creationId xmlns:a16="http://schemas.microsoft.com/office/drawing/2014/main" id="{C300C0E0-05B2-9161-BDC4-08FD53A4DAED}"/>
+              </a:ext>
+            </a:extLst>
+          </p:cNvPr>
+          <p:cNvSpPr>
+            <a:spLocks noGrp="1"/>
+          </p:cNvSpPr>
+          <p:nvPr>
+            <p:ph type="sldNum" sz="quarter" idx="12"/>
+          </p:nvPr>
+        </p:nvSpPr>
+        <p:spPr/>
+        <p:txBody>
+          <a:bodyPr/>
+          <a:lstStyle/>
+          <a:p>
+            <a:pPr rtl="0"/>
+            <a:fld id="{A3F31473-23EB-4724-8B59-FE6D21D89FA4}" type="slidenum">
+              <a:rPr lang="en-US" altLang="ko-KR" noProof="0" smtClean="0"/>
+              <a:t>11</a:t>
+            </a:fld>
+            <a:endParaRPr lang="en-US" altLang="ko-KR" noProof="0" dirty="0"/>
+          </a:p>
+        </p:txBody>
+      </p:sp>
+      <p:sp>
+        <p:nvSpPr>
+          <p:cNvPr id="4" name="TextBox 3">
+            <a:extLst>
+              <a:ext uri="{FF2B5EF4-FFF2-40B4-BE49-F238E27FC236}">
+                <a16:creationId xmlns:a16="http://schemas.microsoft.com/office/drawing/2014/main" id="{14904823-3A2F-D01C-298E-969634A7BE94}"/>
+              </a:ext>
+            </a:extLst>
+          </p:cNvPr>
+          <p:cNvSpPr txBox="1"/>
+          <p:nvPr/>
+        </p:nvSpPr>
+        <p:spPr>
+          <a:xfrm>
+            <a:off x="765820" y="1268760"/>
+            <a:ext cx="11233248" cy="624595"/>
+          </a:xfrm>
+          <a:prstGeom prst="rect">
+            <a:avLst/>
+          </a:prstGeom>
+          <a:solidFill>
+            <a:schemeClr val="tx1">
+              <a:lumMod val="20000"/>
+              <a:lumOff val="80000"/>
+            </a:schemeClr>
+          </a:solidFill>
+        </p:spPr>
+        <p:txBody>
+          <a:bodyPr wrap="square" rtlCol="0">
+            <a:spAutoFit/>
+          </a:bodyPr>
+          <a:lstStyle/>
+          <a:p>
+            <a:pPr marL="285750" indent="-285750">
+              <a:lnSpc>
+                <a:spcPct val="200000"/>
+              </a:lnSpc>
+              <a:buFont typeface="Wingdings" panose="05000000000000000000" pitchFamily="2" charset="2"/>
+              <a:buChar char="v"/>
+            </a:pPr>
+            <a:r>
+              <a:rPr lang="en-US" altLang="ko-KR" sz="2000" dirty="0">
+                <a:latin typeface="휴먼모음T" panose="02030504000101010101" pitchFamily="18" charset="-127"/>
+                <a:ea typeface="휴먼모음T" panose="02030504000101010101" pitchFamily="18" charset="-127"/>
+              </a:rPr>
+              <a:t>seaborn</a:t>
+            </a:r>
+            <a:r>
+              <a:rPr lang="ko-KR" altLang="en-US" sz="2000" dirty="0">
+                <a:latin typeface="휴먼모음T" panose="02030504000101010101" pitchFamily="18" charset="-127"/>
+                <a:ea typeface="휴먼모음T" panose="02030504000101010101" pitchFamily="18" charset="-127"/>
+              </a:rPr>
+              <a:t>의 </a:t>
+            </a:r>
+            <a:r>
+              <a:rPr lang="en-US" altLang="ko-KR" sz="2000" dirty="0">
+                <a:latin typeface="휴먼모음T" panose="02030504000101010101" pitchFamily="18" charset="-127"/>
+                <a:ea typeface="휴먼모음T" panose="02030504000101010101" pitchFamily="18" charset="-127"/>
+              </a:rPr>
+              <a:t>tips </a:t>
+            </a:r>
+            <a:r>
+              <a:rPr lang="ko-KR" altLang="en-US" sz="2000" dirty="0">
+                <a:latin typeface="휴먼모음T" panose="02030504000101010101" pitchFamily="18" charset="-127"/>
+                <a:ea typeface="휴먼모음T" panose="02030504000101010101" pitchFamily="18" charset="-127"/>
+              </a:rPr>
+              <a:t>를 모집단으로 가정하고 </a:t>
+            </a:r>
+            <a:r>
+              <a:rPr lang="en-US" altLang="ko-KR" sz="2000" dirty="0">
+                <a:latin typeface="휴먼모음T" panose="02030504000101010101" pitchFamily="18" charset="-127"/>
+                <a:ea typeface="휴먼모음T" panose="02030504000101010101" pitchFamily="18" charset="-127"/>
+              </a:rPr>
+              <a:t>3</a:t>
+            </a:r>
+            <a:r>
+              <a:rPr lang="ko-KR" altLang="en-US" sz="2000" dirty="0">
+                <a:latin typeface="휴먼모음T" panose="02030504000101010101" pitchFamily="18" charset="-127"/>
+                <a:ea typeface="휴먼모음T" panose="02030504000101010101" pitchFamily="18" charset="-127"/>
+              </a:rPr>
+              <a:t>가지 표본추출방법을 파이썬 코드로 제시하라</a:t>
+            </a:r>
+            <a:endParaRPr lang="en-US" altLang="ko-KR" sz="2000" dirty="0">
+              <a:latin typeface="휴먼모음T" panose="02030504000101010101" pitchFamily="18" charset="-127"/>
+              <a:ea typeface="휴먼모음T" panose="02030504000101010101" pitchFamily="18" charset="-127"/>
+            </a:endParaRPr>
+          </a:p>
+        </p:txBody>
+      </p:sp>
+      <p:sp>
+        <p:nvSpPr>
+          <p:cNvPr id="9" name="TextBox 8">
+            <a:extLst>
+              <a:ext uri="{FF2B5EF4-FFF2-40B4-BE49-F238E27FC236}">
+                <a16:creationId xmlns:a16="http://schemas.microsoft.com/office/drawing/2014/main" id="{E81198CD-632B-CF6C-9A00-58DFCB1D1787}"/>
+              </a:ext>
+            </a:extLst>
+          </p:cNvPr>
+          <p:cNvSpPr txBox="1"/>
+          <p:nvPr/>
+        </p:nvSpPr>
+        <p:spPr>
+          <a:xfrm>
+            <a:off x="117748" y="260648"/>
+            <a:ext cx="2592288" cy="584775"/>
+          </a:xfrm>
+          <a:prstGeom prst="rect">
+            <a:avLst/>
+          </a:prstGeom>
+          <a:noFill/>
+        </p:spPr>
+        <p:txBody>
+          <a:bodyPr wrap="square" rtlCol="0">
+            <a:spAutoFit/>
+          </a:bodyPr>
+          <a:lstStyle/>
+          <a:p>
+            <a:r>
+              <a:rPr lang="ko-KR" altLang="en-US" sz="3200" b="1"/>
+              <a:t>문제 풀이</a:t>
+            </a:r>
+          </a:p>
+        </p:txBody>
+      </p:sp>
+    </p:spTree>
+    <p:extLst>
+      <p:ext uri="{BB962C8B-B14F-4D97-AF65-F5344CB8AC3E}">
+        <p14:creationId xmlns:p14="http://schemas.microsoft.com/office/powerpoint/2010/main" val="3874432186"/>
+      </p:ext>
+    </p:extLst>
+  </p:cSld>
+  <p:clrMapOvr>
+    <a:masterClrMapping/>
+  </p:clrMapOvr>
+  <mc:AlternateContent xmlns:mc="http://schemas.openxmlformats.org/markup-compatibility/2006" xmlns:p14="http://schemas.microsoft.com/office/powerpoint/2010/main">
+    <mc:Choice Requires="p14">
+      <p:transition spd="med" p14:dur="700">
+        <p:fade/>
+      </p:transition>
+    </mc:Choice>
+    <mc:Fallback xmlns="">
+      <p:transition spd="med">
+        <p:fade/>
+      </p:transition>
+    </mc:Fallback>
+  </mc:AlternateContent>
+</p:sld>
+</file>
+
+<file path=ppt/slides/slide12.xml><?xml version="1.0" encoding="utf-8"?>
+<p:sld xmlns:a="http://schemas.openxmlformats.org/drawingml/2006/main" xmlns:r="http://schemas.openxmlformats.org/officeDocument/2006/relationships" xmlns:p="http://schemas.openxmlformats.org/presentationml/2006/main">
+  <p:cSld>
+    <p:spTree>
+      <p:nvGrpSpPr>
+        <p:cNvPr id="1" name="">
+          <a:extLst>
+            <a:ext uri="{FF2B5EF4-FFF2-40B4-BE49-F238E27FC236}">
+              <a16:creationId xmlns:a16="http://schemas.microsoft.com/office/drawing/2014/main" id="{D6F06161-C61F-40FC-86A5-15B880B95539}"/>
+            </a:ext>
+          </a:extLst>
+        </p:cNvPr>
+        <p:cNvGrpSpPr/>
+        <p:nvPr/>
+      </p:nvGrpSpPr>
+      <p:grpSpPr>
+        <a:xfrm>
+          <a:off x="0" y="0"/>
+          <a:ext cx="0" cy="0"/>
+          <a:chOff x="0" y="0"/>
+          <a:chExt cx="0" cy="0"/>
+        </a:xfrm>
+      </p:grpSpPr>
+      <p:sp>
+        <p:nvSpPr>
+          <p:cNvPr id="3" name="직사각형 2">
+            <a:extLst>
+              <a:ext uri="{FF2B5EF4-FFF2-40B4-BE49-F238E27FC236}">
+                <a16:creationId xmlns:a16="http://schemas.microsoft.com/office/drawing/2014/main" id="{6C3D80B8-C2B7-81DA-94E3-BC2843BBA248}"/>
+              </a:ext>
+            </a:extLst>
+          </p:cNvPr>
+          <p:cNvSpPr/>
+          <p:nvPr/>
+        </p:nvSpPr>
+        <p:spPr>
+          <a:xfrm>
+            <a:off x="592167" y="3140968"/>
+            <a:ext cx="8136904" cy="674850"/>
+          </a:xfrm>
+          <a:prstGeom prst="rect">
+            <a:avLst/>
+          </a:prstGeom>
+          <a:solidFill>
+            <a:schemeClr val="bg1">
+              <a:lumMod val="85000"/>
+            </a:schemeClr>
+          </a:solidFill>
+          <a:ln>
+            <a:noFill/>
+          </a:ln>
+        </p:spPr>
+        <p:style>
+          <a:lnRef idx="2">
+            <a:schemeClr val="accent1">
+              <a:shade val="15000"/>
+            </a:schemeClr>
+          </a:lnRef>
+          <a:fillRef idx="1">
+            <a:schemeClr val="accent1"/>
+          </a:fillRef>
+          <a:effectRef idx="0">
+            <a:schemeClr val="accent1"/>
+          </a:effectRef>
+          <a:fontRef idx="minor">
+            <a:schemeClr val="lt1"/>
+          </a:fontRef>
+        </p:style>
+        <p:txBody>
+          <a:bodyPr rtlCol="0" anchor="ctr"/>
+          <a:lstStyle/>
+          <a:p>
+            <a:pPr algn="ctr"/>
+            <a:endParaRPr lang="ko-KR" altLang="en-US" dirty="0"/>
+          </a:p>
+        </p:txBody>
+      </p:sp>
+      <p:sp>
+        <p:nvSpPr>
+          <p:cNvPr id="8" name="슬라이드 번호 개체 틀 7">
+            <a:extLst>
+              <a:ext uri="{FF2B5EF4-FFF2-40B4-BE49-F238E27FC236}">
+                <a16:creationId xmlns:a16="http://schemas.microsoft.com/office/drawing/2014/main" id="{9528D0BF-D0DE-78C0-F571-DD62D6578EBD}"/>
+              </a:ext>
+            </a:extLst>
+          </p:cNvPr>
+          <p:cNvSpPr>
+            <a:spLocks noGrp="1"/>
+          </p:cNvSpPr>
+          <p:nvPr>
+            <p:ph type="sldNum" sz="quarter" idx="12"/>
+          </p:nvPr>
+        </p:nvSpPr>
+        <p:spPr/>
+        <p:txBody>
+          <a:bodyPr/>
+          <a:lstStyle/>
+          <a:p>
+            <a:pPr rtl="0"/>
+            <a:fld id="{A3F31473-23EB-4724-8B59-FE6D21D89FA4}" type="slidenum">
+              <a:rPr lang="en-US" altLang="ko-KR" noProof="0" smtClean="0"/>
+              <a:t>12</a:t>
+            </a:fld>
+            <a:endParaRPr lang="en-US" altLang="ko-KR" noProof="0" dirty="0"/>
+          </a:p>
+        </p:txBody>
+      </p:sp>
+      <p:sp>
+        <p:nvSpPr>
+          <p:cNvPr id="2" name="TextBox 1">
+            <a:extLst>
+              <a:ext uri="{FF2B5EF4-FFF2-40B4-BE49-F238E27FC236}">
+                <a16:creationId xmlns:a16="http://schemas.microsoft.com/office/drawing/2014/main" id="{7185C321-1D2A-1D57-122E-196426F18642}"/>
+              </a:ext>
+            </a:extLst>
+          </p:cNvPr>
+          <p:cNvSpPr txBox="1"/>
+          <p:nvPr/>
+        </p:nvSpPr>
+        <p:spPr>
+          <a:xfrm>
+            <a:off x="1629916" y="620688"/>
+            <a:ext cx="8928992" cy="5131020"/>
+          </a:xfrm>
+          <a:prstGeom prst="rect">
+            <a:avLst/>
+          </a:prstGeom>
+          <a:noFill/>
+        </p:spPr>
+        <p:txBody>
+          <a:bodyPr wrap="square" rtlCol="0">
+            <a:spAutoFit/>
+          </a:bodyPr>
+          <a:lstStyle/>
+          <a:p>
+            <a:pPr>
+              <a:lnSpc>
+                <a:spcPct val="200000"/>
+              </a:lnSpc>
+            </a:pPr>
+            <a:r>
+              <a:rPr lang="ko-KR" altLang="en-US" sz="4000" b="1" dirty="0">
+                <a:latin typeface="한컴 말랑말랑 Bold" panose="020F0803000000000000" pitchFamily="50" charset="-127"/>
+                <a:ea typeface="한컴 말랑말랑 Bold" panose="020F0803000000000000" pitchFamily="50" charset="-127"/>
+              </a:rPr>
+              <a:t>목차</a:t>
+            </a:r>
+            <a:endParaRPr lang="en-US" altLang="ko-KR" sz="4000" b="1" dirty="0">
+              <a:latin typeface="한컴 말랑말랑 Bold" panose="020F0803000000000000" pitchFamily="50" charset="-127"/>
+              <a:ea typeface="한컴 말랑말랑 Bold" panose="020F0803000000000000" pitchFamily="50" charset="-127"/>
+            </a:endParaRPr>
+          </a:p>
+          <a:p>
+            <a:pPr marL="514350" indent="-514350">
+              <a:lnSpc>
+                <a:spcPct val="200000"/>
+              </a:lnSpc>
+              <a:buAutoNum type="arabicPeriod"/>
+            </a:pPr>
+            <a:r>
+              <a:rPr lang="ko-KR" altLang="en-US" sz="2000" b="1" dirty="0">
+                <a:latin typeface="한컴 말랑말랑 Bold" panose="020F0803000000000000" pitchFamily="50" charset="-127"/>
+                <a:ea typeface="한컴 말랑말랑 Bold" panose="020F0803000000000000" pitchFamily="50" charset="-127"/>
+              </a:rPr>
+              <a:t>통계학</a:t>
+            </a:r>
+            <a:r>
+              <a:rPr lang="en-US" altLang="ko-KR" sz="2000" b="1" dirty="0">
+                <a:latin typeface="한컴 말랑말랑 Bold" panose="020F0803000000000000" pitchFamily="50" charset="-127"/>
+                <a:ea typeface="한컴 말랑말랑 Bold" panose="020F0803000000000000" pitchFamily="50" charset="-127"/>
+              </a:rPr>
+              <a:t>(Statistics)</a:t>
+            </a:r>
+          </a:p>
+          <a:p>
+            <a:pPr marL="514350" indent="-514350">
+              <a:lnSpc>
+                <a:spcPct val="200000"/>
+              </a:lnSpc>
+              <a:buAutoNum type="arabicPeriod"/>
+            </a:pPr>
+            <a:r>
+              <a:rPr lang="ko-KR" altLang="en-US" sz="2000" b="1" dirty="0">
+                <a:latin typeface="한컴 말랑말랑 Bold" panose="020F0803000000000000" pitchFamily="50" charset="-127"/>
+                <a:ea typeface="한컴 말랑말랑 Bold" panose="020F0803000000000000" pitchFamily="50" charset="-127"/>
+              </a:rPr>
+              <a:t>모집단과</a:t>
+            </a:r>
+            <a:r>
+              <a:rPr lang="en-US" altLang="ko-KR" sz="2000" b="1" dirty="0">
+                <a:latin typeface="한컴 말랑말랑 Bold" panose="020F0803000000000000" pitchFamily="50" charset="-127"/>
+                <a:ea typeface="한컴 말랑말랑 Bold" panose="020F0803000000000000" pitchFamily="50" charset="-127"/>
+              </a:rPr>
+              <a:t> </a:t>
+            </a:r>
+            <a:r>
+              <a:rPr lang="ko-KR" altLang="en-US" sz="2000" b="1" dirty="0">
+                <a:latin typeface="한컴 말랑말랑 Bold" panose="020F0803000000000000" pitchFamily="50" charset="-127"/>
+                <a:ea typeface="한컴 말랑말랑 Bold" panose="020F0803000000000000" pitchFamily="50" charset="-127"/>
+              </a:rPr>
+              <a:t>표본조사 방법</a:t>
+            </a:r>
+            <a:endParaRPr lang="en-US" altLang="ko-KR" sz="2000" b="1" dirty="0">
+              <a:latin typeface="한컴 말랑말랑 Bold" panose="020F0803000000000000" pitchFamily="50" charset="-127"/>
+              <a:ea typeface="한컴 말랑말랑 Bold" panose="020F0803000000000000" pitchFamily="50" charset="-127"/>
+            </a:endParaRPr>
+          </a:p>
+          <a:p>
+            <a:pPr marL="514350" indent="-514350">
+              <a:lnSpc>
+                <a:spcPct val="200000"/>
+              </a:lnSpc>
+              <a:buAutoNum type="arabicPeriod"/>
+            </a:pPr>
+            <a:r>
+              <a:rPr lang="ko-KR" altLang="en-US" sz="2000" b="1" dirty="0">
+                <a:latin typeface="한컴 말랑말랑 Bold" panose="020F0803000000000000" pitchFamily="50" charset="-127"/>
+                <a:ea typeface="한컴 말랑말랑 Bold" panose="020F0803000000000000" pitchFamily="50" charset="-127"/>
+              </a:rPr>
+              <a:t>데이터의 종류</a:t>
+            </a:r>
+            <a:r>
+              <a:rPr lang="en-US" altLang="ko-KR" sz="2000" b="1" dirty="0">
+                <a:latin typeface="한컴 말랑말랑 Bold" panose="020F0803000000000000" pitchFamily="50" charset="-127"/>
+                <a:ea typeface="한컴 말랑말랑 Bold" panose="020F0803000000000000" pitchFamily="50" charset="-127"/>
+              </a:rPr>
+              <a:t>(Data type)</a:t>
+            </a:r>
+          </a:p>
+          <a:p>
+            <a:pPr marL="514350" indent="-514350">
+              <a:lnSpc>
+                <a:spcPct val="200000"/>
+              </a:lnSpc>
+              <a:buAutoNum type="arabicPeriod"/>
+            </a:pPr>
+            <a:r>
+              <a:rPr lang="ko-KR" altLang="en-US" sz="2000" b="1" dirty="0">
+                <a:latin typeface="한컴 말랑말랑 Bold" panose="020F0803000000000000" pitchFamily="50" charset="-127"/>
+                <a:ea typeface="한컴 말랑말랑 Bold" panose="020F0803000000000000" pitchFamily="50" charset="-127"/>
+              </a:rPr>
+              <a:t>주요</a:t>
+            </a:r>
+            <a:r>
+              <a:rPr lang="en-US" altLang="ko-KR" sz="2000" b="1" dirty="0">
+                <a:latin typeface="한컴 말랑말랑 Bold" panose="020F0803000000000000" pitchFamily="50" charset="-127"/>
+                <a:ea typeface="한컴 말랑말랑 Bold" panose="020F0803000000000000" pitchFamily="50" charset="-127"/>
+              </a:rPr>
+              <a:t> </a:t>
+            </a:r>
+            <a:r>
+              <a:rPr lang="ko-KR" altLang="en-US" sz="2000" b="1" dirty="0">
+                <a:latin typeface="한컴 말랑말랑 Bold" panose="020F0803000000000000" pitchFamily="50" charset="-127"/>
+                <a:ea typeface="한컴 말랑말랑 Bold" panose="020F0803000000000000" pitchFamily="50" charset="-127"/>
+              </a:rPr>
+              <a:t>통계량</a:t>
+            </a:r>
+            <a:r>
+              <a:rPr lang="en-US" altLang="ko-KR" sz="2000" b="1" dirty="0">
+                <a:latin typeface="한컴 말랑말랑 Bold" panose="020F0803000000000000" pitchFamily="50" charset="-127"/>
+                <a:ea typeface="한컴 말랑말랑 Bold" panose="020F0803000000000000" pitchFamily="50" charset="-127"/>
+              </a:rPr>
+              <a:t>(Statistic)</a:t>
+            </a:r>
+          </a:p>
+          <a:p>
+            <a:pPr marL="514350" indent="-514350">
+              <a:lnSpc>
+                <a:spcPct val="200000"/>
+              </a:lnSpc>
+              <a:buAutoNum type="arabicPeriod"/>
+            </a:pPr>
+            <a:r>
+              <a:rPr lang="ko-KR" altLang="en-US" sz="2000" b="1" dirty="0" err="1">
+                <a:latin typeface="한컴 말랑말랑 Bold" panose="020F0803000000000000" pitchFamily="50" charset="-127"/>
+                <a:ea typeface="한컴 말랑말랑 Bold" panose="020F0803000000000000" pitchFamily="50" charset="-127"/>
+              </a:rPr>
+              <a:t>다변량</a:t>
+            </a:r>
+            <a:r>
+              <a:rPr lang="ko-KR" altLang="en-US" sz="2000" b="1" dirty="0">
+                <a:latin typeface="한컴 말랑말랑 Bold" panose="020F0803000000000000" pitchFamily="50" charset="-127"/>
+                <a:ea typeface="한컴 말랑말랑 Bold" panose="020F0803000000000000" pitchFamily="50" charset="-127"/>
+              </a:rPr>
+              <a:t> 분석</a:t>
+            </a:r>
+            <a:r>
+              <a:rPr lang="en-US" altLang="ko-KR" sz="2000" b="1" dirty="0">
+                <a:latin typeface="한컴 말랑말랑 Bold" panose="020F0803000000000000" pitchFamily="50" charset="-127"/>
+                <a:ea typeface="한컴 말랑말랑 Bold" panose="020F0803000000000000" pitchFamily="50" charset="-127"/>
+              </a:rPr>
+              <a:t>(Multivariate Analysis)</a:t>
+            </a:r>
+          </a:p>
+          <a:p>
+            <a:pPr>
+              <a:lnSpc>
+                <a:spcPct val="200000"/>
+              </a:lnSpc>
+            </a:pPr>
+            <a:endParaRPr lang="ko-KR" altLang="en-US" sz="2800" b="1" dirty="0">
+              <a:latin typeface="한컴 말랑말랑 Bold" panose="020F0803000000000000" pitchFamily="50" charset="-127"/>
+              <a:ea typeface="한컴 말랑말랑 Bold" panose="020F0803000000000000" pitchFamily="50" charset="-127"/>
+            </a:endParaRPr>
+          </a:p>
+        </p:txBody>
+      </p:sp>
+    </p:spTree>
+    <p:extLst>
+      <p:ext uri="{BB962C8B-B14F-4D97-AF65-F5344CB8AC3E}">
+        <p14:creationId xmlns:p14="http://schemas.microsoft.com/office/powerpoint/2010/main" val="3597550573"/>
+      </p:ext>
+    </p:extLst>
+  </p:cSld>
+  <p:clrMapOvr>
+    <a:masterClrMapping/>
+  </p:clrMapOvr>
+  <mc:AlternateContent xmlns:mc="http://schemas.openxmlformats.org/markup-compatibility/2006" xmlns:p14="http://schemas.microsoft.com/office/powerpoint/2010/main">
+    <mc:Choice Requires="p14">
+      <p:transition spd="med" p14:dur="700">
+        <p:fade/>
+      </p:transition>
+    </mc:Choice>
+    <mc:Fallback xmlns="">
+      <p:transition spd="med">
+        <p:fade/>
+      </p:transition>
+    </mc:Fallback>
+  </mc:AlternateContent>
+</p:sld>
+</file>
+
+<file path=ppt/slides/slide13.xml><?xml version="1.0" encoding="utf-8"?>
+<p:sld xmlns:a="http://schemas.openxmlformats.org/drawingml/2006/main" xmlns:r="http://schemas.openxmlformats.org/officeDocument/2006/relationships" xmlns:p="http://schemas.openxmlformats.org/presentationml/2006/main">
+  <p:cSld>
+    <p:spTree>
+      <p:nvGrpSpPr>
+        <p:cNvPr id="1" name=""/>
+        <p:cNvGrpSpPr/>
+        <p:nvPr/>
+      </p:nvGrpSpPr>
+      <p:grpSpPr>
+        <a:xfrm>
+          <a:off x="0" y="0"/>
+          <a:ext cx="0" cy="0"/>
+          <a:chOff x="0" y="0"/>
+          <a:chExt cx="0" cy="0"/>
+        </a:xfrm>
+      </p:grpSpPr>
+      <p:sp>
+        <p:nvSpPr>
+          <p:cNvPr id="29" name="슬라이드 번호 개체 틀 28"/>
+          <p:cNvSpPr>
+            <a:spLocks noGrp="1"/>
+          </p:cNvSpPr>
+          <p:nvPr>
+            <p:ph type="sldNum" sz="quarter" idx="12"/>
+          </p:nvPr>
+        </p:nvSpPr>
+        <p:spPr/>
+        <p:txBody>
+          <a:bodyPr/>
+          <a:lstStyle/>
+          <a:p>
+            <a:pPr rtl="0"/>
+            <a:fld id="{A3F31473-23EB-4724-8B59-FE6D21D89FA4}" type="slidenum">
+              <a:rPr lang="en-US" altLang="ko-KR" noProof="0" smtClean="0"/>
+              <a:t>13</a:t>
             </a:fld>
             <a:endParaRPr lang="en-US" altLang="ko-KR" noProof="0" dirty="0"/>
           </a:p>
@@ -7354,7 +8858,7 @@
 </p:sld>
 </file>
 
-<file path=ppt/slides/slide11.xml><?xml version="1.0" encoding="utf-8"?>
+<file path=ppt/slides/slide14.xml><?xml version="1.0" encoding="utf-8"?>
 <p:sld xmlns:a="http://schemas.openxmlformats.org/drawingml/2006/main" xmlns:r="http://schemas.openxmlformats.org/officeDocument/2006/relationships" xmlns:p="http://schemas.openxmlformats.org/presentationml/2006/main">
   <p:cSld>
     <p:spTree>
@@ -7362,7 +8866,7 @@
         <p:cNvPr id="1" name="">
           <a:extLst>
             <a:ext uri="{FF2B5EF4-FFF2-40B4-BE49-F238E27FC236}">
-              <a16:creationId xmlns:a16="http://schemas.microsoft.com/office/drawing/2014/main" id="{80A7D2E6-5BC7-CAB3-2C0E-BC7A94E56C14}"/>
+              <a16:creationId xmlns:a16="http://schemas.microsoft.com/office/drawing/2014/main" id="{F07CE65E-5996-67F8-E60B-8066957F6931}"/>
             </a:ext>
           </a:extLst>
         </p:cNvPr>
@@ -7379,13 +8883,67 @@
       </p:grpSpPr>
       <p:sp>
         <p:nvSpPr>
-          <p:cNvPr id="2" name="슬라이드 번호 개체 틀 1">
+          <p:cNvPr id="3" name="직사각형 2">
             <a:extLst>
               <a:ext uri="{FF2B5EF4-FFF2-40B4-BE49-F238E27FC236}">
-                <a16:creationId xmlns:a16="http://schemas.microsoft.com/office/drawing/2014/main" id="{31E0B742-A325-A1D7-3871-5E6D27347889}"/>
+                <a16:creationId xmlns:a16="http://schemas.microsoft.com/office/drawing/2014/main" id="{14C4EE04-E9BE-13CF-BF30-41C9137498B0}"/>
               </a:ext>
             </a:extLst>
           </p:cNvPr>
+          <p:cNvSpPr/>
+          <p:nvPr/>
+        </p:nvSpPr>
+        <p:spPr>
+          <a:xfrm>
+            <a:off x="615953" y="3789040"/>
+            <a:ext cx="8136904" cy="674850"/>
+          </a:xfrm>
+          <a:prstGeom prst="rect">
+            <a:avLst/>
+          </a:prstGeom>
+          <a:solidFill>
+            <a:schemeClr val="bg1">
+              <a:lumMod val="85000"/>
+            </a:schemeClr>
+          </a:solidFill>
+          <a:ln>
+            <a:noFill/>
+          </a:ln>
+        </p:spPr>
+        <p:style>
+          <a:lnRef idx="2">
+            <a:schemeClr val="accent1">
+              <a:shade val="15000"/>
+            </a:schemeClr>
+          </a:lnRef>
+          <a:fillRef idx="1">
+            <a:schemeClr val="accent1"/>
+          </a:fillRef>
+          <a:effectRef idx="0">
+            <a:schemeClr val="accent1"/>
+          </a:effectRef>
+          <a:fontRef idx="minor">
+            <a:schemeClr val="lt1"/>
+          </a:fontRef>
+        </p:style>
+        <p:txBody>
+          <a:bodyPr rtlCol="0" anchor="ctr"/>
+          <a:lstStyle/>
+          <a:p>
+            <a:pPr algn="ctr"/>
+            <a:endParaRPr lang="ko-KR" altLang="en-US" dirty="0"/>
+          </a:p>
+        </p:txBody>
+      </p:sp>
+      <p:sp>
+        <p:nvSpPr>
+          <p:cNvPr id="8" name="슬라이드 번호 개체 틀 7">
+            <a:extLst>
+              <a:ext uri="{FF2B5EF4-FFF2-40B4-BE49-F238E27FC236}">
+                <a16:creationId xmlns:a16="http://schemas.microsoft.com/office/drawing/2014/main" id="{FAE8EC77-CB5D-C18F-4F58-3C3CA2B2F57D}"/>
+              </a:ext>
+            </a:extLst>
+          </p:cNvPr>
           <p:cNvSpPr>
             <a:spLocks noGrp="1"/>
           </p:cNvSpPr>
@@ -7401,7 +8959,7 @@
             <a:pPr rtl="0"/>
             <a:fld id="{A3F31473-23EB-4724-8B59-FE6D21D89FA4}" type="slidenum">
               <a:rPr lang="en-US" altLang="ko-KR" noProof="0" smtClean="0"/>
-              <a:t>11</a:t>
+              <a:t>14</a:t>
             </a:fld>
             <a:endParaRPr lang="en-US" altLang="ko-KR" noProof="0" dirty="0"/>
           </a:p>
@@ -7409,10 +8967,10 @@
       </p:sp>
       <p:sp>
         <p:nvSpPr>
-          <p:cNvPr id="4" name="TextBox 3">
+          <p:cNvPr id="2" name="TextBox 1">
             <a:extLst>
               <a:ext uri="{FF2B5EF4-FFF2-40B4-BE49-F238E27FC236}">
-                <a16:creationId xmlns:a16="http://schemas.microsoft.com/office/drawing/2014/main" id="{D4CECDB0-CB65-5095-E5F1-4DBAE2D472C4}"/>
+                <a16:creationId xmlns:a16="http://schemas.microsoft.com/office/drawing/2014/main" id="{DEC818E5-EFFB-8367-5DA6-5B9CAEE3A849}"/>
               </a:ext>
             </a:extLst>
           </p:cNvPr>
@@ -7421,91 +8979,8 @@
         </p:nvSpPr>
         <p:spPr>
           <a:xfrm>
-            <a:off x="765820" y="1196752"/>
-            <a:ext cx="11233248" cy="1240148"/>
-          </a:xfrm>
-          <a:prstGeom prst="rect">
-            <a:avLst/>
-          </a:prstGeom>
-          <a:solidFill>
-            <a:schemeClr val="tx1">
-              <a:lumMod val="20000"/>
-              <a:lumOff val="80000"/>
-            </a:schemeClr>
-          </a:solidFill>
-        </p:spPr>
-        <p:txBody>
-          <a:bodyPr wrap="square" rtlCol="0">
-            <a:spAutoFit/>
-          </a:bodyPr>
-          <a:lstStyle/>
-          <a:p>
-            <a:pPr marL="285750" indent="-285750">
-              <a:lnSpc>
-                <a:spcPct val="200000"/>
-              </a:lnSpc>
-              <a:buFont typeface="Wingdings" panose="05000000000000000000" pitchFamily="2" charset="2"/>
-              <a:buChar char="v"/>
-            </a:pPr>
-            <a:r>
-              <a:rPr lang="en-US" altLang="ko-KR" sz="2000" dirty="0">
-                <a:latin typeface="휴먼모음T" panose="02030504000101010101" pitchFamily="18" charset="-127"/>
-                <a:ea typeface="휴먼모음T" panose="02030504000101010101" pitchFamily="18" charset="-127"/>
-                <a:hlinkClick r:id="rId3"/>
-              </a:rPr>
-              <a:t>https://github.com/ancestor9/data/blob/main/customers.csv</a:t>
-            </a:r>
-            <a:r>
-              <a:rPr lang="en-US" altLang="ko-KR" sz="2000" dirty="0">
-                <a:latin typeface="휴먼모음T" panose="02030504000101010101" pitchFamily="18" charset="-127"/>
-                <a:ea typeface="휴먼모음T" panose="02030504000101010101" pitchFamily="18" charset="-127"/>
-              </a:rPr>
-              <a:t> </a:t>
-            </a:r>
-            <a:r>
-              <a:rPr lang="ko-KR" altLang="en-US" sz="2000" dirty="0">
-                <a:latin typeface="휴먼모음T" panose="02030504000101010101" pitchFamily="18" charset="-127"/>
-                <a:ea typeface="휴먼모음T" panose="02030504000101010101" pitchFamily="18" charset="-127"/>
-              </a:rPr>
-              <a:t>의 데이터를 데이터셋으로 읽은 후 컴퓨터가 인식할 수 있도록 모든 데이터를 </a:t>
-            </a:r>
-            <a:r>
-              <a:rPr lang="ko-KR" altLang="en-US" sz="2000" dirty="0" err="1">
-                <a:latin typeface="휴먼모음T" panose="02030504000101010101" pitchFamily="18" charset="-127"/>
-                <a:ea typeface="휴먼모음T" panose="02030504000101010101" pitchFamily="18" charset="-127"/>
-              </a:rPr>
-              <a:t>수치화하여</a:t>
-            </a:r>
-            <a:r>
-              <a:rPr lang="ko-KR" altLang="en-US" sz="2000" dirty="0">
-                <a:latin typeface="휴먼모음T" panose="02030504000101010101" pitchFamily="18" charset="-127"/>
-                <a:ea typeface="휴먼모음T" panose="02030504000101010101" pitchFamily="18" charset="-127"/>
-              </a:rPr>
-              <a:t> 표현하라</a:t>
-            </a:r>
-            <a:endParaRPr lang="en-US" altLang="ko-KR" sz="2000" dirty="0">
-              <a:latin typeface="휴먼모음T" panose="02030504000101010101" pitchFamily="18" charset="-127"/>
-              <a:ea typeface="휴먼모음T" panose="02030504000101010101" pitchFamily="18" charset="-127"/>
-            </a:endParaRPr>
-          </a:p>
-        </p:txBody>
-      </p:sp>
-      <p:sp>
-        <p:nvSpPr>
-          <p:cNvPr id="9" name="TextBox 8">
-            <a:extLst>
-              <a:ext uri="{FF2B5EF4-FFF2-40B4-BE49-F238E27FC236}">
-                <a16:creationId xmlns:a16="http://schemas.microsoft.com/office/drawing/2014/main" id="{D802541C-2872-A95A-EE57-431C02DDCF2D}"/>
-              </a:ext>
-            </a:extLst>
-          </p:cNvPr>
-          <p:cNvSpPr txBox="1"/>
-          <p:nvPr/>
-        </p:nvSpPr>
-        <p:spPr>
-          <a:xfrm>
-            <a:off x="117748" y="260648"/>
-            <a:ext cx="2592288" cy="584775"/>
+            <a:off x="1629916" y="620688"/>
+            <a:ext cx="8928992" cy="5131020"/>
           </a:xfrm>
           <a:prstGeom prst="rect">
             <a:avLst/>
@@ -7518,107 +8993,182 @@
           </a:bodyPr>
           <a:lstStyle/>
           <a:p>
-            <a:r>
-              <a:rPr lang="ko-KR" altLang="en-US" sz="3200" b="1"/>
-              <a:t>문제 풀이</a:t>
-            </a:r>
-          </a:p>
-        </p:txBody>
-      </p:sp>
-      <p:pic>
-        <p:nvPicPr>
-          <p:cNvPr id="5" name="그림 4">
-            <a:extLst>
-              <a:ext uri="{FF2B5EF4-FFF2-40B4-BE49-F238E27FC236}">
-                <a16:creationId xmlns:a16="http://schemas.microsoft.com/office/drawing/2014/main" id="{31E2A028-0B51-A118-8E7B-4E624F2A4BFF}"/>
-              </a:ext>
-            </a:extLst>
-          </p:cNvPr>
-          <p:cNvPicPr>
-            <a:picLocks noChangeAspect="1"/>
-          </p:cNvPicPr>
-          <p:nvPr/>
-        </p:nvPicPr>
-        <p:blipFill>
-          <a:blip r:embed="rId4"/>
-          <a:stretch>
-            <a:fillRect/>
-          </a:stretch>
-        </p:blipFill>
-        <p:spPr>
-          <a:xfrm>
-            <a:off x="1197868" y="2770753"/>
-            <a:ext cx="8064896" cy="3079023"/>
-          </a:xfrm>
-          <a:prstGeom prst="rect">
-            <a:avLst/>
-          </a:prstGeom>
-        </p:spPr>
-      </p:pic>
-      <p:sp>
-        <p:nvSpPr>
-          <p:cNvPr id="7" name="TextBox 6">
-            <a:extLst>
-              <a:ext uri="{FF2B5EF4-FFF2-40B4-BE49-F238E27FC236}">
-                <a16:creationId xmlns:a16="http://schemas.microsoft.com/office/drawing/2014/main" id="{F30BC356-F6E6-69F8-92C0-0C77A8297D86}"/>
-              </a:ext>
-            </a:extLst>
-          </p:cNvPr>
-          <p:cNvSpPr txBox="1"/>
-          <p:nvPr/>
-        </p:nvSpPr>
-        <p:spPr>
-          <a:xfrm rot="591990">
-            <a:off x="9669996" y="327099"/>
-            <a:ext cx="2274697" cy="830997"/>
-          </a:xfrm>
-          <a:prstGeom prst="rect">
-            <a:avLst/>
-          </a:prstGeom>
-          <a:noFill/>
-        </p:spPr>
-        <p:txBody>
-          <a:bodyPr wrap="square">
-            <a:spAutoFit/>
-          </a:bodyPr>
-          <a:lstStyle/>
-          <a:p>
-            <a:r>
-              <a:rPr lang="en-US" altLang="ko-KR" sz="2400" dirty="0">
-                <a:latin typeface="휴먼모음T" panose="02030504000101010101" pitchFamily="18" charset="-127"/>
-                <a:ea typeface="휴먼모음T" panose="02030504000101010101" pitchFamily="18" charset="-127"/>
-              </a:rPr>
-              <a:t>Data</a:t>
-            </a:r>
-            <a:r>
-              <a:rPr lang="ko-KR" altLang="en-US" sz="2400" dirty="0">
-                <a:latin typeface="휴먼모음T" panose="02030504000101010101" pitchFamily="18" charset="-127"/>
-                <a:ea typeface="휴먼모음T" panose="02030504000101010101" pitchFamily="18" charset="-127"/>
+            <a:pPr>
+              <a:lnSpc>
+                <a:spcPct val="200000"/>
+              </a:lnSpc>
+            </a:pPr>
+            <a:r>
+              <a:rPr lang="ko-KR" altLang="en-US" sz="4000" b="1" dirty="0">
+                <a:latin typeface="한컴 말랑말랑 Bold" panose="020F0803000000000000" pitchFamily="50" charset="-127"/>
+                <a:ea typeface="한컴 말랑말랑 Bold" panose="020F0803000000000000" pitchFamily="50" charset="-127"/>
+              </a:rPr>
+              <a:t>목차</a:t>
+            </a:r>
+            <a:endParaRPr lang="en-US" altLang="ko-KR" sz="4000" b="1" dirty="0">
+              <a:latin typeface="한컴 말랑말랑 Bold" panose="020F0803000000000000" pitchFamily="50" charset="-127"/>
+              <a:ea typeface="한컴 말랑말랑 Bold" panose="020F0803000000000000" pitchFamily="50" charset="-127"/>
+            </a:endParaRPr>
+          </a:p>
+          <a:p>
+            <a:pPr marL="514350" indent="-514350">
+              <a:lnSpc>
+                <a:spcPct val="200000"/>
+              </a:lnSpc>
+              <a:buAutoNum type="arabicPeriod"/>
+            </a:pPr>
+            <a:r>
+              <a:rPr lang="ko-KR" altLang="en-US" sz="2000" b="1" dirty="0">
+                <a:latin typeface="한컴 말랑말랑 Bold" panose="020F0803000000000000" pitchFamily="50" charset="-127"/>
+                <a:ea typeface="한컴 말랑말랑 Bold" panose="020F0803000000000000" pitchFamily="50" charset="-127"/>
+              </a:rPr>
+              <a:t>통계학</a:t>
+            </a:r>
+            <a:r>
+              <a:rPr lang="en-US" altLang="ko-KR" sz="2000" b="1" dirty="0">
+                <a:latin typeface="한컴 말랑말랑 Bold" panose="020F0803000000000000" pitchFamily="50" charset="-127"/>
+                <a:ea typeface="한컴 말랑말랑 Bold" panose="020F0803000000000000" pitchFamily="50" charset="-127"/>
+              </a:rPr>
+              <a:t>(Statistics)</a:t>
+            </a:r>
+          </a:p>
+          <a:p>
+            <a:pPr marL="514350" indent="-514350">
+              <a:lnSpc>
+                <a:spcPct val="200000"/>
+              </a:lnSpc>
+              <a:buAutoNum type="arabicPeriod"/>
+            </a:pPr>
+            <a:r>
+              <a:rPr lang="ko-KR" altLang="en-US" sz="2000" b="1" dirty="0">
+                <a:latin typeface="한컴 말랑말랑 Bold" panose="020F0803000000000000" pitchFamily="50" charset="-127"/>
+                <a:ea typeface="한컴 말랑말랑 Bold" panose="020F0803000000000000" pitchFamily="50" charset="-127"/>
+              </a:rPr>
+              <a:t>모집단과</a:t>
+            </a:r>
+            <a:r>
+              <a:rPr lang="en-US" altLang="ko-KR" sz="2000" b="1" dirty="0">
+                <a:latin typeface="한컴 말랑말랑 Bold" panose="020F0803000000000000" pitchFamily="50" charset="-127"/>
+                <a:ea typeface="한컴 말랑말랑 Bold" panose="020F0803000000000000" pitchFamily="50" charset="-127"/>
               </a:rPr>
               <a:t> </a:t>
             </a:r>
             <a:r>
-              <a:rPr lang="en-US" altLang="ko-KR" sz="2400" dirty="0">
-                <a:latin typeface="휴먼모음T" panose="02030504000101010101" pitchFamily="18" charset="-127"/>
-                <a:ea typeface="휴먼모음T" panose="02030504000101010101" pitchFamily="18" charset="-127"/>
-              </a:rPr>
-              <a:t>Representation</a:t>
-            </a:r>
-            <a:r>
-              <a:rPr lang="ko-KR" altLang="en-US" sz="2400" dirty="0">
-                <a:latin typeface="휴먼모음T" panose="02030504000101010101" pitchFamily="18" charset="-127"/>
-                <a:ea typeface="휴먼모음T" panose="02030504000101010101" pitchFamily="18" charset="-127"/>
+              <a:rPr lang="ko-KR" altLang="en-US" sz="2000" b="1" dirty="0">
+                <a:latin typeface="한컴 말랑말랑 Bold" panose="020F0803000000000000" pitchFamily="50" charset="-127"/>
+                <a:ea typeface="한컴 말랑말랑 Bold" panose="020F0803000000000000" pitchFamily="50" charset="-127"/>
+              </a:rPr>
+              <a:t>표본조사 방법</a:t>
+            </a:r>
+            <a:endParaRPr lang="en-US" altLang="ko-KR" sz="2000" b="1" dirty="0">
+              <a:latin typeface="한컴 말랑말랑 Bold" panose="020F0803000000000000" pitchFamily="50" charset="-127"/>
+              <a:ea typeface="한컴 말랑말랑 Bold" panose="020F0803000000000000" pitchFamily="50" charset="-127"/>
+            </a:endParaRPr>
+          </a:p>
+          <a:p>
+            <a:pPr marL="514350" indent="-514350">
+              <a:lnSpc>
+                <a:spcPct val="200000"/>
+              </a:lnSpc>
+              <a:buAutoNum type="arabicPeriod"/>
+            </a:pPr>
+            <a:r>
+              <a:rPr lang="ko-KR" altLang="en-US" sz="2000" b="1" dirty="0">
+                <a:latin typeface="한컴 말랑말랑 Bold" panose="020F0803000000000000" pitchFamily="50" charset="-127"/>
+                <a:ea typeface="한컴 말랑말랑 Bold" panose="020F0803000000000000" pitchFamily="50" charset="-127"/>
+              </a:rPr>
+              <a:t>데이터의 종류</a:t>
+            </a:r>
+            <a:r>
+              <a:rPr lang="en-US" altLang="ko-KR" sz="2000" b="1" dirty="0">
+                <a:latin typeface="한컴 말랑말랑 Bold" panose="020F0803000000000000" pitchFamily="50" charset="-127"/>
+                <a:ea typeface="한컴 말랑말랑 Bold" panose="020F0803000000000000" pitchFamily="50" charset="-127"/>
+              </a:rPr>
+              <a:t>(Data type)</a:t>
+            </a:r>
+          </a:p>
+          <a:p>
+            <a:pPr marL="514350" indent="-514350">
+              <a:lnSpc>
+                <a:spcPct val="200000"/>
+              </a:lnSpc>
+              <a:buAutoNum type="arabicPeriod"/>
+            </a:pPr>
+            <a:r>
+              <a:rPr lang="ko-KR" altLang="en-US" sz="2000" b="1" dirty="0">
+                <a:latin typeface="한컴 말랑말랑 Bold" panose="020F0803000000000000" pitchFamily="50" charset="-127"/>
+                <a:ea typeface="한컴 말랑말랑 Bold" panose="020F0803000000000000" pitchFamily="50" charset="-127"/>
+              </a:rPr>
+              <a:t>주요</a:t>
+            </a:r>
+            <a:r>
+              <a:rPr lang="en-US" altLang="ko-KR" sz="2000" b="1" dirty="0">
+                <a:latin typeface="한컴 말랑말랑 Bold" panose="020F0803000000000000" pitchFamily="50" charset="-127"/>
+                <a:ea typeface="한컴 말랑말랑 Bold" panose="020F0803000000000000" pitchFamily="50" charset="-127"/>
               </a:rPr>
               <a:t> </a:t>
             </a:r>
-            <a:endParaRPr lang="ko-KR" altLang="en-US" sz="2400" dirty="0"/>
+            <a:r>
+              <a:rPr lang="ko-KR" altLang="en-US" sz="2000" b="1" dirty="0">
+                <a:latin typeface="한컴 말랑말랑 Bold" panose="020F0803000000000000" pitchFamily="50" charset="-127"/>
+                <a:ea typeface="한컴 말랑말랑 Bold" panose="020F0803000000000000" pitchFamily="50" charset="-127"/>
+              </a:rPr>
+              <a:t>통계량</a:t>
+            </a:r>
+            <a:r>
+              <a:rPr lang="en-US" altLang="ko-KR" sz="2000" b="1" dirty="0">
+                <a:latin typeface="한컴 말랑말랑 Bold" panose="020F0803000000000000" pitchFamily="50" charset="-127"/>
+                <a:ea typeface="한컴 말랑말랑 Bold" panose="020F0803000000000000" pitchFamily="50" charset="-127"/>
+              </a:rPr>
+              <a:t>(Statistic)</a:t>
+            </a:r>
+          </a:p>
+          <a:p>
+            <a:pPr marL="514350" indent="-514350">
+              <a:lnSpc>
+                <a:spcPct val="200000"/>
+              </a:lnSpc>
+              <a:buAutoNum type="arabicPeriod"/>
+            </a:pPr>
+            <a:r>
+              <a:rPr lang="ko-KR" altLang="en-US" sz="2000" b="1" dirty="0" err="1">
+                <a:latin typeface="한컴 말랑말랑 Bold" panose="020F0803000000000000" pitchFamily="50" charset="-127"/>
+                <a:ea typeface="한컴 말랑말랑 Bold" panose="020F0803000000000000" pitchFamily="50" charset="-127"/>
+              </a:rPr>
+              <a:t>다변량</a:t>
+            </a:r>
+            <a:r>
+              <a:rPr lang="ko-KR" altLang="en-US" sz="2000" b="1" dirty="0">
+                <a:latin typeface="한컴 말랑말랑 Bold" panose="020F0803000000000000" pitchFamily="50" charset="-127"/>
+                <a:ea typeface="한컴 말랑말랑 Bold" panose="020F0803000000000000" pitchFamily="50" charset="-127"/>
+              </a:rPr>
+              <a:t> 분석</a:t>
+            </a:r>
+            <a:r>
+              <a:rPr lang="en-US" altLang="ko-KR" sz="2000" b="1" dirty="0">
+                <a:latin typeface="한컴 말랑말랑 Bold" panose="020F0803000000000000" pitchFamily="50" charset="-127"/>
+                <a:ea typeface="한컴 말랑말랑 Bold" panose="020F0803000000000000" pitchFamily="50" charset="-127"/>
+              </a:rPr>
+              <a:t>(Multivariate Analysis)</a:t>
+            </a:r>
+          </a:p>
+          <a:p>
+            <a:pPr>
+              <a:lnSpc>
+                <a:spcPct val="200000"/>
+              </a:lnSpc>
+            </a:pPr>
+            <a:endParaRPr lang="ko-KR" altLang="en-US" sz="2800" b="1" dirty="0">
+              <a:latin typeface="한컴 말랑말랑 Bold" panose="020F0803000000000000" pitchFamily="50" charset="-127"/>
+              <a:ea typeface="한컴 말랑말랑 Bold" panose="020F0803000000000000" pitchFamily="50" charset="-127"/>
+            </a:endParaRPr>
           </a:p>
         </p:txBody>
       </p:sp>
     </p:spTree>
     <p:extLst>
       <p:ext uri="{BB962C8B-B14F-4D97-AF65-F5344CB8AC3E}">
-        <p14:creationId xmlns:p14="http://schemas.microsoft.com/office/powerpoint/2010/main" val="1101704896"/>
+        <p14:creationId xmlns:p14="http://schemas.microsoft.com/office/powerpoint/2010/main" val="3664835998"/>
       </p:ext>
     </p:extLst>
   </p:cSld>
@@ -7640,7 +9190,7 @@
 </p:sld>
 </file>
 
-<file path=ppt/slides/slide12.xml><?xml version="1.0" encoding="utf-8"?>
+<file path=ppt/slides/slide15.xml><?xml version="1.0" encoding="utf-8"?>
 <p:sld xmlns:a="http://schemas.openxmlformats.org/drawingml/2006/main" xmlns:r="http://schemas.openxmlformats.org/officeDocument/2006/relationships" xmlns:p="http://schemas.openxmlformats.org/presentationml/2006/main">
   <p:cSld>
     <p:spTree>
@@ -7675,7 +9225,7 @@
             <a:pPr rtl="0"/>
             <a:fld id="{A3F31473-23EB-4724-8B59-FE6D21D89FA4}" type="slidenum">
               <a:rPr lang="en-US" altLang="ko-KR" noProof="0" smtClean="0"/>
-              <a:t>12</a:t>
+              <a:t>15</a:t>
             </a:fld>
             <a:endParaRPr lang="en-US" altLang="ko-KR" noProof="0" dirty="0"/>
           </a:p>
@@ -7730,7 +9280,7 @@
 </p:sld>
 </file>
 
-<file path=ppt/slides/slide13.xml><?xml version="1.0" encoding="utf-8"?>
+<file path=ppt/slides/slide16.xml><?xml version="1.0" encoding="utf-8"?>
 <p:sld xmlns:a="http://schemas.openxmlformats.org/drawingml/2006/main" xmlns:r="http://schemas.openxmlformats.org/officeDocument/2006/relationships" xmlns:p="http://schemas.openxmlformats.org/presentationml/2006/main">
   <p:cSld>
     <p:spTree>
@@ -7765,7 +9315,7 @@
             <a:pPr rtl="0"/>
             <a:fld id="{A3F31473-23EB-4724-8B59-FE6D21D89FA4}" type="slidenum">
               <a:rPr lang="en-US" altLang="ko-KR" noProof="0" smtClean="0"/>
-              <a:t>13</a:t>
+              <a:t>16</a:t>
             </a:fld>
             <a:endParaRPr lang="en-US" altLang="ko-KR" noProof="0" dirty="0"/>
           </a:p>
@@ -7820,7 +9370,411 @@
 </p:sld>
 </file>
 
-<file path=ppt/slides/slide14.xml><?xml version="1.0" encoding="utf-8"?>
+<file path=ppt/slides/slide17.xml><?xml version="1.0" encoding="utf-8"?>
+<p:sld xmlns:a="http://schemas.openxmlformats.org/drawingml/2006/main" xmlns:r="http://schemas.openxmlformats.org/officeDocument/2006/relationships" xmlns:p="http://schemas.openxmlformats.org/presentationml/2006/main">
+  <p:cSld>
+    <p:spTree>
+      <p:nvGrpSpPr>
+        <p:cNvPr id="1" name="">
+          <a:extLst>
+            <a:ext uri="{FF2B5EF4-FFF2-40B4-BE49-F238E27FC236}">
+              <a16:creationId xmlns:a16="http://schemas.microsoft.com/office/drawing/2014/main" id="{5938BFDF-043C-D416-8A82-CFA167E4C984}"/>
+            </a:ext>
+          </a:extLst>
+        </p:cNvPr>
+        <p:cNvGrpSpPr/>
+        <p:nvPr/>
+      </p:nvGrpSpPr>
+      <p:grpSpPr>
+        <a:xfrm>
+          <a:off x="0" y="0"/>
+          <a:ext cx="0" cy="0"/>
+          <a:chOff x="0" y="0"/>
+          <a:chExt cx="0" cy="0"/>
+        </a:xfrm>
+      </p:grpSpPr>
+      <p:sp>
+        <p:nvSpPr>
+          <p:cNvPr id="2" name="슬라이드 번호 개체 틀 1">
+            <a:extLst>
+              <a:ext uri="{FF2B5EF4-FFF2-40B4-BE49-F238E27FC236}">
+                <a16:creationId xmlns:a16="http://schemas.microsoft.com/office/drawing/2014/main" id="{3E44CB5B-45F9-105B-6990-2F9C08EBD0E9}"/>
+              </a:ext>
+            </a:extLst>
+          </p:cNvPr>
+          <p:cNvSpPr>
+            <a:spLocks noGrp="1"/>
+          </p:cNvSpPr>
+          <p:nvPr>
+            <p:ph type="sldNum" sz="quarter" idx="12"/>
+          </p:nvPr>
+        </p:nvSpPr>
+        <p:spPr/>
+        <p:txBody>
+          <a:bodyPr/>
+          <a:lstStyle/>
+          <a:p>
+            <a:pPr rtl="0"/>
+            <a:fld id="{A3F31473-23EB-4724-8B59-FE6D21D89FA4}" type="slidenum">
+              <a:rPr lang="en-US" altLang="ko-KR" noProof="0" smtClean="0"/>
+              <a:t>17</a:t>
+            </a:fld>
+            <a:endParaRPr lang="en-US" altLang="ko-KR" noProof="0" dirty="0"/>
+          </a:p>
+        </p:txBody>
+      </p:sp>
+      <p:sp>
+        <p:nvSpPr>
+          <p:cNvPr id="4" name="TextBox 3">
+            <a:extLst>
+              <a:ext uri="{FF2B5EF4-FFF2-40B4-BE49-F238E27FC236}">
+                <a16:creationId xmlns:a16="http://schemas.microsoft.com/office/drawing/2014/main" id="{BEA21184-37EF-AC7E-BD87-A4D8546D0FD6}"/>
+              </a:ext>
+            </a:extLst>
+          </p:cNvPr>
+          <p:cNvSpPr txBox="1"/>
+          <p:nvPr/>
+        </p:nvSpPr>
+        <p:spPr>
+          <a:xfrm>
+            <a:off x="765820" y="1196752"/>
+            <a:ext cx="11233248" cy="4933466"/>
+          </a:xfrm>
+          <a:prstGeom prst="rect">
+            <a:avLst/>
+          </a:prstGeom>
+          <a:solidFill>
+            <a:schemeClr val="tx1">
+              <a:lumMod val="20000"/>
+              <a:lumOff val="80000"/>
+            </a:schemeClr>
+          </a:solidFill>
+        </p:spPr>
+        <p:txBody>
+          <a:bodyPr wrap="square" rtlCol="0">
+            <a:spAutoFit/>
+          </a:bodyPr>
+          <a:lstStyle/>
+          <a:p>
+            <a:pPr marL="285750" indent="-285750">
+              <a:lnSpc>
+                <a:spcPct val="200000"/>
+              </a:lnSpc>
+              <a:buFont typeface="Wingdings" panose="05000000000000000000" pitchFamily="2" charset="2"/>
+              <a:buChar char="v"/>
+            </a:pPr>
+            <a:r>
+              <a:rPr lang="en-US" altLang="ko-KR" sz="2000" dirty="0">
+                <a:latin typeface="휴먼모음T" panose="02030504000101010101" pitchFamily="18" charset="-127"/>
+                <a:ea typeface="휴먼모음T" panose="02030504000101010101" pitchFamily="18" charset="-127"/>
+              </a:rPr>
+              <a:t>seaborn</a:t>
+            </a:r>
+            <a:r>
+              <a:rPr lang="ko-KR" altLang="en-US" sz="2000" dirty="0">
+                <a:latin typeface="휴먼모음T" panose="02030504000101010101" pitchFamily="18" charset="-127"/>
+                <a:ea typeface="휴먼모음T" panose="02030504000101010101" pitchFamily="18" charset="-127"/>
+              </a:rPr>
+              <a:t>의 </a:t>
+            </a:r>
+            <a:r>
+              <a:rPr lang="en-US" altLang="ko-KR" sz="2000" dirty="0">
+                <a:latin typeface="휴먼모음T" panose="02030504000101010101" pitchFamily="18" charset="-127"/>
+                <a:ea typeface="휴먼모음T" panose="02030504000101010101" pitchFamily="18" charset="-127"/>
+              </a:rPr>
+              <a:t>tip </a:t>
+            </a:r>
+            <a:r>
+              <a:rPr lang="ko-KR" altLang="en-US" sz="2000" dirty="0">
+                <a:latin typeface="휴먼모음T" panose="02030504000101010101" pitchFamily="18" charset="-127"/>
+                <a:ea typeface="휴먼모음T" panose="02030504000101010101" pitchFamily="18" charset="-127"/>
+              </a:rPr>
+              <a:t>변수의 값</a:t>
+            </a:r>
+            <a:r>
+              <a:rPr lang="en-US" altLang="ko-KR" sz="2000" dirty="0">
+                <a:latin typeface="휴먼모음T" panose="02030504000101010101" pitchFamily="18" charset="-127"/>
+                <a:ea typeface="휴먼모음T" panose="02030504000101010101" pitchFamily="18" charset="-127"/>
+              </a:rPr>
+              <a:t>(</a:t>
+            </a:r>
+            <a:r>
+              <a:rPr lang="ko-KR" altLang="en-US" sz="2000" dirty="0">
+                <a:latin typeface="휴먼모음T" panose="02030504000101010101" pitchFamily="18" charset="-127"/>
+                <a:ea typeface="휴먼모음T" panose="02030504000101010101" pitchFamily="18" charset="-127"/>
+              </a:rPr>
+              <a:t>데이터</a:t>
+            </a:r>
+            <a:r>
+              <a:rPr lang="en-US" altLang="ko-KR" sz="2000" dirty="0">
+                <a:latin typeface="휴먼모음T" panose="02030504000101010101" pitchFamily="18" charset="-127"/>
+                <a:ea typeface="휴먼모음T" panose="02030504000101010101" pitchFamily="18" charset="-127"/>
+              </a:rPr>
+              <a:t>)</a:t>
+            </a:r>
+            <a:r>
+              <a:rPr lang="ko-KR" altLang="en-US" sz="2000" dirty="0">
+                <a:latin typeface="휴먼모음T" panose="02030504000101010101" pitchFamily="18" charset="-127"/>
+                <a:ea typeface="휴먼모음T" panose="02030504000101010101" pitchFamily="18" charset="-127"/>
+              </a:rPr>
+              <a:t> 분포</a:t>
+            </a:r>
+            <a:r>
+              <a:rPr lang="en-US" altLang="ko-KR" sz="2000" dirty="0">
+                <a:latin typeface="휴먼모음T" panose="02030504000101010101" pitchFamily="18" charset="-127"/>
+                <a:ea typeface="휴먼모음T" panose="02030504000101010101" pitchFamily="18" charset="-127"/>
+              </a:rPr>
+              <a:t>, </a:t>
+            </a:r>
+            <a:r>
+              <a:rPr lang="ko-KR" altLang="en-US" sz="2000" dirty="0">
+                <a:latin typeface="휴먼모음T" panose="02030504000101010101" pitchFamily="18" charset="-127"/>
+                <a:ea typeface="휴먼모음T" panose="02030504000101010101" pitchFamily="18" charset="-127"/>
+              </a:rPr>
+              <a:t>평균과 분산을 설명하라</a:t>
+            </a:r>
+            <a:endParaRPr lang="en-US" altLang="ko-KR" sz="2000" dirty="0">
+              <a:latin typeface="휴먼모음T" panose="02030504000101010101" pitchFamily="18" charset="-127"/>
+              <a:ea typeface="휴먼모음T" panose="02030504000101010101" pitchFamily="18" charset="-127"/>
+            </a:endParaRPr>
+          </a:p>
+          <a:p>
+            <a:pPr marL="285750" indent="-285750">
+              <a:lnSpc>
+                <a:spcPct val="200000"/>
+              </a:lnSpc>
+              <a:buFont typeface="Wingdings" panose="05000000000000000000" pitchFamily="2" charset="2"/>
+              <a:buChar char="v"/>
+            </a:pPr>
+            <a:endParaRPr lang="en-US" altLang="ko-KR" sz="2000" dirty="0">
+              <a:latin typeface="휴먼모음T" panose="02030504000101010101" pitchFamily="18" charset="-127"/>
+              <a:ea typeface="휴먼모음T" panose="02030504000101010101" pitchFamily="18" charset="-127"/>
+            </a:endParaRPr>
+          </a:p>
+          <a:p>
+            <a:pPr marL="285750" indent="-285750">
+              <a:lnSpc>
+                <a:spcPct val="200000"/>
+              </a:lnSpc>
+              <a:buFont typeface="Wingdings" panose="05000000000000000000" pitchFamily="2" charset="2"/>
+              <a:buChar char="v"/>
+            </a:pPr>
+            <a:endParaRPr lang="en-US" altLang="ko-KR" sz="2000" dirty="0">
+              <a:latin typeface="휴먼모음T" panose="02030504000101010101" pitchFamily="18" charset="-127"/>
+              <a:ea typeface="휴먼모음T" panose="02030504000101010101" pitchFamily="18" charset="-127"/>
+            </a:endParaRPr>
+          </a:p>
+          <a:p>
+            <a:pPr marL="285750" indent="-285750">
+              <a:lnSpc>
+                <a:spcPct val="200000"/>
+              </a:lnSpc>
+              <a:buFont typeface="Wingdings" panose="05000000000000000000" pitchFamily="2" charset="2"/>
+              <a:buChar char="v"/>
+            </a:pPr>
+            <a:r>
+              <a:rPr lang="ko-KR" altLang="en-US" sz="2000" dirty="0">
+                <a:latin typeface="휴먼모음T" panose="02030504000101010101" pitchFamily="18" charset="-127"/>
+                <a:ea typeface="휴먼모음T" panose="02030504000101010101" pitchFamily="18" charset="-127"/>
+              </a:rPr>
+              <a:t>평균의 함정</a:t>
+            </a:r>
+            <a:r>
+              <a:rPr lang="en-US" altLang="ko-KR" sz="2000" dirty="0">
+                <a:latin typeface="휴먼모음T" panose="02030504000101010101" pitchFamily="18" charset="-127"/>
+                <a:ea typeface="휴먼모음T" panose="02030504000101010101" pitchFamily="18" charset="-127"/>
+              </a:rPr>
+              <a:t>(the pitfall of mean)</a:t>
+            </a:r>
+          </a:p>
+          <a:p>
+            <a:pPr marL="285750" indent="-285750">
+              <a:lnSpc>
+                <a:spcPct val="200000"/>
+              </a:lnSpc>
+              <a:buFont typeface="Wingdings" panose="05000000000000000000" pitchFamily="2" charset="2"/>
+              <a:buChar char="v"/>
+            </a:pPr>
+            <a:r>
+              <a:rPr lang="en-US" altLang="ko-KR" sz="2000" dirty="0">
+                <a:latin typeface="휴먼모음T" panose="02030504000101010101" pitchFamily="18" charset="-127"/>
+                <a:ea typeface="휴먼모음T" panose="02030504000101010101" pitchFamily="18" charset="-127"/>
+              </a:rPr>
+              <a:t>seaborn</a:t>
+            </a:r>
+            <a:r>
+              <a:rPr lang="ko-KR" altLang="en-US" sz="2000" dirty="0">
+                <a:latin typeface="휴먼모음T" panose="02030504000101010101" pitchFamily="18" charset="-127"/>
+                <a:ea typeface="휴먼모음T" panose="02030504000101010101" pitchFamily="18" charset="-127"/>
+              </a:rPr>
+              <a:t>의 </a:t>
+            </a:r>
+            <a:r>
+              <a:rPr lang="en-US" altLang="ko-KR" sz="2000" dirty="0">
+                <a:latin typeface="휴먼모음T" panose="02030504000101010101" pitchFamily="18" charset="-127"/>
+                <a:ea typeface="휴먼모음T" panose="02030504000101010101" pitchFamily="18" charset="-127"/>
+              </a:rPr>
+              <a:t>tips </a:t>
+            </a:r>
+            <a:r>
+              <a:rPr lang="ko-KR" altLang="en-US" sz="2000" dirty="0">
+                <a:latin typeface="휴먼모음T" panose="02030504000101010101" pitchFamily="18" charset="-127"/>
+                <a:ea typeface="휴먼모음T" panose="02030504000101010101" pitchFamily="18" charset="-127"/>
+              </a:rPr>
+              <a:t>모집단에서 </a:t>
+            </a:r>
+            <a:r>
+              <a:rPr lang="en-US" altLang="ko-KR" sz="2000" dirty="0">
+                <a:latin typeface="휴먼모음T" panose="02030504000101010101" pitchFamily="18" charset="-127"/>
+                <a:ea typeface="휴먼모음T" panose="02030504000101010101" pitchFamily="18" charset="-127"/>
+              </a:rPr>
+              <a:t>3</a:t>
+            </a:r>
+            <a:r>
+              <a:rPr lang="ko-KR" altLang="en-US" sz="2000" dirty="0">
+                <a:latin typeface="휴먼모음T" panose="02030504000101010101" pitchFamily="18" charset="-127"/>
+                <a:ea typeface="휴먼모음T" panose="02030504000101010101" pitchFamily="18" charset="-127"/>
+              </a:rPr>
+              <a:t>가지 표본추출방법의</a:t>
+            </a:r>
+            <a:r>
+              <a:rPr lang="en-US" altLang="ko-KR" sz="2000" dirty="0">
+                <a:latin typeface="휴먼모음T" panose="02030504000101010101" pitchFamily="18" charset="-127"/>
+                <a:ea typeface="휴먼모음T" panose="02030504000101010101" pitchFamily="18" charset="-127"/>
+              </a:rPr>
+              <a:t> </a:t>
+            </a:r>
+            <a:r>
+              <a:rPr lang="ko-KR" altLang="en-US" sz="2000" dirty="0">
+                <a:latin typeface="휴먼모음T" panose="02030504000101010101" pitchFamily="18" charset="-127"/>
+                <a:ea typeface="휴먼모음T" panose="02030504000101010101" pitchFamily="18" charset="-127"/>
+              </a:rPr>
+              <a:t>각 표본과 모집단과의 평균과 분산을 비교한 후 어떤 표본추출방법이 가장 적합한지 토론하라</a:t>
+            </a:r>
+            <a:endParaRPr lang="en-US" altLang="ko-KR" sz="2000" dirty="0">
+              <a:latin typeface="휴먼모음T" panose="02030504000101010101" pitchFamily="18" charset="-127"/>
+              <a:ea typeface="휴먼모음T" panose="02030504000101010101" pitchFamily="18" charset="-127"/>
+            </a:endParaRPr>
+          </a:p>
+          <a:p>
+            <a:pPr marL="285750" indent="-285750">
+              <a:lnSpc>
+                <a:spcPct val="200000"/>
+              </a:lnSpc>
+              <a:buFont typeface="Wingdings" panose="05000000000000000000" pitchFamily="2" charset="2"/>
+              <a:buChar char="v"/>
+            </a:pPr>
+            <a:endParaRPr lang="en-US" altLang="ko-KR" sz="2000" dirty="0">
+              <a:latin typeface="휴먼모음T" panose="02030504000101010101" pitchFamily="18" charset="-127"/>
+              <a:ea typeface="휴먼모음T" panose="02030504000101010101" pitchFamily="18" charset="-127"/>
+            </a:endParaRPr>
+          </a:p>
+          <a:p>
+            <a:pPr marL="285750" indent="-285750">
+              <a:lnSpc>
+                <a:spcPct val="200000"/>
+              </a:lnSpc>
+              <a:buFont typeface="Wingdings" panose="05000000000000000000" pitchFamily="2" charset="2"/>
+              <a:buChar char="v"/>
+            </a:pPr>
+            <a:endParaRPr lang="ko-KR" altLang="en-US" sz="2000" dirty="0">
+              <a:latin typeface="휴먼모음T" panose="02030504000101010101" pitchFamily="18" charset="-127"/>
+              <a:ea typeface="휴먼모음T" panose="02030504000101010101" pitchFamily="18" charset="-127"/>
+            </a:endParaRPr>
+          </a:p>
+        </p:txBody>
+      </p:sp>
+      <p:pic>
+        <p:nvPicPr>
+          <p:cNvPr id="8" name="그림 7">
+            <a:extLst>
+              <a:ext uri="{FF2B5EF4-FFF2-40B4-BE49-F238E27FC236}">
+                <a16:creationId xmlns:a16="http://schemas.microsoft.com/office/drawing/2014/main" id="{6E396372-435D-01F1-308C-E5EFFE0434C8}"/>
+              </a:ext>
+            </a:extLst>
+          </p:cNvPr>
+          <p:cNvPicPr>
+            <a:picLocks noChangeAspect="1"/>
+          </p:cNvPicPr>
+          <p:nvPr/>
+        </p:nvPicPr>
+        <p:blipFill>
+          <a:blip r:embed="rId3"/>
+          <a:stretch>
+            <a:fillRect/>
+          </a:stretch>
+        </p:blipFill>
+        <p:spPr>
+          <a:xfrm>
+            <a:off x="1516394" y="1919399"/>
+            <a:ext cx="8640960" cy="1197437"/>
+          </a:xfrm>
+          <a:prstGeom prst="rect">
+            <a:avLst/>
+          </a:prstGeom>
+        </p:spPr>
+      </p:pic>
+      <p:sp>
+        <p:nvSpPr>
+          <p:cNvPr id="9" name="TextBox 8">
+            <a:extLst>
+              <a:ext uri="{FF2B5EF4-FFF2-40B4-BE49-F238E27FC236}">
+                <a16:creationId xmlns:a16="http://schemas.microsoft.com/office/drawing/2014/main" id="{B80152FC-1579-E1AE-98F9-EEC881A49A22}"/>
+              </a:ext>
+            </a:extLst>
+          </p:cNvPr>
+          <p:cNvSpPr txBox="1"/>
+          <p:nvPr/>
+        </p:nvSpPr>
+        <p:spPr>
+          <a:xfrm>
+            <a:off x="117748" y="260648"/>
+            <a:ext cx="2592288" cy="584775"/>
+          </a:xfrm>
+          <a:prstGeom prst="rect">
+            <a:avLst/>
+          </a:prstGeom>
+          <a:noFill/>
+        </p:spPr>
+        <p:txBody>
+          <a:bodyPr wrap="square" rtlCol="0">
+            <a:spAutoFit/>
+          </a:bodyPr>
+          <a:lstStyle/>
+          <a:p>
+            <a:r>
+              <a:rPr lang="ko-KR" altLang="en-US" sz="3200" b="1"/>
+              <a:t>문제 풀이</a:t>
+            </a:r>
+          </a:p>
+        </p:txBody>
+      </p:sp>
+    </p:spTree>
+    <p:extLst>
+      <p:ext uri="{BB962C8B-B14F-4D97-AF65-F5344CB8AC3E}">
+        <p14:creationId xmlns:p14="http://schemas.microsoft.com/office/powerpoint/2010/main" val="3954576201"/>
+      </p:ext>
+    </p:extLst>
+  </p:cSld>
+  <p:clrMapOvr>
+    <a:masterClrMapping/>
+  </p:clrMapOvr>
+  <mc:AlternateContent xmlns:mc="http://schemas.openxmlformats.org/markup-compatibility/2006" xmlns:p14="http://schemas.microsoft.com/office/powerpoint/2010/main">
+    <mc:Choice Requires="p14">
+      <p:transition spd="med" p14:dur="700">
+        <p:fade/>
+      </p:transition>
+    </mc:Choice>
+    <mc:Fallback xmlns="">
+      <p:transition spd="med">
+        <p:fade/>
+      </p:transition>
+    </mc:Fallback>
+  </mc:AlternateContent>
+</p:sld>
+</file>
+
+<file path=ppt/slides/slide18.xml><?xml version="1.0" encoding="utf-8"?>
 <p:sld xmlns:a="http://schemas.openxmlformats.org/drawingml/2006/main" xmlns:r="http://schemas.openxmlformats.org/officeDocument/2006/relationships" xmlns:p="http://schemas.openxmlformats.org/presentationml/2006/main">
   <p:cSld>
     <p:spTree>
@@ -7839,7 +9793,13 @@
       </p:grpSpPr>
       <p:sp>
         <p:nvSpPr>
-          <p:cNvPr id="2" name="슬라이드 번호 개체 틀 1"/>
+          <p:cNvPr id="4" name="슬라이드 번호 개체 틀 3">
+            <a:extLst>
+              <a:ext uri="{FF2B5EF4-FFF2-40B4-BE49-F238E27FC236}">
+                <a16:creationId xmlns:a16="http://schemas.microsoft.com/office/drawing/2014/main" id="{76D1C135-780A-D855-FC3F-601039C32374}"/>
+              </a:ext>
+            </a:extLst>
+          </p:cNvPr>
           <p:cNvSpPr>
             <a:spLocks noGrp="1"/>
           </p:cNvSpPr>
@@ -7855,7 +9815,719 @@
             <a:pPr rtl="0"/>
             <a:fld id="{A3F31473-23EB-4724-8B59-FE6D21D89FA4}" type="slidenum">
               <a:rPr lang="en-US" altLang="ko-KR" noProof="0" smtClean="0"/>
-              <a:t>14</a:t>
+              <a:t>18</a:t>
+            </a:fld>
+            <a:endParaRPr lang="en-US" altLang="ko-KR" noProof="0" dirty="0"/>
+          </a:p>
+        </p:txBody>
+      </p:sp>
+      <p:pic>
+        <p:nvPicPr>
+          <p:cNvPr id="1026" name="Picture 2">
+            <a:extLst>
+              <a:ext uri="{FF2B5EF4-FFF2-40B4-BE49-F238E27FC236}">
+                <a16:creationId xmlns:a16="http://schemas.microsoft.com/office/drawing/2014/main" id="{ECC395D1-45E4-42FD-D66D-18A4FFB3BF43}"/>
+              </a:ext>
+            </a:extLst>
+          </p:cNvPr>
+          <p:cNvPicPr>
+            <a:picLocks noChangeAspect="1" noChangeArrowheads="1"/>
+          </p:cNvPicPr>
+          <p:nvPr/>
+        </p:nvPicPr>
+        <p:blipFill>
+          <a:blip r:embed="rId2">
+            <a:extLst>
+              <a:ext uri="{28A0092B-C50C-407E-A947-70E740481C1C}">
+                <a14:useLocalDpi xmlns:a14="http://schemas.microsoft.com/office/drawing/2010/main" val="0"/>
+              </a:ext>
+            </a:extLst>
+          </a:blip>
+          <a:srcRect/>
+          <a:stretch>
+            <a:fillRect/>
+          </a:stretch>
+        </p:blipFill>
+        <p:spPr bwMode="auto">
+          <a:xfrm>
+            <a:off x="1269876" y="620688"/>
+            <a:ext cx="7956375" cy="5304250"/>
+          </a:xfrm>
+          <a:prstGeom prst="rect">
+            <a:avLst/>
+          </a:prstGeom>
+          <a:noFill/>
+          <a:extLst>
+            <a:ext uri="{909E8E84-426E-40DD-AFC4-6F175D3DCCD1}">
+              <a14:hiddenFill xmlns:a14="http://schemas.microsoft.com/office/drawing/2010/main">
+                <a:solidFill>
+                  <a:srgbClr val="FFFFFF"/>
+                </a:solidFill>
+              </a14:hiddenFill>
+            </a:ext>
+          </a:extLst>
+        </p:spPr>
+      </p:pic>
+      <p:sp>
+        <p:nvSpPr>
+          <p:cNvPr id="6" name="TextBox 5">
+            <a:extLst>
+              <a:ext uri="{FF2B5EF4-FFF2-40B4-BE49-F238E27FC236}">
+                <a16:creationId xmlns:a16="http://schemas.microsoft.com/office/drawing/2014/main" id="{8FB9F0C6-43A9-D111-BC6D-8E8DCE050C89}"/>
+              </a:ext>
+            </a:extLst>
+          </p:cNvPr>
+          <p:cNvSpPr txBox="1"/>
+          <p:nvPr/>
+        </p:nvSpPr>
+        <p:spPr>
+          <a:xfrm>
+            <a:off x="2762272" y="5987394"/>
+            <a:ext cx="6444207" cy="369332"/>
+          </a:xfrm>
+          <a:prstGeom prst="rect">
+            <a:avLst/>
+          </a:prstGeom>
+          <a:noFill/>
+        </p:spPr>
+        <p:txBody>
+          <a:bodyPr wrap="square">
+            <a:spAutoFit/>
+          </a:bodyPr>
+          <a:lstStyle/>
+          <a:p>
+            <a:r>
+              <a:rPr lang="ko-KR" altLang="en-US" dirty="0">
+                <a:hlinkClick r:id="rId3"/>
+              </a:rPr>
+              <a:t>https://www.mt.co.kr/opinion/2019/04/09/2019040811152977932</a:t>
+            </a:r>
+            <a:r>
+              <a:rPr lang="ko-KR" altLang="en-US" dirty="0"/>
+              <a:t> </a:t>
+            </a:r>
+          </a:p>
+        </p:txBody>
+      </p:sp>
+    </p:spTree>
+    <p:extLst>
+      <p:ext uri="{BB962C8B-B14F-4D97-AF65-F5344CB8AC3E}">
+        <p14:creationId xmlns:p14="http://schemas.microsoft.com/office/powerpoint/2010/main" val="1386063056"/>
+      </p:ext>
+    </p:extLst>
+  </p:cSld>
+  <p:clrMapOvr>
+    <a:masterClrMapping/>
+  </p:clrMapOvr>
+  <mc:AlternateContent xmlns:mc="http://schemas.openxmlformats.org/markup-compatibility/2006" xmlns:p14="http://schemas.microsoft.com/office/powerpoint/2010/main">
+    <mc:Choice Requires="p14">
+      <p:transition spd="med" p14:dur="700">
+        <p:fade/>
+      </p:transition>
+    </mc:Choice>
+    <mc:Fallback xmlns="">
+      <p:transition spd="med">
+        <p:fade/>
+      </p:transition>
+    </mc:Fallback>
+  </mc:AlternateContent>
+</p:sld>
+</file>
+
+<file path=ppt/slides/slide19.xml><?xml version="1.0" encoding="utf-8"?>
+<p:sld xmlns:a="http://schemas.openxmlformats.org/drawingml/2006/main" xmlns:r="http://schemas.openxmlformats.org/officeDocument/2006/relationships" xmlns:p="http://schemas.openxmlformats.org/presentationml/2006/main">
+  <p:cSld>
+    <p:spTree>
+      <p:nvGrpSpPr>
+        <p:cNvPr id="1" name="">
+          <a:extLst>
+            <a:ext uri="{FF2B5EF4-FFF2-40B4-BE49-F238E27FC236}">
+              <a16:creationId xmlns:a16="http://schemas.microsoft.com/office/drawing/2014/main" id="{80A7D2E6-5BC7-CAB3-2C0E-BC7A94E56C14}"/>
+            </a:ext>
+          </a:extLst>
+        </p:cNvPr>
+        <p:cNvGrpSpPr/>
+        <p:nvPr/>
+      </p:nvGrpSpPr>
+      <p:grpSpPr>
+        <a:xfrm>
+          <a:off x="0" y="0"/>
+          <a:ext cx="0" cy="0"/>
+          <a:chOff x="0" y="0"/>
+          <a:chExt cx="0" cy="0"/>
+        </a:xfrm>
+      </p:grpSpPr>
+      <p:sp>
+        <p:nvSpPr>
+          <p:cNvPr id="2" name="슬라이드 번호 개체 틀 1">
+            <a:extLst>
+              <a:ext uri="{FF2B5EF4-FFF2-40B4-BE49-F238E27FC236}">
+                <a16:creationId xmlns:a16="http://schemas.microsoft.com/office/drawing/2014/main" id="{31E0B742-A325-A1D7-3871-5E6D27347889}"/>
+              </a:ext>
+            </a:extLst>
+          </p:cNvPr>
+          <p:cNvSpPr>
+            <a:spLocks noGrp="1"/>
+          </p:cNvSpPr>
+          <p:nvPr>
+            <p:ph type="sldNum" sz="quarter" idx="12"/>
+          </p:nvPr>
+        </p:nvSpPr>
+        <p:spPr/>
+        <p:txBody>
+          <a:bodyPr/>
+          <a:lstStyle/>
+          <a:p>
+            <a:pPr rtl="0"/>
+            <a:fld id="{A3F31473-23EB-4724-8B59-FE6D21D89FA4}" type="slidenum">
+              <a:rPr lang="en-US" altLang="ko-KR" noProof="0" smtClean="0"/>
+              <a:t>19</a:t>
+            </a:fld>
+            <a:endParaRPr lang="en-US" altLang="ko-KR" noProof="0" dirty="0"/>
+          </a:p>
+        </p:txBody>
+      </p:sp>
+      <p:sp>
+        <p:nvSpPr>
+          <p:cNvPr id="4" name="TextBox 3">
+            <a:extLst>
+              <a:ext uri="{FF2B5EF4-FFF2-40B4-BE49-F238E27FC236}">
+                <a16:creationId xmlns:a16="http://schemas.microsoft.com/office/drawing/2014/main" id="{D4CECDB0-CB65-5095-E5F1-4DBAE2D472C4}"/>
+              </a:ext>
+            </a:extLst>
+          </p:cNvPr>
+          <p:cNvSpPr txBox="1"/>
+          <p:nvPr/>
+        </p:nvSpPr>
+        <p:spPr>
+          <a:xfrm>
+            <a:off x="765820" y="1196752"/>
+            <a:ext cx="11233248" cy="1240148"/>
+          </a:xfrm>
+          <a:prstGeom prst="rect">
+            <a:avLst/>
+          </a:prstGeom>
+          <a:solidFill>
+            <a:schemeClr val="tx1">
+              <a:lumMod val="20000"/>
+              <a:lumOff val="80000"/>
+            </a:schemeClr>
+          </a:solidFill>
+        </p:spPr>
+        <p:txBody>
+          <a:bodyPr wrap="square" rtlCol="0">
+            <a:spAutoFit/>
+          </a:bodyPr>
+          <a:lstStyle/>
+          <a:p>
+            <a:pPr marL="285750" indent="-285750">
+              <a:lnSpc>
+                <a:spcPct val="200000"/>
+              </a:lnSpc>
+              <a:buFont typeface="Wingdings" panose="05000000000000000000" pitchFamily="2" charset="2"/>
+              <a:buChar char="v"/>
+            </a:pPr>
+            <a:r>
+              <a:rPr lang="en-US" altLang="ko-KR" sz="2000" dirty="0">
+                <a:latin typeface="휴먼모음T" panose="02030504000101010101" pitchFamily="18" charset="-127"/>
+                <a:ea typeface="휴먼모음T" panose="02030504000101010101" pitchFamily="18" charset="-127"/>
+                <a:hlinkClick r:id="rId3">
+                  <a:extLst>
+                    <a:ext uri="{A12FA001-AC4F-418D-AE19-62706E023703}">
+                      <ahyp:hlinkClr xmlns:ahyp="http://schemas.microsoft.com/office/drawing/2018/hyperlinkcolor" val="tx"/>
+                    </a:ext>
+                  </a:extLst>
+                </a:hlinkClick>
+              </a:rPr>
+              <a:t>https://github.com/ancestor9/data/blob/main/customers.csv</a:t>
+            </a:r>
+            <a:r>
+              <a:rPr lang="en-US" altLang="ko-KR" sz="2000" dirty="0">
+                <a:latin typeface="휴먼모음T" panose="02030504000101010101" pitchFamily="18" charset="-127"/>
+                <a:ea typeface="휴먼모음T" panose="02030504000101010101" pitchFamily="18" charset="-127"/>
+              </a:rPr>
+              <a:t> </a:t>
+            </a:r>
+            <a:r>
+              <a:rPr lang="ko-KR" altLang="en-US" sz="2000" dirty="0">
+                <a:latin typeface="휴먼모음T" panose="02030504000101010101" pitchFamily="18" charset="-127"/>
+                <a:ea typeface="휴먼모음T" panose="02030504000101010101" pitchFamily="18" charset="-127"/>
+              </a:rPr>
+              <a:t>의 데이터를 데이터셋으로 읽은 후 컴퓨터가 인식할 수 있도록 모든 데이터를 </a:t>
+            </a:r>
+            <a:r>
+              <a:rPr lang="ko-KR" altLang="en-US" sz="2000" dirty="0" err="1">
+                <a:latin typeface="휴먼모음T" panose="02030504000101010101" pitchFamily="18" charset="-127"/>
+                <a:ea typeface="휴먼모음T" panose="02030504000101010101" pitchFamily="18" charset="-127"/>
+              </a:rPr>
+              <a:t>수치화하여</a:t>
+            </a:r>
+            <a:r>
+              <a:rPr lang="ko-KR" altLang="en-US" sz="2000" dirty="0">
+                <a:latin typeface="휴먼모음T" panose="02030504000101010101" pitchFamily="18" charset="-127"/>
+                <a:ea typeface="휴먼모음T" panose="02030504000101010101" pitchFamily="18" charset="-127"/>
+              </a:rPr>
+              <a:t> 표현하라</a:t>
+            </a:r>
+            <a:endParaRPr lang="en-US" altLang="ko-KR" sz="2000" dirty="0">
+              <a:latin typeface="휴먼모음T" panose="02030504000101010101" pitchFamily="18" charset="-127"/>
+              <a:ea typeface="휴먼모음T" panose="02030504000101010101" pitchFamily="18" charset="-127"/>
+            </a:endParaRPr>
+          </a:p>
+        </p:txBody>
+      </p:sp>
+      <p:sp>
+        <p:nvSpPr>
+          <p:cNvPr id="9" name="TextBox 8">
+            <a:extLst>
+              <a:ext uri="{FF2B5EF4-FFF2-40B4-BE49-F238E27FC236}">
+                <a16:creationId xmlns:a16="http://schemas.microsoft.com/office/drawing/2014/main" id="{D802541C-2872-A95A-EE57-431C02DDCF2D}"/>
+              </a:ext>
+            </a:extLst>
+          </p:cNvPr>
+          <p:cNvSpPr txBox="1"/>
+          <p:nvPr/>
+        </p:nvSpPr>
+        <p:spPr>
+          <a:xfrm>
+            <a:off x="117748" y="260648"/>
+            <a:ext cx="2592288" cy="584775"/>
+          </a:xfrm>
+          <a:prstGeom prst="rect">
+            <a:avLst/>
+          </a:prstGeom>
+          <a:noFill/>
+        </p:spPr>
+        <p:txBody>
+          <a:bodyPr wrap="square" rtlCol="0">
+            <a:spAutoFit/>
+          </a:bodyPr>
+          <a:lstStyle/>
+          <a:p>
+            <a:r>
+              <a:rPr lang="ko-KR" altLang="en-US" sz="3200" b="1"/>
+              <a:t>문제 풀이</a:t>
+            </a:r>
+          </a:p>
+        </p:txBody>
+      </p:sp>
+      <p:pic>
+        <p:nvPicPr>
+          <p:cNvPr id="5" name="그림 4">
+            <a:extLst>
+              <a:ext uri="{FF2B5EF4-FFF2-40B4-BE49-F238E27FC236}">
+                <a16:creationId xmlns:a16="http://schemas.microsoft.com/office/drawing/2014/main" id="{31E2A028-0B51-A118-8E7B-4E624F2A4BFF}"/>
+              </a:ext>
+            </a:extLst>
+          </p:cNvPr>
+          <p:cNvPicPr>
+            <a:picLocks noChangeAspect="1"/>
+          </p:cNvPicPr>
+          <p:nvPr/>
+        </p:nvPicPr>
+        <p:blipFill>
+          <a:blip r:embed="rId4"/>
+          <a:stretch>
+            <a:fillRect/>
+          </a:stretch>
+        </p:blipFill>
+        <p:spPr>
+          <a:xfrm>
+            <a:off x="1197868" y="2770753"/>
+            <a:ext cx="8064896" cy="3079023"/>
+          </a:xfrm>
+          <a:prstGeom prst="rect">
+            <a:avLst/>
+          </a:prstGeom>
+        </p:spPr>
+      </p:pic>
+      <p:sp>
+        <p:nvSpPr>
+          <p:cNvPr id="7" name="TextBox 6">
+            <a:extLst>
+              <a:ext uri="{FF2B5EF4-FFF2-40B4-BE49-F238E27FC236}">
+                <a16:creationId xmlns:a16="http://schemas.microsoft.com/office/drawing/2014/main" id="{F30BC356-F6E6-69F8-92C0-0C77A8297D86}"/>
+              </a:ext>
+            </a:extLst>
+          </p:cNvPr>
+          <p:cNvSpPr txBox="1"/>
+          <p:nvPr/>
+        </p:nvSpPr>
+        <p:spPr>
+          <a:xfrm rot="591990">
+            <a:off x="9669996" y="327099"/>
+            <a:ext cx="2274697" cy="830997"/>
+          </a:xfrm>
+          <a:prstGeom prst="rect">
+            <a:avLst/>
+          </a:prstGeom>
+          <a:noFill/>
+        </p:spPr>
+        <p:txBody>
+          <a:bodyPr wrap="square">
+            <a:spAutoFit/>
+          </a:bodyPr>
+          <a:lstStyle/>
+          <a:p>
+            <a:r>
+              <a:rPr lang="en-US" altLang="ko-KR" sz="2400" dirty="0">
+                <a:latin typeface="휴먼모음T" panose="02030504000101010101" pitchFamily="18" charset="-127"/>
+                <a:ea typeface="휴먼모음T" panose="02030504000101010101" pitchFamily="18" charset="-127"/>
+              </a:rPr>
+              <a:t>Data</a:t>
+            </a:r>
+            <a:r>
+              <a:rPr lang="ko-KR" altLang="en-US" sz="2400" dirty="0">
+                <a:latin typeface="휴먼모음T" panose="02030504000101010101" pitchFamily="18" charset="-127"/>
+                <a:ea typeface="휴먼모음T" panose="02030504000101010101" pitchFamily="18" charset="-127"/>
+              </a:rPr>
+              <a:t> </a:t>
+            </a:r>
+            <a:r>
+              <a:rPr lang="en-US" altLang="ko-KR" sz="2400" dirty="0">
+                <a:latin typeface="휴먼모음T" panose="02030504000101010101" pitchFamily="18" charset="-127"/>
+                <a:ea typeface="휴먼모음T" panose="02030504000101010101" pitchFamily="18" charset="-127"/>
+              </a:rPr>
+              <a:t>Representation</a:t>
+            </a:r>
+            <a:r>
+              <a:rPr lang="ko-KR" altLang="en-US" sz="2400" dirty="0">
+                <a:latin typeface="휴먼모음T" panose="02030504000101010101" pitchFamily="18" charset="-127"/>
+                <a:ea typeface="휴먼모음T" panose="02030504000101010101" pitchFamily="18" charset="-127"/>
+              </a:rPr>
+              <a:t> </a:t>
+            </a:r>
+            <a:endParaRPr lang="ko-KR" altLang="en-US" sz="2400" dirty="0"/>
+          </a:p>
+        </p:txBody>
+      </p:sp>
+    </p:spTree>
+    <p:extLst>
+      <p:ext uri="{BB962C8B-B14F-4D97-AF65-F5344CB8AC3E}">
+        <p14:creationId xmlns:p14="http://schemas.microsoft.com/office/powerpoint/2010/main" val="1101704896"/>
+      </p:ext>
+    </p:extLst>
+  </p:cSld>
+  <p:clrMapOvr>
+    <a:masterClrMapping/>
+  </p:clrMapOvr>
+  <mc:AlternateContent xmlns:mc="http://schemas.openxmlformats.org/markup-compatibility/2006" xmlns:p14="http://schemas.microsoft.com/office/powerpoint/2010/main">
+    <mc:Choice Requires="p14">
+      <p:transition spd="med" p14:dur="700">
+        <p:fade/>
+      </p:transition>
+    </mc:Choice>
+    <mc:Fallback xmlns="">
+      <p:transition spd="med">
+        <p:fade/>
+      </p:transition>
+    </mc:Fallback>
+  </mc:AlternateContent>
+</p:sld>
+</file>
+
+<file path=ppt/slides/slide2.xml><?xml version="1.0" encoding="utf-8"?>
+<p:sld xmlns:a="http://schemas.openxmlformats.org/drawingml/2006/main" xmlns:r="http://schemas.openxmlformats.org/officeDocument/2006/relationships" xmlns:p="http://schemas.openxmlformats.org/presentationml/2006/main">
+  <p:cSld>
+    <p:spTree>
+      <p:nvGrpSpPr>
+        <p:cNvPr id="1" name=""/>
+        <p:cNvGrpSpPr/>
+        <p:nvPr/>
+      </p:nvGrpSpPr>
+      <p:grpSpPr>
+        <a:xfrm>
+          <a:off x="0" y="0"/>
+          <a:ext cx="0" cy="0"/>
+          <a:chOff x="0" y="0"/>
+          <a:chExt cx="0" cy="0"/>
+        </a:xfrm>
+      </p:grpSpPr>
+      <p:sp>
+        <p:nvSpPr>
+          <p:cNvPr id="8" name="슬라이드 번호 개체 틀 7"/>
+          <p:cNvSpPr>
+            <a:spLocks noGrp="1"/>
+          </p:cNvSpPr>
+          <p:nvPr>
+            <p:ph type="sldNum" sz="quarter" idx="12"/>
+          </p:nvPr>
+        </p:nvSpPr>
+        <p:spPr/>
+        <p:txBody>
+          <a:bodyPr/>
+          <a:lstStyle/>
+          <a:p>
+            <a:pPr rtl="0"/>
+            <a:fld id="{A3F31473-23EB-4724-8B59-FE6D21D89FA4}" type="slidenum">
+              <a:rPr lang="en-US" altLang="ko-KR" noProof="0" smtClean="0"/>
+              <a:t>2</a:t>
+            </a:fld>
+            <a:endParaRPr lang="en-US" altLang="ko-KR" noProof="0" dirty="0"/>
+          </a:p>
+        </p:txBody>
+      </p:sp>
+      <p:sp>
+        <p:nvSpPr>
+          <p:cNvPr id="2" name="TextBox 1">
+            <a:extLst>
+              <a:ext uri="{FF2B5EF4-FFF2-40B4-BE49-F238E27FC236}">
+                <a16:creationId xmlns:a16="http://schemas.microsoft.com/office/drawing/2014/main" id="{B0754AEB-7EBE-A397-BEA5-D61762102166}"/>
+              </a:ext>
+            </a:extLst>
+          </p:cNvPr>
+          <p:cNvSpPr txBox="1"/>
+          <p:nvPr/>
+        </p:nvSpPr>
+        <p:spPr>
+          <a:xfrm>
+            <a:off x="1629916" y="620688"/>
+            <a:ext cx="8928992" cy="5131020"/>
+          </a:xfrm>
+          <a:prstGeom prst="rect">
+            <a:avLst/>
+          </a:prstGeom>
+          <a:noFill/>
+        </p:spPr>
+        <p:txBody>
+          <a:bodyPr wrap="square" rtlCol="0">
+            <a:spAutoFit/>
+          </a:bodyPr>
+          <a:lstStyle/>
+          <a:p>
+            <a:pPr>
+              <a:lnSpc>
+                <a:spcPct val="200000"/>
+              </a:lnSpc>
+            </a:pPr>
+            <a:r>
+              <a:rPr lang="ko-KR" altLang="en-US" sz="4000" b="1" dirty="0">
+                <a:latin typeface="한컴 말랑말랑 Bold" panose="020F0803000000000000" pitchFamily="50" charset="-127"/>
+                <a:ea typeface="한컴 말랑말랑 Bold" panose="020F0803000000000000" pitchFamily="50" charset="-127"/>
+              </a:rPr>
+              <a:t>목차</a:t>
+            </a:r>
+            <a:endParaRPr lang="en-US" altLang="ko-KR" sz="4000" b="1" dirty="0">
+              <a:latin typeface="한컴 말랑말랑 Bold" panose="020F0803000000000000" pitchFamily="50" charset="-127"/>
+              <a:ea typeface="한컴 말랑말랑 Bold" panose="020F0803000000000000" pitchFamily="50" charset="-127"/>
+            </a:endParaRPr>
+          </a:p>
+          <a:p>
+            <a:pPr marL="514350" indent="-514350">
+              <a:lnSpc>
+                <a:spcPct val="200000"/>
+              </a:lnSpc>
+              <a:buAutoNum type="arabicPeriod"/>
+            </a:pPr>
+            <a:r>
+              <a:rPr lang="ko-KR" altLang="en-US" sz="2000" b="1" dirty="0">
+                <a:latin typeface="한컴 말랑말랑 Bold" panose="020F0803000000000000" pitchFamily="50" charset="-127"/>
+                <a:ea typeface="한컴 말랑말랑 Bold" panose="020F0803000000000000" pitchFamily="50" charset="-127"/>
+              </a:rPr>
+              <a:t>통계학</a:t>
+            </a:r>
+            <a:r>
+              <a:rPr lang="en-US" altLang="ko-KR" sz="2000" b="1" dirty="0">
+                <a:latin typeface="한컴 말랑말랑 Bold" panose="020F0803000000000000" pitchFamily="50" charset="-127"/>
+                <a:ea typeface="한컴 말랑말랑 Bold" panose="020F0803000000000000" pitchFamily="50" charset="-127"/>
+              </a:rPr>
+              <a:t>(Statistics)</a:t>
+            </a:r>
+          </a:p>
+          <a:p>
+            <a:pPr marL="514350" indent="-514350">
+              <a:lnSpc>
+                <a:spcPct val="200000"/>
+              </a:lnSpc>
+              <a:buAutoNum type="arabicPeriod"/>
+            </a:pPr>
+            <a:r>
+              <a:rPr lang="ko-KR" altLang="en-US" sz="2000" b="1" dirty="0">
+                <a:latin typeface="한컴 말랑말랑 Bold" panose="020F0803000000000000" pitchFamily="50" charset="-127"/>
+                <a:ea typeface="한컴 말랑말랑 Bold" panose="020F0803000000000000" pitchFamily="50" charset="-127"/>
+              </a:rPr>
+              <a:t>모집단과</a:t>
+            </a:r>
+            <a:r>
+              <a:rPr lang="en-US" altLang="ko-KR" sz="2000" b="1" dirty="0">
+                <a:latin typeface="한컴 말랑말랑 Bold" panose="020F0803000000000000" pitchFamily="50" charset="-127"/>
+                <a:ea typeface="한컴 말랑말랑 Bold" panose="020F0803000000000000" pitchFamily="50" charset="-127"/>
+              </a:rPr>
+              <a:t> </a:t>
+            </a:r>
+            <a:r>
+              <a:rPr lang="ko-KR" altLang="en-US" sz="2000" b="1" dirty="0">
+                <a:latin typeface="한컴 말랑말랑 Bold" panose="020F0803000000000000" pitchFamily="50" charset="-127"/>
+                <a:ea typeface="한컴 말랑말랑 Bold" panose="020F0803000000000000" pitchFamily="50" charset="-127"/>
+              </a:rPr>
+              <a:t>표본조사 방법</a:t>
+            </a:r>
+            <a:endParaRPr lang="en-US" altLang="ko-KR" sz="2000" b="1" dirty="0">
+              <a:latin typeface="한컴 말랑말랑 Bold" panose="020F0803000000000000" pitchFamily="50" charset="-127"/>
+              <a:ea typeface="한컴 말랑말랑 Bold" panose="020F0803000000000000" pitchFamily="50" charset="-127"/>
+            </a:endParaRPr>
+          </a:p>
+          <a:p>
+            <a:pPr marL="514350" indent="-514350">
+              <a:lnSpc>
+                <a:spcPct val="200000"/>
+              </a:lnSpc>
+              <a:buAutoNum type="arabicPeriod"/>
+            </a:pPr>
+            <a:r>
+              <a:rPr lang="ko-KR" altLang="en-US" sz="2000" b="1" dirty="0">
+                <a:latin typeface="한컴 말랑말랑 Bold" panose="020F0803000000000000" pitchFamily="50" charset="-127"/>
+                <a:ea typeface="한컴 말랑말랑 Bold" panose="020F0803000000000000" pitchFamily="50" charset="-127"/>
+              </a:rPr>
+              <a:t>데이터의 종류</a:t>
+            </a:r>
+            <a:r>
+              <a:rPr lang="en-US" altLang="ko-KR" sz="2000" b="1" dirty="0">
+                <a:latin typeface="한컴 말랑말랑 Bold" panose="020F0803000000000000" pitchFamily="50" charset="-127"/>
+                <a:ea typeface="한컴 말랑말랑 Bold" panose="020F0803000000000000" pitchFamily="50" charset="-127"/>
+              </a:rPr>
+              <a:t>(Data type)</a:t>
+            </a:r>
+          </a:p>
+          <a:p>
+            <a:pPr marL="514350" indent="-514350">
+              <a:lnSpc>
+                <a:spcPct val="200000"/>
+              </a:lnSpc>
+              <a:buAutoNum type="arabicPeriod"/>
+            </a:pPr>
+            <a:r>
+              <a:rPr lang="ko-KR" altLang="en-US" sz="2000" b="1" dirty="0">
+                <a:latin typeface="한컴 말랑말랑 Bold" panose="020F0803000000000000" pitchFamily="50" charset="-127"/>
+                <a:ea typeface="한컴 말랑말랑 Bold" panose="020F0803000000000000" pitchFamily="50" charset="-127"/>
+              </a:rPr>
+              <a:t>주요</a:t>
+            </a:r>
+            <a:r>
+              <a:rPr lang="en-US" altLang="ko-KR" sz="2000" b="1" dirty="0">
+                <a:latin typeface="한컴 말랑말랑 Bold" panose="020F0803000000000000" pitchFamily="50" charset="-127"/>
+                <a:ea typeface="한컴 말랑말랑 Bold" panose="020F0803000000000000" pitchFamily="50" charset="-127"/>
+              </a:rPr>
+              <a:t> </a:t>
+            </a:r>
+            <a:r>
+              <a:rPr lang="ko-KR" altLang="en-US" sz="2000" b="1" dirty="0">
+                <a:latin typeface="한컴 말랑말랑 Bold" panose="020F0803000000000000" pitchFamily="50" charset="-127"/>
+                <a:ea typeface="한컴 말랑말랑 Bold" panose="020F0803000000000000" pitchFamily="50" charset="-127"/>
+              </a:rPr>
+              <a:t>통계량</a:t>
+            </a:r>
+            <a:r>
+              <a:rPr lang="en-US" altLang="ko-KR" sz="2000" b="1" dirty="0">
+                <a:latin typeface="한컴 말랑말랑 Bold" panose="020F0803000000000000" pitchFamily="50" charset="-127"/>
+                <a:ea typeface="한컴 말랑말랑 Bold" panose="020F0803000000000000" pitchFamily="50" charset="-127"/>
+              </a:rPr>
+              <a:t>(Statistic)</a:t>
+            </a:r>
+          </a:p>
+          <a:p>
+            <a:pPr marL="514350" indent="-514350">
+              <a:lnSpc>
+                <a:spcPct val="200000"/>
+              </a:lnSpc>
+              <a:buAutoNum type="arabicPeriod"/>
+            </a:pPr>
+            <a:r>
+              <a:rPr lang="ko-KR" altLang="en-US" sz="2000" b="1" dirty="0" err="1">
+                <a:latin typeface="한컴 말랑말랑 Bold" panose="020F0803000000000000" pitchFamily="50" charset="-127"/>
+                <a:ea typeface="한컴 말랑말랑 Bold" panose="020F0803000000000000" pitchFamily="50" charset="-127"/>
+              </a:rPr>
+              <a:t>다변량</a:t>
+            </a:r>
+            <a:r>
+              <a:rPr lang="ko-KR" altLang="en-US" sz="2000" b="1" dirty="0">
+                <a:latin typeface="한컴 말랑말랑 Bold" panose="020F0803000000000000" pitchFamily="50" charset="-127"/>
+                <a:ea typeface="한컴 말랑말랑 Bold" panose="020F0803000000000000" pitchFamily="50" charset="-127"/>
+              </a:rPr>
+              <a:t> 분석</a:t>
+            </a:r>
+            <a:r>
+              <a:rPr lang="en-US" altLang="ko-KR" sz="2000" b="1" dirty="0">
+                <a:latin typeface="한컴 말랑말랑 Bold" panose="020F0803000000000000" pitchFamily="50" charset="-127"/>
+                <a:ea typeface="한컴 말랑말랑 Bold" panose="020F0803000000000000" pitchFamily="50" charset="-127"/>
+              </a:rPr>
+              <a:t>(Multivariate Analysis)</a:t>
+            </a:r>
+          </a:p>
+          <a:p>
+            <a:pPr>
+              <a:lnSpc>
+                <a:spcPct val="200000"/>
+              </a:lnSpc>
+            </a:pPr>
+            <a:endParaRPr lang="ko-KR" altLang="en-US" sz="2800" b="1" dirty="0">
+              <a:latin typeface="한컴 말랑말랑 Bold" panose="020F0803000000000000" pitchFamily="50" charset="-127"/>
+              <a:ea typeface="한컴 말랑말랑 Bold" panose="020F0803000000000000" pitchFamily="50" charset="-127"/>
+            </a:endParaRPr>
+          </a:p>
+        </p:txBody>
+      </p:sp>
+    </p:spTree>
+    <p:extLst>
+      <p:ext uri="{BB962C8B-B14F-4D97-AF65-F5344CB8AC3E}">
+        <p14:creationId xmlns:p14="http://schemas.microsoft.com/office/powerpoint/2010/main" val="1126723429"/>
+      </p:ext>
+    </p:extLst>
+  </p:cSld>
+  <p:clrMapOvr>
+    <a:masterClrMapping/>
+  </p:clrMapOvr>
+  <mc:AlternateContent xmlns:mc="http://schemas.openxmlformats.org/markup-compatibility/2006" xmlns:p14="http://schemas.microsoft.com/office/powerpoint/2010/main">
+    <mc:Choice Requires="p14">
+      <p:transition spd="med" p14:dur="700">
+        <p:fade/>
+      </p:transition>
+    </mc:Choice>
+    <mc:Fallback xmlns="">
+      <p:transition spd="med">
+        <p:fade/>
+      </p:transition>
+    </mc:Fallback>
+  </mc:AlternateContent>
+</p:sld>
+</file>
+
+<file path=ppt/slides/slide20.xml><?xml version="1.0" encoding="utf-8"?>
+<p:sld xmlns:a="http://schemas.openxmlformats.org/drawingml/2006/main" xmlns:r="http://schemas.openxmlformats.org/officeDocument/2006/relationships" xmlns:p="http://schemas.openxmlformats.org/presentationml/2006/main">
+  <p:cSld>
+    <p:spTree>
+      <p:nvGrpSpPr>
+        <p:cNvPr id="1" name=""/>
+        <p:cNvGrpSpPr/>
+        <p:nvPr/>
+      </p:nvGrpSpPr>
+      <p:grpSpPr>
+        <a:xfrm>
+          <a:off x="0" y="0"/>
+          <a:ext cx="0" cy="0"/>
+          <a:chOff x="0" y="0"/>
+          <a:chExt cx="0" cy="0"/>
+        </a:xfrm>
+      </p:grpSpPr>
+      <p:sp>
+        <p:nvSpPr>
+          <p:cNvPr id="2" name="슬라이드 번호 개체 틀 1"/>
+          <p:cNvSpPr>
+            <a:spLocks noGrp="1"/>
+          </p:cNvSpPr>
+          <p:nvPr>
+            <p:ph type="sldNum" sz="quarter" idx="12"/>
+          </p:nvPr>
+        </p:nvSpPr>
+        <p:spPr/>
+        <p:txBody>
+          <a:bodyPr/>
+          <a:lstStyle/>
+          <a:p>
+            <a:pPr rtl="0"/>
+            <a:fld id="{A3F31473-23EB-4724-8B59-FE6D21D89FA4}" type="slidenum">
+              <a:rPr lang="en-US" altLang="ko-KR" noProof="0" smtClean="0"/>
+              <a:t>20</a:t>
             </a:fld>
             <a:endParaRPr lang="en-US" altLang="ko-KR" noProof="0" dirty="0"/>
           </a:p>
@@ -8006,7 +10678,7 @@
 </p:sld>
 </file>
 
-<file path=ppt/slides/slide15.xml><?xml version="1.0" encoding="utf-8"?>
+<file path=ppt/slides/slide21.xml><?xml version="1.0" encoding="utf-8"?>
 <p:sld xmlns:a="http://schemas.openxmlformats.org/drawingml/2006/main" xmlns:r="http://schemas.openxmlformats.org/officeDocument/2006/relationships" xmlns:p="http://schemas.openxmlformats.org/presentationml/2006/main">
   <p:cSld>
     <p:spTree>
@@ -8041,7 +10713,7 @@
             <a:pPr rtl="0"/>
             <a:fld id="{A3F31473-23EB-4724-8B59-FE6D21D89FA4}" type="slidenum">
               <a:rPr lang="en-US" altLang="ko-KR" noProof="0" smtClean="0"/>
-              <a:t>15</a:t>
+              <a:t>21</a:t>
             </a:fld>
             <a:endParaRPr lang="en-US" altLang="ko-KR" noProof="0" dirty="0"/>
           </a:p>
@@ -8258,7 +10930,7 @@
 </p:sld>
 </file>
 
-<file path=ppt/slides/slide16.xml><?xml version="1.0" encoding="utf-8"?>
+<file path=ppt/slides/slide22.xml><?xml version="1.0" encoding="utf-8"?>
 <p:sld xmlns:a="http://schemas.openxmlformats.org/drawingml/2006/main" xmlns:r="http://schemas.openxmlformats.org/officeDocument/2006/relationships" xmlns:p="http://schemas.openxmlformats.org/presentationml/2006/main">
   <p:cSld>
     <p:spTree>
@@ -8293,7 +10965,7 @@
             <a:pPr rtl="0"/>
             <a:fld id="{A3F31473-23EB-4724-8B59-FE6D21D89FA4}" type="slidenum">
               <a:rPr lang="en-US" altLang="ko-KR" noProof="0" smtClean="0"/>
-              <a:t>16</a:t>
+              <a:t>22</a:t>
             </a:fld>
             <a:endParaRPr lang="en-US" altLang="ko-KR" noProof="0" dirty="0"/>
           </a:p>
@@ -8348,7 +11020,7 @@
 </p:sld>
 </file>
 
-<file path=ppt/slides/slide17.xml><?xml version="1.0" encoding="utf-8"?>
+<file path=ppt/slides/slide23.xml><?xml version="1.0" encoding="utf-8"?>
 <p:sld xmlns:a="http://schemas.openxmlformats.org/drawingml/2006/main" xmlns:r="http://schemas.openxmlformats.org/officeDocument/2006/relationships" xmlns:p="http://schemas.openxmlformats.org/presentationml/2006/main">
   <p:cSld>
     <p:spTree>
@@ -8383,7 +11055,7 @@
             <a:pPr rtl="0"/>
             <a:fld id="{A3F31473-23EB-4724-8B59-FE6D21D89FA4}" type="slidenum">
               <a:rPr lang="en-US" altLang="ko-KR" noProof="0" smtClean="0"/>
-              <a:t>17</a:t>
+              <a:t>23</a:t>
             </a:fld>
             <a:endParaRPr lang="en-US" altLang="ko-KR" noProof="0" dirty="0"/>
           </a:p>
@@ -8438,7 +11110,7 @@
 </p:sld>
 </file>
 
-<file path=ppt/slides/slide18.xml><?xml version="1.0" encoding="utf-8"?>
+<file path=ppt/slides/slide24.xml><?xml version="1.0" encoding="utf-8"?>
 <p:sld xmlns:a="http://schemas.openxmlformats.org/drawingml/2006/main" xmlns:r="http://schemas.openxmlformats.org/officeDocument/2006/relationships" xmlns:p="http://schemas.openxmlformats.org/presentationml/2006/main">
   <p:cSld>
     <p:spTree>
@@ -8473,7 +11145,7 @@
             <a:pPr rtl="0"/>
             <a:fld id="{A3F31473-23EB-4724-8B59-FE6D21D89FA4}" type="slidenum">
               <a:rPr lang="en-US" altLang="ko-KR" noProof="0" smtClean="0"/>
-              <a:t>18</a:t>
+              <a:t>24</a:t>
             </a:fld>
             <a:endParaRPr lang="en-US" altLang="ko-KR" noProof="0" dirty="0"/>
           </a:p>
@@ -8528,7 +11200,7 @@
 </p:sld>
 </file>
 
-<file path=ppt/slides/slide19.xml><?xml version="1.0" encoding="utf-8"?>
+<file path=ppt/slides/slide25.xml><?xml version="1.0" encoding="utf-8"?>
 <p:sld xmlns:a="http://schemas.openxmlformats.org/drawingml/2006/main" xmlns:r="http://schemas.openxmlformats.org/officeDocument/2006/relationships" xmlns:p="http://schemas.openxmlformats.org/presentationml/2006/main">
   <p:cSld>
     <p:spTree>
@@ -8563,7 +11235,7 @@
             <a:pPr rtl="0"/>
             <a:fld id="{A3F31473-23EB-4724-8B59-FE6D21D89FA4}" type="slidenum">
               <a:rPr lang="en-US" altLang="ko-KR" noProof="0" smtClean="0"/>
-              <a:t>19</a:t>
+              <a:t>25</a:t>
             </a:fld>
             <a:endParaRPr lang="en-US" altLang="ko-KR" noProof="0" dirty="0"/>
           </a:p>
@@ -8618,7 +11290,7 @@
 </p:sld>
 </file>
 
-<file path=ppt/slides/slide2.xml><?xml version="1.0" encoding="utf-8"?>
+<file path=ppt/slides/slide26.xml><?xml version="1.0" encoding="utf-8"?>
 <p:sld xmlns:a="http://schemas.openxmlformats.org/drawingml/2006/main" xmlns:r="http://schemas.openxmlformats.org/officeDocument/2006/relationships" xmlns:p="http://schemas.openxmlformats.org/presentationml/2006/main">
   <p:cSld>
     <p:spTree>
@@ -8635,33 +11307,9 @@
           <a:chExt cx="0" cy="0"/>
         </a:xfrm>
       </p:grpSpPr>
-      <p:pic>
-        <p:nvPicPr>
-          <p:cNvPr id="5" name="그림 4"/>
-          <p:cNvPicPr>
-            <a:picLocks noChangeAspect="1"/>
-          </p:cNvPicPr>
-          <p:nvPr/>
-        </p:nvPicPr>
-        <p:blipFill>
-          <a:blip r:embed="rId3"/>
-          <a:stretch>
-            <a:fillRect/>
-          </a:stretch>
-        </p:blipFill>
-        <p:spPr>
-          <a:xfrm>
-            <a:off x="1629916" y="1268760"/>
-            <a:ext cx="8890594" cy="4622186"/>
-          </a:xfrm>
-          <a:prstGeom prst="rect">
-            <a:avLst/>
-          </a:prstGeom>
-        </p:spPr>
-      </p:pic>
-      <p:sp>
-        <p:nvSpPr>
-          <p:cNvPr id="8" name="슬라이드 번호 개체 틀 7"/>
+      <p:sp>
+        <p:nvSpPr>
+          <p:cNvPr id="2" name="슬라이드 번호 개체 틀 1"/>
           <p:cNvSpPr>
             <a:spLocks noGrp="1"/>
           </p:cNvSpPr>
@@ -8677,73 +11325,7 @@
             <a:pPr rtl="0"/>
             <a:fld id="{A3F31473-23EB-4724-8B59-FE6D21D89FA4}" type="slidenum">
               <a:rPr lang="en-US" altLang="ko-KR" noProof="0" smtClean="0"/>
-              <a:t>2</a:t>
-            </a:fld>
-            <a:endParaRPr lang="en-US" altLang="ko-KR" noProof="0" dirty="0"/>
-          </a:p>
-        </p:txBody>
-      </p:sp>
-    </p:spTree>
-    <p:extLst>
-      <p:ext uri="{BB962C8B-B14F-4D97-AF65-F5344CB8AC3E}">
-        <p14:creationId xmlns:p14="http://schemas.microsoft.com/office/powerpoint/2010/main" val="1126723429"/>
-      </p:ext>
-    </p:extLst>
-  </p:cSld>
-  <p:clrMapOvr>
-    <a:masterClrMapping/>
-  </p:clrMapOvr>
-  <mc:AlternateContent xmlns:mc="http://schemas.openxmlformats.org/markup-compatibility/2006" xmlns:p14="http://schemas.microsoft.com/office/powerpoint/2010/main">
-    <mc:Choice Requires="p14">
-      <p:transition spd="med" p14:dur="700">
-        <p:fade/>
-      </p:transition>
-    </mc:Choice>
-    <mc:Fallback xmlns="">
-      <p:transition spd="med">
-        <p:fade/>
-      </p:transition>
-    </mc:Fallback>
-  </mc:AlternateContent>
-</p:sld>
-</file>
-
-<file path=ppt/slides/slide20.xml><?xml version="1.0" encoding="utf-8"?>
-<p:sld xmlns:a="http://schemas.openxmlformats.org/drawingml/2006/main" xmlns:r="http://schemas.openxmlformats.org/officeDocument/2006/relationships" xmlns:p="http://schemas.openxmlformats.org/presentationml/2006/main">
-  <p:cSld>
-    <p:spTree>
-      <p:nvGrpSpPr>
-        <p:cNvPr id="1" name=""/>
-        <p:cNvGrpSpPr/>
-        <p:nvPr/>
-      </p:nvGrpSpPr>
-      <p:grpSpPr>
-        <a:xfrm>
-          <a:off x="0" y="0"/>
-          <a:ext cx="0" cy="0"/>
-          <a:chOff x="0" y="0"/>
-          <a:chExt cx="0" cy="0"/>
-        </a:xfrm>
-      </p:grpSpPr>
-      <p:sp>
-        <p:nvSpPr>
-          <p:cNvPr id="2" name="슬라이드 번호 개체 틀 1"/>
-          <p:cNvSpPr>
-            <a:spLocks noGrp="1"/>
-          </p:cNvSpPr>
-          <p:nvPr>
-            <p:ph type="sldNum" sz="quarter" idx="12"/>
-          </p:nvPr>
-        </p:nvSpPr>
-        <p:spPr/>
-        <p:txBody>
-          <a:bodyPr/>
-          <a:lstStyle/>
-          <a:p>
-            <a:pPr rtl="0"/>
-            <a:fld id="{A3F31473-23EB-4724-8B59-FE6D21D89FA4}" type="slidenum">
-              <a:rPr lang="en-US" altLang="ko-KR" noProof="0" smtClean="0"/>
-              <a:t>20</a:t>
+              <a:t>26</a:t>
             </a:fld>
             <a:endParaRPr lang="en-US" altLang="ko-KR" noProof="0" dirty="0"/>
           </a:p>
@@ -8798,7 +11380,7 @@
 </p:sld>
 </file>
 
-<file path=ppt/slides/slide21.xml><?xml version="1.0" encoding="utf-8"?>
+<file path=ppt/slides/slide27.xml><?xml version="1.0" encoding="utf-8"?>
 <p:sld xmlns:a="http://schemas.openxmlformats.org/drawingml/2006/main" xmlns:r="http://schemas.openxmlformats.org/officeDocument/2006/relationships" xmlns:p="http://schemas.openxmlformats.org/presentationml/2006/main">
   <p:cSld>
     <p:spTree>
@@ -8833,7 +11415,7 @@
             <a:pPr rtl="0"/>
             <a:fld id="{A3F31473-23EB-4724-8B59-FE6D21D89FA4}" type="slidenum">
               <a:rPr lang="en-US" altLang="ko-KR" noProof="0" smtClean="0"/>
-              <a:t>21</a:t>
+              <a:t>27</a:t>
             </a:fld>
             <a:endParaRPr lang="en-US" altLang="ko-KR" noProof="0" dirty="0"/>
           </a:p>
@@ -8888,7 +11470,7 @@
 </p:sld>
 </file>
 
-<file path=ppt/slides/slide22.xml><?xml version="1.0" encoding="utf-8"?>
+<file path=ppt/slides/slide28.xml><?xml version="1.0" encoding="utf-8"?>
 <p:sld xmlns:a="http://schemas.openxmlformats.org/drawingml/2006/main" xmlns:r="http://schemas.openxmlformats.org/officeDocument/2006/relationships" xmlns:p="http://schemas.openxmlformats.org/presentationml/2006/main">
   <p:cSld>
     <p:spTree>
@@ -8935,7 +11517,7 @@
             <a:pPr rtl="0"/>
             <a:fld id="{A3F31473-23EB-4724-8B59-FE6D21D89FA4}" type="slidenum">
               <a:rPr lang="en-US" altLang="ko-KR" noProof="0" smtClean="0"/>
-              <a:t>22</a:t>
+              <a:t>28</a:t>
             </a:fld>
             <a:endParaRPr lang="en-US" altLang="ko-KR" noProof="0" dirty="0"/>
           </a:p>
@@ -9421,7 +12003,7 @@
 </p:sld>
 </file>
 
-<file path=ppt/slides/slide23.xml><?xml version="1.0" encoding="utf-8"?>
+<file path=ppt/slides/slide29.xml><?xml version="1.0" encoding="utf-8"?>
 <p:sld xmlns:a="http://schemas.openxmlformats.org/drawingml/2006/main" xmlns:r="http://schemas.openxmlformats.org/officeDocument/2006/relationships" xmlns:p="http://schemas.openxmlformats.org/presentationml/2006/main">
   <p:cSld>
     <p:spTree>
@@ -9456,7 +12038,7 @@
             <a:pPr rtl="0"/>
             <a:fld id="{A3F31473-23EB-4724-8B59-FE6D21D89FA4}" type="slidenum">
               <a:rPr lang="en-US" altLang="ko-KR" noProof="0" smtClean="0"/>
-              <a:t>23</a:t>
+              <a:t>29</a:t>
             </a:fld>
             <a:endParaRPr lang="en-US" altLang="ko-KR" noProof="0" dirty="0"/>
           </a:p>
@@ -9511,7 +12093,339 @@
 </p:sld>
 </file>
 
-<file path=ppt/slides/slide24.xml><?xml version="1.0" encoding="utf-8"?>
+<file path=ppt/slides/slide3.xml><?xml version="1.0" encoding="utf-8"?>
+<p:sld xmlns:a="http://schemas.openxmlformats.org/drawingml/2006/main" xmlns:r="http://schemas.openxmlformats.org/officeDocument/2006/relationships" xmlns:p="http://schemas.openxmlformats.org/presentationml/2006/main">
+  <p:cSld>
+    <p:spTree>
+      <p:nvGrpSpPr>
+        <p:cNvPr id="1" name="">
+          <a:extLst>
+            <a:ext uri="{FF2B5EF4-FFF2-40B4-BE49-F238E27FC236}">
+              <a16:creationId xmlns:a16="http://schemas.microsoft.com/office/drawing/2014/main" id="{0B799DDB-CF71-2269-C86C-A0C6B66D4ABA}"/>
+            </a:ext>
+          </a:extLst>
+        </p:cNvPr>
+        <p:cNvGrpSpPr/>
+        <p:nvPr/>
+      </p:nvGrpSpPr>
+      <p:grpSpPr>
+        <a:xfrm>
+          <a:off x="0" y="0"/>
+          <a:ext cx="0" cy="0"/>
+          <a:chOff x="0" y="0"/>
+          <a:chExt cx="0" cy="0"/>
+        </a:xfrm>
+      </p:grpSpPr>
+      <p:sp>
+        <p:nvSpPr>
+          <p:cNvPr id="3" name="직사각형 2">
+            <a:extLst>
+              <a:ext uri="{FF2B5EF4-FFF2-40B4-BE49-F238E27FC236}">
+                <a16:creationId xmlns:a16="http://schemas.microsoft.com/office/drawing/2014/main" id="{4480F933-025B-964F-DC78-EB0567125B9F}"/>
+              </a:ext>
+            </a:extLst>
+          </p:cNvPr>
+          <p:cNvSpPr/>
+          <p:nvPr/>
+        </p:nvSpPr>
+        <p:spPr>
+          <a:xfrm>
+            <a:off x="549796" y="1890054"/>
+            <a:ext cx="8136904" cy="674850"/>
+          </a:xfrm>
+          <a:prstGeom prst="rect">
+            <a:avLst/>
+          </a:prstGeom>
+          <a:solidFill>
+            <a:schemeClr val="bg1">
+              <a:lumMod val="85000"/>
+            </a:schemeClr>
+          </a:solidFill>
+          <a:ln>
+            <a:noFill/>
+          </a:ln>
+        </p:spPr>
+        <p:style>
+          <a:lnRef idx="2">
+            <a:schemeClr val="accent1">
+              <a:shade val="15000"/>
+            </a:schemeClr>
+          </a:lnRef>
+          <a:fillRef idx="1">
+            <a:schemeClr val="accent1"/>
+          </a:fillRef>
+          <a:effectRef idx="0">
+            <a:schemeClr val="accent1"/>
+          </a:effectRef>
+          <a:fontRef idx="minor">
+            <a:schemeClr val="lt1"/>
+          </a:fontRef>
+        </p:style>
+        <p:txBody>
+          <a:bodyPr rtlCol="0" anchor="ctr"/>
+          <a:lstStyle/>
+          <a:p>
+            <a:pPr algn="ctr"/>
+            <a:endParaRPr lang="ko-KR" altLang="en-US" dirty="0"/>
+          </a:p>
+        </p:txBody>
+      </p:sp>
+      <p:sp>
+        <p:nvSpPr>
+          <p:cNvPr id="8" name="슬라이드 번호 개체 틀 7">
+            <a:extLst>
+              <a:ext uri="{FF2B5EF4-FFF2-40B4-BE49-F238E27FC236}">
+                <a16:creationId xmlns:a16="http://schemas.microsoft.com/office/drawing/2014/main" id="{FB865C5A-AC22-903F-65DE-B0B66C8E440F}"/>
+              </a:ext>
+            </a:extLst>
+          </p:cNvPr>
+          <p:cNvSpPr>
+            <a:spLocks noGrp="1"/>
+          </p:cNvSpPr>
+          <p:nvPr>
+            <p:ph type="sldNum" sz="quarter" idx="12"/>
+          </p:nvPr>
+        </p:nvSpPr>
+        <p:spPr/>
+        <p:txBody>
+          <a:bodyPr/>
+          <a:lstStyle/>
+          <a:p>
+            <a:pPr rtl="0"/>
+            <a:fld id="{A3F31473-23EB-4724-8B59-FE6D21D89FA4}" type="slidenum">
+              <a:rPr lang="en-US" altLang="ko-KR" noProof="0" smtClean="0"/>
+              <a:t>3</a:t>
+            </a:fld>
+            <a:endParaRPr lang="en-US" altLang="ko-KR" noProof="0" dirty="0"/>
+          </a:p>
+        </p:txBody>
+      </p:sp>
+      <p:sp>
+        <p:nvSpPr>
+          <p:cNvPr id="2" name="TextBox 1">
+            <a:extLst>
+              <a:ext uri="{FF2B5EF4-FFF2-40B4-BE49-F238E27FC236}">
+                <a16:creationId xmlns:a16="http://schemas.microsoft.com/office/drawing/2014/main" id="{B6442AF8-60A9-DCE2-F679-9A9DD6247034}"/>
+              </a:ext>
+            </a:extLst>
+          </p:cNvPr>
+          <p:cNvSpPr txBox="1"/>
+          <p:nvPr/>
+        </p:nvSpPr>
+        <p:spPr>
+          <a:xfrm>
+            <a:off x="1629916" y="620688"/>
+            <a:ext cx="8928992" cy="5131020"/>
+          </a:xfrm>
+          <a:prstGeom prst="rect">
+            <a:avLst/>
+          </a:prstGeom>
+          <a:noFill/>
+        </p:spPr>
+        <p:txBody>
+          <a:bodyPr wrap="square" rtlCol="0">
+            <a:spAutoFit/>
+          </a:bodyPr>
+          <a:lstStyle/>
+          <a:p>
+            <a:pPr>
+              <a:lnSpc>
+                <a:spcPct val="200000"/>
+              </a:lnSpc>
+            </a:pPr>
+            <a:r>
+              <a:rPr lang="ko-KR" altLang="en-US" sz="4000" b="1" dirty="0">
+                <a:latin typeface="한컴 말랑말랑 Bold" panose="020F0803000000000000" pitchFamily="50" charset="-127"/>
+                <a:ea typeface="한컴 말랑말랑 Bold" panose="020F0803000000000000" pitchFamily="50" charset="-127"/>
+              </a:rPr>
+              <a:t>목차</a:t>
+            </a:r>
+            <a:endParaRPr lang="en-US" altLang="ko-KR" sz="4000" b="1" dirty="0">
+              <a:latin typeface="한컴 말랑말랑 Bold" panose="020F0803000000000000" pitchFamily="50" charset="-127"/>
+              <a:ea typeface="한컴 말랑말랑 Bold" panose="020F0803000000000000" pitchFamily="50" charset="-127"/>
+            </a:endParaRPr>
+          </a:p>
+          <a:p>
+            <a:pPr marL="514350" indent="-514350">
+              <a:lnSpc>
+                <a:spcPct val="200000"/>
+              </a:lnSpc>
+              <a:buAutoNum type="arabicPeriod"/>
+            </a:pPr>
+            <a:r>
+              <a:rPr lang="ko-KR" altLang="en-US" sz="2000" b="1" dirty="0">
+                <a:latin typeface="한컴 말랑말랑 Bold" panose="020F0803000000000000" pitchFamily="50" charset="-127"/>
+                <a:ea typeface="한컴 말랑말랑 Bold" panose="020F0803000000000000" pitchFamily="50" charset="-127"/>
+              </a:rPr>
+              <a:t>통계학</a:t>
+            </a:r>
+            <a:r>
+              <a:rPr lang="en-US" altLang="ko-KR" sz="2000" b="1" dirty="0">
+                <a:latin typeface="한컴 말랑말랑 Bold" panose="020F0803000000000000" pitchFamily="50" charset="-127"/>
+                <a:ea typeface="한컴 말랑말랑 Bold" panose="020F0803000000000000" pitchFamily="50" charset="-127"/>
+              </a:rPr>
+              <a:t>(Statistics)</a:t>
+            </a:r>
+          </a:p>
+          <a:p>
+            <a:pPr marL="514350" indent="-514350">
+              <a:lnSpc>
+                <a:spcPct val="200000"/>
+              </a:lnSpc>
+              <a:buAutoNum type="arabicPeriod"/>
+            </a:pPr>
+            <a:r>
+              <a:rPr lang="ko-KR" altLang="en-US" sz="2000" b="1" dirty="0">
+                <a:latin typeface="한컴 말랑말랑 Bold" panose="020F0803000000000000" pitchFamily="50" charset="-127"/>
+                <a:ea typeface="한컴 말랑말랑 Bold" panose="020F0803000000000000" pitchFamily="50" charset="-127"/>
+              </a:rPr>
+              <a:t>모집단과</a:t>
+            </a:r>
+            <a:r>
+              <a:rPr lang="en-US" altLang="ko-KR" sz="2000" b="1" dirty="0">
+                <a:latin typeface="한컴 말랑말랑 Bold" panose="020F0803000000000000" pitchFamily="50" charset="-127"/>
+                <a:ea typeface="한컴 말랑말랑 Bold" panose="020F0803000000000000" pitchFamily="50" charset="-127"/>
+              </a:rPr>
+              <a:t> </a:t>
+            </a:r>
+            <a:r>
+              <a:rPr lang="ko-KR" altLang="en-US" sz="2000" b="1" dirty="0">
+                <a:latin typeface="한컴 말랑말랑 Bold" panose="020F0803000000000000" pitchFamily="50" charset="-127"/>
+                <a:ea typeface="한컴 말랑말랑 Bold" panose="020F0803000000000000" pitchFamily="50" charset="-127"/>
+              </a:rPr>
+              <a:t>표본조사 방법</a:t>
+            </a:r>
+            <a:endParaRPr lang="en-US" altLang="ko-KR" sz="2000" b="1" dirty="0">
+              <a:latin typeface="한컴 말랑말랑 Bold" panose="020F0803000000000000" pitchFamily="50" charset="-127"/>
+              <a:ea typeface="한컴 말랑말랑 Bold" panose="020F0803000000000000" pitchFamily="50" charset="-127"/>
+            </a:endParaRPr>
+          </a:p>
+          <a:p>
+            <a:pPr marL="514350" indent="-514350">
+              <a:lnSpc>
+                <a:spcPct val="200000"/>
+              </a:lnSpc>
+              <a:buAutoNum type="arabicPeriod"/>
+            </a:pPr>
+            <a:r>
+              <a:rPr lang="ko-KR" altLang="en-US" sz="2000" b="1" dirty="0">
+                <a:latin typeface="한컴 말랑말랑 Bold" panose="020F0803000000000000" pitchFamily="50" charset="-127"/>
+                <a:ea typeface="한컴 말랑말랑 Bold" panose="020F0803000000000000" pitchFamily="50" charset="-127"/>
+              </a:rPr>
+              <a:t>데이터의 종류</a:t>
+            </a:r>
+            <a:r>
+              <a:rPr lang="en-US" altLang="ko-KR" sz="2000" b="1" dirty="0">
+                <a:latin typeface="한컴 말랑말랑 Bold" panose="020F0803000000000000" pitchFamily="50" charset="-127"/>
+                <a:ea typeface="한컴 말랑말랑 Bold" panose="020F0803000000000000" pitchFamily="50" charset="-127"/>
+              </a:rPr>
+              <a:t>(Data type)</a:t>
+            </a:r>
+          </a:p>
+          <a:p>
+            <a:pPr marL="514350" indent="-514350">
+              <a:lnSpc>
+                <a:spcPct val="200000"/>
+              </a:lnSpc>
+              <a:buAutoNum type="arabicPeriod"/>
+            </a:pPr>
+            <a:r>
+              <a:rPr lang="ko-KR" altLang="en-US" sz="2000" b="1" dirty="0">
+                <a:latin typeface="한컴 말랑말랑 Bold" panose="020F0803000000000000" pitchFamily="50" charset="-127"/>
+                <a:ea typeface="한컴 말랑말랑 Bold" panose="020F0803000000000000" pitchFamily="50" charset="-127"/>
+              </a:rPr>
+              <a:t>주요</a:t>
+            </a:r>
+            <a:r>
+              <a:rPr lang="en-US" altLang="ko-KR" sz="2000" b="1" dirty="0">
+                <a:latin typeface="한컴 말랑말랑 Bold" panose="020F0803000000000000" pitchFamily="50" charset="-127"/>
+                <a:ea typeface="한컴 말랑말랑 Bold" panose="020F0803000000000000" pitchFamily="50" charset="-127"/>
+              </a:rPr>
+              <a:t> </a:t>
+            </a:r>
+            <a:r>
+              <a:rPr lang="ko-KR" altLang="en-US" sz="2000" b="1" dirty="0">
+                <a:latin typeface="한컴 말랑말랑 Bold" panose="020F0803000000000000" pitchFamily="50" charset="-127"/>
+                <a:ea typeface="한컴 말랑말랑 Bold" panose="020F0803000000000000" pitchFamily="50" charset="-127"/>
+              </a:rPr>
+              <a:t>통계량</a:t>
+            </a:r>
+            <a:r>
+              <a:rPr lang="en-US" altLang="ko-KR" sz="2000" b="1" dirty="0">
+                <a:latin typeface="한컴 말랑말랑 Bold" panose="020F0803000000000000" pitchFamily="50" charset="-127"/>
+                <a:ea typeface="한컴 말랑말랑 Bold" panose="020F0803000000000000" pitchFamily="50" charset="-127"/>
+              </a:rPr>
+              <a:t>(Statistic)</a:t>
+            </a:r>
+          </a:p>
+          <a:p>
+            <a:pPr marL="514350" indent="-514350">
+              <a:lnSpc>
+                <a:spcPct val="200000"/>
+              </a:lnSpc>
+              <a:buAutoNum type="arabicPeriod"/>
+            </a:pPr>
+            <a:r>
+              <a:rPr lang="ko-KR" altLang="en-US" sz="2000" b="1" dirty="0" err="1">
+                <a:latin typeface="한컴 말랑말랑 Bold" panose="020F0803000000000000" pitchFamily="50" charset="-127"/>
+                <a:ea typeface="한컴 말랑말랑 Bold" panose="020F0803000000000000" pitchFamily="50" charset="-127"/>
+              </a:rPr>
+              <a:t>다변량</a:t>
+            </a:r>
+            <a:r>
+              <a:rPr lang="ko-KR" altLang="en-US" sz="2000" b="1" dirty="0">
+                <a:latin typeface="한컴 말랑말랑 Bold" panose="020F0803000000000000" pitchFamily="50" charset="-127"/>
+                <a:ea typeface="한컴 말랑말랑 Bold" panose="020F0803000000000000" pitchFamily="50" charset="-127"/>
+              </a:rPr>
+              <a:t> 분석</a:t>
+            </a:r>
+            <a:r>
+              <a:rPr lang="en-US" altLang="ko-KR" sz="2000" b="1" dirty="0">
+                <a:latin typeface="한컴 말랑말랑 Bold" panose="020F0803000000000000" pitchFamily="50" charset="-127"/>
+                <a:ea typeface="한컴 말랑말랑 Bold" panose="020F0803000000000000" pitchFamily="50" charset="-127"/>
+              </a:rPr>
+              <a:t>(Multivariate Analysis)</a:t>
+            </a:r>
+          </a:p>
+          <a:p>
+            <a:pPr>
+              <a:lnSpc>
+                <a:spcPct val="200000"/>
+              </a:lnSpc>
+            </a:pPr>
+            <a:endParaRPr lang="ko-KR" altLang="en-US" sz="2800" b="1" dirty="0">
+              <a:latin typeface="한컴 말랑말랑 Bold" panose="020F0803000000000000" pitchFamily="50" charset="-127"/>
+              <a:ea typeface="한컴 말랑말랑 Bold" panose="020F0803000000000000" pitchFamily="50" charset="-127"/>
+            </a:endParaRPr>
+          </a:p>
+        </p:txBody>
+      </p:sp>
+    </p:spTree>
+    <p:extLst>
+      <p:ext uri="{BB962C8B-B14F-4D97-AF65-F5344CB8AC3E}">
+        <p14:creationId xmlns:p14="http://schemas.microsoft.com/office/powerpoint/2010/main" val="4216523584"/>
+      </p:ext>
+    </p:extLst>
+  </p:cSld>
+  <p:clrMapOvr>
+    <a:masterClrMapping/>
+  </p:clrMapOvr>
+  <mc:AlternateContent xmlns:mc="http://schemas.openxmlformats.org/markup-compatibility/2006" xmlns:p14="http://schemas.microsoft.com/office/powerpoint/2010/main">
+    <mc:Choice Requires="p14">
+      <p:transition spd="med" p14:dur="700">
+        <p:fade/>
+      </p:transition>
+    </mc:Choice>
+    <mc:Fallback xmlns="">
+      <p:transition spd="med">
+        <p:fade/>
+      </p:transition>
+    </mc:Fallback>
+  </mc:AlternateContent>
+</p:sld>
+</file>
+
+<file path=ppt/slides/slide30.xml><?xml version="1.0" encoding="utf-8"?>
 <p:sld xmlns:a="http://schemas.openxmlformats.org/drawingml/2006/main" xmlns:r="http://schemas.openxmlformats.org/officeDocument/2006/relationships" xmlns:p="http://schemas.openxmlformats.org/presentationml/2006/main">
   <p:cSld>
     <p:spTree>
@@ -9546,7 +12460,7 @@
             <a:pPr rtl="0"/>
             <a:fld id="{A3F31473-23EB-4724-8B59-FE6D21D89FA4}" type="slidenum">
               <a:rPr lang="en-US" altLang="ko-KR" noProof="0" smtClean="0"/>
-              <a:t>24</a:t>
+              <a:t>30</a:t>
             </a:fld>
             <a:endParaRPr lang="en-US" altLang="ko-KR" noProof="0" dirty="0"/>
           </a:p>
@@ -9850,7 +12764,7 @@
 </p:sld>
 </file>
 
-<file path=ppt/slides/slide25.xml><?xml version="1.0" encoding="utf-8"?>
+<file path=ppt/slides/slide31.xml><?xml version="1.0" encoding="utf-8"?>
 <p:sld xmlns:a="http://schemas.openxmlformats.org/drawingml/2006/main" xmlns:r="http://schemas.openxmlformats.org/officeDocument/2006/relationships" xmlns:p="http://schemas.openxmlformats.org/presentationml/2006/main">
   <p:cSld>
     <p:spTree>
@@ -9885,7 +12799,7 @@
             <a:pPr rtl="0"/>
             <a:fld id="{A3F31473-23EB-4724-8B59-FE6D21D89FA4}" type="slidenum">
               <a:rPr lang="en-US" altLang="ko-KR" noProof="0" smtClean="0"/>
-              <a:t>25</a:t>
+              <a:t>31</a:t>
             </a:fld>
             <a:endParaRPr lang="en-US" altLang="ko-KR" noProof="0" dirty="0"/>
           </a:p>
@@ -9940,7 +12854,7 @@
 </p:sld>
 </file>
 
-<file path=ppt/slides/slide26.xml><?xml version="1.0" encoding="utf-8"?>
+<file path=ppt/slides/slide32.xml><?xml version="1.0" encoding="utf-8"?>
 <p:sld xmlns:a="http://schemas.openxmlformats.org/drawingml/2006/main" xmlns:r="http://schemas.openxmlformats.org/officeDocument/2006/relationships" xmlns:p="http://schemas.openxmlformats.org/presentationml/2006/main">
   <p:cSld>
     <p:spTree>
@@ -9975,7 +12889,7 @@
             <a:pPr rtl="0"/>
             <a:fld id="{A3F31473-23EB-4724-8B59-FE6D21D89FA4}" type="slidenum">
               <a:rPr lang="en-US" altLang="ko-KR" noProof="0" smtClean="0"/>
-              <a:t>26</a:t>
+              <a:t>32</a:t>
             </a:fld>
             <a:endParaRPr lang="en-US" altLang="ko-KR" noProof="0" dirty="0"/>
           </a:p>
@@ -10030,7 +12944,7 @@
 </p:sld>
 </file>
 
-<file path=ppt/slides/slide27.xml><?xml version="1.0" encoding="utf-8"?>
+<file path=ppt/slides/slide33.xml><?xml version="1.0" encoding="utf-8"?>
 <p:sld xmlns:a="http://schemas.openxmlformats.org/drawingml/2006/main" xmlns:r="http://schemas.openxmlformats.org/officeDocument/2006/relationships" xmlns:p="http://schemas.openxmlformats.org/presentationml/2006/main">
   <p:cSld>
     <p:spTree>
@@ -10065,7 +12979,7 @@
             <a:pPr rtl="0"/>
             <a:fld id="{A3F31473-23EB-4724-8B59-FE6D21D89FA4}" type="slidenum">
               <a:rPr lang="en-US" altLang="ko-KR" noProof="0" smtClean="0"/>
-              <a:t>27</a:t>
+              <a:t>33</a:t>
             </a:fld>
             <a:endParaRPr lang="en-US" altLang="ko-KR" noProof="0" dirty="0"/>
           </a:p>
@@ -10120,7 +13034,7 @@
 </p:sld>
 </file>
 
-<file path=ppt/slides/slide28.xml><?xml version="1.0" encoding="utf-8"?>
+<file path=ppt/slides/slide34.xml><?xml version="1.0" encoding="utf-8"?>
 <p:sld xmlns:a="http://schemas.openxmlformats.org/drawingml/2006/main" xmlns:r="http://schemas.openxmlformats.org/officeDocument/2006/relationships" xmlns:p="http://schemas.openxmlformats.org/presentationml/2006/main">
   <p:cSld>
     <p:spTree>
@@ -10155,7 +13069,7 @@
             <a:pPr rtl="0"/>
             <a:fld id="{A3F31473-23EB-4724-8B59-FE6D21D89FA4}" type="slidenum">
               <a:rPr lang="en-US" altLang="ko-KR" noProof="0" smtClean="0"/>
-              <a:t>28</a:t>
+              <a:t>34</a:t>
             </a:fld>
             <a:endParaRPr lang="en-US" altLang="ko-KR" noProof="0" dirty="0"/>
           </a:p>
@@ -10756,7 +13670,339 @@
 </p:sld>
 </file>
 
-<file path=ppt/slides/slide29.xml><?xml version="1.0" encoding="utf-8"?>
+<file path=ppt/slides/slide35.xml><?xml version="1.0" encoding="utf-8"?>
+<p:sld xmlns:a="http://schemas.openxmlformats.org/drawingml/2006/main" xmlns:r="http://schemas.openxmlformats.org/officeDocument/2006/relationships" xmlns:p="http://schemas.openxmlformats.org/presentationml/2006/main">
+  <p:cSld>
+    <p:spTree>
+      <p:nvGrpSpPr>
+        <p:cNvPr id="1" name="">
+          <a:extLst>
+            <a:ext uri="{FF2B5EF4-FFF2-40B4-BE49-F238E27FC236}">
+              <a16:creationId xmlns:a16="http://schemas.microsoft.com/office/drawing/2014/main" id="{A0FDCD51-7641-A748-59B0-FDCEA3477905}"/>
+            </a:ext>
+          </a:extLst>
+        </p:cNvPr>
+        <p:cNvGrpSpPr/>
+        <p:nvPr/>
+      </p:nvGrpSpPr>
+      <p:grpSpPr>
+        <a:xfrm>
+          <a:off x="0" y="0"/>
+          <a:ext cx="0" cy="0"/>
+          <a:chOff x="0" y="0"/>
+          <a:chExt cx="0" cy="0"/>
+        </a:xfrm>
+      </p:grpSpPr>
+      <p:sp>
+        <p:nvSpPr>
+          <p:cNvPr id="3" name="직사각형 2">
+            <a:extLst>
+              <a:ext uri="{FF2B5EF4-FFF2-40B4-BE49-F238E27FC236}">
+                <a16:creationId xmlns:a16="http://schemas.microsoft.com/office/drawing/2014/main" id="{4BD8AB82-2AB4-E3DD-1586-62415920E394}"/>
+              </a:ext>
+            </a:extLst>
+          </p:cNvPr>
+          <p:cNvSpPr/>
+          <p:nvPr/>
+        </p:nvSpPr>
+        <p:spPr>
+          <a:xfrm>
+            <a:off x="615953" y="4365104"/>
+            <a:ext cx="8136904" cy="674850"/>
+          </a:xfrm>
+          <a:prstGeom prst="rect">
+            <a:avLst/>
+          </a:prstGeom>
+          <a:solidFill>
+            <a:schemeClr val="bg1">
+              <a:lumMod val="85000"/>
+            </a:schemeClr>
+          </a:solidFill>
+          <a:ln>
+            <a:noFill/>
+          </a:ln>
+        </p:spPr>
+        <p:style>
+          <a:lnRef idx="2">
+            <a:schemeClr val="accent1">
+              <a:shade val="15000"/>
+            </a:schemeClr>
+          </a:lnRef>
+          <a:fillRef idx="1">
+            <a:schemeClr val="accent1"/>
+          </a:fillRef>
+          <a:effectRef idx="0">
+            <a:schemeClr val="accent1"/>
+          </a:effectRef>
+          <a:fontRef idx="minor">
+            <a:schemeClr val="lt1"/>
+          </a:fontRef>
+        </p:style>
+        <p:txBody>
+          <a:bodyPr rtlCol="0" anchor="ctr"/>
+          <a:lstStyle/>
+          <a:p>
+            <a:pPr algn="ctr"/>
+            <a:endParaRPr lang="ko-KR" altLang="en-US" dirty="0"/>
+          </a:p>
+        </p:txBody>
+      </p:sp>
+      <p:sp>
+        <p:nvSpPr>
+          <p:cNvPr id="8" name="슬라이드 번호 개체 틀 7">
+            <a:extLst>
+              <a:ext uri="{FF2B5EF4-FFF2-40B4-BE49-F238E27FC236}">
+                <a16:creationId xmlns:a16="http://schemas.microsoft.com/office/drawing/2014/main" id="{57695BA4-6421-8E49-259E-664134590B9B}"/>
+              </a:ext>
+            </a:extLst>
+          </p:cNvPr>
+          <p:cNvSpPr>
+            <a:spLocks noGrp="1"/>
+          </p:cNvSpPr>
+          <p:nvPr>
+            <p:ph type="sldNum" sz="quarter" idx="12"/>
+          </p:nvPr>
+        </p:nvSpPr>
+        <p:spPr/>
+        <p:txBody>
+          <a:bodyPr/>
+          <a:lstStyle/>
+          <a:p>
+            <a:pPr rtl="0"/>
+            <a:fld id="{A3F31473-23EB-4724-8B59-FE6D21D89FA4}" type="slidenum">
+              <a:rPr lang="en-US" altLang="ko-KR" noProof="0" smtClean="0"/>
+              <a:t>35</a:t>
+            </a:fld>
+            <a:endParaRPr lang="en-US" altLang="ko-KR" noProof="0" dirty="0"/>
+          </a:p>
+        </p:txBody>
+      </p:sp>
+      <p:sp>
+        <p:nvSpPr>
+          <p:cNvPr id="2" name="TextBox 1">
+            <a:extLst>
+              <a:ext uri="{FF2B5EF4-FFF2-40B4-BE49-F238E27FC236}">
+                <a16:creationId xmlns:a16="http://schemas.microsoft.com/office/drawing/2014/main" id="{981FEC46-249B-7E9C-0EA5-C603DBF9E2F8}"/>
+              </a:ext>
+            </a:extLst>
+          </p:cNvPr>
+          <p:cNvSpPr txBox="1"/>
+          <p:nvPr/>
+        </p:nvSpPr>
+        <p:spPr>
+          <a:xfrm>
+            <a:off x="1629916" y="620688"/>
+            <a:ext cx="8928992" cy="5131020"/>
+          </a:xfrm>
+          <a:prstGeom prst="rect">
+            <a:avLst/>
+          </a:prstGeom>
+          <a:noFill/>
+        </p:spPr>
+        <p:txBody>
+          <a:bodyPr wrap="square" rtlCol="0">
+            <a:spAutoFit/>
+          </a:bodyPr>
+          <a:lstStyle/>
+          <a:p>
+            <a:pPr>
+              <a:lnSpc>
+                <a:spcPct val="200000"/>
+              </a:lnSpc>
+            </a:pPr>
+            <a:r>
+              <a:rPr lang="ko-KR" altLang="en-US" sz="4000" b="1" dirty="0">
+                <a:latin typeface="한컴 말랑말랑 Bold" panose="020F0803000000000000" pitchFamily="50" charset="-127"/>
+                <a:ea typeface="한컴 말랑말랑 Bold" panose="020F0803000000000000" pitchFamily="50" charset="-127"/>
+              </a:rPr>
+              <a:t>목차</a:t>
+            </a:r>
+            <a:endParaRPr lang="en-US" altLang="ko-KR" sz="4000" b="1" dirty="0">
+              <a:latin typeface="한컴 말랑말랑 Bold" panose="020F0803000000000000" pitchFamily="50" charset="-127"/>
+              <a:ea typeface="한컴 말랑말랑 Bold" panose="020F0803000000000000" pitchFamily="50" charset="-127"/>
+            </a:endParaRPr>
+          </a:p>
+          <a:p>
+            <a:pPr marL="514350" indent="-514350">
+              <a:lnSpc>
+                <a:spcPct val="200000"/>
+              </a:lnSpc>
+              <a:buAutoNum type="arabicPeriod"/>
+            </a:pPr>
+            <a:r>
+              <a:rPr lang="ko-KR" altLang="en-US" sz="2000" b="1" dirty="0">
+                <a:latin typeface="한컴 말랑말랑 Bold" panose="020F0803000000000000" pitchFamily="50" charset="-127"/>
+                <a:ea typeface="한컴 말랑말랑 Bold" panose="020F0803000000000000" pitchFamily="50" charset="-127"/>
+              </a:rPr>
+              <a:t>통계학</a:t>
+            </a:r>
+            <a:r>
+              <a:rPr lang="en-US" altLang="ko-KR" sz="2000" b="1" dirty="0">
+                <a:latin typeface="한컴 말랑말랑 Bold" panose="020F0803000000000000" pitchFamily="50" charset="-127"/>
+                <a:ea typeface="한컴 말랑말랑 Bold" panose="020F0803000000000000" pitchFamily="50" charset="-127"/>
+              </a:rPr>
+              <a:t>(Statistics)</a:t>
+            </a:r>
+          </a:p>
+          <a:p>
+            <a:pPr marL="514350" indent="-514350">
+              <a:lnSpc>
+                <a:spcPct val="200000"/>
+              </a:lnSpc>
+              <a:buAutoNum type="arabicPeriod"/>
+            </a:pPr>
+            <a:r>
+              <a:rPr lang="ko-KR" altLang="en-US" sz="2000" b="1" dirty="0">
+                <a:latin typeface="한컴 말랑말랑 Bold" panose="020F0803000000000000" pitchFamily="50" charset="-127"/>
+                <a:ea typeface="한컴 말랑말랑 Bold" panose="020F0803000000000000" pitchFamily="50" charset="-127"/>
+              </a:rPr>
+              <a:t>모집단과</a:t>
+            </a:r>
+            <a:r>
+              <a:rPr lang="en-US" altLang="ko-KR" sz="2000" b="1" dirty="0">
+                <a:latin typeface="한컴 말랑말랑 Bold" panose="020F0803000000000000" pitchFamily="50" charset="-127"/>
+                <a:ea typeface="한컴 말랑말랑 Bold" panose="020F0803000000000000" pitchFamily="50" charset="-127"/>
+              </a:rPr>
+              <a:t> </a:t>
+            </a:r>
+            <a:r>
+              <a:rPr lang="ko-KR" altLang="en-US" sz="2000" b="1" dirty="0">
+                <a:latin typeface="한컴 말랑말랑 Bold" panose="020F0803000000000000" pitchFamily="50" charset="-127"/>
+                <a:ea typeface="한컴 말랑말랑 Bold" panose="020F0803000000000000" pitchFamily="50" charset="-127"/>
+              </a:rPr>
+              <a:t>표본조사 방법</a:t>
+            </a:r>
+            <a:endParaRPr lang="en-US" altLang="ko-KR" sz="2000" b="1" dirty="0">
+              <a:latin typeface="한컴 말랑말랑 Bold" panose="020F0803000000000000" pitchFamily="50" charset="-127"/>
+              <a:ea typeface="한컴 말랑말랑 Bold" panose="020F0803000000000000" pitchFamily="50" charset="-127"/>
+            </a:endParaRPr>
+          </a:p>
+          <a:p>
+            <a:pPr marL="514350" indent="-514350">
+              <a:lnSpc>
+                <a:spcPct val="200000"/>
+              </a:lnSpc>
+              <a:buAutoNum type="arabicPeriod"/>
+            </a:pPr>
+            <a:r>
+              <a:rPr lang="ko-KR" altLang="en-US" sz="2000" b="1" dirty="0">
+                <a:latin typeface="한컴 말랑말랑 Bold" panose="020F0803000000000000" pitchFamily="50" charset="-127"/>
+                <a:ea typeface="한컴 말랑말랑 Bold" panose="020F0803000000000000" pitchFamily="50" charset="-127"/>
+              </a:rPr>
+              <a:t>데이터의 종류</a:t>
+            </a:r>
+            <a:r>
+              <a:rPr lang="en-US" altLang="ko-KR" sz="2000" b="1" dirty="0">
+                <a:latin typeface="한컴 말랑말랑 Bold" panose="020F0803000000000000" pitchFamily="50" charset="-127"/>
+                <a:ea typeface="한컴 말랑말랑 Bold" panose="020F0803000000000000" pitchFamily="50" charset="-127"/>
+              </a:rPr>
+              <a:t>(Data type)</a:t>
+            </a:r>
+          </a:p>
+          <a:p>
+            <a:pPr marL="514350" indent="-514350">
+              <a:lnSpc>
+                <a:spcPct val="200000"/>
+              </a:lnSpc>
+              <a:buAutoNum type="arabicPeriod"/>
+            </a:pPr>
+            <a:r>
+              <a:rPr lang="ko-KR" altLang="en-US" sz="2000" b="1" dirty="0">
+                <a:latin typeface="한컴 말랑말랑 Bold" panose="020F0803000000000000" pitchFamily="50" charset="-127"/>
+                <a:ea typeface="한컴 말랑말랑 Bold" panose="020F0803000000000000" pitchFamily="50" charset="-127"/>
+              </a:rPr>
+              <a:t>주요</a:t>
+            </a:r>
+            <a:r>
+              <a:rPr lang="en-US" altLang="ko-KR" sz="2000" b="1" dirty="0">
+                <a:latin typeface="한컴 말랑말랑 Bold" panose="020F0803000000000000" pitchFamily="50" charset="-127"/>
+                <a:ea typeface="한컴 말랑말랑 Bold" panose="020F0803000000000000" pitchFamily="50" charset="-127"/>
+              </a:rPr>
+              <a:t> </a:t>
+            </a:r>
+            <a:r>
+              <a:rPr lang="ko-KR" altLang="en-US" sz="2000" b="1" dirty="0">
+                <a:latin typeface="한컴 말랑말랑 Bold" panose="020F0803000000000000" pitchFamily="50" charset="-127"/>
+                <a:ea typeface="한컴 말랑말랑 Bold" panose="020F0803000000000000" pitchFamily="50" charset="-127"/>
+              </a:rPr>
+              <a:t>통계량</a:t>
+            </a:r>
+            <a:r>
+              <a:rPr lang="en-US" altLang="ko-KR" sz="2000" b="1" dirty="0">
+                <a:latin typeface="한컴 말랑말랑 Bold" panose="020F0803000000000000" pitchFamily="50" charset="-127"/>
+                <a:ea typeface="한컴 말랑말랑 Bold" panose="020F0803000000000000" pitchFamily="50" charset="-127"/>
+              </a:rPr>
+              <a:t>(Statistic)</a:t>
+            </a:r>
+          </a:p>
+          <a:p>
+            <a:pPr marL="514350" indent="-514350">
+              <a:lnSpc>
+                <a:spcPct val="200000"/>
+              </a:lnSpc>
+              <a:buAutoNum type="arabicPeriod"/>
+            </a:pPr>
+            <a:r>
+              <a:rPr lang="ko-KR" altLang="en-US" sz="2000" b="1" dirty="0" err="1">
+                <a:latin typeface="한컴 말랑말랑 Bold" panose="020F0803000000000000" pitchFamily="50" charset="-127"/>
+                <a:ea typeface="한컴 말랑말랑 Bold" panose="020F0803000000000000" pitchFamily="50" charset="-127"/>
+              </a:rPr>
+              <a:t>다변량</a:t>
+            </a:r>
+            <a:r>
+              <a:rPr lang="ko-KR" altLang="en-US" sz="2000" b="1" dirty="0">
+                <a:latin typeface="한컴 말랑말랑 Bold" panose="020F0803000000000000" pitchFamily="50" charset="-127"/>
+                <a:ea typeface="한컴 말랑말랑 Bold" panose="020F0803000000000000" pitchFamily="50" charset="-127"/>
+              </a:rPr>
+              <a:t> 분석</a:t>
+            </a:r>
+            <a:r>
+              <a:rPr lang="en-US" altLang="ko-KR" sz="2000" b="1" dirty="0">
+                <a:latin typeface="한컴 말랑말랑 Bold" panose="020F0803000000000000" pitchFamily="50" charset="-127"/>
+                <a:ea typeface="한컴 말랑말랑 Bold" panose="020F0803000000000000" pitchFamily="50" charset="-127"/>
+              </a:rPr>
+              <a:t>(Multivariate Analysis)</a:t>
+            </a:r>
+          </a:p>
+          <a:p>
+            <a:pPr>
+              <a:lnSpc>
+                <a:spcPct val="200000"/>
+              </a:lnSpc>
+            </a:pPr>
+            <a:endParaRPr lang="ko-KR" altLang="en-US" sz="2800" b="1" dirty="0">
+              <a:latin typeface="한컴 말랑말랑 Bold" panose="020F0803000000000000" pitchFamily="50" charset="-127"/>
+              <a:ea typeface="한컴 말랑말랑 Bold" panose="020F0803000000000000" pitchFamily="50" charset="-127"/>
+            </a:endParaRPr>
+          </a:p>
+        </p:txBody>
+      </p:sp>
+    </p:spTree>
+    <p:extLst>
+      <p:ext uri="{BB962C8B-B14F-4D97-AF65-F5344CB8AC3E}">
+        <p14:creationId xmlns:p14="http://schemas.microsoft.com/office/powerpoint/2010/main" val="2277558061"/>
+      </p:ext>
+    </p:extLst>
+  </p:cSld>
+  <p:clrMapOvr>
+    <a:masterClrMapping/>
+  </p:clrMapOvr>
+  <mc:AlternateContent xmlns:mc="http://schemas.openxmlformats.org/markup-compatibility/2006" xmlns:p14="http://schemas.microsoft.com/office/powerpoint/2010/main">
+    <mc:Choice Requires="p14">
+      <p:transition spd="med" p14:dur="700">
+        <p:fade/>
+      </p:transition>
+    </mc:Choice>
+    <mc:Fallback xmlns="">
+      <p:transition spd="med">
+        <p:fade/>
+      </p:transition>
+    </mc:Fallback>
+  </mc:AlternateContent>
+</p:sld>
+</file>
+
+<file path=ppt/slides/slide36.xml><?xml version="1.0" encoding="utf-8"?>
 <p:sld xmlns:a="http://schemas.openxmlformats.org/drawingml/2006/main" xmlns:r="http://schemas.openxmlformats.org/officeDocument/2006/relationships" xmlns:p="http://schemas.openxmlformats.org/presentationml/2006/main">
   <p:cSld>
     <p:spTree>
@@ -10791,7 +14037,7 @@
             <a:pPr rtl="0"/>
             <a:fld id="{A3F31473-23EB-4724-8B59-FE6D21D89FA4}" type="slidenum">
               <a:rPr lang="en-US" altLang="ko-KR" noProof="0" smtClean="0"/>
-              <a:t>29</a:t>
+              <a:t>36</a:t>
             </a:fld>
             <a:endParaRPr lang="en-US" altLang="ko-KR" noProof="0" dirty="0"/>
           </a:p>
@@ -10846,7 +14092,7 @@
 </p:sld>
 </file>
 
-<file path=ppt/slides/slide3.xml><?xml version="1.0" encoding="utf-8"?>
+<file path=ppt/slides/slide37.xml><?xml version="1.0" encoding="utf-8"?>
 <p:sld xmlns:a="http://schemas.openxmlformats.org/drawingml/2006/main" xmlns:r="http://schemas.openxmlformats.org/officeDocument/2006/relationships" xmlns:p="http://schemas.openxmlformats.org/presentationml/2006/main">
   <p:cSld>
     <p:spTree>
@@ -10863,33 +14109,9 @@
           <a:chExt cx="0" cy="0"/>
         </a:xfrm>
       </p:grpSpPr>
-      <p:pic>
-        <p:nvPicPr>
-          <p:cNvPr id="24" name="그림 23"/>
-          <p:cNvPicPr>
-            <a:picLocks noChangeAspect="1"/>
-          </p:cNvPicPr>
-          <p:nvPr/>
-        </p:nvPicPr>
-        <p:blipFill>
-          <a:blip r:embed="rId3"/>
-          <a:stretch>
-            <a:fillRect/>
-          </a:stretch>
-        </p:blipFill>
-        <p:spPr>
-          <a:xfrm>
-            <a:off x="1413892" y="908720"/>
-            <a:ext cx="8556891" cy="5104724"/>
-          </a:xfrm>
-          <a:prstGeom prst="rect">
-            <a:avLst/>
-          </a:prstGeom>
-        </p:spPr>
-      </p:pic>
-      <p:sp>
-        <p:nvSpPr>
-          <p:cNvPr id="25" name="슬라이드 번호 개체 틀 24"/>
+      <p:sp>
+        <p:nvSpPr>
+          <p:cNvPr id="8" name="슬라이드 번호 개체 틀 7"/>
           <p:cNvSpPr>
             <a:spLocks noGrp="1"/>
           </p:cNvSpPr>
@@ -10905,73 +14127,7 @@
             <a:pPr rtl="0"/>
             <a:fld id="{A3F31473-23EB-4724-8B59-FE6D21D89FA4}" type="slidenum">
               <a:rPr lang="en-US" altLang="ko-KR" noProof="0" smtClean="0"/>
-              <a:t>3</a:t>
-            </a:fld>
-            <a:endParaRPr lang="en-US" altLang="ko-KR" noProof="0" dirty="0"/>
-          </a:p>
-        </p:txBody>
-      </p:sp>
-    </p:spTree>
-    <p:extLst>
-      <p:ext uri="{BB962C8B-B14F-4D97-AF65-F5344CB8AC3E}">
-        <p14:creationId xmlns:p14="http://schemas.microsoft.com/office/powerpoint/2010/main" val="51017038"/>
-      </p:ext>
-    </p:extLst>
-  </p:cSld>
-  <p:clrMapOvr>
-    <a:masterClrMapping/>
-  </p:clrMapOvr>
-  <mc:AlternateContent xmlns:mc="http://schemas.openxmlformats.org/markup-compatibility/2006" xmlns:p14="http://schemas.microsoft.com/office/powerpoint/2010/main">
-    <mc:Choice Requires="p14">
-      <p:transition spd="med" p14:dur="700">
-        <p:fade/>
-      </p:transition>
-    </mc:Choice>
-    <mc:Fallback xmlns="">
-      <p:transition spd="med">
-        <p:fade/>
-      </p:transition>
-    </mc:Fallback>
-  </mc:AlternateContent>
-</p:sld>
-</file>
-
-<file path=ppt/slides/slide30.xml><?xml version="1.0" encoding="utf-8"?>
-<p:sld xmlns:a="http://schemas.openxmlformats.org/drawingml/2006/main" xmlns:r="http://schemas.openxmlformats.org/officeDocument/2006/relationships" xmlns:p="http://schemas.openxmlformats.org/presentationml/2006/main">
-  <p:cSld>
-    <p:spTree>
-      <p:nvGrpSpPr>
-        <p:cNvPr id="1" name=""/>
-        <p:cNvGrpSpPr/>
-        <p:nvPr/>
-      </p:nvGrpSpPr>
-      <p:grpSpPr>
-        <a:xfrm>
-          <a:off x="0" y="0"/>
-          <a:ext cx="0" cy="0"/>
-          <a:chOff x="0" y="0"/>
-          <a:chExt cx="0" cy="0"/>
-        </a:xfrm>
-      </p:grpSpPr>
-      <p:sp>
-        <p:nvSpPr>
-          <p:cNvPr id="8" name="슬라이드 번호 개체 틀 7"/>
-          <p:cNvSpPr>
-            <a:spLocks noGrp="1"/>
-          </p:cNvSpPr>
-          <p:nvPr>
-            <p:ph type="sldNum" sz="quarter" idx="12"/>
-          </p:nvPr>
-        </p:nvSpPr>
-        <p:spPr/>
-        <p:txBody>
-          <a:bodyPr/>
-          <a:lstStyle/>
-          <a:p>
-            <a:pPr rtl="0"/>
-            <a:fld id="{A3F31473-23EB-4724-8B59-FE6D21D89FA4}" type="slidenum">
-              <a:rPr lang="en-US" altLang="ko-KR" noProof="0" smtClean="0"/>
-              <a:t>30</a:t>
+              <a:t>37</a:t>
             </a:fld>
             <a:endParaRPr lang="en-US" altLang="ko-KR" noProof="0" dirty="0"/>
           </a:p>
@@ -11026,7 +14182,7 @@
 </p:sld>
 </file>
 
-<file path=ppt/slides/slide31.xml><?xml version="1.0" encoding="utf-8"?>
+<file path=ppt/slides/slide38.xml><?xml version="1.0" encoding="utf-8"?>
 <p:sld xmlns:a="http://schemas.openxmlformats.org/drawingml/2006/main" xmlns:r="http://schemas.openxmlformats.org/officeDocument/2006/relationships" xmlns:p="http://schemas.openxmlformats.org/presentationml/2006/main">
   <p:cSld>
     <p:spTree>
@@ -11061,7 +14217,7 @@
             <a:pPr rtl="0"/>
             <a:fld id="{A3F31473-23EB-4724-8B59-FE6D21D89FA4}" type="slidenum">
               <a:rPr lang="en-US" altLang="ko-KR" noProof="0" smtClean="0"/>
-              <a:t>31</a:t>
+              <a:t>38</a:t>
             </a:fld>
             <a:endParaRPr lang="en-US" altLang="ko-KR" noProof="0" dirty="0"/>
           </a:p>
@@ -11116,7 +14272,7 @@
 </p:sld>
 </file>
 
-<file path=ppt/slides/slide32.xml><?xml version="1.0" encoding="utf-8"?>
+<file path=ppt/slides/slide39.xml><?xml version="1.0" encoding="utf-8"?>
 <p:sld xmlns:a="http://schemas.openxmlformats.org/drawingml/2006/main" xmlns:r="http://schemas.openxmlformats.org/officeDocument/2006/relationships" xmlns:p="http://schemas.openxmlformats.org/presentationml/2006/main">
   <p:cSld>
     <p:spTree>
@@ -11151,7 +14307,7 @@
             <a:pPr rtl="0"/>
             <a:fld id="{A3F31473-23EB-4724-8B59-FE6D21D89FA4}" type="slidenum">
               <a:rPr lang="en-US" altLang="ko-KR" noProof="0" smtClean="0"/>
-              <a:t>32</a:t>
+              <a:t>39</a:t>
             </a:fld>
             <a:endParaRPr lang="en-US" altLang="ko-KR" noProof="0" dirty="0"/>
           </a:p>
@@ -11206,7 +14362,115 @@
 </p:sld>
 </file>
 
-<file path=ppt/slides/slide33.xml><?xml version="1.0" encoding="utf-8"?>
+<file path=ppt/slides/slide4.xml><?xml version="1.0" encoding="utf-8"?>
+<p:sld xmlns:a="http://schemas.openxmlformats.org/drawingml/2006/main" xmlns:r="http://schemas.openxmlformats.org/officeDocument/2006/relationships" xmlns:p="http://schemas.openxmlformats.org/presentationml/2006/main">
+  <p:cSld>
+    <p:spTree>
+      <p:nvGrpSpPr>
+        <p:cNvPr id="1" name="">
+          <a:extLst>
+            <a:ext uri="{FF2B5EF4-FFF2-40B4-BE49-F238E27FC236}">
+              <a16:creationId xmlns:a16="http://schemas.microsoft.com/office/drawing/2014/main" id="{7690E2C1-BB1A-4FCC-4EBC-8B540F598F5F}"/>
+            </a:ext>
+          </a:extLst>
+        </p:cNvPr>
+        <p:cNvGrpSpPr/>
+        <p:nvPr/>
+      </p:nvGrpSpPr>
+      <p:grpSpPr>
+        <a:xfrm>
+          <a:off x="0" y="0"/>
+          <a:ext cx="0" cy="0"/>
+          <a:chOff x="0" y="0"/>
+          <a:chExt cx="0" cy="0"/>
+        </a:xfrm>
+      </p:grpSpPr>
+      <p:pic>
+        <p:nvPicPr>
+          <p:cNvPr id="5" name="그림 4">
+            <a:extLst>
+              <a:ext uri="{FF2B5EF4-FFF2-40B4-BE49-F238E27FC236}">
+                <a16:creationId xmlns:a16="http://schemas.microsoft.com/office/drawing/2014/main" id="{85CDD0C3-0723-5479-A784-C68987AC40BF}"/>
+              </a:ext>
+            </a:extLst>
+          </p:cNvPr>
+          <p:cNvPicPr>
+            <a:picLocks noChangeAspect="1"/>
+          </p:cNvPicPr>
+          <p:nvPr/>
+        </p:nvPicPr>
+        <p:blipFill>
+          <a:blip r:embed="rId3"/>
+          <a:stretch>
+            <a:fillRect/>
+          </a:stretch>
+        </p:blipFill>
+        <p:spPr>
+          <a:xfrm>
+            <a:off x="1629916" y="1268760"/>
+            <a:ext cx="8890594" cy="4622186"/>
+          </a:xfrm>
+          <a:prstGeom prst="rect">
+            <a:avLst/>
+          </a:prstGeom>
+        </p:spPr>
+      </p:pic>
+      <p:sp>
+        <p:nvSpPr>
+          <p:cNvPr id="8" name="슬라이드 번호 개체 틀 7">
+            <a:extLst>
+              <a:ext uri="{FF2B5EF4-FFF2-40B4-BE49-F238E27FC236}">
+                <a16:creationId xmlns:a16="http://schemas.microsoft.com/office/drawing/2014/main" id="{4EF241B0-03F6-4174-6351-DEA7C3022824}"/>
+              </a:ext>
+            </a:extLst>
+          </p:cNvPr>
+          <p:cNvSpPr>
+            <a:spLocks noGrp="1"/>
+          </p:cNvSpPr>
+          <p:nvPr>
+            <p:ph type="sldNum" sz="quarter" idx="12"/>
+          </p:nvPr>
+        </p:nvSpPr>
+        <p:spPr/>
+        <p:txBody>
+          <a:bodyPr/>
+          <a:lstStyle/>
+          <a:p>
+            <a:pPr rtl="0"/>
+            <a:fld id="{A3F31473-23EB-4724-8B59-FE6D21D89FA4}" type="slidenum">
+              <a:rPr lang="en-US" altLang="ko-KR" noProof="0" smtClean="0"/>
+              <a:t>4</a:t>
+            </a:fld>
+            <a:endParaRPr lang="en-US" altLang="ko-KR" noProof="0" dirty="0"/>
+          </a:p>
+        </p:txBody>
+      </p:sp>
+    </p:spTree>
+    <p:extLst>
+      <p:ext uri="{BB962C8B-B14F-4D97-AF65-F5344CB8AC3E}">
+        <p14:creationId xmlns:p14="http://schemas.microsoft.com/office/powerpoint/2010/main" val="810907724"/>
+      </p:ext>
+    </p:extLst>
+  </p:cSld>
+  <p:clrMapOvr>
+    <a:masterClrMapping/>
+  </p:clrMapOvr>
+  <mc:AlternateContent xmlns:mc="http://schemas.openxmlformats.org/markup-compatibility/2006" xmlns:p14="http://schemas.microsoft.com/office/powerpoint/2010/main">
+    <mc:Choice Requires="p14">
+      <p:transition spd="med" p14:dur="700">
+        <p:fade/>
+      </p:transition>
+    </mc:Choice>
+    <mc:Fallback xmlns="">
+      <p:transition spd="med">
+        <p:fade/>
+      </p:transition>
+    </mc:Fallback>
+  </mc:AlternateContent>
+</p:sld>
+</file>
+
+<file path=ppt/slides/slide40.xml><?xml version="1.0" encoding="utf-8"?>
 <p:sld xmlns:a="http://schemas.openxmlformats.org/drawingml/2006/main" xmlns:r="http://schemas.openxmlformats.org/officeDocument/2006/relationships" xmlns:p="http://schemas.openxmlformats.org/presentationml/2006/main">
   <p:cSld>
     <p:spTree>
@@ -11241,7 +14505,7 @@
             <a:pPr rtl="0"/>
             <a:fld id="{A3F31473-23EB-4724-8B59-FE6D21D89FA4}" type="slidenum">
               <a:rPr lang="en-US" altLang="ko-KR" noProof="0" smtClean="0"/>
-              <a:t>33</a:t>
+              <a:t>40</a:t>
             </a:fld>
             <a:endParaRPr lang="en-US" altLang="ko-KR" noProof="0" dirty="0"/>
           </a:p>
@@ -11296,7 +14560,7 @@
 </p:sld>
 </file>
 
-<file path=ppt/slides/slide34.xml><?xml version="1.0" encoding="utf-8"?>
+<file path=ppt/slides/slide41.xml><?xml version="1.0" encoding="utf-8"?>
 <p:sld xmlns:a="http://schemas.openxmlformats.org/drawingml/2006/main" xmlns:r="http://schemas.openxmlformats.org/officeDocument/2006/relationships" xmlns:p="http://schemas.openxmlformats.org/presentationml/2006/main">
   <p:cSld>
     <p:spTree>
@@ -11331,7 +14595,7 @@
             <a:pPr rtl="0"/>
             <a:fld id="{A3F31473-23EB-4724-8B59-FE6D21D89FA4}" type="slidenum">
               <a:rPr lang="en-US" altLang="ko-KR" noProof="0" smtClean="0"/>
-              <a:t>34</a:t>
+              <a:t>41</a:t>
             </a:fld>
             <a:endParaRPr lang="en-US" altLang="ko-KR" noProof="0" dirty="0"/>
           </a:p>
@@ -11440,7 +14704,553 @@
 </p:sld>
 </file>
 
-<file path=ppt/slides/slide4.xml><?xml version="1.0" encoding="utf-8"?>
+<file path=ppt/slides/slide42.xml><?xml version="1.0" encoding="utf-8"?>
+<p:sld xmlns:a="http://schemas.openxmlformats.org/drawingml/2006/main" xmlns:r="http://schemas.openxmlformats.org/officeDocument/2006/relationships" xmlns:p="http://schemas.openxmlformats.org/presentationml/2006/main">
+  <p:cSld>
+    <p:spTree>
+      <p:nvGrpSpPr>
+        <p:cNvPr id="1" name="">
+          <a:extLst>
+            <a:ext uri="{FF2B5EF4-FFF2-40B4-BE49-F238E27FC236}">
+              <a16:creationId xmlns:a16="http://schemas.microsoft.com/office/drawing/2014/main" id="{6D518AE1-D552-2271-232D-C7A0D3ACFB25}"/>
+            </a:ext>
+          </a:extLst>
+        </p:cNvPr>
+        <p:cNvGrpSpPr/>
+        <p:nvPr/>
+      </p:nvGrpSpPr>
+      <p:grpSpPr>
+        <a:xfrm>
+          <a:off x="0" y="0"/>
+          <a:ext cx="0" cy="0"/>
+          <a:chOff x="0" y="0"/>
+          <a:chExt cx="0" cy="0"/>
+        </a:xfrm>
+      </p:grpSpPr>
+      <p:sp>
+        <p:nvSpPr>
+          <p:cNvPr id="8" name="슬라이드 번호 개체 틀 7">
+            <a:extLst>
+              <a:ext uri="{FF2B5EF4-FFF2-40B4-BE49-F238E27FC236}">
+                <a16:creationId xmlns:a16="http://schemas.microsoft.com/office/drawing/2014/main" id="{67C4C1A8-1722-BD6D-43C7-7A00C8EE290C}"/>
+              </a:ext>
+            </a:extLst>
+          </p:cNvPr>
+          <p:cNvSpPr>
+            <a:spLocks noGrp="1"/>
+          </p:cNvSpPr>
+          <p:nvPr>
+            <p:ph type="sldNum" sz="quarter" idx="12"/>
+          </p:nvPr>
+        </p:nvSpPr>
+        <p:spPr/>
+        <p:txBody>
+          <a:bodyPr/>
+          <a:lstStyle/>
+          <a:p>
+            <a:pPr rtl="0"/>
+            <a:fld id="{A3F31473-23EB-4724-8B59-FE6D21D89FA4}" type="slidenum">
+              <a:rPr lang="en-US" altLang="ko-KR" noProof="0" smtClean="0"/>
+              <a:t>42</a:t>
+            </a:fld>
+            <a:endParaRPr lang="en-US" altLang="ko-KR" noProof="0" dirty="0"/>
+          </a:p>
+        </p:txBody>
+      </p:sp>
+      <p:sp>
+        <p:nvSpPr>
+          <p:cNvPr id="4" name="직사각형 3">
+            <a:extLst>
+              <a:ext uri="{FF2B5EF4-FFF2-40B4-BE49-F238E27FC236}">
+                <a16:creationId xmlns:a16="http://schemas.microsoft.com/office/drawing/2014/main" id="{36EE12EB-4DDE-4514-53C5-CEE36B1DD16C}"/>
+              </a:ext>
+            </a:extLst>
+          </p:cNvPr>
+          <p:cNvSpPr/>
+          <p:nvPr/>
+        </p:nvSpPr>
+        <p:spPr>
+          <a:xfrm>
+            <a:off x="666947" y="764704"/>
+            <a:ext cx="10885572" cy="461665"/>
+          </a:xfrm>
+          <a:prstGeom prst="rect">
+            <a:avLst/>
+          </a:prstGeom>
+        </p:spPr>
+        <p:txBody>
+          <a:bodyPr wrap="square">
+            <a:spAutoFit/>
+          </a:bodyPr>
+          <a:lstStyle/>
+          <a:p>
+            <a:r>
+              <a:rPr lang="en-US" altLang="ko-KR" sz="2400" b="1" dirty="0"/>
+              <a:t>Appendix 1 : </a:t>
+            </a:r>
+            <a:r>
+              <a:rPr lang="ko-KR" altLang="en-US" sz="2400" b="1" dirty="0"/>
+              <a:t>통계 연습 사이트</a:t>
+            </a:r>
+            <a:endParaRPr lang="ko-KR" altLang="en-US" b="1" dirty="0"/>
+          </a:p>
+        </p:txBody>
+      </p:sp>
+      <p:sp>
+        <p:nvSpPr>
+          <p:cNvPr id="2" name="TextBox 1">
+            <a:extLst>
+              <a:ext uri="{FF2B5EF4-FFF2-40B4-BE49-F238E27FC236}">
+                <a16:creationId xmlns:a16="http://schemas.microsoft.com/office/drawing/2014/main" id="{A4772A94-E180-607D-3CC1-237FA2501F6A}"/>
+              </a:ext>
+            </a:extLst>
+          </p:cNvPr>
+          <p:cNvSpPr txBox="1"/>
+          <p:nvPr/>
+        </p:nvSpPr>
+        <p:spPr>
+          <a:xfrm>
+            <a:off x="981844" y="1700808"/>
+            <a:ext cx="8856984" cy="967957"/>
+          </a:xfrm>
+          <a:prstGeom prst="rect">
+            <a:avLst/>
+          </a:prstGeom>
+          <a:noFill/>
+        </p:spPr>
+        <p:txBody>
+          <a:bodyPr wrap="square" rtlCol="0">
+            <a:spAutoFit/>
+          </a:bodyPr>
+          <a:lstStyle/>
+          <a:p>
+            <a:pPr marL="285750" indent="-285750">
+              <a:lnSpc>
+                <a:spcPct val="150000"/>
+              </a:lnSpc>
+              <a:buFont typeface="Wingdings" panose="05000000000000000000" pitchFamily="2" charset="2"/>
+              <a:buChar char="v"/>
+            </a:pPr>
+            <a:r>
+              <a:rPr lang="en-US" altLang="ko-KR" sz="2000" dirty="0">
+                <a:latin typeface="한컴 말랑말랑 Bold" panose="020F0803000000000000" pitchFamily="50" charset="-127"/>
+                <a:ea typeface="한컴 말랑말랑 Bold" panose="020F0803000000000000" pitchFamily="50" charset="-127"/>
+                <a:hlinkClick r:id="rId3">
+                  <a:extLst>
+                    <a:ext uri="{A12FA001-AC4F-418D-AE19-62706E023703}">
+                      <ahyp:hlinkClr xmlns:ahyp="http://schemas.microsoft.com/office/drawing/2018/hyperlinkcolor" val="tx"/>
+                    </a:ext>
+                  </a:extLst>
+                </a:hlinkClick>
+              </a:rPr>
+              <a:t>Descriptive Statistics</a:t>
+            </a:r>
+            <a:endParaRPr lang="en-US" altLang="ko-KR" sz="2000" dirty="0">
+              <a:latin typeface="한컴 말랑말랑 Bold" panose="020F0803000000000000" pitchFamily="50" charset="-127"/>
+              <a:ea typeface="한컴 말랑말랑 Bold" panose="020F0803000000000000" pitchFamily="50" charset="-127"/>
+            </a:endParaRPr>
+          </a:p>
+          <a:p>
+            <a:pPr marL="285750" indent="-285750">
+              <a:lnSpc>
+                <a:spcPct val="150000"/>
+              </a:lnSpc>
+              <a:buFont typeface="Wingdings" panose="05000000000000000000" pitchFamily="2" charset="2"/>
+              <a:buChar char="v"/>
+            </a:pPr>
+            <a:r>
+              <a:rPr lang="en-US" altLang="ko-KR" sz="2000" dirty="0">
+                <a:latin typeface="한컴 말랑말랑 Bold" panose="020F0803000000000000" pitchFamily="50" charset="-127"/>
+                <a:ea typeface="한컴 말랑말랑 Bold" panose="020F0803000000000000" pitchFamily="50" charset="-127"/>
+                <a:hlinkClick r:id="rId4">
+                  <a:extLst>
+                    <a:ext uri="{A12FA001-AC4F-418D-AE19-62706E023703}">
+                      <ahyp:hlinkClr xmlns:ahyp="http://schemas.microsoft.com/office/drawing/2018/hyperlinkcolor" val="tx"/>
+                    </a:ext>
+                  </a:extLst>
+                </a:hlinkClick>
+              </a:rPr>
+              <a:t>Central Limits </a:t>
+            </a:r>
+            <a:r>
+              <a:rPr lang="en-US" altLang="ko-KR" sz="2000" dirty="0" err="1">
+                <a:latin typeface="한컴 말랑말랑 Bold" panose="020F0803000000000000" pitchFamily="50" charset="-127"/>
+                <a:ea typeface="한컴 말랑말랑 Bold" panose="020F0803000000000000" pitchFamily="50" charset="-127"/>
+                <a:hlinkClick r:id="rId4">
+                  <a:extLst>
+                    <a:ext uri="{A12FA001-AC4F-418D-AE19-62706E023703}">
+                      <ahyp:hlinkClr xmlns:ahyp="http://schemas.microsoft.com/office/drawing/2018/hyperlinkcolor" val="tx"/>
+                    </a:ext>
+                  </a:extLst>
+                </a:hlinkClick>
+              </a:rPr>
+              <a:t>Theorm</a:t>
+            </a:r>
+            <a:endParaRPr lang="ko-KR" altLang="en-US" sz="2000" dirty="0">
+              <a:latin typeface="한컴 말랑말랑 Bold" panose="020F0803000000000000" pitchFamily="50" charset="-127"/>
+              <a:ea typeface="한컴 말랑말랑 Bold" panose="020F0803000000000000" pitchFamily="50" charset="-127"/>
+            </a:endParaRPr>
+          </a:p>
+        </p:txBody>
+      </p:sp>
+    </p:spTree>
+    <p:extLst>
+      <p:ext uri="{BB962C8B-B14F-4D97-AF65-F5344CB8AC3E}">
+        <p14:creationId xmlns:p14="http://schemas.microsoft.com/office/powerpoint/2010/main" val="1767940289"/>
+      </p:ext>
+    </p:extLst>
+  </p:cSld>
+  <p:clrMapOvr>
+    <a:masterClrMapping/>
+  </p:clrMapOvr>
+  <mc:AlternateContent xmlns:mc="http://schemas.openxmlformats.org/markup-compatibility/2006" xmlns:p14="http://schemas.microsoft.com/office/powerpoint/2010/main">
+    <mc:Choice Requires="p14">
+      <p:transition spd="med" p14:dur="700">
+        <p:fade/>
+      </p:transition>
+    </mc:Choice>
+    <mc:Fallback xmlns="">
+      <p:transition spd="med">
+        <p:fade/>
+      </p:transition>
+    </mc:Fallback>
+  </mc:AlternateContent>
+</p:sld>
+</file>
+
+<file path=ppt/slides/slide5.xml><?xml version="1.0" encoding="utf-8"?>
+<p:sld xmlns:a="http://schemas.openxmlformats.org/drawingml/2006/main" xmlns:r="http://schemas.openxmlformats.org/officeDocument/2006/relationships" xmlns:p="http://schemas.openxmlformats.org/presentationml/2006/main">
+  <p:cSld>
+    <p:spTree>
+      <p:nvGrpSpPr>
+        <p:cNvPr id="1" name="">
+          <a:extLst>
+            <a:ext uri="{FF2B5EF4-FFF2-40B4-BE49-F238E27FC236}">
+              <a16:creationId xmlns:a16="http://schemas.microsoft.com/office/drawing/2014/main" id="{17FDC220-2BC9-E0B4-4F0D-65A82F8E117D}"/>
+            </a:ext>
+          </a:extLst>
+        </p:cNvPr>
+        <p:cNvGrpSpPr/>
+        <p:nvPr/>
+      </p:nvGrpSpPr>
+      <p:grpSpPr>
+        <a:xfrm>
+          <a:off x="0" y="0"/>
+          <a:ext cx="0" cy="0"/>
+          <a:chOff x="0" y="0"/>
+          <a:chExt cx="0" cy="0"/>
+        </a:xfrm>
+      </p:grpSpPr>
+      <p:sp>
+        <p:nvSpPr>
+          <p:cNvPr id="3" name="직사각형 2">
+            <a:extLst>
+              <a:ext uri="{FF2B5EF4-FFF2-40B4-BE49-F238E27FC236}">
+                <a16:creationId xmlns:a16="http://schemas.microsoft.com/office/drawing/2014/main" id="{506C883A-54AF-1C45-4FB5-6B98B3C61DE4}"/>
+              </a:ext>
+            </a:extLst>
+          </p:cNvPr>
+          <p:cNvSpPr/>
+          <p:nvPr/>
+        </p:nvSpPr>
+        <p:spPr>
+          <a:xfrm>
+            <a:off x="592167" y="2511348"/>
+            <a:ext cx="8136904" cy="674850"/>
+          </a:xfrm>
+          <a:prstGeom prst="rect">
+            <a:avLst/>
+          </a:prstGeom>
+          <a:solidFill>
+            <a:schemeClr val="bg1">
+              <a:lumMod val="85000"/>
+            </a:schemeClr>
+          </a:solidFill>
+          <a:ln>
+            <a:noFill/>
+          </a:ln>
+        </p:spPr>
+        <p:style>
+          <a:lnRef idx="2">
+            <a:schemeClr val="accent1">
+              <a:shade val="15000"/>
+            </a:schemeClr>
+          </a:lnRef>
+          <a:fillRef idx="1">
+            <a:schemeClr val="accent1"/>
+          </a:fillRef>
+          <a:effectRef idx="0">
+            <a:schemeClr val="accent1"/>
+          </a:effectRef>
+          <a:fontRef idx="minor">
+            <a:schemeClr val="lt1"/>
+          </a:fontRef>
+        </p:style>
+        <p:txBody>
+          <a:bodyPr rtlCol="0" anchor="ctr"/>
+          <a:lstStyle/>
+          <a:p>
+            <a:pPr algn="ctr"/>
+            <a:endParaRPr lang="ko-KR" altLang="en-US" dirty="0"/>
+          </a:p>
+        </p:txBody>
+      </p:sp>
+      <p:sp>
+        <p:nvSpPr>
+          <p:cNvPr id="8" name="슬라이드 번호 개체 틀 7">
+            <a:extLst>
+              <a:ext uri="{FF2B5EF4-FFF2-40B4-BE49-F238E27FC236}">
+                <a16:creationId xmlns:a16="http://schemas.microsoft.com/office/drawing/2014/main" id="{665B77EB-579B-8BE0-E878-8DEE5CAED0FD}"/>
+              </a:ext>
+            </a:extLst>
+          </p:cNvPr>
+          <p:cNvSpPr>
+            <a:spLocks noGrp="1"/>
+          </p:cNvSpPr>
+          <p:nvPr>
+            <p:ph type="sldNum" sz="quarter" idx="12"/>
+          </p:nvPr>
+        </p:nvSpPr>
+        <p:spPr/>
+        <p:txBody>
+          <a:bodyPr/>
+          <a:lstStyle/>
+          <a:p>
+            <a:pPr rtl="0"/>
+            <a:fld id="{A3F31473-23EB-4724-8B59-FE6D21D89FA4}" type="slidenum">
+              <a:rPr lang="en-US" altLang="ko-KR" noProof="0" smtClean="0"/>
+              <a:t>5</a:t>
+            </a:fld>
+            <a:endParaRPr lang="en-US" altLang="ko-KR" noProof="0" dirty="0"/>
+          </a:p>
+        </p:txBody>
+      </p:sp>
+      <p:sp>
+        <p:nvSpPr>
+          <p:cNvPr id="2" name="TextBox 1">
+            <a:extLst>
+              <a:ext uri="{FF2B5EF4-FFF2-40B4-BE49-F238E27FC236}">
+                <a16:creationId xmlns:a16="http://schemas.microsoft.com/office/drawing/2014/main" id="{E72414E8-8369-1246-31F2-E793ADDB38FB}"/>
+              </a:ext>
+            </a:extLst>
+          </p:cNvPr>
+          <p:cNvSpPr txBox="1"/>
+          <p:nvPr/>
+        </p:nvSpPr>
+        <p:spPr>
+          <a:xfrm>
+            <a:off x="1629916" y="620688"/>
+            <a:ext cx="8928992" cy="5131020"/>
+          </a:xfrm>
+          <a:prstGeom prst="rect">
+            <a:avLst/>
+          </a:prstGeom>
+          <a:noFill/>
+        </p:spPr>
+        <p:txBody>
+          <a:bodyPr wrap="square" rtlCol="0">
+            <a:spAutoFit/>
+          </a:bodyPr>
+          <a:lstStyle/>
+          <a:p>
+            <a:pPr>
+              <a:lnSpc>
+                <a:spcPct val="200000"/>
+              </a:lnSpc>
+            </a:pPr>
+            <a:r>
+              <a:rPr lang="ko-KR" altLang="en-US" sz="4000" b="1" dirty="0">
+                <a:latin typeface="한컴 말랑말랑 Bold" panose="020F0803000000000000" pitchFamily="50" charset="-127"/>
+                <a:ea typeface="한컴 말랑말랑 Bold" panose="020F0803000000000000" pitchFamily="50" charset="-127"/>
+              </a:rPr>
+              <a:t>목차</a:t>
+            </a:r>
+            <a:endParaRPr lang="en-US" altLang="ko-KR" sz="4000" b="1" dirty="0">
+              <a:latin typeface="한컴 말랑말랑 Bold" panose="020F0803000000000000" pitchFamily="50" charset="-127"/>
+              <a:ea typeface="한컴 말랑말랑 Bold" panose="020F0803000000000000" pitchFamily="50" charset="-127"/>
+            </a:endParaRPr>
+          </a:p>
+          <a:p>
+            <a:pPr marL="514350" indent="-514350">
+              <a:lnSpc>
+                <a:spcPct val="200000"/>
+              </a:lnSpc>
+              <a:buAutoNum type="arabicPeriod"/>
+            </a:pPr>
+            <a:r>
+              <a:rPr lang="ko-KR" altLang="en-US" sz="2000" b="1" dirty="0">
+                <a:latin typeface="한컴 말랑말랑 Bold" panose="020F0803000000000000" pitchFamily="50" charset="-127"/>
+                <a:ea typeface="한컴 말랑말랑 Bold" panose="020F0803000000000000" pitchFamily="50" charset="-127"/>
+              </a:rPr>
+              <a:t>통계학</a:t>
+            </a:r>
+            <a:r>
+              <a:rPr lang="en-US" altLang="ko-KR" sz="2000" b="1" dirty="0">
+                <a:latin typeface="한컴 말랑말랑 Bold" panose="020F0803000000000000" pitchFamily="50" charset="-127"/>
+                <a:ea typeface="한컴 말랑말랑 Bold" panose="020F0803000000000000" pitchFamily="50" charset="-127"/>
+              </a:rPr>
+              <a:t>(Statistics)</a:t>
+            </a:r>
+          </a:p>
+          <a:p>
+            <a:pPr marL="514350" indent="-514350">
+              <a:lnSpc>
+                <a:spcPct val="200000"/>
+              </a:lnSpc>
+              <a:buAutoNum type="arabicPeriod"/>
+            </a:pPr>
+            <a:r>
+              <a:rPr lang="ko-KR" altLang="en-US" sz="2000" b="1" dirty="0">
+                <a:latin typeface="한컴 말랑말랑 Bold" panose="020F0803000000000000" pitchFamily="50" charset="-127"/>
+                <a:ea typeface="한컴 말랑말랑 Bold" panose="020F0803000000000000" pitchFamily="50" charset="-127"/>
+              </a:rPr>
+              <a:t>모집단과</a:t>
+            </a:r>
+            <a:r>
+              <a:rPr lang="en-US" altLang="ko-KR" sz="2000" b="1" dirty="0">
+                <a:latin typeface="한컴 말랑말랑 Bold" panose="020F0803000000000000" pitchFamily="50" charset="-127"/>
+                <a:ea typeface="한컴 말랑말랑 Bold" panose="020F0803000000000000" pitchFamily="50" charset="-127"/>
+              </a:rPr>
+              <a:t> </a:t>
+            </a:r>
+            <a:r>
+              <a:rPr lang="ko-KR" altLang="en-US" sz="2000" b="1" dirty="0">
+                <a:latin typeface="한컴 말랑말랑 Bold" panose="020F0803000000000000" pitchFamily="50" charset="-127"/>
+                <a:ea typeface="한컴 말랑말랑 Bold" panose="020F0803000000000000" pitchFamily="50" charset="-127"/>
+              </a:rPr>
+              <a:t>표본조사 방법</a:t>
+            </a:r>
+            <a:endParaRPr lang="en-US" altLang="ko-KR" sz="2000" b="1" dirty="0">
+              <a:latin typeface="한컴 말랑말랑 Bold" panose="020F0803000000000000" pitchFamily="50" charset="-127"/>
+              <a:ea typeface="한컴 말랑말랑 Bold" panose="020F0803000000000000" pitchFamily="50" charset="-127"/>
+            </a:endParaRPr>
+          </a:p>
+          <a:p>
+            <a:pPr marL="514350" indent="-514350">
+              <a:lnSpc>
+                <a:spcPct val="200000"/>
+              </a:lnSpc>
+              <a:buAutoNum type="arabicPeriod"/>
+            </a:pPr>
+            <a:r>
+              <a:rPr lang="ko-KR" altLang="en-US" sz="2000" b="1" dirty="0">
+                <a:latin typeface="한컴 말랑말랑 Bold" panose="020F0803000000000000" pitchFamily="50" charset="-127"/>
+                <a:ea typeface="한컴 말랑말랑 Bold" panose="020F0803000000000000" pitchFamily="50" charset="-127"/>
+              </a:rPr>
+              <a:t>데이터의 종류</a:t>
+            </a:r>
+            <a:r>
+              <a:rPr lang="en-US" altLang="ko-KR" sz="2000" b="1" dirty="0">
+                <a:latin typeface="한컴 말랑말랑 Bold" panose="020F0803000000000000" pitchFamily="50" charset="-127"/>
+                <a:ea typeface="한컴 말랑말랑 Bold" panose="020F0803000000000000" pitchFamily="50" charset="-127"/>
+              </a:rPr>
+              <a:t>(Data type)</a:t>
+            </a:r>
+          </a:p>
+          <a:p>
+            <a:pPr marL="514350" indent="-514350">
+              <a:lnSpc>
+                <a:spcPct val="200000"/>
+              </a:lnSpc>
+              <a:buAutoNum type="arabicPeriod"/>
+            </a:pPr>
+            <a:r>
+              <a:rPr lang="ko-KR" altLang="en-US" sz="2000" b="1" dirty="0">
+                <a:latin typeface="한컴 말랑말랑 Bold" panose="020F0803000000000000" pitchFamily="50" charset="-127"/>
+                <a:ea typeface="한컴 말랑말랑 Bold" panose="020F0803000000000000" pitchFamily="50" charset="-127"/>
+              </a:rPr>
+              <a:t>주요</a:t>
+            </a:r>
+            <a:r>
+              <a:rPr lang="en-US" altLang="ko-KR" sz="2000" b="1" dirty="0">
+                <a:latin typeface="한컴 말랑말랑 Bold" panose="020F0803000000000000" pitchFamily="50" charset="-127"/>
+                <a:ea typeface="한컴 말랑말랑 Bold" panose="020F0803000000000000" pitchFamily="50" charset="-127"/>
+              </a:rPr>
+              <a:t> </a:t>
+            </a:r>
+            <a:r>
+              <a:rPr lang="ko-KR" altLang="en-US" sz="2000" b="1" dirty="0">
+                <a:latin typeface="한컴 말랑말랑 Bold" panose="020F0803000000000000" pitchFamily="50" charset="-127"/>
+                <a:ea typeface="한컴 말랑말랑 Bold" panose="020F0803000000000000" pitchFamily="50" charset="-127"/>
+              </a:rPr>
+              <a:t>통계량</a:t>
+            </a:r>
+            <a:r>
+              <a:rPr lang="en-US" altLang="ko-KR" sz="2000" b="1" dirty="0">
+                <a:latin typeface="한컴 말랑말랑 Bold" panose="020F0803000000000000" pitchFamily="50" charset="-127"/>
+                <a:ea typeface="한컴 말랑말랑 Bold" panose="020F0803000000000000" pitchFamily="50" charset="-127"/>
+              </a:rPr>
+              <a:t>(Statistic)</a:t>
+            </a:r>
+          </a:p>
+          <a:p>
+            <a:pPr marL="514350" indent="-514350">
+              <a:lnSpc>
+                <a:spcPct val="200000"/>
+              </a:lnSpc>
+              <a:buAutoNum type="arabicPeriod"/>
+            </a:pPr>
+            <a:r>
+              <a:rPr lang="ko-KR" altLang="en-US" sz="2000" b="1" dirty="0" err="1">
+                <a:latin typeface="한컴 말랑말랑 Bold" panose="020F0803000000000000" pitchFamily="50" charset="-127"/>
+                <a:ea typeface="한컴 말랑말랑 Bold" panose="020F0803000000000000" pitchFamily="50" charset="-127"/>
+              </a:rPr>
+              <a:t>다변량</a:t>
+            </a:r>
+            <a:r>
+              <a:rPr lang="ko-KR" altLang="en-US" sz="2000" b="1" dirty="0">
+                <a:latin typeface="한컴 말랑말랑 Bold" panose="020F0803000000000000" pitchFamily="50" charset="-127"/>
+                <a:ea typeface="한컴 말랑말랑 Bold" panose="020F0803000000000000" pitchFamily="50" charset="-127"/>
+              </a:rPr>
+              <a:t> 분석</a:t>
+            </a:r>
+            <a:r>
+              <a:rPr lang="en-US" altLang="ko-KR" sz="2000" b="1" dirty="0">
+                <a:latin typeface="한컴 말랑말랑 Bold" panose="020F0803000000000000" pitchFamily="50" charset="-127"/>
+                <a:ea typeface="한컴 말랑말랑 Bold" panose="020F0803000000000000" pitchFamily="50" charset="-127"/>
+              </a:rPr>
+              <a:t>(Multivariate Analysis)</a:t>
+            </a:r>
+          </a:p>
+          <a:p>
+            <a:pPr>
+              <a:lnSpc>
+                <a:spcPct val="200000"/>
+              </a:lnSpc>
+            </a:pPr>
+            <a:endParaRPr lang="ko-KR" altLang="en-US" sz="2800" b="1" dirty="0">
+              <a:latin typeface="한컴 말랑말랑 Bold" panose="020F0803000000000000" pitchFamily="50" charset="-127"/>
+              <a:ea typeface="한컴 말랑말랑 Bold" panose="020F0803000000000000" pitchFamily="50" charset="-127"/>
+            </a:endParaRPr>
+          </a:p>
+        </p:txBody>
+      </p:sp>
+    </p:spTree>
+    <p:extLst>
+      <p:ext uri="{BB962C8B-B14F-4D97-AF65-F5344CB8AC3E}">
+        <p14:creationId xmlns:p14="http://schemas.microsoft.com/office/powerpoint/2010/main" val="3105865626"/>
+      </p:ext>
+    </p:extLst>
+  </p:cSld>
+  <p:clrMapOvr>
+    <a:masterClrMapping/>
+  </p:clrMapOvr>
+  <mc:AlternateContent xmlns:mc="http://schemas.openxmlformats.org/markup-compatibility/2006" xmlns:p14="http://schemas.microsoft.com/office/powerpoint/2010/main">
+    <mc:Choice Requires="p14">
+      <p:transition spd="med" p14:dur="700">
+        <p:fade/>
+      </p:transition>
+    </mc:Choice>
+    <mc:Fallback xmlns="">
+      <p:transition spd="med">
+        <p:fade/>
+      </p:transition>
+    </mc:Fallback>
+  </mc:AlternateContent>
+</p:sld>
+</file>
+
+<file path=ppt/slides/slide6.xml><?xml version="1.0" encoding="utf-8"?>
 <p:sld xmlns:a="http://schemas.openxmlformats.org/drawingml/2006/main" xmlns:r="http://schemas.openxmlformats.org/officeDocument/2006/relationships" xmlns:p="http://schemas.openxmlformats.org/presentationml/2006/main">
   <p:cSld>
     <p:spTree>
@@ -11457,6 +15267,30 @@
           <a:chExt cx="0" cy="0"/>
         </a:xfrm>
       </p:grpSpPr>
+      <p:pic>
+        <p:nvPicPr>
+          <p:cNvPr id="24" name="그림 23"/>
+          <p:cNvPicPr>
+            <a:picLocks noChangeAspect="1"/>
+          </p:cNvPicPr>
+          <p:nvPr/>
+        </p:nvPicPr>
+        <p:blipFill>
+          <a:blip r:embed="rId3"/>
+          <a:stretch>
+            <a:fillRect/>
+          </a:stretch>
+        </p:blipFill>
+        <p:spPr>
+          <a:xfrm>
+            <a:off x="1413892" y="908720"/>
+            <a:ext cx="8556891" cy="5104724"/>
+          </a:xfrm>
+          <a:prstGeom prst="rect">
+            <a:avLst/>
+          </a:prstGeom>
+        </p:spPr>
+      </p:pic>
       <p:sp>
         <p:nvSpPr>
           <p:cNvPr id="25" name="슬라이드 번호 개체 틀 24"/>
@@ -11475,7 +15309,73 @@
             <a:pPr rtl="0"/>
             <a:fld id="{A3F31473-23EB-4724-8B59-FE6D21D89FA4}" type="slidenum">
               <a:rPr lang="en-US" altLang="ko-KR" noProof="0" smtClean="0"/>
-              <a:t>4</a:t>
+              <a:t>6</a:t>
+            </a:fld>
+            <a:endParaRPr lang="en-US" altLang="ko-KR" noProof="0" dirty="0"/>
+          </a:p>
+        </p:txBody>
+      </p:sp>
+    </p:spTree>
+    <p:extLst>
+      <p:ext uri="{BB962C8B-B14F-4D97-AF65-F5344CB8AC3E}">
+        <p14:creationId xmlns:p14="http://schemas.microsoft.com/office/powerpoint/2010/main" val="51017038"/>
+      </p:ext>
+    </p:extLst>
+  </p:cSld>
+  <p:clrMapOvr>
+    <a:masterClrMapping/>
+  </p:clrMapOvr>
+  <mc:AlternateContent xmlns:mc="http://schemas.openxmlformats.org/markup-compatibility/2006" xmlns:p14="http://schemas.microsoft.com/office/powerpoint/2010/main">
+    <mc:Choice Requires="p14">
+      <p:transition spd="med" p14:dur="700">
+        <p:fade/>
+      </p:transition>
+    </mc:Choice>
+    <mc:Fallback xmlns="">
+      <p:transition spd="med">
+        <p:fade/>
+      </p:transition>
+    </mc:Fallback>
+  </mc:AlternateContent>
+</p:sld>
+</file>
+
+<file path=ppt/slides/slide7.xml><?xml version="1.0" encoding="utf-8"?>
+<p:sld xmlns:a="http://schemas.openxmlformats.org/drawingml/2006/main" xmlns:r="http://schemas.openxmlformats.org/officeDocument/2006/relationships" xmlns:p="http://schemas.openxmlformats.org/presentationml/2006/main">
+  <p:cSld>
+    <p:spTree>
+      <p:nvGrpSpPr>
+        <p:cNvPr id="1" name=""/>
+        <p:cNvGrpSpPr/>
+        <p:nvPr/>
+      </p:nvGrpSpPr>
+      <p:grpSpPr>
+        <a:xfrm>
+          <a:off x="0" y="0"/>
+          <a:ext cx="0" cy="0"/>
+          <a:chOff x="0" y="0"/>
+          <a:chExt cx="0" cy="0"/>
+        </a:xfrm>
+      </p:grpSpPr>
+      <p:sp>
+        <p:nvSpPr>
+          <p:cNvPr id="25" name="슬라이드 번호 개체 틀 24"/>
+          <p:cNvSpPr>
+            <a:spLocks noGrp="1"/>
+          </p:cNvSpPr>
+          <p:nvPr>
+            <p:ph type="sldNum" sz="quarter" idx="12"/>
+          </p:nvPr>
+        </p:nvSpPr>
+        <p:spPr/>
+        <p:txBody>
+          <a:bodyPr/>
+          <a:lstStyle/>
+          <a:p>
+            <a:pPr rtl="0"/>
+            <a:fld id="{A3F31473-23EB-4724-8B59-FE6D21D89FA4}" type="slidenum">
+              <a:rPr lang="en-US" altLang="ko-KR" noProof="0" smtClean="0"/>
+              <a:t>7</a:t>
             </a:fld>
             <a:endParaRPr lang="en-US" altLang="ko-KR" noProof="0" dirty="0"/>
           </a:p>
@@ -11804,7 +15704,7 @@
 </p:sld>
 </file>
 
-<file path=ppt/slides/slide5.xml><?xml version="1.0" encoding="utf-8"?>
+<file path=ppt/slides/slide8.xml><?xml version="1.0" encoding="utf-8"?>
 <p:sld xmlns:a="http://schemas.openxmlformats.org/drawingml/2006/main" xmlns:r="http://schemas.openxmlformats.org/officeDocument/2006/relationships" xmlns:p="http://schemas.openxmlformats.org/presentationml/2006/main">
   <p:cSld>
     <p:spTree>
@@ -11839,7 +15739,7 @@
             <a:pPr rtl="0"/>
             <a:fld id="{A3F31473-23EB-4724-8B59-FE6D21D89FA4}" type="slidenum">
               <a:rPr lang="en-US" altLang="ko-KR" noProof="0" smtClean="0"/>
-              <a:t>5</a:t>
+              <a:t>8</a:t>
             </a:fld>
             <a:endParaRPr lang="en-US" altLang="ko-KR" noProof="0" dirty="0"/>
           </a:p>
@@ -11894,7 +15794,7 @@
 </p:sld>
 </file>
 
-<file path=ppt/slides/slide6.xml><?xml version="1.0" encoding="utf-8"?>
+<file path=ppt/slides/slide9.xml><?xml version="1.0" encoding="utf-8"?>
 <p:sld xmlns:a="http://schemas.openxmlformats.org/drawingml/2006/main" xmlns:r="http://schemas.openxmlformats.org/officeDocument/2006/relationships" xmlns:p="http://schemas.openxmlformats.org/presentationml/2006/main">
   <p:cSld>
     <p:spTree>
@@ -11929,7 +15829,7 @@
             <a:pPr rtl="0"/>
             <a:fld id="{A3F31473-23EB-4724-8B59-FE6D21D89FA4}" type="slidenum">
               <a:rPr lang="en-US" altLang="ko-KR" noProof="0" smtClean="0"/>
-              <a:t>6</a:t>
+              <a:t>9</a:t>
             </a:fld>
             <a:endParaRPr lang="en-US" altLang="ko-KR" noProof="0" dirty="0"/>
           </a:p>
@@ -12033,687 +15933,6 @@
     <p:extLst>
       <p:ext uri="{BB962C8B-B14F-4D97-AF65-F5344CB8AC3E}">
         <p14:creationId xmlns:p14="http://schemas.microsoft.com/office/powerpoint/2010/main" val="2455660487"/>
-      </p:ext>
-    </p:extLst>
-  </p:cSld>
-  <p:clrMapOvr>
-    <a:masterClrMapping/>
-  </p:clrMapOvr>
-  <mc:AlternateContent xmlns:mc="http://schemas.openxmlformats.org/markup-compatibility/2006" xmlns:p14="http://schemas.microsoft.com/office/powerpoint/2010/main">
-    <mc:Choice Requires="p14">
-      <p:transition spd="med" p14:dur="700">
-        <p:fade/>
-      </p:transition>
-    </mc:Choice>
-    <mc:Fallback xmlns="">
-      <p:transition spd="med">
-        <p:fade/>
-      </p:transition>
-    </mc:Fallback>
-  </mc:AlternateContent>
-</p:sld>
-</file>
-
-<file path=ppt/slides/slide7.xml><?xml version="1.0" encoding="utf-8"?>
-<p:sld xmlns:a="http://schemas.openxmlformats.org/drawingml/2006/main" xmlns:r="http://schemas.openxmlformats.org/officeDocument/2006/relationships" xmlns:p="http://schemas.openxmlformats.org/presentationml/2006/main">
-  <p:cSld>
-    <p:spTree>
-      <p:nvGrpSpPr>
-        <p:cNvPr id="1" name=""/>
-        <p:cNvGrpSpPr/>
-        <p:nvPr/>
-      </p:nvGrpSpPr>
-      <p:grpSpPr>
-        <a:xfrm>
-          <a:off x="0" y="0"/>
-          <a:ext cx="0" cy="0"/>
-          <a:chOff x="0" y="0"/>
-          <a:chExt cx="0" cy="0"/>
-        </a:xfrm>
-      </p:grpSpPr>
-      <p:sp>
-        <p:nvSpPr>
-          <p:cNvPr id="2" name="슬라이드 번호 개체 틀 1"/>
-          <p:cNvSpPr>
-            <a:spLocks noGrp="1"/>
-          </p:cNvSpPr>
-          <p:nvPr>
-            <p:ph type="sldNum" sz="quarter" idx="12"/>
-          </p:nvPr>
-        </p:nvSpPr>
-        <p:spPr/>
-        <p:txBody>
-          <a:bodyPr/>
-          <a:lstStyle/>
-          <a:p>
-            <a:pPr rtl="0"/>
-            <a:fld id="{A3F31473-23EB-4724-8B59-FE6D21D89FA4}" type="slidenum">
-              <a:rPr lang="en-US" altLang="ko-KR" noProof="0" smtClean="0"/>
-              <a:t>7</a:t>
-            </a:fld>
-            <a:endParaRPr lang="en-US" altLang="ko-KR" noProof="0" dirty="0"/>
-          </a:p>
-        </p:txBody>
-      </p:sp>
-      <p:pic>
-        <p:nvPicPr>
-          <p:cNvPr id="3" name="그림 2"/>
-          <p:cNvPicPr>
-            <a:picLocks noChangeAspect="1"/>
-          </p:cNvPicPr>
-          <p:nvPr/>
-        </p:nvPicPr>
-        <p:blipFill>
-          <a:blip r:embed="rId3"/>
-          <a:stretch>
-            <a:fillRect/>
-          </a:stretch>
-        </p:blipFill>
-        <p:spPr>
-          <a:xfrm>
-            <a:off x="1053852" y="908720"/>
-            <a:ext cx="9046658" cy="3651317"/>
-          </a:xfrm>
-          <a:prstGeom prst="rect">
-            <a:avLst/>
-          </a:prstGeom>
-        </p:spPr>
-      </p:pic>
-    </p:spTree>
-    <p:extLst>
-      <p:ext uri="{BB962C8B-B14F-4D97-AF65-F5344CB8AC3E}">
-        <p14:creationId xmlns:p14="http://schemas.microsoft.com/office/powerpoint/2010/main" val="2766095449"/>
-      </p:ext>
-    </p:extLst>
-  </p:cSld>
-  <p:clrMapOvr>
-    <a:masterClrMapping/>
-  </p:clrMapOvr>
-  <mc:AlternateContent xmlns:mc="http://schemas.openxmlformats.org/markup-compatibility/2006" xmlns:p14="http://schemas.microsoft.com/office/powerpoint/2010/main">
-    <mc:Choice Requires="p14">
-      <p:transition spd="med" p14:dur="700">
-        <p:fade/>
-      </p:transition>
-    </mc:Choice>
-    <mc:Fallback xmlns="">
-      <p:transition spd="med">
-        <p:fade/>
-      </p:transition>
-    </mc:Fallback>
-  </mc:AlternateContent>
-</p:sld>
-</file>
-
-<file path=ppt/slides/slide8.xml><?xml version="1.0" encoding="utf-8"?>
-<p:sld xmlns:a="http://schemas.openxmlformats.org/drawingml/2006/main" xmlns:r="http://schemas.openxmlformats.org/officeDocument/2006/relationships" xmlns:p="http://schemas.openxmlformats.org/presentationml/2006/main">
-  <p:cSld>
-    <p:spTree>
-      <p:nvGrpSpPr>
-        <p:cNvPr id="1" name="">
-          <a:extLst>
-            <a:ext uri="{FF2B5EF4-FFF2-40B4-BE49-F238E27FC236}">
-              <a16:creationId xmlns:a16="http://schemas.microsoft.com/office/drawing/2014/main" id="{5938BFDF-043C-D416-8A82-CFA167E4C984}"/>
-            </a:ext>
-          </a:extLst>
-        </p:cNvPr>
-        <p:cNvGrpSpPr/>
-        <p:nvPr/>
-      </p:nvGrpSpPr>
-      <p:grpSpPr>
-        <a:xfrm>
-          <a:off x="0" y="0"/>
-          <a:ext cx="0" cy="0"/>
-          <a:chOff x="0" y="0"/>
-          <a:chExt cx="0" cy="0"/>
-        </a:xfrm>
-      </p:grpSpPr>
-      <p:sp>
-        <p:nvSpPr>
-          <p:cNvPr id="2" name="슬라이드 번호 개체 틀 1">
-            <a:extLst>
-              <a:ext uri="{FF2B5EF4-FFF2-40B4-BE49-F238E27FC236}">
-                <a16:creationId xmlns:a16="http://schemas.microsoft.com/office/drawing/2014/main" id="{3E44CB5B-45F9-105B-6990-2F9C08EBD0E9}"/>
-              </a:ext>
-            </a:extLst>
-          </p:cNvPr>
-          <p:cNvSpPr>
-            <a:spLocks noGrp="1"/>
-          </p:cNvSpPr>
-          <p:nvPr>
-            <p:ph type="sldNum" sz="quarter" idx="12"/>
-          </p:nvPr>
-        </p:nvSpPr>
-        <p:spPr/>
-        <p:txBody>
-          <a:bodyPr/>
-          <a:lstStyle/>
-          <a:p>
-            <a:pPr rtl="0"/>
-            <a:fld id="{A3F31473-23EB-4724-8B59-FE6D21D89FA4}" type="slidenum">
-              <a:rPr lang="en-US" altLang="ko-KR" noProof="0" smtClean="0"/>
-              <a:t>8</a:t>
-            </a:fld>
-            <a:endParaRPr lang="en-US" altLang="ko-KR" noProof="0" dirty="0"/>
-          </a:p>
-        </p:txBody>
-      </p:sp>
-      <p:sp>
-        <p:nvSpPr>
-          <p:cNvPr id="4" name="TextBox 3">
-            <a:extLst>
-              <a:ext uri="{FF2B5EF4-FFF2-40B4-BE49-F238E27FC236}">
-                <a16:creationId xmlns:a16="http://schemas.microsoft.com/office/drawing/2014/main" id="{BEA21184-37EF-AC7E-BD87-A4D8546D0FD6}"/>
-              </a:ext>
-            </a:extLst>
-          </p:cNvPr>
-          <p:cNvSpPr txBox="1"/>
-          <p:nvPr/>
-        </p:nvSpPr>
-        <p:spPr>
-          <a:xfrm>
-            <a:off x="765820" y="1196752"/>
-            <a:ext cx="11233248" cy="4933466"/>
-          </a:xfrm>
-          <a:prstGeom prst="rect">
-            <a:avLst/>
-          </a:prstGeom>
-          <a:solidFill>
-            <a:schemeClr val="tx1">
-              <a:lumMod val="20000"/>
-              <a:lumOff val="80000"/>
-            </a:schemeClr>
-          </a:solidFill>
-        </p:spPr>
-        <p:txBody>
-          <a:bodyPr wrap="square" rtlCol="0">
-            <a:spAutoFit/>
-          </a:bodyPr>
-          <a:lstStyle/>
-          <a:p>
-            <a:pPr marL="285750" indent="-285750">
-              <a:lnSpc>
-                <a:spcPct val="200000"/>
-              </a:lnSpc>
-              <a:buFont typeface="Wingdings" panose="05000000000000000000" pitchFamily="2" charset="2"/>
-              <a:buChar char="v"/>
-            </a:pPr>
-            <a:r>
-              <a:rPr lang="en-US" altLang="ko-KR" sz="2000" dirty="0">
-                <a:latin typeface="휴먼모음T" panose="02030504000101010101" pitchFamily="18" charset="-127"/>
-                <a:ea typeface="휴먼모음T" panose="02030504000101010101" pitchFamily="18" charset="-127"/>
-              </a:rPr>
-              <a:t>seaborn</a:t>
-            </a:r>
-            <a:r>
-              <a:rPr lang="ko-KR" altLang="en-US" sz="2000" dirty="0">
-                <a:latin typeface="휴먼모음T" panose="02030504000101010101" pitchFamily="18" charset="-127"/>
-                <a:ea typeface="휴먼모음T" panose="02030504000101010101" pitchFamily="18" charset="-127"/>
-              </a:rPr>
-              <a:t>의 </a:t>
-            </a:r>
-            <a:r>
-              <a:rPr lang="en-US" altLang="ko-KR" sz="2000" dirty="0">
-                <a:latin typeface="휴먼모음T" panose="02030504000101010101" pitchFamily="18" charset="-127"/>
-                <a:ea typeface="휴먼모음T" panose="02030504000101010101" pitchFamily="18" charset="-127"/>
-              </a:rPr>
-              <a:t>tips </a:t>
-            </a:r>
-            <a:r>
-              <a:rPr lang="ko-KR" altLang="en-US" sz="2000" dirty="0">
-                <a:latin typeface="휴먼모음T" panose="02030504000101010101" pitchFamily="18" charset="-127"/>
-                <a:ea typeface="휴먼모음T" panose="02030504000101010101" pitchFamily="18" charset="-127"/>
-              </a:rPr>
-              <a:t>를 모집단으로 가정하고 </a:t>
-            </a:r>
-            <a:r>
-              <a:rPr lang="en-US" altLang="ko-KR" sz="2000" dirty="0">
-                <a:latin typeface="휴먼모음T" panose="02030504000101010101" pitchFamily="18" charset="-127"/>
-                <a:ea typeface="휴먼모음T" panose="02030504000101010101" pitchFamily="18" charset="-127"/>
-              </a:rPr>
-              <a:t>tip </a:t>
-            </a:r>
-            <a:r>
-              <a:rPr lang="ko-KR" altLang="en-US" sz="2000" dirty="0">
-                <a:latin typeface="휴먼모음T" panose="02030504000101010101" pitchFamily="18" charset="-127"/>
-                <a:ea typeface="휴먼모음T" panose="02030504000101010101" pitchFamily="18" charset="-127"/>
-              </a:rPr>
-              <a:t>변수의 값</a:t>
-            </a:r>
-            <a:r>
-              <a:rPr lang="en-US" altLang="ko-KR" sz="2000" dirty="0">
-                <a:latin typeface="휴먼모음T" panose="02030504000101010101" pitchFamily="18" charset="-127"/>
-                <a:ea typeface="휴먼모음T" panose="02030504000101010101" pitchFamily="18" charset="-127"/>
-              </a:rPr>
-              <a:t>(</a:t>
-            </a:r>
-            <a:r>
-              <a:rPr lang="ko-KR" altLang="en-US" sz="2000" dirty="0">
-                <a:latin typeface="휴먼모음T" panose="02030504000101010101" pitchFamily="18" charset="-127"/>
-                <a:ea typeface="휴먼모음T" panose="02030504000101010101" pitchFamily="18" charset="-127"/>
-              </a:rPr>
-              <a:t>데이터</a:t>
-            </a:r>
-            <a:r>
-              <a:rPr lang="en-US" altLang="ko-KR" sz="2000" dirty="0">
-                <a:latin typeface="휴먼모음T" panose="02030504000101010101" pitchFamily="18" charset="-127"/>
-                <a:ea typeface="휴먼모음T" panose="02030504000101010101" pitchFamily="18" charset="-127"/>
-              </a:rPr>
-              <a:t>)</a:t>
-            </a:r>
-            <a:r>
-              <a:rPr lang="ko-KR" altLang="en-US" sz="2000" dirty="0">
-                <a:latin typeface="휴먼모음T" panose="02030504000101010101" pitchFamily="18" charset="-127"/>
-                <a:ea typeface="휴먼모음T" panose="02030504000101010101" pitchFamily="18" charset="-127"/>
-              </a:rPr>
-              <a:t> 분포</a:t>
-            </a:r>
-            <a:r>
-              <a:rPr lang="en-US" altLang="ko-KR" sz="2000" dirty="0">
-                <a:latin typeface="휴먼모음T" panose="02030504000101010101" pitchFamily="18" charset="-127"/>
-                <a:ea typeface="휴먼모음T" panose="02030504000101010101" pitchFamily="18" charset="-127"/>
-              </a:rPr>
-              <a:t>, </a:t>
-            </a:r>
-            <a:r>
-              <a:rPr lang="ko-KR" altLang="en-US" sz="2000" dirty="0">
-                <a:latin typeface="휴먼모음T" panose="02030504000101010101" pitchFamily="18" charset="-127"/>
-                <a:ea typeface="휴먼모음T" panose="02030504000101010101" pitchFamily="18" charset="-127"/>
-              </a:rPr>
-              <a:t>평균과 분산을 설명하라</a:t>
-            </a:r>
-            <a:endParaRPr lang="en-US" altLang="ko-KR" sz="2000" dirty="0">
-              <a:latin typeface="휴먼모음T" panose="02030504000101010101" pitchFamily="18" charset="-127"/>
-              <a:ea typeface="휴먼모음T" panose="02030504000101010101" pitchFamily="18" charset="-127"/>
-            </a:endParaRPr>
-          </a:p>
-          <a:p>
-            <a:pPr marL="285750" indent="-285750">
-              <a:lnSpc>
-                <a:spcPct val="200000"/>
-              </a:lnSpc>
-              <a:buFont typeface="Wingdings" panose="05000000000000000000" pitchFamily="2" charset="2"/>
-              <a:buChar char="v"/>
-            </a:pPr>
-            <a:endParaRPr lang="en-US" altLang="ko-KR" sz="2000" dirty="0">
-              <a:latin typeface="휴먼모음T" panose="02030504000101010101" pitchFamily="18" charset="-127"/>
-              <a:ea typeface="휴먼모음T" panose="02030504000101010101" pitchFamily="18" charset="-127"/>
-            </a:endParaRPr>
-          </a:p>
-          <a:p>
-            <a:pPr marL="285750" indent="-285750">
-              <a:lnSpc>
-                <a:spcPct val="200000"/>
-              </a:lnSpc>
-              <a:buFont typeface="Wingdings" panose="05000000000000000000" pitchFamily="2" charset="2"/>
-              <a:buChar char="v"/>
-            </a:pPr>
-            <a:endParaRPr lang="en-US" altLang="ko-KR" sz="2000" dirty="0">
-              <a:latin typeface="휴먼모음T" panose="02030504000101010101" pitchFamily="18" charset="-127"/>
-              <a:ea typeface="휴먼모음T" panose="02030504000101010101" pitchFamily="18" charset="-127"/>
-            </a:endParaRPr>
-          </a:p>
-          <a:p>
-            <a:pPr marL="285750" indent="-285750">
-              <a:lnSpc>
-                <a:spcPct val="200000"/>
-              </a:lnSpc>
-              <a:buFont typeface="Wingdings" panose="05000000000000000000" pitchFamily="2" charset="2"/>
-              <a:buChar char="v"/>
-            </a:pPr>
-            <a:r>
-              <a:rPr lang="ko-KR" altLang="en-US" sz="2000" dirty="0">
-                <a:latin typeface="휴먼모음T" panose="02030504000101010101" pitchFamily="18" charset="-127"/>
-                <a:ea typeface="휴먼모음T" panose="02030504000101010101" pitchFamily="18" charset="-127"/>
-              </a:rPr>
-              <a:t>평균의 함정</a:t>
-            </a:r>
-            <a:r>
-              <a:rPr lang="en-US" altLang="ko-KR" sz="2000" dirty="0">
-                <a:latin typeface="휴먼모음T" panose="02030504000101010101" pitchFamily="18" charset="-127"/>
-                <a:ea typeface="휴먼모음T" panose="02030504000101010101" pitchFamily="18" charset="-127"/>
-              </a:rPr>
-              <a:t>(the pitfall of mean)</a:t>
-            </a:r>
-          </a:p>
-          <a:p>
-            <a:pPr marL="285750" indent="-285750">
-              <a:lnSpc>
-                <a:spcPct val="200000"/>
-              </a:lnSpc>
-              <a:buFont typeface="Wingdings" panose="05000000000000000000" pitchFamily="2" charset="2"/>
-              <a:buChar char="v"/>
-            </a:pPr>
-            <a:r>
-              <a:rPr lang="en-US" altLang="ko-KR" sz="2000" dirty="0">
-                <a:latin typeface="휴먼모음T" panose="02030504000101010101" pitchFamily="18" charset="-127"/>
-                <a:ea typeface="휴먼모음T" panose="02030504000101010101" pitchFamily="18" charset="-127"/>
-              </a:rPr>
-              <a:t>seaborn</a:t>
-            </a:r>
-            <a:r>
-              <a:rPr lang="ko-KR" altLang="en-US" sz="2000" dirty="0">
-                <a:latin typeface="휴먼모음T" panose="02030504000101010101" pitchFamily="18" charset="-127"/>
-                <a:ea typeface="휴먼모음T" panose="02030504000101010101" pitchFamily="18" charset="-127"/>
-              </a:rPr>
-              <a:t>의 </a:t>
-            </a:r>
-            <a:r>
-              <a:rPr lang="en-US" altLang="ko-KR" sz="2000" dirty="0">
-                <a:latin typeface="휴먼모음T" panose="02030504000101010101" pitchFamily="18" charset="-127"/>
-                <a:ea typeface="휴먼모음T" panose="02030504000101010101" pitchFamily="18" charset="-127"/>
-              </a:rPr>
-              <a:t>tips </a:t>
-            </a:r>
-            <a:r>
-              <a:rPr lang="ko-KR" altLang="en-US" sz="2000" dirty="0">
-                <a:latin typeface="휴먼모음T" panose="02030504000101010101" pitchFamily="18" charset="-127"/>
-                <a:ea typeface="휴먼모음T" panose="02030504000101010101" pitchFamily="18" charset="-127"/>
-              </a:rPr>
-              <a:t>모집단에서 </a:t>
-            </a:r>
-            <a:r>
-              <a:rPr lang="en-US" altLang="ko-KR" sz="2000" dirty="0">
-                <a:latin typeface="휴먼모음T" panose="02030504000101010101" pitchFamily="18" charset="-127"/>
-                <a:ea typeface="휴먼모음T" panose="02030504000101010101" pitchFamily="18" charset="-127"/>
-              </a:rPr>
-              <a:t>3</a:t>
-            </a:r>
-            <a:r>
-              <a:rPr lang="ko-KR" altLang="en-US" sz="2000" dirty="0">
-                <a:latin typeface="휴먼모음T" panose="02030504000101010101" pitchFamily="18" charset="-127"/>
-                <a:ea typeface="휴먼모음T" panose="02030504000101010101" pitchFamily="18" charset="-127"/>
-              </a:rPr>
-              <a:t>가지 표본추출방법을 파이썬 코드로 제시하라</a:t>
-            </a:r>
-            <a:endParaRPr lang="en-US" altLang="ko-KR" sz="2000" dirty="0">
-              <a:latin typeface="휴먼모음T" panose="02030504000101010101" pitchFamily="18" charset="-127"/>
-              <a:ea typeface="휴먼모음T" panose="02030504000101010101" pitchFamily="18" charset="-127"/>
-            </a:endParaRPr>
-          </a:p>
-          <a:p>
-            <a:pPr marL="285750" indent="-285750">
-              <a:lnSpc>
-                <a:spcPct val="200000"/>
-              </a:lnSpc>
-              <a:buFont typeface="Wingdings" panose="05000000000000000000" pitchFamily="2" charset="2"/>
-              <a:buChar char="v"/>
-            </a:pPr>
-            <a:r>
-              <a:rPr lang="en-US" altLang="ko-KR" sz="2000" dirty="0">
-                <a:latin typeface="휴먼모음T" panose="02030504000101010101" pitchFamily="18" charset="-127"/>
-                <a:ea typeface="휴먼모음T" panose="02030504000101010101" pitchFamily="18" charset="-127"/>
-              </a:rPr>
-              <a:t>3</a:t>
-            </a:r>
-            <a:r>
-              <a:rPr lang="ko-KR" altLang="en-US" sz="2000" dirty="0">
-                <a:latin typeface="휴먼모음T" panose="02030504000101010101" pitchFamily="18" charset="-127"/>
-                <a:ea typeface="휴먼모음T" panose="02030504000101010101" pitchFamily="18" charset="-127"/>
-              </a:rPr>
-              <a:t>가지 표본과 모집단과의 평균과 분산을 비교한 후 어떤 표본추출방법이 가장 적합한지 토론하라</a:t>
-            </a:r>
-            <a:endParaRPr lang="en-US" altLang="ko-KR" sz="2000" dirty="0">
-              <a:latin typeface="휴먼모음T" panose="02030504000101010101" pitchFamily="18" charset="-127"/>
-              <a:ea typeface="휴먼모음T" panose="02030504000101010101" pitchFamily="18" charset="-127"/>
-            </a:endParaRPr>
-          </a:p>
-          <a:p>
-            <a:pPr marL="285750" indent="-285750">
-              <a:lnSpc>
-                <a:spcPct val="200000"/>
-              </a:lnSpc>
-              <a:buFont typeface="Wingdings" panose="05000000000000000000" pitchFamily="2" charset="2"/>
-              <a:buChar char="v"/>
-            </a:pPr>
-            <a:endParaRPr lang="en-US" altLang="ko-KR" sz="2000" dirty="0">
-              <a:latin typeface="휴먼모음T" panose="02030504000101010101" pitchFamily="18" charset="-127"/>
-              <a:ea typeface="휴먼모음T" panose="02030504000101010101" pitchFamily="18" charset="-127"/>
-            </a:endParaRPr>
-          </a:p>
-          <a:p>
-            <a:pPr marL="285750" indent="-285750">
-              <a:lnSpc>
-                <a:spcPct val="200000"/>
-              </a:lnSpc>
-              <a:buFont typeface="Wingdings" panose="05000000000000000000" pitchFamily="2" charset="2"/>
-              <a:buChar char="v"/>
-            </a:pPr>
-            <a:endParaRPr lang="ko-KR" altLang="en-US" sz="2000" dirty="0">
-              <a:latin typeface="휴먼모음T" panose="02030504000101010101" pitchFamily="18" charset="-127"/>
-              <a:ea typeface="휴먼모음T" panose="02030504000101010101" pitchFamily="18" charset="-127"/>
-            </a:endParaRPr>
-          </a:p>
-        </p:txBody>
-      </p:sp>
-      <p:pic>
-        <p:nvPicPr>
-          <p:cNvPr id="8" name="그림 7">
-            <a:extLst>
-              <a:ext uri="{FF2B5EF4-FFF2-40B4-BE49-F238E27FC236}">
-                <a16:creationId xmlns:a16="http://schemas.microsoft.com/office/drawing/2014/main" id="{6E396372-435D-01F1-308C-E5EFFE0434C8}"/>
-              </a:ext>
-            </a:extLst>
-          </p:cNvPr>
-          <p:cNvPicPr>
-            <a:picLocks noChangeAspect="1"/>
-          </p:cNvPicPr>
-          <p:nvPr/>
-        </p:nvPicPr>
-        <p:blipFill>
-          <a:blip r:embed="rId3"/>
-          <a:stretch>
-            <a:fillRect/>
-          </a:stretch>
-        </p:blipFill>
-        <p:spPr>
-          <a:xfrm>
-            <a:off x="1516394" y="1919399"/>
-            <a:ext cx="8640960" cy="1197437"/>
-          </a:xfrm>
-          <a:prstGeom prst="rect">
-            <a:avLst/>
-          </a:prstGeom>
-        </p:spPr>
-      </p:pic>
-      <p:sp>
-        <p:nvSpPr>
-          <p:cNvPr id="9" name="TextBox 8">
-            <a:extLst>
-              <a:ext uri="{FF2B5EF4-FFF2-40B4-BE49-F238E27FC236}">
-                <a16:creationId xmlns:a16="http://schemas.microsoft.com/office/drawing/2014/main" id="{B80152FC-1579-E1AE-98F9-EEC881A49A22}"/>
-              </a:ext>
-            </a:extLst>
-          </p:cNvPr>
-          <p:cNvSpPr txBox="1"/>
-          <p:nvPr/>
-        </p:nvSpPr>
-        <p:spPr>
-          <a:xfrm>
-            <a:off x="117748" y="260648"/>
-            <a:ext cx="2592288" cy="584775"/>
-          </a:xfrm>
-          <a:prstGeom prst="rect">
-            <a:avLst/>
-          </a:prstGeom>
-          <a:noFill/>
-        </p:spPr>
-        <p:txBody>
-          <a:bodyPr wrap="square" rtlCol="0">
-            <a:spAutoFit/>
-          </a:bodyPr>
-          <a:lstStyle/>
-          <a:p>
-            <a:r>
-              <a:rPr lang="ko-KR" altLang="en-US" sz="3200" b="1"/>
-              <a:t>문제 풀이</a:t>
-            </a:r>
-          </a:p>
-        </p:txBody>
-      </p:sp>
-    </p:spTree>
-    <p:extLst>
-      <p:ext uri="{BB962C8B-B14F-4D97-AF65-F5344CB8AC3E}">
-        <p14:creationId xmlns:p14="http://schemas.microsoft.com/office/powerpoint/2010/main" val="3954576201"/>
-      </p:ext>
-    </p:extLst>
-  </p:cSld>
-  <p:clrMapOvr>
-    <a:masterClrMapping/>
-  </p:clrMapOvr>
-  <mc:AlternateContent xmlns:mc="http://schemas.openxmlformats.org/markup-compatibility/2006" xmlns:p14="http://schemas.microsoft.com/office/powerpoint/2010/main">
-    <mc:Choice Requires="p14">
-      <p:transition spd="med" p14:dur="700">
-        <p:fade/>
-      </p:transition>
-    </mc:Choice>
-    <mc:Fallback xmlns="">
-      <p:transition spd="med">
-        <p:fade/>
-      </p:transition>
-    </mc:Fallback>
-  </mc:AlternateContent>
-</p:sld>
-</file>
-
-<file path=ppt/slides/slide9.xml><?xml version="1.0" encoding="utf-8"?>
-<p:sld xmlns:a="http://schemas.openxmlformats.org/drawingml/2006/main" xmlns:r="http://schemas.openxmlformats.org/officeDocument/2006/relationships" xmlns:p="http://schemas.openxmlformats.org/presentationml/2006/main">
-  <p:cSld>
-    <p:spTree>
-      <p:nvGrpSpPr>
-        <p:cNvPr id="1" name=""/>
-        <p:cNvGrpSpPr/>
-        <p:nvPr/>
-      </p:nvGrpSpPr>
-      <p:grpSpPr>
-        <a:xfrm>
-          <a:off x="0" y="0"/>
-          <a:ext cx="0" cy="0"/>
-          <a:chOff x="0" y="0"/>
-          <a:chExt cx="0" cy="0"/>
-        </a:xfrm>
-      </p:grpSpPr>
-      <p:sp>
-        <p:nvSpPr>
-          <p:cNvPr id="4" name="슬라이드 번호 개체 틀 3">
-            <a:extLst>
-              <a:ext uri="{FF2B5EF4-FFF2-40B4-BE49-F238E27FC236}">
-                <a16:creationId xmlns:a16="http://schemas.microsoft.com/office/drawing/2014/main" id="{76D1C135-780A-D855-FC3F-601039C32374}"/>
-              </a:ext>
-            </a:extLst>
-          </p:cNvPr>
-          <p:cNvSpPr>
-            <a:spLocks noGrp="1"/>
-          </p:cNvSpPr>
-          <p:nvPr>
-            <p:ph type="sldNum" sz="quarter" idx="12"/>
-          </p:nvPr>
-        </p:nvSpPr>
-        <p:spPr/>
-        <p:txBody>
-          <a:bodyPr/>
-          <a:lstStyle/>
-          <a:p>
-            <a:pPr rtl="0"/>
-            <a:fld id="{A3F31473-23EB-4724-8B59-FE6D21D89FA4}" type="slidenum">
-              <a:rPr lang="en-US" altLang="ko-KR" noProof="0" smtClean="0"/>
-              <a:t>9</a:t>
-            </a:fld>
-            <a:endParaRPr lang="en-US" altLang="ko-KR" noProof="0" dirty="0"/>
-          </a:p>
-        </p:txBody>
-      </p:sp>
-      <p:pic>
-        <p:nvPicPr>
-          <p:cNvPr id="1026" name="Picture 2">
-            <a:extLst>
-              <a:ext uri="{FF2B5EF4-FFF2-40B4-BE49-F238E27FC236}">
-                <a16:creationId xmlns:a16="http://schemas.microsoft.com/office/drawing/2014/main" id="{ECC395D1-45E4-42FD-D66D-18A4FFB3BF43}"/>
-              </a:ext>
-            </a:extLst>
-          </p:cNvPr>
-          <p:cNvPicPr>
-            <a:picLocks noChangeAspect="1" noChangeArrowheads="1"/>
-          </p:cNvPicPr>
-          <p:nvPr/>
-        </p:nvPicPr>
-        <p:blipFill>
-          <a:blip r:embed="rId2">
-            <a:extLst>
-              <a:ext uri="{28A0092B-C50C-407E-A947-70E740481C1C}">
-                <a14:useLocalDpi xmlns:a14="http://schemas.microsoft.com/office/drawing/2010/main" val="0"/>
-              </a:ext>
-            </a:extLst>
-          </a:blip>
-          <a:srcRect/>
-          <a:stretch>
-            <a:fillRect/>
-          </a:stretch>
-        </p:blipFill>
-        <p:spPr bwMode="auto">
-          <a:xfrm>
-            <a:off x="1269876" y="620688"/>
-            <a:ext cx="7956375" cy="5304250"/>
-          </a:xfrm>
-          <a:prstGeom prst="rect">
-            <a:avLst/>
-          </a:prstGeom>
-          <a:noFill/>
-          <a:extLst>
-            <a:ext uri="{909E8E84-426E-40DD-AFC4-6F175D3DCCD1}">
-              <a14:hiddenFill xmlns:a14="http://schemas.microsoft.com/office/drawing/2010/main">
-                <a:solidFill>
-                  <a:srgbClr val="FFFFFF"/>
-                </a:solidFill>
-              </a14:hiddenFill>
-            </a:ext>
-          </a:extLst>
-        </p:spPr>
-      </p:pic>
-      <p:sp>
-        <p:nvSpPr>
-          <p:cNvPr id="6" name="TextBox 5">
-            <a:extLst>
-              <a:ext uri="{FF2B5EF4-FFF2-40B4-BE49-F238E27FC236}">
-                <a16:creationId xmlns:a16="http://schemas.microsoft.com/office/drawing/2014/main" id="{8FB9F0C6-43A9-D111-BC6D-8E8DCE050C89}"/>
-              </a:ext>
-            </a:extLst>
-          </p:cNvPr>
-          <p:cNvSpPr txBox="1"/>
-          <p:nvPr/>
-        </p:nvSpPr>
-        <p:spPr>
-          <a:xfrm>
-            <a:off x="2762272" y="5987394"/>
-            <a:ext cx="6444207" cy="369332"/>
-          </a:xfrm>
-          <a:prstGeom prst="rect">
-            <a:avLst/>
-          </a:prstGeom>
-          <a:noFill/>
-        </p:spPr>
-        <p:txBody>
-          <a:bodyPr wrap="square">
-            <a:spAutoFit/>
-          </a:bodyPr>
-          <a:lstStyle/>
-          <a:p>
-            <a:r>
-              <a:rPr lang="ko-KR" altLang="en-US" dirty="0">
-                <a:hlinkClick r:id="rId3"/>
-              </a:rPr>
-              <a:t>https://www.mt.co.kr/opinion/2019/04/09/2019040811152977932</a:t>
-            </a:r>
-            <a:r>
-              <a:rPr lang="ko-KR" altLang="en-US" dirty="0"/>
-              <a:t> </a:t>
-            </a:r>
-          </a:p>
-        </p:txBody>
-      </p:sp>
-    </p:spTree>
-    <p:extLst>
-      <p:ext uri="{BB962C8B-B14F-4D97-AF65-F5344CB8AC3E}">
-        <p14:creationId xmlns:p14="http://schemas.microsoft.com/office/powerpoint/2010/main" val="1386063056"/>
       </p:ext>
     </p:extLst>
   </p:cSld>
@@ -13536,6 +16755,15 @@
 </file>
 
 <file path=customXml/item1.xml><?xml version="1.0" encoding="utf-8"?>
+<?mso-contentType ?>
+<FormTemplates xmlns="http://schemas.microsoft.com/sharepoint/v3/contenttype/forms">
+  <Display>DocumentLibraryForm</Display>
+  <Edit>DocumentLibraryForm</Edit>
+  <New>DocumentLibraryForm</New>
+</FormTemplates>
+</file>
+
+<file path=customXml/item2.xml><?xml version="1.0" encoding="utf-8"?>
 <ct:contentTypeSchema xmlns:ct="http://schemas.microsoft.com/office/2006/metadata/contentType" xmlns:ma="http://schemas.microsoft.com/office/2006/metadata/properties/metaAttributes" ct:_="" ma:_="" ma:contentTypeName="Document" ma:contentTypeID="0x010100AA3F7D94069FF64A86F7DFF56D60E3BE" ma:contentTypeVersion="6" ma:contentTypeDescription="Create a new document." ma:contentTypeScope="" ma:versionID="c32302c77d4085ecf495bdddb7f5e889">
   <xsd:schema xmlns:xsd="http://www.w3.org/2001/XMLSchema" xmlns:xs="http://www.w3.org/2001/XMLSchema" xmlns:p="http://schemas.microsoft.com/office/2006/metadata/properties" xmlns:ns2="a4f35948-e619-41b3-aa29-22878b09cfd2" xmlns:ns3="40262f94-9f35-4ac3-9a90-690165a166b7" targetNamespace="http://schemas.microsoft.com/office/2006/metadata/properties" ma:root="true" ma:fieldsID="4ab5ae46be95f9d0be6107e8200be7a2" ns2:_="" ns3:_="">
     <xsd:import namespace="a4f35948-e619-41b3-aa29-22878b09cfd2"/>
@@ -13716,15 +16944,6 @@
 </ct:contentTypeSchema>
 </file>
 
-<file path=customXml/item2.xml><?xml version="1.0" encoding="utf-8"?>
-<?mso-contentType ?>
-<FormTemplates xmlns="http://schemas.microsoft.com/sharepoint/v3/contenttype/forms">
-  <Display>DocumentLibraryForm</Display>
-  <Edit>DocumentLibraryForm</Edit>
-  <New>DocumentLibraryForm</New>
-</FormTemplates>
-</file>
-
 <file path=customXml/item3.xml><?xml version="1.0" encoding="utf-8"?>
 <p:properties xmlns:p="http://schemas.microsoft.com/office/2006/metadata/properties" xmlns:xsi="http://www.w3.org/2001/XMLSchema-instance" xmlns:pc="http://schemas.microsoft.com/office/infopath/2007/PartnerControls">
   <documentManagement>
@@ -13737,6 +16956,14 @@
 </file>
 
 <file path=customXml/itemProps1.xml><?xml version="1.0" encoding="utf-8"?>
+<ds:datastoreItem xmlns:ds="http://schemas.openxmlformats.org/officeDocument/2006/customXml" ds:itemID="{7F9B8BCC-BF24-4800-92E1-9F891BBB27E6}">
+  <ds:schemaRefs>
+    <ds:schemaRef ds:uri="http://schemas.microsoft.com/sharepoint/v3/contenttype/forms"/>
+  </ds:schemaRefs>
+</ds:datastoreItem>
+</file>
+
+<file path=customXml/itemProps2.xml><?xml version="1.0" encoding="utf-8"?>
 <ds:datastoreItem xmlns:ds="http://schemas.openxmlformats.org/officeDocument/2006/customXml" ds:itemID="{5CCB2C71-1ED8-4540-B003-293B5E75C71F}">
   <ds:schemaRefs>
     <ds:schemaRef ds:uri="http://schemas.microsoft.com/office/2006/metadata/contentType"/>
@@ -13751,14 +16978,6 @@
     <ds:schemaRef ds:uri="http://purl.org/dc/elements/1.1/"/>
     <ds:schemaRef ds:uri="http://purl.org/dc/terms/"/>
     <ds:schemaRef ds:uri="http://schemas.microsoft.com/internal/obd"/>
-  </ds:schemaRefs>
-</ds:datastoreItem>
-</file>
-
-<file path=customXml/itemProps2.xml><?xml version="1.0" encoding="utf-8"?>
-<ds:datastoreItem xmlns:ds="http://schemas.openxmlformats.org/officeDocument/2006/customXml" ds:itemID="{7F9B8BCC-BF24-4800-92E1-9F891BBB27E6}">
-  <ds:schemaRefs>
-    <ds:schemaRef ds:uri="http://schemas.microsoft.com/sharepoint/v3/contenttype/forms"/>
   </ds:schemaRefs>
 </ds:datastoreItem>
 </file>

--- a/1_statistics for machine learning.pptx
+++ b/1_statistics for machine learning.pptx
@@ -5,54 +5,55 @@
     <p:sldMasterId id="2147483648" r:id="rId4"/>
   </p:sldMasterIdLst>
   <p:notesMasterIdLst>
-    <p:notesMasterId r:id="rId47"/>
+    <p:notesMasterId r:id="rId48"/>
   </p:notesMasterIdLst>
   <p:handoutMasterIdLst>
-    <p:handoutMasterId r:id="rId48"/>
+    <p:handoutMasterId r:id="rId49"/>
   </p:handoutMasterIdLst>
   <p:sldIdLst>
     <p:sldId id="256" r:id="rId5"/>
-    <p:sldId id="270" r:id="rId6"/>
-    <p:sldId id="305" r:id="rId7"/>
-    <p:sldId id="304" r:id="rId8"/>
-    <p:sldId id="306" r:id="rId9"/>
-    <p:sldId id="271" r:id="rId10"/>
-    <p:sldId id="282" r:id="rId11"/>
-    <p:sldId id="279" r:id="rId12"/>
-    <p:sldId id="280" r:id="rId13"/>
-    <p:sldId id="281" r:id="rId14"/>
-    <p:sldId id="308" r:id="rId15"/>
-    <p:sldId id="307" r:id="rId16"/>
-    <p:sldId id="272" r:id="rId17"/>
-    <p:sldId id="309" r:id="rId18"/>
-    <p:sldId id="273" r:id="rId19"/>
-    <p:sldId id="274" r:id="rId20"/>
-    <p:sldId id="299" r:id="rId21"/>
-    <p:sldId id="300" r:id="rId22"/>
-    <p:sldId id="301" r:id="rId23"/>
-    <p:sldId id="276" r:id="rId24"/>
-    <p:sldId id="275" r:id="rId25"/>
-    <p:sldId id="277" r:id="rId26"/>
-    <p:sldId id="278" r:id="rId27"/>
-    <p:sldId id="283" r:id="rId28"/>
-    <p:sldId id="284" r:id="rId29"/>
-    <p:sldId id="285" r:id="rId30"/>
-    <p:sldId id="286" r:id="rId31"/>
-    <p:sldId id="302" r:id="rId32"/>
-    <p:sldId id="287" r:id="rId33"/>
-    <p:sldId id="288" r:id="rId34"/>
-    <p:sldId id="289" r:id="rId35"/>
-    <p:sldId id="290" r:id="rId36"/>
-    <p:sldId id="291" r:id="rId37"/>
-    <p:sldId id="292" r:id="rId38"/>
-    <p:sldId id="310" r:id="rId39"/>
-    <p:sldId id="293" r:id="rId40"/>
-    <p:sldId id="294" r:id="rId41"/>
-    <p:sldId id="295" r:id="rId42"/>
-    <p:sldId id="296" r:id="rId43"/>
-    <p:sldId id="297" r:id="rId44"/>
-    <p:sldId id="298" r:id="rId45"/>
-    <p:sldId id="303" r:id="rId46"/>
+    <p:sldId id="304" r:id="rId6"/>
+    <p:sldId id="270" r:id="rId7"/>
+    <p:sldId id="305" r:id="rId8"/>
+    <p:sldId id="311" r:id="rId9"/>
+    <p:sldId id="306" r:id="rId10"/>
+    <p:sldId id="271" r:id="rId11"/>
+    <p:sldId id="282" r:id="rId12"/>
+    <p:sldId id="279" r:id="rId13"/>
+    <p:sldId id="280" r:id="rId14"/>
+    <p:sldId id="281" r:id="rId15"/>
+    <p:sldId id="308" r:id="rId16"/>
+    <p:sldId id="307" r:id="rId17"/>
+    <p:sldId id="272" r:id="rId18"/>
+    <p:sldId id="309" r:id="rId19"/>
+    <p:sldId id="273" r:id="rId20"/>
+    <p:sldId id="274" r:id="rId21"/>
+    <p:sldId id="299" r:id="rId22"/>
+    <p:sldId id="300" r:id="rId23"/>
+    <p:sldId id="301" r:id="rId24"/>
+    <p:sldId id="276" r:id="rId25"/>
+    <p:sldId id="275" r:id="rId26"/>
+    <p:sldId id="277" r:id="rId27"/>
+    <p:sldId id="278" r:id="rId28"/>
+    <p:sldId id="283" r:id="rId29"/>
+    <p:sldId id="284" r:id="rId30"/>
+    <p:sldId id="285" r:id="rId31"/>
+    <p:sldId id="286" r:id="rId32"/>
+    <p:sldId id="302" r:id="rId33"/>
+    <p:sldId id="287" r:id="rId34"/>
+    <p:sldId id="288" r:id="rId35"/>
+    <p:sldId id="289" r:id="rId36"/>
+    <p:sldId id="290" r:id="rId37"/>
+    <p:sldId id="291" r:id="rId38"/>
+    <p:sldId id="292" r:id="rId39"/>
+    <p:sldId id="310" r:id="rId40"/>
+    <p:sldId id="293" r:id="rId41"/>
+    <p:sldId id="294" r:id="rId42"/>
+    <p:sldId id="295" r:id="rId43"/>
+    <p:sldId id="296" r:id="rId44"/>
+    <p:sldId id="297" r:id="rId45"/>
+    <p:sldId id="298" r:id="rId46"/>
+    <p:sldId id="303" r:id="rId47"/>
   </p:sldIdLst>
   <p:sldSz cx="12188825" cy="6858000"/>
   <p:notesSz cx="6858000" cy="9144000"/>
@@ -897,6 +898,91 @@
     </p:spTree>
     <p:extLst>
       <p:ext uri="{BB962C8B-B14F-4D97-AF65-F5344CB8AC3E}">
+        <p14:creationId xmlns:p14="http://schemas.microsoft.com/office/powerpoint/2010/main" val="2897626452"/>
+      </p:ext>
+    </p:extLst>
+  </p:cSld>
+  <p:clrMapOvr>
+    <a:masterClrMapping/>
+  </p:clrMapOvr>
+</p:notes>
+</file>
+
+<file path=ppt/notesSlides/notesSlide11.xml><?xml version="1.0" encoding="utf-8"?>
+<p:notes xmlns:a="http://schemas.openxmlformats.org/drawingml/2006/main" xmlns:r="http://schemas.openxmlformats.org/officeDocument/2006/relationships" xmlns:p="http://schemas.openxmlformats.org/presentationml/2006/main">
+  <p:cSld>
+    <p:spTree>
+      <p:nvGrpSpPr>
+        <p:cNvPr id="1" name=""/>
+        <p:cNvGrpSpPr/>
+        <p:nvPr/>
+      </p:nvGrpSpPr>
+      <p:grpSpPr>
+        <a:xfrm>
+          <a:off x="0" y="0"/>
+          <a:ext cx="0" cy="0"/>
+          <a:chOff x="0" y="0"/>
+          <a:chExt cx="0" cy="0"/>
+        </a:xfrm>
+      </p:grpSpPr>
+      <p:sp>
+        <p:nvSpPr>
+          <p:cNvPr id="2" name="슬라이드 이미지 개체 틀 1"/>
+          <p:cNvSpPr>
+            <a:spLocks noGrp="1" noRot="1" noChangeAspect="1"/>
+          </p:cNvSpPr>
+          <p:nvPr>
+            <p:ph type="sldImg"/>
+          </p:nvPr>
+        </p:nvSpPr>
+        <p:spPr/>
+      </p:sp>
+      <p:sp>
+        <p:nvSpPr>
+          <p:cNvPr id="3" name="슬라이드 노트 개체 틀 2"/>
+          <p:cNvSpPr>
+            <a:spLocks noGrp="1"/>
+          </p:cNvSpPr>
+          <p:nvPr>
+            <p:ph type="body" idx="1"/>
+          </p:nvPr>
+        </p:nvSpPr>
+        <p:spPr/>
+        <p:txBody>
+          <a:bodyPr/>
+          <a:lstStyle/>
+          <a:p>
+            <a:endParaRPr lang="ko-KR" altLang="en-US" dirty="0"/>
+          </a:p>
+        </p:txBody>
+      </p:sp>
+      <p:sp>
+        <p:nvSpPr>
+          <p:cNvPr id="4" name="슬라이드 번호 개체 틀 3"/>
+          <p:cNvSpPr>
+            <a:spLocks noGrp="1"/>
+          </p:cNvSpPr>
+          <p:nvPr>
+            <p:ph type="sldNum" sz="quarter" idx="10"/>
+          </p:nvPr>
+        </p:nvSpPr>
+        <p:spPr/>
+        <p:txBody>
+          <a:bodyPr/>
+          <a:lstStyle/>
+          <a:p>
+            <a:pPr rtl="0"/>
+            <a:fld id="{5FB91549-43BF-425A-AF25-75262019208C}" type="slidenum">
+              <a:rPr lang="en-US" altLang="ko-KR" smtClean="0"/>
+              <a:t>11</a:t>
+            </a:fld>
+            <a:endParaRPr lang="ko-KR" altLang="en-US" dirty="0"/>
+          </a:p>
+        </p:txBody>
+      </p:sp>
+    </p:spTree>
+    <p:extLst>
+      <p:ext uri="{BB962C8B-B14F-4D97-AF65-F5344CB8AC3E}">
         <p14:creationId xmlns:p14="http://schemas.microsoft.com/office/powerpoint/2010/main" val="1885669057"/>
       </p:ext>
     </p:extLst>
@@ -907,7 +993,7 @@
 </p:notes>
 </file>
 
-<file path=ppt/notesSlides/notesSlide11.xml><?xml version="1.0" encoding="utf-8"?>
+<file path=ppt/notesSlides/notesSlide12.xml><?xml version="1.0" encoding="utf-8"?>
 <p:notes xmlns:a="http://schemas.openxmlformats.org/drawingml/2006/main" xmlns:r="http://schemas.openxmlformats.org/officeDocument/2006/relationships" xmlns:p="http://schemas.openxmlformats.org/presentationml/2006/main">
   <p:cSld>
     <p:spTree>
@@ -997,7 +1083,7 @@
             <a:pPr rtl="0"/>
             <a:fld id="{5FB91549-43BF-425A-AF25-75262019208C}" type="slidenum">
               <a:rPr lang="en-US" altLang="ko-KR" smtClean="0"/>
-              <a:t>11</a:t>
+              <a:t>12</a:t>
             </a:fld>
             <a:endParaRPr lang="ko-KR" altLang="en-US" dirty="0"/>
           </a:p>
@@ -1016,7 +1102,7 @@
 </p:notes>
 </file>
 
-<file path=ppt/notesSlides/notesSlide12.xml><?xml version="1.0" encoding="utf-8"?>
+<file path=ppt/notesSlides/notesSlide13.xml><?xml version="1.0" encoding="utf-8"?>
 <p:notes xmlns:a="http://schemas.openxmlformats.org/drawingml/2006/main" xmlns:r="http://schemas.openxmlformats.org/officeDocument/2006/relationships" xmlns:p="http://schemas.openxmlformats.org/presentationml/2006/main">
   <p:cSld>
     <p:spTree>
@@ -1106,7 +1192,7 @@
             <a:pPr rtl="0"/>
             <a:fld id="{5FB91549-43BF-425A-AF25-75262019208C}" type="slidenum">
               <a:rPr lang="en-US" altLang="ko-KR" smtClean="0"/>
-              <a:t>12</a:t>
+              <a:t>13</a:t>
             </a:fld>
             <a:endParaRPr lang="ko-KR" altLang="en-US" dirty="0"/>
           </a:p>
@@ -1125,7 +1211,7 @@
 </p:notes>
 </file>
 
-<file path=ppt/notesSlides/notesSlide13.xml><?xml version="1.0" encoding="utf-8"?>
+<file path=ppt/notesSlides/notesSlide14.xml><?xml version="1.0" encoding="utf-8"?>
 <p:notes xmlns:a="http://schemas.openxmlformats.org/drawingml/2006/main" xmlns:r="http://schemas.openxmlformats.org/officeDocument/2006/relationships" xmlns:p="http://schemas.openxmlformats.org/presentationml/2006/main">
   <p:cSld>
     <p:spTree>
@@ -1191,7 +1277,7 @@
             <a:pPr rtl="0"/>
             <a:fld id="{5FB91549-43BF-425A-AF25-75262019208C}" type="slidenum">
               <a:rPr lang="en-US" altLang="ko-KR" smtClean="0"/>
-              <a:t>13</a:t>
+              <a:t>14</a:t>
             </a:fld>
             <a:endParaRPr lang="ko-KR" altLang="en-US" dirty="0"/>
           </a:p>
@@ -1210,7 +1296,7 @@
 </p:notes>
 </file>
 
-<file path=ppt/notesSlides/notesSlide14.xml><?xml version="1.0" encoding="utf-8"?>
+<file path=ppt/notesSlides/notesSlide15.xml><?xml version="1.0" encoding="utf-8"?>
 <p:notes xmlns:a="http://schemas.openxmlformats.org/drawingml/2006/main" xmlns:r="http://schemas.openxmlformats.org/officeDocument/2006/relationships" xmlns:p="http://schemas.openxmlformats.org/presentationml/2006/main">
   <p:cSld>
     <p:spTree>
@@ -1300,7 +1386,7 @@
             <a:pPr rtl="0"/>
             <a:fld id="{5FB91549-43BF-425A-AF25-75262019208C}" type="slidenum">
               <a:rPr lang="en-US" altLang="ko-KR" smtClean="0"/>
-              <a:t>14</a:t>
+              <a:t>15</a:t>
             </a:fld>
             <a:endParaRPr lang="ko-KR" altLang="en-US" dirty="0"/>
           </a:p>
@@ -1310,91 +1396,6 @@
     <p:extLst>
       <p:ext uri="{BB962C8B-B14F-4D97-AF65-F5344CB8AC3E}">
         <p14:creationId xmlns:p14="http://schemas.microsoft.com/office/powerpoint/2010/main" val="3706159502"/>
-      </p:ext>
-    </p:extLst>
-  </p:cSld>
-  <p:clrMapOvr>
-    <a:masterClrMapping/>
-  </p:clrMapOvr>
-</p:notes>
-</file>
-
-<file path=ppt/notesSlides/notesSlide15.xml><?xml version="1.0" encoding="utf-8"?>
-<p:notes xmlns:a="http://schemas.openxmlformats.org/drawingml/2006/main" xmlns:r="http://schemas.openxmlformats.org/officeDocument/2006/relationships" xmlns:p="http://schemas.openxmlformats.org/presentationml/2006/main">
-  <p:cSld>
-    <p:spTree>
-      <p:nvGrpSpPr>
-        <p:cNvPr id="1" name=""/>
-        <p:cNvGrpSpPr/>
-        <p:nvPr/>
-      </p:nvGrpSpPr>
-      <p:grpSpPr>
-        <a:xfrm>
-          <a:off x="0" y="0"/>
-          <a:ext cx="0" cy="0"/>
-          <a:chOff x="0" y="0"/>
-          <a:chExt cx="0" cy="0"/>
-        </a:xfrm>
-      </p:grpSpPr>
-      <p:sp>
-        <p:nvSpPr>
-          <p:cNvPr id="2" name="슬라이드 이미지 개체 틀 1"/>
-          <p:cNvSpPr>
-            <a:spLocks noGrp="1" noRot="1" noChangeAspect="1"/>
-          </p:cNvSpPr>
-          <p:nvPr>
-            <p:ph type="sldImg"/>
-          </p:nvPr>
-        </p:nvSpPr>
-        <p:spPr/>
-      </p:sp>
-      <p:sp>
-        <p:nvSpPr>
-          <p:cNvPr id="3" name="슬라이드 노트 개체 틀 2"/>
-          <p:cNvSpPr>
-            <a:spLocks noGrp="1"/>
-          </p:cNvSpPr>
-          <p:nvPr>
-            <p:ph type="body" idx="1"/>
-          </p:nvPr>
-        </p:nvSpPr>
-        <p:spPr/>
-        <p:txBody>
-          <a:bodyPr/>
-          <a:lstStyle/>
-          <a:p>
-            <a:endParaRPr lang="ko-KR" altLang="en-US" dirty="0"/>
-          </a:p>
-        </p:txBody>
-      </p:sp>
-      <p:sp>
-        <p:nvSpPr>
-          <p:cNvPr id="4" name="슬라이드 번호 개체 틀 3"/>
-          <p:cNvSpPr>
-            <a:spLocks noGrp="1"/>
-          </p:cNvSpPr>
-          <p:nvPr>
-            <p:ph type="sldNum" sz="quarter" idx="10"/>
-          </p:nvPr>
-        </p:nvSpPr>
-        <p:spPr/>
-        <p:txBody>
-          <a:bodyPr/>
-          <a:lstStyle/>
-          <a:p>
-            <a:pPr rtl="0"/>
-            <a:fld id="{5FB91549-43BF-425A-AF25-75262019208C}" type="slidenum">
-              <a:rPr lang="en-US" altLang="ko-KR" smtClean="0"/>
-              <a:t>15</a:t>
-            </a:fld>
-            <a:endParaRPr lang="ko-KR" altLang="en-US" dirty="0"/>
-          </a:p>
-        </p:txBody>
-      </p:sp>
-    </p:spTree>
-    <p:extLst>
-      <p:ext uri="{BB962C8B-B14F-4D97-AF65-F5344CB8AC3E}">
-        <p14:creationId xmlns:p14="http://schemas.microsoft.com/office/powerpoint/2010/main" val="1060011471"/>
       </p:ext>
     </p:extLst>
   </p:cSld>
@@ -1479,6 +1480,91 @@
     </p:spTree>
     <p:extLst>
       <p:ext uri="{BB962C8B-B14F-4D97-AF65-F5344CB8AC3E}">
+        <p14:creationId xmlns:p14="http://schemas.microsoft.com/office/powerpoint/2010/main" val="1060011471"/>
+      </p:ext>
+    </p:extLst>
+  </p:cSld>
+  <p:clrMapOvr>
+    <a:masterClrMapping/>
+  </p:clrMapOvr>
+</p:notes>
+</file>
+
+<file path=ppt/notesSlides/notesSlide17.xml><?xml version="1.0" encoding="utf-8"?>
+<p:notes xmlns:a="http://schemas.openxmlformats.org/drawingml/2006/main" xmlns:r="http://schemas.openxmlformats.org/officeDocument/2006/relationships" xmlns:p="http://schemas.openxmlformats.org/presentationml/2006/main">
+  <p:cSld>
+    <p:spTree>
+      <p:nvGrpSpPr>
+        <p:cNvPr id="1" name=""/>
+        <p:cNvGrpSpPr/>
+        <p:nvPr/>
+      </p:nvGrpSpPr>
+      <p:grpSpPr>
+        <a:xfrm>
+          <a:off x="0" y="0"/>
+          <a:ext cx="0" cy="0"/>
+          <a:chOff x="0" y="0"/>
+          <a:chExt cx="0" cy="0"/>
+        </a:xfrm>
+      </p:grpSpPr>
+      <p:sp>
+        <p:nvSpPr>
+          <p:cNvPr id="2" name="슬라이드 이미지 개체 틀 1"/>
+          <p:cNvSpPr>
+            <a:spLocks noGrp="1" noRot="1" noChangeAspect="1"/>
+          </p:cNvSpPr>
+          <p:nvPr>
+            <p:ph type="sldImg"/>
+          </p:nvPr>
+        </p:nvSpPr>
+        <p:spPr/>
+      </p:sp>
+      <p:sp>
+        <p:nvSpPr>
+          <p:cNvPr id="3" name="슬라이드 노트 개체 틀 2"/>
+          <p:cNvSpPr>
+            <a:spLocks noGrp="1"/>
+          </p:cNvSpPr>
+          <p:nvPr>
+            <p:ph type="body" idx="1"/>
+          </p:nvPr>
+        </p:nvSpPr>
+        <p:spPr/>
+        <p:txBody>
+          <a:bodyPr/>
+          <a:lstStyle/>
+          <a:p>
+            <a:endParaRPr lang="ko-KR" altLang="en-US" dirty="0"/>
+          </a:p>
+        </p:txBody>
+      </p:sp>
+      <p:sp>
+        <p:nvSpPr>
+          <p:cNvPr id="4" name="슬라이드 번호 개체 틀 3"/>
+          <p:cNvSpPr>
+            <a:spLocks noGrp="1"/>
+          </p:cNvSpPr>
+          <p:nvPr>
+            <p:ph type="sldNum" sz="quarter" idx="10"/>
+          </p:nvPr>
+        </p:nvSpPr>
+        <p:spPr/>
+        <p:txBody>
+          <a:bodyPr/>
+          <a:lstStyle/>
+          <a:p>
+            <a:pPr rtl="0"/>
+            <a:fld id="{5FB91549-43BF-425A-AF25-75262019208C}" type="slidenum">
+              <a:rPr lang="en-US" altLang="ko-KR" smtClean="0"/>
+              <a:t>17</a:t>
+            </a:fld>
+            <a:endParaRPr lang="ko-KR" altLang="en-US" dirty="0"/>
+          </a:p>
+        </p:txBody>
+      </p:sp>
+    </p:spTree>
+    <p:extLst>
+      <p:ext uri="{BB962C8B-B14F-4D97-AF65-F5344CB8AC3E}">
         <p14:creationId xmlns:p14="http://schemas.microsoft.com/office/powerpoint/2010/main" val="4043882338"/>
       </p:ext>
     </p:extLst>
@@ -1489,7 +1575,7 @@
 </p:notes>
 </file>
 
-<file path=ppt/notesSlides/notesSlide17.xml><?xml version="1.0" encoding="utf-8"?>
+<file path=ppt/notesSlides/notesSlide18.xml><?xml version="1.0" encoding="utf-8"?>
 <p:notes xmlns:a="http://schemas.openxmlformats.org/drawingml/2006/main" xmlns:r="http://schemas.openxmlformats.org/officeDocument/2006/relationships" xmlns:p="http://schemas.openxmlformats.org/presentationml/2006/main">
   <p:cSld>
     <p:spTree>
@@ -1579,7 +1665,7 @@
             <a:pPr rtl="0"/>
             <a:fld id="{5FB91549-43BF-425A-AF25-75262019208C}" type="slidenum">
               <a:rPr lang="en-US" altLang="ko-KR" smtClean="0"/>
-              <a:t>17</a:t>
+              <a:t>18</a:t>
             </a:fld>
             <a:endParaRPr lang="ko-KR" altLang="en-US" dirty="0"/>
           </a:p>
@@ -1598,7 +1684,7 @@
 </p:notes>
 </file>
 
-<file path=ppt/notesSlides/notesSlide18.xml><?xml version="1.0" encoding="utf-8"?>
+<file path=ppt/notesSlides/notesSlide19.xml><?xml version="1.0" encoding="utf-8"?>
 <p:notes xmlns:a="http://schemas.openxmlformats.org/drawingml/2006/main" xmlns:r="http://schemas.openxmlformats.org/officeDocument/2006/relationships" xmlns:p="http://schemas.openxmlformats.org/presentationml/2006/main">
   <p:cSld>
     <p:spTree>
@@ -1688,7 +1774,7 @@
             <a:pPr rtl="0"/>
             <a:fld id="{5FB91549-43BF-425A-AF25-75262019208C}" type="slidenum">
               <a:rPr lang="en-US" altLang="ko-KR" smtClean="0"/>
-              <a:t>19</a:t>
+              <a:t>20</a:t>
             </a:fld>
             <a:endParaRPr lang="ko-KR" altLang="en-US" dirty="0"/>
           </a:p>
@@ -1698,91 +1784,6 @@
     <p:extLst>
       <p:ext uri="{BB962C8B-B14F-4D97-AF65-F5344CB8AC3E}">
         <p14:creationId xmlns:p14="http://schemas.microsoft.com/office/powerpoint/2010/main" val="1144858924"/>
-      </p:ext>
-    </p:extLst>
-  </p:cSld>
-  <p:clrMapOvr>
-    <a:masterClrMapping/>
-  </p:clrMapOvr>
-</p:notes>
-</file>
-
-<file path=ppt/notesSlides/notesSlide19.xml><?xml version="1.0" encoding="utf-8"?>
-<p:notes xmlns:a="http://schemas.openxmlformats.org/drawingml/2006/main" xmlns:r="http://schemas.openxmlformats.org/officeDocument/2006/relationships" xmlns:p="http://schemas.openxmlformats.org/presentationml/2006/main">
-  <p:cSld>
-    <p:spTree>
-      <p:nvGrpSpPr>
-        <p:cNvPr id="1" name=""/>
-        <p:cNvGrpSpPr/>
-        <p:nvPr/>
-      </p:nvGrpSpPr>
-      <p:grpSpPr>
-        <a:xfrm>
-          <a:off x="0" y="0"/>
-          <a:ext cx="0" cy="0"/>
-          <a:chOff x="0" y="0"/>
-          <a:chExt cx="0" cy="0"/>
-        </a:xfrm>
-      </p:grpSpPr>
-      <p:sp>
-        <p:nvSpPr>
-          <p:cNvPr id="2" name="슬라이드 이미지 개체 틀 1"/>
-          <p:cNvSpPr>
-            <a:spLocks noGrp="1" noRot="1" noChangeAspect="1"/>
-          </p:cNvSpPr>
-          <p:nvPr>
-            <p:ph type="sldImg"/>
-          </p:nvPr>
-        </p:nvSpPr>
-        <p:spPr/>
-      </p:sp>
-      <p:sp>
-        <p:nvSpPr>
-          <p:cNvPr id="3" name="슬라이드 노트 개체 틀 2"/>
-          <p:cNvSpPr>
-            <a:spLocks noGrp="1"/>
-          </p:cNvSpPr>
-          <p:nvPr>
-            <p:ph type="body" idx="1"/>
-          </p:nvPr>
-        </p:nvSpPr>
-        <p:spPr/>
-        <p:txBody>
-          <a:bodyPr/>
-          <a:lstStyle/>
-          <a:p>
-            <a:endParaRPr lang="ko-KR" altLang="en-US" dirty="0"/>
-          </a:p>
-        </p:txBody>
-      </p:sp>
-      <p:sp>
-        <p:nvSpPr>
-          <p:cNvPr id="4" name="슬라이드 번호 개체 틀 3"/>
-          <p:cNvSpPr>
-            <a:spLocks noGrp="1"/>
-          </p:cNvSpPr>
-          <p:nvPr>
-            <p:ph type="sldNum" sz="quarter" idx="10"/>
-          </p:nvPr>
-        </p:nvSpPr>
-        <p:spPr/>
-        <p:txBody>
-          <a:bodyPr/>
-          <a:lstStyle/>
-          <a:p>
-            <a:pPr rtl="0"/>
-            <a:fld id="{5FB91549-43BF-425A-AF25-75262019208C}" type="slidenum">
-              <a:rPr lang="en-US" altLang="ko-KR" smtClean="0"/>
-              <a:t>20</a:t>
-            </a:fld>
-            <a:endParaRPr lang="ko-KR" altLang="en-US" dirty="0"/>
-          </a:p>
-        </p:txBody>
-      </p:sp>
-    </p:spTree>
-    <p:extLst>
-      <p:ext uri="{BB962C8B-B14F-4D97-AF65-F5344CB8AC3E}">
-        <p14:creationId xmlns:p14="http://schemas.microsoft.com/office/powerpoint/2010/main" val="2662501191"/>
       </p:ext>
     </p:extLst>
   </p:cSld>
@@ -1797,7 +1798,13 @@
   <p:cSld>
     <p:spTree>
       <p:nvGrpSpPr>
-        <p:cNvPr id="1" name=""/>
+        <p:cNvPr id="1" name="">
+          <a:extLst>
+            <a:ext uri="{FF2B5EF4-FFF2-40B4-BE49-F238E27FC236}">
+              <a16:creationId xmlns:a16="http://schemas.microsoft.com/office/drawing/2014/main" id="{82D3B65B-4D46-A4B6-4A55-CF7F725D8967}"/>
+            </a:ext>
+          </a:extLst>
+        </p:cNvPr>
         <p:cNvGrpSpPr/>
         <p:nvPr/>
       </p:nvGrpSpPr>
@@ -1811,7 +1818,13 @@
       </p:grpSpPr>
       <p:sp>
         <p:nvSpPr>
-          <p:cNvPr id="2" name="슬라이드 이미지 개체 틀 1"/>
+          <p:cNvPr id="2" name="슬라이드 이미지 개체 틀 1">
+            <a:extLst>
+              <a:ext uri="{FF2B5EF4-FFF2-40B4-BE49-F238E27FC236}">
+                <a16:creationId xmlns:a16="http://schemas.microsoft.com/office/drawing/2014/main" id="{E2EC8E50-C409-8198-1011-7B049358C5D2}"/>
+              </a:ext>
+            </a:extLst>
+          </p:cNvPr>
           <p:cNvSpPr>
             <a:spLocks noGrp="1" noRot="1" noChangeAspect="1"/>
           </p:cNvSpPr>
@@ -1823,7 +1836,13 @@
       </p:sp>
       <p:sp>
         <p:nvSpPr>
-          <p:cNvPr id="3" name="슬라이드 노트 개체 틀 2"/>
+          <p:cNvPr id="3" name="슬라이드 노트 개체 틀 2">
+            <a:extLst>
+              <a:ext uri="{FF2B5EF4-FFF2-40B4-BE49-F238E27FC236}">
+                <a16:creationId xmlns:a16="http://schemas.microsoft.com/office/drawing/2014/main" id="{8EBC7159-0CFA-4FF6-3C88-1A3B88DBE009}"/>
+              </a:ext>
+            </a:extLst>
+          </p:cNvPr>
           <p:cNvSpPr>
             <a:spLocks noGrp="1"/>
           </p:cNvSpPr>
@@ -1842,7 +1861,13 @@
       </p:sp>
       <p:sp>
         <p:nvSpPr>
-          <p:cNvPr id="4" name="슬라이드 번호 개체 틀 3"/>
+          <p:cNvPr id="4" name="슬라이드 번호 개체 틀 3">
+            <a:extLst>
+              <a:ext uri="{FF2B5EF4-FFF2-40B4-BE49-F238E27FC236}">
+                <a16:creationId xmlns:a16="http://schemas.microsoft.com/office/drawing/2014/main" id="{38F161A9-E2C3-ED47-AF62-F9F227017675}"/>
+              </a:ext>
+            </a:extLst>
+          </p:cNvPr>
           <p:cNvSpPr>
             <a:spLocks noGrp="1"/>
           </p:cNvSpPr>
@@ -1867,7 +1892,7 @@
     </p:spTree>
     <p:extLst>
       <p:ext uri="{BB962C8B-B14F-4D97-AF65-F5344CB8AC3E}">
-        <p14:creationId xmlns:p14="http://schemas.microsoft.com/office/powerpoint/2010/main" val="1911418281"/>
+        <p14:creationId xmlns:p14="http://schemas.microsoft.com/office/powerpoint/2010/main" val="1167275013"/>
       </p:ext>
     </p:extLst>
   </p:cSld>
@@ -1952,7 +1977,7 @@
     </p:spTree>
     <p:extLst>
       <p:ext uri="{BB962C8B-B14F-4D97-AF65-F5344CB8AC3E}">
-        <p14:creationId xmlns:p14="http://schemas.microsoft.com/office/powerpoint/2010/main" val="3202627251"/>
+        <p14:creationId xmlns:p14="http://schemas.microsoft.com/office/powerpoint/2010/main" val="2662501191"/>
       </p:ext>
     </p:extLst>
   </p:cSld>
@@ -2037,7 +2062,7 @@
     </p:spTree>
     <p:extLst>
       <p:ext uri="{BB962C8B-B14F-4D97-AF65-F5344CB8AC3E}">
-        <p14:creationId xmlns:p14="http://schemas.microsoft.com/office/powerpoint/2010/main" val="3009003689"/>
+        <p14:creationId xmlns:p14="http://schemas.microsoft.com/office/powerpoint/2010/main" val="3202627251"/>
       </p:ext>
     </p:extLst>
   </p:cSld>
@@ -2122,7 +2147,7 @@
     </p:spTree>
     <p:extLst>
       <p:ext uri="{BB962C8B-B14F-4D97-AF65-F5344CB8AC3E}">
-        <p14:creationId xmlns:p14="http://schemas.microsoft.com/office/powerpoint/2010/main" val="1952608349"/>
+        <p14:creationId xmlns:p14="http://schemas.microsoft.com/office/powerpoint/2010/main" val="3009003689"/>
       </p:ext>
     </p:extLst>
   </p:cSld>
@@ -2207,7 +2232,7 @@
     </p:spTree>
     <p:extLst>
       <p:ext uri="{BB962C8B-B14F-4D97-AF65-F5344CB8AC3E}">
-        <p14:creationId xmlns:p14="http://schemas.microsoft.com/office/powerpoint/2010/main" val="3730326455"/>
+        <p14:creationId xmlns:p14="http://schemas.microsoft.com/office/powerpoint/2010/main" val="1952608349"/>
       </p:ext>
     </p:extLst>
   </p:cSld>
@@ -2292,7 +2317,7 @@
     </p:spTree>
     <p:extLst>
       <p:ext uri="{BB962C8B-B14F-4D97-AF65-F5344CB8AC3E}">
-        <p14:creationId xmlns:p14="http://schemas.microsoft.com/office/powerpoint/2010/main" val="1068008489"/>
+        <p14:creationId xmlns:p14="http://schemas.microsoft.com/office/powerpoint/2010/main" val="3730326455"/>
       </p:ext>
     </p:extLst>
   </p:cSld>
@@ -2377,7 +2402,7 @@
     </p:spTree>
     <p:extLst>
       <p:ext uri="{BB962C8B-B14F-4D97-AF65-F5344CB8AC3E}">
-        <p14:creationId xmlns:p14="http://schemas.microsoft.com/office/powerpoint/2010/main" val="2800487701"/>
+        <p14:creationId xmlns:p14="http://schemas.microsoft.com/office/powerpoint/2010/main" val="1068008489"/>
       </p:ext>
     </p:extLst>
   </p:cSld>
@@ -2462,6 +2487,91 @@
     </p:spTree>
     <p:extLst>
       <p:ext uri="{BB962C8B-B14F-4D97-AF65-F5344CB8AC3E}">
+        <p14:creationId xmlns:p14="http://schemas.microsoft.com/office/powerpoint/2010/main" val="2800487701"/>
+      </p:ext>
+    </p:extLst>
+  </p:cSld>
+  <p:clrMapOvr>
+    <a:masterClrMapping/>
+  </p:clrMapOvr>
+</p:notes>
+</file>
+
+<file path=ppt/notesSlides/notesSlide27.xml><?xml version="1.0" encoding="utf-8"?>
+<p:notes xmlns:a="http://schemas.openxmlformats.org/drawingml/2006/main" xmlns:r="http://schemas.openxmlformats.org/officeDocument/2006/relationships" xmlns:p="http://schemas.openxmlformats.org/presentationml/2006/main">
+  <p:cSld>
+    <p:spTree>
+      <p:nvGrpSpPr>
+        <p:cNvPr id="1" name=""/>
+        <p:cNvGrpSpPr/>
+        <p:nvPr/>
+      </p:nvGrpSpPr>
+      <p:grpSpPr>
+        <a:xfrm>
+          <a:off x="0" y="0"/>
+          <a:ext cx="0" cy="0"/>
+          <a:chOff x="0" y="0"/>
+          <a:chExt cx="0" cy="0"/>
+        </a:xfrm>
+      </p:grpSpPr>
+      <p:sp>
+        <p:nvSpPr>
+          <p:cNvPr id="2" name="슬라이드 이미지 개체 틀 1"/>
+          <p:cNvSpPr>
+            <a:spLocks noGrp="1" noRot="1" noChangeAspect="1"/>
+          </p:cNvSpPr>
+          <p:nvPr>
+            <p:ph type="sldImg"/>
+          </p:nvPr>
+        </p:nvSpPr>
+        <p:spPr/>
+      </p:sp>
+      <p:sp>
+        <p:nvSpPr>
+          <p:cNvPr id="3" name="슬라이드 노트 개체 틀 2"/>
+          <p:cNvSpPr>
+            <a:spLocks noGrp="1"/>
+          </p:cNvSpPr>
+          <p:nvPr>
+            <p:ph type="body" idx="1"/>
+          </p:nvPr>
+        </p:nvSpPr>
+        <p:spPr/>
+        <p:txBody>
+          <a:bodyPr/>
+          <a:lstStyle/>
+          <a:p>
+            <a:endParaRPr lang="ko-KR" altLang="en-US" dirty="0"/>
+          </a:p>
+        </p:txBody>
+      </p:sp>
+      <p:sp>
+        <p:nvSpPr>
+          <p:cNvPr id="4" name="슬라이드 번호 개체 틀 3"/>
+          <p:cNvSpPr>
+            <a:spLocks noGrp="1"/>
+          </p:cNvSpPr>
+          <p:nvPr>
+            <p:ph type="sldNum" sz="quarter" idx="10"/>
+          </p:nvPr>
+        </p:nvSpPr>
+        <p:spPr/>
+        <p:txBody>
+          <a:bodyPr/>
+          <a:lstStyle/>
+          <a:p>
+            <a:pPr rtl="0"/>
+            <a:fld id="{5FB91549-43BF-425A-AF25-75262019208C}" type="slidenum">
+              <a:rPr lang="en-US" altLang="ko-KR" smtClean="0"/>
+              <a:t>28</a:t>
+            </a:fld>
+            <a:endParaRPr lang="ko-KR" altLang="en-US" dirty="0"/>
+          </a:p>
+        </p:txBody>
+      </p:sp>
+    </p:spTree>
+    <p:extLst>
+      <p:ext uri="{BB962C8B-B14F-4D97-AF65-F5344CB8AC3E}">
         <p14:creationId xmlns:p14="http://schemas.microsoft.com/office/powerpoint/2010/main" val="1460944233"/>
       </p:ext>
     </p:extLst>
@@ -2472,7 +2582,7 @@
 </p:notes>
 </file>
 
-<file path=ppt/notesSlides/notesSlide27.xml><?xml version="1.0" encoding="utf-8"?>
+<file path=ppt/notesSlides/notesSlide28.xml><?xml version="1.0" encoding="utf-8"?>
 <p:notes xmlns:a="http://schemas.openxmlformats.org/drawingml/2006/main" xmlns:r="http://schemas.openxmlformats.org/officeDocument/2006/relationships" xmlns:p="http://schemas.openxmlformats.org/presentationml/2006/main">
   <p:cSld>
     <p:spTree>
@@ -2562,7 +2672,7 @@
             <a:pPr rtl="0"/>
             <a:fld id="{5FB91549-43BF-425A-AF25-75262019208C}" type="slidenum">
               <a:rPr lang="en-US" altLang="ko-KR" smtClean="0"/>
-              <a:t>28</a:t>
+              <a:t>29</a:t>
             </a:fld>
             <a:endParaRPr lang="ko-KR" altLang="en-US" dirty="0"/>
           </a:p>
@@ -2572,91 +2682,6 @@
     <p:extLst>
       <p:ext uri="{BB962C8B-B14F-4D97-AF65-F5344CB8AC3E}">
         <p14:creationId xmlns:p14="http://schemas.microsoft.com/office/powerpoint/2010/main" val="3693412520"/>
-      </p:ext>
-    </p:extLst>
-  </p:cSld>
-  <p:clrMapOvr>
-    <a:masterClrMapping/>
-  </p:clrMapOvr>
-</p:notes>
-</file>
-
-<file path=ppt/notesSlides/notesSlide28.xml><?xml version="1.0" encoding="utf-8"?>
-<p:notes xmlns:a="http://schemas.openxmlformats.org/drawingml/2006/main" xmlns:r="http://schemas.openxmlformats.org/officeDocument/2006/relationships" xmlns:p="http://schemas.openxmlformats.org/presentationml/2006/main">
-  <p:cSld>
-    <p:spTree>
-      <p:nvGrpSpPr>
-        <p:cNvPr id="1" name=""/>
-        <p:cNvGrpSpPr/>
-        <p:nvPr/>
-      </p:nvGrpSpPr>
-      <p:grpSpPr>
-        <a:xfrm>
-          <a:off x="0" y="0"/>
-          <a:ext cx="0" cy="0"/>
-          <a:chOff x="0" y="0"/>
-          <a:chExt cx="0" cy="0"/>
-        </a:xfrm>
-      </p:grpSpPr>
-      <p:sp>
-        <p:nvSpPr>
-          <p:cNvPr id="2" name="슬라이드 이미지 개체 틀 1"/>
-          <p:cNvSpPr>
-            <a:spLocks noGrp="1" noRot="1" noChangeAspect="1"/>
-          </p:cNvSpPr>
-          <p:nvPr>
-            <p:ph type="sldImg"/>
-          </p:nvPr>
-        </p:nvSpPr>
-        <p:spPr/>
-      </p:sp>
-      <p:sp>
-        <p:nvSpPr>
-          <p:cNvPr id="3" name="슬라이드 노트 개체 틀 2"/>
-          <p:cNvSpPr>
-            <a:spLocks noGrp="1"/>
-          </p:cNvSpPr>
-          <p:nvPr>
-            <p:ph type="body" idx="1"/>
-          </p:nvPr>
-        </p:nvSpPr>
-        <p:spPr/>
-        <p:txBody>
-          <a:bodyPr/>
-          <a:lstStyle/>
-          <a:p>
-            <a:endParaRPr lang="ko-KR" altLang="en-US" dirty="0"/>
-          </a:p>
-        </p:txBody>
-      </p:sp>
-      <p:sp>
-        <p:nvSpPr>
-          <p:cNvPr id="4" name="슬라이드 번호 개체 틀 3"/>
-          <p:cNvSpPr>
-            <a:spLocks noGrp="1"/>
-          </p:cNvSpPr>
-          <p:nvPr>
-            <p:ph type="sldNum" sz="quarter" idx="10"/>
-          </p:nvPr>
-        </p:nvSpPr>
-        <p:spPr/>
-        <p:txBody>
-          <a:bodyPr/>
-          <a:lstStyle/>
-          <a:p>
-            <a:pPr rtl="0"/>
-            <a:fld id="{5FB91549-43BF-425A-AF25-75262019208C}" type="slidenum">
-              <a:rPr lang="en-US" altLang="ko-KR" smtClean="0"/>
-              <a:t>29</a:t>
-            </a:fld>
-            <a:endParaRPr lang="ko-KR" altLang="en-US" dirty="0"/>
-          </a:p>
-        </p:txBody>
-      </p:sp>
-    </p:spTree>
-    <p:extLst>
-      <p:ext uri="{BB962C8B-B14F-4D97-AF65-F5344CB8AC3E}">
-        <p14:creationId xmlns:p14="http://schemas.microsoft.com/office/powerpoint/2010/main" val="1676481021"/>
       </p:ext>
     </p:extLst>
   </p:cSld>
@@ -2741,7 +2766,7 @@
     </p:spTree>
     <p:extLst>
       <p:ext uri="{BB962C8B-B14F-4D97-AF65-F5344CB8AC3E}">
-        <p14:creationId xmlns:p14="http://schemas.microsoft.com/office/powerpoint/2010/main" val="1911418281"/>
+        <p14:creationId xmlns:p14="http://schemas.microsoft.com/office/powerpoint/2010/main" val="1676481021"/>
       </p:ext>
     </p:extLst>
   </p:cSld>
@@ -2756,13 +2781,7 @@
   <p:cSld>
     <p:spTree>
       <p:nvGrpSpPr>
-        <p:cNvPr id="1" name="">
-          <a:extLst>
-            <a:ext uri="{FF2B5EF4-FFF2-40B4-BE49-F238E27FC236}">
-              <a16:creationId xmlns:a16="http://schemas.microsoft.com/office/drawing/2014/main" id="{290C8F37-DCD9-3001-E354-B3A6D1C1CD83}"/>
-            </a:ext>
-          </a:extLst>
-        </p:cNvPr>
+        <p:cNvPr id="1" name=""/>
         <p:cNvGrpSpPr/>
         <p:nvPr/>
       </p:nvGrpSpPr>
@@ -2776,13 +2795,7 @@
       </p:grpSpPr>
       <p:sp>
         <p:nvSpPr>
-          <p:cNvPr id="2" name="슬라이드 이미지 개체 틀 1">
-            <a:extLst>
-              <a:ext uri="{FF2B5EF4-FFF2-40B4-BE49-F238E27FC236}">
-                <a16:creationId xmlns:a16="http://schemas.microsoft.com/office/drawing/2014/main" id="{036D4E07-A396-E1F7-0919-72AF00F19233}"/>
-              </a:ext>
-            </a:extLst>
-          </p:cNvPr>
+          <p:cNvPr id="2" name="슬라이드 이미지 개체 틀 1"/>
           <p:cNvSpPr>
             <a:spLocks noGrp="1" noRot="1" noChangeAspect="1"/>
           </p:cNvSpPr>
@@ -2794,13 +2807,7 @@
       </p:sp>
       <p:sp>
         <p:nvSpPr>
-          <p:cNvPr id="3" name="슬라이드 노트 개체 틀 2">
-            <a:extLst>
-              <a:ext uri="{FF2B5EF4-FFF2-40B4-BE49-F238E27FC236}">
-                <a16:creationId xmlns:a16="http://schemas.microsoft.com/office/drawing/2014/main" id="{8C8E06E1-13C1-3C32-46CB-92506A498BD4}"/>
-              </a:ext>
-            </a:extLst>
-          </p:cNvPr>
+          <p:cNvPr id="3" name="슬라이드 노트 개체 틀 2"/>
           <p:cNvSpPr>
             <a:spLocks noGrp="1"/>
           </p:cNvSpPr>
@@ -2819,13 +2826,7 @@
       </p:sp>
       <p:sp>
         <p:nvSpPr>
-          <p:cNvPr id="4" name="슬라이드 번호 개체 틀 3">
-            <a:extLst>
-              <a:ext uri="{FF2B5EF4-FFF2-40B4-BE49-F238E27FC236}">
-                <a16:creationId xmlns:a16="http://schemas.microsoft.com/office/drawing/2014/main" id="{7B1BFDC5-8668-119F-E940-FF2F60314DD8}"/>
-              </a:ext>
-            </a:extLst>
-          </p:cNvPr>
+          <p:cNvPr id="4" name="슬라이드 번호 개체 틀 3"/>
           <p:cNvSpPr>
             <a:spLocks noGrp="1"/>
           </p:cNvSpPr>
@@ -2850,7 +2851,7 @@
     </p:spTree>
     <p:extLst>
       <p:ext uri="{BB962C8B-B14F-4D97-AF65-F5344CB8AC3E}">
-        <p14:creationId xmlns:p14="http://schemas.microsoft.com/office/powerpoint/2010/main" val="1187571306"/>
+        <p14:creationId xmlns:p14="http://schemas.microsoft.com/office/powerpoint/2010/main" val="1911418281"/>
       </p:ext>
     </p:extLst>
   </p:cSld>
@@ -2935,7 +2936,7 @@
     </p:spTree>
     <p:extLst>
       <p:ext uri="{BB962C8B-B14F-4D97-AF65-F5344CB8AC3E}">
-        <p14:creationId xmlns:p14="http://schemas.microsoft.com/office/powerpoint/2010/main" val="1161407819"/>
+        <p14:creationId xmlns:p14="http://schemas.microsoft.com/office/powerpoint/2010/main" val="1911418281"/>
       </p:ext>
     </p:extLst>
   </p:cSld>
@@ -3020,7 +3021,7 @@
     </p:spTree>
     <p:extLst>
       <p:ext uri="{BB962C8B-B14F-4D97-AF65-F5344CB8AC3E}">
-        <p14:creationId xmlns:p14="http://schemas.microsoft.com/office/powerpoint/2010/main" val="2169422644"/>
+        <p14:creationId xmlns:p14="http://schemas.microsoft.com/office/powerpoint/2010/main" val="1161407819"/>
       </p:ext>
     </p:extLst>
   </p:cSld>
@@ -3105,7 +3106,7 @@
     </p:spTree>
     <p:extLst>
       <p:ext uri="{BB962C8B-B14F-4D97-AF65-F5344CB8AC3E}">
-        <p14:creationId xmlns:p14="http://schemas.microsoft.com/office/powerpoint/2010/main" val="691486688"/>
+        <p14:creationId xmlns:p14="http://schemas.microsoft.com/office/powerpoint/2010/main" val="2169422644"/>
       </p:ext>
     </p:extLst>
   </p:cSld>
@@ -3190,6 +3191,91 @@
     </p:spTree>
     <p:extLst>
       <p:ext uri="{BB962C8B-B14F-4D97-AF65-F5344CB8AC3E}">
+        <p14:creationId xmlns:p14="http://schemas.microsoft.com/office/powerpoint/2010/main" val="691486688"/>
+      </p:ext>
+    </p:extLst>
+  </p:cSld>
+  <p:clrMapOvr>
+    <a:masterClrMapping/>
+  </p:clrMapOvr>
+</p:notes>
+</file>
+
+<file path=ppt/notesSlides/notesSlide34.xml><?xml version="1.0" encoding="utf-8"?>
+<p:notes xmlns:a="http://schemas.openxmlformats.org/drawingml/2006/main" xmlns:r="http://schemas.openxmlformats.org/officeDocument/2006/relationships" xmlns:p="http://schemas.openxmlformats.org/presentationml/2006/main">
+  <p:cSld>
+    <p:spTree>
+      <p:nvGrpSpPr>
+        <p:cNvPr id="1" name=""/>
+        <p:cNvGrpSpPr/>
+        <p:nvPr/>
+      </p:nvGrpSpPr>
+      <p:grpSpPr>
+        <a:xfrm>
+          <a:off x="0" y="0"/>
+          <a:ext cx="0" cy="0"/>
+          <a:chOff x="0" y="0"/>
+          <a:chExt cx="0" cy="0"/>
+        </a:xfrm>
+      </p:grpSpPr>
+      <p:sp>
+        <p:nvSpPr>
+          <p:cNvPr id="2" name="슬라이드 이미지 개체 틀 1"/>
+          <p:cNvSpPr>
+            <a:spLocks noGrp="1" noRot="1" noChangeAspect="1"/>
+          </p:cNvSpPr>
+          <p:nvPr>
+            <p:ph type="sldImg"/>
+          </p:nvPr>
+        </p:nvSpPr>
+        <p:spPr/>
+      </p:sp>
+      <p:sp>
+        <p:nvSpPr>
+          <p:cNvPr id="3" name="슬라이드 노트 개체 틀 2"/>
+          <p:cNvSpPr>
+            <a:spLocks noGrp="1"/>
+          </p:cNvSpPr>
+          <p:nvPr>
+            <p:ph type="body" idx="1"/>
+          </p:nvPr>
+        </p:nvSpPr>
+        <p:spPr/>
+        <p:txBody>
+          <a:bodyPr/>
+          <a:lstStyle/>
+          <a:p>
+            <a:endParaRPr lang="ko-KR" altLang="en-US" dirty="0"/>
+          </a:p>
+        </p:txBody>
+      </p:sp>
+      <p:sp>
+        <p:nvSpPr>
+          <p:cNvPr id="4" name="슬라이드 번호 개체 틀 3"/>
+          <p:cNvSpPr>
+            <a:spLocks noGrp="1"/>
+          </p:cNvSpPr>
+          <p:nvPr>
+            <p:ph type="sldNum" sz="quarter" idx="10"/>
+          </p:nvPr>
+        </p:nvSpPr>
+        <p:spPr/>
+        <p:txBody>
+          <a:bodyPr/>
+          <a:lstStyle/>
+          <a:p>
+            <a:pPr rtl="0"/>
+            <a:fld id="{5FB91549-43BF-425A-AF25-75262019208C}" type="slidenum">
+              <a:rPr lang="en-US" altLang="ko-KR" smtClean="0"/>
+              <a:t>35</a:t>
+            </a:fld>
+            <a:endParaRPr lang="ko-KR" altLang="en-US" dirty="0"/>
+          </a:p>
+        </p:txBody>
+      </p:sp>
+    </p:spTree>
+    <p:extLst>
+      <p:ext uri="{BB962C8B-B14F-4D97-AF65-F5344CB8AC3E}">
         <p14:creationId xmlns:p14="http://schemas.microsoft.com/office/powerpoint/2010/main" val="818649102"/>
       </p:ext>
     </p:extLst>
@@ -3200,7 +3286,7 @@
 </p:notes>
 </file>
 
-<file path=ppt/notesSlides/notesSlide34.xml><?xml version="1.0" encoding="utf-8"?>
+<file path=ppt/notesSlides/notesSlide35.xml><?xml version="1.0" encoding="utf-8"?>
 <p:notes xmlns:a="http://schemas.openxmlformats.org/drawingml/2006/main" xmlns:r="http://schemas.openxmlformats.org/officeDocument/2006/relationships" xmlns:p="http://schemas.openxmlformats.org/presentationml/2006/main">
   <p:cSld>
     <p:spTree>
@@ -3290,7 +3376,7 @@
             <a:pPr rtl="0"/>
             <a:fld id="{5FB91549-43BF-425A-AF25-75262019208C}" type="slidenum">
               <a:rPr lang="en-US" altLang="ko-KR" smtClean="0"/>
-              <a:t>35</a:t>
+              <a:t>36</a:t>
             </a:fld>
             <a:endParaRPr lang="ko-KR" altLang="en-US" dirty="0"/>
           </a:p>
@@ -3300,91 +3386,6 @@
     <p:extLst>
       <p:ext uri="{BB962C8B-B14F-4D97-AF65-F5344CB8AC3E}">
         <p14:creationId xmlns:p14="http://schemas.microsoft.com/office/powerpoint/2010/main" val="1872387892"/>
-      </p:ext>
-    </p:extLst>
-  </p:cSld>
-  <p:clrMapOvr>
-    <a:masterClrMapping/>
-  </p:clrMapOvr>
-</p:notes>
-</file>
-
-<file path=ppt/notesSlides/notesSlide35.xml><?xml version="1.0" encoding="utf-8"?>
-<p:notes xmlns:a="http://schemas.openxmlformats.org/drawingml/2006/main" xmlns:r="http://schemas.openxmlformats.org/officeDocument/2006/relationships" xmlns:p="http://schemas.openxmlformats.org/presentationml/2006/main">
-  <p:cSld>
-    <p:spTree>
-      <p:nvGrpSpPr>
-        <p:cNvPr id="1" name=""/>
-        <p:cNvGrpSpPr/>
-        <p:nvPr/>
-      </p:nvGrpSpPr>
-      <p:grpSpPr>
-        <a:xfrm>
-          <a:off x="0" y="0"/>
-          <a:ext cx="0" cy="0"/>
-          <a:chOff x="0" y="0"/>
-          <a:chExt cx="0" cy="0"/>
-        </a:xfrm>
-      </p:grpSpPr>
-      <p:sp>
-        <p:nvSpPr>
-          <p:cNvPr id="2" name="슬라이드 이미지 개체 틀 1"/>
-          <p:cNvSpPr>
-            <a:spLocks noGrp="1" noRot="1" noChangeAspect="1"/>
-          </p:cNvSpPr>
-          <p:nvPr>
-            <p:ph type="sldImg"/>
-          </p:nvPr>
-        </p:nvSpPr>
-        <p:spPr/>
-      </p:sp>
-      <p:sp>
-        <p:nvSpPr>
-          <p:cNvPr id="3" name="슬라이드 노트 개체 틀 2"/>
-          <p:cNvSpPr>
-            <a:spLocks noGrp="1"/>
-          </p:cNvSpPr>
-          <p:nvPr>
-            <p:ph type="body" idx="1"/>
-          </p:nvPr>
-        </p:nvSpPr>
-        <p:spPr/>
-        <p:txBody>
-          <a:bodyPr/>
-          <a:lstStyle/>
-          <a:p>
-            <a:endParaRPr lang="ko-KR" altLang="en-US" dirty="0"/>
-          </a:p>
-        </p:txBody>
-      </p:sp>
-      <p:sp>
-        <p:nvSpPr>
-          <p:cNvPr id="4" name="슬라이드 번호 개체 틀 3"/>
-          <p:cNvSpPr>
-            <a:spLocks noGrp="1"/>
-          </p:cNvSpPr>
-          <p:nvPr>
-            <p:ph type="sldNum" sz="quarter" idx="10"/>
-          </p:nvPr>
-        </p:nvSpPr>
-        <p:spPr/>
-        <p:txBody>
-          <a:bodyPr/>
-          <a:lstStyle/>
-          <a:p>
-            <a:pPr rtl="0"/>
-            <a:fld id="{5FB91549-43BF-425A-AF25-75262019208C}" type="slidenum">
-              <a:rPr lang="en-US" altLang="ko-KR" smtClean="0"/>
-              <a:t>36</a:t>
-            </a:fld>
-            <a:endParaRPr lang="ko-KR" altLang="en-US" dirty="0"/>
-          </a:p>
-        </p:txBody>
-      </p:sp>
-    </p:spTree>
-    <p:extLst>
-      <p:ext uri="{BB962C8B-B14F-4D97-AF65-F5344CB8AC3E}">
-        <p14:creationId xmlns:p14="http://schemas.microsoft.com/office/powerpoint/2010/main" val="3264954647"/>
       </p:ext>
     </p:extLst>
   </p:cSld>
@@ -3469,7 +3470,7 @@
     </p:spTree>
     <p:extLst>
       <p:ext uri="{BB962C8B-B14F-4D97-AF65-F5344CB8AC3E}">
-        <p14:creationId xmlns:p14="http://schemas.microsoft.com/office/powerpoint/2010/main" val="3825577867"/>
+        <p14:creationId xmlns:p14="http://schemas.microsoft.com/office/powerpoint/2010/main" val="3264954647"/>
       </p:ext>
     </p:extLst>
   </p:cSld>
@@ -3554,7 +3555,7 @@
     </p:spTree>
     <p:extLst>
       <p:ext uri="{BB962C8B-B14F-4D97-AF65-F5344CB8AC3E}">
-        <p14:creationId xmlns:p14="http://schemas.microsoft.com/office/powerpoint/2010/main" val="3388233507"/>
+        <p14:creationId xmlns:p14="http://schemas.microsoft.com/office/powerpoint/2010/main" val="3825577867"/>
       </p:ext>
     </p:extLst>
   </p:cSld>
@@ -3639,7 +3640,7 @@
     </p:spTree>
     <p:extLst>
       <p:ext uri="{BB962C8B-B14F-4D97-AF65-F5344CB8AC3E}">
-        <p14:creationId xmlns:p14="http://schemas.microsoft.com/office/powerpoint/2010/main" val="1326431871"/>
+        <p14:creationId xmlns:p14="http://schemas.microsoft.com/office/powerpoint/2010/main" val="3388233507"/>
       </p:ext>
     </p:extLst>
   </p:cSld>
@@ -3724,7 +3725,7 @@
     </p:spTree>
     <p:extLst>
       <p:ext uri="{BB962C8B-B14F-4D97-AF65-F5344CB8AC3E}">
-        <p14:creationId xmlns:p14="http://schemas.microsoft.com/office/powerpoint/2010/main" val="1277359177"/>
+        <p14:creationId xmlns:p14="http://schemas.microsoft.com/office/powerpoint/2010/main" val="1326431871"/>
       </p:ext>
     </p:extLst>
   </p:cSld>
@@ -3742,7 +3743,7 @@
         <p:cNvPr id="1" name="">
           <a:extLst>
             <a:ext uri="{FF2B5EF4-FFF2-40B4-BE49-F238E27FC236}">
-              <a16:creationId xmlns:a16="http://schemas.microsoft.com/office/drawing/2014/main" id="{82D3B65B-4D46-A4B6-4A55-CF7F725D8967}"/>
+              <a16:creationId xmlns:a16="http://schemas.microsoft.com/office/drawing/2014/main" id="{290C8F37-DCD9-3001-E354-B3A6D1C1CD83}"/>
             </a:ext>
           </a:extLst>
         </p:cNvPr>
@@ -3762,7 +3763,7 @@
           <p:cNvPr id="2" name="슬라이드 이미지 개체 틀 1">
             <a:extLst>
               <a:ext uri="{FF2B5EF4-FFF2-40B4-BE49-F238E27FC236}">
-                <a16:creationId xmlns:a16="http://schemas.microsoft.com/office/drawing/2014/main" id="{E2EC8E50-C409-8198-1011-7B049358C5D2}"/>
+                <a16:creationId xmlns:a16="http://schemas.microsoft.com/office/drawing/2014/main" id="{036D4E07-A396-E1F7-0919-72AF00F19233}"/>
               </a:ext>
             </a:extLst>
           </p:cNvPr>
@@ -3780,7 +3781,7 @@
           <p:cNvPr id="3" name="슬라이드 노트 개체 틀 2">
             <a:extLst>
               <a:ext uri="{FF2B5EF4-FFF2-40B4-BE49-F238E27FC236}">
-                <a16:creationId xmlns:a16="http://schemas.microsoft.com/office/drawing/2014/main" id="{8EBC7159-0CFA-4FF6-3C88-1A3B88DBE009}"/>
+                <a16:creationId xmlns:a16="http://schemas.microsoft.com/office/drawing/2014/main" id="{8C8E06E1-13C1-3C32-46CB-92506A498BD4}"/>
               </a:ext>
             </a:extLst>
           </p:cNvPr>
@@ -3805,7 +3806,7 @@
           <p:cNvPr id="4" name="슬라이드 번호 개체 틀 3">
             <a:extLst>
               <a:ext uri="{FF2B5EF4-FFF2-40B4-BE49-F238E27FC236}">
-                <a16:creationId xmlns:a16="http://schemas.microsoft.com/office/drawing/2014/main" id="{38F161A9-E2C3-ED47-AF62-F9F227017675}"/>
+                <a16:creationId xmlns:a16="http://schemas.microsoft.com/office/drawing/2014/main" id="{7B1BFDC5-8668-119F-E940-FF2F60314DD8}"/>
               </a:ext>
             </a:extLst>
           </p:cNvPr>
@@ -3833,7 +3834,7 @@
     </p:spTree>
     <p:extLst>
       <p:ext uri="{BB962C8B-B14F-4D97-AF65-F5344CB8AC3E}">
-        <p14:creationId xmlns:p14="http://schemas.microsoft.com/office/powerpoint/2010/main" val="1167275013"/>
+        <p14:creationId xmlns:p14="http://schemas.microsoft.com/office/powerpoint/2010/main" val="1187571306"/>
       </p:ext>
     </p:extLst>
   </p:cSld>
@@ -3918,6 +3919,91 @@
     </p:spTree>
     <p:extLst>
       <p:ext uri="{BB962C8B-B14F-4D97-AF65-F5344CB8AC3E}">
+        <p14:creationId xmlns:p14="http://schemas.microsoft.com/office/powerpoint/2010/main" val="1277359177"/>
+      </p:ext>
+    </p:extLst>
+  </p:cSld>
+  <p:clrMapOvr>
+    <a:masterClrMapping/>
+  </p:clrMapOvr>
+</p:notes>
+</file>
+
+<file path=ppt/notesSlides/notesSlide41.xml><?xml version="1.0" encoding="utf-8"?>
+<p:notes xmlns:a="http://schemas.openxmlformats.org/drawingml/2006/main" xmlns:r="http://schemas.openxmlformats.org/officeDocument/2006/relationships" xmlns:p="http://schemas.openxmlformats.org/presentationml/2006/main">
+  <p:cSld>
+    <p:spTree>
+      <p:nvGrpSpPr>
+        <p:cNvPr id="1" name=""/>
+        <p:cNvGrpSpPr/>
+        <p:nvPr/>
+      </p:nvGrpSpPr>
+      <p:grpSpPr>
+        <a:xfrm>
+          <a:off x="0" y="0"/>
+          <a:ext cx="0" cy="0"/>
+          <a:chOff x="0" y="0"/>
+          <a:chExt cx="0" cy="0"/>
+        </a:xfrm>
+      </p:grpSpPr>
+      <p:sp>
+        <p:nvSpPr>
+          <p:cNvPr id="2" name="슬라이드 이미지 개체 틀 1"/>
+          <p:cNvSpPr>
+            <a:spLocks noGrp="1" noRot="1" noChangeAspect="1"/>
+          </p:cNvSpPr>
+          <p:nvPr>
+            <p:ph type="sldImg"/>
+          </p:nvPr>
+        </p:nvSpPr>
+        <p:spPr/>
+      </p:sp>
+      <p:sp>
+        <p:nvSpPr>
+          <p:cNvPr id="3" name="슬라이드 노트 개체 틀 2"/>
+          <p:cNvSpPr>
+            <a:spLocks noGrp="1"/>
+          </p:cNvSpPr>
+          <p:nvPr>
+            <p:ph type="body" idx="1"/>
+          </p:nvPr>
+        </p:nvSpPr>
+        <p:spPr/>
+        <p:txBody>
+          <a:bodyPr/>
+          <a:lstStyle/>
+          <a:p>
+            <a:endParaRPr lang="ko-KR" altLang="en-US" dirty="0"/>
+          </a:p>
+        </p:txBody>
+      </p:sp>
+      <p:sp>
+        <p:nvSpPr>
+          <p:cNvPr id="4" name="슬라이드 번호 개체 틀 3"/>
+          <p:cNvSpPr>
+            <a:spLocks noGrp="1"/>
+          </p:cNvSpPr>
+          <p:nvPr>
+            <p:ph type="sldNum" sz="quarter" idx="10"/>
+          </p:nvPr>
+        </p:nvSpPr>
+        <p:spPr/>
+        <p:txBody>
+          <a:bodyPr/>
+          <a:lstStyle/>
+          <a:p>
+            <a:pPr rtl="0"/>
+            <a:fld id="{5FB91549-43BF-425A-AF25-75262019208C}" type="slidenum">
+              <a:rPr lang="en-US" altLang="ko-KR" smtClean="0"/>
+              <a:t>42</a:t>
+            </a:fld>
+            <a:endParaRPr lang="ko-KR" altLang="en-US" dirty="0"/>
+          </a:p>
+        </p:txBody>
+      </p:sp>
+    </p:spTree>
+    <p:extLst>
+      <p:ext uri="{BB962C8B-B14F-4D97-AF65-F5344CB8AC3E}">
         <p14:creationId xmlns:p14="http://schemas.microsoft.com/office/powerpoint/2010/main" val="3893411825"/>
       </p:ext>
     </p:extLst>
@@ -3928,7 +4014,7 @@
 </p:notes>
 </file>
 
-<file path=ppt/notesSlides/notesSlide41.xml><?xml version="1.0" encoding="utf-8"?>
+<file path=ppt/notesSlides/notesSlide42.xml><?xml version="1.0" encoding="utf-8"?>
 <p:notes xmlns:a="http://schemas.openxmlformats.org/drawingml/2006/main" xmlns:r="http://schemas.openxmlformats.org/officeDocument/2006/relationships" xmlns:p="http://schemas.openxmlformats.org/presentationml/2006/main">
   <p:cSld>
     <p:spTree>
@@ -4018,7 +4104,7 @@
             <a:pPr rtl="0"/>
             <a:fld id="{5FB91549-43BF-425A-AF25-75262019208C}" type="slidenum">
               <a:rPr lang="en-US" altLang="ko-KR" smtClean="0"/>
-              <a:t>42</a:t>
+              <a:t>43</a:t>
             </a:fld>
             <a:endParaRPr lang="ko-KR" altLang="en-US" dirty="0"/>
           </a:p>
@@ -4038,6 +4124,115 @@
 </file>
 
 <file path=ppt/notesSlides/notesSlide5.xml><?xml version="1.0" encoding="utf-8"?>
+<p:notes xmlns:a="http://schemas.openxmlformats.org/drawingml/2006/main" xmlns:r="http://schemas.openxmlformats.org/officeDocument/2006/relationships" xmlns:p="http://schemas.openxmlformats.org/presentationml/2006/main">
+  <p:cSld>
+    <p:spTree>
+      <p:nvGrpSpPr>
+        <p:cNvPr id="1" name="">
+          <a:extLst>
+            <a:ext uri="{FF2B5EF4-FFF2-40B4-BE49-F238E27FC236}">
+              <a16:creationId xmlns:a16="http://schemas.microsoft.com/office/drawing/2014/main" id="{60521CC8-0D2E-8DEC-1D9A-F41A4C3E9C94}"/>
+            </a:ext>
+          </a:extLst>
+        </p:cNvPr>
+        <p:cNvGrpSpPr/>
+        <p:nvPr/>
+      </p:nvGrpSpPr>
+      <p:grpSpPr>
+        <a:xfrm>
+          <a:off x="0" y="0"/>
+          <a:ext cx="0" cy="0"/>
+          <a:chOff x="0" y="0"/>
+          <a:chExt cx="0" cy="0"/>
+        </a:xfrm>
+      </p:grpSpPr>
+      <p:sp>
+        <p:nvSpPr>
+          <p:cNvPr id="2" name="슬라이드 이미지 개체 틀 1">
+            <a:extLst>
+              <a:ext uri="{FF2B5EF4-FFF2-40B4-BE49-F238E27FC236}">
+                <a16:creationId xmlns:a16="http://schemas.microsoft.com/office/drawing/2014/main" id="{6FF0DB7E-99FB-42D2-1AAD-3B5F0D509DCA}"/>
+              </a:ext>
+            </a:extLst>
+          </p:cNvPr>
+          <p:cNvSpPr>
+            <a:spLocks noGrp="1" noRot="1" noChangeAspect="1"/>
+          </p:cNvSpPr>
+          <p:nvPr>
+            <p:ph type="sldImg"/>
+          </p:nvPr>
+        </p:nvSpPr>
+        <p:spPr/>
+      </p:sp>
+      <p:sp>
+        <p:nvSpPr>
+          <p:cNvPr id="3" name="슬라이드 노트 개체 틀 2">
+            <a:extLst>
+              <a:ext uri="{FF2B5EF4-FFF2-40B4-BE49-F238E27FC236}">
+                <a16:creationId xmlns:a16="http://schemas.microsoft.com/office/drawing/2014/main" id="{624ADE68-7183-B978-539E-EFA04421F09A}"/>
+              </a:ext>
+            </a:extLst>
+          </p:cNvPr>
+          <p:cNvSpPr>
+            <a:spLocks noGrp="1"/>
+          </p:cNvSpPr>
+          <p:nvPr>
+            <p:ph type="body" idx="1"/>
+          </p:nvPr>
+        </p:nvSpPr>
+        <p:spPr/>
+        <p:txBody>
+          <a:bodyPr/>
+          <a:lstStyle/>
+          <a:p>
+            <a:endParaRPr lang="ko-KR" altLang="en-US" dirty="0"/>
+          </a:p>
+        </p:txBody>
+      </p:sp>
+      <p:sp>
+        <p:nvSpPr>
+          <p:cNvPr id="4" name="슬라이드 번호 개체 틀 3">
+            <a:extLst>
+              <a:ext uri="{FF2B5EF4-FFF2-40B4-BE49-F238E27FC236}">
+                <a16:creationId xmlns:a16="http://schemas.microsoft.com/office/drawing/2014/main" id="{E5F71883-9269-BE0C-3451-72DCB569ABCC}"/>
+              </a:ext>
+            </a:extLst>
+          </p:cNvPr>
+          <p:cNvSpPr>
+            <a:spLocks noGrp="1"/>
+          </p:cNvSpPr>
+          <p:nvPr>
+            <p:ph type="sldNum" sz="quarter" idx="10"/>
+          </p:nvPr>
+        </p:nvSpPr>
+        <p:spPr/>
+        <p:txBody>
+          <a:bodyPr/>
+          <a:lstStyle/>
+          <a:p>
+            <a:pPr rtl="0"/>
+            <a:fld id="{5FB91549-43BF-425A-AF25-75262019208C}" type="slidenum">
+              <a:rPr lang="en-US" altLang="ko-KR" smtClean="0"/>
+              <a:t>5</a:t>
+            </a:fld>
+            <a:endParaRPr lang="ko-KR" altLang="en-US" dirty="0"/>
+          </a:p>
+        </p:txBody>
+      </p:sp>
+    </p:spTree>
+    <p:extLst>
+      <p:ext uri="{BB962C8B-B14F-4D97-AF65-F5344CB8AC3E}">
+        <p14:creationId xmlns:p14="http://schemas.microsoft.com/office/powerpoint/2010/main" val="585112097"/>
+      </p:ext>
+    </p:extLst>
+  </p:cSld>
+  <p:clrMapOvr>
+    <a:masterClrMapping/>
+  </p:clrMapOvr>
+</p:notes>
+</file>
+
+<file path=ppt/notesSlides/notesSlide6.xml><?xml version="1.0" encoding="utf-8"?>
 <p:notes xmlns:a="http://schemas.openxmlformats.org/drawingml/2006/main" xmlns:r="http://schemas.openxmlformats.org/officeDocument/2006/relationships" xmlns:p="http://schemas.openxmlformats.org/presentationml/2006/main">
   <p:cSld>
     <p:spTree>
@@ -4127,7 +4322,7 @@
             <a:pPr rtl="0"/>
             <a:fld id="{5FB91549-43BF-425A-AF25-75262019208C}" type="slidenum">
               <a:rPr lang="en-US" altLang="ko-KR" smtClean="0"/>
-              <a:t>5</a:t>
+              <a:t>6</a:t>
             </a:fld>
             <a:endParaRPr lang="ko-KR" altLang="en-US" dirty="0"/>
           </a:p>
@@ -4137,91 +4332,6 @@
     <p:extLst>
       <p:ext uri="{BB962C8B-B14F-4D97-AF65-F5344CB8AC3E}">
         <p14:creationId xmlns:p14="http://schemas.microsoft.com/office/powerpoint/2010/main" val="4157777088"/>
-      </p:ext>
-    </p:extLst>
-  </p:cSld>
-  <p:clrMapOvr>
-    <a:masterClrMapping/>
-  </p:clrMapOvr>
-</p:notes>
-</file>
-
-<file path=ppt/notesSlides/notesSlide6.xml><?xml version="1.0" encoding="utf-8"?>
-<p:notes xmlns:a="http://schemas.openxmlformats.org/drawingml/2006/main" xmlns:r="http://schemas.openxmlformats.org/officeDocument/2006/relationships" xmlns:p="http://schemas.openxmlformats.org/presentationml/2006/main">
-  <p:cSld>
-    <p:spTree>
-      <p:nvGrpSpPr>
-        <p:cNvPr id="1" name=""/>
-        <p:cNvGrpSpPr/>
-        <p:nvPr/>
-      </p:nvGrpSpPr>
-      <p:grpSpPr>
-        <a:xfrm>
-          <a:off x="0" y="0"/>
-          <a:ext cx="0" cy="0"/>
-          <a:chOff x="0" y="0"/>
-          <a:chExt cx="0" cy="0"/>
-        </a:xfrm>
-      </p:grpSpPr>
-      <p:sp>
-        <p:nvSpPr>
-          <p:cNvPr id="2" name="슬라이드 이미지 개체 틀 1"/>
-          <p:cNvSpPr>
-            <a:spLocks noGrp="1" noRot="1" noChangeAspect="1"/>
-          </p:cNvSpPr>
-          <p:nvPr>
-            <p:ph type="sldImg"/>
-          </p:nvPr>
-        </p:nvSpPr>
-        <p:spPr/>
-      </p:sp>
-      <p:sp>
-        <p:nvSpPr>
-          <p:cNvPr id="3" name="슬라이드 노트 개체 틀 2"/>
-          <p:cNvSpPr>
-            <a:spLocks noGrp="1"/>
-          </p:cNvSpPr>
-          <p:nvPr>
-            <p:ph type="body" idx="1"/>
-          </p:nvPr>
-        </p:nvSpPr>
-        <p:spPr/>
-        <p:txBody>
-          <a:bodyPr/>
-          <a:lstStyle/>
-          <a:p>
-            <a:endParaRPr lang="ko-KR" altLang="en-US" dirty="0"/>
-          </a:p>
-        </p:txBody>
-      </p:sp>
-      <p:sp>
-        <p:nvSpPr>
-          <p:cNvPr id="4" name="슬라이드 번호 개체 틀 3"/>
-          <p:cNvSpPr>
-            <a:spLocks noGrp="1"/>
-          </p:cNvSpPr>
-          <p:nvPr>
-            <p:ph type="sldNum" sz="quarter" idx="10"/>
-          </p:nvPr>
-        </p:nvSpPr>
-        <p:spPr/>
-        <p:txBody>
-          <a:bodyPr/>
-          <a:lstStyle/>
-          <a:p>
-            <a:pPr rtl="0"/>
-            <a:fld id="{5FB91549-43BF-425A-AF25-75262019208C}" type="slidenum">
-              <a:rPr lang="en-US" altLang="ko-KR" smtClean="0"/>
-              <a:t>6</a:t>
-            </a:fld>
-            <a:endParaRPr lang="ko-KR" altLang="en-US" dirty="0"/>
-          </a:p>
-        </p:txBody>
-      </p:sp>
-    </p:spTree>
-    <p:extLst>
-      <p:ext uri="{BB962C8B-B14F-4D97-AF65-F5344CB8AC3E}">
-        <p14:creationId xmlns:p14="http://schemas.microsoft.com/office/powerpoint/2010/main" val="2950374360"/>
       </p:ext>
     </p:extLst>
   </p:cSld>
@@ -4306,7 +4416,7 @@
     </p:spTree>
     <p:extLst>
       <p:ext uri="{BB962C8B-B14F-4D97-AF65-F5344CB8AC3E}">
-        <p14:creationId xmlns:p14="http://schemas.microsoft.com/office/powerpoint/2010/main" val="2272406497"/>
+        <p14:creationId xmlns:p14="http://schemas.microsoft.com/office/powerpoint/2010/main" val="2950374360"/>
       </p:ext>
     </p:extLst>
   </p:cSld>
@@ -4391,7 +4501,7 @@
     </p:spTree>
     <p:extLst>
       <p:ext uri="{BB962C8B-B14F-4D97-AF65-F5344CB8AC3E}">
-        <p14:creationId xmlns:p14="http://schemas.microsoft.com/office/powerpoint/2010/main" val="1229129113"/>
+        <p14:creationId xmlns:p14="http://schemas.microsoft.com/office/powerpoint/2010/main" val="2272406497"/>
       </p:ext>
     </p:extLst>
   </p:cSld>
@@ -4476,7 +4586,7 @@
     </p:spTree>
     <p:extLst>
       <p:ext uri="{BB962C8B-B14F-4D97-AF65-F5344CB8AC3E}">
-        <p14:creationId xmlns:p14="http://schemas.microsoft.com/office/powerpoint/2010/main" val="2897626452"/>
+        <p14:creationId xmlns:p14="http://schemas.microsoft.com/office/powerpoint/2010/main" val="1229129113"/>
       </p:ext>
     </p:extLst>
   </p:cSld>
@@ -8201,6 +8311,166 @@
         </p:blipFill>
         <p:spPr>
           <a:xfrm>
+            <a:off x="909836" y="692696"/>
+            <a:ext cx="9838746" cy="5326966"/>
+          </a:xfrm>
+          <a:prstGeom prst="rect">
+            <a:avLst/>
+          </a:prstGeom>
+        </p:spPr>
+      </p:pic>
+      <p:sp>
+        <p:nvSpPr>
+          <p:cNvPr id="5" name="말풍선: 타원형 4">
+            <a:extLst>
+              <a:ext uri="{FF2B5EF4-FFF2-40B4-BE49-F238E27FC236}">
+                <a16:creationId xmlns:a16="http://schemas.microsoft.com/office/drawing/2014/main" id="{EA024606-6906-5C69-50C6-9C14C607C158}"/>
+              </a:ext>
+            </a:extLst>
+          </p:cNvPr>
+          <p:cNvSpPr/>
+          <p:nvPr/>
+        </p:nvSpPr>
+        <p:spPr>
+          <a:xfrm>
+            <a:off x="7894612" y="5505817"/>
+            <a:ext cx="1944216" cy="850534"/>
+          </a:xfrm>
+          <a:prstGeom prst="wedgeEllipseCallout">
+            <a:avLst>
+              <a:gd name="adj1" fmla="val -67667"/>
+              <a:gd name="adj2" fmla="val -69466"/>
+            </a:avLst>
+          </a:prstGeom>
+        </p:spPr>
+        <p:style>
+          <a:lnRef idx="2">
+            <a:schemeClr val="accent1">
+              <a:shade val="15000"/>
+            </a:schemeClr>
+          </a:lnRef>
+          <a:fillRef idx="1">
+            <a:schemeClr val="accent1"/>
+          </a:fillRef>
+          <a:effectRef idx="0">
+            <a:schemeClr val="accent1"/>
+          </a:effectRef>
+          <a:fontRef idx="minor">
+            <a:schemeClr val="lt1"/>
+          </a:fontRef>
+        </p:style>
+        <p:txBody>
+          <a:bodyPr rtlCol="0" anchor="ctr"/>
+          <a:lstStyle/>
+          <a:p>
+            <a:r>
+              <a:rPr lang="ko-KR" altLang="en-US" b="1" dirty="0">
+                <a:latin typeface="휴먼모음T" panose="02030504000101010101" pitchFamily="18" charset="-127"/>
+                <a:ea typeface="휴먼모음T" panose="02030504000101010101" pitchFamily="18" charset="-127"/>
+              </a:rPr>
+              <a:t>균등 층화</a:t>
+            </a:r>
+            <a:r>
+              <a:rPr lang="en-US" altLang="ko-KR" b="1" dirty="0">
+                <a:latin typeface="휴먼모음T" panose="02030504000101010101" pitchFamily="18" charset="-127"/>
+                <a:ea typeface="휴먼모음T" panose="02030504000101010101" pitchFamily="18" charset="-127"/>
+              </a:rPr>
+              <a:t>, </a:t>
+            </a:r>
+          </a:p>
+          <a:p>
+            <a:r>
+              <a:rPr lang="ko-KR" altLang="en-US" b="1" dirty="0">
+                <a:latin typeface="휴먼모음T" panose="02030504000101010101" pitchFamily="18" charset="-127"/>
+                <a:ea typeface="휴먼모음T" panose="02030504000101010101" pitchFamily="18" charset="-127"/>
+              </a:rPr>
+              <a:t>비례 층화 </a:t>
+            </a:r>
+          </a:p>
+        </p:txBody>
+      </p:sp>
+    </p:spTree>
+    <p:extLst>
+      <p:ext uri="{BB962C8B-B14F-4D97-AF65-F5344CB8AC3E}">
+        <p14:creationId xmlns:p14="http://schemas.microsoft.com/office/powerpoint/2010/main" val="2455660487"/>
+      </p:ext>
+    </p:extLst>
+  </p:cSld>
+  <p:clrMapOvr>
+    <a:masterClrMapping/>
+  </p:clrMapOvr>
+  <mc:AlternateContent xmlns:mc="http://schemas.openxmlformats.org/markup-compatibility/2006" xmlns:p14="http://schemas.microsoft.com/office/powerpoint/2010/main">
+    <mc:Choice Requires="p14">
+      <p:transition spd="med" p14:dur="700">
+        <p:fade/>
+      </p:transition>
+    </mc:Choice>
+    <mc:Fallback xmlns="">
+      <p:transition spd="med">
+        <p:fade/>
+      </p:transition>
+    </mc:Fallback>
+  </mc:AlternateContent>
+</p:sld>
+</file>
+
+<file path=ppt/slides/slide11.xml><?xml version="1.0" encoding="utf-8"?>
+<p:sld xmlns:a="http://schemas.openxmlformats.org/drawingml/2006/main" xmlns:r="http://schemas.openxmlformats.org/officeDocument/2006/relationships" xmlns:p="http://schemas.openxmlformats.org/presentationml/2006/main">
+  <p:cSld>
+    <p:spTree>
+      <p:nvGrpSpPr>
+        <p:cNvPr id="1" name=""/>
+        <p:cNvGrpSpPr/>
+        <p:nvPr/>
+      </p:nvGrpSpPr>
+      <p:grpSpPr>
+        <a:xfrm>
+          <a:off x="0" y="0"/>
+          <a:ext cx="0" cy="0"/>
+          <a:chOff x="0" y="0"/>
+          <a:chExt cx="0" cy="0"/>
+        </a:xfrm>
+      </p:grpSpPr>
+      <p:sp>
+        <p:nvSpPr>
+          <p:cNvPr id="2" name="슬라이드 번호 개체 틀 1"/>
+          <p:cNvSpPr>
+            <a:spLocks noGrp="1"/>
+          </p:cNvSpPr>
+          <p:nvPr>
+            <p:ph type="sldNum" sz="quarter" idx="12"/>
+          </p:nvPr>
+        </p:nvSpPr>
+        <p:spPr/>
+        <p:txBody>
+          <a:bodyPr/>
+          <a:lstStyle/>
+          <a:p>
+            <a:pPr rtl="0"/>
+            <a:fld id="{A3F31473-23EB-4724-8B59-FE6D21D89FA4}" type="slidenum">
+              <a:rPr lang="en-US" altLang="ko-KR" noProof="0" smtClean="0"/>
+              <a:t>11</a:t>
+            </a:fld>
+            <a:endParaRPr lang="en-US" altLang="ko-KR" noProof="0" dirty="0"/>
+          </a:p>
+        </p:txBody>
+      </p:sp>
+      <p:pic>
+        <p:nvPicPr>
+          <p:cNvPr id="3" name="그림 2"/>
+          <p:cNvPicPr>
+            <a:picLocks noChangeAspect="1"/>
+          </p:cNvPicPr>
+          <p:nvPr/>
+        </p:nvPicPr>
+        <p:blipFill>
+          <a:blip r:embed="rId3"/>
+          <a:stretch>
+            <a:fillRect/>
+          </a:stretch>
+        </p:blipFill>
+        <p:spPr>
+          <a:xfrm>
             <a:off x="1053852" y="908720"/>
             <a:ext cx="9046658" cy="3651317"/>
           </a:xfrm>
@@ -8234,7 +8504,7 @@
 </p:sld>
 </file>
 
-<file path=ppt/slides/slide11.xml><?xml version="1.0" encoding="utf-8"?>
+<file path=ppt/slides/slide12.xml><?xml version="1.0" encoding="utf-8"?>
 <p:sld xmlns:a="http://schemas.openxmlformats.org/drawingml/2006/main" xmlns:r="http://schemas.openxmlformats.org/officeDocument/2006/relationships" xmlns:p="http://schemas.openxmlformats.org/presentationml/2006/main">
   <p:cSld>
     <p:spTree>
@@ -8281,7 +8551,7 @@
             <a:pPr rtl="0"/>
             <a:fld id="{A3F31473-23EB-4724-8B59-FE6D21D89FA4}" type="slidenum">
               <a:rPr lang="en-US" altLang="ko-KR" noProof="0" smtClean="0"/>
-              <a:t>11</a:t>
+              <a:t>12</a:t>
             </a:fld>
             <a:endParaRPr lang="en-US" altLang="ko-KR" noProof="0" dirty="0"/>
           </a:p>
@@ -8436,7 +8706,7 @@
 </p:sld>
 </file>
 
-<file path=ppt/slides/slide12.xml><?xml version="1.0" encoding="utf-8"?>
+<file path=ppt/slides/slide13.xml><?xml version="1.0" encoding="utf-8"?>
 <p:sld xmlns:a="http://schemas.openxmlformats.org/drawingml/2006/main" xmlns:r="http://schemas.openxmlformats.org/officeDocument/2006/relationships" xmlns:p="http://schemas.openxmlformats.org/presentationml/2006/main">
   <p:cSld>
     <p:spTree>
@@ -8537,7 +8807,7 @@
             <a:pPr rtl="0"/>
             <a:fld id="{A3F31473-23EB-4724-8B59-FE6D21D89FA4}" type="slidenum">
               <a:rPr lang="en-US" altLang="ko-KR" noProof="0" smtClean="0"/>
-              <a:t>12</a:t>
+              <a:t>13</a:t>
             </a:fld>
             <a:endParaRPr lang="en-US" altLang="ko-KR" noProof="0" dirty="0"/>
           </a:p>
@@ -8768,7 +9038,7 @@
 </p:sld>
 </file>
 
-<file path=ppt/slides/slide13.xml><?xml version="1.0" encoding="utf-8"?>
+<file path=ppt/slides/slide14.xml><?xml version="1.0" encoding="utf-8"?>
 <p:sld xmlns:a="http://schemas.openxmlformats.org/drawingml/2006/main" xmlns:r="http://schemas.openxmlformats.org/officeDocument/2006/relationships" xmlns:p="http://schemas.openxmlformats.org/presentationml/2006/main">
   <p:cSld>
     <p:spTree>
@@ -8803,7 +9073,7 @@
             <a:pPr rtl="0"/>
             <a:fld id="{A3F31473-23EB-4724-8B59-FE6D21D89FA4}" type="slidenum">
               <a:rPr lang="en-US" altLang="ko-KR" noProof="0" smtClean="0"/>
-              <a:t>13</a:t>
+              <a:t>14</a:t>
             </a:fld>
             <a:endParaRPr lang="en-US" altLang="ko-KR" noProof="0" dirty="0"/>
           </a:p>
@@ -8858,7 +9128,7 @@
 </p:sld>
 </file>
 
-<file path=ppt/slides/slide14.xml><?xml version="1.0" encoding="utf-8"?>
+<file path=ppt/slides/slide15.xml><?xml version="1.0" encoding="utf-8"?>
 <p:sld xmlns:a="http://schemas.openxmlformats.org/drawingml/2006/main" xmlns:r="http://schemas.openxmlformats.org/officeDocument/2006/relationships" xmlns:p="http://schemas.openxmlformats.org/presentationml/2006/main">
   <p:cSld>
     <p:spTree>
@@ -8959,7 +9229,7 @@
             <a:pPr rtl="0"/>
             <a:fld id="{A3F31473-23EB-4724-8B59-FE6D21D89FA4}" type="slidenum">
               <a:rPr lang="en-US" altLang="ko-KR" noProof="0" smtClean="0"/>
-              <a:t>14</a:t>
+              <a:t>15</a:t>
             </a:fld>
             <a:endParaRPr lang="en-US" altLang="ko-KR" noProof="0" dirty="0"/>
           </a:p>
@@ -9190,7 +9460,7 @@
 </p:sld>
 </file>
 
-<file path=ppt/slides/slide15.xml><?xml version="1.0" encoding="utf-8"?>
+<file path=ppt/slides/slide16.xml><?xml version="1.0" encoding="utf-8"?>
 <p:sld xmlns:a="http://schemas.openxmlformats.org/drawingml/2006/main" xmlns:r="http://schemas.openxmlformats.org/officeDocument/2006/relationships" xmlns:p="http://schemas.openxmlformats.org/presentationml/2006/main">
   <p:cSld>
     <p:spTree>
@@ -9225,7 +9495,7 @@
             <a:pPr rtl="0"/>
             <a:fld id="{A3F31473-23EB-4724-8B59-FE6D21D89FA4}" type="slidenum">
               <a:rPr lang="en-US" altLang="ko-KR" noProof="0" smtClean="0"/>
-              <a:t>15</a:t>
+              <a:t>16</a:t>
             </a:fld>
             <a:endParaRPr lang="en-US" altLang="ko-KR" noProof="0" dirty="0"/>
           </a:p>
@@ -9280,7 +9550,7 @@
 </p:sld>
 </file>
 
-<file path=ppt/slides/slide16.xml><?xml version="1.0" encoding="utf-8"?>
+<file path=ppt/slides/slide17.xml><?xml version="1.0" encoding="utf-8"?>
 <p:sld xmlns:a="http://schemas.openxmlformats.org/drawingml/2006/main" xmlns:r="http://schemas.openxmlformats.org/officeDocument/2006/relationships" xmlns:p="http://schemas.openxmlformats.org/presentationml/2006/main">
   <p:cSld>
     <p:spTree>
@@ -9315,7 +9585,7 @@
             <a:pPr rtl="0"/>
             <a:fld id="{A3F31473-23EB-4724-8B59-FE6D21D89FA4}" type="slidenum">
               <a:rPr lang="en-US" altLang="ko-KR" noProof="0" smtClean="0"/>
-              <a:t>16</a:t>
+              <a:t>17</a:t>
             </a:fld>
             <a:endParaRPr lang="en-US" altLang="ko-KR" noProof="0" dirty="0"/>
           </a:p>
@@ -9370,7 +9640,7 @@
 </p:sld>
 </file>
 
-<file path=ppt/slides/slide17.xml><?xml version="1.0" encoding="utf-8"?>
+<file path=ppt/slides/slide18.xml><?xml version="1.0" encoding="utf-8"?>
 <p:sld xmlns:a="http://schemas.openxmlformats.org/drawingml/2006/main" xmlns:r="http://schemas.openxmlformats.org/officeDocument/2006/relationships" xmlns:p="http://schemas.openxmlformats.org/presentationml/2006/main">
   <p:cSld>
     <p:spTree>
@@ -9417,7 +9687,7 @@
             <a:pPr rtl="0"/>
             <a:fld id="{A3F31473-23EB-4724-8B59-FE6D21D89FA4}" type="slidenum">
               <a:rPr lang="en-US" altLang="ko-KR" noProof="0" smtClean="0"/>
-              <a:t>17</a:t>
+              <a:t>18</a:t>
             </a:fld>
             <a:endParaRPr lang="en-US" altLang="ko-KR" noProof="0" dirty="0"/>
           </a:p>
@@ -9774,7 +10044,7 @@
 </p:sld>
 </file>
 
-<file path=ppt/slides/slide18.xml><?xml version="1.0" encoding="utf-8"?>
+<file path=ppt/slides/slide19.xml><?xml version="1.0" encoding="utf-8"?>
 <p:sld xmlns:a="http://schemas.openxmlformats.org/drawingml/2006/main" xmlns:r="http://schemas.openxmlformats.org/officeDocument/2006/relationships" xmlns:p="http://schemas.openxmlformats.org/presentationml/2006/main">
   <p:cSld>
     <p:spTree>
@@ -9815,7 +10085,7 @@
             <a:pPr rtl="0"/>
             <a:fld id="{A3F31473-23EB-4724-8B59-FE6D21D89FA4}" type="slidenum">
               <a:rPr lang="en-US" altLang="ko-KR" noProof="0" smtClean="0"/>
-              <a:t>18</a:t>
+              <a:t>19</a:t>
             </a:fld>
             <a:endParaRPr lang="en-US" altLang="ko-KR" noProof="0" dirty="0"/>
           </a:p>
@@ -9934,7 +10204,336 @@
 </p:sld>
 </file>
 
-<file path=ppt/slides/slide19.xml><?xml version="1.0" encoding="utf-8"?>
+<file path=ppt/slides/slide2.xml><?xml version="1.0" encoding="utf-8"?>
+<p:sld xmlns:a="http://schemas.openxmlformats.org/drawingml/2006/main" xmlns:r="http://schemas.openxmlformats.org/officeDocument/2006/relationships" xmlns:p="http://schemas.openxmlformats.org/presentationml/2006/main">
+  <p:cSld>
+    <p:spTree>
+      <p:nvGrpSpPr>
+        <p:cNvPr id="1" name="">
+          <a:extLst>
+            <a:ext uri="{FF2B5EF4-FFF2-40B4-BE49-F238E27FC236}">
+              <a16:creationId xmlns:a16="http://schemas.microsoft.com/office/drawing/2014/main" id="{7690E2C1-BB1A-4FCC-4EBC-8B540F598F5F}"/>
+            </a:ext>
+          </a:extLst>
+        </p:cNvPr>
+        <p:cNvGrpSpPr/>
+        <p:nvPr/>
+      </p:nvGrpSpPr>
+      <p:grpSpPr>
+        <a:xfrm>
+          <a:off x="0" y="0"/>
+          <a:ext cx="0" cy="0"/>
+          <a:chOff x="0" y="0"/>
+          <a:chExt cx="0" cy="0"/>
+        </a:xfrm>
+      </p:grpSpPr>
+      <p:sp>
+        <p:nvSpPr>
+          <p:cNvPr id="8" name="슬라이드 번호 개체 틀 7">
+            <a:extLst>
+              <a:ext uri="{FF2B5EF4-FFF2-40B4-BE49-F238E27FC236}">
+                <a16:creationId xmlns:a16="http://schemas.microsoft.com/office/drawing/2014/main" id="{4EF241B0-03F6-4174-6351-DEA7C3022824}"/>
+              </a:ext>
+            </a:extLst>
+          </p:cNvPr>
+          <p:cNvSpPr>
+            <a:spLocks noGrp="1"/>
+          </p:cNvSpPr>
+          <p:nvPr>
+            <p:ph type="sldNum" sz="quarter" idx="12"/>
+          </p:nvPr>
+        </p:nvSpPr>
+        <p:spPr/>
+        <p:txBody>
+          <a:bodyPr/>
+          <a:lstStyle/>
+          <a:p>
+            <a:pPr rtl="0"/>
+            <a:fld id="{A3F31473-23EB-4724-8B59-FE6D21D89FA4}" type="slidenum">
+              <a:rPr lang="en-US" altLang="ko-KR" noProof="0" smtClean="0"/>
+              <a:t>2</a:t>
+            </a:fld>
+            <a:endParaRPr lang="en-US" altLang="ko-KR" noProof="0" dirty="0"/>
+          </a:p>
+        </p:txBody>
+      </p:sp>
+      <p:pic>
+        <p:nvPicPr>
+          <p:cNvPr id="1030" name="Picture 6" descr="밤 시간 동안 등대의 실루엣">
+            <a:extLst>
+              <a:ext uri="{FF2B5EF4-FFF2-40B4-BE49-F238E27FC236}">
+                <a16:creationId xmlns:a16="http://schemas.microsoft.com/office/drawing/2014/main" id="{C722F41E-13EA-25B0-1FE1-218FAAE42E6C}"/>
+              </a:ext>
+            </a:extLst>
+          </p:cNvPr>
+          <p:cNvPicPr>
+            <a:picLocks noChangeAspect="1" noChangeArrowheads="1"/>
+          </p:cNvPicPr>
+          <p:nvPr/>
+        </p:nvPicPr>
+        <p:blipFill>
+          <a:blip r:embed="rId3" cstate="print">
+            <a:extLst>
+              <a:ext uri="{28A0092B-C50C-407E-A947-70E740481C1C}">
+                <a14:useLocalDpi xmlns:a14="http://schemas.microsoft.com/office/drawing/2010/main" val="0"/>
+              </a:ext>
+            </a:extLst>
+          </a:blip>
+          <a:srcRect/>
+          <a:stretch>
+            <a:fillRect/>
+          </a:stretch>
+        </p:blipFill>
+        <p:spPr bwMode="auto">
+          <a:xfrm>
+            <a:off x="477788" y="548679"/>
+            <a:ext cx="4104456" cy="6129017"/>
+          </a:xfrm>
+          <a:prstGeom prst="rect">
+            <a:avLst/>
+          </a:prstGeom>
+          <a:noFill/>
+          <a:extLst>
+            <a:ext uri="{909E8E84-426E-40DD-AFC4-6F175D3DCCD1}">
+              <a14:hiddenFill xmlns:a14="http://schemas.microsoft.com/office/drawing/2010/main">
+                <a:solidFill>
+                  <a:srgbClr val="FFFFFF"/>
+                </a:solidFill>
+              </a14:hiddenFill>
+            </a:ext>
+          </a:extLst>
+        </p:spPr>
+      </p:pic>
+      <p:sp>
+        <p:nvSpPr>
+          <p:cNvPr id="3" name="TextBox 2">
+            <a:extLst>
+              <a:ext uri="{FF2B5EF4-FFF2-40B4-BE49-F238E27FC236}">
+                <a16:creationId xmlns:a16="http://schemas.microsoft.com/office/drawing/2014/main" id="{9969E69D-4C2D-C812-DDC5-4721F324AC9B}"/>
+              </a:ext>
+            </a:extLst>
+          </p:cNvPr>
+          <p:cNvSpPr txBox="1"/>
+          <p:nvPr/>
+        </p:nvSpPr>
+        <p:spPr>
+          <a:xfrm>
+            <a:off x="5014292" y="1772816"/>
+            <a:ext cx="6840760" cy="3130409"/>
+          </a:xfrm>
+          <a:prstGeom prst="rect">
+            <a:avLst/>
+          </a:prstGeom>
+          <a:noFill/>
+        </p:spPr>
+        <p:txBody>
+          <a:bodyPr wrap="square">
+            <a:spAutoFit/>
+          </a:bodyPr>
+          <a:lstStyle/>
+          <a:p>
+            <a:pPr marL="285750" indent="-285750">
+              <a:lnSpc>
+                <a:spcPct val="250000"/>
+              </a:lnSpc>
+              <a:buFont typeface="Wingdings" panose="05000000000000000000" pitchFamily="2" charset="2"/>
+              <a:buChar char="v"/>
+            </a:pPr>
+            <a:r>
+              <a:rPr lang="ko-KR" altLang="en-US" sz="1600" dirty="0">
+                <a:latin typeface="한컴 말랑말랑 Bold" panose="020F0803000000000000" pitchFamily="50" charset="-127"/>
+                <a:ea typeface="한컴 말랑말랑 Bold" panose="020F0803000000000000" pitchFamily="50" charset="-127"/>
+              </a:rPr>
+              <a:t>통계는 항해사에게 </a:t>
+            </a:r>
+            <a:r>
+              <a:rPr lang="ko-KR" altLang="en-US" sz="1600" b="1" dirty="0">
+                <a:latin typeface="한컴 말랑말랑 Bold" panose="020F0803000000000000" pitchFamily="50" charset="-127"/>
+                <a:ea typeface="한컴 말랑말랑 Bold" panose="020F0803000000000000" pitchFamily="50" charset="-127"/>
+              </a:rPr>
+              <a:t>등대</a:t>
+            </a:r>
+            <a:r>
+              <a:rPr lang="ko-KR" altLang="en-US" sz="1600" dirty="0">
+                <a:latin typeface="한컴 말랑말랑 Bold" panose="020F0803000000000000" pitchFamily="50" charset="-127"/>
+                <a:ea typeface="한컴 말랑말랑 Bold" panose="020F0803000000000000" pitchFamily="50" charset="-127"/>
+              </a:rPr>
+              <a:t>와 같다</a:t>
+            </a:r>
+            <a:r>
+              <a:rPr lang="en-US" altLang="ko-KR" sz="1600" dirty="0">
+                <a:latin typeface="한컴 말랑말랑 Bold" panose="020F0803000000000000" pitchFamily="50" charset="-127"/>
+                <a:ea typeface="한컴 말랑말랑 Bold" panose="020F0803000000000000" pitchFamily="50" charset="-127"/>
+              </a:rPr>
+              <a:t>. </a:t>
+            </a:r>
+          </a:p>
+          <a:p>
+            <a:pPr marL="285750" indent="-285750">
+              <a:lnSpc>
+                <a:spcPct val="250000"/>
+              </a:lnSpc>
+              <a:buFont typeface="Wingdings" panose="05000000000000000000" pitchFamily="2" charset="2"/>
+              <a:buChar char="v"/>
+            </a:pPr>
+            <a:r>
+              <a:rPr lang="ko-KR" altLang="en-US" sz="1600" dirty="0">
+                <a:latin typeface="한컴 말랑말랑 Bold" panose="020F0803000000000000" pitchFamily="50" charset="-127"/>
+                <a:ea typeface="한컴 말랑말랑 Bold" panose="020F0803000000000000" pitchFamily="50" charset="-127"/>
+              </a:rPr>
+              <a:t>국 한 그릇의 맛을 알기 위해 다 마셔볼 필요는 없다</a:t>
+            </a:r>
+            <a:r>
+              <a:rPr lang="en-US" altLang="ko-KR" sz="1600" dirty="0">
+                <a:latin typeface="한컴 말랑말랑 Bold" panose="020F0803000000000000" pitchFamily="50" charset="-127"/>
+                <a:ea typeface="한컴 말랑말랑 Bold" panose="020F0803000000000000" pitchFamily="50" charset="-127"/>
+              </a:rPr>
+              <a:t>.</a:t>
+            </a:r>
+          </a:p>
+          <a:p>
+            <a:pPr marL="285750" indent="-285750">
+              <a:lnSpc>
+                <a:spcPct val="250000"/>
+              </a:lnSpc>
+              <a:buFont typeface="Wingdings" panose="05000000000000000000" pitchFamily="2" charset="2"/>
+              <a:buChar char="v"/>
+            </a:pPr>
+            <a:r>
+              <a:rPr lang="ko-KR" altLang="en-US" sz="1600" dirty="0">
+                <a:latin typeface="한컴 말랑말랑 Bold" panose="020F0803000000000000" pitchFamily="50" charset="-127"/>
+                <a:ea typeface="한컴 말랑말랑 Bold" panose="020F0803000000000000" pitchFamily="50" charset="-127"/>
+              </a:rPr>
+              <a:t>숫자는 </a:t>
+            </a:r>
+            <a:r>
+              <a:rPr lang="ko-KR" altLang="en-US" sz="1600" b="1" dirty="0">
+                <a:latin typeface="한컴 말랑말랑 Bold" panose="020F0803000000000000" pitchFamily="50" charset="-127"/>
+                <a:ea typeface="한컴 말랑말랑 Bold" panose="020F0803000000000000" pitchFamily="50" charset="-127"/>
+              </a:rPr>
+              <a:t>스스로 말하지 않는다</a:t>
+            </a:r>
+            <a:r>
+              <a:rPr lang="en-US" altLang="ko-KR" sz="1600" b="1" dirty="0">
+                <a:latin typeface="한컴 말랑말랑 Bold" panose="020F0803000000000000" pitchFamily="50" charset="-127"/>
+                <a:ea typeface="한컴 말랑말랑 Bold" panose="020F0803000000000000" pitchFamily="50" charset="-127"/>
+              </a:rPr>
+              <a:t>. </a:t>
+            </a:r>
+            <a:r>
+              <a:rPr lang="ko-KR" altLang="en-US" sz="1600" b="1" dirty="0">
+                <a:latin typeface="한컴 말랑말랑 Bold" panose="020F0803000000000000" pitchFamily="50" charset="-127"/>
+                <a:ea typeface="한컴 말랑말랑 Bold" panose="020F0803000000000000" pitchFamily="50" charset="-127"/>
+              </a:rPr>
+              <a:t>우리가 그들에게 </a:t>
+            </a:r>
+            <a:r>
+              <a:rPr lang="ko-KR" altLang="en-US" sz="1600" dirty="0">
+                <a:latin typeface="한컴 말랑말랑 Bold" panose="020F0803000000000000" pitchFamily="50" charset="-127"/>
+                <a:ea typeface="한컴 말랑말랑 Bold" panose="020F0803000000000000" pitchFamily="50" charset="-127"/>
+              </a:rPr>
+              <a:t>목소리를 부여하는 것이다</a:t>
+            </a:r>
+            <a:r>
+              <a:rPr lang="en-US" altLang="ko-KR" sz="1600" dirty="0">
+                <a:latin typeface="한컴 말랑말랑 Bold" panose="020F0803000000000000" pitchFamily="50" charset="-127"/>
+                <a:ea typeface="한컴 말랑말랑 Bold" panose="020F0803000000000000" pitchFamily="50" charset="-127"/>
+              </a:rPr>
+              <a:t>.</a:t>
+            </a:r>
+          </a:p>
+          <a:p>
+            <a:pPr marL="285750" indent="-285750">
+              <a:lnSpc>
+                <a:spcPct val="250000"/>
+              </a:lnSpc>
+              <a:buFont typeface="Wingdings" panose="05000000000000000000" pitchFamily="2" charset="2"/>
+              <a:buChar char="v"/>
+            </a:pPr>
+            <a:r>
+              <a:rPr lang="ko-KR" altLang="en-US" sz="1600" dirty="0">
+                <a:latin typeface="한컴 말랑말랑 Bold" panose="020F0803000000000000" pitchFamily="50" charset="-127"/>
+                <a:ea typeface="한컴 말랑말랑 Bold" panose="020F0803000000000000" pitchFamily="50" charset="-127"/>
+              </a:rPr>
+              <a:t>데이터를 충분히 고문한다면</a:t>
+            </a:r>
+            <a:r>
+              <a:rPr lang="en-US" altLang="ko-KR" sz="1600" dirty="0">
+                <a:latin typeface="한컴 말랑말랑 Bold" panose="020F0803000000000000" pitchFamily="50" charset="-127"/>
+                <a:ea typeface="한컴 말랑말랑 Bold" panose="020F0803000000000000" pitchFamily="50" charset="-127"/>
+              </a:rPr>
+              <a:t>, </a:t>
+            </a:r>
+            <a:r>
+              <a:rPr lang="ko-KR" altLang="en-US" sz="1600" dirty="0">
+                <a:latin typeface="한컴 말랑말랑 Bold" panose="020F0803000000000000" pitchFamily="50" charset="-127"/>
+                <a:ea typeface="한컴 말랑말랑 Bold" panose="020F0803000000000000" pitchFamily="50" charset="-127"/>
+              </a:rPr>
+              <a:t>그것은 무엇이든 고백할 것이다</a:t>
+            </a:r>
+            <a:r>
+              <a:rPr lang="en-US" altLang="ko-KR" sz="1600" dirty="0">
+                <a:latin typeface="한컴 말랑말랑 Bold" panose="020F0803000000000000" pitchFamily="50" charset="-127"/>
+                <a:ea typeface="한컴 말랑말랑 Bold" panose="020F0803000000000000" pitchFamily="50" charset="-127"/>
+              </a:rPr>
+              <a:t>.</a:t>
+            </a:r>
+          </a:p>
+          <a:p>
+            <a:pPr marL="285750" indent="-285750">
+              <a:lnSpc>
+                <a:spcPct val="250000"/>
+              </a:lnSpc>
+              <a:buFont typeface="Wingdings" panose="05000000000000000000" pitchFamily="2" charset="2"/>
+              <a:buChar char="v"/>
+            </a:pPr>
+            <a:r>
+              <a:rPr lang="ko-KR" altLang="en-US" sz="1600" dirty="0">
+                <a:latin typeface="한컴 말랑말랑 Bold" panose="020F0803000000000000" pitchFamily="50" charset="-127"/>
+                <a:ea typeface="한컴 말랑말랑 Bold" panose="020F0803000000000000" pitchFamily="50" charset="-127"/>
+              </a:rPr>
+              <a:t>통계학의 기원</a:t>
+            </a:r>
+            <a:r>
+              <a:rPr lang="en-US" altLang="ko-KR" sz="1600" dirty="0">
+                <a:latin typeface="한컴 말랑말랑 Bold" panose="020F0803000000000000" pitchFamily="50" charset="-127"/>
+                <a:ea typeface="한컴 말랑말랑 Bold" panose="020F0803000000000000" pitchFamily="50" charset="-127"/>
+              </a:rPr>
+              <a:t>?</a:t>
+            </a:r>
+            <a:endParaRPr lang="ko-KR" altLang="en-US" sz="1600" dirty="0">
+              <a:latin typeface="한컴 말랑말랑 Bold" panose="020F0803000000000000" pitchFamily="50" charset="-127"/>
+              <a:ea typeface="한컴 말랑말랑 Bold" panose="020F0803000000000000" pitchFamily="50" charset="-127"/>
+            </a:endParaRPr>
+          </a:p>
+        </p:txBody>
+      </p:sp>
+    </p:spTree>
+    <p:extLst>
+      <p:ext uri="{BB962C8B-B14F-4D97-AF65-F5344CB8AC3E}">
+        <p14:creationId xmlns:p14="http://schemas.microsoft.com/office/powerpoint/2010/main" val="810907724"/>
+      </p:ext>
+    </p:extLst>
+  </p:cSld>
+  <p:clrMapOvr>
+    <a:masterClrMapping/>
+  </p:clrMapOvr>
+  <mc:AlternateContent xmlns:mc="http://schemas.openxmlformats.org/markup-compatibility/2006" xmlns:p14="http://schemas.microsoft.com/office/powerpoint/2010/main">
+    <mc:Choice Requires="p14">
+      <p:transition spd="med" p14:dur="700">
+        <p:fade/>
+      </p:transition>
+    </mc:Choice>
+    <mc:Fallback xmlns="">
+      <p:transition spd="med">
+        <p:fade/>
+      </p:transition>
+    </mc:Fallback>
+  </mc:AlternateContent>
+</p:sld>
+</file>
+
+<file path=ppt/slides/slide20.xml><?xml version="1.0" encoding="utf-8"?>
 <p:sld xmlns:a="http://schemas.openxmlformats.org/drawingml/2006/main" xmlns:r="http://schemas.openxmlformats.org/officeDocument/2006/relationships" xmlns:p="http://schemas.openxmlformats.org/presentationml/2006/main">
   <p:cSld>
     <p:spTree>
@@ -9981,7 +10580,7 @@
             <a:pPr rtl="0"/>
             <a:fld id="{A3F31473-23EB-4724-8B59-FE6D21D89FA4}" type="slidenum">
               <a:rPr lang="en-US" altLang="ko-KR" noProof="0" smtClean="0"/>
-              <a:t>19</a:t>
+              <a:t>20</a:t>
             </a:fld>
             <a:endParaRPr lang="en-US" altLang="ko-KR" noProof="0" dirty="0"/>
           </a:p>
@@ -10226,7 +10825,7 @@
 </p:sld>
 </file>
 
-<file path=ppt/slides/slide2.xml><?xml version="1.0" encoding="utf-8"?>
+<file path=ppt/slides/slide21.xml><?xml version="1.0" encoding="utf-8"?>
 <p:sld xmlns:a="http://schemas.openxmlformats.org/drawingml/2006/main" xmlns:r="http://schemas.openxmlformats.org/officeDocument/2006/relationships" xmlns:p="http://schemas.openxmlformats.org/presentationml/2006/main">
   <p:cSld>
     <p:spTree>
@@ -10245,7 +10844,7 @@
       </p:grpSpPr>
       <p:sp>
         <p:nvSpPr>
-          <p:cNvPr id="8" name="슬라이드 번호 개체 틀 7"/>
+          <p:cNvPr id="2" name="슬라이드 번호 개체 틀 1"/>
           <p:cNvSpPr>
             <a:spLocks noGrp="1"/>
           </p:cNvSpPr>
@@ -10261,273 +10860,7 @@
             <a:pPr rtl="0"/>
             <a:fld id="{A3F31473-23EB-4724-8B59-FE6D21D89FA4}" type="slidenum">
               <a:rPr lang="en-US" altLang="ko-KR" noProof="0" smtClean="0"/>
-              <a:t>2</a:t>
-            </a:fld>
-            <a:endParaRPr lang="en-US" altLang="ko-KR" noProof="0" dirty="0"/>
-          </a:p>
-        </p:txBody>
-      </p:sp>
-      <p:sp>
-        <p:nvSpPr>
-          <p:cNvPr id="2" name="TextBox 1">
-            <a:extLst>
-              <a:ext uri="{FF2B5EF4-FFF2-40B4-BE49-F238E27FC236}">
-                <a16:creationId xmlns:a16="http://schemas.microsoft.com/office/drawing/2014/main" id="{B0754AEB-7EBE-A397-BEA5-D61762102166}"/>
-              </a:ext>
-            </a:extLst>
-          </p:cNvPr>
-          <p:cNvSpPr txBox="1"/>
-          <p:nvPr/>
-        </p:nvSpPr>
-        <p:spPr>
-          <a:xfrm>
-            <a:off x="1629916" y="620688"/>
-            <a:ext cx="8928992" cy="5131020"/>
-          </a:xfrm>
-          <a:prstGeom prst="rect">
-            <a:avLst/>
-          </a:prstGeom>
-          <a:noFill/>
-        </p:spPr>
-        <p:txBody>
-          <a:bodyPr wrap="square" rtlCol="0">
-            <a:spAutoFit/>
-          </a:bodyPr>
-          <a:lstStyle/>
-          <a:p>
-            <a:pPr>
-              <a:lnSpc>
-                <a:spcPct val="200000"/>
-              </a:lnSpc>
-            </a:pPr>
-            <a:r>
-              <a:rPr lang="ko-KR" altLang="en-US" sz="4000" b="1" dirty="0">
-                <a:latin typeface="한컴 말랑말랑 Bold" panose="020F0803000000000000" pitchFamily="50" charset="-127"/>
-                <a:ea typeface="한컴 말랑말랑 Bold" panose="020F0803000000000000" pitchFamily="50" charset="-127"/>
-              </a:rPr>
-              <a:t>목차</a:t>
-            </a:r>
-            <a:endParaRPr lang="en-US" altLang="ko-KR" sz="4000" b="1" dirty="0">
-              <a:latin typeface="한컴 말랑말랑 Bold" panose="020F0803000000000000" pitchFamily="50" charset="-127"/>
-              <a:ea typeface="한컴 말랑말랑 Bold" panose="020F0803000000000000" pitchFamily="50" charset="-127"/>
-            </a:endParaRPr>
-          </a:p>
-          <a:p>
-            <a:pPr marL="514350" indent="-514350">
-              <a:lnSpc>
-                <a:spcPct val="200000"/>
-              </a:lnSpc>
-              <a:buAutoNum type="arabicPeriod"/>
-            </a:pPr>
-            <a:r>
-              <a:rPr lang="ko-KR" altLang="en-US" sz="2000" b="1" dirty="0">
-                <a:latin typeface="한컴 말랑말랑 Bold" panose="020F0803000000000000" pitchFamily="50" charset="-127"/>
-                <a:ea typeface="한컴 말랑말랑 Bold" panose="020F0803000000000000" pitchFamily="50" charset="-127"/>
-              </a:rPr>
-              <a:t>통계학</a:t>
-            </a:r>
-            <a:r>
-              <a:rPr lang="en-US" altLang="ko-KR" sz="2000" b="1" dirty="0">
-                <a:latin typeface="한컴 말랑말랑 Bold" panose="020F0803000000000000" pitchFamily="50" charset="-127"/>
-                <a:ea typeface="한컴 말랑말랑 Bold" panose="020F0803000000000000" pitchFamily="50" charset="-127"/>
-              </a:rPr>
-              <a:t>(Statistics)</a:t>
-            </a:r>
-          </a:p>
-          <a:p>
-            <a:pPr marL="514350" indent="-514350">
-              <a:lnSpc>
-                <a:spcPct val="200000"/>
-              </a:lnSpc>
-              <a:buAutoNum type="arabicPeriod"/>
-            </a:pPr>
-            <a:r>
-              <a:rPr lang="ko-KR" altLang="en-US" sz="2000" b="1" dirty="0">
-                <a:latin typeface="한컴 말랑말랑 Bold" panose="020F0803000000000000" pitchFamily="50" charset="-127"/>
-                <a:ea typeface="한컴 말랑말랑 Bold" panose="020F0803000000000000" pitchFamily="50" charset="-127"/>
-              </a:rPr>
-              <a:t>모집단과</a:t>
-            </a:r>
-            <a:r>
-              <a:rPr lang="en-US" altLang="ko-KR" sz="2000" b="1" dirty="0">
-                <a:latin typeface="한컴 말랑말랑 Bold" panose="020F0803000000000000" pitchFamily="50" charset="-127"/>
-                <a:ea typeface="한컴 말랑말랑 Bold" panose="020F0803000000000000" pitchFamily="50" charset="-127"/>
-              </a:rPr>
-              <a:t> </a:t>
-            </a:r>
-            <a:r>
-              <a:rPr lang="ko-KR" altLang="en-US" sz="2000" b="1" dirty="0">
-                <a:latin typeface="한컴 말랑말랑 Bold" panose="020F0803000000000000" pitchFamily="50" charset="-127"/>
-                <a:ea typeface="한컴 말랑말랑 Bold" panose="020F0803000000000000" pitchFamily="50" charset="-127"/>
-              </a:rPr>
-              <a:t>표본조사 방법</a:t>
-            </a:r>
-            <a:endParaRPr lang="en-US" altLang="ko-KR" sz="2000" b="1" dirty="0">
-              <a:latin typeface="한컴 말랑말랑 Bold" panose="020F0803000000000000" pitchFamily="50" charset="-127"/>
-              <a:ea typeface="한컴 말랑말랑 Bold" panose="020F0803000000000000" pitchFamily="50" charset="-127"/>
-            </a:endParaRPr>
-          </a:p>
-          <a:p>
-            <a:pPr marL="514350" indent="-514350">
-              <a:lnSpc>
-                <a:spcPct val="200000"/>
-              </a:lnSpc>
-              <a:buAutoNum type="arabicPeriod"/>
-            </a:pPr>
-            <a:r>
-              <a:rPr lang="ko-KR" altLang="en-US" sz="2000" b="1" dirty="0">
-                <a:latin typeface="한컴 말랑말랑 Bold" panose="020F0803000000000000" pitchFamily="50" charset="-127"/>
-                <a:ea typeface="한컴 말랑말랑 Bold" panose="020F0803000000000000" pitchFamily="50" charset="-127"/>
-              </a:rPr>
-              <a:t>데이터의 종류</a:t>
-            </a:r>
-            <a:r>
-              <a:rPr lang="en-US" altLang="ko-KR" sz="2000" b="1" dirty="0">
-                <a:latin typeface="한컴 말랑말랑 Bold" panose="020F0803000000000000" pitchFamily="50" charset="-127"/>
-                <a:ea typeface="한컴 말랑말랑 Bold" panose="020F0803000000000000" pitchFamily="50" charset="-127"/>
-              </a:rPr>
-              <a:t>(Data type)</a:t>
-            </a:r>
-          </a:p>
-          <a:p>
-            <a:pPr marL="514350" indent="-514350">
-              <a:lnSpc>
-                <a:spcPct val="200000"/>
-              </a:lnSpc>
-              <a:buAutoNum type="arabicPeriod"/>
-            </a:pPr>
-            <a:r>
-              <a:rPr lang="ko-KR" altLang="en-US" sz="2000" b="1" dirty="0">
-                <a:latin typeface="한컴 말랑말랑 Bold" panose="020F0803000000000000" pitchFamily="50" charset="-127"/>
-                <a:ea typeface="한컴 말랑말랑 Bold" panose="020F0803000000000000" pitchFamily="50" charset="-127"/>
-              </a:rPr>
-              <a:t>주요</a:t>
-            </a:r>
-            <a:r>
-              <a:rPr lang="en-US" altLang="ko-KR" sz="2000" b="1" dirty="0">
-                <a:latin typeface="한컴 말랑말랑 Bold" panose="020F0803000000000000" pitchFamily="50" charset="-127"/>
-                <a:ea typeface="한컴 말랑말랑 Bold" panose="020F0803000000000000" pitchFamily="50" charset="-127"/>
-              </a:rPr>
-              <a:t> </a:t>
-            </a:r>
-            <a:r>
-              <a:rPr lang="ko-KR" altLang="en-US" sz="2000" b="1" dirty="0">
-                <a:latin typeface="한컴 말랑말랑 Bold" panose="020F0803000000000000" pitchFamily="50" charset="-127"/>
-                <a:ea typeface="한컴 말랑말랑 Bold" panose="020F0803000000000000" pitchFamily="50" charset="-127"/>
-              </a:rPr>
-              <a:t>통계량</a:t>
-            </a:r>
-            <a:r>
-              <a:rPr lang="en-US" altLang="ko-KR" sz="2000" b="1" dirty="0">
-                <a:latin typeface="한컴 말랑말랑 Bold" panose="020F0803000000000000" pitchFamily="50" charset="-127"/>
-                <a:ea typeface="한컴 말랑말랑 Bold" panose="020F0803000000000000" pitchFamily="50" charset="-127"/>
-              </a:rPr>
-              <a:t>(Statistic)</a:t>
-            </a:r>
-          </a:p>
-          <a:p>
-            <a:pPr marL="514350" indent="-514350">
-              <a:lnSpc>
-                <a:spcPct val="200000"/>
-              </a:lnSpc>
-              <a:buAutoNum type="arabicPeriod"/>
-            </a:pPr>
-            <a:r>
-              <a:rPr lang="ko-KR" altLang="en-US" sz="2000" b="1" dirty="0" err="1">
-                <a:latin typeface="한컴 말랑말랑 Bold" panose="020F0803000000000000" pitchFamily="50" charset="-127"/>
-                <a:ea typeface="한컴 말랑말랑 Bold" panose="020F0803000000000000" pitchFamily="50" charset="-127"/>
-              </a:rPr>
-              <a:t>다변량</a:t>
-            </a:r>
-            <a:r>
-              <a:rPr lang="ko-KR" altLang="en-US" sz="2000" b="1" dirty="0">
-                <a:latin typeface="한컴 말랑말랑 Bold" panose="020F0803000000000000" pitchFamily="50" charset="-127"/>
-                <a:ea typeface="한컴 말랑말랑 Bold" panose="020F0803000000000000" pitchFamily="50" charset="-127"/>
-              </a:rPr>
-              <a:t> 분석</a:t>
-            </a:r>
-            <a:r>
-              <a:rPr lang="en-US" altLang="ko-KR" sz="2000" b="1" dirty="0">
-                <a:latin typeface="한컴 말랑말랑 Bold" panose="020F0803000000000000" pitchFamily="50" charset="-127"/>
-                <a:ea typeface="한컴 말랑말랑 Bold" panose="020F0803000000000000" pitchFamily="50" charset="-127"/>
-              </a:rPr>
-              <a:t>(Multivariate Analysis)</a:t>
-            </a:r>
-          </a:p>
-          <a:p>
-            <a:pPr>
-              <a:lnSpc>
-                <a:spcPct val="200000"/>
-              </a:lnSpc>
-            </a:pPr>
-            <a:endParaRPr lang="ko-KR" altLang="en-US" sz="2800" b="1" dirty="0">
-              <a:latin typeface="한컴 말랑말랑 Bold" panose="020F0803000000000000" pitchFamily="50" charset="-127"/>
-              <a:ea typeface="한컴 말랑말랑 Bold" panose="020F0803000000000000" pitchFamily="50" charset="-127"/>
-            </a:endParaRPr>
-          </a:p>
-        </p:txBody>
-      </p:sp>
-    </p:spTree>
-    <p:extLst>
-      <p:ext uri="{BB962C8B-B14F-4D97-AF65-F5344CB8AC3E}">
-        <p14:creationId xmlns:p14="http://schemas.microsoft.com/office/powerpoint/2010/main" val="1126723429"/>
-      </p:ext>
-    </p:extLst>
-  </p:cSld>
-  <p:clrMapOvr>
-    <a:masterClrMapping/>
-  </p:clrMapOvr>
-  <mc:AlternateContent xmlns:mc="http://schemas.openxmlformats.org/markup-compatibility/2006" xmlns:p14="http://schemas.microsoft.com/office/powerpoint/2010/main">
-    <mc:Choice Requires="p14">
-      <p:transition spd="med" p14:dur="700">
-        <p:fade/>
-      </p:transition>
-    </mc:Choice>
-    <mc:Fallback xmlns="">
-      <p:transition spd="med">
-        <p:fade/>
-      </p:transition>
-    </mc:Fallback>
-  </mc:AlternateContent>
-</p:sld>
-</file>
-
-<file path=ppt/slides/slide20.xml><?xml version="1.0" encoding="utf-8"?>
-<p:sld xmlns:a="http://schemas.openxmlformats.org/drawingml/2006/main" xmlns:r="http://schemas.openxmlformats.org/officeDocument/2006/relationships" xmlns:p="http://schemas.openxmlformats.org/presentationml/2006/main">
-  <p:cSld>
-    <p:spTree>
-      <p:nvGrpSpPr>
-        <p:cNvPr id="1" name=""/>
-        <p:cNvGrpSpPr/>
-        <p:nvPr/>
-      </p:nvGrpSpPr>
-      <p:grpSpPr>
-        <a:xfrm>
-          <a:off x="0" y="0"/>
-          <a:ext cx="0" cy="0"/>
-          <a:chOff x="0" y="0"/>
-          <a:chExt cx="0" cy="0"/>
-        </a:xfrm>
-      </p:grpSpPr>
-      <p:sp>
-        <p:nvSpPr>
-          <p:cNvPr id="2" name="슬라이드 번호 개체 틀 1"/>
-          <p:cNvSpPr>
-            <a:spLocks noGrp="1"/>
-          </p:cNvSpPr>
-          <p:nvPr>
-            <p:ph type="sldNum" sz="quarter" idx="12"/>
-          </p:nvPr>
-        </p:nvSpPr>
-        <p:spPr/>
-        <p:txBody>
-          <a:bodyPr/>
-          <a:lstStyle/>
-          <a:p>
-            <a:pPr rtl="0"/>
-            <a:fld id="{A3F31473-23EB-4724-8B59-FE6D21D89FA4}" type="slidenum">
-              <a:rPr lang="en-US" altLang="ko-KR" noProof="0" smtClean="0"/>
-              <a:t>20</a:t>
+              <a:t>21</a:t>
             </a:fld>
             <a:endParaRPr lang="en-US" altLang="ko-KR" noProof="0" dirty="0"/>
           </a:p>
@@ -10678,7 +11011,7 @@
 </p:sld>
 </file>
 
-<file path=ppt/slides/slide21.xml><?xml version="1.0" encoding="utf-8"?>
+<file path=ppt/slides/slide22.xml><?xml version="1.0" encoding="utf-8"?>
 <p:sld xmlns:a="http://schemas.openxmlformats.org/drawingml/2006/main" xmlns:r="http://schemas.openxmlformats.org/officeDocument/2006/relationships" xmlns:p="http://schemas.openxmlformats.org/presentationml/2006/main">
   <p:cSld>
     <p:spTree>
@@ -10713,7 +11046,7 @@
             <a:pPr rtl="0"/>
             <a:fld id="{A3F31473-23EB-4724-8B59-FE6D21D89FA4}" type="slidenum">
               <a:rPr lang="en-US" altLang="ko-KR" noProof="0" smtClean="0"/>
-              <a:t>21</a:t>
+              <a:t>22</a:t>
             </a:fld>
             <a:endParaRPr lang="en-US" altLang="ko-KR" noProof="0" dirty="0"/>
           </a:p>
@@ -10930,7 +11263,7 @@
 </p:sld>
 </file>
 
-<file path=ppt/slides/slide22.xml><?xml version="1.0" encoding="utf-8"?>
+<file path=ppt/slides/slide23.xml><?xml version="1.0" encoding="utf-8"?>
 <p:sld xmlns:a="http://schemas.openxmlformats.org/drawingml/2006/main" xmlns:r="http://schemas.openxmlformats.org/officeDocument/2006/relationships" xmlns:p="http://schemas.openxmlformats.org/presentationml/2006/main">
   <p:cSld>
     <p:spTree>
@@ -10965,7 +11298,7 @@
             <a:pPr rtl="0"/>
             <a:fld id="{A3F31473-23EB-4724-8B59-FE6D21D89FA4}" type="slidenum">
               <a:rPr lang="en-US" altLang="ko-KR" noProof="0" smtClean="0"/>
-              <a:t>22</a:t>
+              <a:t>23</a:t>
             </a:fld>
             <a:endParaRPr lang="en-US" altLang="ko-KR" noProof="0" dirty="0"/>
           </a:p>
@@ -11020,7 +11353,7 @@
 </p:sld>
 </file>
 
-<file path=ppt/slides/slide23.xml><?xml version="1.0" encoding="utf-8"?>
+<file path=ppt/slides/slide24.xml><?xml version="1.0" encoding="utf-8"?>
 <p:sld xmlns:a="http://schemas.openxmlformats.org/drawingml/2006/main" xmlns:r="http://schemas.openxmlformats.org/officeDocument/2006/relationships" xmlns:p="http://schemas.openxmlformats.org/presentationml/2006/main">
   <p:cSld>
     <p:spTree>
@@ -11055,7 +11388,7 @@
             <a:pPr rtl="0"/>
             <a:fld id="{A3F31473-23EB-4724-8B59-FE6D21D89FA4}" type="slidenum">
               <a:rPr lang="en-US" altLang="ko-KR" noProof="0" smtClean="0"/>
-              <a:t>23</a:t>
+              <a:t>24</a:t>
             </a:fld>
             <a:endParaRPr lang="en-US" altLang="ko-KR" noProof="0" dirty="0"/>
           </a:p>
@@ -11110,7 +11443,7 @@
 </p:sld>
 </file>
 
-<file path=ppt/slides/slide24.xml><?xml version="1.0" encoding="utf-8"?>
+<file path=ppt/slides/slide25.xml><?xml version="1.0" encoding="utf-8"?>
 <p:sld xmlns:a="http://schemas.openxmlformats.org/drawingml/2006/main" xmlns:r="http://schemas.openxmlformats.org/officeDocument/2006/relationships" xmlns:p="http://schemas.openxmlformats.org/presentationml/2006/main">
   <p:cSld>
     <p:spTree>
@@ -11145,7 +11478,7 @@
             <a:pPr rtl="0"/>
             <a:fld id="{A3F31473-23EB-4724-8B59-FE6D21D89FA4}" type="slidenum">
               <a:rPr lang="en-US" altLang="ko-KR" noProof="0" smtClean="0"/>
-              <a:t>24</a:t>
+              <a:t>25</a:t>
             </a:fld>
             <a:endParaRPr lang="en-US" altLang="ko-KR" noProof="0" dirty="0"/>
           </a:p>
@@ -11200,7 +11533,7 @@
 </p:sld>
 </file>
 
-<file path=ppt/slides/slide25.xml><?xml version="1.0" encoding="utf-8"?>
+<file path=ppt/slides/slide26.xml><?xml version="1.0" encoding="utf-8"?>
 <p:sld xmlns:a="http://schemas.openxmlformats.org/drawingml/2006/main" xmlns:r="http://schemas.openxmlformats.org/officeDocument/2006/relationships" xmlns:p="http://schemas.openxmlformats.org/presentationml/2006/main">
   <p:cSld>
     <p:spTree>
@@ -11235,7 +11568,7 @@
             <a:pPr rtl="0"/>
             <a:fld id="{A3F31473-23EB-4724-8B59-FE6D21D89FA4}" type="slidenum">
               <a:rPr lang="en-US" altLang="ko-KR" noProof="0" smtClean="0"/>
-              <a:t>25</a:t>
+              <a:t>26</a:t>
             </a:fld>
             <a:endParaRPr lang="en-US" altLang="ko-KR" noProof="0" dirty="0"/>
           </a:p>
@@ -11290,7 +11623,7 @@
 </p:sld>
 </file>
 
-<file path=ppt/slides/slide26.xml><?xml version="1.0" encoding="utf-8"?>
+<file path=ppt/slides/slide27.xml><?xml version="1.0" encoding="utf-8"?>
 <p:sld xmlns:a="http://schemas.openxmlformats.org/drawingml/2006/main" xmlns:r="http://schemas.openxmlformats.org/officeDocument/2006/relationships" xmlns:p="http://schemas.openxmlformats.org/presentationml/2006/main">
   <p:cSld>
     <p:spTree>
@@ -11325,7 +11658,7 @@
             <a:pPr rtl="0"/>
             <a:fld id="{A3F31473-23EB-4724-8B59-FE6D21D89FA4}" type="slidenum">
               <a:rPr lang="en-US" altLang="ko-KR" noProof="0" smtClean="0"/>
-              <a:t>26</a:t>
+              <a:t>27</a:t>
             </a:fld>
             <a:endParaRPr lang="en-US" altLang="ko-KR" noProof="0" dirty="0"/>
           </a:p>
@@ -11380,7 +11713,7 @@
 </p:sld>
 </file>
 
-<file path=ppt/slides/slide27.xml><?xml version="1.0" encoding="utf-8"?>
+<file path=ppt/slides/slide28.xml><?xml version="1.0" encoding="utf-8"?>
 <p:sld xmlns:a="http://schemas.openxmlformats.org/drawingml/2006/main" xmlns:r="http://schemas.openxmlformats.org/officeDocument/2006/relationships" xmlns:p="http://schemas.openxmlformats.org/presentationml/2006/main">
   <p:cSld>
     <p:spTree>
@@ -11415,7 +11748,7 @@
             <a:pPr rtl="0"/>
             <a:fld id="{A3F31473-23EB-4724-8B59-FE6D21D89FA4}" type="slidenum">
               <a:rPr lang="en-US" altLang="ko-KR" noProof="0" smtClean="0"/>
-              <a:t>27</a:t>
+              <a:t>28</a:t>
             </a:fld>
             <a:endParaRPr lang="en-US" altLang="ko-KR" noProof="0" dirty="0"/>
           </a:p>
@@ -11470,7 +11803,7 @@
 </p:sld>
 </file>
 
-<file path=ppt/slides/slide28.xml><?xml version="1.0" encoding="utf-8"?>
+<file path=ppt/slides/slide29.xml><?xml version="1.0" encoding="utf-8"?>
 <p:sld xmlns:a="http://schemas.openxmlformats.org/drawingml/2006/main" xmlns:r="http://schemas.openxmlformats.org/officeDocument/2006/relationships" xmlns:p="http://schemas.openxmlformats.org/presentationml/2006/main">
   <p:cSld>
     <p:spTree>
@@ -11517,7 +11850,7 @@
             <a:pPr rtl="0"/>
             <a:fld id="{A3F31473-23EB-4724-8B59-FE6D21D89FA4}" type="slidenum">
               <a:rPr lang="en-US" altLang="ko-KR" noProof="0" smtClean="0"/>
-              <a:t>28</a:t>
+              <a:t>29</a:t>
             </a:fld>
             <a:endParaRPr lang="en-US" altLang="ko-KR" noProof="0" dirty="0"/>
           </a:p>
@@ -12003,7 +12336,7 @@
 </p:sld>
 </file>
 
-<file path=ppt/slides/slide29.xml><?xml version="1.0" encoding="utf-8"?>
+<file path=ppt/slides/slide3.xml><?xml version="1.0" encoding="utf-8"?>
 <p:sld xmlns:a="http://schemas.openxmlformats.org/drawingml/2006/main" xmlns:r="http://schemas.openxmlformats.org/officeDocument/2006/relationships" xmlns:p="http://schemas.openxmlformats.org/presentationml/2006/main">
   <p:cSld>
     <p:spTree>
@@ -12022,7 +12355,7 @@
       </p:grpSpPr>
       <p:sp>
         <p:nvSpPr>
-          <p:cNvPr id="2" name="슬라이드 번호 개체 틀 1"/>
+          <p:cNvPr id="8" name="슬라이드 번호 개체 틀 7"/>
           <p:cNvSpPr>
             <a:spLocks noGrp="1"/>
           </p:cNvSpPr>
@@ -12038,7 +12371,273 @@
             <a:pPr rtl="0"/>
             <a:fld id="{A3F31473-23EB-4724-8B59-FE6D21D89FA4}" type="slidenum">
               <a:rPr lang="en-US" altLang="ko-KR" noProof="0" smtClean="0"/>
-              <a:t>29</a:t>
+              <a:t>3</a:t>
+            </a:fld>
+            <a:endParaRPr lang="en-US" altLang="ko-KR" noProof="0" dirty="0"/>
+          </a:p>
+        </p:txBody>
+      </p:sp>
+      <p:sp>
+        <p:nvSpPr>
+          <p:cNvPr id="2" name="TextBox 1">
+            <a:extLst>
+              <a:ext uri="{FF2B5EF4-FFF2-40B4-BE49-F238E27FC236}">
+                <a16:creationId xmlns:a16="http://schemas.microsoft.com/office/drawing/2014/main" id="{B0754AEB-7EBE-A397-BEA5-D61762102166}"/>
+              </a:ext>
+            </a:extLst>
+          </p:cNvPr>
+          <p:cNvSpPr txBox="1"/>
+          <p:nvPr/>
+        </p:nvSpPr>
+        <p:spPr>
+          <a:xfrm>
+            <a:off x="1629916" y="620688"/>
+            <a:ext cx="8928992" cy="5131020"/>
+          </a:xfrm>
+          <a:prstGeom prst="rect">
+            <a:avLst/>
+          </a:prstGeom>
+          <a:noFill/>
+        </p:spPr>
+        <p:txBody>
+          <a:bodyPr wrap="square" rtlCol="0">
+            <a:spAutoFit/>
+          </a:bodyPr>
+          <a:lstStyle/>
+          <a:p>
+            <a:pPr>
+              <a:lnSpc>
+                <a:spcPct val="200000"/>
+              </a:lnSpc>
+            </a:pPr>
+            <a:r>
+              <a:rPr lang="ko-KR" altLang="en-US" sz="4000" b="1" dirty="0">
+                <a:latin typeface="한컴 말랑말랑 Bold" panose="020F0803000000000000" pitchFamily="50" charset="-127"/>
+                <a:ea typeface="한컴 말랑말랑 Bold" panose="020F0803000000000000" pitchFamily="50" charset="-127"/>
+              </a:rPr>
+              <a:t>목차</a:t>
+            </a:r>
+            <a:endParaRPr lang="en-US" altLang="ko-KR" sz="4000" b="1" dirty="0">
+              <a:latin typeface="한컴 말랑말랑 Bold" panose="020F0803000000000000" pitchFamily="50" charset="-127"/>
+              <a:ea typeface="한컴 말랑말랑 Bold" panose="020F0803000000000000" pitchFamily="50" charset="-127"/>
+            </a:endParaRPr>
+          </a:p>
+          <a:p>
+            <a:pPr marL="514350" indent="-514350">
+              <a:lnSpc>
+                <a:spcPct val="200000"/>
+              </a:lnSpc>
+              <a:buAutoNum type="arabicPeriod"/>
+            </a:pPr>
+            <a:r>
+              <a:rPr lang="ko-KR" altLang="en-US" sz="2000" b="1" dirty="0">
+                <a:latin typeface="한컴 말랑말랑 Bold" panose="020F0803000000000000" pitchFamily="50" charset="-127"/>
+                <a:ea typeface="한컴 말랑말랑 Bold" panose="020F0803000000000000" pitchFamily="50" charset="-127"/>
+              </a:rPr>
+              <a:t>통계학</a:t>
+            </a:r>
+            <a:r>
+              <a:rPr lang="en-US" altLang="ko-KR" sz="2000" b="1" dirty="0">
+                <a:latin typeface="한컴 말랑말랑 Bold" panose="020F0803000000000000" pitchFamily="50" charset="-127"/>
+                <a:ea typeface="한컴 말랑말랑 Bold" panose="020F0803000000000000" pitchFamily="50" charset="-127"/>
+              </a:rPr>
+              <a:t>(Statistics)</a:t>
+            </a:r>
+          </a:p>
+          <a:p>
+            <a:pPr marL="514350" indent="-514350">
+              <a:lnSpc>
+                <a:spcPct val="200000"/>
+              </a:lnSpc>
+              <a:buAutoNum type="arabicPeriod"/>
+            </a:pPr>
+            <a:r>
+              <a:rPr lang="ko-KR" altLang="en-US" sz="2000" b="1" dirty="0">
+                <a:latin typeface="한컴 말랑말랑 Bold" panose="020F0803000000000000" pitchFamily="50" charset="-127"/>
+                <a:ea typeface="한컴 말랑말랑 Bold" panose="020F0803000000000000" pitchFamily="50" charset="-127"/>
+              </a:rPr>
+              <a:t>모집단과</a:t>
+            </a:r>
+            <a:r>
+              <a:rPr lang="en-US" altLang="ko-KR" sz="2000" b="1" dirty="0">
+                <a:latin typeface="한컴 말랑말랑 Bold" panose="020F0803000000000000" pitchFamily="50" charset="-127"/>
+                <a:ea typeface="한컴 말랑말랑 Bold" panose="020F0803000000000000" pitchFamily="50" charset="-127"/>
+              </a:rPr>
+              <a:t> </a:t>
+            </a:r>
+            <a:r>
+              <a:rPr lang="ko-KR" altLang="en-US" sz="2000" b="1" dirty="0">
+                <a:latin typeface="한컴 말랑말랑 Bold" panose="020F0803000000000000" pitchFamily="50" charset="-127"/>
+                <a:ea typeface="한컴 말랑말랑 Bold" panose="020F0803000000000000" pitchFamily="50" charset="-127"/>
+              </a:rPr>
+              <a:t>표본조사 방법</a:t>
+            </a:r>
+            <a:endParaRPr lang="en-US" altLang="ko-KR" sz="2000" b="1" dirty="0">
+              <a:latin typeface="한컴 말랑말랑 Bold" panose="020F0803000000000000" pitchFamily="50" charset="-127"/>
+              <a:ea typeface="한컴 말랑말랑 Bold" panose="020F0803000000000000" pitchFamily="50" charset="-127"/>
+            </a:endParaRPr>
+          </a:p>
+          <a:p>
+            <a:pPr marL="514350" indent="-514350">
+              <a:lnSpc>
+                <a:spcPct val="200000"/>
+              </a:lnSpc>
+              <a:buAutoNum type="arabicPeriod"/>
+            </a:pPr>
+            <a:r>
+              <a:rPr lang="ko-KR" altLang="en-US" sz="2000" b="1" dirty="0">
+                <a:latin typeface="한컴 말랑말랑 Bold" panose="020F0803000000000000" pitchFamily="50" charset="-127"/>
+                <a:ea typeface="한컴 말랑말랑 Bold" panose="020F0803000000000000" pitchFamily="50" charset="-127"/>
+              </a:rPr>
+              <a:t>데이터의 종류</a:t>
+            </a:r>
+            <a:r>
+              <a:rPr lang="en-US" altLang="ko-KR" sz="2000" b="1" dirty="0">
+                <a:latin typeface="한컴 말랑말랑 Bold" panose="020F0803000000000000" pitchFamily="50" charset="-127"/>
+                <a:ea typeface="한컴 말랑말랑 Bold" panose="020F0803000000000000" pitchFamily="50" charset="-127"/>
+              </a:rPr>
+              <a:t>(Data type)</a:t>
+            </a:r>
+          </a:p>
+          <a:p>
+            <a:pPr marL="514350" indent="-514350">
+              <a:lnSpc>
+                <a:spcPct val="200000"/>
+              </a:lnSpc>
+              <a:buAutoNum type="arabicPeriod"/>
+            </a:pPr>
+            <a:r>
+              <a:rPr lang="ko-KR" altLang="en-US" sz="2000" b="1" dirty="0">
+                <a:latin typeface="한컴 말랑말랑 Bold" panose="020F0803000000000000" pitchFamily="50" charset="-127"/>
+                <a:ea typeface="한컴 말랑말랑 Bold" panose="020F0803000000000000" pitchFamily="50" charset="-127"/>
+              </a:rPr>
+              <a:t>주요</a:t>
+            </a:r>
+            <a:r>
+              <a:rPr lang="en-US" altLang="ko-KR" sz="2000" b="1" dirty="0">
+                <a:latin typeface="한컴 말랑말랑 Bold" panose="020F0803000000000000" pitchFamily="50" charset="-127"/>
+                <a:ea typeface="한컴 말랑말랑 Bold" panose="020F0803000000000000" pitchFamily="50" charset="-127"/>
+              </a:rPr>
+              <a:t> </a:t>
+            </a:r>
+            <a:r>
+              <a:rPr lang="ko-KR" altLang="en-US" sz="2000" b="1" dirty="0">
+                <a:latin typeface="한컴 말랑말랑 Bold" panose="020F0803000000000000" pitchFamily="50" charset="-127"/>
+                <a:ea typeface="한컴 말랑말랑 Bold" panose="020F0803000000000000" pitchFamily="50" charset="-127"/>
+              </a:rPr>
+              <a:t>통계량</a:t>
+            </a:r>
+            <a:r>
+              <a:rPr lang="en-US" altLang="ko-KR" sz="2000" b="1" dirty="0">
+                <a:latin typeface="한컴 말랑말랑 Bold" panose="020F0803000000000000" pitchFamily="50" charset="-127"/>
+                <a:ea typeface="한컴 말랑말랑 Bold" panose="020F0803000000000000" pitchFamily="50" charset="-127"/>
+              </a:rPr>
+              <a:t>(Statistic)</a:t>
+            </a:r>
+          </a:p>
+          <a:p>
+            <a:pPr marL="514350" indent="-514350">
+              <a:lnSpc>
+                <a:spcPct val="200000"/>
+              </a:lnSpc>
+              <a:buAutoNum type="arabicPeriod"/>
+            </a:pPr>
+            <a:r>
+              <a:rPr lang="ko-KR" altLang="en-US" sz="2000" b="1" dirty="0" err="1">
+                <a:latin typeface="한컴 말랑말랑 Bold" panose="020F0803000000000000" pitchFamily="50" charset="-127"/>
+                <a:ea typeface="한컴 말랑말랑 Bold" panose="020F0803000000000000" pitchFamily="50" charset="-127"/>
+              </a:rPr>
+              <a:t>다변량</a:t>
+            </a:r>
+            <a:r>
+              <a:rPr lang="ko-KR" altLang="en-US" sz="2000" b="1" dirty="0">
+                <a:latin typeface="한컴 말랑말랑 Bold" panose="020F0803000000000000" pitchFamily="50" charset="-127"/>
+                <a:ea typeface="한컴 말랑말랑 Bold" panose="020F0803000000000000" pitchFamily="50" charset="-127"/>
+              </a:rPr>
+              <a:t> 분석</a:t>
+            </a:r>
+            <a:r>
+              <a:rPr lang="en-US" altLang="ko-KR" sz="2000" b="1" dirty="0">
+                <a:latin typeface="한컴 말랑말랑 Bold" panose="020F0803000000000000" pitchFamily="50" charset="-127"/>
+                <a:ea typeface="한컴 말랑말랑 Bold" panose="020F0803000000000000" pitchFamily="50" charset="-127"/>
+              </a:rPr>
+              <a:t>(Multivariate Analysis)</a:t>
+            </a:r>
+          </a:p>
+          <a:p>
+            <a:pPr>
+              <a:lnSpc>
+                <a:spcPct val="200000"/>
+              </a:lnSpc>
+            </a:pPr>
+            <a:endParaRPr lang="ko-KR" altLang="en-US" sz="2800" b="1" dirty="0">
+              <a:latin typeface="한컴 말랑말랑 Bold" panose="020F0803000000000000" pitchFamily="50" charset="-127"/>
+              <a:ea typeface="한컴 말랑말랑 Bold" panose="020F0803000000000000" pitchFamily="50" charset="-127"/>
+            </a:endParaRPr>
+          </a:p>
+        </p:txBody>
+      </p:sp>
+    </p:spTree>
+    <p:extLst>
+      <p:ext uri="{BB962C8B-B14F-4D97-AF65-F5344CB8AC3E}">
+        <p14:creationId xmlns:p14="http://schemas.microsoft.com/office/powerpoint/2010/main" val="1126723429"/>
+      </p:ext>
+    </p:extLst>
+  </p:cSld>
+  <p:clrMapOvr>
+    <a:masterClrMapping/>
+  </p:clrMapOvr>
+  <mc:AlternateContent xmlns:mc="http://schemas.openxmlformats.org/markup-compatibility/2006" xmlns:p14="http://schemas.microsoft.com/office/powerpoint/2010/main">
+    <mc:Choice Requires="p14">
+      <p:transition spd="med" p14:dur="700">
+        <p:fade/>
+      </p:transition>
+    </mc:Choice>
+    <mc:Fallback xmlns="">
+      <p:transition spd="med">
+        <p:fade/>
+      </p:transition>
+    </mc:Fallback>
+  </mc:AlternateContent>
+</p:sld>
+</file>
+
+<file path=ppt/slides/slide30.xml><?xml version="1.0" encoding="utf-8"?>
+<p:sld xmlns:a="http://schemas.openxmlformats.org/drawingml/2006/main" xmlns:r="http://schemas.openxmlformats.org/officeDocument/2006/relationships" xmlns:p="http://schemas.openxmlformats.org/presentationml/2006/main">
+  <p:cSld>
+    <p:spTree>
+      <p:nvGrpSpPr>
+        <p:cNvPr id="1" name=""/>
+        <p:cNvGrpSpPr/>
+        <p:nvPr/>
+      </p:nvGrpSpPr>
+      <p:grpSpPr>
+        <a:xfrm>
+          <a:off x="0" y="0"/>
+          <a:ext cx="0" cy="0"/>
+          <a:chOff x="0" y="0"/>
+          <a:chExt cx="0" cy="0"/>
+        </a:xfrm>
+      </p:grpSpPr>
+      <p:sp>
+        <p:nvSpPr>
+          <p:cNvPr id="2" name="슬라이드 번호 개체 틀 1"/>
+          <p:cNvSpPr>
+            <a:spLocks noGrp="1"/>
+          </p:cNvSpPr>
+          <p:nvPr>
+            <p:ph type="sldNum" sz="quarter" idx="12"/>
+          </p:nvPr>
+        </p:nvSpPr>
+        <p:spPr/>
+        <p:txBody>
+          <a:bodyPr/>
+          <a:lstStyle/>
+          <a:p>
+            <a:pPr rtl="0"/>
+            <a:fld id="{A3F31473-23EB-4724-8B59-FE6D21D89FA4}" type="slidenum">
+              <a:rPr lang="en-US" altLang="ko-KR" noProof="0" smtClean="0"/>
+              <a:t>30</a:t>
             </a:fld>
             <a:endParaRPr lang="en-US" altLang="ko-KR" noProof="0" dirty="0"/>
           </a:p>
@@ -12093,339 +12692,7 @@
 </p:sld>
 </file>
 
-<file path=ppt/slides/slide3.xml><?xml version="1.0" encoding="utf-8"?>
-<p:sld xmlns:a="http://schemas.openxmlformats.org/drawingml/2006/main" xmlns:r="http://schemas.openxmlformats.org/officeDocument/2006/relationships" xmlns:p="http://schemas.openxmlformats.org/presentationml/2006/main">
-  <p:cSld>
-    <p:spTree>
-      <p:nvGrpSpPr>
-        <p:cNvPr id="1" name="">
-          <a:extLst>
-            <a:ext uri="{FF2B5EF4-FFF2-40B4-BE49-F238E27FC236}">
-              <a16:creationId xmlns:a16="http://schemas.microsoft.com/office/drawing/2014/main" id="{0B799DDB-CF71-2269-C86C-A0C6B66D4ABA}"/>
-            </a:ext>
-          </a:extLst>
-        </p:cNvPr>
-        <p:cNvGrpSpPr/>
-        <p:nvPr/>
-      </p:nvGrpSpPr>
-      <p:grpSpPr>
-        <a:xfrm>
-          <a:off x="0" y="0"/>
-          <a:ext cx="0" cy="0"/>
-          <a:chOff x="0" y="0"/>
-          <a:chExt cx="0" cy="0"/>
-        </a:xfrm>
-      </p:grpSpPr>
-      <p:sp>
-        <p:nvSpPr>
-          <p:cNvPr id="3" name="직사각형 2">
-            <a:extLst>
-              <a:ext uri="{FF2B5EF4-FFF2-40B4-BE49-F238E27FC236}">
-                <a16:creationId xmlns:a16="http://schemas.microsoft.com/office/drawing/2014/main" id="{4480F933-025B-964F-DC78-EB0567125B9F}"/>
-              </a:ext>
-            </a:extLst>
-          </p:cNvPr>
-          <p:cNvSpPr/>
-          <p:nvPr/>
-        </p:nvSpPr>
-        <p:spPr>
-          <a:xfrm>
-            <a:off x="549796" y="1890054"/>
-            <a:ext cx="8136904" cy="674850"/>
-          </a:xfrm>
-          <a:prstGeom prst="rect">
-            <a:avLst/>
-          </a:prstGeom>
-          <a:solidFill>
-            <a:schemeClr val="bg1">
-              <a:lumMod val="85000"/>
-            </a:schemeClr>
-          </a:solidFill>
-          <a:ln>
-            <a:noFill/>
-          </a:ln>
-        </p:spPr>
-        <p:style>
-          <a:lnRef idx="2">
-            <a:schemeClr val="accent1">
-              <a:shade val="15000"/>
-            </a:schemeClr>
-          </a:lnRef>
-          <a:fillRef idx="1">
-            <a:schemeClr val="accent1"/>
-          </a:fillRef>
-          <a:effectRef idx="0">
-            <a:schemeClr val="accent1"/>
-          </a:effectRef>
-          <a:fontRef idx="minor">
-            <a:schemeClr val="lt1"/>
-          </a:fontRef>
-        </p:style>
-        <p:txBody>
-          <a:bodyPr rtlCol="0" anchor="ctr"/>
-          <a:lstStyle/>
-          <a:p>
-            <a:pPr algn="ctr"/>
-            <a:endParaRPr lang="ko-KR" altLang="en-US" dirty="0"/>
-          </a:p>
-        </p:txBody>
-      </p:sp>
-      <p:sp>
-        <p:nvSpPr>
-          <p:cNvPr id="8" name="슬라이드 번호 개체 틀 7">
-            <a:extLst>
-              <a:ext uri="{FF2B5EF4-FFF2-40B4-BE49-F238E27FC236}">
-                <a16:creationId xmlns:a16="http://schemas.microsoft.com/office/drawing/2014/main" id="{FB865C5A-AC22-903F-65DE-B0B66C8E440F}"/>
-              </a:ext>
-            </a:extLst>
-          </p:cNvPr>
-          <p:cNvSpPr>
-            <a:spLocks noGrp="1"/>
-          </p:cNvSpPr>
-          <p:nvPr>
-            <p:ph type="sldNum" sz="quarter" idx="12"/>
-          </p:nvPr>
-        </p:nvSpPr>
-        <p:spPr/>
-        <p:txBody>
-          <a:bodyPr/>
-          <a:lstStyle/>
-          <a:p>
-            <a:pPr rtl="0"/>
-            <a:fld id="{A3F31473-23EB-4724-8B59-FE6D21D89FA4}" type="slidenum">
-              <a:rPr lang="en-US" altLang="ko-KR" noProof="0" smtClean="0"/>
-              <a:t>3</a:t>
-            </a:fld>
-            <a:endParaRPr lang="en-US" altLang="ko-KR" noProof="0" dirty="0"/>
-          </a:p>
-        </p:txBody>
-      </p:sp>
-      <p:sp>
-        <p:nvSpPr>
-          <p:cNvPr id="2" name="TextBox 1">
-            <a:extLst>
-              <a:ext uri="{FF2B5EF4-FFF2-40B4-BE49-F238E27FC236}">
-                <a16:creationId xmlns:a16="http://schemas.microsoft.com/office/drawing/2014/main" id="{B6442AF8-60A9-DCE2-F679-9A9DD6247034}"/>
-              </a:ext>
-            </a:extLst>
-          </p:cNvPr>
-          <p:cNvSpPr txBox="1"/>
-          <p:nvPr/>
-        </p:nvSpPr>
-        <p:spPr>
-          <a:xfrm>
-            <a:off x="1629916" y="620688"/>
-            <a:ext cx="8928992" cy="5131020"/>
-          </a:xfrm>
-          <a:prstGeom prst="rect">
-            <a:avLst/>
-          </a:prstGeom>
-          <a:noFill/>
-        </p:spPr>
-        <p:txBody>
-          <a:bodyPr wrap="square" rtlCol="0">
-            <a:spAutoFit/>
-          </a:bodyPr>
-          <a:lstStyle/>
-          <a:p>
-            <a:pPr>
-              <a:lnSpc>
-                <a:spcPct val="200000"/>
-              </a:lnSpc>
-            </a:pPr>
-            <a:r>
-              <a:rPr lang="ko-KR" altLang="en-US" sz="4000" b="1" dirty="0">
-                <a:latin typeface="한컴 말랑말랑 Bold" panose="020F0803000000000000" pitchFamily="50" charset="-127"/>
-                <a:ea typeface="한컴 말랑말랑 Bold" panose="020F0803000000000000" pitchFamily="50" charset="-127"/>
-              </a:rPr>
-              <a:t>목차</a:t>
-            </a:r>
-            <a:endParaRPr lang="en-US" altLang="ko-KR" sz="4000" b="1" dirty="0">
-              <a:latin typeface="한컴 말랑말랑 Bold" panose="020F0803000000000000" pitchFamily="50" charset="-127"/>
-              <a:ea typeface="한컴 말랑말랑 Bold" panose="020F0803000000000000" pitchFamily="50" charset="-127"/>
-            </a:endParaRPr>
-          </a:p>
-          <a:p>
-            <a:pPr marL="514350" indent="-514350">
-              <a:lnSpc>
-                <a:spcPct val="200000"/>
-              </a:lnSpc>
-              <a:buAutoNum type="arabicPeriod"/>
-            </a:pPr>
-            <a:r>
-              <a:rPr lang="ko-KR" altLang="en-US" sz="2000" b="1" dirty="0">
-                <a:latin typeface="한컴 말랑말랑 Bold" panose="020F0803000000000000" pitchFamily="50" charset="-127"/>
-                <a:ea typeface="한컴 말랑말랑 Bold" panose="020F0803000000000000" pitchFamily="50" charset="-127"/>
-              </a:rPr>
-              <a:t>통계학</a:t>
-            </a:r>
-            <a:r>
-              <a:rPr lang="en-US" altLang="ko-KR" sz="2000" b="1" dirty="0">
-                <a:latin typeface="한컴 말랑말랑 Bold" panose="020F0803000000000000" pitchFamily="50" charset="-127"/>
-                <a:ea typeface="한컴 말랑말랑 Bold" panose="020F0803000000000000" pitchFamily="50" charset="-127"/>
-              </a:rPr>
-              <a:t>(Statistics)</a:t>
-            </a:r>
-          </a:p>
-          <a:p>
-            <a:pPr marL="514350" indent="-514350">
-              <a:lnSpc>
-                <a:spcPct val="200000"/>
-              </a:lnSpc>
-              <a:buAutoNum type="arabicPeriod"/>
-            </a:pPr>
-            <a:r>
-              <a:rPr lang="ko-KR" altLang="en-US" sz="2000" b="1" dirty="0">
-                <a:latin typeface="한컴 말랑말랑 Bold" panose="020F0803000000000000" pitchFamily="50" charset="-127"/>
-                <a:ea typeface="한컴 말랑말랑 Bold" panose="020F0803000000000000" pitchFamily="50" charset="-127"/>
-              </a:rPr>
-              <a:t>모집단과</a:t>
-            </a:r>
-            <a:r>
-              <a:rPr lang="en-US" altLang="ko-KR" sz="2000" b="1" dirty="0">
-                <a:latin typeface="한컴 말랑말랑 Bold" panose="020F0803000000000000" pitchFamily="50" charset="-127"/>
-                <a:ea typeface="한컴 말랑말랑 Bold" panose="020F0803000000000000" pitchFamily="50" charset="-127"/>
-              </a:rPr>
-              <a:t> </a:t>
-            </a:r>
-            <a:r>
-              <a:rPr lang="ko-KR" altLang="en-US" sz="2000" b="1" dirty="0">
-                <a:latin typeface="한컴 말랑말랑 Bold" panose="020F0803000000000000" pitchFamily="50" charset="-127"/>
-                <a:ea typeface="한컴 말랑말랑 Bold" panose="020F0803000000000000" pitchFamily="50" charset="-127"/>
-              </a:rPr>
-              <a:t>표본조사 방법</a:t>
-            </a:r>
-            <a:endParaRPr lang="en-US" altLang="ko-KR" sz="2000" b="1" dirty="0">
-              <a:latin typeface="한컴 말랑말랑 Bold" panose="020F0803000000000000" pitchFamily="50" charset="-127"/>
-              <a:ea typeface="한컴 말랑말랑 Bold" panose="020F0803000000000000" pitchFamily="50" charset="-127"/>
-            </a:endParaRPr>
-          </a:p>
-          <a:p>
-            <a:pPr marL="514350" indent="-514350">
-              <a:lnSpc>
-                <a:spcPct val="200000"/>
-              </a:lnSpc>
-              <a:buAutoNum type="arabicPeriod"/>
-            </a:pPr>
-            <a:r>
-              <a:rPr lang="ko-KR" altLang="en-US" sz="2000" b="1" dirty="0">
-                <a:latin typeface="한컴 말랑말랑 Bold" panose="020F0803000000000000" pitchFamily="50" charset="-127"/>
-                <a:ea typeface="한컴 말랑말랑 Bold" panose="020F0803000000000000" pitchFamily="50" charset="-127"/>
-              </a:rPr>
-              <a:t>데이터의 종류</a:t>
-            </a:r>
-            <a:r>
-              <a:rPr lang="en-US" altLang="ko-KR" sz="2000" b="1" dirty="0">
-                <a:latin typeface="한컴 말랑말랑 Bold" panose="020F0803000000000000" pitchFamily="50" charset="-127"/>
-                <a:ea typeface="한컴 말랑말랑 Bold" panose="020F0803000000000000" pitchFamily="50" charset="-127"/>
-              </a:rPr>
-              <a:t>(Data type)</a:t>
-            </a:r>
-          </a:p>
-          <a:p>
-            <a:pPr marL="514350" indent="-514350">
-              <a:lnSpc>
-                <a:spcPct val="200000"/>
-              </a:lnSpc>
-              <a:buAutoNum type="arabicPeriod"/>
-            </a:pPr>
-            <a:r>
-              <a:rPr lang="ko-KR" altLang="en-US" sz="2000" b="1" dirty="0">
-                <a:latin typeface="한컴 말랑말랑 Bold" panose="020F0803000000000000" pitchFamily="50" charset="-127"/>
-                <a:ea typeface="한컴 말랑말랑 Bold" panose="020F0803000000000000" pitchFamily="50" charset="-127"/>
-              </a:rPr>
-              <a:t>주요</a:t>
-            </a:r>
-            <a:r>
-              <a:rPr lang="en-US" altLang="ko-KR" sz="2000" b="1" dirty="0">
-                <a:latin typeface="한컴 말랑말랑 Bold" panose="020F0803000000000000" pitchFamily="50" charset="-127"/>
-                <a:ea typeface="한컴 말랑말랑 Bold" panose="020F0803000000000000" pitchFamily="50" charset="-127"/>
-              </a:rPr>
-              <a:t> </a:t>
-            </a:r>
-            <a:r>
-              <a:rPr lang="ko-KR" altLang="en-US" sz="2000" b="1" dirty="0">
-                <a:latin typeface="한컴 말랑말랑 Bold" panose="020F0803000000000000" pitchFamily="50" charset="-127"/>
-                <a:ea typeface="한컴 말랑말랑 Bold" panose="020F0803000000000000" pitchFamily="50" charset="-127"/>
-              </a:rPr>
-              <a:t>통계량</a:t>
-            </a:r>
-            <a:r>
-              <a:rPr lang="en-US" altLang="ko-KR" sz="2000" b="1" dirty="0">
-                <a:latin typeface="한컴 말랑말랑 Bold" panose="020F0803000000000000" pitchFamily="50" charset="-127"/>
-                <a:ea typeface="한컴 말랑말랑 Bold" panose="020F0803000000000000" pitchFamily="50" charset="-127"/>
-              </a:rPr>
-              <a:t>(Statistic)</a:t>
-            </a:r>
-          </a:p>
-          <a:p>
-            <a:pPr marL="514350" indent="-514350">
-              <a:lnSpc>
-                <a:spcPct val="200000"/>
-              </a:lnSpc>
-              <a:buAutoNum type="arabicPeriod"/>
-            </a:pPr>
-            <a:r>
-              <a:rPr lang="ko-KR" altLang="en-US" sz="2000" b="1" dirty="0" err="1">
-                <a:latin typeface="한컴 말랑말랑 Bold" panose="020F0803000000000000" pitchFamily="50" charset="-127"/>
-                <a:ea typeface="한컴 말랑말랑 Bold" panose="020F0803000000000000" pitchFamily="50" charset="-127"/>
-              </a:rPr>
-              <a:t>다변량</a:t>
-            </a:r>
-            <a:r>
-              <a:rPr lang="ko-KR" altLang="en-US" sz="2000" b="1" dirty="0">
-                <a:latin typeface="한컴 말랑말랑 Bold" panose="020F0803000000000000" pitchFamily="50" charset="-127"/>
-                <a:ea typeface="한컴 말랑말랑 Bold" panose="020F0803000000000000" pitchFamily="50" charset="-127"/>
-              </a:rPr>
-              <a:t> 분석</a:t>
-            </a:r>
-            <a:r>
-              <a:rPr lang="en-US" altLang="ko-KR" sz="2000" b="1" dirty="0">
-                <a:latin typeface="한컴 말랑말랑 Bold" panose="020F0803000000000000" pitchFamily="50" charset="-127"/>
-                <a:ea typeface="한컴 말랑말랑 Bold" panose="020F0803000000000000" pitchFamily="50" charset="-127"/>
-              </a:rPr>
-              <a:t>(Multivariate Analysis)</a:t>
-            </a:r>
-          </a:p>
-          <a:p>
-            <a:pPr>
-              <a:lnSpc>
-                <a:spcPct val="200000"/>
-              </a:lnSpc>
-            </a:pPr>
-            <a:endParaRPr lang="ko-KR" altLang="en-US" sz="2800" b="1" dirty="0">
-              <a:latin typeface="한컴 말랑말랑 Bold" panose="020F0803000000000000" pitchFamily="50" charset="-127"/>
-              <a:ea typeface="한컴 말랑말랑 Bold" panose="020F0803000000000000" pitchFamily="50" charset="-127"/>
-            </a:endParaRPr>
-          </a:p>
-        </p:txBody>
-      </p:sp>
-    </p:spTree>
-    <p:extLst>
-      <p:ext uri="{BB962C8B-B14F-4D97-AF65-F5344CB8AC3E}">
-        <p14:creationId xmlns:p14="http://schemas.microsoft.com/office/powerpoint/2010/main" val="4216523584"/>
-      </p:ext>
-    </p:extLst>
-  </p:cSld>
-  <p:clrMapOvr>
-    <a:masterClrMapping/>
-  </p:clrMapOvr>
-  <mc:AlternateContent xmlns:mc="http://schemas.openxmlformats.org/markup-compatibility/2006" xmlns:p14="http://schemas.microsoft.com/office/powerpoint/2010/main">
-    <mc:Choice Requires="p14">
-      <p:transition spd="med" p14:dur="700">
-        <p:fade/>
-      </p:transition>
-    </mc:Choice>
-    <mc:Fallback xmlns="">
-      <p:transition spd="med">
-        <p:fade/>
-      </p:transition>
-    </mc:Fallback>
-  </mc:AlternateContent>
-</p:sld>
-</file>
-
-<file path=ppt/slides/slide30.xml><?xml version="1.0" encoding="utf-8"?>
+<file path=ppt/slides/slide31.xml><?xml version="1.0" encoding="utf-8"?>
 <p:sld xmlns:a="http://schemas.openxmlformats.org/drawingml/2006/main" xmlns:r="http://schemas.openxmlformats.org/officeDocument/2006/relationships" xmlns:p="http://schemas.openxmlformats.org/presentationml/2006/main">
   <p:cSld>
     <p:spTree>
@@ -12460,7 +12727,7 @@
             <a:pPr rtl="0"/>
             <a:fld id="{A3F31473-23EB-4724-8B59-FE6D21D89FA4}" type="slidenum">
               <a:rPr lang="en-US" altLang="ko-KR" noProof="0" smtClean="0"/>
-              <a:t>30</a:t>
+              <a:t>31</a:t>
             </a:fld>
             <a:endParaRPr lang="en-US" altLang="ko-KR" noProof="0" dirty="0"/>
           </a:p>
@@ -12764,7 +13031,7 @@
 </p:sld>
 </file>
 
-<file path=ppt/slides/slide31.xml><?xml version="1.0" encoding="utf-8"?>
+<file path=ppt/slides/slide32.xml><?xml version="1.0" encoding="utf-8"?>
 <p:sld xmlns:a="http://schemas.openxmlformats.org/drawingml/2006/main" xmlns:r="http://schemas.openxmlformats.org/officeDocument/2006/relationships" xmlns:p="http://schemas.openxmlformats.org/presentationml/2006/main">
   <p:cSld>
     <p:spTree>
@@ -12799,7 +13066,7 @@
             <a:pPr rtl="0"/>
             <a:fld id="{A3F31473-23EB-4724-8B59-FE6D21D89FA4}" type="slidenum">
               <a:rPr lang="en-US" altLang="ko-KR" noProof="0" smtClean="0"/>
-              <a:t>31</a:t>
+              <a:t>32</a:t>
             </a:fld>
             <a:endParaRPr lang="en-US" altLang="ko-KR" noProof="0" dirty="0"/>
           </a:p>
@@ -12854,7 +13121,7 @@
 </p:sld>
 </file>
 
-<file path=ppt/slides/slide32.xml><?xml version="1.0" encoding="utf-8"?>
+<file path=ppt/slides/slide33.xml><?xml version="1.0" encoding="utf-8"?>
 <p:sld xmlns:a="http://schemas.openxmlformats.org/drawingml/2006/main" xmlns:r="http://schemas.openxmlformats.org/officeDocument/2006/relationships" xmlns:p="http://schemas.openxmlformats.org/presentationml/2006/main">
   <p:cSld>
     <p:spTree>
@@ -12889,7 +13156,7 @@
             <a:pPr rtl="0"/>
             <a:fld id="{A3F31473-23EB-4724-8B59-FE6D21D89FA4}" type="slidenum">
               <a:rPr lang="en-US" altLang="ko-KR" noProof="0" smtClean="0"/>
-              <a:t>32</a:t>
+              <a:t>33</a:t>
             </a:fld>
             <a:endParaRPr lang="en-US" altLang="ko-KR" noProof="0" dirty="0"/>
           </a:p>
@@ -12944,7 +13211,7 @@
 </p:sld>
 </file>
 
-<file path=ppt/slides/slide33.xml><?xml version="1.0" encoding="utf-8"?>
+<file path=ppt/slides/slide34.xml><?xml version="1.0" encoding="utf-8"?>
 <p:sld xmlns:a="http://schemas.openxmlformats.org/drawingml/2006/main" xmlns:r="http://schemas.openxmlformats.org/officeDocument/2006/relationships" xmlns:p="http://schemas.openxmlformats.org/presentationml/2006/main">
   <p:cSld>
     <p:spTree>
@@ -12979,7 +13246,7 @@
             <a:pPr rtl="0"/>
             <a:fld id="{A3F31473-23EB-4724-8B59-FE6D21D89FA4}" type="slidenum">
               <a:rPr lang="en-US" altLang="ko-KR" noProof="0" smtClean="0"/>
-              <a:t>33</a:t>
+              <a:t>34</a:t>
             </a:fld>
             <a:endParaRPr lang="en-US" altLang="ko-KR" noProof="0" dirty="0"/>
           </a:p>
@@ -13034,7 +13301,7 @@
 </p:sld>
 </file>
 
-<file path=ppt/slides/slide34.xml><?xml version="1.0" encoding="utf-8"?>
+<file path=ppt/slides/slide35.xml><?xml version="1.0" encoding="utf-8"?>
 <p:sld xmlns:a="http://schemas.openxmlformats.org/drawingml/2006/main" xmlns:r="http://schemas.openxmlformats.org/officeDocument/2006/relationships" xmlns:p="http://schemas.openxmlformats.org/presentationml/2006/main">
   <p:cSld>
     <p:spTree>
@@ -13069,7 +13336,7 @@
             <a:pPr rtl="0"/>
             <a:fld id="{A3F31473-23EB-4724-8B59-FE6D21D89FA4}" type="slidenum">
               <a:rPr lang="en-US" altLang="ko-KR" noProof="0" smtClean="0"/>
-              <a:t>34</a:t>
+              <a:t>35</a:t>
             </a:fld>
             <a:endParaRPr lang="en-US" altLang="ko-KR" noProof="0" dirty="0"/>
           </a:p>
@@ -13670,7 +13937,7 @@
 </p:sld>
 </file>
 
-<file path=ppt/slides/slide35.xml><?xml version="1.0" encoding="utf-8"?>
+<file path=ppt/slides/slide36.xml><?xml version="1.0" encoding="utf-8"?>
 <p:sld xmlns:a="http://schemas.openxmlformats.org/drawingml/2006/main" xmlns:r="http://schemas.openxmlformats.org/officeDocument/2006/relationships" xmlns:p="http://schemas.openxmlformats.org/presentationml/2006/main">
   <p:cSld>
     <p:spTree>
@@ -13771,7 +14038,7 @@
             <a:pPr rtl="0"/>
             <a:fld id="{A3F31473-23EB-4724-8B59-FE6D21D89FA4}" type="slidenum">
               <a:rPr lang="en-US" altLang="ko-KR" noProof="0" smtClean="0"/>
-              <a:t>35</a:t>
+              <a:t>36</a:t>
             </a:fld>
             <a:endParaRPr lang="en-US" altLang="ko-KR" noProof="0" dirty="0"/>
           </a:p>
@@ -14002,7 +14269,7 @@
 </p:sld>
 </file>
 
-<file path=ppt/slides/slide36.xml><?xml version="1.0" encoding="utf-8"?>
+<file path=ppt/slides/slide37.xml><?xml version="1.0" encoding="utf-8"?>
 <p:sld xmlns:a="http://schemas.openxmlformats.org/drawingml/2006/main" xmlns:r="http://schemas.openxmlformats.org/officeDocument/2006/relationships" xmlns:p="http://schemas.openxmlformats.org/presentationml/2006/main">
   <p:cSld>
     <p:spTree>
@@ -14037,7 +14304,7 @@
             <a:pPr rtl="0"/>
             <a:fld id="{A3F31473-23EB-4724-8B59-FE6D21D89FA4}" type="slidenum">
               <a:rPr lang="en-US" altLang="ko-KR" noProof="0" smtClean="0"/>
-              <a:t>36</a:t>
+              <a:t>37</a:t>
             </a:fld>
             <a:endParaRPr lang="en-US" altLang="ko-KR" noProof="0" dirty="0"/>
           </a:p>
@@ -14092,7 +14359,7 @@
 </p:sld>
 </file>
 
-<file path=ppt/slides/slide37.xml><?xml version="1.0" encoding="utf-8"?>
+<file path=ppt/slides/slide38.xml><?xml version="1.0" encoding="utf-8"?>
 <p:sld xmlns:a="http://schemas.openxmlformats.org/drawingml/2006/main" xmlns:r="http://schemas.openxmlformats.org/officeDocument/2006/relationships" xmlns:p="http://schemas.openxmlformats.org/presentationml/2006/main">
   <p:cSld>
     <p:spTree>
@@ -14127,7 +14394,7 @@
             <a:pPr rtl="0"/>
             <a:fld id="{A3F31473-23EB-4724-8B59-FE6D21D89FA4}" type="slidenum">
               <a:rPr lang="en-US" altLang="ko-KR" noProof="0" smtClean="0"/>
-              <a:t>37</a:t>
+              <a:t>38</a:t>
             </a:fld>
             <a:endParaRPr lang="en-US" altLang="ko-KR" noProof="0" dirty="0"/>
           </a:p>
@@ -14182,7 +14449,7 @@
 </p:sld>
 </file>
 
-<file path=ppt/slides/slide38.xml><?xml version="1.0" encoding="utf-8"?>
+<file path=ppt/slides/slide39.xml><?xml version="1.0" encoding="utf-8"?>
 <p:sld xmlns:a="http://schemas.openxmlformats.org/drawingml/2006/main" xmlns:r="http://schemas.openxmlformats.org/officeDocument/2006/relationships" xmlns:p="http://schemas.openxmlformats.org/presentationml/2006/main">
   <p:cSld>
     <p:spTree>
@@ -14217,7 +14484,7 @@
             <a:pPr rtl="0"/>
             <a:fld id="{A3F31473-23EB-4724-8B59-FE6D21D89FA4}" type="slidenum">
               <a:rPr lang="en-US" altLang="ko-KR" noProof="0" smtClean="0"/>
-              <a:t>38</a:t>
+              <a:t>39</a:t>
             </a:fld>
             <a:endParaRPr lang="en-US" altLang="ko-KR" noProof="0" dirty="0"/>
           </a:p>
@@ -14272,7 +14539,339 @@
 </p:sld>
 </file>
 
-<file path=ppt/slides/slide39.xml><?xml version="1.0" encoding="utf-8"?>
+<file path=ppt/slides/slide4.xml><?xml version="1.0" encoding="utf-8"?>
+<p:sld xmlns:a="http://schemas.openxmlformats.org/drawingml/2006/main" xmlns:r="http://schemas.openxmlformats.org/officeDocument/2006/relationships" xmlns:p="http://schemas.openxmlformats.org/presentationml/2006/main">
+  <p:cSld>
+    <p:spTree>
+      <p:nvGrpSpPr>
+        <p:cNvPr id="1" name="">
+          <a:extLst>
+            <a:ext uri="{FF2B5EF4-FFF2-40B4-BE49-F238E27FC236}">
+              <a16:creationId xmlns:a16="http://schemas.microsoft.com/office/drawing/2014/main" id="{0B799DDB-CF71-2269-C86C-A0C6B66D4ABA}"/>
+            </a:ext>
+          </a:extLst>
+        </p:cNvPr>
+        <p:cNvGrpSpPr/>
+        <p:nvPr/>
+      </p:nvGrpSpPr>
+      <p:grpSpPr>
+        <a:xfrm>
+          <a:off x="0" y="0"/>
+          <a:ext cx="0" cy="0"/>
+          <a:chOff x="0" y="0"/>
+          <a:chExt cx="0" cy="0"/>
+        </a:xfrm>
+      </p:grpSpPr>
+      <p:sp>
+        <p:nvSpPr>
+          <p:cNvPr id="3" name="직사각형 2">
+            <a:extLst>
+              <a:ext uri="{FF2B5EF4-FFF2-40B4-BE49-F238E27FC236}">
+                <a16:creationId xmlns:a16="http://schemas.microsoft.com/office/drawing/2014/main" id="{4480F933-025B-964F-DC78-EB0567125B9F}"/>
+              </a:ext>
+            </a:extLst>
+          </p:cNvPr>
+          <p:cNvSpPr/>
+          <p:nvPr/>
+        </p:nvSpPr>
+        <p:spPr>
+          <a:xfrm>
+            <a:off x="549796" y="1890054"/>
+            <a:ext cx="8136904" cy="674850"/>
+          </a:xfrm>
+          <a:prstGeom prst="rect">
+            <a:avLst/>
+          </a:prstGeom>
+          <a:solidFill>
+            <a:schemeClr val="bg1">
+              <a:lumMod val="85000"/>
+            </a:schemeClr>
+          </a:solidFill>
+          <a:ln>
+            <a:noFill/>
+          </a:ln>
+        </p:spPr>
+        <p:style>
+          <a:lnRef idx="2">
+            <a:schemeClr val="accent1">
+              <a:shade val="15000"/>
+            </a:schemeClr>
+          </a:lnRef>
+          <a:fillRef idx="1">
+            <a:schemeClr val="accent1"/>
+          </a:fillRef>
+          <a:effectRef idx="0">
+            <a:schemeClr val="accent1"/>
+          </a:effectRef>
+          <a:fontRef idx="minor">
+            <a:schemeClr val="lt1"/>
+          </a:fontRef>
+        </p:style>
+        <p:txBody>
+          <a:bodyPr rtlCol="0" anchor="ctr"/>
+          <a:lstStyle/>
+          <a:p>
+            <a:pPr algn="ctr"/>
+            <a:endParaRPr lang="ko-KR" altLang="en-US" dirty="0"/>
+          </a:p>
+        </p:txBody>
+      </p:sp>
+      <p:sp>
+        <p:nvSpPr>
+          <p:cNvPr id="8" name="슬라이드 번호 개체 틀 7">
+            <a:extLst>
+              <a:ext uri="{FF2B5EF4-FFF2-40B4-BE49-F238E27FC236}">
+                <a16:creationId xmlns:a16="http://schemas.microsoft.com/office/drawing/2014/main" id="{FB865C5A-AC22-903F-65DE-B0B66C8E440F}"/>
+              </a:ext>
+            </a:extLst>
+          </p:cNvPr>
+          <p:cNvSpPr>
+            <a:spLocks noGrp="1"/>
+          </p:cNvSpPr>
+          <p:nvPr>
+            <p:ph type="sldNum" sz="quarter" idx="12"/>
+          </p:nvPr>
+        </p:nvSpPr>
+        <p:spPr/>
+        <p:txBody>
+          <a:bodyPr/>
+          <a:lstStyle/>
+          <a:p>
+            <a:pPr rtl="0"/>
+            <a:fld id="{A3F31473-23EB-4724-8B59-FE6D21D89FA4}" type="slidenum">
+              <a:rPr lang="en-US" altLang="ko-KR" noProof="0" smtClean="0"/>
+              <a:t>4</a:t>
+            </a:fld>
+            <a:endParaRPr lang="en-US" altLang="ko-KR" noProof="0" dirty="0"/>
+          </a:p>
+        </p:txBody>
+      </p:sp>
+      <p:sp>
+        <p:nvSpPr>
+          <p:cNvPr id="2" name="TextBox 1">
+            <a:extLst>
+              <a:ext uri="{FF2B5EF4-FFF2-40B4-BE49-F238E27FC236}">
+                <a16:creationId xmlns:a16="http://schemas.microsoft.com/office/drawing/2014/main" id="{B6442AF8-60A9-DCE2-F679-9A9DD6247034}"/>
+              </a:ext>
+            </a:extLst>
+          </p:cNvPr>
+          <p:cNvSpPr txBox="1"/>
+          <p:nvPr/>
+        </p:nvSpPr>
+        <p:spPr>
+          <a:xfrm>
+            <a:off x="1629916" y="620688"/>
+            <a:ext cx="8928992" cy="5131020"/>
+          </a:xfrm>
+          <a:prstGeom prst="rect">
+            <a:avLst/>
+          </a:prstGeom>
+          <a:noFill/>
+        </p:spPr>
+        <p:txBody>
+          <a:bodyPr wrap="square" rtlCol="0">
+            <a:spAutoFit/>
+          </a:bodyPr>
+          <a:lstStyle/>
+          <a:p>
+            <a:pPr>
+              <a:lnSpc>
+                <a:spcPct val="200000"/>
+              </a:lnSpc>
+            </a:pPr>
+            <a:r>
+              <a:rPr lang="ko-KR" altLang="en-US" sz="4000" b="1" dirty="0">
+                <a:latin typeface="한컴 말랑말랑 Bold" panose="020F0803000000000000" pitchFamily="50" charset="-127"/>
+                <a:ea typeface="한컴 말랑말랑 Bold" panose="020F0803000000000000" pitchFamily="50" charset="-127"/>
+              </a:rPr>
+              <a:t>목차</a:t>
+            </a:r>
+            <a:endParaRPr lang="en-US" altLang="ko-KR" sz="4000" b="1" dirty="0">
+              <a:latin typeface="한컴 말랑말랑 Bold" panose="020F0803000000000000" pitchFamily="50" charset="-127"/>
+              <a:ea typeface="한컴 말랑말랑 Bold" panose="020F0803000000000000" pitchFamily="50" charset="-127"/>
+            </a:endParaRPr>
+          </a:p>
+          <a:p>
+            <a:pPr marL="514350" indent="-514350">
+              <a:lnSpc>
+                <a:spcPct val="200000"/>
+              </a:lnSpc>
+              <a:buAutoNum type="arabicPeriod"/>
+            </a:pPr>
+            <a:r>
+              <a:rPr lang="ko-KR" altLang="en-US" sz="2000" b="1" dirty="0">
+                <a:latin typeface="한컴 말랑말랑 Bold" panose="020F0803000000000000" pitchFamily="50" charset="-127"/>
+                <a:ea typeface="한컴 말랑말랑 Bold" panose="020F0803000000000000" pitchFamily="50" charset="-127"/>
+              </a:rPr>
+              <a:t>통계학</a:t>
+            </a:r>
+            <a:r>
+              <a:rPr lang="en-US" altLang="ko-KR" sz="2000" b="1" dirty="0">
+                <a:latin typeface="한컴 말랑말랑 Bold" panose="020F0803000000000000" pitchFamily="50" charset="-127"/>
+                <a:ea typeface="한컴 말랑말랑 Bold" panose="020F0803000000000000" pitchFamily="50" charset="-127"/>
+              </a:rPr>
+              <a:t>(Statistics)</a:t>
+            </a:r>
+          </a:p>
+          <a:p>
+            <a:pPr marL="514350" indent="-514350">
+              <a:lnSpc>
+                <a:spcPct val="200000"/>
+              </a:lnSpc>
+              <a:buAutoNum type="arabicPeriod"/>
+            </a:pPr>
+            <a:r>
+              <a:rPr lang="ko-KR" altLang="en-US" sz="2000" b="1" dirty="0">
+                <a:latin typeface="한컴 말랑말랑 Bold" panose="020F0803000000000000" pitchFamily="50" charset="-127"/>
+                <a:ea typeface="한컴 말랑말랑 Bold" panose="020F0803000000000000" pitchFamily="50" charset="-127"/>
+              </a:rPr>
+              <a:t>모집단과</a:t>
+            </a:r>
+            <a:r>
+              <a:rPr lang="en-US" altLang="ko-KR" sz="2000" b="1" dirty="0">
+                <a:latin typeface="한컴 말랑말랑 Bold" panose="020F0803000000000000" pitchFamily="50" charset="-127"/>
+                <a:ea typeface="한컴 말랑말랑 Bold" panose="020F0803000000000000" pitchFamily="50" charset="-127"/>
+              </a:rPr>
+              <a:t> </a:t>
+            </a:r>
+            <a:r>
+              <a:rPr lang="ko-KR" altLang="en-US" sz="2000" b="1" dirty="0">
+                <a:latin typeface="한컴 말랑말랑 Bold" panose="020F0803000000000000" pitchFamily="50" charset="-127"/>
+                <a:ea typeface="한컴 말랑말랑 Bold" panose="020F0803000000000000" pitchFamily="50" charset="-127"/>
+              </a:rPr>
+              <a:t>표본조사 방법</a:t>
+            </a:r>
+            <a:endParaRPr lang="en-US" altLang="ko-KR" sz="2000" b="1" dirty="0">
+              <a:latin typeface="한컴 말랑말랑 Bold" panose="020F0803000000000000" pitchFamily="50" charset="-127"/>
+              <a:ea typeface="한컴 말랑말랑 Bold" panose="020F0803000000000000" pitchFamily="50" charset="-127"/>
+            </a:endParaRPr>
+          </a:p>
+          <a:p>
+            <a:pPr marL="514350" indent="-514350">
+              <a:lnSpc>
+                <a:spcPct val="200000"/>
+              </a:lnSpc>
+              <a:buAutoNum type="arabicPeriod"/>
+            </a:pPr>
+            <a:r>
+              <a:rPr lang="ko-KR" altLang="en-US" sz="2000" b="1" dirty="0">
+                <a:latin typeface="한컴 말랑말랑 Bold" panose="020F0803000000000000" pitchFamily="50" charset="-127"/>
+                <a:ea typeface="한컴 말랑말랑 Bold" panose="020F0803000000000000" pitchFamily="50" charset="-127"/>
+              </a:rPr>
+              <a:t>데이터의 종류</a:t>
+            </a:r>
+            <a:r>
+              <a:rPr lang="en-US" altLang="ko-KR" sz="2000" b="1" dirty="0">
+                <a:latin typeface="한컴 말랑말랑 Bold" panose="020F0803000000000000" pitchFamily="50" charset="-127"/>
+                <a:ea typeface="한컴 말랑말랑 Bold" panose="020F0803000000000000" pitchFamily="50" charset="-127"/>
+              </a:rPr>
+              <a:t>(Data type)</a:t>
+            </a:r>
+          </a:p>
+          <a:p>
+            <a:pPr marL="514350" indent="-514350">
+              <a:lnSpc>
+                <a:spcPct val="200000"/>
+              </a:lnSpc>
+              <a:buAutoNum type="arabicPeriod"/>
+            </a:pPr>
+            <a:r>
+              <a:rPr lang="ko-KR" altLang="en-US" sz="2000" b="1" dirty="0">
+                <a:latin typeface="한컴 말랑말랑 Bold" panose="020F0803000000000000" pitchFamily="50" charset="-127"/>
+                <a:ea typeface="한컴 말랑말랑 Bold" panose="020F0803000000000000" pitchFamily="50" charset="-127"/>
+              </a:rPr>
+              <a:t>주요</a:t>
+            </a:r>
+            <a:r>
+              <a:rPr lang="en-US" altLang="ko-KR" sz="2000" b="1" dirty="0">
+                <a:latin typeface="한컴 말랑말랑 Bold" panose="020F0803000000000000" pitchFamily="50" charset="-127"/>
+                <a:ea typeface="한컴 말랑말랑 Bold" panose="020F0803000000000000" pitchFamily="50" charset="-127"/>
+              </a:rPr>
+              <a:t> </a:t>
+            </a:r>
+            <a:r>
+              <a:rPr lang="ko-KR" altLang="en-US" sz="2000" b="1" dirty="0">
+                <a:latin typeface="한컴 말랑말랑 Bold" panose="020F0803000000000000" pitchFamily="50" charset="-127"/>
+                <a:ea typeface="한컴 말랑말랑 Bold" panose="020F0803000000000000" pitchFamily="50" charset="-127"/>
+              </a:rPr>
+              <a:t>통계량</a:t>
+            </a:r>
+            <a:r>
+              <a:rPr lang="en-US" altLang="ko-KR" sz="2000" b="1" dirty="0">
+                <a:latin typeface="한컴 말랑말랑 Bold" panose="020F0803000000000000" pitchFamily="50" charset="-127"/>
+                <a:ea typeface="한컴 말랑말랑 Bold" panose="020F0803000000000000" pitchFamily="50" charset="-127"/>
+              </a:rPr>
+              <a:t>(Statistic)</a:t>
+            </a:r>
+          </a:p>
+          <a:p>
+            <a:pPr marL="514350" indent="-514350">
+              <a:lnSpc>
+                <a:spcPct val="200000"/>
+              </a:lnSpc>
+              <a:buAutoNum type="arabicPeriod"/>
+            </a:pPr>
+            <a:r>
+              <a:rPr lang="ko-KR" altLang="en-US" sz="2000" b="1" dirty="0" err="1">
+                <a:latin typeface="한컴 말랑말랑 Bold" panose="020F0803000000000000" pitchFamily="50" charset="-127"/>
+                <a:ea typeface="한컴 말랑말랑 Bold" panose="020F0803000000000000" pitchFamily="50" charset="-127"/>
+              </a:rPr>
+              <a:t>다변량</a:t>
+            </a:r>
+            <a:r>
+              <a:rPr lang="ko-KR" altLang="en-US" sz="2000" b="1" dirty="0">
+                <a:latin typeface="한컴 말랑말랑 Bold" panose="020F0803000000000000" pitchFamily="50" charset="-127"/>
+                <a:ea typeface="한컴 말랑말랑 Bold" panose="020F0803000000000000" pitchFamily="50" charset="-127"/>
+              </a:rPr>
+              <a:t> 분석</a:t>
+            </a:r>
+            <a:r>
+              <a:rPr lang="en-US" altLang="ko-KR" sz="2000" b="1" dirty="0">
+                <a:latin typeface="한컴 말랑말랑 Bold" panose="020F0803000000000000" pitchFamily="50" charset="-127"/>
+                <a:ea typeface="한컴 말랑말랑 Bold" panose="020F0803000000000000" pitchFamily="50" charset="-127"/>
+              </a:rPr>
+              <a:t>(Multivariate Analysis)</a:t>
+            </a:r>
+          </a:p>
+          <a:p>
+            <a:pPr>
+              <a:lnSpc>
+                <a:spcPct val="200000"/>
+              </a:lnSpc>
+            </a:pPr>
+            <a:endParaRPr lang="ko-KR" altLang="en-US" sz="2800" b="1" dirty="0">
+              <a:latin typeface="한컴 말랑말랑 Bold" panose="020F0803000000000000" pitchFamily="50" charset="-127"/>
+              <a:ea typeface="한컴 말랑말랑 Bold" panose="020F0803000000000000" pitchFamily="50" charset="-127"/>
+            </a:endParaRPr>
+          </a:p>
+        </p:txBody>
+      </p:sp>
+    </p:spTree>
+    <p:extLst>
+      <p:ext uri="{BB962C8B-B14F-4D97-AF65-F5344CB8AC3E}">
+        <p14:creationId xmlns:p14="http://schemas.microsoft.com/office/powerpoint/2010/main" val="4216523584"/>
+      </p:ext>
+    </p:extLst>
+  </p:cSld>
+  <p:clrMapOvr>
+    <a:masterClrMapping/>
+  </p:clrMapOvr>
+  <mc:AlternateContent xmlns:mc="http://schemas.openxmlformats.org/markup-compatibility/2006" xmlns:p14="http://schemas.microsoft.com/office/powerpoint/2010/main">
+    <mc:Choice Requires="p14">
+      <p:transition spd="med" p14:dur="700">
+        <p:fade/>
+      </p:transition>
+    </mc:Choice>
+    <mc:Fallback xmlns="">
+      <p:transition spd="med">
+        <p:fade/>
+      </p:transition>
+    </mc:Fallback>
+  </mc:AlternateContent>
+</p:sld>
+</file>
+
+<file path=ppt/slides/slide40.xml><?xml version="1.0" encoding="utf-8"?>
 <p:sld xmlns:a="http://schemas.openxmlformats.org/drawingml/2006/main" xmlns:r="http://schemas.openxmlformats.org/officeDocument/2006/relationships" xmlns:p="http://schemas.openxmlformats.org/presentationml/2006/main">
   <p:cSld>
     <p:spTree>
@@ -14307,7 +14906,7 @@
             <a:pPr rtl="0"/>
             <a:fld id="{A3F31473-23EB-4724-8B59-FE6D21D89FA4}" type="slidenum">
               <a:rPr lang="en-US" altLang="ko-KR" noProof="0" smtClean="0"/>
-              <a:t>39</a:t>
+              <a:t>40</a:t>
             </a:fld>
             <a:endParaRPr lang="en-US" altLang="ko-KR" noProof="0" dirty="0"/>
           </a:p>
@@ -14362,115 +14961,7 @@
 </p:sld>
 </file>
 
-<file path=ppt/slides/slide4.xml><?xml version="1.0" encoding="utf-8"?>
-<p:sld xmlns:a="http://schemas.openxmlformats.org/drawingml/2006/main" xmlns:r="http://schemas.openxmlformats.org/officeDocument/2006/relationships" xmlns:p="http://schemas.openxmlformats.org/presentationml/2006/main">
-  <p:cSld>
-    <p:spTree>
-      <p:nvGrpSpPr>
-        <p:cNvPr id="1" name="">
-          <a:extLst>
-            <a:ext uri="{FF2B5EF4-FFF2-40B4-BE49-F238E27FC236}">
-              <a16:creationId xmlns:a16="http://schemas.microsoft.com/office/drawing/2014/main" id="{7690E2C1-BB1A-4FCC-4EBC-8B540F598F5F}"/>
-            </a:ext>
-          </a:extLst>
-        </p:cNvPr>
-        <p:cNvGrpSpPr/>
-        <p:nvPr/>
-      </p:nvGrpSpPr>
-      <p:grpSpPr>
-        <a:xfrm>
-          <a:off x="0" y="0"/>
-          <a:ext cx="0" cy="0"/>
-          <a:chOff x="0" y="0"/>
-          <a:chExt cx="0" cy="0"/>
-        </a:xfrm>
-      </p:grpSpPr>
-      <p:pic>
-        <p:nvPicPr>
-          <p:cNvPr id="5" name="그림 4">
-            <a:extLst>
-              <a:ext uri="{FF2B5EF4-FFF2-40B4-BE49-F238E27FC236}">
-                <a16:creationId xmlns:a16="http://schemas.microsoft.com/office/drawing/2014/main" id="{85CDD0C3-0723-5479-A784-C68987AC40BF}"/>
-              </a:ext>
-            </a:extLst>
-          </p:cNvPr>
-          <p:cNvPicPr>
-            <a:picLocks noChangeAspect="1"/>
-          </p:cNvPicPr>
-          <p:nvPr/>
-        </p:nvPicPr>
-        <p:blipFill>
-          <a:blip r:embed="rId3"/>
-          <a:stretch>
-            <a:fillRect/>
-          </a:stretch>
-        </p:blipFill>
-        <p:spPr>
-          <a:xfrm>
-            <a:off x="1629916" y="1268760"/>
-            <a:ext cx="8890594" cy="4622186"/>
-          </a:xfrm>
-          <a:prstGeom prst="rect">
-            <a:avLst/>
-          </a:prstGeom>
-        </p:spPr>
-      </p:pic>
-      <p:sp>
-        <p:nvSpPr>
-          <p:cNvPr id="8" name="슬라이드 번호 개체 틀 7">
-            <a:extLst>
-              <a:ext uri="{FF2B5EF4-FFF2-40B4-BE49-F238E27FC236}">
-                <a16:creationId xmlns:a16="http://schemas.microsoft.com/office/drawing/2014/main" id="{4EF241B0-03F6-4174-6351-DEA7C3022824}"/>
-              </a:ext>
-            </a:extLst>
-          </p:cNvPr>
-          <p:cNvSpPr>
-            <a:spLocks noGrp="1"/>
-          </p:cNvSpPr>
-          <p:nvPr>
-            <p:ph type="sldNum" sz="quarter" idx="12"/>
-          </p:nvPr>
-        </p:nvSpPr>
-        <p:spPr/>
-        <p:txBody>
-          <a:bodyPr/>
-          <a:lstStyle/>
-          <a:p>
-            <a:pPr rtl="0"/>
-            <a:fld id="{A3F31473-23EB-4724-8B59-FE6D21D89FA4}" type="slidenum">
-              <a:rPr lang="en-US" altLang="ko-KR" noProof="0" smtClean="0"/>
-              <a:t>4</a:t>
-            </a:fld>
-            <a:endParaRPr lang="en-US" altLang="ko-KR" noProof="0" dirty="0"/>
-          </a:p>
-        </p:txBody>
-      </p:sp>
-    </p:spTree>
-    <p:extLst>
-      <p:ext uri="{BB962C8B-B14F-4D97-AF65-F5344CB8AC3E}">
-        <p14:creationId xmlns:p14="http://schemas.microsoft.com/office/powerpoint/2010/main" val="810907724"/>
-      </p:ext>
-    </p:extLst>
-  </p:cSld>
-  <p:clrMapOvr>
-    <a:masterClrMapping/>
-  </p:clrMapOvr>
-  <mc:AlternateContent xmlns:mc="http://schemas.openxmlformats.org/markup-compatibility/2006" xmlns:p14="http://schemas.microsoft.com/office/powerpoint/2010/main">
-    <mc:Choice Requires="p14">
-      <p:transition spd="med" p14:dur="700">
-        <p:fade/>
-      </p:transition>
-    </mc:Choice>
-    <mc:Fallback xmlns="">
-      <p:transition spd="med">
-        <p:fade/>
-      </p:transition>
-    </mc:Fallback>
-  </mc:AlternateContent>
-</p:sld>
-</file>
-
-<file path=ppt/slides/slide40.xml><?xml version="1.0" encoding="utf-8"?>
+<file path=ppt/slides/slide41.xml><?xml version="1.0" encoding="utf-8"?>
 <p:sld xmlns:a="http://schemas.openxmlformats.org/drawingml/2006/main" xmlns:r="http://schemas.openxmlformats.org/officeDocument/2006/relationships" xmlns:p="http://schemas.openxmlformats.org/presentationml/2006/main">
   <p:cSld>
     <p:spTree>
@@ -14505,7 +14996,7 @@
             <a:pPr rtl="0"/>
             <a:fld id="{A3F31473-23EB-4724-8B59-FE6D21D89FA4}" type="slidenum">
               <a:rPr lang="en-US" altLang="ko-KR" noProof="0" smtClean="0"/>
-              <a:t>40</a:t>
+              <a:t>41</a:t>
             </a:fld>
             <a:endParaRPr lang="en-US" altLang="ko-KR" noProof="0" dirty="0"/>
           </a:p>
@@ -14560,7 +15051,7 @@
 </p:sld>
 </file>
 
-<file path=ppt/slides/slide41.xml><?xml version="1.0" encoding="utf-8"?>
+<file path=ppt/slides/slide42.xml><?xml version="1.0" encoding="utf-8"?>
 <p:sld xmlns:a="http://schemas.openxmlformats.org/drawingml/2006/main" xmlns:r="http://schemas.openxmlformats.org/officeDocument/2006/relationships" xmlns:p="http://schemas.openxmlformats.org/presentationml/2006/main">
   <p:cSld>
     <p:spTree>
@@ -14595,7 +15086,7 @@
             <a:pPr rtl="0"/>
             <a:fld id="{A3F31473-23EB-4724-8B59-FE6D21D89FA4}" type="slidenum">
               <a:rPr lang="en-US" altLang="ko-KR" noProof="0" smtClean="0"/>
-              <a:t>41</a:t>
+              <a:t>42</a:t>
             </a:fld>
             <a:endParaRPr lang="en-US" altLang="ko-KR" noProof="0" dirty="0"/>
           </a:p>
@@ -14704,7 +15195,7 @@
 </p:sld>
 </file>
 
-<file path=ppt/slides/slide42.xml><?xml version="1.0" encoding="utf-8"?>
+<file path=ppt/slides/slide43.xml><?xml version="1.0" encoding="utf-8"?>
 <p:sld xmlns:a="http://schemas.openxmlformats.org/drawingml/2006/main" xmlns:r="http://schemas.openxmlformats.org/officeDocument/2006/relationships" xmlns:p="http://schemas.openxmlformats.org/presentationml/2006/main">
   <p:cSld>
     <p:spTree>
@@ -14751,7 +15242,7 @@
             <a:pPr rtl="0"/>
             <a:fld id="{A3F31473-23EB-4724-8B59-FE6D21D89FA4}" type="slidenum">
               <a:rPr lang="en-US" altLang="ko-KR" noProof="0" smtClean="0"/>
-              <a:t>42</a:t>
+              <a:t>43</a:t>
             </a:fld>
             <a:endParaRPr lang="en-US" altLang="ko-KR" noProof="0" dirty="0"/>
           </a:p>
@@ -14926,6 +15417,114 @@
         <p:cNvPr id="1" name="">
           <a:extLst>
             <a:ext uri="{FF2B5EF4-FFF2-40B4-BE49-F238E27FC236}">
+              <a16:creationId xmlns:a16="http://schemas.microsoft.com/office/drawing/2014/main" id="{477EB452-05E2-015D-FE61-A162EC6192C8}"/>
+            </a:ext>
+          </a:extLst>
+        </p:cNvPr>
+        <p:cNvGrpSpPr/>
+        <p:nvPr/>
+      </p:nvGrpSpPr>
+      <p:grpSpPr>
+        <a:xfrm>
+          <a:off x="0" y="0"/>
+          <a:ext cx="0" cy="0"/>
+          <a:chOff x="0" y="0"/>
+          <a:chExt cx="0" cy="0"/>
+        </a:xfrm>
+      </p:grpSpPr>
+      <p:pic>
+        <p:nvPicPr>
+          <p:cNvPr id="5" name="그림 4">
+            <a:extLst>
+              <a:ext uri="{FF2B5EF4-FFF2-40B4-BE49-F238E27FC236}">
+                <a16:creationId xmlns:a16="http://schemas.microsoft.com/office/drawing/2014/main" id="{458AEE9E-09EC-07F3-0702-911E341836D0}"/>
+              </a:ext>
+            </a:extLst>
+          </p:cNvPr>
+          <p:cNvPicPr>
+            <a:picLocks noChangeAspect="1"/>
+          </p:cNvPicPr>
+          <p:nvPr/>
+        </p:nvPicPr>
+        <p:blipFill>
+          <a:blip r:embed="rId3"/>
+          <a:stretch>
+            <a:fillRect/>
+          </a:stretch>
+        </p:blipFill>
+        <p:spPr>
+          <a:xfrm>
+            <a:off x="1629916" y="1268760"/>
+            <a:ext cx="8890594" cy="4622186"/>
+          </a:xfrm>
+          <a:prstGeom prst="rect">
+            <a:avLst/>
+          </a:prstGeom>
+        </p:spPr>
+      </p:pic>
+      <p:sp>
+        <p:nvSpPr>
+          <p:cNvPr id="8" name="슬라이드 번호 개체 틀 7">
+            <a:extLst>
+              <a:ext uri="{FF2B5EF4-FFF2-40B4-BE49-F238E27FC236}">
+                <a16:creationId xmlns:a16="http://schemas.microsoft.com/office/drawing/2014/main" id="{3FE11E70-447B-E78B-ACD4-E8BE8092BDAD}"/>
+              </a:ext>
+            </a:extLst>
+          </p:cNvPr>
+          <p:cNvSpPr>
+            <a:spLocks noGrp="1"/>
+          </p:cNvSpPr>
+          <p:nvPr>
+            <p:ph type="sldNum" sz="quarter" idx="12"/>
+          </p:nvPr>
+        </p:nvSpPr>
+        <p:spPr/>
+        <p:txBody>
+          <a:bodyPr/>
+          <a:lstStyle/>
+          <a:p>
+            <a:pPr rtl="0"/>
+            <a:fld id="{A3F31473-23EB-4724-8B59-FE6D21D89FA4}" type="slidenum">
+              <a:rPr lang="en-US" altLang="ko-KR" noProof="0" smtClean="0"/>
+              <a:t>5</a:t>
+            </a:fld>
+            <a:endParaRPr lang="en-US" altLang="ko-KR" noProof="0" dirty="0"/>
+          </a:p>
+        </p:txBody>
+      </p:sp>
+    </p:spTree>
+    <p:extLst>
+      <p:ext uri="{BB962C8B-B14F-4D97-AF65-F5344CB8AC3E}">
+        <p14:creationId xmlns:p14="http://schemas.microsoft.com/office/powerpoint/2010/main" val="1917433086"/>
+      </p:ext>
+    </p:extLst>
+  </p:cSld>
+  <p:clrMapOvr>
+    <a:masterClrMapping/>
+  </p:clrMapOvr>
+  <mc:AlternateContent xmlns:mc="http://schemas.openxmlformats.org/markup-compatibility/2006" xmlns:p14="http://schemas.microsoft.com/office/powerpoint/2010/main">
+    <mc:Choice Requires="p14">
+      <p:transition spd="med" p14:dur="700">
+        <p:fade/>
+      </p:transition>
+    </mc:Choice>
+    <mc:Fallback xmlns="">
+      <p:transition spd="med">
+        <p:fade/>
+      </p:transition>
+    </mc:Fallback>
+  </mc:AlternateContent>
+</p:sld>
+</file>
+
+<file path=ppt/slides/slide6.xml><?xml version="1.0" encoding="utf-8"?>
+<p:sld xmlns:a="http://schemas.openxmlformats.org/drawingml/2006/main" xmlns:r="http://schemas.openxmlformats.org/officeDocument/2006/relationships" xmlns:p="http://schemas.openxmlformats.org/presentationml/2006/main">
+  <p:cSld>
+    <p:spTree>
+      <p:nvGrpSpPr>
+        <p:cNvPr id="1" name="">
+          <a:extLst>
+            <a:ext uri="{FF2B5EF4-FFF2-40B4-BE49-F238E27FC236}">
               <a16:creationId xmlns:a16="http://schemas.microsoft.com/office/drawing/2014/main" id="{17FDC220-2BC9-E0B4-4F0D-65A82F8E117D}"/>
             </a:ext>
           </a:extLst>
@@ -15019,7 +15618,7 @@
             <a:pPr rtl="0"/>
             <a:fld id="{A3F31473-23EB-4724-8B59-FE6D21D89FA4}" type="slidenum">
               <a:rPr lang="en-US" altLang="ko-KR" noProof="0" smtClean="0"/>
-              <a:t>5</a:t>
+              <a:t>6</a:t>
             </a:fld>
             <a:endParaRPr lang="en-US" altLang="ko-KR" noProof="0" dirty="0"/>
           </a:p>
@@ -15250,7 +15849,7 @@
 </p:sld>
 </file>
 
-<file path=ppt/slides/slide6.xml><?xml version="1.0" encoding="utf-8"?>
+<file path=ppt/slides/slide7.xml><?xml version="1.0" encoding="utf-8"?>
 <p:sld xmlns:a="http://schemas.openxmlformats.org/drawingml/2006/main" xmlns:r="http://schemas.openxmlformats.org/officeDocument/2006/relationships" xmlns:p="http://schemas.openxmlformats.org/presentationml/2006/main">
   <p:cSld>
     <p:spTree>
@@ -15309,7 +15908,7 @@
             <a:pPr rtl="0"/>
             <a:fld id="{A3F31473-23EB-4724-8B59-FE6D21D89FA4}" type="slidenum">
               <a:rPr lang="en-US" altLang="ko-KR" noProof="0" smtClean="0"/>
-              <a:t>6</a:t>
+              <a:t>7</a:t>
             </a:fld>
             <a:endParaRPr lang="en-US" altLang="ko-KR" noProof="0" dirty="0"/>
           </a:p>
@@ -15340,7 +15939,7 @@
 </p:sld>
 </file>
 
-<file path=ppt/slides/slide7.xml><?xml version="1.0" encoding="utf-8"?>
+<file path=ppt/slides/slide8.xml><?xml version="1.0" encoding="utf-8"?>
 <p:sld xmlns:a="http://schemas.openxmlformats.org/drawingml/2006/main" xmlns:r="http://schemas.openxmlformats.org/officeDocument/2006/relationships" xmlns:p="http://schemas.openxmlformats.org/presentationml/2006/main">
   <p:cSld>
     <p:spTree>
@@ -15375,7 +15974,7 @@
             <a:pPr rtl="0"/>
             <a:fld id="{A3F31473-23EB-4724-8B59-FE6D21D89FA4}" type="slidenum">
               <a:rPr lang="en-US" altLang="ko-KR" noProof="0" smtClean="0"/>
-              <a:t>7</a:t>
+              <a:t>8</a:t>
             </a:fld>
             <a:endParaRPr lang="en-US" altLang="ko-KR" noProof="0" dirty="0"/>
           </a:p>
@@ -15704,7 +16303,7 @@
 </p:sld>
 </file>
 
-<file path=ppt/slides/slide8.xml><?xml version="1.0" encoding="utf-8"?>
+<file path=ppt/slides/slide9.xml><?xml version="1.0" encoding="utf-8"?>
 <p:sld xmlns:a="http://schemas.openxmlformats.org/drawingml/2006/main" xmlns:r="http://schemas.openxmlformats.org/officeDocument/2006/relationships" xmlns:p="http://schemas.openxmlformats.org/presentationml/2006/main">
   <p:cSld>
     <p:spTree>
@@ -15739,7 +16338,7 @@
             <a:pPr rtl="0"/>
             <a:fld id="{A3F31473-23EB-4724-8B59-FE6D21D89FA4}" type="slidenum">
               <a:rPr lang="en-US" altLang="ko-KR" noProof="0" smtClean="0"/>
-              <a:t>8</a:t>
+              <a:t>9</a:t>
             </a:fld>
             <a:endParaRPr lang="en-US" altLang="ko-KR" noProof="0" dirty="0"/>
           </a:p>
@@ -15773,166 +16372,6 @@
     <p:extLst>
       <p:ext uri="{BB962C8B-B14F-4D97-AF65-F5344CB8AC3E}">
         <p14:creationId xmlns:p14="http://schemas.microsoft.com/office/powerpoint/2010/main" val="236119893"/>
-      </p:ext>
-    </p:extLst>
-  </p:cSld>
-  <p:clrMapOvr>
-    <a:masterClrMapping/>
-  </p:clrMapOvr>
-  <mc:AlternateContent xmlns:mc="http://schemas.openxmlformats.org/markup-compatibility/2006" xmlns:p14="http://schemas.microsoft.com/office/powerpoint/2010/main">
-    <mc:Choice Requires="p14">
-      <p:transition spd="med" p14:dur="700">
-        <p:fade/>
-      </p:transition>
-    </mc:Choice>
-    <mc:Fallback xmlns="">
-      <p:transition spd="med">
-        <p:fade/>
-      </p:transition>
-    </mc:Fallback>
-  </mc:AlternateContent>
-</p:sld>
-</file>
-
-<file path=ppt/slides/slide9.xml><?xml version="1.0" encoding="utf-8"?>
-<p:sld xmlns:a="http://schemas.openxmlformats.org/drawingml/2006/main" xmlns:r="http://schemas.openxmlformats.org/officeDocument/2006/relationships" xmlns:p="http://schemas.openxmlformats.org/presentationml/2006/main">
-  <p:cSld>
-    <p:spTree>
-      <p:nvGrpSpPr>
-        <p:cNvPr id="1" name=""/>
-        <p:cNvGrpSpPr/>
-        <p:nvPr/>
-      </p:nvGrpSpPr>
-      <p:grpSpPr>
-        <a:xfrm>
-          <a:off x="0" y="0"/>
-          <a:ext cx="0" cy="0"/>
-          <a:chOff x="0" y="0"/>
-          <a:chExt cx="0" cy="0"/>
-        </a:xfrm>
-      </p:grpSpPr>
-      <p:sp>
-        <p:nvSpPr>
-          <p:cNvPr id="2" name="슬라이드 번호 개체 틀 1"/>
-          <p:cNvSpPr>
-            <a:spLocks noGrp="1"/>
-          </p:cNvSpPr>
-          <p:nvPr>
-            <p:ph type="sldNum" sz="quarter" idx="12"/>
-          </p:nvPr>
-        </p:nvSpPr>
-        <p:spPr/>
-        <p:txBody>
-          <a:bodyPr/>
-          <a:lstStyle/>
-          <a:p>
-            <a:pPr rtl="0"/>
-            <a:fld id="{A3F31473-23EB-4724-8B59-FE6D21D89FA4}" type="slidenum">
-              <a:rPr lang="en-US" altLang="ko-KR" noProof="0" smtClean="0"/>
-              <a:t>9</a:t>
-            </a:fld>
-            <a:endParaRPr lang="en-US" altLang="ko-KR" noProof="0" dirty="0"/>
-          </a:p>
-        </p:txBody>
-      </p:sp>
-      <p:pic>
-        <p:nvPicPr>
-          <p:cNvPr id="3" name="그림 2"/>
-          <p:cNvPicPr>
-            <a:picLocks noChangeAspect="1"/>
-          </p:cNvPicPr>
-          <p:nvPr/>
-        </p:nvPicPr>
-        <p:blipFill>
-          <a:blip r:embed="rId3"/>
-          <a:stretch>
-            <a:fillRect/>
-          </a:stretch>
-        </p:blipFill>
-        <p:spPr>
-          <a:xfrm>
-            <a:off x="909836" y="692696"/>
-            <a:ext cx="9838746" cy="5326966"/>
-          </a:xfrm>
-          <a:prstGeom prst="rect">
-            <a:avLst/>
-          </a:prstGeom>
-        </p:spPr>
-      </p:pic>
-      <p:sp>
-        <p:nvSpPr>
-          <p:cNvPr id="5" name="말풍선: 타원형 4">
-            <a:extLst>
-              <a:ext uri="{FF2B5EF4-FFF2-40B4-BE49-F238E27FC236}">
-                <a16:creationId xmlns:a16="http://schemas.microsoft.com/office/drawing/2014/main" id="{EA024606-6906-5C69-50C6-9C14C607C158}"/>
-              </a:ext>
-            </a:extLst>
-          </p:cNvPr>
-          <p:cNvSpPr/>
-          <p:nvPr/>
-        </p:nvSpPr>
-        <p:spPr>
-          <a:xfrm>
-            <a:off x="7894612" y="5505817"/>
-            <a:ext cx="1944216" cy="850534"/>
-          </a:xfrm>
-          <a:prstGeom prst="wedgeEllipseCallout">
-            <a:avLst>
-              <a:gd name="adj1" fmla="val -67667"/>
-              <a:gd name="adj2" fmla="val -69466"/>
-            </a:avLst>
-          </a:prstGeom>
-        </p:spPr>
-        <p:style>
-          <a:lnRef idx="2">
-            <a:schemeClr val="accent1">
-              <a:shade val="15000"/>
-            </a:schemeClr>
-          </a:lnRef>
-          <a:fillRef idx="1">
-            <a:schemeClr val="accent1"/>
-          </a:fillRef>
-          <a:effectRef idx="0">
-            <a:schemeClr val="accent1"/>
-          </a:effectRef>
-          <a:fontRef idx="minor">
-            <a:schemeClr val="lt1"/>
-          </a:fontRef>
-        </p:style>
-        <p:txBody>
-          <a:bodyPr rtlCol="0" anchor="ctr"/>
-          <a:lstStyle/>
-          <a:p>
-            <a:r>
-              <a:rPr lang="ko-KR" altLang="en-US" b="1" dirty="0">
-                <a:latin typeface="휴먼모음T" panose="02030504000101010101" pitchFamily="18" charset="-127"/>
-                <a:ea typeface="휴먼모음T" panose="02030504000101010101" pitchFamily="18" charset="-127"/>
-              </a:rPr>
-              <a:t>균등 층화</a:t>
-            </a:r>
-            <a:r>
-              <a:rPr lang="en-US" altLang="ko-KR" b="1" dirty="0">
-                <a:latin typeface="휴먼모음T" panose="02030504000101010101" pitchFamily="18" charset="-127"/>
-                <a:ea typeface="휴먼모음T" panose="02030504000101010101" pitchFamily="18" charset="-127"/>
-              </a:rPr>
-              <a:t>, </a:t>
-            </a:r>
-          </a:p>
-          <a:p>
-            <a:r>
-              <a:rPr lang="ko-KR" altLang="en-US" b="1" dirty="0">
-                <a:latin typeface="휴먼모음T" panose="02030504000101010101" pitchFamily="18" charset="-127"/>
-                <a:ea typeface="휴먼모음T" panose="02030504000101010101" pitchFamily="18" charset="-127"/>
-              </a:rPr>
-              <a:t>비례 층화 </a:t>
-            </a:r>
-          </a:p>
-        </p:txBody>
-      </p:sp>
-    </p:spTree>
-    <p:extLst>
-      <p:ext uri="{BB962C8B-B14F-4D97-AF65-F5344CB8AC3E}">
-        <p14:creationId xmlns:p14="http://schemas.microsoft.com/office/powerpoint/2010/main" val="2455660487"/>
       </p:ext>
     </p:extLst>
   </p:cSld>

--- a/1_statistics for machine learning.pptx
+++ b/1_statistics for machine learning.pptx
@@ -5,10 +5,10 @@
     <p:sldMasterId id="2147483648" r:id="rId4"/>
   </p:sldMasterIdLst>
   <p:notesMasterIdLst>
-    <p:notesMasterId r:id="rId48"/>
+    <p:notesMasterId r:id="rId50"/>
   </p:notesMasterIdLst>
   <p:handoutMasterIdLst>
-    <p:handoutMasterId r:id="rId49"/>
+    <p:handoutMasterId r:id="rId51"/>
   </p:handoutMasterIdLst>
   <p:sldIdLst>
     <p:sldId id="256" r:id="rId5"/>
@@ -53,7 +53,9 @@
     <p:sldId id="296" r:id="rId44"/>
     <p:sldId id="297" r:id="rId45"/>
     <p:sldId id="298" r:id="rId46"/>
-    <p:sldId id="303" r:id="rId47"/>
+    <p:sldId id="312" r:id="rId47"/>
+    <p:sldId id="313" r:id="rId48"/>
+    <p:sldId id="303" r:id="rId49"/>
   </p:sldIdLst>
   <p:sldSz cx="12188825" cy="6858000"/>
   <p:notesSz cx="6858000" cy="9144000"/>
@@ -4022,6 +4024,224 @@
         <p:cNvPr id="1" name="">
           <a:extLst>
             <a:ext uri="{FF2B5EF4-FFF2-40B4-BE49-F238E27FC236}">
+              <a16:creationId xmlns:a16="http://schemas.microsoft.com/office/drawing/2014/main" id="{38F71143-DABF-EA7E-268E-8AEF648CCD34}"/>
+            </a:ext>
+          </a:extLst>
+        </p:cNvPr>
+        <p:cNvGrpSpPr/>
+        <p:nvPr/>
+      </p:nvGrpSpPr>
+      <p:grpSpPr>
+        <a:xfrm>
+          <a:off x="0" y="0"/>
+          <a:ext cx="0" cy="0"/>
+          <a:chOff x="0" y="0"/>
+          <a:chExt cx="0" cy="0"/>
+        </a:xfrm>
+      </p:grpSpPr>
+      <p:sp>
+        <p:nvSpPr>
+          <p:cNvPr id="2" name="슬라이드 이미지 개체 틀 1">
+            <a:extLst>
+              <a:ext uri="{FF2B5EF4-FFF2-40B4-BE49-F238E27FC236}">
+                <a16:creationId xmlns:a16="http://schemas.microsoft.com/office/drawing/2014/main" id="{89494D85-59D4-8E07-9043-C956B8E2048E}"/>
+              </a:ext>
+            </a:extLst>
+          </p:cNvPr>
+          <p:cNvSpPr>
+            <a:spLocks noGrp="1" noRot="1" noChangeAspect="1"/>
+          </p:cNvSpPr>
+          <p:nvPr>
+            <p:ph type="sldImg"/>
+          </p:nvPr>
+        </p:nvSpPr>
+        <p:spPr/>
+      </p:sp>
+      <p:sp>
+        <p:nvSpPr>
+          <p:cNvPr id="3" name="슬라이드 노트 개체 틀 2">
+            <a:extLst>
+              <a:ext uri="{FF2B5EF4-FFF2-40B4-BE49-F238E27FC236}">
+                <a16:creationId xmlns:a16="http://schemas.microsoft.com/office/drawing/2014/main" id="{31C20692-F2E3-9FF6-451C-AC6D49D87B1F}"/>
+              </a:ext>
+            </a:extLst>
+          </p:cNvPr>
+          <p:cNvSpPr>
+            <a:spLocks noGrp="1"/>
+          </p:cNvSpPr>
+          <p:nvPr>
+            <p:ph type="body" idx="1"/>
+          </p:nvPr>
+        </p:nvSpPr>
+        <p:spPr/>
+        <p:txBody>
+          <a:bodyPr/>
+          <a:lstStyle/>
+          <a:p>
+            <a:endParaRPr lang="ko-KR" altLang="en-US" dirty="0"/>
+          </a:p>
+        </p:txBody>
+      </p:sp>
+      <p:sp>
+        <p:nvSpPr>
+          <p:cNvPr id="4" name="슬라이드 번호 개체 틀 3">
+            <a:extLst>
+              <a:ext uri="{FF2B5EF4-FFF2-40B4-BE49-F238E27FC236}">
+                <a16:creationId xmlns:a16="http://schemas.microsoft.com/office/drawing/2014/main" id="{234C3582-D115-7655-249B-F44F9865AC54}"/>
+              </a:ext>
+            </a:extLst>
+          </p:cNvPr>
+          <p:cNvSpPr>
+            <a:spLocks noGrp="1"/>
+          </p:cNvSpPr>
+          <p:nvPr>
+            <p:ph type="sldNum" sz="quarter" idx="10"/>
+          </p:nvPr>
+        </p:nvSpPr>
+        <p:spPr/>
+        <p:txBody>
+          <a:bodyPr/>
+          <a:lstStyle/>
+          <a:p>
+            <a:pPr rtl="0"/>
+            <a:fld id="{5FB91549-43BF-425A-AF25-75262019208C}" type="slidenum">
+              <a:rPr lang="en-US" altLang="ko-KR" smtClean="0"/>
+              <a:t>43</a:t>
+            </a:fld>
+            <a:endParaRPr lang="ko-KR" altLang="en-US" dirty="0"/>
+          </a:p>
+        </p:txBody>
+      </p:sp>
+    </p:spTree>
+    <p:extLst>
+      <p:ext uri="{BB962C8B-B14F-4D97-AF65-F5344CB8AC3E}">
+        <p14:creationId xmlns:p14="http://schemas.microsoft.com/office/powerpoint/2010/main" val="675006654"/>
+      </p:ext>
+    </p:extLst>
+  </p:cSld>
+  <p:clrMapOvr>
+    <a:masterClrMapping/>
+  </p:clrMapOvr>
+</p:notes>
+</file>
+
+<file path=ppt/notesSlides/notesSlide43.xml><?xml version="1.0" encoding="utf-8"?>
+<p:notes xmlns:a="http://schemas.openxmlformats.org/drawingml/2006/main" xmlns:r="http://schemas.openxmlformats.org/officeDocument/2006/relationships" xmlns:p="http://schemas.openxmlformats.org/presentationml/2006/main">
+  <p:cSld>
+    <p:spTree>
+      <p:nvGrpSpPr>
+        <p:cNvPr id="1" name="">
+          <a:extLst>
+            <a:ext uri="{FF2B5EF4-FFF2-40B4-BE49-F238E27FC236}">
+              <a16:creationId xmlns:a16="http://schemas.microsoft.com/office/drawing/2014/main" id="{296A85E2-CC37-0D7D-6FDD-AB3B01B4DC09}"/>
+            </a:ext>
+          </a:extLst>
+        </p:cNvPr>
+        <p:cNvGrpSpPr/>
+        <p:nvPr/>
+      </p:nvGrpSpPr>
+      <p:grpSpPr>
+        <a:xfrm>
+          <a:off x="0" y="0"/>
+          <a:ext cx="0" cy="0"/>
+          <a:chOff x="0" y="0"/>
+          <a:chExt cx="0" cy="0"/>
+        </a:xfrm>
+      </p:grpSpPr>
+      <p:sp>
+        <p:nvSpPr>
+          <p:cNvPr id="2" name="슬라이드 이미지 개체 틀 1">
+            <a:extLst>
+              <a:ext uri="{FF2B5EF4-FFF2-40B4-BE49-F238E27FC236}">
+                <a16:creationId xmlns:a16="http://schemas.microsoft.com/office/drawing/2014/main" id="{7BD0E0A1-3B33-C300-2C52-A65FC4EB2894}"/>
+              </a:ext>
+            </a:extLst>
+          </p:cNvPr>
+          <p:cNvSpPr>
+            <a:spLocks noGrp="1" noRot="1" noChangeAspect="1"/>
+          </p:cNvSpPr>
+          <p:nvPr>
+            <p:ph type="sldImg"/>
+          </p:nvPr>
+        </p:nvSpPr>
+        <p:spPr/>
+      </p:sp>
+      <p:sp>
+        <p:nvSpPr>
+          <p:cNvPr id="3" name="슬라이드 노트 개체 틀 2">
+            <a:extLst>
+              <a:ext uri="{FF2B5EF4-FFF2-40B4-BE49-F238E27FC236}">
+                <a16:creationId xmlns:a16="http://schemas.microsoft.com/office/drawing/2014/main" id="{AF11F657-B57B-744C-71C3-36669E7C1296}"/>
+              </a:ext>
+            </a:extLst>
+          </p:cNvPr>
+          <p:cNvSpPr>
+            <a:spLocks noGrp="1"/>
+          </p:cNvSpPr>
+          <p:nvPr>
+            <p:ph type="body" idx="1"/>
+          </p:nvPr>
+        </p:nvSpPr>
+        <p:spPr/>
+        <p:txBody>
+          <a:bodyPr/>
+          <a:lstStyle/>
+          <a:p>
+            <a:endParaRPr lang="ko-KR" altLang="en-US" dirty="0"/>
+          </a:p>
+        </p:txBody>
+      </p:sp>
+      <p:sp>
+        <p:nvSpPr>
+          <p:cNvPr id="4" name="슬라이드 번호 개체 틀 3">
+            <a:extLst>
+              <a:ext uri="{FF2B5EF4-FFF2-40B4-BE49-F238E27FC236}">
+                <a16:creationId xmlns:a16="http://schemas.microsoft.com/office/drawing/2014/main" id="{D264ED0A-E88E-F969-255D-3C60C2E772B6}"/>
+              </a:ext>
+            </a:extLst>
+          </p:cNvPr>
+          <p:cNvSpPr>
+            <a:spLocks noGrp="1"/>
+          </p:cNvSpPr>
+          <p:nvPr>
+            <p:ph type="sldNum" sz="quarter" idx="10"/>
+          </p:nvPr>
+        </p:nvSpPr>
+        <p:spPr/>
+        <p:txBody>
+          <a:bodyPr/>
+          <a:lstStyle/>
+          <a:p>
+            <a:pPr rtl="0"/>
+            <a:fld id="{5FB91549-43BF-425A-AF25-75262019208C}" type="slidenum">
+              <a:rPr lang="en-US" altLang="ko-KR" smtClean="0"/>
+              <a:t>44</a:t>
+            </a:fld>
+            <a:endParaRPr lang="ko-KR" altLang="en-US" dirty="0"/>
+          </a:p>
+        </p:txBody>
+      </p:sp>
+    </p:spTree>
+    <p:extLst>
+      <p:ext uri="{BB962C8B-B14F-4D97-AF65-F5344CB8AC3E}">
+        <p14:creationId xmlns:p14="http://schemas.microsoft.com/office/powerpoint/2010/main" val="3131677558"/>
+      </p:ext>
+    </p:extLst>
+  </p:cSld>
+  <p:clrMapOvr>
+    <a:masterClrMapping/>
+  </p:clrMapOvr>
+</p:notes>
+</file>
+
+<file path=ppt/notesSlides/notesSlide44.xml><?xml version="1.0" encoding="utf-8"?>
+<p:notes xmlns:a="http://schemas.openxmlformats.org/drawingml/2006/main" xmlns:r="http://schemas.openxmlformats.org/officeDocument/2006/relationships" xmlns:p="http://schemas.openxmlformats.org/presentationml/2006/main">
+  <p:cSld>
+    <p:spTree>
+      <p:nvGrpSpPr>
+        <p:cNvPr id="1" name="">
+          <a:extLst>
+            <a:ext uri="{FF2B5EF4-FFF2-40B4-BE49-F238E27FC236}">
               <a16:creationId xmlns:a16="http://schemas.microsoft.com/office/drawing/2014/main" id="{05EBCEC8-47FC-8EA7-A538-153CB379BB4C}"/>
             </a:ext>
           </a:extLst>
@@ -4104,7 +4324,7 @@
             <a:pPr rtl="0"/>
             <a:fld id="{5FB91549-43BF-425A-AF25-75262019208C}" type="slidenum">
               <a:rPr lang="en-US" altLang="ko-KR" smtClean="0"/>
-              <a:t>43</a:t>
+              <a:t>45</a:t>
             </a:fld>
             <a:endParaRPr lang="ko-KR" altLang="en-US" dirty="0"/>
           </a:p>
@@ -12392,7 +12612,7 @@
         <p:spPr>
           <a:xfrm>
             <a:off x="1629916" y="620688"/>
-            <a:ext cx="8928992" cy="5131020"/>
+            <a:ext cx="8928992" cy="4306948"/>
           </a:xfrm>
           <a:prstGeom prst="rect">
             <a:avLst/>
@@ -12563,17 +12783,6 @@
               </a:rPr>
               <a:t>(Multivariate Analysis)</a:t>
             </a:r>
-          </a:p>
-          <a:p>
-            <a:pPr>
-              <a:lnSpc>
-                <a:spcPct val="200000"/>
-              </a:lnSpc>
-            </a:pPr>
-            <a:endParaRPr lang="ko-KR" altLang="en-US" sz="2800" b="1" dirty="0">
-              <a:latin typeface="한컴 말랑말랑 Bold" panose="020F0803000000000000" pitchFamily="50" charset="-127"/>
-              <a:ea typeface="한컴 말랑말랑 Bold" panose="020F0803000000000000" pitchFamily="50" charset="-127"/>
-            </a:endParaRPr>
           </a:p>
         </p:txBody>
       </p:sp>
@@ -15139,18 +15348,17 @@
           <a:p>
             <a:r>
               <a:rPr lang="en-US" altLang="ko-KR" sz="2400" dirty="0" err="1">
-                <a:solidFill>
-                  <a:srgbClr val="FF0000"/>
-                </a:solidFill>
-                <a:hlinkClick r:id="rId4"/>
+                <a:hlinkClick r:id="rId4">
+                  <a:extLst>
+                    <a:ext uri="{A12FA001-AC4F-418D-AE19-62706E023703}">
+                      <ahyp:hlinkClr xmlns:ahyp="http://schemas.microsoft.com/office/drawing/2018/hyperlinkcolor" val="tx"/>
+                    </a:ext>
+                  </a:extLst>
+                </a:hlinkClick>
               </a:rPr>
               <a:t>autodesk</a:t>
             </a:r>
-            <a:endParaRPr lang="en-US" altLang="ko-KR" sz="2400" dirty="0">
-              <a:solidFill>
-                <a:srgbClr val="FF0000"/>
-              </a:solidFill>
-            </a:endParaRPr>
+            <a:endParaRPr lang="en-US" altLang="ko-KR" sz="2400" dirty="0"/>
           </a:p>
           <a:p>
             <a:r>
@@ -15159,7 +15367,13 @@
             </a:r>
             <a:r>
               <a:rPr lang="ko-KR" altLang="en-US" dirty="0">
-                <a:hlinkClick r:id="rId4"/>
+                <a:hlinkClick r:id="rId4">
+                  <a:extLst>
+                    <a:ext uri="{A12FA001-AC4F-418D-AE19-62706E023703}">
+                      <ahyp:hlinkClr xmlns:ahyp="http://schemas.microsoft.com/office/drawing/2018/hyperlinkcolor" val="tx"/>
+                    </a:ext>
+                  </a:extLst>
+                </a:hlinkClick>
               </a:rPr>
               <a:t>https://www.research.autodesk.com/publications/same-stats-different-graphs/</a:t>
             </a:r>
@@ -15203,6 +15417,488 @@
         <p:cNvPr id="1" name="">
           <a:extLst>
             <a:ext uri="{FF2B5EF4-FFF2-40B4-BE49-F238E27FC236}">
+              <a16:creationId xmlns:a16="http://schemas.microsoft.com/office/drawing/2014/main" id="{804DAD2C-43FF-C9A0-05DC-E68E59B09FF1}"/>
+            </a:ext>
+          </a:extLst>
+        </p:cNvPr>
+        <p:cNvGrpSpPr/>
+        <p:nvPr/>
+      </p:nvGrpSpPr>
+      <p:grpSpPr>
+        <a:xfrm>
+          <a:off x="0" y="0"/>
+          <a:ext cx="0" cy="0"/>
+          <a:chOff x="0" y="0"/>
+          <a:chExt cx="0" cy="0"/>
+        </a:xfrm>
+      </p:grpSpPr>
+      <p:sp>
+        <p:nvSpPr>
+          <p:cNvPr id="8" name="슬라이드 번호 개체 틀 7">
+            <a:extLst>
+              <a:ext uri="{FF2B5EF4-FFF2-40B4-BE49-F238E27FC236}">
+                <a16:creationId xmlns:a16="http://schemas.microsoft.com/office/drawing/2014/main" id="{1366C448-8B78-57E9-956F-018496759589}"/>
+              </a:ext>
+            </a:extLst>
+          </p:cNvPr>
+          <p:cNvSpPr>
+            <a:spLocks noGrp="1"/>
+          </p:cNvSpPr>
+          <p:nvPr>
+            <p:ph type="sldNum" sz="quarter" idx="12"/>
+          </p:nvPr>
+        </p:nvSpPr>
+        <p:spPr/>
+        <p:txBody>
+          <a:bodyPr/>
+          <a:lstStyle/>
+          <a:p>
+            <a:pPr rtl="0"/>
+            <a:fld id="{A3F31473-23EB-4724-8B59-FE6D21D89FA4}" type="slidenum">
+              <a:rPr lang="en-US" altLang="ko-KR" noProof="0" smtClean="0"/>
+              <a:t>43</a:t>
+            </a:fld>
+            <a:endParaRPr lang="en-US" altLang="ko-KR" noProof="0" dirty="0"/>
+          </a:p>
+        </p:txBody>
+      </p:sp>
+      <p:sp>
+        <p:nvSpPr>
+          <p:cNvPr id="4" name="직사각형 3">
+            <a:extLst>
+              <a:ext uri="{FF2B5EF4-FFF2-40B4-BE49-F238E27FC236}">
+                <a16:creationId xmlns:a16="http://schemas.microsoft.com/office/drawing/2014/main" id="{9B8F3789-BEF5-05B1-F760-976F6E15188C}"/>
+              </a:ext>
+            </a:extLst>
+          </p:cNvPr>
+          <p:cNvSpPr/>
+          <p:nvPr/>
+        </p:nvSpPr>
+        <p:spPr>
+          <a:xfrm>
+            <a:off x="666947" y="764704"/>
+            <a:ext cx="10885572" cy="461665"/>
+          </a:xfrm>
+          <a:prstGeom prst="rect">
+            <a:avLst/>
+          </a:prstGeom>
+        </p:spPr>
+        <p:txBody>
+          <a:bodyPr wrap="square">
+            <a:spAutoFit/>
+          </a:bodyPr>
+          <a:lstStyle/>
+          <a:p>
+            <a:r>
+              <a:rPr lang="en-US" altLang="ko-KR" sz="2400" b="1" dirty="0"/>
+              <a:t>Appendix 1 : </a:t>
+            </a:r>
+            <a:r>
+              <a:rPr lang="ko-KR" altLang="en-US" sz="2400" b="1" dirty="0"/>
+              <a:t>통계 연습 사이트</a:t>
+            </a:r>
+            <a:endParaRPr lang="ko-KR" altLang="en-US" b="1" dirty="0"/>
+          </a:p>
+        </p:txBody>
+      </p:sp>
+      <p:sp>
+        <p:nvSpPr>
+          <p:cNvPr id="2" name="TextBox 1">
+            <a:extLst>
+              <a:ext uri="{FF2B5EF4-FFF2-40B4-BE49-F238E27FC236}">
+                <a16:creationId xmlns:a16="http://schemas.microsoft.com/office/drawing/2014/main" id="{511933C5-C9CC-C1A1-DFCE-9B36461FA2E4}"/>
+              </a:ext>
+            </a:extLst>
+          </p:cNvPr>
+          <p:cNvSpPr txBox="1"/>
+          <p:nvPr/>
+        </p:nvSpPr>
+        <p:spPr>
+          <a:xfrm>
+            <a:off x="981844" y="1700808"/>
+            <a:ext cx="8856984" cy="967957"/>
+          </a:xfrm>
+          <a:prstGeom prst="rect">
+            <a:avLst/>
+          </a:prstGeom>
+          <a:noFill/>
+        </p:spPr>
+        <p:txBody>
+          <a:bodyPr wrap="square" rtlCol="0">
+            <a:spAutoFit/>
+          </a:bodyPr>
+          <a:lstStyle/>
+          <a:p>
+            <a:pPr marL="285750" indent="-285750">
+              <a:lnSpc>
+                <a:spcPct val="150000"/>
+              </a:lnSpc>
+              <a:buFont typeface="Wingdings" panose="05000000000000000000" pitchFamily="2" charset="2"/>
+              <a:buChar char="v"/>
+            </a:pPr>
+            <a:r>
+              <a:rPr lang="en-US" altLang="ko-KR" sz="2000" dirty="0">
+                <a:latin typeface="한컴 말랑말랑 Bold" panose="020F0803000000000000" pitchFamily="50" charset="-127"/>
+                <a:ea typeface="한컴 말랑말랑 Bold" panose="020F0803000000000000" pitchFamily="50" charset="-127"/>
+                <a:hlinkClick r:id="rId3">
+                  <a:extLst>
+                    <a:ext uri="{A12FA001-AC4F-418D-AE19-62706E023703}">
+                      <ahyp:hlinkClr xmlns:ahyp="http://schemas.microsoft.com/office/drawing/2018/hyperlinkcolor" val="tx"/>
+                    </a:ext>
+                  </a:extLst>
+                </a:hlinkClick>
+              </a:rPr>
+              <a:t>Descriptive Statistics</a:t>
+            </a:r>
+            <a:endParaRPr lang="en-US" altLang="ko-KR" sz="2000" dirty="0">
+              <a:latin typeface="한컴 말랑말랑 Bold" panose="020F0803000000000000" pitchFamily="50" charset="-127"/>
+              <a:ea typeface="한컴 말랑말랑 Bold" panose="020F0803000000000000" pitchFamily="50" charset="-127"/>
+            </a:endParaRPr>
+          </a:p>
+          <a:p>
+            <a:pPr marL="285750" indent="-285750">
+              <a:lnSpc>
+                <a:spcPct val="150000"/>
+              </a:lnSpc>
+              <a:buFont typeface="Wingdings" panose="05000000000000000000" pitchFamily="2" charset="2"/>
+              <a:buChar char="v"/>
+            </a:pPr>
+            <a:r>
+              <a:rPr lang="en-US" altLang="ko-KR" sz="2000" dirty="0">
+                <a:latin typeface="한컴 말랑말랑 Bold" panose="020F0803000000000000" pitchFamily="50" charset="-127"/>
+                <a:ea typeface="한컴 말랑말랑 Bold" panose="020F0803000000000000" pitchFamily="50" charset="-127"/>
+                <a:hlinkClick r:id="rId4">
+                  <a:extLst>
+                    <a:ext uri="{A12FA001-AC4F-418D-AE19-62706E023703}">
+                      <ahyp:hlinkClr xmlns:ahyp="http://schemas.microsoft.com/office/drawing/2018/hyperlinkcolor" val="tx"/>
+                    </a:ext>
+                  </a:extLst>
+                </a:hlinkClick>
+              </a:rPr>
+              <a:t>Central Limits </a:t>
+            </a:r>
+            <a:r>
+              <a:rPr lang="en-US" altLang="ko-KR" sz="2000" dirty="0" err="1">
+                <a:latin typeface="한컴 말랑말랑 Bold" panose="020F0803000000000000" pitchFamily="50" charset="-127"/>
+                <a:ea typeface="한컴 말랑말랑 Bold" panose="020F0803000000000000" pitchFamily="50" charset="-127"/>
+                <a:hlinkClick r:id="rId4">
+                  <a:extLst>
+                    <a:ext uri="{A12FA001-AC4F-418D-AE19-62706E023703}">
+                      <ahyp:hlinkClr xmlns:ahyp="http://schemas.microsoft.com/office/drawing/2018/hyperlinkcolor" val="tx"/>
+                    </a:ext>
+                  </a:extLst>
+                </a:hlinkClick>
+              </a:rPr>
+              <a:t>Theorm</a:t>
+            </a:r>
+            <a:endParaRPr lang="ko-KR" altLang="en-US" sz="2000" dirty="0">
+              <a:latin typeface="한컴 말랑말랑 Bold" panose="020F0803000000000000" pitchFamily="50" charset="-127"/>
+              <a:ea typeface="한컴 말랑말랑 Bold" panose="020F0803000000000000" pitchFamily="50" charset="-127"/>
+            </a:endParaRPr>
+          </a:p>
+        </p:txBody>
+      </p:sp>
+    </p:spTree>
+    <p:extLst>
+      <p:ext uri="{BB962C8B-B14F-4D97-AF65-F5344CB8AC3E}">
+        <p14:creationId xmlns:p14="http://schemas.microsoft.com/office/powerpoint/2010/main" val="1558409328"/>
+      </p:ext>
+    </p:extLst>
+  </p:cSld>
+  <p:clrMapOvr>
+    <a:masterClrMapping/>
+  </p:clrMapOvr>
+  <mc:AlternateContent xmlns:mc="http://schemas.openxmlformats.org/markup-compatibility/2006" xmlns:p14="http://schemas.microsoft.com/office/powerpoint/2010/main">
+    <mc:Choice Requires="p14">
+      <p:transition spd="med" p14:dur="700">
+        <p:fade/>
+      </p:transition>
+    </mc:Choice>
+    <mc:Fallback xmlns="">
+      <p:transition spd="med">
+        <p:fade/>
+      </p:transition>
+    </mc:Fallback>
+  </mc:AlternateContent>
+</p:sld>
+</file>
+
+<file path=ppt/slides/slide44.xml><?xml version="1.0" encoding="utf-8"?>
+<p:sld xmlns:a="http://schemas.openxmlformats.org/drawingml/2006/main" xmlns:r="http://schemas.openxmlformats.org/officeDocument/2006/relationships" xmlns:p="http://schemas.openxmlformats.org/presentationml/2006/main">
+  <p:cSld>
+    <p:spTree>
+      <p:nvGrpSpPr>
+        <p:cNvPr id="1" name="">
+          <a:extLst>
+            <a:ext uri="{FF2B5EF4-FFF2-40B4-BE49-F238E27FC236}">
+              <a16:creationId xmlns:a16="http://schemas.microsoft.com/office/drawing/2014/main" id="{6412B445-FF7F-B1DD-DE74-1C353BB469D7}"/>
+            </a:ext>
+          </a:extLst>
+        </p:cNvPr>
+        <p:cNvGrpSpPr/>
+        <p:nvPr/>
+      </p:nvGrpSpPr>
+      <p:grpSpPr>
+        <a:xfrm>
+          <a:off x="0" y="0"/>
+          <a:ext cx="0" cy="0"/>
+          <a:chOff x="0" y="0"/>
+          <a:chExt cx="0" cy="0"/>
+        </a:xfrm>
+      </p:grpSpPr>
+      <p:pic>
+        <p:nvPicPr>
+          <p:cNvPr id="2050" name="Picture 2">
+            <a:extLst>
+              <a:ext uri="{FF2B5EF4-FFF2-40B4-BE49-F238E27FC236}">
+                <a16:creationId xmlns:a16="http://schemas.microsoft.com/office/drawing/2014/main" id="{F1972F61-6BFF-18D4-3BAC-E9A79B079C59}"/>
+              </a:ext>
+            </a:extLst>
+          </p:cNvPr>
+          <p:cNvPicPr>
+            <a:picLocks noChangeAspect="1" noChangeArrowheads="1"/>
+          </p:cNvPicPr>
+          <p:nvPr/>
+        </p:nvPicPr>
+        <p:blipFill>
+          <a:blip r:embed="rId3">
+            <a:extLst>
+              <a:ext uri="{28A0092B-C50C-407E-A947-70E740481C1C}">
+                <a14:useLocalDpi xmlns:a14="http://schemas.microsoft.com/office/drawing/2010/main" val="0"/>
+              </a:ext>
+            </a:extLst>
+          </a:blip>
+          <a:srcRect/>
+          <a:stretch>
+            <a:fillRect/>
+          </a:stretch>
+        </p:blipFill>
+        <p:spPr bwMode="auto">
+          <a:xfrm>
+            <a:off x="6124535" y="1773534"/>
+            <a:ext cx="5584352" cy="3937684"/>
+          </a:xfrm>
+          <a:prstGeom prst="rect">
+            <a:avLst/>
+          </a:prstGeom>
+          <a:noFill/>
+          <a:extLst>
+            <a:ext uri="{909E8E84-426E-40DD-AFC4-6F175D3DCCD1}">
+              <a14:hiddenFill xmlns:a14="http://schemas.microsoft.com/office/drawing/2010/main">
+                <a:solidFill>
+                  <a:srgbClr val="FFFFFF"/>
+                </a:solidFill>
+              </a14:hiddenFill>
+            </a:ext>
+          </a:extLst>
+        </p:spPr>
+      </p:pic>
+      <p:sp>
+        <p:nvSpPr>
+          <p:cNvPr id="8" name="슬라이드 번호 개체 틀 7">
+            <a:extLst>
+              <a:ext uri="{FF2B5EF4-FFF2-40B4-BE49-F238E27FC236}">
+                <a16:creationId xmlns:a16="http://schemas.microsoft.com/office/drawing/2014/main" id="{867DA506-21A1-BAE2-FADF-438A373EF0CF}"/>
+              </a:ext>
+            </a:extLst>
+          </p:cNvPr>
+          <p:cNvSpPr>
+            <a:spLocks noGrp="1"/>
+          </p:cNvSpPr>
+          <p:nvPr>
+            <p:ph type="sldNum" sz="quarter" idx="12"/>
+          </p:nvPr>
+        </p:nvSpPr>
+        <p:spPr/>
+        <p:txBody>
+          <a:bodyPr/>
+          <a:lstStyle/>
+          <a:p>
+            <a:pPr rtl="0"/>
+            <a:fld id="{A3F31473-23EB-4724-8B59-FE6D21D89FA4}" type="slidenum">
+              <a:rPr lang="en-US" altLang="ko-KR" noProof="0" smtClean="0"/>
+              <a:t>44</a:t>
+            </a:fld>
+            <a:endParaRPr lang="en-US" altLang="ko-KR" noProof="0" dirty="0"/>
+          </a:p>
+        </p:txBody>
+      </p:sp>
+      <p:sp>
+        <p:nvSpPr>
+          <p:cNvPr id="6" name="TextBox 5">
+            <a:extLst>
+              <a:ext uri="{FF2B5EF4-FFF2-40B4-BE49-F238E27FC236}">
+                <a16:creationId xmlns:a16="http://schemas.microsoft.com/office/drawing/2014/main" id="{E311BC3C-D15F-5368-6D85-777593AB437F}"/>
+              </a:ext>
+            </a:extLst>
+          </p:cNvPr>
+          <p:cNvSpPr txBox="1"/>
+          <p:nvPr/>
+        </p:nvSpPr>
+        <p:spPr>
+          <a:xfrm>
+            <a:off x="6124535" y="5895285"/>
+            <a:ext cx="4942379" cy="276999"/>
+          </a:xfrm>
+          <a:prstGeom prst="rect">
+            <a:avLst/>
+          </a:prstGeom>
+          <a:noFill/>
+        </p:spPr>
+        <p:txBody>
+          <a:bodyPr wrap="square" rtlCol="0">
+            <a:spAutoFit/>
+          </a:bodyPr>
+          <a:lstStyle/>
+          <a:p>
+            <a:r>
+              <a:rPr lang="en-US" altLang="ko-KR" sz="1200" dirty="0">
+                <a:hlinkClick r:id="rId4">
+                  <a:extLst>
+                    <a:ext uri="{A12FA001-AC4F-418D-AE19-62706E023703}">
+                      <ahyp:hlinkClr xmlns:ahyp="http://schemas.microsoft.com/office/drawing/2018/hyperlinkcolor" val="tx"/>
+                    </a:ext>
+                  </a:extLst>
+                </a:hlinkClick>
+              </a:rPr>
+              <a:t>https://pankajr141.wordpress.com/2017/07/29/probability-distributions/</a:t>
+            </a:r>
+            <a:r>
+              <a:rPr lang="en-US" altLang="ko-KR" sz="1200" dirty="0"/>
+              <a:t> </a:t>
+            </a:r>
+            <a:endParaRPr lang="ko-KR" altLang="en-US" sz="1200" dirty="0"/>
+          </a:p>
+        </p:txBody>
+      </p:sp>
+      <p:pic>
+        <p:nvPicPr>
+          <p:cNvPr id="3074" name="Picture 2" descr="Statistical Probability Cartoons and Comics - funny pictures from  CartoonStock">
+            <a:extLst>
+              <a:ext uri="{FF2B5EF4-FFF2-40B4-BE49-F238E27FC236}">
+                <a16:creationId xmlns:a16="http://schemas.microsoft.com/office/drawing/2014/main" id="{B2C96FEA-EA85-F856-160E-77B37DEC995A}"/>
+              </a:ext>
+            </a:extLst>
+          </p:cNvPr>
+          <p:cNvPicPr>
+            <a:picLocks noChangeAspect="1" noChangeArrowheads="1"/>
+          </p:cNvPicPr>
+          <p:nvPr/>
+        </p:nvPicPr>
+        <p:blipFill>
+          <a:blip r:embed="rId5">
+            <a:extLst>
+              <a:ext uri="{28A0092B-C50C-407E-A947-70E740481C1C}">
+                <a14:useLocalDpi xmlns:a14="http://schemas.microsoft.com/office/drawing/2010/main" val="0"/>
+              </a:ext>
+            </a:extLst>
+          </a:blip>
+          <a:srcRect/>
+          <a:stretch>
+            <a:fillRect/>
+          </a:stretch>
+        </p:blipFill>
+        <p:spPr bwMode="auto">
+          <a:xfrm>
+            <a:off x="602052" y="764704"/>
+            <a:ext cx="5348344" cy="4642362"/>
+          </a:xfrm>
+          <a:prstGeom prst="rect">
+            <a:avLst/>
+          </a:prstGeom>
+          <a:noFill/>
+          <a:extLst>
+            <a:ext uri="{909E8E84-426E-40DD-AFC4-6F175D3DCCD1}">
+              <a14:hiddenFill xmlns:a14="http://schemas.microsoft.com/office/drawing/2010/main">
+                <a:solidFill>
+                  <a:srgbClr val="FFFFFF"/>
+                </a:solidFill>
+              </a14:hiddenFill>
+            </a:ext>
+          </a:extLst>
+        </p:spPr>
+      </p:pic>
+      <p:sp>
+        <p:nvSpPr>
+          <p:cNvPr id="2" name="TextBox 1">
+            <a:extLst>
+              <a:ext uri="{FF2B5EF4-FFF2-40B4-BE49-F238E27FC236}">
+                <a16:creationId xmlns:a16="http://schemas.microsoft.com/office/drawing/2014/main" id="{04208DF8-2298-0B71-868D-C1D66067A0EB}"/>
+              </a:ext>
+            </a:extLst>
+          </p:cNvPr>
+          <p:cNvSpPr txBox="1"/>
+          <p:nvPr/>
+        </p:nvSpPr>
+        <p:spPr>
+          <a:xfrm>
+            <a:off x="602052" y="5503469"/>
+            <a:ext cx="4392488" cy="415498"/>
+          </a:xfrm>
+          <a:prstGeom prst="rect">
+            <a:avLst/>
+          </a:prstGeom>
+          <a:noFill/>
+        </p:spPr>
+        <p:txBody>
+          <a:bodyPr wrap="square" rtlCol="0">
+            <a:spAutoFit/>
+          </a:bodyPr>
+          <a:lstStyle/>
+          <a:p>
+            <a:r>
+              <a:rPr lang="en-US" altLang="ko-KR" sz="1050" dirty="0">
+                <a:hlinkClick r:id="rId6">
+                  <a:extLst>
+                    <a:ext uri="{A12FA001-AC4F-418D-AE19-62706E023703}">
+                      <ahyp:hlinkClr xmlns:ahyp="http://schemas.microsoft.com/office/drawing/2018/hyperlinkcolor" val="tx"/>
+                    </a:ext>
+                  </a:extLst>
+                </a:hlinkClick>
+              </a:rPr>
+              <a:t>https://www.cartoonstock.com/directory/s/statistical_probability.asp?srsltid=AfmBOooASIJv72FazaWHEE3MDiL-XPDgI1kKuhjOM1MbhQmE4i7P7ulu</a:t>
+            </a:r>
+            <a:r>
+              <a:rPr lang="en-US" altLang="ko-KR" sz="1050" dirty="0"/>
+              <a:t> </a:t>
+            </a:r>
+            <a:endParaRPr lang="ko-KR" altLang="en-US" sz="1050" dirty="0"/>
+          </a:p>
+        </p:txBody>
+      </p:sp>
+    </p:spTree>
+    <p:extLst>
+      <p:ext uri="{BB962C8B-B14F-4D97-AF65-F5344CB8AC3E}">
+        <p14:creationId xmlns:p14="http://schemas.microsoft.com/office/powerpoint/2010/main" val="1230513069"/>
+      </p:ext>
+    </p:extLst>
+  </p:cSld>
+  <p:clrMapOvr>
+    <a:masterClrMapping/>
+  </p:clrMapOvr>
+  <mc:AlternateContent xmlns:mc="http://schemas.openxmlformats.org/markup-compatibility/2006" xmlns:p14="http://schemas.microsoft.com/office/powerpoint/2010/main">
+    <mc:Choice Requires="p14">
+      <p:transition spd="med" p14:dur="700">
+        <p:fade/>
+      </p:transition>
+    </mc:Choice>
+    <mc:Fallback xmlns="">
+      <p:transition spd="med">
+        <p:fade/>
+      </p:transition>
+    </mc:Fallback>
+  </mc:AlternateContent>
+</p:sld>
+</file>
+
+<file path=ppt/slides/slide45.xml><?xml version="1.0" encoding="utf-8"?>
+<p:sld xmlns:a="http://schemas.openxmlformats.org/drawingml/2006/main" xmlns:r="http://schemas.openxmlformats.org/officeDocument/2006/relationships" xmlns:p="http://schemas.openxmlformats.org/presentationml/2006/main">
+  <p:cSld>
+    <p:spTree>
+      <p:nvGrpSpPr>
+        <p:cNvPr id="1" name="">
+          <a:extLst>
+            <a:ext uri="{FF2B5EF4-FFF2-40B4-BE49-F238E27FC236}">
               <a16:creationId xmlns:a16="http://schemas.microsoft.com/office/drawing/2014/main" id="{6D518AE1-D552-2271-232D-C7A0D3ACFB25}"/>
             </a:ext>
           </a:extLst>
@@ -15242,7 +15938,7 @@
             <a:pPr rtl="0"/>
             <a:fld id="{A3F31473-23EB-4724-8B59-FE6D21D89FA4}" type="slidenum">
               <a:rPr lang="en-US" altLang="ko-KR" noProof="0" smtClean="0"/>
-              <a:t>43</a:t>
+              <a:t>45</a:t>
             </a:fld>
             <a:endParaRPr lang="en-US" altLang="ko-KR" noProof="0" dirty="0"/>
           </a:p>
@@ -15262,8 +15958,8 @@
         </p:nvSpPr>
         <p:spPr>
           <a:xfrm>
-            <a:off x="666947" y="764704"/>
-            <a:ext cx="10885572" cy="461665"/>
+            <a:off x="909836" y="1111119"/>
+            <a:ext cx="10885572" cy="1631216"/>
           </a:xfrm>
           <a:prstGeom prst="rect">
             <a:avLst/>
@@ -15275,115 +15971,187 @@
           </a:bodyPr>
           <a:lstStyle/>
           <a:p>
-            <a:r>
-              <a:rPr lang="en-US" altLang="ko-KR" sz="2400" b="1" dirty="0"/>
-              <a:t>Appendix 1 : </a:t>
-            </a:r>
-            <a:r>
-              <a:rPr lang="ko-KR" altLang="en-US" sz="2400" b="1" dirty="0"/>
-              <a:t>통계 연습 사이트</a:t>
-            </a:r>
-            <a:endParaRPr lang="ko-KR" altLang="en-US" b="1" dirty="0"/>
-          </a:p>
-        </p:txBody>
-      </p:sp>
-      <p:sp>
-        <p:nvSpPr>
-          <p:cNvPr id="2" name="TextBox 1">
+            <a:pPr marL="342900" indent="-342900">
+              <a:buFont typeface="Wingdings" panose="05000000000000000000" pitchFamily="2" charset="2"/>
+              <a:buChar char="ü"/>
+            </a:pPr>
+            <a:r>
+              <a:rPr lang="ko-KR" altLang="en-US" sz="2000" dirty="0">
+                <a:latin typeface="한컴 말랑말랑 Bold" panose="020F0803000000000000" pitchFamily="50" charset="-127"/>
+                <a:ea typeface="한컴 말랑말랑 Bold" panose="020F0803000000000000" pitchFamily="50" charset="-127"/>
+              </a:rPr>
+              <a:t>데이터 분포라는 지도가 있어야</a:t>
+            </a:r>
+            <a:r>
+              <a:rPr lang="en-US" altLang="ko-KR" sz="2000" dirty="0">
+                <a:latin typeface="한컴 말랑말랑 Bold" panose="020F0803000000000000" pitchFamily="50" charset="-127"/>
+                <a:ea typeface="한컴 말랑말랑 Bold" panose="020F0803000000000000" pitchFamily="50" charset="-127"/>
+              </a:rPr>
+              <a:t>, </a:t>
+            </a:r>
+            <a:r>
+              <a:rPr lang="ko-KR" altLang="en-US" sz="2000" dirty="0">
+                <a:latin typeface="한컴 말랑말랑 Bold" panose="020F0803000000000000" pitchFamily="50" charset="-127"/>
+                <a:ea typeface="한컴 말랑말랑 Bold" panose="020F0803000000000000" pitchFamily="50" charset="-127"/>
+              </a:rPr>
+              <a:t>확률이라는 길을 찾을 수 있다</a:t>
+            </a:r>
+            <a:r>
+              <a:rPr lang="en-US" altLang="ko-KR" sz="2000" dirty="0">
+                <a:latin typeface="한컴 말랑말랑 Bold" panose="020F0803000000000000" pitchFamily="50" charset="-127"/>
+                <a:ea typeface="한컴 말랑말랑 Bold" panose="020F0803000000000000" pitchFamily="50" charset="-127"/>
+              </a:rPr>
+              <a:t>.</a:t>
+            </a:r>
+          </a:p>
+          <a:p>
+            <a:pPr marL="342900" indent="-342900">
+              <a:buFont typeface="Wingdings" panose="05000000000000000000" pitchFamily="2" charset="2"/>
+              <a:buChar char="ü"/>
+            </a:pPr>
+            <a:endParaRPr lang="en-US" altLang="ko-KR" sz="2000" dirty="0">
+              <a:latin typeface="한컴 말랑말랑 Bold" panose="020F0803000000000000" pitchFamily="50" charset="-127"/>
+              <a:ea typeface="한컴 말랑말랑 Bold" panose="020F0803000000000000" pitchFamily="50" charset="-127"/>
+            </a:endParaRPr>
+          </a:p>
+          <a:p>
+            <a:pPr marL="342900" indent="-342900">
+              <a:buFont typeface="Wingdings" panose="05000000000000000000" pitchFamily="2" charset="2"/>
+              <a:buChar char="ü"/>
+            </a:pPr>
+            <a:r>
+              <a:rPr lang="ko-KR" altLang="en-US" sz="2000" dirty="0">
+                <a:latin typeface="한컴 말랑말랑 Bold" panose="020F0803000000000000" pitchFamily="50" charset="-127"/>
+                <a:ea typeface="한컴 말랑말랑 Bold" panose="020F0803000000000000" pitchFamily="50" charset="-127"/>
+              </a:rPr>
+              <a:t>데이터 분포와 확률은 뗄 수 없는 </a:t>
+            </a:r>
+            <a:r>
+              <a:rPr lang="en-US" altLang="ko-KR" sz="2000" b="1" dirty="0">
+                <a:latin typeface="한컴 말랑말랑 Bold" panose="020F0803000000000000" pitchFamily="50" charset="-127"/>
+                <a:ea typeface="한컴 말랑말랑 Bold" panose="020F0803000000000000" pitchFamily="50" charset="-127"/>
+              </a:rPr>
+              <a:t>“</a:t>
+            </a:r>
+            <a:r>
+              <a:rPr lang="ko-KR" altLang="en-US" sz="2000" b="1" dirty="0">
+                <a:latin typeface="한컴 말랑말랑 Bold" panose="020F0803000000000000" pitchFamily="50" charset="-127"/>
+                <a:ea typeface="한컴 말랑말랑 Bold" panose="020F0803000000000000" pitchFamily="50" charset="-127"/>
+              </a:rPr>
+              <a:t>동전의 양면</a:t>
+            </a:r>
+            <a:r>
+              <a:rPr lang="en-US" altLang="ko-KR" sz="2000" b="1" dirty="0">
+                <a:latin typeface="한컴 말랑말랑 Bold" panose="020F0803000000000000" pitchFamily="50" charset="-127"/>
+                <a:ea typeface="한컴 말랑말랑 Bold" panose="020F0803000000000000" pitchFamily="50" charset="-127"/>
+              </a:rPr>
+              <a:t>” </a:t>
+            </a:r>
+            <a:r>
+              <a:rPr lang="ko-KR" altLang="en-US" sz="2000" dirty="0">
+                <a:latin typeface="한컴 말랑말랑 Bold" panose="020F0803000000000000" pitchFamily="50" charset="-127"/>
+                <a:ea typeface="한컴 말랑말랑 Bold" panose="020F0803000000000000" pitchFamily="50" charset="-127"/>
+              </a:rPr>
+              <a:t>같은 관계이다</a:t>
+            </a:r>
+            <a:r>
+              <a:rPr lang="en-US" altLang="ko-KR" sz="2000" dirty="0">
+                <a:latin typeface="한컴 말랑말랑 Bold" panose="020F0803000000000000" pitchFamily="50" charset="-127"/>
+                <a:ea typeface="한컴 말랑말랑 Bold" panose="020F0803000000000000" pitchFamily="50" charset="-127"/>
+              </a:rPr>
+              <a:t>. </a:t>
+            </a:r>
+          </a:p>
+          <a:p>
+            <a:pPr marL="342900" indent="-342900">
+              <a:buFont typeface="Wingdings" panose="05000000000000000000" pitchFamily="2" charset="2"/>
+              <a:buChar char="ü"/>
+            </a:pPr>
+            <a:endParaRPr lang="en-US" altLang="ko-KR" sz="2000" dirty="0">
+              <a:latin typeface="한컴 말랑말랑 Bold" panose="020F0803000000000000" pitchFamily="50" charset="-127"/>
+              <a:ea typeface="한컴 말랑말랑 Bold" panose="020F0803000000000000" pitchFamily="50" charset="-127"/>
+            </a:endParaRPr>
+          </a:p>
+          <a:p>
+            <a:pPr marL="342900" indent="-342900">
+              <a:buFont typeface="Wingdings" panose="05000000000000000000" pitchFamily="2" charset="2"/>
+              <a:buChar char="ü"/>
+            </a:pPr>
+            <a:r>
+              <a:rPr lang="ko-KR" altLang="en-US" sz="2000" dirty="0">
+                <a:latin typeface="한컴 말랑말랑 Bold" panose="020F0803000000000000" pitchFamily="50" charset="-127"/>
+                <a:ea typeface="한컴 말랑말랑 Bold" panose="020F0803000000000000" pitchFamily="50" charset="-127"/>
+              </a:rPr>
+              <a:t>데이터의 분포는 </a:t>
+            </a:r>
+            <a:r>
+              <a:rPr lang="en-US" altLang="ko-KR" sz="2000" dirty="0">
+                <a:latin typeface="한컴 말랑말랑 Bold" panose="020F0803000000000000" pitchFamily="50" charset="-127"/>
+                <a:ea typeface="한컴 말랑말랑 Bold" panose="020F0803000000000000" pitchFamily="50" charset="-127"/>
+              </a:rPr>
+              <a:t>“</a:t>
+            </a:r>
+            <a:r>
+              <a:rPr lang="ko-KR" altLang="en-US" sz="2000" dirty="0">
+                <a:latin typeface="한컴 말랑말랑 Bold" panose="020F0803000000000000" pitchFamily="50" charset="-127"/>
+                <a:ea typeface="한컴 말랑말랑 Bold" panose="020F0803000000000000" pitchFamily="50" charset="-127"/>
+              </a:rPr>
+              <a:t>어떤 사건이 일어날 확률의 지도</a:t>
+            </a:r>
+            <a:r>
+              <a:rPr lang="en-US" altLang="ko-KR" sz="2000" dirty="0">
+                <a:latin typeface="한컴 말랑말랑 Bold" panose="020F0803000000000000" pitchFamily="50" charset="-127"/>
+                <a:ea typeface="한컴 말랑말랑 Bold" panose="020F0803000000000000" pitchFamily="50" charset="-127"/>
+              </a:rPr>
+              <a:t>” </a:t>
+            </a:r>
+            <a:r>
+              <a:rPr lang="ko-KR" altLang="en-US" sz="2000" dirty="0">
+                <a:latin typeface="한컴 말랑말랑 Bold" panose="020F0803000000000000" pitchFamily="50" charset="-127"/>
+                <a:ea typeface="한컴 말랑말랑 Bold" panose="020F0803000000000000" pitchFamily="50" charset="-127"/>
+              </a:rPr>
+              <a:t>라고 할 수 있다</a:t>
+            </a:r>
+            <a:r>
+              <a:rPr lang="en-US" altLang="ko-KR" sz="2000" dirty="0">
+                <a:latin typeface="한컴 말랑말랑 Bold" panose="020F0803000000000000" pitchFamily="50" charset="-127"/>
+                <a:ea typeface="한컴 말랑말랑 Bold" panose="020F0803000000000000" pitchFamily="50" charset="-127"/>
+              </a:rPr>
+              <a:t>.</a:t>
+            </a:r>
+          </a:p>
+        </p:txBody>
+      </p:sp>
+      <p:pic>
+        <p:nvPicPr>
+          <p:cNvPr id="5" name="그림 4">
             <a:extLst>
               <a:ext uri="{FF2B5EF4-FFF2-40B4-BE49-F238E27FC236}">
-                <a16:creationId xmlns:a16="http://schemas.microsoft.com/office/drawing/2014/main" id="{A4772A94-E180-607D-3CC1-237FA2501F6A}"/>
+                <a16:creationId xmlns:a16="http://schemas.microsoft.com/office/drawing/2014/main" id="{8A2D09CF-818C-9DEC-A4E7-CDAD0058ECC2}"/>
               </a:ext>
             </a:extLst>
           </p:cNvPr>
-          <p:cNvSpPr txBox="1"/>
+          <p:cNvPicPr>
+            <a:picLocks noChangeAspect="1"/>
+          </p:cNvPicPr>
           <p:nvPr/>
-        </p:nvSpPr>
+        </p:nvPicPr>
+        <p:blipFill>
+          <a:blip r:embed="rId3"/>
+          <a:stretch>
+            <a:fillRect/>
+          </a:stretch>
+        </p:blipFill>
         <p:spPr>
           <a:xfrm>
-            <a:off x="981844" y="1700808"/>
-            <a:ext cx="8856984" cy="967957"/>
+            <a:off x="1845940" y="3429000"/>
+            <a:ext cx="7526783" cy="1631216"/>
           </a:xfrm>
           <a:prstGeom prst="rect">
             <a:avLst/>
           </a:prstGeom>
-          <a:noFill/>
         </p:spPr>
-        <p:txBody>
-          <a:bodyPr wrap="square" rtlCol="0">
-            <a:spAutoFit/>
-          </a:bodyPr>
-          <a:lstStyle/>
-          <a:p>
-            <a:pPr marL="285750" indent="-285750">
-              <a:lnSpc>
-                <a:spcPct val="150000"/>
-              </a:lnSpc>
-              <a:buFont typeface="Wingdings" panose="05000000000000000000" pitchFamily="2" charset="2"/>
-              <a:buChar char="v"/>
-            </a:pPr>
-            <a:r>
-              <a:rPr lang="en-US" altLang="ko-KR" sz="2000" dirty="0">
-                <a:latin typeface="한컴 말랑말랑 Bold" panose="020F0803000000000000" pitchFamily="50" charset="-127"/>
-                <a:ea typeface="한컴 말랑말랑 Bold" panose="020F0803000000000000" pitchFamily="50" charset="-127"/>
-                <a:hlinkClick r:id="rId3">
-                  <a:extLst>
-                    <a:ext uri="{A12FA001-AC4F-418D-AE19-62706E023703}">
-                      <ahyp:hlinkClr xmlns:ahyp="http://schemas.microsoft.com/office/drawing/2018/hyperlinkcolor" val="tx"/>
-                    </a:ext>
-                  </a:extLst>
-                </a:hlinkClick>
-              </a:rPr>
-              <a:t>Descriptive Statistics</a:t>
-            </a:r>
-            <a:endParaRPr lang="en-US" altLang="ko-KR" sz="2000" dirty="0">
-              <a:latin typeface="한컴 말랑말랑 Bold" panose="020F0803000000000000" pitchFamily="50" charset="-127"/>
-              <a:ea typeface="한컴 말랑말랑 Bold" panose="020F0803000000000000" pitchFamily="50" charset="-127"/>
-            </a:endParaRPr>
-          </a:p>
-          <a:p>
-            <a:pPr marL="285750" indent="-285750">
-              <a:lnSpc>
-                <a:spcPct val="150000"/>
-              </a:lnSpc>
-              <a:buFont typeface="Wingdings" panose="05000000000000000000" pitchFamily="2" charset="2"/>
-              <a:buChar char="v"/>
-            </a:pPr>
-            <a:r>
-              <a:rPr lang="en-US" altLang="ko-KR" sz="2000" dirty="0">
-                <a:latin typeface="한컴 말랑말랑 Bold" panose="020F0803000000000000" pitchFamily="50" charset="-127"/>
-                <a:ea typeface="한컴 말랑말랑 Bold" panose="020F0803000000000000" pitchFamily="50" charset="-127"/>
-                <a:hlinkClick r:id="rId4">
-                  <a:extLst>
-                    <a:ext uri="{A12FA001-AC4F-418D-AE19-62706E023703}">
-                      <ahyp:hlinkClr xmlns:ahyp="http://schemas.microsoft.com/office/drawing/2018/hyperlinkcolor" val="tx"/>
-                    </a:ext>
-                  </a:extLst>
-                </a:hlinkClick>
-              </a:rPr>
-              <a:t>Central Limits </a:t>
-            </a:r>
-            <a:r>
-              <a:rPr lang="en-US" altLang="ko-KR" sz="2000" dirty="0" err="1">
-                <a:latin typeface="한컴 말랑말랑 Bold" panose="020F0803000000000000" pitchFamily="50" charset="-127"/>
-                <a:ea typeface="한컴 말랑말랑 Bold" panose="020F0803000000000000" pitchFamily="50" charset="-127"/>
-                <a:hlinkClick r:id="rId4">
-                  <a:extLst>
-                    <a:ext uri="{A12FA001-AC4F-418D-AE19-62706E023703}">
-                      <ahyp:hlinkClr xmlns:ahyp="http://schemas.microsoft.com/office/drawing/2018/hyperlinkcolor" val="tx"/>
-                    </a:ext>
-                  </a:extLst>
-                </a:hlinkClick>
-              </a:rPr>
-              <a:t>Theorm</a:t>
-            </a:r>
-            <a:endParaRPr lang="ko-KR" altLang="en-US" sz="2000" dirty="0">
-              <a:latin typeface="한컴 말랑말랑 Bold" panose="020F0803000000000000" pitchFamily="50" charset="-127"/>
-              <a:ea typeface="한컴 말랑말랑 Bold" panose="020F0803000000000000" pitchFamily="50" charset="-127"/>
-            </a:endParaRPr>
-          </a:p>
-        </p:txBody>
-      </p:sp>
+      </p:pic>
     </p:spTree>
     <p:extLst>
       <p:ext uri="{BB962C8B-B14F-4D97-AF65-F5344CB8AC3E}">
@@ -17424,16 +18192,16 @@
 <file path=customXml/itemProps3.xml><?xml version="1.0" encoding="utf-8"?>
 <ds:datastoreItem xmlns:ds="http://schemas.openxmlformats.org/officeDocument/2006/customXml" ds:itemID="{50AACE6D-8EB6-447A-8DFD-C2C0C52916AC}">
   <ds:schemaRefs>
-    <ds:schemaRef ds:uri="http://purl.org/dc/elements/1.1/"/>
-    <ds:schemaRef ds:uri="http://purl.org/dc/terms/"/>
-    <ds:schemaRef ds:uri="http://schemas.microsoft.com/office/2006/metadata/properties"/>
+    <ds:schemaRef ds:uri="http://www.w3.org/XML/1998/namespace"/>
+    <ds:schemaRef ds:uri="http://purl.org/dc/dcmitype/"/>
     <ds:schemaRef ds:uri="a4f35948-e619-41b3-aa29-22878b09cfd2"/>
     <ds:schemaRef ds:uri="http://schemas.microsoft.com/office/infopath/2007/PartnerControls"/>
+    <ds:schemaRef ds:uri="http://purl.org/dc/elements/1.1/"/>
+    <ds:schemaRef ds:uri="http://schemas.microsoft.com/office/2006/metadata/properties"/>
     <ds:schemaRef ds:uri="http://schemas.microsoft.com/office/2006/documentManagement/types"/>
     <ds:schemaRef ds:uri="http://schemas.openxmlformats.org/package/2006/metadata/core-properties"/>
     <ds:schemaRef ds:uri="40262f94-9f35-4ac3-9a90-690165a166b7"/>
-    <ds:schemaRef ds:uri="http://www.w3.org/XML/1998/namespace"/>
-    <ds:schemaRef ds:uri="http://purl.org/dc/dcmitype/"/>
+    <ds:schemaRef ds:uri="http://purl.org/dc/terms/"/>
   </ds:schemaRefs>
 </ds:datastoreItem>
 </file>
--- a/1_statistics for machine learning.pptx
+++ b/1_statistics for machine learning.pptx
@@ -9870,8 +9870,8 @@
         </p:blipFill>
         <p:spPr>
           <a:xfrm>
-            <a:off x="5806380" y="2738313"/>
-            <a:ext cx="4756296" cy="3618038"/>
+            <a:off x="5014292" y="3307169"/>
+            <a:ext cx="4248472" cy="3231744"/>
           </a:xfrm>
           <a:prstGeom prst="rect">
             <a:avLst/>
@@ -9886,7 +9886,7 @@
         </p:nvCxnSpPr>
         <p:spPr>
           <a:xfrm>
-            <a:off x="4078188" y="4365104"/>
+            <a:off x="3718148" y="4828848"/>
             <a:ext cx="936104" cy="0"/>
           </a:xfrm>
           <a:prstGeom prst="straightConnector1">
@@ -9974,7 +9974,7 @@
         <p:spPr>
           <a:xfrm>
             <a:off x="539248" y="817140"/>
-            <a:ext cx="11233248" cy="1317220"/>
+            <a:ext cx="11233248" cy="2178866"/>
           </a:xfrm>
           <a:prstGeom prst="rect">
             <a:avLst/>
@@ -10211,6 +10211,118 @@
                 <a:cs typeface="Microsoft Sans Serif" panose="020B0604020202020204" pitchFamily="34" charset="0"/>
               </a:rPr>
               <a:t> </a:t>
+            </a:r>
+          </a:p>
+          <a:p>
+            <a:pPr marL="285750" indent="-285750">
+              <a:lnSpc>
+                <a:spcPct val="200000"/>
+              </a:lnSpc>
+              <a:buFont typeface="Wingdings" panose="05000000000000000000" pitchFamily="2" charset="2"/>
+              <a:buChar char="v"/>
+            </a:pPr>
+            <a:r>
+              <a:rPr lang="ko-KR" altLang="en-US" sz="1400" dirty="0">
+                <a:latin typeface="Microsoft Sans Serif" panose="020B0604020202020204" pitchFamily="34" charset="0"/>
+                <a:ea typeface="Microsoft Sans Serif" panose="020B0604020202020204" pitchFamily="34" charset="0"/>
+                <a:cs typeface="Microsoft Sans Serif" panose="020B0604020202020204" pitchFamily="34" charset="0"/>
+              </a:rPr>
+              <a:t>각 변수를 평균과 표준편차로 </a:t>
+            </a:r>
+            <a:r>
+              <a:rPr lang="en-US" altLang="ko-KR" sz="1400" dirty="0">
+                <a:latin typeface="Microsoft Sans Serif" panose="020B0604020202020204" pitchFamily="34" charset="0"/>
+                <a:ea typeface="Microsoft Sans Serif" panose="020B0604020202020204" pitchFamily="34" charset="0"/>
+                <a:cs typeface="Microsoft Sans Serif" panose="020B0604020202020204" pitchFamily="34" charset="0"/>
+              </a:rPr>
+              <a:t>scaling</a:t>
+            </a:r>
+            <a:r>
+              <a:rPr lang="ko-KR" altLang="en-US" sz="1400" dirty="0">
+                <a:latin typeface="Microsoft Sans Serif" panose="020B0604020202020204" pitchFamily="34" charset="0"/>
+                <a:ea typeface="Microsoft Sans Serif" panose="020B0604020202020204" pitchFamily="34" charset="0"/>
+                <a:cs typeface="Microsoft Sans Serif" panose="020B0604020202020204" pitchFamily="34" charset="0"/>
+              </a:rPr>
+              <a:t>하면 평균과 </a:t>
+            </a:r>
+            <a:r>
+              <a:rPr lang="ko-KR" altLang="en-US" sz="1400" dirty="0" err="1">
+                <a:latin typeface="Microsoft Sans Serif" panose="020B0604020202020204" pitchFamily="34" charset="0"/>
+                <a:ea typeface="Microsoft Sans Serif" panose="020B0604020202020204" pitchFamily="34" charset="0"/>
+                <a:cs typeface="Microsoft Sans Serif" panose="020B0604020202020204" pitchFamily="34" charset="0"/>
+              </a:rPr>
+              <a:t>표준펀차는</a:t>
+            </a:r>
+            <a:r>
+              <a:rPr lang="ko-KR" altLang="en-US" sz="1400" dirty="0">
+                <a:latin typeface="Microsoft Sans Serif" panose="020B0604020202020204" pitchFamily="34" charset="0"/>
+                <a:ea typeface="Microsoft Sans Serif" panose="020B0604020202020204" pitchFamily="34" charset="0"/>
+                <a:cs typeface="Microsoft Sans Serif" panose="020B0604020202020204" pitchFamily="34" charset="0"/>
+              </a:rPr>
+              <a:t> 각각 어떤 값인가</a:t>
+            </a:r>
+            <a:r>
+              <a:rPr lang="en-US" altLang="ko-KR" sz="1400" dirty="0">
+                <a:latin typeface="Microsoft Sans Serif" panose="020B0604020202020204" pitchFamily="34" charset="0"/>
+                <a:ea typeface="Microsoft Sans Serif" panose="020B0604020202020204" pitchFamily="34" charset="0"/>
+                <a:cs typeface="Microsoft Sans Serif" panose="020B0604020202020204" pitchFamily="34" charset="0"/>
+              </a:rPr>
+              <a:t>? </a:t>
+            </a:r>
+            <a:r>
+              <a:rPr lang="ko-KR" altLang="en-US" sz="1400" dirty="0">
+                <a:latin typeface="Microsoft Sans Serif" panose="020B0604020202020204" pitchFamily="34" charset="0"/>
+                <a:ea typeface="Microsoft Sans Serif" panose="020B0604020202020204" pitchFamily="34" charset="0"/>
+                <a:cs typeface="Microsoft Sans Serif" panose="020B0604020202020204" pitchFamily="34" charset="0"/>
+              </a:rPr>
+              <a:t>모든 변수의 값이 동일해지는 것 아닌가</a:t>
+            </a:r>
+            <a:r>
+              <a:rPr lang="en-US" altLang="ko-KR" sz="1400" dirty="0">
+                <a:latin typeface="Microsoft Sans Serif" panose="020B0604020202020204" pitchFamily="34" charset="0"/>
+                <a:ea typeface="Microsoft Sans Serif" panose="020B0604020202020204" pitchFamily="34" charset="0"/>
+                <a:cs typeface="Microsoft Sans Serif" panose="020B0604020202020204" pitchFamily="34" charset="0"/>
+              </a:rPr>
+              <a:t>? </a:t>
+            </a:r>
+            <a:r>
+              <a:rPr lang="ko-KR" altLang="en-US" sz="1400" dirty="0">
+                <a:latin typeface="Microsoft Sans Serif" panose="020B0604020202020204" pitchFamily="34" charset="0"/>
+                <a:ea typeface="Microsoft Sans Serif" panose="020B0604020202020204" pitchFamily="34" charset="0"/>
+                <a:cs typeface="Microsoft Sans Serif" panose="020B0604020202020204" pitchFamily="34" charset="0"/>
+              </a:rPr>
+              <a:t>왜 이래야 하는지 설명하라</a:t>
+            </a:r>
+            <a:r>
+              <a:rPr lang="en-US" altLang="ko-KR" sz="1400" dirty="0">
+                <a:latin typeface="Microsoft Sans Serif" panose="020B0604020202020204" pitchFamily="34" charset="0"/>
+                <a:ea typeface="Microsoft Sans Serif" panose="020B0604020202020204" pitchFamily="34" charset="0"/>
+                <a:cs typeface="Microsoft Sans Serif" panose="020B0604020202020204" pitchFamily="34" charset="0"/>
+              </a:rPr>
+              <a:t>(</a:t>
+            </a:r>
+            <a:r>
+              <a:rPr lang="ko-KR" altLang="en-US" sz="1400" b="1" dirty="0" err="1">
+                <a:latin typeface="Microsoft Sans Serif" panose="020B0604020202020204" pitchFamily="34" charset="0"/>
+                <a:ea typeface="Microsoft Sans Serif" panose="020B0604020202020204" pitchFamily="34" charset="0"/>
+                <a:cs typeface="Microsoft Sans Serif" panose="020B0604020202020204" pitchFamily="34" charset="0"/>
+                <a:hlinkClick r:id="rId7">
+                  <a:extLst>
+                    <a:ext uri="{A12FA001-AC4F-418D-AE19-62706E023703}">
+                      <ahyp:hlinkClr xmlns:ahyp="http://schemas.microsoft.com/office/drawing/2018/hyperlinkcolor" val="tx"/>
+                    </a:ext>
+                  </a:extLst>
+                </a:hlinkClick>
+              </a:rPr>
+              <a:t>위키독스</a:t>
+            </a:r>
+            <a:r>
+              <a:rPr lang="en-US" altLang="ko-KR" sz="1400" dirty="0">
+                <a:latin typeface="Microsoft Sans Serif" panose="020B0604020202020204" pitchFamily="34" charset="0"/>
+                <a:ea typeface="Microsoft Sans Serif" panose="020B0604020202020204" pitchFamily="34" charset="0"/>
+                <a:cs typeface="Microsoft Sans Serif" panose="020B0604020202020204" pitchFamily="34" charset="0"/>
+              </a:rPr>
+              <a:t>)</a:t>
             </a:r>
           </a:p>
         </p:txBody>
@@ -10265,14 +10377,14 @@
           <p:nvPr/>
         </p:nvPicPr>
         <p:blipFill>
-          <a:blip r:embed="rId7"/>
+          <a:blip r:embed="rId8"/>
           <a:stretch>
             <a:fillRect/>
           </a:stretch>
         </p:blipFill>
         <p:spPr>
           <a:xfrm>
-            <a:off x="938160" y="3091662"/>
+            <a:off x="580625" y="3540681"/>
             <a:ext cx="2491956" cy="2728196"/>
           </a:xfrm>
           <a:prstGeom prst="rect">
@@ -16312,6 +16424,17 @@
 </file>
 
 <file path=customXml/item1.xml><?xml version="1.0" encoding="utf-8"?>
+<p:properties xmlns:p="http://schemas.microsoft.com/office/2006/metadata/properties" xmlns:xsi="http://www.w3.org/2001/XMLSchema-instance" xmlns:pc="http://schemas.microsoft.com/office/infopath/2007/PartnerControls">
+  <documentManagement>
+    <VSO_x0020_item_x0020_id xmlns="40262f94-9f35-4ac3-9a90-690165a166b7" xsi:nil="true"/>
+    <Assetid_x0020_ xmlns="40262f94-9f35-4ac3-9a90-690165a166b7" xsi:nil="true"/>
+    <Item_x0020_Details xmlns="40262f94-9f35-4ac3-9a90-690165a166b7" xsi:nil="true"/>
+    <Template_x0020_details xmlns="40262f94-9f35-4ac3-9a90-690165a166b7" xsi:nil="true"/>
+  </documentManagement>
+</p:properties>
+</file>
+
+<file path=customXml/item2.xml><?xml version="1.0" encoding="utf-8"?>
 <ct:contentTypeSchema xmlns:ct="http://schemas.microsoft.com/office/2006/metadata/contentType" xmlns:ma="http://schemas.microsoft.com/office/2006/metadata/properties/metaAttributes" ct:_="" ma:_="" ma:contentTypeName="Document" ma:contentTypeID="0x010100AA3F7D94069FF64A86F7DFF56D60E3BE" ma:contentTypeVersion="6" ma:contentTypeDescription="Create a new document." ma:contentTypeScope="" ma:versionID="c32302c77d4085ecf495bdddb7f5e889">
   <xsd:schema xmlns:xsd="http://www.w3.org/2001/XMLSchema" xmlns:xs="http://www.w3.org/2001/XMLSchema" xmlns:p="http://schemas.microsoft.com/office/2006/metadata/properties" xmlns:ns2="a4f35948-e619-41b3-aa29-22878b09cfd2" xmlns:ns3="40262f94-9f35-4ac3-9a90-690165a166b7" targetNamespace="http://schemas.microsoft.com/office/2006/metadata/properties" ma:root="true" ma:fieldsID="4ab5ae46be95f9d0be6107e8200be7a2" ns2:_="" ns3:_="">
     <xsd:import namespace="a4f35948-e619-41b3-aa29-22878b09cfd2"/>
@@ -16492,17 +16615,6 @@
 </ct:contentTypeSchema>
 </file>
 
-<file path=customXml/item2.xml><?xml version="1.0" encoding="utf-8"?>
-<p:properties xmlns:p="http://schemas.microsoft.com/office/2006/metadata/properties" xmlns:xsi="http://www.w3.org/2001/XMLSchema-instance" xmlns:pc="http://schemas.microsoft.com/office/infopath/2007/PartnerControls">
-  <documentManagement>
-    <VSO_x0020_item_x0020_id xmlns="40262f94-9f35-4ac3-9a90-690165a166b7" xsi:nil="true"/>
-    <Assetid_x0020_ xmlns="40262f94-9f35-4ac3-9a90-690165a166b7" xsi:nil="true"/>
-    <Item_x0020_Details xmlns="40262f94-9f35-4ac3-9a90-690165a166b7" xsi:nil="true"/>
-    <Template_x0020_details xmlns="40262f94-9f35-4ac3-9a90-690165a166b7" xsi:nil="true"/>
-  </documentManagement>
-</p:properties>
-</file>
-
 <file path=customXml/item3.xml><?xml version="1.0" encoding="utf-8"?>
 <?mso-contentType ?>
 <FormTemplates xmlns="http://schemas.microsoft.com/sharepoint/v3/contenttype/forms">
@@ -16513,6 +16625,23 @@
 </file>
 
 <file path=customXml/itemProps1.xml><?xml version="1.0" encoding="utf-8"?>
+<ds:datastoreItem xmlns:ds="http://schemas.openxmlformats.org/officeDocument/2006/customXml" ds:itemID="{50AACE6D-8EB6-447A-8DFD-C2C0C52916AC}">
+  <ds:schemaRefs>
+    <ds:schemaRef ds:uri="http://purl.org/dc/elements/1.1/"/>
+    <ds:schemaRef ds:uri="http://purl.org/dc/terms/"/>
+    <ds:schemaRef ds:uri="http://schemas.microsoft.com/office/2006/metadata/properties"/>
+    <ds:schemaRef ds:uri="a4f35948-e619-41b3-aa29-22878b09cfd2"/>
+    <ds:schemaRef ds:uri="http://schemas.microsoft.com/office/infopath/2007/PartnerControls"/>
+    <ds:schemaRef ds:uri="http://schemas.microsoft.com/office/2006/documentManagement/types"/>
+    <ds:schemaRef ds:uri="http://schemas.openxmlformats.org/package/2006/metadata/core-properties"/>
+    <ds:schemaRef ds:uri="40262f94-9f35-4ac3-9a90-690165a166b7"/>
+    <ds:schemaRef ds:uri="http://www.w3.org/XML/1998/namespace"/>
+    <ds:schemaRef ds:uri="http://purl.org/dc/dcmitype/"/>
+  </ds:schemaRefs>
+</ds:datastoreItem>
+</file>
+
+<file path=customXml/itemProps2.xml><?xml version="1.0" encoding="utf-8"?>
 <ds:datastoreItem xmlns:ds="http://schemas.openxmlformats.org/officeDocument/2006/customXml" ds:itemID="{5CCB2C71-1ED8-4540-B003-293B5E75C71F}">
   <ds:schemaRefs>
     <ds:schemaRef ds:uri="http://schemas.microsoft.com/office/2006/metadata/contentType"/>
@@ -16531,23 +16660,6 @@
 </ds:datastoreItem>
 </file>
 
-<file path=customXml/itemProps2.xml><?xml version="1.0" encoding="utf-8"?>
-<ds:datastoreItem xmlns:ds="http://schemas.openxmlformats.org/officeDocument/2006/customXml" ds:itemID="{50AACE6D-8EB6-447A-8DFD-C2C0C52916AC}">
-  <ds:schemaRefs>
-    <ds:schemaRef ds:uri="http://purl.org/dc/elements/1.1/"/>
-    <ds:schemaRef ds:uri="http://purl.org/dc/terms/"/>
-    <ds:schemaRef ds:uri="http://schemas.microsoft.com/office/2006/metadata/properties"/>
-    <ds:schemaRef ds:uri="a4f35948-e619-41b3-aa29-22878b09cfd2"/>
-    <ds:schemaRef ds:uri="http://schemas.microsoft.com/office/infopath/2007/PartnerControls"/>
-    <ds:schemaRef ds:uri="http://schemas.microsoft.com/office/2006/documentManagement/types"/>
-    <ds:schemaRef ds:uri="http://schemas.openxmlformats.org/package/2006/metadata/core-properties"/>
-    <ds:schemaRef ds:uri="40262f94-9f35-4ac3-9a90-690165a166b7"/>
-    <ds:schemaRef ds:uri="http://www.w3.org/XML/1998/namespace"/>
-    <ds:schemaRef ds:uri="http://purl.org/dc/dcmitype/"/>
-  </ds:schemaRefs>
-</ds:datastoreItem>
-</file>
-
 <file path=customXml/itemProps3.xml><?xml version="1.0" encoding="utf-8"?>
 <ds:datastoreItem xmlns:ds="http://schemas.openxmlformats.org/officeDocument/2006/customXml" ds:itemID="{7F9B8BCC-BF24-4800-92E1-9F891BBB27E6}">
   <ds:schemaRefs>

--- a/1_statistics for machine learning.pptx
+++ b/1_statistics for machine learning.pptx
@@ -5,10 +5,10 @@
     <p:sldMasterId id="2147483648" r:id="rId4"/>
   </p:sldMasterIdLst>
   <p:notesMasterIdLst>
-    <p:notesMasterId r:id="rId43"/>
+    <p:notesMasterId r:id="rId45"/>
   </p:notesMasterIdLst>
   <p:handoutMasterIdLst>
-    <p:handoutMasterId r:id="rId44"/>
+    <p:handoutMasterId r:id="rId46"/>
   </p:handoutMasterIdLst>
   <p:sldIdLst>
     <p:sldId id="256" r:id="rId5"/>
@@ -48,7 +48,9 @@
     <p:sldId id="297" r:id="rId39"/>
     <p:sldId id="298" r:id="rId40"/>
     <p:sldId id="303" r:id="rId41"/>
-    <p:sldId id="307" r:id="rId42"/>
+    <p:sldId id="308" r:id="rId42"/>
+    <p:sldId id="309" r:id="rId43"/>
+    <p:sldId id="307" r:id="rId44"/>
   </p:sldIdLst>
   <p:sldSz cx="12188825" cy="6858000"/>
   <p:notesSz cx="6858000" cy="9144000"/>
@@ -3411,6 +3413,224 @@
         <p:cNvPr id="1" name="">
           <a:extLst>
             <a:ext uri="{FF2B5EF4-FFF2-40B4-BE49-F238E27FC236}">
+              <a16:creationId xmlns:a16="http://schemas.microsoft.com/office/drawing/2014/main" id="{DB1B1111-0F2C-72CD-1A8C-DE20D1349A70}"/>
+            </a:ext>
+          </a:extLst>
+        </p:cNvPr>
+        <p:cNvGrpSpPr/>
+        <p:nvPr/>
+      </p:nvGrpSpPr>
+      <p:grpSpPr>
+        <a:xfrm>
+          <a:off x="0" y="0"/>
+          <a:ext cx="0" cy="0"/>
+          <a:chOff x="0" y="0"/>
+          <a:chExt cx="0" cy="0"/>
+        </a:xfrm>
+      </p:grpSpPr>
+      <p:sp>
+        <p:nvSpPr>
+          <p:cNvPr id="2" name="슬라이드 이미지 개체 틀 1">
+            <a:extLst>
+              <a:ext uri="{FF2B5EF4-FFF2-40B4-BE49-F238E27FC236}">
+                <a16:creationId xmlns:a16="http://schemas.microsoft.com/office/drawing/2014/main" id="{92D0A8F7-D3A7-3B77-DA76-D13BEAE2D407}"/>
+              </a:ext>
+            </a:extLst>
+          </p:cNvPr>
+          <p:cNvSpPr>
+            <a:spLocks noGrp="1" noRot="1" noChangeAspect="1"/>
+          </p:cNvSpPr>
+          <p:nvPr>
+            <p:ph type="sldImg"/>
+          </p:nvPr>
+        </p:nvSpPr>
+        <p:spPr/>
+      </p:sp>
+      <p:sp>
+        <p:nvSpPr>
+          <p:cNvPr id="3" name="슬라이드 노트 개체 틀 2">
+            <a:extLst>
+              <a:ext uri="{FF2B5EF4-FFF2-40B4-BE49-F238E27FC236}">
+                <a16:creationId xmlns:a16="http://schemas.microsoft.com/office/drawing/2014/main" id="{EA0989BA-EE78-7BC1-B768-664079BC9CA8}"/>
+              </a:ext>
+            </a:extLst>
+          </p:cNvPr>
+          <p:cNvSpPr>
+            <a:spLocks noGrp="1"/>
+          </p:cNvSpPr>
+          <p:nvPr>
+            <p:ph type="body" idx="1"/>
+          </p:nvPr>
+        </p:nvSpPr>
+        <p:spPr/>
+        <p:txBody>
+          <a:bodyPr/>
+          <a:lstStyle/>
+          <a:p>
+            <a:endParaRPr lang="ko-KR" altLang="en-US" dirty="0"/>
+          </a:p>
+        </p:txBody>
+      </p:sp>
+      <p:sp>
+        <p:nvSpPr>
+          <p:cNvPr id="4" name="슬라이드 번호 개체 틀 3">
+            <a:extLst>
+              <a:ext uri="{FF2B5EF4-FFF2-40B4-BE49-F238E27FC236}">
+                <a16:creationId xmlns:a16="http://schemas.microsoft.com/office/drawing/2014/main" id="{885AB258-08B6-57BF-2449-3EC2E44E86AE}"/>
+              </a:ext>
+            </a:extLst>
+          </p:cNvPr>
+          <p:cNvSpPr>
+            <a:spLocks noGrp="1"/>
+          </p:cNvSpPr>
+          <p:nvPr>
+            <p:ph type="sldNum" sz="quarter" idx="10"/>
+          </p:nvPr>
+        </p:nvSpPr>
+        <p:spPr/>
+        <p:txBody>
+          <a:bodyPr/>
+          <a:lstStyle/>
+          <a:p>
+            <a:pPr rtl="0"/>
+            <a:fld id="{5FB91549-43BF-425A-AF25-75262019208C}" type="slidenum">
+              <a:rPr lang="en-US" altLang="ko-KR" smtClean="0"/>
+              <a:t>38</a:t>
+            </a:fld>
+            <a:endParaRPr lang="ko-KR" altLang="en-US" dirty="0"/>
+          </a:p>
+        </p:txBody>
+      </p:sp>
+    </p:spTree>
+    <p:extLst>
+      <p:ext uri="{BB962C8B-B14F-4D97-AF65-F5344CB8AC3E}">
+        <p14:creationId xmlns:p14="http://schemas.microsoft.com/office/powerpoint/2010/main" val="1505251635"/>
+      </p:ext>
+    </p:extLst>
+  </p:cSld>
+  <p:clrMapOvr>
+    <a:masterClrMapping/>
+  </p:clrMapOvr>
+</p:notes>
+</file>
+
+<file path=ppt/notesSlides/notesSlide38.xml><?xml version="1.0" encoding="utf-8"?>
+<p:notes xmlns:a="http://schemas.openxmlformats.org/drawingml/2006/main" xmlns:r="http://schemas.openxmlformats.org/officeDocument/2006/relationships" xmlns:p="http://schemas.openxmlformats.org/presentationml/2006/main">
+  <p:cSld>
+    <p:spTree>
+      <p:nvGrpSpPr>
+        <p:cNvPr id="1" name="">
+          <a:extLst>
+            <a:ext uri="{FF2B5EF4-FFF2-40B4-BE49-F238E27FC236}">
+              <a16:creationId xmlns:a16="http://schemas.microsoft.com/office/drawing/2014/main" id="{31C0063C-CFE3-17F5-0A6B-13894E49F568}"/>
+            </a:ext>
+          </a:extLst>
+        </p:cNvPr>
+        <p:cNvGrpSpPr/>
+        <p:nvPr/>
+      </p:nvGrpSpPr>
+      <p:grpSpPr>
+        <a:xfrm>
+          <a:off x="0" y="0"/>
+          <a:ext cx="0" cy="0"/>
+          <a:chOff x="0" y="0"/>
+          <a:chExt cx="0" cy="0"/>
+        </a:xfrm>
+      </p:grpSpPr>
+      <p:sp>
+        <p:nvSpPr>
+          <p:cNvPr id="2" name="슬라이드 이미지 개체 틀 1">
+            <a:extLst>
+              <a:ext uri="{FF2B5EF4-FFF2-40B4-BE49-F238E27FC236}">
+                <a16:creationId xmlns:a16="http://schemas.microsoft.com/office/drawing/2014/main" id="{171BD372-58F3-74D3-962C-62D6166ECF19}"/>
+              </a:ext>
+            </a:extLst>
+          </p:cNvPr>
+          <p:cNvSpPr>
+            <a:spLocks noGrp="1" noRot="1" noChangeAspect="1"/>
+          </p:cNvSpPr>
+          <p:nvPr>
+            <p:ph type="sldImg"/>
+          </p:nvPr>
+        </p:nvSpPr>
+        <p:spPr/>
+      </p:sp>
+      <p:sp>
+        <p:nvSpPr>
+          <p:cNvPr id="3" name="슬라이드 노트 개체 틀 2">
+            <a:extLst>
+              <a:ext uri="{FF2B5EF4-FFF2-40B4-BE49-F238E27FC236}">
+                <a16:creationId xmlns:a16="http://schemas.microsoft.com/office/drawing/2014/main" id="{565D5C3F-35B9-22A4-141C-0742E72F79C1}"/>
+              </a:ext>
+            </a:extLst>
+          </p:cNvPr>
+          <p:cNvSpPr>
+            <a:spLocks noGrp="1"/>
+          </p:cNvSpPr>
+          <p:nvPr>
+            <p:ph type="body" idx="1"/>
+          </p:nvPr>
+        </p:nvSpPr>
+        <p:spPr/>
+        <p:txBody>
+          <a:bodyPr/>
+          <a:lstStyle/>
+          <a:p>
+            <a:endParaRPr lang="ko-KR" altLang="en-US" dirty="0"/>
+          </a:p>
+        </p:txBody>
+      </p:sp>
+      <p:sp>
+        <p:nvSpPr>
+          <p:cNvPr id="4" name="슬라이드 번호 개체 틀 3">
+            <a:extLst>
+              <a:ext uri="{FF2B5EF4-FFF2-40B4-BE49-F238E27FC236}">
+                <a16:creationId xmlns:a16="http://schemas.microsoft.com/office/drawing/2014/main" id="{4DE03DE3-F8A2-5FC5-4D16-A7E29C51C2BC}"/>
+              </a:ext>
+            </a:extLst>
+          </p:cNvPr>
+          <p:cNvSpPr>
+            <a:spLocks noGrp="1"/>
+          </p:cNvSpPr>
+          <p:nvPr>
+            <p:ph type="sldNum" sz="quarter" idx="10"/>
+          </p:nvPr>
+        </p:nvSpPr>
+        <p:spPr/>
+        <p:txBody>
+          <a:bodyPr/>
+          <a:lstStyle/>
+          <a:p>
+            <a:pPr rtl="0"/>
+            <a:fld id="{5FB91549-43BF-425A-AF25-75262019208C}" type="slidenum">
+              <a:rPr lang="en-US" altLang="ko-KR" smtClean="0"/>
+              <a:t>39</a:t>
+            </a:fld>
+            <a:endParaRPr lang="ko-KR" altLang="en-US" dirty="0"/>
+          </a:p>
+        </p:txBody>
+      </p:sp>
+    </p:spTree>
+    <p:extLst>
+      <p:ext uri="{BB962C8B-B14F-4D97-AF65-F5344CB8AC3E}">
+        <p14:creationId xmlns:p14="http://schemas.microsoft.com/office/powerpoint/2010/main" val="2739296369"/>
+      </p:ext>
+    </p:extLst>
+  </p:cSld>
+  <p:clrMapOvr>
+    <a:masterClrMapping/>
+  </p:clrMapOvr>
+</p:notes>
+</file>
+
+<file path=ppt/notesSlides/notesSlide39.xml><?xml version="1.0" encoding="utf-8"?>
+<p:notes xmlns:a="http://schemas.openxmlformats.org/drawingml/2006/main" xmlns:r="http://schemas.openxmlformats.org/officeDocument/2006/relationships" xmlns:p="http://schemas.openxmlformats.org/presentationml/2006/main">
+  <p:cSld>
+    <p:spTree>
+      <p:nvGrpSpPr>
+        <p:cNvPr id="1" name="">
+          <a:extLst>
+            <a:ext uri="{FF2B5EF4-FFF2-40B4-BE49-F238E27FC236}">
               <a16:creationId xmlns:a16="http://schemas.microsoft.com/office/drawing/2014/main" id="{37E37C32-7383-2B90-D316-0B7106F17578}"/>
             </a:ext>
           </a:extLst>
@@ -3493,7 +3713,7 @@
             <a:pPr rtl="0"/>
             <a:fld id="{5FB91549-43BF-425A-AF25-75262019208C}" type="slidenum">
               <a:rPr lang="en-US" altLang="ko-KR" smtClean="0"/>
-              <a:t>38</a:t>
+              <a:t>40</a:t>
             </a:fld>
             <a:endParaRPr lang="ko-KR" altLang="en-US" dirty="0"/>
           </a:p>
@@ -13355,6 +13575,64 @@
           </a:prstGeom>
         </p:spPr>
       </p:pic>
+      <p:sp>
+        <p:nvSpPr>
+          <p:cNvPr id="3" name="TextBox 2">
+            <a:extLst>
+              <a:ext uri="{FF2B5EF4-FFF2-40B4-BE49-F238E27FC236}">
+                <a16:creationId xmlns:a16="http://schemas.microsoft.com/office/drawing/2014/main" id="{1B4FC484-5BB5-9B69-79F6-68BC7DC90471}"/>
+              </a:ext>
+            </a:extLst>
+          </p:cNvPr>
+          <p:cNvSpPr txBox="1"/>
+          <p:nvPr/>
+        </p:nvSpPr>
+        <p:spPr>
+          <a:xfrm>
+            <a:off x="1989956" y="3573016"/>
+            <a:ext cx="7560840" cy="707886"/>
+          </a:xfrm>
+          <a:prstGeom prst="rect">
+            <a:avLst/>
+          </a:prstGeom>
+          <a:noFill/>
+        </p:spPr>
+        <p:txBody>
+          <a:bodyPr wrap="square" rtlCol="0">
+            <a:spAutoFit/>
+          </a:bodyPr>
+          <a:lstStyle/>
+          <a:p>
+            <a:r>
+              <a:rPr lang="en-US" altLang="ko-KR" sz="4000" dirty="0">
+                <a:latin typeface="ADLaM Display" panose="02010000000000000000" pitchFamily="2" charset="0"/>
+                <a:ea typeface="ADLaM Display" panose="02010000000000000000" pitchFamily="2" charset="0"/>
+                <a:cs typeface="ADLaM Display" panose="02010000000000000000" pitchFamily="2" charset="0"/>
+              </a:rPr>
+              <a:t>Multivariate</a:t>
+            </a:r>
+            <a:r>
+              <a:rPr lang="ko-KR" altLang="en-US" sz="4000" dirty="0">
+                <a:latin typeface="ADLaM Display" panose="02010000000000000000" pitchFamily="2" charset="0"/>
+                <a:cs typeface="ADLaM Display" panose="02010000000000000000" pitchFamily="2" charset="0"/>
+              </a:rPr>
+              <a:t> </a:t>
+            </a:r>
+            <a:r>
+              <a:rPr lang="en-US" altLang="ko-KR" sz="4000" dirty="0">
+                <a:latin typeface="ADLaM Display" panose="02010000000000000000" pitchFamily="2" charset="0"/>
+                <a:ea typeface="ADLaM Display" panose="02010000000000000000" pitchFamily="2" charset="0"/>
+                <a:cs typeface="ADLaM Display" panose="02010000000000000000" pitchFamily="2" charset="0"/>
+              </a:rPr>
+              <a:t>Analysis</a:t>
+            </a:r>
+            <a:endParaRPr lang="ko-KR" altLang="en-US" sz="4000" dirty="0">
+              <a:latin typeface="ADLaM Display" panose="02010000000000000000" pitchFamily="2" charset="0"/>
+              <a:cs typeface="ADLaM Display" panose="02010000000000000000" pitchFamily="2" charset="0"/>
+            </a:endParaRPr>
+          </a:p>
+        </p:txBody>
+      </p:sp>
     </p:spTree>
     <p:extLst>
       <p:ext uri="{BB962C8B-B14F-4D97-AF65-F5344CB8AC3E}">
@@ -14173,7 +14451,7 @@
         <p:cNvPr id="1" name="">
           <a:extLst>
             <a:ext uri="{FF2B5EF4-FFF2-40B4-BE49-F238E27FC236}">
-              <a16:creationId xmlns:a16="http://schemas.microsoft.com/office/drawing/2014/main" id="{0EF7AD35-B6C6-BC48-8362-1E0DF934788F}"/>
+              <a16:creationId xmlns:a16="http://schemas.microsoft.com/office/drawing/2014/main" id="{DD47DCE2-17C1-A611-9B45-2FD6CF81BE89}"/>
             </a:ext>
           </a:extLst>
         </p:cNvPr>
@@ -14193,7 +14471,7 @@
           <p:cNvPr id="2" name="슬라이드 번호 개체 틀 1">
             <a:extLst>
               <a:ext uri="{FF2B5EF4-FFF2-40B4-BE49-F238E27FC236}">
-                <a16:creationId xmlns:a16="http://schemas.microsoft.com/office/drawing/2014/main" id="{FB157F2C-AEE5-84A6-8E44-8311E4828D91}"/>
+                <a16:creationId xmlns:a16="http://schemas.microsoft.com/office/drawing/2014/main" id="{176F4523-1057-C68A-630F-8E420669DAAF}"/>
               </a:ext>
             </a:extLst>
           </p:cNvPr>
@@ -14218,42 +14496,12 @@
           </a:p>
         </p:txBody>
       </p:sp>
-      <p:pic>
-        <p:nvPicPr>
-          <p:cNvPr id="8" name="그림 7">
+      <p:sp>
+        <p:nvSpPr>
+          <p:cNvPr id="9" name="TextBox 8">
             <a:extLst>
               <a:ext uri="{FF2B5EF4-FFF2-40B4-BE49-F238E27FC236}">
-                <a16:creationId xmlns:a16="http://schemas.microsoft.com/office/drawing/2014/main" id="{C5F9557D-E6F8-CC76-27FB-953A0BADF33C}"/>
-              </a:ext>
-            </a:extLst>
-          </p:cNvPr>
-          <p:cNvPicPr>
-            <a:picLocks noChangeAspect="1"/>
-          </p:cNvPicPr>
-          <p:nvPr/>
-        </p:nvPicPr>
-        <p:blipFill>
-          <a:blip r:embed="rId3"/>
-          <a:stretch>
-            <a:fillRect/>
-          </a:stretch>
-        </p:blipFill>
-        <p:spPr>
-          <a:xfrm>
-            <a:off x="909836" y="1340768"/>
-            <a:ext cx="10179874" cy="4536504"/>
-          </a:xfrm>
-          <a:prstGeom prst="rect">
-            <a:avLst/>
-          </a:prstGeom>
-        </p:spPr>
-      </p:pic>
-      <p:sp>
-        <p:nvSpPr>
-          <p:cNvPr id="11" name="TextBox 10">
-            <a:extLst>
-              <a:ext uri="{FF2B5EF4-FFF2-40B4-BE49-F238E27FC236}">
-                <a16:creationId xmlns:a16="http://schemas.microsoft.com/office/drawing/2014/main" id="{A8922264-2A14-D40B-7A1A-EC319C22BF79}"/>
+                <a16:creationId xmlns:a16="http://schemas.microsoft.com/office/drawing/2014/main" id="{F096F71B-9CAC-A913-6B18-46452EB8146D}"/>
               </a:ext>
             </a:extLst>
           </p:cNvPr>
@@ -14263,7 +14511,7 @@
         <p:spPr>
           <a:xfrm>
             <a:off x="117748" y="260648"/>
-            <a:ext cx="11665296" cy="646331"/>
+            <a:ext cx="10729192" cy="584775"/>
           </a:xfrm>
           <a:prstGeom prst="rect">
             <a:avLst/>
@@ -14277,36 +14525,644 @@
           <a:lstStyle/>
           <a:p>
             <a:r>
-              <a:rPr lang="ko-KR" altLang="en-US" sz="2400" b="1" dirty="0"/>
-              <a:t>탐색적 데이터 분석</a:t>
-            </a:r>
-            <a:r>
-              <a:rPr lang="en-US" altLang="ko-KR" sz="2400" b="1" dirty="0"/>
-              <a:t>(EDA,</a:t>
-            </a:r>
-            <a:r>
-              <a:rPr lang="ko-KR" altLang="en-US" sz="2400" b="1" dirty="0"/>
+              <a:rPr lang="ko-KR" altLang="en-US" sz="3200" b="1" dirty="0"/>
+              <a:t>문제 풀이</a:t>
+            </a:r>
+            <a:r>
+              <a:rPr lang="en-US" altLang="ko-KR" sz="3200" b="1" dirty="0"/>
+              <a:t>(</a:t>
+            </a:r>
+            <a:r>
+              <a:rPr lang="ko-KR" altLang="en-US" sz="3200" b="1" dirty="0"/>
+              <a:t>시각화</a:t>
+            </a:r>
+            <a:r>
+              <a:rPr lang="en-US" altLang="ko-KR" sz="3200" b="1" dirty="0"/>
+              <a:t>, Data </a:t>
+            </a:r>
+            <a:r>
+              <a:rPr lang="en-US" altLang="ko-KR" sz="3200" b="1" dirty="0" err="1"/>
+              <a:t>Visulalization</a:t>
+            </a:r>
+            <a:r>
+              <a:rPr lang="en-US" altLang="ko-KR" sz="3200" b="1" dirty="0"/>
+              <a:t>)</a:t>
+            </a:r>
+            <a:endParaRPr lang="ko-KR" altLang="en-US" sz="3200" b="1" dirty="0"/>
+          </a:p>
+        </p:txBody>
+      </p:sp>
+      <p:pic>
+        <p:nvPicPr>
+          <p:cNvPr id="1026" name="Picture 2">
+            <a:extLst>
+              <a:ext uri="{FF2B5EF4-FFF2-40B4-BE49-F238E27FC236}">
+                <a16:creationId xmlns:a16="http://schemas.microsoft.com/office/drawing/2014/main" id="{58B5F73A-CBC7-1626-4F0E-24966B29D012}"/>
+              </a:ext>
+            </a:extLst>
+          </p:cNvPr>
+          <p:cNvPicPr>
+            <a:picLocks noChangeAspect="1" noChangeArrowheads="1"/>
+          </p:cNvPicPr>
+          <p:nvPr/>
+        </p:nvPicPr>
+        <p:blipFill>
+          <a:blip r:embed="rId3">
+            <a:extLst>
+              <a:ext uri="{28A0092B-C50C-407E-A947-70E740481C1C}">
+                <a14:useLocalDpi xmlns:a14="http://schemas.microsoft.com/office/drawing/2010/main" val="0"/>
+              </a:ext>
+            </a:extLst>
+          </a:blip>
+          <a:srcRect/>
+          <a:stretch>
+            <a:fillRect/>
+          </a:stretch>
+        </p:blipFill>
+        <p:spPr bwMode="auto">
+          <a:xfrm>
+            <a:off x="1485900" y="2473342"/>
+            <a:ext cx="2601763" cy="3891266"/>
+          </a:xfrm>
+          <a:prstGeom prst="rect">
+            <a:avLst/>
+          </a:prstGeom>
+          <a:noFill/>
+          <a:extLst>
+            <a:ext uri="{909E8E84-426E-40DD-AFC4-6F175D3DCCD1}">
+              <a14:hiddenFill xmlns:a14="http://schemas.microsoft.com/office/drawing/2010/main">
+                <a:solidFill>
+                  <a:srgbClr val="FFFFFF"/>
+                </a:solidFill>
+              </a14:hiddenFill>
+            </a:ext>
+          </a:extLst>
+        </p:spPr>
+      </p:pic>
+      <p:sp>
+        <p:nvSpPr>
+          <p:cNvPr id="3" name="TextBox 2">
+            <a:extLst>
+              <a:ext uri="{FF2B5EF4-FFF2-40B4-BE49-F238E27FC236}">
+                <a16:creationId xmlns:a16="http://schemas.microsoft.com/office/drawing/2014/main" id="{E6EFABEB-78B2-B23E-2790-1B3F29C1E80E}"/>
+              </a:ext>
+            </a:extLst>
+          </p:cNvPr>
+          <p:cNvSpPr txBox="1"/>
+          <p:nvPr/>
+        </p:nvSpPr>
+        <p:spPr>
+          <a:xfrm>
+            <a:off x="909836" y="875966"/>
+            <a:ext cx="10945216" cy="1118319"/>
+          </a:xfrm>
+          <a:prstGeom prst="rect">
+            <a:avLst/>
+          </a:prstGeom>
+          <a:noFill/>
+        </p:spPr>
+        <p:txBody>
+          <a:bodyPr wrap="square" rtlCol="0">
+            <a:spAutoFit/>
+          </a:bodyPr>
+          <a:lstStyle/>
+          <a:p>
+            <a:pPr marL="285750" indent="-285750">
+              <a:lnSpc>
+                <a:spcPct val="200000"/>
+              </a:lnSpc>
+              <a:buFont typeface="Wingdings" panose="05000000000000000000" pitchFamily="2" charset="2"/>
+              <a:buChar char="v"/>
+            </a:pPr>
+            <a:r>
+              <a:rPr lang="ko-KR" altLang="en-US" dirty="0"/>
+              <a:t>통계량</a:t>
+            </a:r>
+            <a:r>
+              <a:rPr lang="en-US" altLang="ko-KR" dirty="0"/>
+              <a:t>(Statistic)</a:t>
+            </a:r>
+            <a:r>
+              <a:rPr lang="ko-KR" altLang="en-US" dirty="0"/>
+              <a:t>을 이해하지 못하면 시각화는 하지 마라</a:t>
+            </a:r>
+            <a:endParaRPr lang="en-US" altLang="ko-KR" dirty="0"/>
+          </a:p>
+          <a:p>
+            <a:pPr marL="285750" indent="-285750">
+              <a:lnSpc>
+                <a:spcPct val="200000"/>
+              </a:lnSpc>
+              <a:buFont typeface="Wingdings" panose="05000000000000000000" pitchFamily="2" charset="2"/>
+              <a:buChar char="v"/>
+            </a:pPr>
+            <a:r>
+              <a:rPr lang="en-US" altLang="ko-KR" dirty="0"/>
+              <a:t>seaborn</a:t>
+            </a:r>
+            <a:r>
+              <a:rPr lang="ko-KR" altLang="en-US" dirty="0"/>
               <a:t> </a:t>
             </a:r>
             <a:r>
-              <a:rPr lang="en-US" altLang="ko-KR" sz="2400" b="1" dirty="0"/>
-              <a:t>Exploratory Data Analysis) </a:t>
-            </a:r>
-            <a:r>
-              <a:rPr lang="ko-KR" altLang="en-US" sz="3600" b="1" dirty="0"/>
-              <a:t>심층 </a:t>
-            </a:r>
-            <a:r>
-              <a:rPr lang="ko-KR" altLang="en-US" sz="2400" b="1" dirty="0"/>
-              <a:t>보고서작성 제출</a:t>
-            </a:r>
+              <a:rPr lang="en-US" altLang="ko-KR" dirty="0"/>
+              <a:t>gallery</a:t>
+            </a:r>
+            <a:r>
+              <a:rPr lang="ko-KR" altLang="en-US" dirty="0"/>
+              <a:t>의 시각화 예제 중에서 아래 그림을 평균</a:t>
+            </a:r>
+            <a:r>
+              <a:rPr lang="en-US" altLang="ko-KR" dirty="0"/>
+              <a:t>, </a:t>
+            </a:r>
+            <a:r>
+              <a:rPr lang="ko-KR" altLang="en-US" dirty="0"/>
+              <a:t>분산</a:t>
+            </a:r>
+            <a:r>
+              <a:rPr lang="en-US" altLang="ko-KR" dirty="0"/>
+              <a:t>, </a:t>
+            </a:r>
+            <a:r>
+              <a:rPr lang="ko-KR" altLang="en-US" dirty="0" err="1"/>
+              <a:t>왜도</a:t>
+            </a:r>
+            <a:r>
+              <a:rPr lang="en-US" altLang="ko-KR" dirty="0"/>
+              <a:t>, </a:t>
+            </a:r>
+            <a:r>
+              <a:rPr lang="ko-KR" altLang="en-US" dirty="0"/>
+              <a:t>분포 등의 관점으로 설명하라</a:t>
+            </a:r>
+          </a:p>
+        </p:txBody>
+      </p:sp>
+      <p:sp>
+        <p:nvSpPr>
+          <p:cNvPr id="6" name="TextBox 5">
+            <a:extLst>
+              <a:ext uri="{FF2B5EF4-FFF2-40B4-BE49-F238E27FC236}">
+                <a16:creationId xmlns:a16="http://schemas.microsoft.com/office/drawing/2014/main" id="{0557DD18-CE6A-587A-07B2-C86F815F51B5}"/>
+              </a:ext>
+            </a:extLst>
+          </p:cNvPr>
+          <p:cNvSpPr txBox="1"/>
+          <p:nvPr/>
+        </p:nvSpPr>
+        <p:spPr>
+          <a:xfrm>
+            <a:off x="1478577" y="6352144"/>
+            <a:ext cx="2448272" cy="276999"/>
+          </a:xfrm>
+          <a:prstGeom prst="rect">
+            <a:avLst/>
+          </a:prstGeom>
+          <a:noFill/>
+        </p:spPr>
+        <p:txBody>
+          <a:bodyPr wrap="square" rtlCol="0">
+            <a:spAutoFit/>
+          </a:bodyPr>
+          <a:lstStyle/>
+          <a:p>
+            <a:r>
+              <a:rPr lang="en-US" altLang="ko-KR" sz="1200" dirty="0" err="1">
+                <a:hlinkClick r:id="rId4">
+                  <a:extLst>
+                    <a:ext uri="{A12FA001-AC4F-418D-AE19-62706E023703}">
+                      <ahyp:hlinkClr xmlns:ahyp="http://schemas.microsoft.com/office/drawing/2018/hyperlinkcolor" val="tx"/>
+                    </a:ext>
+                  </a:extLst>
+                </a:hlinkClick>
+              </a:rPr>
+              <a:t>multiple_bivariate_kde</a:t>
+            </a:r>
+            <a:endParaRPr lang="ko-KR" altLang="en-US" sz="1200" dirty="0"/>
+          </a:p>
+        </p:txBody>
+      </p:sp>
+      <p:pic>
+        <p:nvPicPr>
+          <p:cNvPr id="1028" name="Picture 4">
+            <a:extLst>
+              <a:ext uri="{FF2B5EF4-FFF2-40B4-BE49-F238E27FC236}">
+                <a16:creationId xmlns:a16="http://schemas.microsoft.com/office/drawing/2014/main" id="{5C28E09D-41B6-F472-B8B1-F56ABC3D67A0}"/>
+              </a:ext>
+            </a:extLst>
+          </p:cNvPr>
+          <p:cNvPicPr>
+            <a:picLocks noChangeAspect="1" noChangeArrowheads="1"/>
+          </p:cNvPicPr>
+          <p:nvPr/>
+        </p:nvPicPr>
+        <p:blipFill>
+          <a:blip r:embed="rId5">
+            <a:extLst>
+              <a:ext uri="{28A0092B-C50C-407E-A947-70E740481C1C}">
+                <a14:useLocalDpi xmlns:a14="http://schemas.microsoft.com/office/drawing/2010/main" val="0"/>
+              </a:ext>
+            </a:extLst>
+          </a:blip>
+          <a:srcRect/>
+          <a:stretch>
+            <a:fillRect/>
+          </a:stretch>
+        </p:blipFill>
+        <p:spPr bwMode="auto">
+          <a:xfrm>
+            <a:off x="5857954" y="2490796"/>
+            <a:ext cx="4276725" cy="3457575"/>
+          </a:xfrm>
+          <a:prstGeom prst="rect">
+            <a:avLst/>
+          </a:prstGeom>
+          <a:noFill/>
+          <a:extLst>
+            <a:ext uri="{909E8E84-426E-40DD-AFC4-6F175D3DCCD1}">
+              <a14:hiddenFill xmlns:a14="http://schemas.microsoft.com/office/drawing/2010/main">
+                <a:solidFill>
+                  <a:srgbClr val="FFFFFF"/>
+                </a:solidFill>
+              </a14:hiddenFill>
+            </a:ext>
+          </a:extLst>
+        </p:spPr>
+      </p:pic>
+      <p:sp>
+        <p:nvSpPr>
+          <p:cNvPr id="7" name="TextBox 6">
+            <a:extLst>
+              <a:ext uri="{FF2B5EF4-FFF2-40B4-BE49-F238E27FC236}">
+                <a16:creationId xmlns:a16="http://schemas.microsoft.com/office/drawing/2014/main" id="{F11A536B-E0AF-AE13-E536-46C2F4FDCCE5}"/>
+              </a:ext>
+            </a:extLst>
+          </p:cNvPr>
+          <p:cNvSpPr txBox="1"/>
+          <p:nvPr/>
+        </p:nvSpPr>
+        <p:spPr>
+          <a:xfrm>
+            <a:off x="5863589" y="6075145"/>
+            <a:ext cx="1447832" cy="276999"/>
+          </a:xfrm>
+          <a:prstGeom prst="rect">
+            <a:avLst/>
+          </a:prstGeom>
+          <a:noFill/>
+        </p:spPr>
+        <p:txBody>
+          <a:bodyPr wrap="none" rtlCol="0">
+            <a:spAutoFit/>
+          </a:bodyPr>
+          <a:lstStyle/>
+          <a:p>
+            <a:r>
+              <a:rPr lang="en-US" altLang="ko-KR" sz="1200" dirty="0" err="1">
+                <a:hlinkClick r:id="rId6">
+                  <a:extLst>
+                    <a:ext uri="{A12FA001-AC4F-418D-AE19-62706E023703}">
+                      <ahyp:hlinkClr xmlns:ahyp="http://schemas.microsoft.com/office/drawing/2018/hyperlinkcolor" val="tx"/>
+                    </a:ext>
+                  </a:extLst>
+                </a:hlinkClick>
+              </a:rPr>
+              <a:t>multiple_regression</a:t>
+            </a:r>
+            <a:endParaRPr lang="ko-KR" altLang="en-US" sz="1200" dirty="0"/>
           </a:p>
         </p:txBody>
       </p:sp>
     </p:spTree>
     <p:extLst>
       <p:ext uri="{BB962C8B-B14F-4D97-AF65-F5344CB8AC3E}">
-        <p14:creationId xmlns:p14="http://schemas.microsoft.com/office/powerpoint/2010/main" val="3412877108"/>
+        <p14:creationId xmlns:p14="http://schemas.microsoft.com/office/powerpoint/2010/main" val="4105585802"/>
+      </p:ext>
+    </p:extLst>
+  </p:cSld>
+  <p:clrMapOvr>
+    <a:masterClrMapping/>
+  </p:clrMapOvr>
+  <mc:AlternateContent xmlns:mc="http://schemas.openxmlformats.org/markup-compatibility/2006" xmlns:p14="http://schemas.microsoft.com/office/powerpoint/2010/main">
+    <mc:Choice Requires="p14">
+      <p:transition spd="med" p14:dur="700">
+        <p:fade/>
+      </p:transition>
+    </mc:Choice>
+    <mc:Fallback xmlns="">
+      <p:transition spd="med">
+        <p:fade/>
+      </p:transition>
+    </mc:Fallback>
+  </mc:AlternateContent>
+</p:sld>
+</file>
+
+<file path=ppt/slides/slide39.xml><?xml version="1.0" encoding="utf-8"?>
+<p:sld xmlns:a="http://schemas.openxmlformats.org/drawingml/2006/main" xmlns:r="http://schemas.openxmlformats.org/officeDocument/2006/relationships" xmlns:p="http://schemas.openxmlformats.org/presentationml/2006/main">
+  <p:cSld>
+    <p:spTree>
+      <p:nvGrpSpPr>
+        <p:cNvPr id="1" name="">
+          <a:extLst>
+            <a:ext uri="{FF2B5EF4-FFF2-40B4-BE49-F238E27FC236}">
+              <a16:creationId xmlns:a16="http://schemas.microsoft.com/office/drawing/2014/main" id="{447E47D0-CA3E-396A-EAE0-3D7F7EC021D5}"/>
+            </a:ext>
+          </a:extLst>
+        </p:cNvPr>
+        <p:cNvGrpSpPr/>
+        <p:nvPr/>
+      </p:nvGrpSpPr>
+      <p:grpSpPr>
+        <a:xfrm>
+          <a:off x="0" y="0"/>
+          <a:ext cx="0" cy="0"/>
+          <a:chOff x="0" y="0"/>
+          <a:chExt cx="0" cy="0"/>
+        </a:xfrm>
+      </p:grpSpPr>
+      <p:pic>
+        <p:nvPicPr>
+          <p:cNvPr id="2052" name="Picture 4">
+            <a:extLst>
+              <a:ext uri="{FF2B5EF4-FFF2-40B4-BE49-F238E27FC236}">
+                <a16:creationId xmlns:a16="http://schemas.microsoft.com/office/drawing/2014/main" id="{42F81467-E6D1-04BF-99EC-7A62BE7705FB}"/>
+              </a:ext>
+            </a:extLst>
+          </p:cNvPr>
+          <p:cNvPicPr>
+            <a:picLocks noChangeAspect="1" noChangeArrowheads="1"/>
+          </p:cNvPicPr>
+          <p:nvPr/>
+        </p:nvPicPr>
+        <p:blipFill>
+          <a:blip r:embed="rId3" cstate="print">
+            <a:extLst>
+              <a:ext uri="{28A0092B-C50C-407E-A947-70E740481C1C}">
+                <a14:useLocalDpi xmlns:a14="http://schemas.microsoft.com/office/drawing/2010/main" val="0"/>
+              </a:ext>
+            </a:extLst>
+          </a:blip>
+          <a:srcRect/>
+          <a:stretch>
+            <a:fillRect/>
+          </a:stretch>
+        </p:blipFill>
+        <p:spPr bwMode="auto">
+          <a:xfrm>
+            <a:off x="1053852" y="2293351"/>
+            <a:ext cx="6493809" cy="4325868"/>
+          </a:xfrm>
+          <a:prstGeom prst="rect">
+            <a:avLst/>
+          </a:prstGeom>
+          <a:noFill/>
+          <a:extLst>
+            <a:ext uri="{909E8E84-426E-40DD-AFC4-6F175D3DCCD1}">
+              <a14:hiddenFill xmlns:a14="http://schemas.microsoft.com/office/drawing/2010/main">
+                <a:solidFill>
+                  <a:srgbClr val="FFFFFF"/>
+                </a:solidFill>
+              </a14:hiddenFill>
+            </a:ext>
+          </a:extLst>
+        </p:spPr>
+      </p:pic>
+      <p:sp>
+        <p:nvSpPr>
+          <p:cNvPr id="2" name="슬라이드 번호 개체 틀 1">
+            <a:extLst>
+              <a:ext uri="{FF2B5EF4-FFF2-40B4-BE49-F238E27FC236}">
+                <a16:creationId xmlns:a16="http://schemas.microsoft.com/office/drawing/2014/main" id="{7F4C5E44-F920-55F1-C678-996A81C5A570}"/>
+              </a:ext>
+            </a:extLst>
+          </p:cNvPr>
+          <p:cNvSpPr>
+            <a:spLocks noGrp="1"/>
+          </p:cNvSpPr>
+          <p:nvPr>
+            <p:ph type="sldNum" sz="quarter" idx="12"/>
+          </p:nvPr>
+        </p:nvSpPr>
+        <p:spPr/>
+        <p:txBody>
+          <a:bodyPr/>
+          <a:lstStyle/>
+          <a:p>
+            <a:pPr rtl="0"/>
+            <a:fld id="{A3F31473-23EB-4724-8B59-FE6D21D89FA4}" type="slidenum">
+              <a:rPr lang="en-US" altLang="ko-KR" noProof="0" smtClean="0"/>
+              <a:t>39</a:t>
+            </a:fld>
+            <a:endParaRPr lang="en-US" altLang="ko-KR" noProof="0" dirty="0"/>
+          </a:p>
+        </p:txBody>
+      </p:sp>
+      <p:sp>
+        <p:nvSpPr>
+          <p:cNvPr id="9" name="TextBox 8">
+            <a:extLst>
+              <a:ext uri="{FF2B5EF4-FFF2-40B4-BE49-F238E27FC236}">
+                <a16:creationId xmlns:a16="http://schemas.microsoft.com/office/drawing/2014/main" id="{8F26D8BE-0B8F-83F5-BAA1-C934E8DF2D58}"/>
+              </a:ext>
+            </a:extLst>
+          </p:cNvPr>
+          <p:cNvSpPr txBox="1"/>
+          <p:nvPr/>
+        </p:nvSpPr>
+        <p:spPr>
+          <a:xfrm>
+            <a:off x="117748" y="260648"/>
+            <a:ext cx="10729192" cy="584775"/>
+          </a:xfrm>
+          <a:prstGeom prst="rect">
+            <a:avLst/>
+          </a:prstGeom>
+          <a:noFill/>
+        </p:spPr>
+        <p:txBody>
+          <a:bodyPr wrap="square" rtlCol="0">
+            <a:spAutoFit/>
+          </a:bodyPr>
+          <a:lstStyle/>
+          <a:p>
+            <a:r>
+              <a:rPr lang="ko-KR" altLang="en-US" sz="3200" b="1" dirty="0"/>
+              <a:t>문제 풀이</a:t>
+            </a:r>
+            <a:r>
+              <a:rPr lang="en-US" altLang="ko-KR" sz="3200" b="1" dirty="0"/>
+              <a:t>(</a:t>
+            </a:r>
+            <a:r>
+              <a:rPr lang="ko-KR" altLang="en-US" sz="3200" b="1" dirty="0"/>
+              <a:t>시각화</a:t>
+            </a:r>
+            <a:r>
+              <a:rPr lang="en-US" altLang="ko-KR" sz="3200" b="1" dirty="0"/>
+              <a:t>, Data </a:t>
+            </a:r>
+            <a:r>
+              <a:rPr lang="en-US" altLang="ko-KR" sz="3200" b="1" dirty="0" err="1"/>
+              <a:t>Visulalization</a:t>
+            </a:r>
+            <a:r>
+              <a:rPr lang="en-US" altLang="ko-KR" sz="3200" b="1" dirty="0"/>
+              <a:t>)</a:t>
+            </a:r>
+            <a:endParaRPr lang="ko-KR" altLang="en-US" sz="3200" b="1" dirty="0"/>
+          </a:p>
+        </p:txBody>
+      </p:sp>
+      <p:sp>
+        <p:nvSpPr>
+          <p:cNvPr id="3" name="TextBox 2">
+            <a:extLst>
+              <a:ext uri="{FF2B5EF4-FFF2-40B4-BE49-F238E27FC236}">
+                <a16:creationId xmlns:a16="http://schemas.microsoft.com/office/drawing/2014/main" id="{254994DE-7084-F46C-641A-E520A1A8A349}"/>
+              </a:ext>
+            </a:extLst>
+          </p:cNvPr>
+          <p:cNvSpPr txBox="1"/>
+          <p:nvPr/>
+        </p:nvSpPr>
+        <p:spPr>
+          <a:xfrm>
+            <a:off x="909836" y="875966"/>
+            <a:ext cx="10945216" cy="1122743"/>
+          </a:xfrm>
+          <a:prstGeom prst="rect">
+            <a:avLst/>
+          </a:prstGeom>
+          <a:noFill/>
+        </p:spPr>
+        <p:txBody>
+          <a:bodyPr wrap="square" rtlCol="0">
+            <a:spAutoFit/>
+          </a:bodyPr>
+          <a:lstStyle/>
+          <a:p>
+            <a:pPr marL="285750" indent="-285750">
+              <a:lnSpc>
+                <a:spcPct val="200000"/>
+              </a:lnSpc>
+              <a:buFont typeface="Wingdings" panose="05000000000000000000" pitchFamily="2" charset="2"/>
+              <a:buChar char="v"/>
+            </a:pPr>
+            <a:r>
+              <a:rPr lang="ko-KR" altLang="en-US" dirty="0"/>
+              <a:t>대표적인 시각화 예제</a:t>
+            </a:r>
+            <a:r>
+              <a:rPr lang="en-US" altLang="ko-KR" dirty="0"/>
+              <a:t>(</a:t>
+            </a:r>
+            <a:r>
+              <a:rPr lang="ko-KR" altLang="en-US" dirty="0"/>
+              <a:t>나폴레옹군대 </a:t>
+            </a:r>
+            <a:r>
+              <a:rPr lang="en-US" altLang="ko-KR" dirty="0"/>
+              <a:t>, </a:t>
+            </a:r>
+            <a:r>
+              <a:rPr lang="ko-KR" altLang="en-US" dirty="0"/>
+              <a:t>나이팅게일</a:t>
+            </a:r>
+            <a:r>
+              <a:rPr lang="en-US" altLang="ko-KR" dirty="0"/>
+              <a:t>, </a:t>
+            </a:r>
+            <a:r>
+              <a:rPr lang="ko-KR" altLang="en-US" dirty="0"/>
+              <a:t>콜레라 등</a:t>
+            </a:r>
+            <a:r>
+              <a:rPr lang="en-US" altLang="ko-KR" dirty="0"/>
+              <a:t>)</a:t>
+            </a:r>
+            <a:r>
+              <a:rPr lang="ko-KR" altLang="en-US" dirty="0"/>
+              <a:t>를 검색하여 설명하라</a:t>
+            </a:r>
+            <a:endParaRPr lang="en-US" altLang="ko-KR" dirty="0"/>
+          </a:p>
+          <a:p>
+            <a:pPr marL="285750" indent="-285750">
+              <a:lnSpc>
+                <a:spcPct val="200000"/>
+              </a:lnSpc>
+              <a:buFont typeface="Wingdings" panose="05000000000000000000" pitchFamily="2" charset="2"/>
+              <a:buChar char="v"/>
+            </a:pPr>
+            <a:r>
+              <a:rPr lang="en-US" altLang="ko-KR" dirty="0" err="1">
+                <a:hlinkClick r:id="rId4">
+                  <a:extLst>
+                    <a:ext uri="{A12FA001-AC4F-418D-AE19-62706E023703}">
+                      <ahyp:hlinkClr xmlns:ahyp="http://schemas.microsoft.com/office/drawing/2018/hyperlinkcolor" val="tx"/>
+                    </a:ext>
+                  </a:extLst>
+                </a:hlinkClick>
+              </a:rPr>
+              <a:t>informationisbeautiful</a:t>
+            </a:r>
+            <a:endParaRPr lang="ko-KR" altLang="en-US" dirty="0"/>
+          </a:p>
+        </p:txBody>
+      </p:sp>
+      <p:pic>
+        <p:nvPicPr>
+          <p:cNvPr id="2050" name="Picture 2">
+            <a:extLst>
+              <a:ext uri="{FF2B5EF4-FFF2-40B4-BE49-F238E27FC236}">
+                <a16:creationId xmlns:a16="http://schemas.microsoft.com/office/drawing/2014/main" id="{77222F5E-1E8D-D58E-9960-497AA112C26C}"/>
+              </a:ext>
+            </a:extLst>
+          </p:cNvPr>
+          <p:cNvPicPr>
+            <a:picLocks noChangeAspect="1" noChangeArrowheads="1"/>
+          </p:cNvPicPr>
+          <p:nvPr/>
+        </p:nvPicPr>
+        <p:blipFill>
+          <a:blip r:embed="rId5" cstate="print">
+            <a:extLst>
+              <a:ext uri="{28A0092B-C50C-407E-A947-70E740481C1C}">
+                <a14:useLocalDpi xmlns:a14="http://schemas.microsoft.com/office/drawing/2010/main" val="0"/>
+              </a:ext>
+            </a:extLst>
+          </a:blip>
+          <a:srcRect/>
+          <a:stretch>
+            <a:fillRect/>
+          </a:stretch>
+        </p:blipFill>
+        <p:spPr bwMode="auto">
+          <a:xfrm>
+            <a:off x="5950396" y="1998709"/>
+            <a:ext cx="6149481" cy="4048424"/>
+          </a:xfrm>
+          <a:prstGeom prst="rect">
+            <a:avLst/>
+          </a:prstGeom>
+          <a:noFill/>
+          <a:extLst>
+            <a:ext uri="{909E8E84-426E-40DD-AFC4-6F175D3DCCD1}">
+              <a14:hiddenFill xmlns:a14="http://schemas.microsoft.com/office/drawing/2010/main">
+                <a:solidFill>
+                  <a:srgbClr val="FFFFFF"/>
+                </a:solidFill>
+              </a14:hiddenFill>
+            </a:ext>
+          </a:extLst>
+        </p:spPr>
+      </p:pic>
+    </p:spTree>
+    <p:extLst>
+      <p:ext uri="{BB962C8B-B14F-4D97-AF65-F5344CB8AC3E}">
+        <p14:creationId xmlns:p14="http://schemas.microsoft.com/office/powerpoint/2010/main" val="1556445585"/>
       </p:ext>
     </p:extLst>
   </p:cSld>
@@ -14671,6 +15527,169 @@
     <p:extLst>
       <p:ext uri="{BB962C8B-B14F-4D97-AF65-F5344CB8AC3E}">
         <p14:creationId xmlns:p14="http://schemas.microsoft.com/office/powerpoint/2010/main" val="1326778157"/>
+      </p:ext>
+    </p:extLst>
+  </p:cSld>
+  <p:clrMapOvr>
+    <a:masterClrMapping/>
+  </p:clrMapOvr>
+  <mc:AlternateContent xmlns:mc="http://schemas.openxmlformats.org/markup-compatibility/2006" xmlns:p14="http://schemas.microsoft.com/office/powerpoint/2010/main">
+    <mc:Choice Requires="p14">
+      <p:transition spd="med" p14:dur="700">
+        <p:fade/>
+      </p:transition>
+    </mc:Choice>
+    <mc:Fallback xmlns="">
+      <p:transition spd="med">
+        <p:fade/>
+      </p:transition>
+    </mc:Fallback>
+  </mc:AlternateContent>
+</p:sld>
+</file>
+
+<file path=ppt/slides/slide40.xml><?xml version="1.0" encoding="utf-8"?>
+<p:sld xmlns:a="http://schemas.openxmlformats.org/drawingml/2006/main" xmlns:r="http://schemas.openxmlformats.org/officeDocument/2006/relationships" xmlns:p="http://schemas.openxmlformats.org/presentationml/2006/main">
+  <p:cSld>
+    <p:spTree>
+      <p:nvGrpSpPr>
+        <p:cNvPr id="1" name="">
+          <a:extLst>
+            <a:ext uri="{FF2B5EF4-FFF2-40B4-BE49-F238E27FC236}">
+              <a16:creationId xmlns:a16="http://schemas.microsoft.com/office/drawing/2014/main" id="{0EF7AD35-B6C6-BC48-8362-1E0DF934788F}"/>
+            </a:ext>
+          </a:extLst>
+        </p:cNvPr>
+        <p:cNvGrpSpPr/>
+        <p:nvPr/>
+      </p:nvGrpSpPr>
+      <p:grpSpPr>
+        <a:xfrm>
+          <a:off x="0" y="0"/>
+          <a:ext cx="0" cy="0"/>
+          <a:chOff x="0" y="0"/>
+          <a:chExt cx="0" cy="0"/>
+        </a:xfrm>
+      </p:grpSpPr>
+      <p:sp>
+        <p:nvSpPr>
+          <p:cNvPr id="2" name="슬라이드 번호 개체 틀 1">
+            <a:extLst>
+              <a:ext uri="{FF2B5EF4-FFF2-40B4-BE49-F238E27FC236}">
+                <a16:creationId xmlns:a16="http://schemas.microsoft.com/office/drawing/2014/main" id="{FB157F2C-AEE5-84A6-8E44-8311E4828D91}"/>
+              </a:ext>
+            </a:extLst>
+          </p:cNvPr>
+          <p:cNvSpPr>
+            <a:spLocks noGrp="1"/>
+          </p:cNvSpPr>
+          <p:nvPr>
+            <p:ph type="sldNum" sz="quarter" idx="12"/>
+          </p:nvPr>
+        </p:nvSpPr>
+        <p:spPr/>
+        <p:txBody>
+          <a:bodyPr/>
+          <a:lstStyle/>
+          <a:p>
+            <a:pPr rtl="0"/>
+            <a:fld id="{A3F31473-23EB-4724-8B59-FE6D21D89FA4}" type="slidenum">
+              <a:rPr lang="en-US" altLang="ko-KR" noProof="0" smtClean="0"/>
+              <a:t>40</a:t>
+            </a:fld>
+            <a:endParaRPr lang="en-US" altLang="ko-KR" noProof="0" dirty="0"/>
+          </a:p>
+        </p:txBody>
+      </p:sp>
+      <p:pic>
+        <p:nvPicPr>
+          <p:cNvPr id="8" name="그림 7">
+            <a:extLst>
+              <a:ext uri="{FF2B5EF4-FFF2-40B4-BE49-F238E27FC236}">
+                <a16:creationId xmlns:a16="http://schemas.microsoft.com/office/drawing/2014/main" id="{C5F9557D-E6F8-CC76-27FB-953A0BADF33C}"/>
+              </a:ext>
+            </a:extLst>
+          </p:cNvPr>
+          <p:cNvPicPr>
+            <a:picLocks noChangeAspect="1"/>
+          </p:cNvPicPr>
+          <p:nvPr/>
+        </p:nvPicPr>
+        <p:blipFill>
+          <a:blip r:embed="rId3"/>
+          <a:stretch>
+            <a:fillRect/>
+          </a:stretch>
+        </p:blipFill>
+        <p:spPr>
+          <a:xfrm>
+            <a:off x="909836" y="1340768"/>
+            <a:ext cx="10179874" cy="4536504"/>
+          </a:xfrm>
+          <a:prstGeom prst="rect">
+            <a:avLst/>
+          </a:prstGeom>
+        </p:spPr>
+      </p:pic>
+      <p:sp>
+        <p:nvSpPr>
+          <p:cNvPr id="11" name="TextBox 10">
+            <a:extLst>
+              <a:ext uri="{FF2B5EF4-FFF2-40B4-BE49-F238E27FC236}">
+                <a16:creationId xmlns:a16="http://schemas.microsoft.com/office/drawing/2014/main" id="{A8922264-2A14-D40B-7A1A-EC319C22BF79}"/>
+              </a:ext>
+            </a:extLst>
+          </p:cNvPr>
+          <p:cNvSpPr txBox="1"/>
+          <p:nvPr/>
+        </p:nvSpPr>
+        <p:spPr>
+          <a:xfrm>
+            <a:off x="117748" y="260648"/>
+            <a:ext cx="11665296" cy="646331"/>
+          </a:xfrm>
+          <a:prstGeom prst="rect">
+            <a:avLst/>
+          </a:prstGeom>
+          <a:noFill/>
+        </p:spPr>
+        <p:txBody>
+          <a:bodyPr wrap="square" rtlCol="0">
+            <a:spAutoFit/>
+          </a:bodyPr>
+          <a:lstStyle/>
+          <a:p>
+            <a:r>
+              <a:rPr lang="ko-KR" altLang="en-US" sz="2400" b="1" dirty="0"/>
+              <a:t>탐색적 데이터 분석</a:t>
+            </a:r>
+            <a:r>
+              <a:rPr lang="en-US" altLang="ko-KR" sz="2400" b="1" dirty="0"/>
+              <a:t>(EDA,</a:t>
+            </a:r>
+            <a:r>
+              <a:rPr lang="ko-KR" altLang="en-US" sz="2400" b="1" dirty="0"/>
+              <a:t> </a:t>
+            </a:r>
+            <a:r>
+              <a:rPr lang="en-US" altLang="ko-KR" sz="2400" b="1" dirty="0"/>
+              <a:t>Exploratory Data Analysis) </a:t>
+            </a:r>
+            <a:r>
+              <a:rPr lang="ko-KR" altLang="en-US" sz="3600" b="1" dirty="0"/>
+              <a:t>심층 </a:t>
+            </a:r>
+            <a:r>
+              <a:rPr lang="ko-KR" altLang="en-US" sz="2400" b="1" dirty="0"/>
+              <a:t>보고서작성 제출</a:t>
+            </a:r>
+          </a:p>
+        </p:txBody>
+      </p:sp>
+    </p:spTree>
+    <p:extLst>
+      <p:ext uri="{BB962C8B-B14F-4D97-AF65-F5344CB8AC3E}">
+        <p14:creationId xmlns:p14="http://schemas.microsoft.com/office/powerpoint/2010/main" val="3412877108"/>
       </p:ext>
     </p:extLst>
   </p:cSld>
@@ -16424,17 +17443,6 @@
 </file>
 
 <file path=customXml/item1.xml><?xml version="1.0" encoding="utf-8"?>
-<p:properties xmlns:p="http://schemas.microsoft.com/office/2006/metadata/properties" xmlns:xsi="http://www.w3.org/2001/XMLSchema-instance" xmlns:pc="http://schemas.microsoft.com/office/infopath/2007/PartnerControls">
-  <documentManagement>
-    <VSO_x0020_item_x0020_id xmlns="40262f94-9f35-4ac3-9a90-690165a166b7" xsi:nil="true"/>
-    <Assetid_x0020_ xmlns="40262f94-9f35-4ac3-9a90-690165a166b7" xsi:nil="true"/>
-    <Item_x0020_Details xmlns="40262f94-9f35-4ac3-9a90-690165a166b7" xsi:nil="true"/>
-    <Template_x0020_details xmlns="40262f94-9f35-4ac3-9a90-690165a166b7" xsi:nil="true"/>
-  </documentManagement>
-</p:properties>
-</file>
-
-<file path=customXml/item2.xml><?xml version="1.0" encoding="utf-8"?>
 <ct:contentTypeSchema xmlns:ct="http://schemas.microsoft.com/office/2006/metadata/contentType" xmlns:ma="http://schemas.microsoft.com/office/2006/metadata/properties/metaAttributes" ct:_="" ma:_="" ma:contentTypeName="Document" ma:contentTypeID="0x010100AA3F7D94069FF64A86F7DFF56D60E3BE" ma:contentTypeVersion="6" ma:contentTypeDescription="Create a new document." ma:contentTypeScope="" ma:versionID="c32302c77d4085ecf495bdddb7f5e889">
   <xsd:schema xmlns:xsd="http://www.w3.org/2001/XMLSchema" xmlns:xs="http://www.w3.org/2001/XMLSchema" xmlns:p="http://schemas.microsoft.com/office/2006/metadata/properties" xmlns:ns2="a4f35948-e619-41b3-aa29-22878b09cfd2" xmlns:ns3="40262f94-9f35-4ac3-9a90-690165a166b7" targetNamespace="http://schemas.microsoft.com/office/2006/metadata/properties" ma:root="true" ma:fieldsID="4ab5ae46be95f9d0be6107e8200be7a2" ns2:_="" ns3:_="">
     <xsd:import namespace="a4f35948-e619-41b3-aa29-22878b09cfd2"/>
@@ -16615,6 +17623,17 @@
 </ct:contentTypeSchema>
 </file>
 
+<file path=customXml/item2.xml><?xml version="1.0" encoding="utf-8"?>
+<p:properties xmlns:p="http://schemas.microsoft.com/office/2006/metadata/properties" xmlns:xsi="http://www.w3.org/2001/XMLSchema-instance" xmlns:pc="http://schemas.microsoft.com/office/infopath/2007/PartnerControls">
+  <documentManagement>
+    <VSO_x0020_item_x0020_id xmlns="40262f94-9f35-4ac3-9a90-690165a166b7" xsi:nil="true"/>
+    <Assetid_x0020_ xmlns="40262f94-9f35-4ac3-9a90-690165a166b7" xsi:nil="true"/>
+    <Item_x0020_Details xmlns="40262f94-9f35-4ac3-9a90-690165a166b7" xsi:nil="true"/>
+    <Template_x0020_details xmlns="40262f94-9f35-4ac3-9a90-690165a166b7" xsi:nil="true"/>
+  </documentManagement>
+</p:properties>
+</file>
+
 <file path=customXml/item3.xml><?xml version="1.0" encoding="utf-8"?>
 <?mso-contentType ?>
 <FormTemplates xmlns="http://schemas.microsoft.com/sharepoint/v3/contenttype/forms">
@@ -16625,23 +17644,6 @@
 </file>
 
 <file path=customXml/itemProps1.xml><?xml version="1.0" encoding="utf-8"?>
-<ds:datastoreItem xmlns:ds="http://schemas.openxmlformats.org/officeDocument/2006/customXml" ds:itemID="{50AACE6D-8EB6-447A-8DFD-C2C0C52916AC}">
-  <ds:schemaRefs>
-    <ds:schemaRef ds:uri="http://purl.org/dc/elements/1.1/"/>
-    <ds:schemaRef ds:uri="http://purl.org/dc/terms/"/>
-    <ds:schemaRef ds:uri="http://schemas.microsoft.com/office/2006/metadata/properties"/>
-    <ds:schemaRef ds:uri="a4f35948-e619-41b3-aa29-22878b09cfd2"/>
-    <ds:schemaRef ds:uri="http://schemas.microsoft.com/office/infopath/2007/PartnerControls"/>
-    <ds:schemaRef ds:uri="http://schemas.microsoft.com/office/2006/documentManagement/types"/>
-    <ds:schemaRef ds:uri="http://schemas.openxmlformats.org/package/2006/metadata/core-properties"/>
-    <ds:schemaRef ds:uri="40262f94-9f35-4ac3-9a90-690165a166b7"/>
-    <ds:schemaRef ds:uri="http://www.w3.org/XML/1998/namespace"/>
-    <ds:schemaRef ds:uri="http://purl.org/dc/dcmitype/"/>
-  </ds:schemaRefs>
-</ds:datastoreItem>
-</file>
-
-<file path=customXml/itemProps2.xml><?xml version="1.0" encoding="utf-8"?>
 <ds:datastoreItem xmlns:ds="http://schemas.openxmlformats.org/officeDocument/2006/customXml" ds:itemID="{5CCB2C71-1ED8-4540-B003-293B5E75C71F}">
   <ds:schemaRefs>
     <ds:schemaRef ds:uri="http://schemas.microsoft.com/office/2006/metadata/contentType"/>
@@ -16660,6 +17662,23 @@
 </ds:datastoreItem>
 </file>
 
+<file path=customXml/itemProps2.xml><?xml version="1.0" encoding="utf-8"?>
+<ds:datastoreItem xmlns:ds="http://schemas.openxmlformats.org/officeDocument/2006/customXml" ds:itemID="{50AACE6D-8EB6-447A-8DFD-C2C0C52916AC}">
+  <ds:schemaRefs>
+    <ds:schemaRef ds:uri="http://purl.org/dc/elements/1.1/"/>
+    <ds:schemaRef ds:uri="http://purl.org/dc/terms/"/>
+    <ds:schemaRef ds:uri="http://schemas.microsoft.com/office/2006/metadata/properties"/>
+    <ds:schemaRef ds:uri="a4f35948-e619-41b3-aa29-22878b09cfd2"/>
+    <ds:schemaRef ds:uri="http://schemas.microsoft.com/office/infopath/2007/PartnerControls"/>
+    <ds:schemaRef ds:uri="http://schemas.microsoft.com/office/2006/documentManagement/types"/>
+    <ds:schemaRef ds:uri="http://schemas.openxmlformats.org/package/2006/metadata/core-properties"/>
+    <ds:schemaRef ds:uri="40262f94-9f35-4ac3-9a90-690165a166b7"/>
+    <ds:schemaRef ds:uri="http://www.w3.org/XML/1998/namespace"/>
+    <ds:schemaRef ds:uri="http://purl.org/dc/dcmitype/"/>
+  </ds:schemaRefs>
+</ds:datastoreItem>
+</file>
+
 <file path=customXml/itemProps3.xml><?xml version="1.0" encoding="utf-8"?>
 <ds:datastoreItem xmlns:ds="http://schemas.openxmlformats.org/officeDocument/2006/customXml" ds:itemID="{7F9B8BCC-BF24-4800-92E1-9F891BBB27E6}">
   <ds:schemaRefs>

--- a/1_statistics for machine learning.pptx
+++ b/1_statistics for machine learning.pptx
@@ -5,10 +5,10 @@
     <p:sldMasterId id="2147483648" r:id="rId4"/>
   </p:sldMasterIdLst>
   <p:notesMasterIdLst>
-    <p:notesMasterId r:id="rId45"/>
+    <p:notesMasterId r:id="rId46"/>
   </p:notesMasterIdLst>
   <p:handoutMasterIdLst>
-    <p:handoutMasterId r:id="rId46"/>
+    <p:handoutMasterId r:id="rId47"/>
   </p:handoutMasterIdLst>
   <p:sldIdLst>
     <p:sldId id="256" r:id="rId5"/>
@@ -49,8 +49,9 @@
     <p:sldId id="298" r:id="rId40"/>
     <p:sldId id="303" r:id="rId41"/>
     <p:sldId id="308" r:id="rId42"/>
-    <p:sldId id="309" r:id="rId43"/>
-    <p:sldId id="307" r:id="rId44"/>
+    <p:sldId id="310" r:id="rId43"/>
+    <p:sldId id="309" r:id="rId44"/>
+    <p:sldId id="307" r:id="rId45"/>
   </p:sldIdLst>
   <p:sldSz cx="12188825" cy="6858000"/>
   <p:notesSz cx="6858000" cy="9144000"/>
@@ -272,7 +273,7 @@
                 <a:latin typeface="맑은 고딕" panose="020B0503020000020004" pitchFamily="50" charset="-127"/>
                 <a:ea typeface="맑은 고딕" panose="020B0503020000020004" pitchFamily="50" charset="-127"/>
               </a:rPr>
-              <a:t>2026-03-14</a:t>
+              <a:t>2026-03-16</a:t>
             </a:fld>
             <a:endParaRPr lang="ko-KR" altLang="en-US" dirty="0">
               <a:latin typeface="맑은 고딕" panose="020B0503020000020004" pitchFamily="50" charset="-127"/>
@@ -459,7 +460,7 @@
             <a:fld id="{39DBE7D5-AA2D-4B26-8C69-8B60D39FD5EE}" type="datetime1">
               <a:rPr lang="ko-KR" altLang="en-US" smtClean="0"/>
               <a:pPr/>
-              <a:t>2026-03-14</a:t>
+              <a:t>2026-03-16</a:t>
             </a:fld>
             <a:endParaRPr lang="ko-KR" altLang="en-US" dirty="0"/>
           </a:p>
@@ -3522,7 +3523,7 @@
         <p:cNvPr id="1" name="">
           <a:extLst>
             <a:ext uri="{FF2B5EF4-FFF2-40B4-BE49-F238E27FC236}">
-              <a16:creationId xmlns:a16="http://schemas.microsoft.com/office/drawing/2014/main" id="{31C0063C-CFE3-17F5-0A6B-13894E49F568}"/>
+              <a16:creationId xmlns:a16="http://schemas.microsoft.com/office/drawing/2014/main" id="{941A194A-847B-6F14-07F2-38D05F416B33}"/>
             </a:ext>
           </a:extLst>
         </p:cNvPr>
@@ -3542,7 +3543,7 @@
           <p:cNvPr id="2" name="슬라이드 이미지 개체 틀 1">
             <a:extLst>
               <a:ext uri="{FF2B5EF4-FFF2-40B4-BE49-F238E27FC236}">
-                <a16:creationId xmlns:a16="http://schemas.microsoft.com/office/drawing/2014/main" id="{171BD372-58F3-74D3-962C-62D6166ECF19}"/>
+                <a16:creationId xmlns:a16="http://schemas.microsoft.com/office/drawing/2014/main" id="{C0567891-8706-81FD-F2D9-2CC0D70E4A85}"/>
               </a:ext>
             </a:extLst>
           </p:cNvPr>
@@ -3560,7 +3561,7 @@
           <p:cNvPr id="3" name="슬라이드 노트 개체 틀 2">
             <a:extLst>
               <a:ext uri="{FF2B5EF4-FFF2-40B4-BE49-F238E27FC236}">
-                <a16:creationId xmlns:a16="http://schemas.microsoft.com/office/drawing/2014/main" id="{565D5C3F-35B9-22A4-141C-0742E72F79C1}"/>
+                <a16:creationId xmlns:a16="http://schemas.microsoft.com/office/drawing/2014/main" id="{DA21A2CA-7CA6-CB34-3461-8A5A650C9383}"/>
               </a:ext>
             </a:extLst>
           </p:cNvPr>
@@ -3585,7 +3586,7 @@
           <p:cNvPr id="4" name="슬라이드 번호 개체 틀 3">
             <a:extLst>
               <a:ext uri="{FF2B5EF4-FFF2-40B4-BE49-F238E27FC236}">
-                <a16:creationId xmlns:a16="http://schemas.microsoft.com/office/drawing/2014/main" id="{4DE03DE3-F8A2-5FC5-4D16-A7E29C51C2BC}"/>
+                <a16:creationId xmlns:a16="http://schemas.microsoft.com/office/drawing/2014/main" id="{6308AB1B-9C0A-3FA6-14A1-50D9AF282BF5}"/>
               </a:ext>
             </a:extLst>
           </p:cNvPr>
@@ -3613,7 +3614,7 @@
     </p:spTree>
     <p:extLst>
       <p:ext uri="{BB962C8B-B14F-4D97-AF65-F5344CB8AC3E}">
-        <p14:creationId xmlns:p14="http://schemas.microsoft.com/office/powerpoint/2010/main" val="2739296369"/>
+        <p14:creationId xmlns:p14="http://schemas.microsoft.com/office/powerpoint/2010/main" val="1412915619"/>
       </p:ext>
     </p:extLst>
   </p:cSld>
@@ -3631,7 +3632,7 @@
         <p:cNvPr id="1" name="">
           <a:extLst>
             <a:ext uri="{FF2B5EF4-FFF2-40B4-BE49-F238E27FC236}">
-              <a16:creationId xmlns:a16="http://schemas.microsoft.com/office/drawing/2014/main" id="{37E37C32-7383-2B90-D316-0B7106F17578}"/>
+              <a16:creationId xmlns:a16="http://schemas.microsoft.com/office/drawing/2014/main" id="{31C0063C-CFE3-17F5-0A6B-13894E49F568}"/>
             </a:ext>
           </a:extLst>
         </p:cNvPr>
@@ -3651,7 +3652,7 @@
           <p:cNvPr id="2" name="슬라이드 이미지 개체 틀 1">
             <a:extLst>
               <a:ext uri="{FF2B5EF4-FFF2-40B4-BE49-F238E27FC236}">
-                <a16:creationId xmlns:a16="http://schemas.microsoft.com/office/drawing/2014/main" id="{DD5A47C4-78D3-B6B1-45B8-8D6F5BA52CB8}"/>
+                <a16:creationId xmlns:a16="http://schemas.microsoft.com/office/drawing/2014/main" id="{171BD372-58F3-74D3-962C-62D6166ECF19}"/>
               </a:ext>
             </a:extLst>
           </p:cNvPr>
@@ -3669,7 +3670,7 @@
           <p:cNvPr id="3" name="슬라이드 노트 개체 틀 2">
             <a:extLst>
               <a:ext uri="{FF2B5EF4-FFF2-40B4-BE49-F238E27FC236}">
-                <a16:creationId xmlns:a16="http://schemas.microsoft.com/office/drawing/2014/main" id="{F43606D4-A7F7-79E8-C685-45A220AF97AE}"/>
+                <a16:creationId xmlns:a16="http://schemas.microsoft.com/office/drawing/2014/main" id="{565D5C3F-35B9-22A4-141C-0742E72F79C1}"/>
               </a:ext>
             </a:extLst>
           </p:cNvPr>
@@ -3694,7 +3695,7 @@
           <p:cNvPr id="4" name="슬라이드 번호 개체 틀 3">
             <a:extLst>
               <a:ext uri="{FF2B5EF4-FFF2-40B4-BE49-F238E27FC236}">
-                <a16:creationId xmlns:a16="http://schemas.microsoft.com/office/drawing/2014/main" id="{E23A52C2-B18A-CA0F-A3BA-D977DA520E7D}"/>
+                <a16:creationId xmlns:a16="http://schemas.microsoft.com/office/drawing/2014/main" id="{4DE03DE3-F8A2-5FC5-4D16-A7E29C51C2BC}"/>
               </a:ext>
             </a:extLst>
           </p:cNvPr>
@@ -3722,7 +3723,7 @@
     </p:spTree>
     <p:extLst>
       <p:ext uri="{BB962C8B-B14F-4D97-AF65-F5344CB8AC3E}">
-        <p14:creationId xmlns:p14="http://schemas.microsoft.com/office/powerpoint/2010/main" val="4232958419"/>
+        <p14:creationId xmlns:p14="http://schemas.microsoft.com/office/powerpoint/2010/main" val="2739296369"/>
       </p:ext>
     </p:extLst>
   </p:cSld>
@@ -3808,6 +3809,115 @@
     <p:extLst>
       <p:ext uri="{BB962C8B-B14F-4D97-AF65-F5344CB8AC3E}">
         <p14:creationId xmlns:p14="http://schemas.microsoft.com/office/powerpoint/2010/main" val="2272406497"/>
+      </p:ext>
+    </p:extLst>
+  </p:cSld>
+  <p:clrMapOvr>
+    <a:masterClrMapping/>
+  </p:clrMapOvr>
+</p:notes>
+</file>
+
+<file path=ppt/notesSlides/notesSlide40.xml><?xml version="1.0" encoding="utf-8"?>
+<p:notes xmlns:a="http://schemas.openxmlformats.org/drawingml/2006/main" xmlns:r="http://schemas.openxmlformats.org/officeDocument/2006/relationships" xmlns:p="http://schemas.openxmlformats.org/presentationml/2006/main">
+  <p:cSld>
+    <p:spTree>
+      <p:nvGrpSpPr>
+        <p:cNvPr id="1" name="">
+          <a:extLst>
+            <a:ext uri="{FF2B5EF4-FFF2-40B4-BE49-F238E27FC236}">
+              <a16:creationId xmlns:a16="http://schemas.microsoft.com/office/drawing/2014/main" id="{37E37C32-7383-2B90-D316-0B7106F17578}"/>
+            </a:ext>
+          </a:extLst>
+        </p:cNvPr>
+        <p:cNvGrpSpPr/>
+        <p:nvPr/>
+      </p:nvGrpSpPr>
+      <p:grpSpPr>
+        <a:xfrm>
+          <a:off x="0" y="0"/>
+          <a:ext cx="0" cy="0"/>
+          <a:chOff x="0" y="0"/>
+          <a:chExt cx="0" cy="0"/>
+        </a:xfrm>
+      </p:grpSpPr>
+      <p:sp>
+        <p:nvSpPr>
+          <p:cNvPr id="2" name="슬라이드 이미지 개체 틀 1">
+            <a:extLst>
+              <a:ext uri="{FF2B5EF4-FFF2-40B4-BE49-F238E27FC236}">
+                <a16:creationId xmlns:a16="http://schemas.microsoft.com/office/drawing/2014/main" id="{DD5A47C4-78D3-B6B1-45B8-8D6F5BA52CB8}"/>
+              </a:ext>
+            </a:extLst>
+          </p:cNvPr>
+          <p:cNvSpPr>
+            <a:spLocks noGrp="1" noRot="1" noChangeAspect="1"/>
+          </p:cNvSpPr>
+          <p:nvPr>
+            <p:ph type="sldImg"/>
+          </p:nvPr>
+        </p:nvSpPr>
+        <p:spPr/>
+      </p:sp>
+      <p:sp>
+        <p:nvSpPr>
+          <p:cNvPr id="3" name="슬라이드 노트 개체 틀 2">
+            <a:extLst>
+              <a:ext uri="{FF2B5EF4-FFF2-40B4-BE49-F238E27FC236}">
+                <a16:creationId xmlns:a16="http://schemas.microsoft.com/office/drawing/2014/main" id="{F43606D4-A7F7-79E8-C685-45A220AF97AE}"/>
+              </a:ext>
+            </a:extLst>
+          </p:cNvPr>
+          <p:cNvSpPr>
+            <a:spLocks noGrp="1"/>
+          </p:cNvSpPr>
+          <p:nvPr>
+            <p:ph type="body" idx="1"/>
+          </p:nvPr>
+        </p:nvSpPr>
+        <p:spPr/>
+        <p:txBody>
+          <a:bodyPr/>
+          <a:lstStyle/>
+          <a:p>
+            <a:endParaRPr lang="ko-KR" altLang="en-US" dirty="0"/>
+          </a:p>
+        </p:txBody>
+      </p:sp>
+      <p:sp>
+        <p:nvSpPr>
+          <p:cNvPr id="4" name="슬라이드 번호 개체 틀 3">
+            <a:extLst>
+              <a:ext uri="{FF2B5EF4-FFF2-40B4-BE49-F238E27FC236}">
+                <a16:creationId xmlns:a16="http://schemas.microsoft.com/office/drawing/2014/main" id="{E23A52C2-B18A-CA0F-A3BA-D977DA520E7D}"/>
+              </a:ext>
+            </a:extLst>
+          </p:cNvPr>
+          <p:cNvSpPr>
+            <a:spLocks noGrp="1"/>
+          </p:cNvSpPr>
+          <p:nvPr>
+            <p:ph type="sldNum" sz="quarter" idx="10"/>
+          </p:nvPr>
+        </p:nvSpPr>
+        <p:spPr/>
+        <p:txBody>
+          <a:bodyPr/>
+          <a:lstStyle/>
+          <a:p>
+            <a:pPr rtl="0"/>
+            <a:fld id="{5FB91549-43BF-425A-AF25-75262019208C}" type="slidenum">
+              <a:rPr lang="en-US" altLang="ko-KR" smtClean="0"/>
+              <a:t>41</a:t>
+            </a:fld>
+            <a:endParaRPr lang="ko-KR" altLang="en-US" dirty="0"/>
+          </a:p>
+        </p:txBody>
+      </p:sp>
+    </p:spTree>
+    <p:extLst>
+      <p:ext uri="{BB962C8B-B14F-4D97-AF65-F5344CB8AC3E}">
+        <p14:creationId xmlns:p14="http://schemas.microsoft.com/office/powerpoint/2010/main" val="4232958419"/>
       </p:ext>
     </p:extLst>
   </p:cSld>
@@ -4504,7 +4614,7 @@
           <a:p>
             <a:fld id="{4B229CEB-779D-4AB3-81CB-8FCEEAE03F61}" type="datetime1">
               <a:rPr lang="ko-KR" altLang="en-US" smtClean="0"/>
-              <a:t>2026-03-14</a:t>
+              <a:t>2026-03-16</a:t>
             </a:fld>
             <a:endParaRPr lang="ko-KR" altLang="en-US" dirty="0"/>
           </a:p>
@@ -4742,7 +4852,7 @@
             <a:pPr rtl="0"/>
             <a:fld id="{C3B7A883-0BF0-4B4B-84D5-D747A0111A56}" type="datetime1">
               <a:rPr lang="ko-KR" altLang="en-US" noProof="0" smtClean="0"/>
-              <a:t>2026-03-14</a:t>
+              <a:t>2026-03-16</a:t>
             </a:fld>
             <a:endParaRPr lang="ko-KR" altLang="en-US" noProof="0" dirty="0"/>
           </a:p>
@@ -4960,7 +5070,7 @@
             <a:pPr rtl="0"/>
             <a:fld id="{3DA7EA29-F2BB-4FB1-BB4B-C55A7FA3FC5C}" type="datetime1">
               <a:rPr lang="ko-KR" altLang="en-US" noProof="0" smtClean="0"/>
-              <a:t>2026-03-14</a:t>
+              <a:t>2026-03-16</a:t>
             </a:fld>
             <a:endParaRPr lang="ko-KR" altLang="en-US" noProof="0" dirty="0"/>
           </a:p>
@@ -5169,7 +5279,7 @@
             <a:pPr rtl="0"/>
             <a:fld id="{D76306AB-75A0-421C-B431-0E4E30A5C28E}" type="datetime1">
               <a:rPr lang="ko-KR" altLang="en-US" noProof="0" smtClean="0"/>
-              <a:t>2026-03-14</a:t>
+              <a:t>2026-03-16</a:t>
             </a:fld>
             <a:endParaRPr lang="ko-KR" altLang="en-US" noProof="0" dirty="0"/>
           </a:p>
@@ -5439,7 +5549,7 @@
             <a:pPr rtl="0"/>
             <a:fld id="{E1D969EE-F1EB-462E-B70D-5B36B3806A4E}" type="datetime1">
               <a:rPr lang="ko-KR" altLang="en-US" noProof="0" smtClean="0"/>
-              <a:t>2026-03-14</a:t>
+              <a:t>2026-03-16</a:t>
             </a:fld>
             <a:endParaRPr lang="ko-KR" altLang="en-US" noProof="0" dirty="0"/>
           </a:p>
@@ -5747,7 +5857,7 @@
             <a:pPr rtl="0"/>
             <a:fld id="{E8CBB1B7-E0A1-46A3-B5B5-C69931095FF6}" type="datetime1">
               <a:rPr lang="ko-KR" altLang="en-US" noProof="0" smtClean="0"/>
-              <a:t>2026-03-14</a:t>
+              <a:t>2026-03-16</a:t>
             </a:fld>
             <a:endParaRPr lang="ko-KR" altLang="en-US" noProof="0" dirty="0"/>
           </a:p>
@@ -6198,7 +6308,7 @@
             <a:pPr rtl="0"/>
             <a:fld id="{DAFC0E65-06AB-44D7-AAEE-8F4C7ED84A0C}" type="datetime1">
               <a:rPr lang="ko-KR" altLang="en-US" noProof="0" smtClean="0"/>
-              <a:t>2026-03-14</a:t>
+              <a:t>2026-03-16</a:t>
             </a:fld>
             <a:endParaRPr lang="ko-KR" altLang="en-US" noProof="0" dirty="0"/>
           </a:p>
@@ -6335,7 +6445,7 @@
             <a:pPr rtl="0"/>
             <a:fld id="{30189E66-D439-4767-B911-EB49CB20E313}" type="datetime1">
               <a:rPr lang="ko-KR" altLang="en-US" noProof="0" smtClean="0"/>
-              <a:t>2026-03-14</a:t>
+              <a:t>2026-03-16</a:t>
             </a:fld>
             <a:endParaRPr lang="ko-KR" altLang="en-US" noProof="0" dirty="0"/>
           </a:p>
@@ -6448,7 +6558,7 @@
             <a:pPr rtl="0"/>
             <a:fld id="{D4E4FFC0-DB28-4291-80A0-63DBF8428320}" type="datetime1">
               <a:rPr lang="ko-KR" altLang="en-US" noProof="0" smtClean="0"/>
-              <a:t>2026-03-14</a:t>
+              <a:t>2026-03-16</a:t>
             </a:fld>
             <a:endParaRPr lang="ko-KR" altLang="en-US" noProof="0" dirty="0"/>
           </a:p>
@@ -6753,7 +6863,7 @@
             <a:pPr rtl="0"/>
             <a:fld id="{3AB5804B-C38E-4214-93DF-3E6DA00134E8}" type="datetime1">
               <a:rPr lang="ko-KR" altLang="en-US" noProof="0" smtClean="0"/>
-              <a:t>2026-03-14</a:t>
+              <a:t>2026-03-16</a:t>
             </a:fld>
             <a:endParaRPr lang="ko-KR" altLang="en-US" noProof="0" dirty="0"/>
           </a:p>
@@ -7047,7 +7157,7 @@
             <a:pPr rtl="0"/>
             <a:fld id="{CABEE384-F18F-4153-AC21-608599869F84}" type="datetime1">
               <a:rPr lang="ko-KR" altLang="en-US" noProof="0" smtClean="0"/>
-              <a:t>2026-03-14</a:t>
+              <a:t>2026-03-16</a:t>
             </a:fld>
             <a:endParaRPr lang="ko-KR" altLang="en-US" noProof="0" dirty="0"/>
           </a:p>
@@ -7279,7 +7389,7 @@
           <a:p>
             <a:fld id="{667A4C69-65FB-481C-AC2A-84D254D33675}" type="datetime1">
               <a:rPr lang="ko-KR" altLang="en-US" smtClean="0"/>
-              <a:t>2026-03-14</a:t>
+              <a:t>2026-03-16</a:t>
             </a:fld>
             <a:endParaRPr lang="ko-KR" altLang="en-US" dirty="0"/>
           </a:p>
@@ -8203,7 +8313,7 @@
         </p:blipFill>
         <p:spPr>
           <a:xfrm>
-            <a:off x="1197868" y="2770753"/>
+            <a:off x="765820" y="2788229"/>
             <a:ext cx="8064896" cy="3079023"/>
           </a:xfrm>
           <a:prstGeom prst="rect">
@@ -8258,7 +8368,7 @@
                 <a:latin typeface="휴먼모음T" panose="02030504000101010101" pitchFamily="18" charset="-127"/>
                 <a:ea typeface="휴먼모음T" panose="02030504000101010101" pitchFamily="18" charset="-127"/>
               </a:rPr>
-              <a:t>Representation</a:t>
+              <a:t>Preprocessing</a:t>
             </a:r>
             <a:r>
               <a:rPr lang="ko-KR" altLang="en-US" sz="2400" dirty="0">
@@ -10221,87 +10331,87 @@
             </a:pPr>
             <a:r>
               <a:rPr lang="ko-KR" altLang="en-US" sz="1400" dirty="0">
-                <a:latin typeface="Microsoft Sans Serif" panose="020B0604020202020204" pitchFamily="34" charset="0"/>
-                <a:ea typeface="Microsoft Sans Serif" panose="020B0604020202020204" pitchFamily="34" charset="0"/>
+                <a:latin typeface="휴먼모음T" panose="02030504000101010101" pitchFamily="18" charset="-127"/>
+                <a:ea typeface="휴먼모음T" panose="02030504000101010101" pitchFamily="18" charset="-127"/>
                 <a:cs typeface="Microsoft Sans Serif" panose="020B0604020202020204" pitchFamily="34" charset="0"/>
               </a:rPr>
               <a:t>아래</a:t>
             </a:r>
             <a:r>
               <a:rPr lang="en-US" altLang="ko-KR" sz="1400" dirty="0">
-                <a:latin typeface="Microsoft Sans Serif" panose="020B0604020202020204" pitchFamily="34" charset="0"/>
-                <a:ea typeface="Microsoft Sans Serif" panose="020B0604020202020204" pitchFamily="34" charset="0"/>
+                <a:latin typeface="휴먼모음T" panose="02030504000101010101" pitchFamily="18" charset="-127"/>
+                <a:ea typeface="휴먼모음T" panose="02030504000101010101" pitchFamily="18" charset="-127"/>
                 <a:cs typeface="Microsoft Sans Serif" panose="020B0604020202020204" pitchFamily="34" charset="0"/>
               </a:rPr>
               <a:t> </a:t>
             </a:r>
             <a:r>
               <a:rPr lang="ko-KR" altLang="en-US" sz="1400" dirty="0">
-                <a:latin typeface="Microsoft Sans Serif" panose="020B0604020202020204" pitchFamily="34" charset="0"/>
-                <a:ea typeface="Microsoft Sans Serif" panose="020B0604020202020204" pitchFamily="34" charset="0"/>
+                <a:latin typeface="휴먼모음T" panose="02030504000101010101" pitchFamily="18" charset="-127"/>
+                <a:ea typeface="휴먼모음T" panose="02030504000101010101" pitchFamily="18" charset="-127"/>
                 <a:cs typeface="Microsoft Sans Serif" panose="020B0604020202020204" pitchFamily="34" charset="0"/>
               </a:rPr>
               <a:t>데이터소스에서 키</a:t>
             </a:r>
             <a:r>
               <a:rPr lang="en-US" altLang="ko-KR" sz="1400" dirty="0">
-                <a:latin typeface="Microsoft Sans Serif" panose="020B0604020202020204" pitchFamily="34" charset="0"/>
-                <a:ea typeface="Microsoft Sans Serif" panose="020B0604020202020204" pitchFamily="34" charset="0"/>
+                <a:latin typeface="휴먼모음T" panose="02030504000101010101" pitchFamily="18" charset="-127"/>
+                <a:ea typeface="휴먼모음T" panose="02030504000101010101" pitchFamily="18" charset="-127"/>
                 <a:cs typeface="Microsoft Sans Serif" panose="020B0604020202020204" pitchFamily="34" charset="0"/>
               </a:rPr>
               <a:t>, </a:t>
             </a:r>
             <a:r>
               <a:rPr lang="ko-KR" altLang="en-US" sz="1400" dirty="0">
-                <a:latin typeface="Microsoft Sans Serif" panose="020B0604020202020204" pitchFamily="34" charset="0"/>
-                <a:ea typeface="Microsoft Sans Serif" panose="020B0604020202020204" pitchFamily="34" charset="0"/>
+                <a:latin typeface="휴먼모음T" panose="02030504000101010101" pitchFamily="18" charset="-127"/>
+                <a:ea typeface="휴먼모음T" panose="02030504000101010101" pitchFamily="18" charset="-127"/>
                 <a:cs typeface="Microsoft Sans Serif" panose="020B0604020202020204" pitchFamily="34" charset="0"/>
               </a:rPr>
               <a:t>몸무게</a:t>
             </a:r>
             <a:r>
               <a:rPr lang="en-US" altLang="ko-KR" sz="1400" dirty="0">
-                <a:latin typeface="Microsoft Sans Serif" panose="020B0604020202020204" pitchFamily="34" charset="0"/>
-                <a:ea typeface="Microsoft Sans Serif" panose="020B0604020202020204" pitchFamily="34" charset="0"/>
+                <a:latin typeface="휴먼모음T" panose="02030504000101010101" pitchFamily="18" charset="-127"/>
+                <a:ea typeface="휴먼모음T" panose="02030504000101010101" pitchFamily="18" charset="-127"/>
                 <a:cs typeface="Microsoft Sans Serif" panose="020B0604020202020204" pitchFamily="34" charset="0"/>
               </a:rPr>
               <a:t>, </a:t>
             </a:r>
             <a:r>
               <a:rPr lang="ko-KR" altLang="en-US" sz="1400" dirty="0">
-                <a:latin typeface="Microsoft Sans Serif" panose="020B0604020202020204" pitchFamily="34" charset="0"/>
-                <a:ea typeface="Microsoft Sans Serif" panose="020B0604020202020204" pitchFamily="34" charset="0"/>
+                <a:latin typeface="휴먼모음T" panose="02030504000101010101" pitchFamily="18" charset="-127"/>
+                <a:ea typeface="휴먼모음T" panose="02030504000101010101" pitchFamily="18" charset="-127"/>
                 <a:cs typeface="Microsoft Sans Serif" panose="020B0604020202020204" pitchFamily="34" charset="0"/>
               </a:rPr>
               <a:t>수입의 값을 </a:t>
             </a:r>
             <a:r>
               <a:rPr lang="ko-KR" altLang="en-US" sz="1400" dirty="0" err="1">
-                <a:latin typeface="Microsoft Sans Serif" panose="020B0604020202020204" pitchFamily="34" charset="0"/>
-                <a:ea typeface="Microsoft Sans Serif" panose="020B0604020202020204" pitchFamily="34" charset="0"/>
+                <a:latin typeface="휴먼모음T" panose="02030504000101010101" pitchFamily="18" charset="-127"/>
+                <a:ea typeface="휴먼모음T" panose="02030504000101010101" pitchFamily="18" charset="-127"/>
                 <a:cs typeface="Microsoft Sans Serif" panose="020B0604020202020204" pitchFamily="34" charset="0"/>
               </a:rPr>
               <a:t>표준화하여</a:t>
             </a:r>
             <a:r>
               <a:rPr lang="ko-KR" altLang="en-US" sz="1400" dirty="0">
-                <a:latin typeface="Microsoft Sans Serif" panose="020B0604020202020204" pitchFamily="34" charset="0"/>
-                <a:ea typeface="Microsoft Sans Serif" panose="020B0604020202020204" pitchFamily="34" charset="0"/>
+                <a:latin typeface="휴먼모음T" panose="02030504000101010101" pitchFamily="18" charset="-127"/>
+                <a:ea typeface="휴먼모음T" panose="02030504000101010101" pitchFamily="18" charset="-127"/>
                 <a:cs typeface="Microsoft Sans Serif" panose="020B0604020202020204" pitchFamily="34" charset="0"/>
               </a:rPr>
               <a:t> </a:t>
             </a:r>
             <a:r>
               <a:rPr lang="ko-KR" altLang="en-US" sz="1400" dirty="0" err="1">
-                <a:latin typeface="Microsoft Sans Serif" panose="020B0604020202020204" pitchFamily="34" charset="0"/>
-                <a:ea typeface="Microsoft Sans Serif" panose="020B0604020202020204" pitchFamily="34" charset="0"/>
+                <a:latin typeface="휴먼모음T" panose="02030504000101010101" pitchFamily="18" charset="-127"/>
+                <a:ea typeface="휴먼모음T" panose="02030504000101010101" pitchFamily="18" charset="-127"/>
                 <a:cs typeface="Microsoft Sans Serif" panose="020B0604020202020204" pitchFamily="34" charset="0"/>
               </a:rPr>
               <a:t>시각화하라</a:t>
             </a:r>
             <a:endParaRPr lang="en-US" altLang="ko-KR" sz="1400" dirty="0">
-              <a:latin typeface="Microsoft Sans Serif" panose="020B0604020202020204" pitchFamily="34" charset="0"/>
-              <a:ea typeface="Microsoft Sans Serif" panose="020B0604020202020204" pitchFamily="34" charset="0"/>
+              <a:latin typeface="휴먼모음T" panose="02030504000101010101" pitchFamily="18" charset="-127"/>
+              <a:ea typeface="휴먼모음T" panose="02030504000101010101" pitchFamily="18" charset="-127"/>
               <a:cs typeface="Microsoft Sans Serif" panose="020B0604020202020204" pitchFamily="34" charset="0"/>
             </a:endParaRPr>
           </a:p>
@@ -10315,72 +10425,72 @@
             </a:pPr>
             <a:r>
               <a:rPr lang="ko-KR" altLang="en-US" sz="1400" dirty="0" err="1">
-                <a:latin typeface="Microsoft Sans Serif" panose="020B0604020202020204" pitchFamily="34" charset="0"/>
-                <a:ea typeface="Microsoft Sans Serif" panose="020B0604020202020204" pitchFamily="34" charset="0"/>
+                <a:latin typeface="휴먼모음T" panose="02030504000101010101" pitchFamily="18" charset="-127"/>
+                <a:ea typeface="휴먼모음T" panose="02030504000101010101" pitchFamily="18" charset="-127"/>
                 <a:cs typeface="Microsoft Sans Serif" panose="020B0604020202020204" pitchFamily="34" charset="0"/>
               </a:rPr>
               <a:t>표준화한다는</a:t>
             </a:r>
             <a:r>
               <a:rPr lang="ko-KR" altLang="en-US" sz="1400" dirty="0">
-                <a:latin typeface="Microsoft Sans Serif" panose="020B0604020202020204" pitchFamily="34" charset="0"/>
-                <a:ea typeface="Microsoft Sans Serif" panose="020B0604020202020204" pitchFamily="34" charset="0"/>
+                <a:latin typeface="휴먼모음T" panose="02030504000101010101" pitchFamily="18" charset="-127"/>
+                <a:ea typeface="휴먼모음T" panose="02030504000101010101" pitchFamily="18" charset="-127"/>
                 <a:cs typeface="Microsoft Sans Serif" panose="020B0604020202020204" pitchFamily="34" charset="0"/>
               </a:rPr>
               <a:t> 것은 변수의 관측치에서 각 변수의 평균을 차감한 값을 표준편차</a:t>
             </a:r>
             <a:r>
               <a:rPr lang="en-US" altLang="ko-KR" sz="1400" dirty="0">
-                <a:latin typeface="Microsoft Sans Serif" panose="020B0604020202020204" pitchFamily="34" charset="0"/>
-                <a:ea typeface="Microsoft Sans Serif" panose="020B0604020202020204" pitchFamily="34" charset="0"/>
+                <a:latin typeface="휴먼모음T" panose="02030504000101010101" pitchFamily="18" charset="-127"/>
+                <a:ea typeface="휴먼모음T" panose="02030504000101010101" pitchFamily="18" charset="-127"/>
                 <a:cs typeface="Microsoft Sans Serif" panose="020B0604020202020204" pitchFamily="34" charset="0"/>
               </a:rPr>
               <a:t>(</a:t>
             </a:r>
             <a:r>
               <a:rPr lang="ko-KR" altLang="en-US" sz="1400" dirty="0">
-                <a:latin typeface="Microsoft Sans Serif" panose="020B0604020202020204" pitchFamily="34" charset="0"/>
-                <a:ea typeface="Microsoft Sans Serif" panose="020B0604020202020204" pitchFamily="34" charset="0"/>
+                <a:latin typeface="휴먼모음T" panose="02030504000101010101" pitchFamily="18" charset="-127"/>
+                <a:ea typeface="휴먼모음T" panose="02030504000101010101" pitchFamily="18" charset="-127"/>
                 <a:cs typeface="Microsoft Sans Serif" panose="020B0604020202020204" pitchFamily="34" charset="0"/>
               </a:rPr>
               <a:t>분산의 </a:t>
             </a:r>
             <a:r>
               <a:rPr lang="ko-KR" altLang="en-US" sz="1400" dirty="0" err="1">
-                <a:latin typeface="Microsoft Sans Serif" panose="020B0604020202020204" pitchFamily="34" charset="0"/>
-                <a:ea typeface="Microsoft Sans Serif" panose="020B0604020202020204" pitchFamily="34" charset="0"/>
+                <a:latin typeface="휴먼모음T" panose="02030504000101010101" pitchFamily="18" charset="-127"/>
+                <a:ea typeface="휴먼모음T" panose="02030504000101010101" pitchFamily="18" charset="-127"/>
                 <a:cs typeface="Microsoft Sans Serif" panose="020B0604020202020204" pitchFamily="34" charset="0"/>
               </a:rPr>
               <a:t>제곱루트값</a:t>
             </a:r>
             <a:r>
               <a:rPr lang="en-US" altLang="ko-KR" sz="1400" dirty="0">
-                <a:latin typeface="Microsoft Sans Serif" panose="020B0604020202020204" pitchFamily="34" charset="0"/>
-                <a:ea typeface="Microsoft Sans Serif" panose="020B0604020202020204" pitchFamily="34" charset="0"/>
+                <a:latin typeface="휴먼모음T" panose="02030504000101010101" pitchFamily="18" charset="-127"/>
+                <a:ea typeface="휴먼모음T" panose="02030504000101010101" pitchFamily="18" charset="-127"/>
                 <a:cs typeface="Microsoft Sans Serif" panose="020B0604020202020204" pitchFamily="34" charset="0"/>
               </a:rPr>
               <a:t>)</a:t>
             </a:r>
             <a:r>
               <a:rPr lang="ko-KR" altLang="en-US" sz="1400" dirty="0">
-                <a:latin typeface="Microsoft Sans Serif" panose="020B0604020202020204" pitchFamily="34" charset="0"/>
-                <a:ea typeface="Microsoft Sans Serif" panose="020B0604020202020204" pitchFamily="34" charset="0"/>
+                <a:latin typeface="휴먼모음T" panose="02030504000101010101" pitchFamily="18" charset="-127"/>
+                <a:ea typeface="휴먼모음T" panose="02030504000101010101" pitchFamily="18" charset="-127"/>
                 <a:cs typeface="Microsoft Sans Serif" panose="020B0604020202020204" pitchFamily="34" charset="0"/>
               </a:rPr>
               <a:t>으로 나는 값</a:t>
             </a:r>
             <a:r>
               <a:rPr lang="en-US" altLang="ko-KR" sz="1400" dirty="0">
-                <a:latin typeface="Microsoft Sans Serif" panose="020B0604020202020204" pitchFamily="34" charset="0"/>
-                <a:ea typeface="Microsoft Sans Serif" panose="020B0604020202020204" pitchFamily="34" charset="0"/>
+                <a:latin typeface="휴먼모음T" panose="02030504000101010101" pitchFamily="18" charset="-127"/>
+                <a:ea typeface="휴먼모음T" panose="02030504000101010101" pitchFamily="18" charset="-127"/>
                 <a:cs typeface="Microsoft Sans Serif" panose="020B0604020202020204" pitchFamily="34" charset="0"/>
               </a:rPr>
               <a:t>(</a:t>
             </a:r>
             <a:r>
               <a:rPr lang="en-US" altLang="ko-KR" sz="1400" dirty="0">
-                <a:latin typeface="Microsoft Sans Serif" panose="020B0604020202020204" pitchFamily="34" charset="0"/>
-                <a:ea typeface="Microsoft Sans Serif" panose="020B0604020202020204" pitchFamily="34" charset="0"/>
+                <a:latin typeface="휴먼모음T" panose="02030504000101010101" pitchFamily="18" charset="-127"/>
+                <a:ea typeface="휴먼모음T" panose="02030504000101010101" pitchFamily="18" charset="-127"/>
                 <a:cs typeface="Microsoft Sans Serif" panose="020B0604020202020204" pitchFamily="34" charset="0"/>
                 <a:hlinkClick r:id="rId5">
                   <a:extLst>
@@ -10394,8 +10504,8 @@
             </a:r>
             <a:r>
               <a:rPr lang="en-US" altLang="ko-KR" sz="1400" dirty="0">
-                <a:latin typeface="Microsoft Sans Serif" panose="020B0604020202020204" pitchFamily="34" charset="0"/>
-                <a:ea typeface="Microsoft Sans Serif" panose="020B0604020202020204" pitchFamily="34" charset="0"/>
+                <a:latin typeface="휴먼모음T" panose="02030504000101010101" pitchFamily="18" charset="-127"/>
+                <a:ea typeface="휴먼모음T" panose="02030504000101010101" pitchFamily="18" charset="-127"/>
                 <a:cs typeface="Microsoft Sans Serif" panose="020B0604020202020204" pitchFamily="34" charset="0"/>
               </a:rPr>
               <a:t>)</a:t>
@@ -10411,8 +10521,8 @@
             </a:pPr>
             <a:r>
               <a:rPr lang="en-US" altLang="ko-KR" sz="1400" dirty="0">
-                <a:latin typeface="Microsoft Sans Serif" panose="020B0604020202020204" pitchFamily="34" charset="0"/>
-                <a:ea typeface="Microsoft Sans Serif" panose="020B0604020202020204" pitchFamily="34" charset="0"/>
+                <a:latin typeface="휴먼모음T" panose="02030504000101010101" pitchFamily="18" charset="-127"/>
+                <a:ea typeface="휴먼모음T" panose="02030504000101010101" pitchFamily="18" charset="-127"/>
                 <a:cs typeface="Microsoft Sans Serif" panose="020B0604020202020204" pitchFamily="34" charset="0"/>
                 <a:hlinkClick r:id="rId6">
                   <a:extLst>
@@ -10426,8 +10536,8 @@
             </a:r>
             <a:r>
               <a:rPr lang="en-US" altLang="ko-KR" sz="1400" dirty="0">
-                <a:latin typeface="Microsoft Sans Serif" panose="020B0604020202020204" pitchFamily="34" charset="0"/>
-                <a:ea typeface="Microsoft Sans Serif" panose="020B0604020202020204" pitchFamily="34" charset="0"/>
+                <a:latin typeface="휴먼모음T" panose="02030504000101010101" pitchFamily="18" charset="-127"/>
+                <a:ea typeface="휴먼모음T" panose="02030504000101010101" pitchFamily="18" charset="-127"/>
                 <a:cs typeface="Microsoft Sans Serif" panose="020B0604020202020204" pitchFamily="34" charset="0"/>
               </a:rPr>
               <a:t> </a:t>
@@ -10443,88 +10553,88 @@
             </a:pPr>
             <a:r>
               <a:rPr lang="ko-KR" altLang="en-US" sz="1400" dirty="0">
-                <a:latin typeface="Microsoft Sans Serif" panose="020B0604020202020204" pitchFamily="34" charset="0"/>
-                <a:ea typeface="Microsoft Sans Serif" panose="020B0604020202020204" pitchFamily="34" charset="0"/>
+                <a:latin typeface="휴먼모음T" panose="02030504000101010101" pitchFamily="18" charset="-127"/>
+                <a:ea typeface="휴먼모음T" panose="02030504000101010101" pitchFamily="18" charset="-127"/>
                 <a:cs typeface="Microsoft Sans Serif" panose="020B0604020202020204" pitchFamily="34" charset="0"/>
               </a:rPr>
               <a:t>각 변수를 평균과 표준편차로 </a:t>
             </a:r>
             <a:r>
               <a:rPr lang="en-US" altLang="ko-KR" sz="1400" dirty="0">
-                <a:latin typeface="Microsoft Sans Serif" panose="020B0604020202020204" pitchFamily="34" charset="0"/>
-                <a:ea typeface="Microsoft Sans Serif" panose="020B0604020202020204" pitchFamily="34" charset="0"/>
+                <a:latin typeface="휴먼모음T" panose="02030504000101010101" pitchFamily="18" charset="-127"/>
+                <a:ea typeface="휴먼모음T" panose="02030504000101010101" pitchFamily="18" charset="-127"/>
                 <a:cs typeface="Microsoft Sans Serif" panose="020B0604020202020204" pitchFamily="34" charset="0"/>
               </a:rPr>
               <a:t>scaling</a:t>
             </a:r>
             <a:r>
               <a:rPr lang="ko-KR" altLang="en-US" sz="1400" dirty="0">
-                <a:latin typeface="Microsoft Sans Serif" panose="020B0604020202020204" pitchFamily="34" charset="0"/>
-                <a:ea typeface="Microsoft Sans Serif" panose="020B0604020202020204" pitchFamily="34" charset="0"/>
+                <a:latin typeface="휴먼모음T" panose="02030504000101010101" pitchFamily="18" charset="-127"/>
+                <a:ea typeface="휴먼모음T" panose="02030504000101010101" pitchFamily="18" charset="-127"/>
                 <a:cs typeface="Microsoft Sans Serif" panose="020B0604020202020204" pitchFamily="34" charset="0"/>
               </a:rPr>
               <a:t>하면 평균과 </a:t>
             </a:r>
             <a:r>
               <a:rPr lang="ko-KR" altLang="en-US" sz="1400" dirty="0" err="1">
-                <a:latin typeface="Microsoft Sans Serif" panose="020B0604020202020204" pitchFamily="34" charset="0"/>
-                <a:ea typeface="Microsoft Sans Serif" panose="020B0604020202020204" pitchFamily="34" charset="0"/>
+                <a:latin typeface="휴먼모음T" panose="02030504000101010101" pitchFamily="18" charset="-127"/>
+                <a:ea typeface="휴먼모음T" panose="02030504000101010101" pitchFamily="18" charset="-127"/>
                 <a:cs typeface="Microsoft Sans Serif" panose="020B0604020202020204" pitchFamily="34" charset="0"/>
               </a:rPr>
               <a:t>표준펀차는</a:t>
             </a:r>
             <a:r>
               <a:rPr lang="ko-KR" altLang="en-US" sz="1400" dirty="0">
-                <a:latin typeface="Microsoft Sans Serif" panose="020B0604020202020204" pitchFamily="34" charset="0"/>
-                <a:ea typeface="Microsoft Sans Serif" panose="020B0604020202020204" pitchFamily="34" charset="0"/>
+                <a:latin typeface="휴먼모음T" panose="02030504000101010101" pitchFamily="18" charset="-127"/>
+                <a:ea typeface="휴먼모음T" panose="02030504000101010101" pitchFamily="18" charset="-127"/>
                 <a:cs typeface="Microsoft Sans Serif" panose="020B0604020202020204" pitchFamily="34" charset="0"/>
               </a:rPr>
               <a:t> 각각 어떤 값인가</a:t>
             </a:r>
             <a:r>
               <a:rPr lang="en-US" altLang="ko-KR" sz="1400" dirty="0">
-                <a:latin typeface="Microsoft Sans Serif" panose="020B0604020202020204" pitchFamily="34" charset="0"/>
-                <a:ea typeface="Microsoft Sans Serif" panose="020B0604020202020204" pitchFamily="34" charset="0"/>
+                <a:latin typeface="휴먼모음T" panose="02030504000101010101" pitchFamily="18" charset="-127"/>
+                <a:ea typeface="휴먼모음T" panose="02030504000101010101" pitchFamily="18" charset="-127"/>
                 <a:cs typeface="Microsoft Sans Serif" panose="020B0604020202020204" pitchFamily="34" charset="0"/>
               </a:rPr>
               <a:t>? </a:t>
             </a:r>
             <a:r>
               <a:rPr lang="ko-KR" altLang="en-US" sz="1400" dirty="0">
-                <a:latin typeface="Microsoft Sans Serif" panose="020B0604020202020204" pitchFamily="34" charset="0"/>
-                <a:ea typeface="Microsoft Sans Serif" panose="020B0604020202020204" pitchFamily="34" charset="0"/>
+                <a:latin typeface="휴먼모음T" panose="02030504000101010101" pitchFamily="18" charset="-127"/>
+                <a:ea typeface="휴먼모음T" panose="02030504000101010101" pitchFamily="18" charset="-127"/>
                 <a:cs typeface="Microsoft Sans Serif" panose="020B0604020202020204" pitchFamily="34" charset="0"/>
               </a:rPr>
               <a:t>모든 변수의 값이 동일해지는 것 아닌가</a:t>
             </a:r>
             <a:r>
               <a:rPr lang="en-US" altLang="ko-KR" sz="1400" dirty="0">
-                <a:latin typeface="Microsoft Sans Serif" panose="020B0604020202020204" pitchFamily="34" charset="0"/>
-                <a:ea typeface="Microsoft Sans Serif" panose="020B0604020202020204" pitchFamily="34" charset="0"/>
+                <a:latin typeface="휴먼모음T" panose="02030504000101010101" pitchFamily="18" charset="-127"/>
+                <a:ea typeface="휴먼모음T" panose="02030504000101010101" pitchFamily="18" charset="-127"/>
                 <a:cs typeface="Microsoft Sans Serif" panose="020B0604020202020204" pitchFamily="34" charset="0"/>
               </a:rPr>
               <a:t>? </a:t>
             </a:r>
             <a:r>
               <a:rPr lang="ko-KR" altLang="en-US" sz="1400" dirty="0">
-                <a:latin typeface="Microsoft Sans Serif" panose="020B0604020202020204" pitchFamily="34" charset="0"/>
-                <a:ea typeface="Microsoft Sans Serif" panose="020B0604020202020204" pitchFamily="34" charset="0"/>
+                <a:latin typeface="휴먼모음T" panose="02030504000101010101" pitchFamily="18" charset="-127"/>
+                <a:ea typeface="휴먼모음T" panose="02030504000101010101" pitchFamily="18" charset="-127"/>
                 <a:cs typeface="Microsoft Sans Serif" panose="020B0604020202020204" pitchFamily="34" charset="0"/>
               </a:rPr>
               <a:t>왜 이래야 하는지 설명하라</a:t>
             </a:r>
             <a:r>
               <a:rPr lang="en-US" altLang="ko-KR" sz="1400" dirty="0">
-                <a:latin typeface="Microsoft Sans Serif" panose="020B0604020202020204" pitchFamily="34" charset="0"/>
-                <a:ea typeface="Microsoft Sans Serif" panose="020B0604020202020204" pitchFamily="34" charset="0"/>
+                <a:latin typeface="휴먼모음T" panose="02030504000101010101" pitchFamily="18" charset="-127"/>
+                <a:ea typeface="휴먼모음T" panose="02030504000101010101" pitchFamily="18" charset="-127"/>
                 <a:cs typeface="Microsoft Sans Serif" panose="020B0604020202020204" pitchFamily="34" charset="0"/>
               </a:rPr>
               <a:t>(</a:t>
             </a:r>
             <a:r>
               <a:rPr lang="ko-KR" altLang="en-US" sz="1400" b="1" dirty="0" err="1">
-                <a:latin typeface="Microsoft Sans Serif" panose="020B0604020202020204" pitchFamily="34" charset="0"/>
-                <a:ea typeface="Microsoft Sans Serif" panose="020B0604020202020204" pitchFamily="34" charset="0"/>
+                <a:latin typeface="휴먼모음T" panose="02030504000101010101" pitchFamily="18" charset="-127"/>
+                <a:ea typeface="휴먼모음T" panose="02030504000101010101" pitchFamily="18" charset="-127"/>
                 <a:cs typeface="Microsoft Sans Serif" panose="020B0604020202020204" pitchFamily="34" charset="0"/>
                 <a:hlinkClick r:id="rId7">
                   <a:extLst>
@@ -10538,8 +10648,8 @@
             </a:r>
             <a:r>
               <a:rPr lang="en-US" altLang="ko-KR" sz="1400" dirty="0">
-                <a:latin typeface="Microsoft Sans Serif" panose="020B0604020202020204" pitchFamily="34" charset="0"/>
-                <a:ea typeface="Microsoft Sans Serif" panose="020B0604020202020204" pitchFamily="34" charset="0"/>
+                <a:latin typeface="휴먼모음T" panose="02030504000101010101" pitchFamily="18" charset="-127"/>
+                <a:ea typeface="휴먼모음T" panose="02030504000101010101" pitchFamily="18" charset="-127"/>
                 <a:cs typeface="Microsoft Sans Serif" panose="020B0604020202020204" pitchFamily="34" charset="0"/>
               </a:rPr>
               <a:t>)</a:t>
@@ -11038,7 +11148,7 @@
                 <a:latin typeface="휴먼모음T" panose="02030504000101010101" pitchFamily="18" charset="-127"/>
                 <a:ea typeface="휴먼모음T" panose="02030504000101010101" pitchFamily="18" charset="-127"/>
               </a:rPr>
-              <a:t>Representation</a:t>
+              <a:t>Preprocessing</a:t>
             </a:r>
             <a:r>
               <a:rPr lang="ko-KR" altLang="en-US" sz="2400" dirty="0">
@@ -11664,6 +11774,75 @@
           </a:prstGeom>
         </p:spPr>
       </p:pic>
+      <p:sp>
+        <p:nvSpPr>
+          <p:cNvPr id="2" name="생각 풍선: 구름 모양 1">
+            <a:extLst>
+              <a:ext uri="{FF2B5EF4-FFF2-40B4-BE49-F238E27FC236}">
+                <a16:creationId xmlns:a16="http://schemas.microsoft.com/office/drawing/2014/main" id="{56BC5627-DFAA-4A07-6F45-923AA7F59A88}"/>
+              </a:ext>
+            </a:extLst>
+          </p:cNvPr>
+          <p:cNvSpPr/>
+          <p:nvPr/>
+        </p:nvSpPr>
+        <p:spPr>
+          <a:xfrm>
+            <a:off x="8578688" y="1916832"/>
+            <a:ext cx="1512168" cy="864096"/>
+          </a:xfrm>
+          <a:prstGeom prst="cloudCallout">
+            <a:avLst>
+              <a:gd name="adj1" fmla="val -30623"/>
+              <a:gd name="adj2" fmla="val 110876"/>
+            </a:avLst>
+          </a:prstGeom>
+        </p:spPr>
+        <p:style>
+          <a:lnRef idx="2">
+            <a:schemeClr val="accent1">
+              <a:shade val="15000"/>
+            </a:schemeClr>
+          </a:lnRef>
+          <a:fillRef idx="1">
+            <a:schemeClr val="accent1"/>
+          </a:fillRef>
+          <a:effectRef idx="0">
+            <a:schemeClr val="accent1"/>
+          </a:effectRef>
+          <a:fontRef idx="minor">
+            <a:schemeClr val="lt1"/>
+          </a:fontRef>
+        </p:style>
+        <p:txBody>
+          <a:bodyPr rtlCol="0" anchor="ctr"/>
+          <a:lstStyle/>
+          <a:p>
+            <a:pPr algn="ctr"/>
+            <a:r>
+              <a:rPr lang="ko-KR" altLang="en-US" sz="1200" dirty="0"/>
+              <a:t>평균</a:t>
+            </a:r>
+            <a:r>
+              <a:rPr lang="en-US" altLang="ko-KR" sz="1200" dirty="0"/>
+              <a:t>, </a:t>
+            </a:r>
+            <a:r>
+              <a:rPr lang="ko-KR" altLang="en-US" sz="1200" dirty="0" err="1"/>
+              <a:t>중간값의</a:t>
+            </a:r>
+            <a:r>
+              <a:rPr lang="ko-KR" altLang="en-US" sz="1200" dirty="0"/>
+              <a:t> 위치</a:t>
+            </a:r>
+            <a:r>
+              <a:rPr lang="en-US" altLang="ko-KR" sz="1200" dirty="0"/>
+              <a:t>?</a:t>
+            </a:r>
+            <a:endParaRPr lang="ko-KR" altLang="en-US" sz="1200" dirty="0"/>
+          </a:p>
+        </p:txBody>
+      </p:sp>
     </p:spTree>
     <p:extLst>
       <p:ext uri="{BB962C8B-B14F-4D97-AF65-F5344CB8AC3E}">
@@ -11907,7 +12086,7 @@
         <p:spPr>
           <a:xfrm>
             <a:off x="405780" y="980728"/>
-            <a:ext cx="8857288" cy="2710486"/>
+            <a:ext cx="8857288" cy="2531783"/>
           </a:xfrm>
           <a:prstGeom prst="rect">
             <a:avLst/>
@@ -12074,7 +12253,7 @@
               <a:buChar char="v"/>
             </a:pPr>
             <a:r>
-              <a:rPr lang="en-US" altLang="ko-KR" sz="2000" dirty="0" err="1">
+              <a:rPr lang="en-US" altLang="ko-KR" dirty="0" err="1">
                 <a:solidFill>
                   <a:srgbClr val="002060"/>
                 </a:solidFill>
@@ -12084,7 +12263,7 @@
               </a:rPr>
               <a:t>openml</a:t>
             </a:r>
-            <a:endParaRPr lang="en-US" altLang="ko-KR" sz="2000" dirty="0">
+            <a:endParaRPr lang="en-US" altLang="ko-KR" dirty="0">
               <a:solidFill>
                 <a:srgbClr val="002060"/>
               </a:solidFill>
@@ -12102,7 +12281,7 @@
               <a:buChar char="v"/>
             </a:pPr>
             <a:r>
-              <a:rPr lang="en-US" altLang="ko-KR" sz="2000" dirty="0" err="1">
+              <a:rPr lang="en-US" altLang="ko-KR" dirty="0" err="1">
                 <a:solidFill>
                   <a:srgbClr val="002060"/>
                 </a:solidFill>
@@ -12113,7 +12292,7 @@
               <a:t>fetch_openml</a:t>
             </a:r>
             <a:r>
-              <a:rPr lang="en-US" altLang="ko-KR" sz="2000" dirty="0">
+              <a:rPr lang="en-US" altLang="ko-KR" dirty="0">
                 <a:solidFill>
                   <a:srgbClr val="002060"/>
                 </a:solidFill>
@@ -12133,7 +12312,7 @@
               <a:buChar char="v"/>
             </a:pPr>
             <a:r>
-              <a:rPr lang="en-US" altLang="ko-KR" sz="2000" dirty="0" err="1">
+              <a:rPr lang="en-US" altLang="ko-KR" dirty="0" err="1">
                 <a:solidFill>
                   <a:srgbClr val="002060"/>
                 </a:solidFill>
@@ -12143,7 +12322,7 @@
               </a:rPr>
               <a:t>StringIO</a:t>
             </a:r>
-            <a:endParaRPr lang="en-US" altLang="ko-KR" sz="2000" dirty="0">
+            <a:endParaRPr lang="en-US" altLang="ko-KR" dirty="0">
               <a:solidFill>
                 <a:srgbClr val="002060"/>
               </a:solidFill>
@@ -12161,7 +12340,7 @@
               <a:buChar char="v"/>
             </a:pPr>
             <a:r>
-              <a:rPr lang="en-US" altLang="ko-KR" sz="2000" dirty="0">
+              <a:rPr lang="en-US" altLang="ko-KR" dirty="0">
                 <a:solidFill>
                   <a:srgbClr val="002060"/>
                 </a:solidFill>
@@ -12226,8 +12405,8 @@
         </p:blipFill>
         <p:spPr>
           <a:xfrm>
-            <a:off x="3214809" y="2146182"/>
-            <a:ext cx="8857288" cy="3947114"/>
+            <a:off x="4150196" y="2987299"/>
+            <a:ext cx="7560123" cy="3369052"/>
           </a:xfrm>
           <a:prstGeom prst="rect">
             <a:avLst/>
@@ -12502,40 +12681,40 @@
               <a:buChar char="v"/>
             </a:pPr>
             <a:r>
-              <a:rPr lang="ko-KR" altLang="en-US" sz="1600" b="1" dirty="0">
-                <a:latin typeface="맑은 고딕 Semilight" panose="020B0502040204020203" pitchFamily="50" charset="-127"/>
-                <a:ea typeface="맑은 고딕 Semilight" panose="020B0502040204020203" pitchFamily="50" charset="-127"/>
+              <a:rPr lang="ko-KR" altLang="en-US" sz="1600" dirty="0">
+                <a:latin typeface="휴먼모음T" panose="02030504000101010101" pitchFamily="18" charset="-127"/>
+                <a:ea typeface="휴먼모음T" panose="02030504000101010101" pitchFamily="18" charset="-127"/>
                 <a:cs typeface="맑은 고딕 Semilight" panose="020B0502040204020203" pitchFamily="50" charset="-127"/>
               </a:rPr>
               <a:t>통계 분석 항목 정리</a:t>
             </a:r>
             <a:r>
-              <a:rPr lang="en-US" altLang="ko-KR" sz="1600" b="1" dirty="0">
-                <a:latin typeface="맑은 고딕 Semilight" panose="020B0502040204020203" pitchFamily="50" charset="-127"/>
-                <a:ea typeface="맑은 고딕 Semilight" panose="020B0502040204020203" pitchFamily="50" charset="-127"/>
+              <a:rPr lang="en-US" altLang="ko-KR" sz="1600" dirty="0">
+                <a:latin typeface="휴먼모음T" panose="02030504000101010101" pitchFamily="18" charset="-127"/>
+                <a:ea typeface="휴먼모음T" panose="02030504000101010101" pitchFamily="18" charset="-127"/>
                 <a:cs typeface="맑은 고딕 Semilight" panose="020B0502040204020203" pitchFamily="50" charset="-127"/>
               </a:rPr>
               <a:t>(</a:t>
             </a:r>
             <a:r>
-              <a:rPr lang="ko-KR" altLang="en-US" sz="1600" b="1" dirty="0">
-                <a:latin typeface="맑은 고딕 Semilight" panose="020B0502040204020203" pitchFamily="50" charset="-127"/>
-                <a:ea typeface="맑은 고딕 Semilight" panose="020B0502040204020203" pitchFamily="50" charset="-127"/>
+              <a:rPr lang="ko-KR" altLang="en-US" sz="1600" dirty="0">
+                <a:latin typeface="휴먼모음T" panose="02030504000101010101" pitchFamily="18" charset="-127"/>
+                <a:ea typeface="휴먼모음T" panose="02030504000101010101" pitchFamily="18" charset="-127"/>
                 <a:cs typeface="맑은 고딕 Semilight" panose="020B0502040204020203" pitchFamily="50" charset="-127"/>
               </a:rPr>
               <a:t>각 변수별로</a:t>
             </a:r>
             <a:r>
-              <a:rPr lang="en-US" altLang="ko-KR" sz="1600" b="1" dirty="0">
-                <a:latin typeface="맑은 고딕 Semilight" panose="020B0502040204020203" pitchFamily="50" charset="-127"/>
-                <a:ea typeface="맑은 고딕 Semilight" panose="020B0502040204020203" pitchFamily="50" charset="-127"/>
+              <a:rPr lang="en-US" altLang="ko-KR" sz="1600" dirty="0">
+                <a:latin typeface="휴먼모음T" panose="02030504000101010101" pitchFamily="18" charset="-127"/>
+                <a:ea typeface="휴먼모음T" panose="02030504000101010101" pitchFamily="18" charset="-127"/>
                 <a:cs typeface="맑은 고딕 Semilight" panose="020B0502040204020203" pitchFamily="50" charset="-127"/>
               </a:rPr>
               <a:t>)</a:t>
             </a:r>
-            <a:endParaRPr lang="ko-KR" altLang="en-US" sz="1600" b="1" dirty="0">
-              <a:latin typeface="맑은 고딕 Semilight" panose="020B0502040204020203" pitchFamily="50" charset="-127"/>
-              <a:ea typeface="맑은 고딕 Semilight" panose="020B0502040204020203" pitchFamily="50" charset="-127"/>
+            <a:endParaRPr lang="ko-KR" altLang="en-US" sz="1600" dirty="0">
+              <a:latin typeface="휴먼모음T" panose="02030504000101010101" pitchFamily="18" charset="-127"/>
+              <a:ea typeface="휴먼모음T" panose="02030504000101010101" pitchFamily="18" charset="-127"/>
               <a:cs typeface="맑은 고딕 Semilight" panose="020B0502040204020203" pitchFamily="50" charset="-127"/>
             </a:endParaRPr>
           </a:p>
@@ -12548,16 +12727,16 @@
               <a:buChar char="v"/>
             </a:pPr>
             <a:r>
-              <a:rPr lang="ko-KR" altLang="en-US" sz="1400" b="1" dirty="0" err="1">
-                <a:latin typeface="맑은 고딕 Semilight" panose="020B0502040204020203" pitchFamily="50" charset="-127"/>
-                <a:ea typeface="맑은 고딕 Semilight" panose="020B0502040204020203" pitchFamily="50" charset="-127"/>
+              <a:rPr lang="ko-KR" altLang="en-US" sz="1400" dirty="0" err="1">
+                <a:latin typeface="휴먼모음T" panose="02030504000101010101" pitchFamily="18" charset="-127"/>
+                <a:ea typeface="휴먼모음T" panose="02030504000101010101" pitchFamily="18" charset="-127"/>
                 <a:cs typeface="맑은 고딕 Semilight" panose="020B0502040204020203" pitchFamily="50" charset="-127"/>
               </a:rPr>
               <a:t>대표값</a:t>
             </a:r>
             <a:endParaRPr lang="ko-KR" altLang="en-US" sz="1400" dirty="0">
-              <a:latin typeface="맑은 고딕 Semilight" panose="020B0502040204020203" pitchFamily="50" charset="-127"/>
-              <a:ea typeface="맑은 고딕 Semilight" panose="020B0502040204020203" pitchFamily="50" charset="-127"/>
+              <a:latin typeface="휴먼모음T" panose="02030504000101010101" pitchFamily="18" charset="-127"/>
+              <a:ea typeface="휴먼모음T" panose="02030504000101010101" pitchFamily="18" charset="-127"/>
               <a:cs typeface="맑은 고딕 Semilight" panose="020B0502040204020203" pitchFamily="50" charset="-127"/>
             </a:endParaRPr>
           </a:p>
@@ -12571,47 +12750,47 @@
             </a:pPr>
             <a:r>
               <a:rPr lang="ko-KR" altLang="en-US" sz="1400" dirty="0">
-                <a:latin typeface="맑은 고딕 Semilight" panose="020B0502040204020203" pitchFamily="50" charset="-127"/>
-                <a:ea typeface="맑은 고딕 Semilight" panose="020B0502040204020203" pitchFamily="50" charset="-127"/>
+                <a:latin typeface="휴먼모음T" panose="02030504000101010101" pitchFamily="18" charset="-127"/>
+                <a:ea typeface="휴먼모음T" panose="02030504000101010101" pitchFamily="18" charset="-127"/>
                 <a:cs typeface="맑은 고딕 Semilight" panose="020B0502040204020203" pitchFamily="50" charset="-127"/>
               </a:rPr>
               <a:t>평균</a:t>
             </a:r>
             <a:r>
               <a:rPr lang="en-US" altLang="ko-KR" sz="1400" dirty="0">
-                <a:latin typeface="맑은 고딕 Semilight" panose="020B0502040204020203" pitchFamily="50" charset="-127"/>
-                <a:ea typeface="맑은 고딕 Semilight" panose="020B0502040204020203" pitchFamily="50" charset="-127"/>
+                <a:latin typeface="휴먼모음T" panose="02030504000101010101" pitchFamily="18" charset="-127"/>
+                <a:ea typeface="휴먼모음T" panose="02030504000101010101" pitchFamily="18" charset="-127"/>
                 <a:cs typeface="맑은 고딕 Semilight" panose="020B0502040204020203" pitchFamily="50" charset="-127"/>
               </a:rPr>
               <a:t>, </a:t>
             </a:r>
             <a:r>
               <a:rPr lang="ko-KR" altLang="en-US" sz="1400" dirty="0">
-                <a:latin typeface="맑은 고딕 Semilight" panose="020B0502040204020203" pitchFamily="50" charset="-127"/>
-                <a:ea typeface="맑은 고딕 Semilight" panose="020B0502040204020203" pitchFamily="50" charset="-127"/>
+                <a:latin typeface="휴먼모음T" panose="02030504000101010101" pitchFamily="18" charset="-127"/>
+                <a:ea typeface="휴먼모음T" panose="02030504000101010101" pitchFamily="18" charset="-127"/>
                 <a:cs typeface="맑은 고딕 Semilight" panose="020B0502040204020203" pitchFamily="50" charset="-127"/>
               </a:rPr>
               <a:t>중앙값</a:t>
             </a:r>
             <a:r>
               <a:rPr lang="en-US" altLang="ko-KR" sz="1400" dirty="0">
-                <a:latin typeface="맑은 고딕 Semilight" panose="020B0502040204020203" pitchFamily="50" charset="-127"/>
-                <a:ea typeface="맑은 고딕 Semilight" panose="020B0502040204020203" pitchFamily="50" charset="-127"/>
+                <a:latin typeface="휴먼모음T" panose="02030504000101010101" pitchFamily="18" charset="-127"/>
+                <a:ea typeface="휴먼모음T" panose="02030504000101010101" pitchFamily="18" charset="-127"/>
                 <a:cs typeface="맑은 고딕 Semilight" panose="020B0502040204020203" pitchFamily="50" charset="-127"/>
               </a:rPr>
               <a:t>, </a:t>
             </a:r>
             <a:r>
               <a:rPr lang="ko-KR" altLang="en-US" sz="1400" dirty="0" err="1">
-                <a:latin typeface="맑은 고딕 Semilight" panose="020B0502040204020203" pitchFamily="50" charset="-127"/>
-                <a:ea typeface="맑은 고딕 Semilight" panose="020B0502040204020203" pitchFamily="50" charset="-127"/>
+                <a:latin typeface="휴먼모음T" panose="02030504000101010101" pitchFamily="18" charset="-127"/>
+                <a:ea typeface="휴먼모음T" panose="02030504000101010101" pitchFamily="18" charset="-127"/>
                 <a:cs typeface="맑은 고딕 Semilight" panose="020B0502040204020203" pitchFamily="50" charset="-127"/>
               </a:rPr>
               <a:t>최빈값</a:t>
             </a:r>
             <a:endParaRPr lang="en-US" altLang="ko-KR" sz="1400" dirty="0">
-              <a:latin typeface="맑은 고딕 Semilight" panose="020B0502040204020203" pitchFamily="50" charset="-127"/>
-              <a:ea typeface="맑은 고딕 Semilight" panose="020B0502040204020203" pitchFamily="50" charset="-127"/>
+              <a:latin typeface="휴먼모음T" panose="02030504000101010101" pitchFamily="18" charset="-127"/>
+              <a:ea typeface="휴먼모음T" panose="02030504000101010101" pitchFamily="18" charset="-127"/>
               <a:cs typeface="맑은 고딕 Semilight" panose="020B0502040204020203" pitchFamily="50" charset="-127"/>
             </a:endParaRPr>
           </a:p>
@@ -12624,18 +12803,13 @@
               <a:buChar char="v"/>
             </a:pPr>
             <a:r>
-              <a:rPr lang="ko-KR" altLang="en-US" sz="1400" b="1" dirty="0">
-                <a:latin typeface="맑은 고딕 Semilight" panose="020B0502040204020203" pitchFamily="50" charset="-127"/>
-                <a:ea typeface="맑은 고딕 Semilight" panose="020B0502040204020203" pitchFamily="50" charset="-127"/>
+              <a:rPr lang="ko-KR" altLang="en-US" sz="1400" dirty="0">
+                <a:latin typeface="휴먼모음T" panose="02030504000101010101" pitchFamily="18" charset="-127"/>
+                <a:ea typeface="휴먼모음T" panose="02030504000101010101" pitchFamily="18" charset="-127"/>
                 <a:cs typeface="맑은 고딕 Semilight" panose="020B0502040204020203" pitchFamily="50" charset="-127"/>
               </a:rPr>
               <a:t>산포</a:t>
             </a:r>
-            <a:endParaRPr lang="ko-KR" altLang="en-US" sz="1400" dirty="0">
-              <a:latin typeface="맑은 고딕 Semilight" panose="020B0502040204020203" pitchFamily="50" charset="-127"/>
-              <a:ea typeface="맑은 고딕 Semilight" panose="020B0502040204020203" pitchFamily="50" charset="-127"/>
-              <a:cs typeface="맑은 고딕 Semilight" panose="020B0502040204020203" pitchFamily="50" charset="-127"/>
-            </a:endParaRPr>
           </a:p>
           <a:p>
             <a:pPr marL="1200150" lvl="2" indent="-285750">
@@ -12647,16 +12821,16 @@
             </a:pPr>
             <a:r>
               <a:rPr lang="ko-KR" altLang="en-US" sz="1400" dirty="0">
-                <a:latin typeface="맑은 고딕 Semilight" panose="020B0502040204020203" pitchFamily="50" charset="-127"/>
-                <a:ea typeface="맑은 고딕 Semilight" panose="020B0502040204020203" pitchFamily="50" charset="-127"/>
+                <a:latin typeface="휴먼모음T" panose="02030504000101010101" pitchFamily="18" charset="-127"/>
+                <a:ea typeface="휴먼모음T" panose="02030504000101010101" pitchFamily="18" charset="-127"/>
                 <a:cs typeface="맑은 고딕 Semilight" panose="020B0502040204020203" pitchFamily="50" charset="-127"/>
               </a:rPr>
               <a:t>범위 </a:t>
             </a:r>
             <a:r>
               <a:rPr lang="en-US" altLang="ko-KR" sz="1400" dirty="0">
-                <a:latin typeface="맑은 고딕 Semilight" panose="020B0502040204020203" pitchFamily="50" charset="-127"/>
-                <a:ea typeface="맑은 고딕 Semilight" panose="020B0502040204020203" pitchFamily="50" charset="-127"/>
+                <a:latin typeface="휴먼모음T" panose="02030504000101010101" pitchFamily="18" charset="-127"/>
+                <a:ea typeface="휴먼모음T" panose="02030504000101010101" pitchFamily="18" charset="-127"/>
                 <a:cs typeface="맑은 고딕 Semilight" panose="020B0502040204020203" pitchFamily="50" charset="-127"/>
               </a:rPr>
               <a:t>=</a:t>
@@ -12672,8 +12846,8 @@
             </a:pPr>
             <a:r>
               <a:rPr lang="en-US" altLang="ko-KR" sz="1400" dirty="0">
-                <a:latin typeface="맑은 고딕 Semilight" panose="020B0502040204020203" pitchFamily="50" charset="-127"/>
-                <a:ea typeface="맑은 고딕 Semilight" panose="020B0502040204020203" pitchFamily="50" charset="-127"/>
+                <a:latin typeface="휴먼모음T" panose="02030504000101010101" pitchFamily="18" charset="-127"/>
+                <a:ea typeface="휴먼모음T" panose="02030504000101010101" pitchFamily="18" charset="-127"/>
                 <a:cs typeface="맑은 고딕 Semilight" panose="020B0502040204020203" pitchFamily="50" charset="-127"/>
               </a:rPr>
               <a:t>(Q1, Q2, Q3) =</a:t>
@@ -12689,16 +12863,16 @@
             </a:pPr>
             <a:r>
               <a:rPr lang="ko-KR" altLang="en-US" sz="1400" dirty="0">
-                <a:latin typeface="맑은 고딕 Semilight" panose="020B0502040204020203" pitchFamily="50" charset="-127"/>
-                <a:ea typeface="맑은 고딕 Semilight" panose="020B0502040204020203" pitchFamily="50" charset="-127"/>
+                <a:latin typeface="휴먼모음T" panose="02030504000101010101" pitchFamily="18" charset="-127"/>
+                <a:ea typeface="휴먼모음T" panose="02030504000101010101" pitchFamily="18" charset="-127"/>
                 <a:cs typeface="맑은 고딕 Semilight" panose="020B0502040204020203" pitchFamily="50" charset="-127"/>
               </a:rPr>
               <a:t>사분위범위 </a:t>
             </a:r>
             <a:r>
               <a:rPr lang="en-US" altLang="ko-KR" sz="1400" dirty="0">
-                <a:latin typeface="맑은 고딕 Semilight" panose="020B0502040204020203" pitchFamily="50" charset="-127"/>
-                <a:ea typeface="맑은 고딕 Semilight" panose="020B0502040204020203" pitchFamily="50" charset="-127"/>
+                <a:latin typeface="휴먼모음T" panose="02030504000101010101" pitchFamily="18" charset="-127"/>
+                <a:ea typeface="휴먼모음T" panose="02030504000101010101" pitchFamily="18" charset="-127"/>
                 <a:cs typeface="맑은 고딕 Semilight" panose="020B0502040204020203" pitchFamily="50" charset="-127"/>
               </a:rPr>
               <a:t>=</a:t>
@@ -12714,24 +12888,24 @@
             </a:pPr>
             <a:r>
               <a:rPr lang="en-US" altLang="ko-KR" sz="1400" dirty="0">
-                <a:latin typeface="맑은 고딕 Semilight" panose="020B0502040204020203" pitchFamily="50" charset="-127"/>
-                <a:ea typeface="맑은 고딕 Semilight" panose="020B0502040204020203" pitchFamily="50" charset="-127"/>
+                <a:latin typeface="휴먼모음T" panose="02030504000101010101" pitchFamily="18" charset="-127"/>
+                <a:ea typeface="휴먼모음T" panose="02030504000101010101" pitchFamily="18" charset="-127"/>
                 <a:cs typeface="맑은 고딕 Semilight" panose="020B0502040204020203" pitchFamily="50" charset="-127"/>
               </a:rPr>
               <a:t>90%</a:t>
             </a:r>
             <a:r>
               <a:rPr lang="ko-KR" altLang="en-US" sz="1400" dirty="0">
-                <a:latin typeface="맑은 고딕 Semilight" panose="020B0502040204020203" pitchFamily="50" charset="-127"/>
-                <a:ea typeface="맑은 고딕 Semilight" panose="020B0502040204020203" pitchFamily="50" charset="-127"/>
+                <a:latin typeface="휴먼모음T" panose="02030504000101010101" pitchFamily="18" charset="-127"/>
+                <a:ea typeface="휴먼모음T" panose="02030504000101010101" pitchFamily="18" charset="-127"/>
                 <a:cs typeface="맑은 고딕 Semilight" panose="020B0502040204020203" pitchFamily="50" charset="-127"/>
               </a:rPr>
               <a:t>백분위수 </a:t>
             </a:r>
             <a:r>
               <a:rPr lang="en-US" altLang="ko-KR" sz="1400" dirty="0">
-                <a:latin typeface="맑은 고딕 Semilight" panose="020B0502040204020203" pitchFamily="50" charset="-127"/>
-                <a:ea typeface="맑은 고딕 Semilight" panose="020B0502040204020203" pitchFamily="50" charset="-127"/>
+                <a:latin typeface="휴먼모음T" panose="02030504000101010101" pitchFamily="18" charset="-127"/>
+                <a:ea typeface="휴먼모음T" panose="02030504000101010101" pitchFamily="18" charset="-127"/>
                 <a:cs typeface="맑은 고딕 Semilight" panose="020B0502040204020203" pitchFamily="50" charset="-127"/>
               </a:rPr>
               <a:t>=</a:t>
@@ -12747,40 +12921,40 @@
             </a:pPr>
             <a:r>
               <a:rPr lang="en-US" altLang="ko-KR" sz="1400" dirty="0">
-                <a:latin typeface="맑은 고딕 Semilight" panose="020B0502040204020203" pitchFamily="50" charset="-127"/>
-                <a:ea typeface="맑은 고딕 Semilight" panose="020B0502040204020203" pitchFamily="50" charset="-127"/>
+                <a:latin typeface="휴먼모음T" panose="02030504000101010101" pitchFamily="18" charset="-127"/>
+                <a:ea typeface="휴먼모음T" panose="02030504000101010101" pitchFamily="18" charset="-127"/>
                 <a:cs typeface="맑은 고딕 Semilight" panose="020B0502040204020203" pitchFamily="50" charset="-127"/>
               </a:rPr>
               <a:t>(</a:t>
             </a:r>
             <a:r>
               <a:rPr lang="ko-KR" altLang="en-US" sz="1400" dirty="0">
-                <a:latin typeface="맑은 고딕 Semilight" panose="020B0502040204020203" pitchFamily="50" charset="-127"/>
-                <a:ea typeface="맑은 고딕 Semilight" panose="020B0502040204020203" pitchFamily="50" charset="-127"/>
+                <a:latin typeface="휴먼모음T" panose="02030504000101010101" pitchFamily="18" charset="-127"/>
+                <a:ea typeface="휴먼모음T" panose="02030504000101010101" pitchFamily="18" charset="-127"/>
                 <a:cs typeface="맑은 고딕 Semilight" panose="020B0502040204020203" pitchFamily="50" charset="-127"/>
               </a:rPr>
               <a:t>분산</a:t>
             </a:r>
             <a:r>
               <a:rPr lang="en-US" altLang="ko-KR" sz="1400" dirty="0">
-                <a:latin typeface="맑은 고딕 Semilight" panose="020B0502040204020203" pitchFamily="50" charset="-127"/>
-                <a:ea typeface="맑은 고딕 Semilight" panose="020B0502040204020203" pitchFamily="50" charset="-127"/>
+                <a:latin typeface="휴먼모음T" panose="02030504000101010101" pitchFamily="18" charset="-127"/>
+                <a:ea typeface="휴먼모음T" panose="02030504000101010101" pitchFamily="18" charset="-127"/>
                 <a:cs typeface="맑은 고딕 Semilight" panose="020B0502040204020203" pitchFamily="50" charset="-127"/>
               </a:rPr>
               <a:t>, </a:t>
             </a:r>
             <a:r>
               <a:rPr lang="ko-KR" altLang="en-US" sz="1400" dirty="0">
-                <a:latin typeface="맑은 고딕 Semilight" panose="020B0502040204020203" pitchFamily="50" charset="-127"/>
-                <a:ea typeface="맑은 고딕 Semilight" panose="020B0502040204020203" pitchFamily="50" charset="-127"/>
+                <a:latin typeface="휴먼모음T" panose="02030504000101010101" pitchFamily="18" charset="-127"/>
+                <a:ea typeface="휴먼모음T" panose="02030504000101010101" pitchFamily="18" charset="-127"/>
                 <a:cs typeface="맑은 고딕 Semilight" panose="020B0502040204020203" pitchFamily="50" charset="-127"/>
               </a:rPr>
               <a:t>표준편차</a:t>
             </a:r>
             <a:r>
               <a:rPr lang="en-US" altLang="ko-KR" sz="1400" dirty="0">
-                <a:latin typeface="맑은 고딕 Semilight" panose="020B0502040204020203" pitchFamily="50" charset="-127"/>
-                <a:ea typeface="맑은 고딕 Semilight" panose="020B0502040204020203" pitchFamily="50" charset="-127"/>
+                <a:latin typeface="휴먼모음T" panose="02030504000101010101" pitchFamily="18" charset="-127"/>
+                <a:ea typeface="휴먼모음T" panose="02030504000101010101" pitchFamily="18" charset="-127"/>
                 <a:cs typeface="맑은 고딕 Semilight" panose="020B0502040204020203" pitchFamily="50" charset="-127"/>
               </a:rPr>
               <a:t>) =</a:t>
@@ -12795,16 +12969,16 @@
               <a:buChar char="v"/>
             </a:pPr>
             <a:r>
-              <a:rPr lang="ko-KR" altLang="en-US" sz="1400" b="1" dirty="0">
-                <a:latin typeface="맑은 고딕 Semilight" panose="020B0502040204020203" pitchFamily="50" charset="-127"/>
-                <a:ea typeface="맑은 고딕 Semilight" panose="020B0502040204020203" pitchFamily="50" charset="-127"/>
+              <a:rPr lang="ko-KR" altLang="en-US" sz="1400" dirty="0">
+                <a:latin typeface="휴먼모음T" panose="02030504000101010101" pitchFamily="18" charset="-127"/>
+                <a:ea typeface="휴먼모음T" panose="02030504000101010101" pitchFamily="18" charset="-127"/>
                 <a:cs typeface="맑은 고딕 Semilight" panose="020B0502040204020203" pitchFamily="50" charset="-127"/>
               </a:rPr>
               <a:t>분포의 왜곡</a:t>
             </a:r>
-            <a:endParaRPr lang="en-US" altLang="ko-KR" sz="1400" b="1" dirty="0">
-              <a:latin typeface="맑은 고딕 Semilight" panose="020B0502040204020203" pitchFamily="50" charset="-127"/>
-              <a:ea typeface="맑은 고딕 Semilight" panose="020B0502040204020203" pitchFamily="50" charset="-127"/>
+            <a:endParaRPr lang="en-US" altLang="ko-KR" sz="1400" dirty="0">
+              <a:latin typeface="휴먼모음T" panose="02030504000101010101" pitchFamily="18" charset="-127"/>
+              <a:ea typeface="휴먼모음T" panose="02030504000101010101" pitchFamily="18" charset="-127"/>
               <a:cs typeface="맑은 고딕 Semilight" panose="020B0502040204020203" pitchFamily="50" charset="-127"/>
             </a:endParaRPr>
           </a:p>
@@ -12818,32 +12992,32 @@
             </a:pPr>
             <a:r>
               <a:rPr lang="ko-KR" altLang="en-US" sz="1400" dirty="0" err="1">
-                <a:latin typeface="맑은 고딕 Semilight" panose="020B0502040204020203" pitchFamily="50" charset="-127"/>
-                <a:ea typeface="맑은 고딕 Semilight" panose="020B0502040204020203" pitchFamily="50" charset="-127"/>
+                <a:latin typeface="휴먼모음T" panose="02030504000101010101" pitchFamily="18" charset="-127"/>
+                <a:ea typeface="휴먼모음T" panose="02030504000101010101" pitchFamily="18" charset="-127"/>
                 <a:cs typeface="맑은 고딕 Semilight" panose="020B0502040204020203" pitchFamily="50" charset="-127"/>
               </a:rPr>
               <a:t>왜도</a:t>
             </a:r>
             <a:r>
               <a:rPr lang="en-US" altLang="ko-KR" sz="1400" dirty="0">
-                <a:latin typeface="맑은 고딕 Semilight" panose="020B0502040204020203" pitchFamily="50" charset="-127"/>
-                <a:ea typeface="맑은 고딕 Semilight" panose="020B0502040204020203" pitchFamily="50" charset="-127"/>
+                <a:latin typeface="휴먼모음T" panose="02030504000101010101" pitchFamily="18" charset="-127"/>
+                <a:ea typeface="휴먼모음T" panose="02030504000101010101" pitchFamily="18" charset="-127"/>
                 <a:cs typeface="맑은 고딕 Semilight" panose="020B0502040204020203" pitchFamily="50" charset="-127"/>
               </a:rPr>
               <a:t>=, </a:t>
             </a:r>
             <a:r>
               <a:rPr lang="ko-KR" altLang="en-US" sz="1400" dirty="0">
-                <a:latin typeface="맑은 고딕 Semilight" panose="020B0502040204020203" pitchFamily="50" charset="-127"/>
-                <a:ea typeface="맑은 고딕 Semilight" panose="020B0502040204020203" pitchFamily="50" charset="-127"/>
+                <a:latin typeface="휴먼모음T" panose="02030504000101010101" pitchFamily="18" charset="-127"/>
+                <a:ea typeface="휴먼모음T" panose="02030504000101010101" pitchFamily="18" charset="-127"/>
                 <a:cs typeface="맑은 고딕 Semilight" panose="020B0502040204020203" pitchFamily="50" charset="-127"/>
               </a:rPr>
               <a:t>첨도</a:t>
             </a:r>
             <a:r>
               <a:rPr lang="en-US" altLang="ko-KR" sz="1400" dirty="0">
-                <a:latin typeface="맑은 고딕 Semilight" panose="020B0502040204020203" pitchFamily="50" charset="-127"/>
-                <a:ea typeface="맑은 고딕 Semilight" panose="020B0502040204020203" pitchFamily="50" charset="-127"/>
+                <a:latin typeface="휴먼모음T" panose="02030504000101010101" pitchFamily="18" charset="-127"/>
+                <a:ea typeface="휴먼모음T" panose="02030504000101010101" pitchFamily="18" charset="-127"/>
                 <a:cs typeface="맑은 고딕 Semilight" panose="020B0502040204020203" pitchFamily="50" charset="-127"/>
               </a:rPr>
               <a:t>=</a:t>
@@ -12924,8 +13098,8 @@
         </p:nvSpPr>
         <p:spPr>
           <a:xfrm>
-            <a:off x="4291963" y="5472890"/>
-            <a:ext cx="7318828" cy="697050"/>
+            <a:off x="4291962" y="5472890"/>
+            <a:ext cx="7779113" cy="707310"/>
           </a:xfrm>
           <a:prstGeom prst="rect">
             <a:avLst/>
@@ -12946,99 +13120,99 @@
               <a:buChar char="v"/>
             </a:pPr>
             <a:r>
-              <a:rPr lang="en-US" altLang="ko-KR" sz="1400" b="1" dirty="0">
+              <a:rPr lang="en-US" altLang="ko-KR" sz="1400" dirty="0">
                 <a:solidFill>
                   <a:srgbClr val="FF0000"/>
                 </a:solidFill>
-                <a:latin typeface="맑은 고딕 Semilight" panose="020B0502040204020203" pitchFamily="50" charset="-127"/>
-                <a:ea typeface="맑은 고딕 Semilight" panose="020B0502040204020203" pitchFamily="50" charset="-127"/>
+                <a:latin typeface="휴먼모음T" panose="02030504000101010101" pitchFamily="18" charset="-127"/>
+                <a:ea typeface="휴먼모음T" panose="02030504000101010101" pitchFamily="18" charset="-127"/>
                 <a:cs typeface="맑은 고딕 Semilight" panose="020B0502040204020203" pitchFamily="50" charset="-127"/>
               </a:rPr>
               <a:t>Tip) </a:t>
             </a:r>
             <a:r>
-              <a:rPr lang="ko-KR" altLang="en-US" sz="1400" b="1" dirty="0">
+              <a:rPr lang="ko-KR" altLang="en-US" sz="1400" dirty="0">
                 <a:solidFill>
                   <a:srgbClr val="FF0000"/>
                 </a:solidFill>
-                <a:latin typeface="맑은 고딕 Semilight" panose="020B0502040204020203" pitchFamily="50" charset="-127"/>
-                <a:ea typeface="맑은 고딕 Semilight" panose="020B0502040204020203" pitchFamily="50" charset="-127"/>
+                <a:latin typeface="휴먼모음T" panose="02030504000101010101" pitchFamily="18" charset="-127"/>
+                <a:ea typeface="휴먼모음T" panose="02030504000101010101" pitchFamily="18" charset="-127"/>
                 <a:cs typeface="맑은 고딕 Semilight" panose="020B0502040204020203" pitchFamily="50" charset="-127"/>
               </a:rPr>
               <a:t>관련 </a:t>
             </a:r>
             <a:r>
-              <a:rPr lang="en-US" altLang="ko-KR" sz="1400" b="1" dirty="0">
+              <a:rPr lang="en-US" altLang="ko-KR" sz="1400" dirty="0">
                 <a:solidFill>
                   <a:srgbClr val="FF0000"/>
                 </a:solidFill>
-                <a:latin typeface="맑은 고딕 Semilight" panose="020B0502040204020203" pitchFamily="50" charset="-127"/>
-                <a:ea typeface="맑은 고딕 Semilight" panose="020B0502040204020203" pitchFamily="50" charset="-127"/>
+                <a:latin typeface="휴먼모음T" panose="02030504000101010101" pitchFamily="18" charset="-127"/>
+                <a:ea typeface="휴먼모음T" panose="02030504000101010101" pitchFamily="18" charset="-127"/>
                 <a:cs typeface="맑은 고딕 Semilight" panose="020B0502040204020203" pitchFamily="50" charset="-127"/>
               </a:rPr>
               <a:t>Excel </a:t>
             </a:r>
             <a:r>
-              <a:rPr lang="ko-KR" altLang="en-US" sz="1400" b="1" dirty="0">
+              <a:rPr lang="ko-KR" altLang="en-US" sz="1400" dirty="0">
                 <a:solidFill>
                   <a:srgbClr val="FF0000"/>
                 </a:solidFill>
-                <a:latin typeface="맑은 고딕 Semilight" panose="020B0502040204020203" pitchFamily="50" charset="-127"/>
-                <a:ea typeface="맑은 고딕 Semilight" panose="020B0502040204020203" pitchFamily="50" charset="-127"/>
+                <a:latin typeface="휴먼모음T" panose="02030504000101010101" pitchFamily="18" charset="-127"/>
+                <a:ea typeface="휴먼모음T" panose="02030504000101010101" pitchFamily="18" charset="-127"/>
                 <a:cs typeface="맑은 고딕 Semilight" panose="020B0502040204020203" pitchFamily="50" charset="-127"/>
               </a:rPr>
               <a:t>함수 </a:t>
             </a:r>
             <a:r>
-              <a:rPr lang="en-US" altLang="ko-KR" sz="1400" b="1" dirty="0">
+              <a:rPr lang="en-US" altLang="ko-KR" sz="1400" dirty="0">
                 <a:solidFill>
                   <a:srgbClr val="FF0000"/>
                 </a:solidFill>
-                <a:latin typeface="맑은 고딕 Semilight" panose="020B0502040204020203" pitchFamily="50" charset="-127"/>
-                <a:ea typeface="맑은 고딕 Semilight" panose="020B0502040204020203" pitchFamily="50" charset="-127"/>
+                <a:latin typeface="휴먼모음T" panose="02030504000101010101" pitchFamily="18" charset="-127"/>
+                <a:ea typeface="휴먼모음T" panose="02030504000101010101" pitchFamily="18" charset="-127"/>
                 <a:cs typeface="맑은 고딕 Semilight" panose="020B0502040204020203" pitchFamily="50" charset="-127"/>
               </a:rPr>
               <a:t>: average, median, quartile, percentile, var, </a:t>
             </a:r>
             <a:r>
-              <a:rPr lang="en-US" altLang="ko-KR" sz="1400" b="1" dirty="0" err="1">
+              <a:rPr lang="en-US" altLang="ko-KR" sz="1400" dirty="0" err="1">
                 <a:solidFill>
                   <a:srgbClr val="FF0000"/>
                 </a:solidFill>
-                <a:latin typeface="맑은 고딕 Semilight" panose="020B0502040204020203" pitchFamily="50" charset="-127"/>
-                <a:ea typeface="맑은 고딕 Semilight" panose="020B0502040204020203" pitchFamily="50" charset="-127"/>
+                <a:latin typeface="휴먼모음T" panose="02030504000101010101" pitchFamily="18" charset="-127"/>
+                <a:ea typeface="휴먼모음T" panose="02030504000101010101" pitchFamily="18" charset="-127"/>
                 <a:cs typeface="맑은 고딕 Semilight" panose="020B0502040204020203" pitchFamily="50" charset="-127"/>
               </a:rPr>
               <a:t>stdev</a:t>
             </a:r>
             <a:r>
-              <a:rPr lang="en-US" altLang="ko-KR" sz="1400" b="1" dirty="0">
+              <a:rPr lang="en-US" altLang="ko-KR" sz="1400" dirty="0">
                 <a:solidFill>
                   <a:srgbClr val="FF0000"/>
                 </a:solidFill>
-                <a:latin typeface="맑은 고딕 Semilight" panose="020B0502040204020203" pitchFamily="50" charset="-127"/>
-                <a:ea typeface="맑은 고딕 Semilight" panose="020B0502040204020203" pitchFamily="50" charset="-127"/>
+                <a:latin typeface="휴먼모음T" panose="02030504000101010101" pitchFamily="18" charset="-127"/>
+                <a:ea typeface="휴먼모음T" panose="02030504000101010101" pitchFamily="18" charset="-127"/>
                 <a:cs typeface="맑은 고딕 Semilight" panose="020B0502040204020203" pitchFamily="50" charset="-127"/>
               </a:rPr>
               <a:t>, skew, </a:t>
             </a:r>
             <a:r>
-              <a:rPr lang="en-US" altLang="ko-KR" sz="1400" b="1" dirty="0" err="1">
+              <a:rPr lang="en-US" altLang="ko-KR" sz="1400" dirty="0" err="1">
                 <a:solidFill>
                   <a:srgbClr val="FF0000"/>
                 </a:solidFill>
-                <a:latin typeface="맑은 고딕 Semilight" panose="020B0502040204020203" pitchFamily="50" charset="-127"/>
-                <a:ea typeface="맑은 고딕 Semilight" panose="020B0502040204020203" pitchFamily="50" charset="-127"/>
+                <a:latin typeface="휴먼모음T" panose="02030504000101010101" pitchFamily="18" charset="-127"/>
+                <a:ea typeface="휴먼모음T" panose="02030504000101010101" pitchFamily="18" charset="-127"/>
                 <a:cs typeface="맑은 고딕 Semilight" panose="020B0502040204020203" pitchFamily="50" charset="-127"/>
               </a:rPr>
               <a:t>kurt</a:t>
             </a:r>
-            <a:endParaRPr lang="en-US" altLang="ko-KR" sz="1400" b="1" dirty="0">
+            <a:endParaRPr lang="en-US" altLang="ko-KR" sz="1400" dirty="0">
               <a:solidFill>
                 <a:srgbClr val="FF0000"/>
               </a:solidFill>
-              <a:latin typeface="맑은 고딕 Semilight" panose="020B0502040204020203" pitchFamily="50" charset="-127"/>
-              <a:ea typeface="맑은 고딕 Semilight" panose="020B0502040204020203" pitchFamily="50" charset="-127"/>
+              <a:latin typeface="휴먼모음T" panose="02030504000101010101" pitchFamily="18" charset="-127"/>
+              <a:ea typeface="휴먼모음T" panose="02030504000101010101" pitchFamily="18" charset="-127"/>
               <a:cs typeface="맑은 고딕 Semilight" panose="020B0502040204020203" pitchFamily="50" charset="-127"/>
             </a:endParaRPr>
           </a:p>
@@ -13051,55 +13225,55 @@
               <a:buChar char="v"/>
             </a:pPr>
             <a:r>
-              <a:rPr lang="en-US" altLang="ko-KR" sz="1400" b="1" dirty="0">
+              <a:rPr lang="en-US" altLang="ko-KR" sz="1400" dirty="0">
                 <a:solidFill>
                   <a:srgbClr val="FF0000"/>
                 </a:solidFill>
-                <a:latin typeface="맑은 고딕 Semilight" panose="020B0502040204020203" pitchFamily="50" charset="-127"/>
-                <a:ea typeface="맑은 고딕 Semilight" panose="020B0502040204020203" pitchFamily="50" charset="-127"/>
+                <a:latin typeface="휴먼모음T" panose="02030504000101010101" pitchFamily="18" charset="-127"/>
+                <a:ea typeface="휴먼모음T" panose="02030504000101010101" pitchFamily="18" charset="-127"/>
                 <a:cs typeface="맑은 고딕 Semilight" panose="020B0502040204020203" pitchFamily="50" charset="-127"/>
               </a:rPr>
               <a:t>Kaggle</a:t>
             </a:r>
             <a:r>
-              <a:rPr lang="ko-KR" altLang="en-US" sz="1400" b="1" dirty="0">
+              <a:rPr lang="ko-KR" altLang="en-US" sz="1400" dirty="0">
                 <a:solidFill>
                   <a:srgbClr val="FF0000"/>
                 </a:solidFill>
-                <a:latin typeface="맑은 고딕 Semilight" panose="020B0502040204020203" pitchFamily="50" charset="-127"/>
-                <a:ea typeface="맑은 고딕 Semilight" panose="020B0502040204020203" pitchFamily="50" charset="-127"/>
+                <a:latin typeface="휴먼모음T" panose="02030504000101010101" pitchFamily="18" charset="-127"/>
+                <a:ea typeface="휴먼모음T" panose="02030504000101010101" pitchFamily="18" charset="-127"/>
                 <a:cs typeface="맑은 고딕 Semilight" panose="020B0502040204020203" pitchFamily="50" charset="-127"/>
               </a:rPr>
               <a:t>에서 </a:t>
             </a:r>
             <a:r>
-              <a:rPr lang="en-US" altLang="ko-KR" sz="1400" b="1" dirty="0">
+              <a:rPr lang="en-US" altLang="ko-KR" sz="1400" dirty="0">
                 <a:solidFill>
                   <a:srgbClr val="FF0000"/>
                 </a:solidFill>
-                <a:latin typeface="맑은 고딕 Semilight" panose="020B0502040204020203" pitchFamily="50" charset="-127"/>
-                <a:ea typeface="맑은 고딕 Semilight" panose="020B0502040204020203" pitchFamily="50" charset="-127"/>
+                <a:latin typeface="휴먼모음T" panose="02030504000101010101" pitchFamily="18" charset="-127"/>
+                <a:ea typeface="휴먼모음T" panose="02030504000101010101" pitchFamily="18" charset="-127"/>
                 <a:cs typeface="맑은 고딕 Semilight" panose="020B0502040204020203" pitchFamily="50" charset="-127"/>
               </a:rPr>
               <a:t>“EDA”</a:t>
             </a:r>
             <a:r>
-              <a:rPr lang="ko-KR" altLang="en-US" sz="1400" b="1" dirty="0">
+              <a:rPr lang="ko-KR" altLang="en-US" sz="1400" dirty="0">
                 <a:solidFill>
                   <a:srgbClr val="FF0000"/>
                 </a:solidFill>
-                <a:latin typeface="맑은 고딕 Semilight" panose="020B0502040204020203" pitchFamily="50" charset="-127"/>
-                <a:ea typeface="맑은 고딕 Semilight" panose="020B0502040204020203" pitchFamily="50" charset="-127"/>
+                <a:latin typeface="휴먼모음T" panose="02030504000101010101" pitchFamily="18" charset="-127"/>
+                <a:ea typeface="휴먼모음T" panose="02030504000101010101" pitchFamily="18" charset="-127"/>
                 <a:cs typeface="맑은 고딕 Semilight" panose="020B0502040204020203" pitchFamily="50" charset="-127"/>
               </a:rPr>
               <a:t>를 검색하여 실습하기</a:t>
             </a:r>
-            <a:endParaRPr lang="en-US" altLang="ko-KR" sz="1400" b="1" dirty="0">
+            <a:endParaRPr lang="en-US" altLang="ko-KR" sz="1400" dirty="0">
               <a:solidFill>
                 <a:srgbClr val="FF0000"/>
               </a:solidFill>
-              <a:latin typeface="맑은 고딕 Semilight" panose="020B0502040204020203" pitchFamily="50" charset="-127"/>
-              <a:ea typeface="맑은 고딕 Semilight" panose="020B0502040204020203" pitchFamily="50" charset="-127"/>
+              <a:latin typeface="휴먼모음T" panose="02030504000101010101" pitchFamily="18" charset="-127"/>
+              <a:ea typeface="휴먼모음T" panose="02030504000101010101" pitchFamily="18" charset="-127"/>
               <a:cs typeface="맑은 고딕 Semilight" panose="020B0502040204020203" pitchFamily="50" charset="-127"/>
             </a:endParaRPr>
           </a:p>
@@ -13146,9 +13320,9 @@
               <a:buChar char="v"/>
             </a:pPr>
             <a:r>
-              <a:rPr lang="ko-KR" altLang="en-US" sz="1600" b="1" dirty="0">
-                <a:latin typeface="맑은 고딕 Semilight" panose="020B0502040204020203" pitchFamily="50" charset="-127"/>
-                <a:ea typeface="맑은 고딕 Semilight" panose="020B0502040204020203" pitchFamily="50" charset="-127"/>
+              <a:rPr lang="ko-KR" altLang="en-US" sz="1600" dirty="0">
+                <a:latin typeface="휴먼모음T" panose="02030504000101010101" pitchFamily="18" charset="-127"/>
+                <a:ea typeface="휴먼모음T" panose="02030504000101010101" pitchFamily="18" charset="-127"/>
                 <a:cs typeface="맑은 고딕 Semilight" panose="020B0502040204020203" pitchFamily="50" charset="-127"/>
               </a:rPr>
               <a:t>시각화 분석 정리</a:t>
@@ -13164,15 +13338,15 @@
             </a:pPr>
             <a:r>
               <a:rPr lang="ko-KR" altLang="en-US" sz="1400" dirty="0">
-                <a:latin typeface="맑은 고딕 Semilight" panose="020B0502040204020203" pitchFamily="50" charset="-127"/>
-                <a:ea typeface="맑은 고딕 Semilight" panose="020B0502040204020203" pitchFamily="50" charset="-127"/>
+                <a:latin typeface="휴먼모음T" panose="02030504000101010101" pitchFamily="18" charset="-127"/>
+                <a:ea typeface="휴먼모음T" panose="02030504000101010101" pitchFamily="18" charset="-127"/>
                 <a:cs typeface="맑은 고딕 Semilight" panose="020B0502040204020203" pitchFamily="50" charset="-127"/>
               </a:rPr>
               <a:t>범주형 변수의 시각화</a:t>
             </a:r>
             <a:endParaRPr lang="en-US" altLang="ko-KR" sz="1400" dirty="0">
-              <a:latin typeface="맑은 고딕 Semilight" panose="020B0502040204020203" pitchFamily="50" charset="-127"/>
-              <a:ea typeface="맑은 고딕 Semilight" panose="020B0502040204020203" pitchFamily="50" charset="-127"/>
+              <a:latin typeface="휴먼모음T" panose="02030504000101010101" pitchFamily="18" charset="-127"/>
+              <a:ea typeface="휴먼모음T" panose="02030504000101010101" pitchFamily="18" charset="-127"/>
               <a:cs typeface="맑은 고딕 Semilight" panose="020B0502040204020203" pitchFamily="50" charset="-127"/>
             </a:endParaRPr>
           </a:p>
@@ -13186,23 +13360,23 @@
             </a:pPr>
             <a:r>
               <a:rPr lang="ko-KR" altLang="en-US" sz="1400" dirty="0" err="1">
-                <a:latin typeface="맑은 고딕 Semilight" panose="020B0502040204020203" pitchFamily="50" charset="-127"/>
-                <a:ea typeface="맑은 고딕 Semilight" panose="020B0502040204020203" pitchFamily="50" charset="-127"/>
+                <a:latin typeface="휴먼모음T" panose="02030504000101010101" pitchFamily="18" charset="-127"/>
+                <a:ea typeface="휴먼모음T" panose="02030504000101010101" pitchFamily="18" charset="-127"/>
                 <a:cs typeface="맑은 고딕 Semilight" panose="020B0502040204020203" pitchFamily="50" charset="-127"/>
               </a:rPr>
               <a:t>수치형변수의</a:t>
             </a:r>
             <a:r>
               <a:rPr lang="ko-KR" altLang="en-US" sz="1400" dirty="0">
-                <a:latin typeface="맑은 고딕 Semilight" panose="020B0502040204020203" pitchFamily="50" charset="-127"/>
-                <a:ea typeface="맑은 고딕 Semilight" panose="020B0502040204020203" pitchFamily="50" charset="-127"/>
+                <a:latin typeface="휴먼모음T" panose="02030504000101010101" pitchFamily="18" charset="-127"/>
+                <a:ea typeface="휴먼모음T" panose="02030504000101010101" pitchFamily="18" charset="-127"/>
                 <a:cs typeface="맑은 고딕 Semilight" panose="020B0502040204020203" pitchFamily="50" charset="-127"/>
               </a:rPr>
               <a:t> 시각화</a:t>
             </a:r>
             <a:endParaRPr lang="en-US" altLang="ko-KR" sz="1400" dirty="0">
-              <a:latin typeface="맑은 고딕 Semilight" panose="020B0502040204020203" pitchFamily="50" charset="-127"/>
-              <a:ea typeface="맑은 고딕 Semilight" panose="020B0502040204020203" pitchFamily="50" charset="-127"/>
+              <a:latin typeface="휴먼모음T" panose="02030504000101010101" pitchFamily="18" charset="-127"/>
+              <a:ea typeface="휴먼모음T" panose="02030504000101010101" pitchFamily="18" charset="-127"/>
               <a:cs typeface="맑은 고딕 Semilight" panose="020B0502040204020203" pitchFamily="50" charset="-127"/>
             </a:endParaRPr>
           </a:p>
@@ -13216,79 +13390,79 @@
             </a:pPr>
             <a:r>
               <a:rPr lang="ko-KR" altLang="en-US" sz="1400" dirty="0">
-                <a:latin typeface="맑은 고딕 Semilight" panose="020B0502040204020203" pitchFamily="50" charset="-127"/>
-                <a:ea typeface="맑은 고딕 Semilight" panose="020B0502040204020203" pitchFamily="50" charset="-127"/>
+                <a:latin typeface="휴먼모음T" panose="02030504000101010101" pitchFamily="18" charset="-127"/>
+                <a:ea typeface="휴먼모음T" panose="02030504000101010101" pitchFamily="18" charset="-127"/>
                 <a:cs typeface="맑은 고딕 Semilight" panose="020B0502040204020203" pitchFamily="50" charset="-127"/>
               </a:rPr>
               <a:t>왜곡된 변수를 </a:t>
             </a:r>
             <a:r>
               <a:rPr lang="ko-KR" altLang="en-US" sz="1400" dirty="0" err="1">
-                <a:latin typeface="맑은 고딕 Semilight" panose="020B0502040204020203" pitchFamily="50" charset="-127"/>
-                <a:ea typeface="맑은 고딕 Semilight" panose="020B0502040204020203" pitchFamily="50" charset="-127"/>
+                <a:latin typeface="휴먼모음T" panose="02030504000101010101" pitchFamily="18" charset="-127"/>
+                <a:ea typeface="휴먼모음T" panose="02030504000101010101" pitchFamily="18" charset="-127"/>
                 <a:cs typeface="맑은 고딕 Semilight" panose="020B0502040204020203" pitchFamily="50" charset="-127"/>
               </a:rPr>
               <a:t>전처리하는</a:t>
             </a:r>
             <a:r>
               <a:rPr lang="ko-KR" altLang="en-US" sz="1400" dirty="0">
-                <a:latin typeface="맑은 고딕 Semilight" panose="020B0502040204020203" pitchFamily="50" charset="-127"/>
-                <a:ea typeface="맑은 고딕 Semilight" panose="020B0502040204020203" pitchFamily="50" charset="-127"/>
+                <a:latin typeface="휴먼모음T" panose="02030504000101010101" pitchFamily="18" charset="-127"/>
+                <a:ea typeface="휴먼모음T" panose="02030504000101010101" pitchFamily="18" charset="-127"/>
                 <a:cs typeface="맑은 고딕 Semilight" panose="020B0502040204020203" pitchFamily="50" charset="-127"/>
               </a:rPr>
               <a:t> 방법</a:t>
             </a:r>
             <a:r>
               <a:rPr lang="en-US" altLang="ko-KR" sz="1400" dirty="0">
-                <a:latin typeface="맑은 고딕 Semilight" panose="020B0502040204020203" pitchFamily="50" charset="-127"/>
-                <a:ea typeface="맑은 고딕 Semilight" panose="020B0502040204020203" pitchFamily="50" charset="-127"/>
+                <a:latin typeface="휴먼모음T" panose="02030504000101010101" pitchFamily="18" charset="-127"/>
+                <a:ea typeface="휴먼모음T" panose="02030504000101010101" pitchFamily="18" charset="-127"/>
                 <a:cs typeface="맑은 고딕 Semilight" panose="020B0502040204020203" pitchFamily="50" charset="-127"/>
               </a:rPr>
               <a:t>(3</a:t>
             </a:r>
             <a:r>
               <a:rPr lang="ko-KR" altLang="en-US" sz="1400" dirty="0">
-                <a:latin typeface="맑은 고딕 Semilight" panose="020B0502040204020203" pitchFamily="50" charset="-127"/>
-                <a:ea typeface="맑은 고딕 Semilight" panose="020B0502040204020203" pitchFamily="50" charset="-127"/>
+                <a:latin typeface="휴먼모음T" panose="02030504000101010101" pitchFamily="18" charset="-127"/>
+                <a:ea typeface="휴먼모음T" panose="02030504000101010101" pitchFamily="18" charset="-127"/>
                 <a:cs typeface="맑은 고딕 Semilight" panose="020B0502040204020203" pitchFamily="50" charset="-127"/>
               </a:rPr>
               <a:t>가지</a:t>
             </a:r>
             <a:r>
               <a:rPr lang="en-US" altLang="ko-KR" sz="1400" dirty="0">
-                <a:latin typeface="맑은 고딕 Semilight" panose="020B0502040204020203" pitchFamily="50" charset="-127"/>
-                <a:ea typeface="맑은 고딕 Semilight" panose="020B0502040204020203" pitchFamily="50" charset="-127"/>
+                <a:latin typeface="휴먼모음T" panose="02030504000101010101" pitchFamily="18" charset="-127"/>
+                <a:ea typeface="휴먼모음T" panose="02030504000101010101" pitchFamily="18" charset="-127"/>
                 <a:cs typeface="맑은 고딕 Semilight" panose="020B0502040204020203" pitchFamily="50" charset="-127"/>
               </a:rPr>
               <a:t>)</a:t>
             </a:r>
             <a:r>
               <a:rPr lang="ko-KR" altLang="en-US" sz="1400" dirty="0">
-                <a:latin typeface="맑은 고딕 Semilight" panose="020B0502040204020203" pitchFamily="50" charset="-127"/>
-                <a:ea typeface="맑은 고딕 Semilight" panose="020B0502040204020203" pitchFamily="50" charset="-127"/>
+                <a:latin typeface="휴먼모음T" panose="02030504000101010101" pitchFamily="18" charset="-127"/>
+                <a:ea typeface="휴먼모음T" panose="02030504000101010101" pitchFamily="18" charset="-127"/>
                 <a:cs typeface="맑은 고딕 Semilight" panose="020B0502040204020203" pitchFamily="50" charset="-127"/>
               </a:rPr>
               <a:t>을 통해 </a:t>
             </a:r>
             <a:r>
               <a:rPr lang="en-US" altLang="ko-KR" sz="1400" dirty="0">
-                <a:latin typeface="맑은 고딕 Semilight" panose="020B0502040204020203" pitchFamily="50" charset="-127"/>
-                <a:ea typeface="맑은 고딕 Semilight" panose="020B0502040204020203" pitchFamily="50" charset="-127"/>
+                <a:latin typeface="휴먼모음T" panose="02030504000101010101" pitchFamily="18" charset="-127"/>
+                <a:ea typeface="휴먼모음T" panose="02030504000101010101" pitchFamily="18" charset="-127"/>
                 <a:cs typeface="맑은 고딕 Semilight" panose="020B0502040204020203" pitchFamily="50" charset="-127"/>
               </a:rPr>
               <a:t>histogram</a:t>
             </a:r>
             <a:r>
               <a:rPr lang="ko-KR" altLang="en-US" sz="1400" dirty="0">
-                <a:latin typeface="맑은 고딕 Semilight" panose="020B0502040204020203" pitchFamily="50" charset="-127"/>
-                <a:ea typeface="맑은 고딕 Semilight" panose="020B0502040204020203" pitchFamily="50" charset="-127"/>
+                <a:latin typeface="휴먼모음T" panose="02030504000101010101" pitchFamily="18" charset="-127"/>
+                <a:ea typeface="휴먼모음T" panose="02030504000101010101" pitchFamily="18" charset="-127"/>
                 <a:cs typeface="맑은 고딕 Semilight" panose="020B0502040204020203" pitchFamily="50" charset="-127"/>
               </a:rPr>
               <a:t> 만들기</a:t>
             </a:r>
             <a:endParaRPr lang="en-US" altLang="ko-KR" sz="1400" dirty="0">
-              <a:latin typeface="맑은 고딕 Semilight" panose="020B0502040204020203" pitchFamily="50" charset="-127"/>
-              <a:ea typeface="맑은 고딕 Semilight" panose="020B0502040204020203" pitchFamily="50" charset="-127"/>
+              <a:latin typeface="휴먼모음T" panose="02030504000101010101" pitchFamily="18" charset="-127"/>
+              <a:ea typeface="휴먼모음T" panose="02030504000101010101" pitchFamily="18" charset="-127"/>
               <a:cs typeface="맑은 고딕 Semilight" panose="020B0502040204020203" pitchFamily="50" charset="-127"/>
             </a:endParaRPr>
           </a:p>
@@ -13299,11 +13473,17 @@
               </a:lnSpc>
             </a:pPr>
             <a:r>
-              <a:rPr lang="ko-KR" altLang="en-US" sz="1400" dirty="0"/>
+              <a:rPr lang="ko-KR" altLang="en-US" sz="1400" dirty="0">
+                <a:latin typeface="휴먼모음T" panose="02030504000101010101" pitchFamily="18" charset="-127"/>
+                <a:ea typeface="휴먼모음T" panose="02030504000101010101" pitchFamily="18" charset="-127"/>
+              </a:rPr>
               <a:t>① 로그 변환 </a:t>
             </a:r>
             <a:r>
-              <a:rPr lang="en-US" altLang="ko-KR" sz="1400" dirty="0"/>
+              <a:rPr lang="en-US" altLang="ko-KR" sz="1400" dirty="0">
+                <a:latin typeface="휴먼모음T" panose="02030504000101010101" pitchFamily="18" charset="-127"/>
+                <a:ea typeface="휴먼모음T" panose="02030504000101010101" pitchFamily="18" charset="-127"/>
+              </a:rPr>
               <a:t>(Log Transformation)</a:t>
             </a:r>
           </a:p>
@@ -13314,11 +13494,17 @@
               </a:lnSpc>
             </a:pPr>
             <a:r>
-              <a:rPr lang="ko-KR" altLang="en-US" sz="1400" dirty="0"/>
+              <a:rPr lang="ko-KR" altLang="en-US" sz="1400" dirty="0">
+                <a:latin typeface="휴먼모음T" panose="02030504000101010101" pitchFamily="18" charset="-127"/>
+                <a:ea typeface="휴먼모음T" panose="02030504000101010101" pitchFamily="18" charset="-127"/>
+              </a:rPr>
               <a:t>② 루트 변환 </a:t>
             </a:r>
             <a:r>
-              <a:rPr lang="en-US" altLang="ko-KR" sz="1400" dirty="0"/>
+              <a:rPr lang="en-US" altLang="ko-KR" sz="1400" dirty="0">
+                <a:latin typeface="휴먼모음T" panose="02030504000101010101" pitchFamily="18" charset="-127"/>
+                <a:ea typeface="휴먼모음T" panose="02030504000101010101" pitchFamily="18" charset="-127"/>
+              </a:rPr>
               <a:t>(Square Root Transformation)</a:t>
             </a:r>
           </a:p>
@@ -13329,28 +13515,43 @@
               </a:lnSpc>
             </a:pPr>
             <a:r>
-              <a:rPr lang="ko-KR" altLang="en-US" sz="1400" dirty="0"/>
+              <a:rPr lang="ko-KR" altLang="en-US" sz="1400" dirty="0">
+                <a:latin typeface="휴먼모음T" panose="02030504000101010101" pitchFamily="18" charset="-127"/>
+                <a:ea typeface="휴먼모음T" panose="02030504000101010101" pitchFamily="18" charset="-127"/>
+              </a:rPr>
               <a:t>③ 박스</a:t>
             </a:r>
             <a:r>
-              <a:rPr lang="en-US" altLang="ko-KR" sz="1400" dirty="0"/>
+              <a:rPr lang="en-US" altLang="ko-KR" sz="1400" dirty="0">
+                <a:latin typeface="휴먼모음T" panose="02030504000101010101" pitchFamily="18" charset="-127"/>
+                <a:ea typeface="휴먼모음T" panose="02030504000101010101" pitchFamily="18" charset="-127"/>
+              </a:rPr>
               <a:t>-</a:t>
             </a:r>
             <a:r>
-              <a:rPr lang="ko-KR" altLang="en-US" sz="1400" dirty="0" err="1"/>
+              <a:rPr lang="ko-KR" altLang="en-US" sz="1400" dirty="0" err="1">
+                <a:latin typeface="휴먼모음T" panose="02030504000101010101" pitchFamily="18" charset="-127"/>
+                <a:ea typeface="휴먼모음T" panose="02030504000101010101" pitchFamily="18" charset="-127"/>
+              </a:rPr>
               <a:t>콕스</a:t>
             </a:r>
             <a:r>
-              <a:rPr lang="ko-KR" altLang="en-US" sz="1400" dirty="0"/>
+              <a:rPr lang="ko-KR" altLang="en-US" sz="1400" dirty="0">
+                <a:latin typeface="휴먼모음T" panose="02030504000101010101" pitchFamily="18" charset="-127"/>
+                <a:ea typeface="휴먼모음T" panose="02030504000101010101" pitchFamily="18" charset="-127"/>
+              </a:rPr>
               <a:t> 변환 </a:t>
             </a:r>
             <a:r>
-              <a:rPr lang="en-US" altLang="ko-KR" sz="1400" dirty="0"/>
+              <a:rPr lang="en-US" altLang="ko-KR" sz="1400" dirty="0">
+                <a:latin typeface="휴먼모음T" panose="02030504000101010101" pitchFamily="18" charset="-127"/>
+                <a:ea typeface="휴먼모음T" panose="02030504000101010101" pitchFamily="18" charset="-127"/>
+              </a:rPr>
               <a:t>(Box-Cox Transformation)</a:t>
             </a:r>
             <a:endParaRPr lang="en-US" altLang="ko-KR" sz="1400" dirty="0">
-              <a:latin typeface="맑은 고딕 Semilight" panose="020B0502040204020203" pitchFamily="50" charset="-127"/>
-              <a:ea typeface="맑은 고딕 Semilight" panose="020B0502040204020203" pitchFamily="50" charset="-127"/>
+              <a:latin typeface="휴먼모음T" panose="02030504000101010101" pitchFamily="18" charset="-127"/>
+              <a:ea typeface="휴먼모음T" panose="02030504000101010101" pitchFamily="18" charset="-127"/>
               <a:cs typeface="맑은 고딕 Semilight" panose="020B0502040204020203" pitchFamily="50" charset="-127"/>
             </a:endParaRPr>
           </a:p>
@@ -13394,18 +13595,30 @@
               <a:buChar char="v"/>
             </a:pPr>
             <a:r>
-              <a:rPr lang="ko-KR" altLang="en-US" sz="1600" dirty="0"/>
+              <a:rPr lang="ko-KR" altLang="en-US" sz="1600" dirty="0">
+                <a:latin typeface="휴먼모음T" panose="02030504000101010101" pitchFamily="18" charset="-127"/>
+                <a:ea typeface="휴먼모음T" panose="02030504000101010101" pitchFamily="18" charset="-127"/>
+              </a:rPr>
               <a:t>본격적인 모델링이나 가설 검정에 들어가기 전</a:t>
             </a:r>
             <a:r>
-              <a:rPr lang="en-US" altLang="ko-KR" sz="1600" dirty="0"/>
+              <a:rPr lang="en-US" altLang="ko-KR" sz="1600" dirty="0">
+                <a:latin typeface="휴먼모음T" panose="02030504000101010101" pitchFamily="18" charset="-127"/>
+                <a:ea typeface="휴먼모음T" panose="02030504000101010101" pitchFamily="18" charset="-127"/>
+              </a:rPr>
               <a:t>, </a:t>
             </a:r>
             <a:r>
-              <a:rPr lang="ko-KR" altLang="en-US" sz="1600" dirty="0"/>
+              <a:rPr lang="ko-KR" altLang="en-US" sz="1600" dirty="0">
+                <a:latin typeface="휴먼모음T" panose="02030504000101010101" pitchFamily="18" charset="-127"/>
+                <a:ea typeface="휴먼모음T" panose="02030504000101010101" pitchFamily="18" charset="-127"/>
+              </a:rPr>
               <a:t>데이터를 다각도로 관찰하여 데이터의 특징을 이해하는 과정</a:t>
             </a:r>
-            <a:endParaRPr lang="en-US" altLang="ko-KR" sz="1600" dirty="0"/>
+            <a:endParaRPr lang="en-US" altLang="ko-KR" sz="1600" dirty="0">
+              <a:latin typeface="휴먼모음T" panose="02030504000101010101" pitchFamily="18" charset="-127"/>
+              <a:ea typeface="휴먼모음T" panose="02030504000101010101" pitchFamily="18" charset="-127"/>
+            </a:endParaRPr>
           </a:p>
           <a:p>
             <a:pPr marL="285750" indent="-285750">
@@ -13416,42 +13629,72 @@
               <a:buChar char="v"/>
             </a:pPr>
             <a:r>
-              <a:rPr lang="ko-KR" altLang="en-US" sz="1600" dirty="0"/>
+              <a:rPr lang="ko-KR" altLang="en-US" sz="1600" dirty="0">
+                <a:latin typeface="휴먼모음T" panose="02030504000101010101" pitchFamily="18" charset="-127"/>
+                <a:ea typeface="휴먼모음T" panose="02030504000101010101" pitchFamily="18" charset="-127"/>
+              </a:rPr>
               <a:t>마치 요리를 하기 전 재료의 상태</a:t>
             </a:r>
             <a:r>
-              <a:rPr lang="en-US" altLang="ko-KR" sz="1600" dirty="0"/>
+              <a:rPr lang="en-US" altLang="ko-KR" sz="1600" dirty="0">
+                <a:latin typeface="휴먼모음T" panose="02030504000101010101" pitchFamily="18" charset="-127"/>
+                <a:ea typeface="휴먼모음T" panose="02030504000101010101" pitchFamily="18" charset="-127"/>
+              </a:rPr>
               <a:t>(</a:t>
             </a:r>
             <a:r>
-              <a:rPr lang="ko-KR" altLang="en-US" sz="1600" dirty="0"/>
+              <a:rPr lang="ko-KR" altLang="en-US" sz="1600" dirty="0">
+                <a:latin typeface="휴먼모음T" panose="02030504000101010101" pitchFamily="18" charset="-127"/>
+                <a:ea typeface="휴먼모음T" panose="02030504000101010101" pitchFamily="18" charset="-127"/>
+              </a:rPr>
               <a:t>신선도</a:t>
             </a:r>
             <a:r>
-              <a:rPr lang="en-US" altLang="ko-KR" sz="1600" dirty="0"/>
+              <a:rPr lang="en-US" altLang="ko-KR" sz="1600" dirty="0">
+                <a:latin typeface="휴먼모음T" panose="02030504000101010101" pitchFamily="18" charset="-127"/>
+                <a:ea typeface="휴먼모음T" panose="02030504000101010101" pitchFamily="18" charset="-127"/>
+              </a:rPr>
               <a:t>, </a:t>
             </a:r>
             <a:r>
-              <a:rPr lang="ko-KR" altLang="en-US" sz="1600" dirty="0"/>
+              <a:rPr lang="ko-KR" altLang="en-US" sz="1600" dirty="0">
+                <a:latin typeface="휴먼모음T" panose="02030504000101010101" pitchFamily="18" charset="-127"/>
+                <a:ea typeface="휴먼모음T" panose="02030504000101010101" pitchFamily="18" charset="-127"/>
+              </a:rPr>
               <a:t>양</a:t>
             </a:r>
             <a:r>
-              <a:rPr lang="en-US" altLang="ko-KR" sz="1600" dirty="0"/>
+              <a:rPr lang="en-US" altLang="ko-KR" sz="1600" dirty="0">
+                <a:latin typeface="휴먼모음T" panose="02030504000101010101" pitchFamily="18" charset="-127"/>
+                <a:ea typeface="휴먼모음T" panose="02030504000101010101" pitchFamily="18" charset="-127"/>
+              </a:rPr>
               <a:t>, </a:t>
             </a:r>
             <a:r>
-              <a:rPr lang="ko-KR" altLang="en-US" sz="1600" dirty="0"/>
+              <a:rPr lang="ko-KR" altLang="en-US" sz="1600" dirty="0">
+                <a:latin typeface="휴먼모음T" panose="02030504000101010101" pitchFamily="18" charset="-127"/>
+                <a:ea typeface="휴먼모음T" panose="02030504000101010101" pitchFamily="18" charset="-127"/>
+              </a:rPr>
               <a:t>종류</a:t>
             </a:r>
             <a:r>
-              <a:rPr lang="en-US" altLang="ko-KR" sz="1600" dirty="0"/>
+              <a:rPr lang="en-US" altLang="ko-KR" sz="1600" dirty="0">
+                <a:latin typeface="휴먼모음T" panose="02030504000101010101" pitchFamily="18" charset="-127"/>
+                <a:ea typeface="휴먼모음T" panose="02030504000101010101" pitchFamily="18" charset="-127"/>
+              </a:rPr>
               <a:t>)</a:t>
             </a:r>
             <a:r>
-              <a:rPr lang="ko-KR" altLang="en-US" sz="1600" dirty="0"/>
+              <a:rPr lang="ko-KR" altLang="en-US" sz="1600" dirty="0">
+                <a:latin typeface="휴먼모음T" panose="02030504000101010101" pitchFamily="18" charset="-127"/>
+                <a:ea typeface="휴먼모음T" panose="02030504000101010101" pitchFamily="18" charset="-127"/>
+              </a:rPr>
               <a:t>를 꼼꼼히 살피는 것</a:t>
             </a:r>
-            <a:endParaRPr lang="en-US" altLang="ko-KR" sz="1600" dirty="0"/>
+            <a:endParaRPr lang="en-US" altLang="ko-KR" sz="1600" dirty="0">
+              <a:latin typeface="휴먼모음T" panose="02030504000101010101" pitchFamily="18" charset="-127"/>
+              <a:ea typeface="휴먼모음T" panose="02030504000101010101" pitchFamily="18" charset="-127"/>
+            </a:endParaRPr>
           </a:p>
           <a:p>
             <a:pPr marL="285750" indent="-285750">
@@ -13462,24 +13705,36 @@
               <a:buChar char="v"/>
             </a:pPr>
             <a:r>
-              <a:rPr lang="en-US" altLang="ko-KR" sz="1600" dirty="0" err="1"/>
+              <a:rPr lang="en-US" altLang="ko-KR" sz="1600" dirty="0" err="1">
+                <a:latin typeface="휴먼모음T" panose="02030504000101010101" pitchFamily="18" charset="-127"/>
+                <a:ea typeface="휴먼모음T" panose="02030504000101010101" pitchFamily="18" charset="-127"/>
+              </a:rPr>
               <a:t>gemini</a:t>
             </a:r>
             <a:r>
-              <a:rPr lang="ko-KR" altLang="en-US" sz="1600" dirty="0"/>
+              <a:rPr lang="ko-KR" altLang="en-US" sz="1600" dirty="0">
+                <a:latin typeface="휴먼모음T" panose="02030504000101010101" pitchFamily="18" charset="-127"/>
+                <a:ea typeface="휴먼모음T" panose="02030504000101010101" pitchFamily="18" charset="-127"/>
+              </a:rPr>
               <a:t> </a:t>
             </a:r>
             <a:r>
-              <a:rPr lang="en-US" altLang="ko-KR" sz="1600" dirty="0"/>
+              <a:rPr lang="en-US" altLang="ko-KR" sz="1600" dirty="0">
+                <a:latin typeface="휴먼모음T" panose="02030504000101010101" pitchFamily="18" charset="-127"/>
+                <a:ea typeface="휴먼모음T" panose="02030504000101010101" pitchFamily="18" charset="-127"/>
+              </a:rPr>
               <a:t>canvas</a:t>
             </a:r>
             <a:r>
-              <a:rPr lang="ko-KR" altLang="en-US" sz="1600" dirty="0"/>
+              <a:rPr lang="ko-KR" altLang="en-US" sz="1600" dirty="0">
+                <a:latin typeface="휴먼모음T" panose="02030504000101010101" pitchFamily="18" charset="-127"/>
+                <a:ea typeface="휴먼모음T" panose="02030504000101010101" pitchFamily="18" charset="-127"/>
+              </a:rPr>
               <a:t> 기능을 사용하여 보고서 작성하라</a:t>
             </a:r>
             <a:endParaRPr lang="en-US" altLang="ko-KR" sz="1600" dirty="0">
-              <a:latin typeface="맑은 고딕 Semilight" panose="020B0502040204020203" pitchFamily="50" charset="-127"/>
-              <a:ea typeface="맑은 고딕 Semilight" panose="020B0502040204020203" pitchFamily="50" charset="-127"/>
+              <a:latin typeface="휴먼모음T" panose="02030504000101010101" pitchFamily="18" charset="-127"/>
+              <a:ea typeface="휴먼모음T" panose="02030504000101010101" pitchFamily="18" charset="-127"/>
               <a:cs typeface="맑은 고딕 Semilight" panose="020B0502040204020203" pitchFamily="50" charset="-127"/>
             </a:endParaRPr>
           </a:p>
@@ -13590,7 +13845,7 @@
         <p:spPr>
           <a:xfrm>
             <a:off x="1989956" y="3573016"/>
-            <a:ext cx="7560840" cy="707886"/>
+            <a:ext cx="8928992" cy="707886"/>
           </a:xfrm>
           <a:prstGeom prst="rect">
             <a:avLst/>
@@ -13625,6 +13880,38 @@
                 <a:cs typeface="ADLaM Display" panose="02010000000000000000" pitchFamily="2" charset="0"/>
               </a:rPr>
               <a:t>Analysis</a:t>
+            </a:r>
+            <a:r>
+              <a:rPr lang="en-US" altLang="ko-KR" sz="2400" dirty="0">
+                <a:latin typeface="ADLaM Display" panose="02010000000000000000" pitchFamily="2" charset="0"/>
+                <a:ea typeface="ADLaM Display" panose="02010000000000000000" pitchFamily="2" charset="0"/>
+                <a:cs typeface="ADLaM Display" panose="02010000000000000000" pitchFamily="2" charset="0"/>
+              </a:rPr>
+              <a:t>(</a:t>
+            </a:r>
+            <a:r>
+              <a:rPr lang="ko-KR" altLang="en-US" sz="2400" dirty="0" err="1">
+                <a:latin typeface="ADLaM Display" panose="02010000000000000000" pitchFamily="2" charset="0"/>
+                <a:ea typeface="ADLaM Display" panose="02010000000000000000" pitchFamily="2" charset="0"/>
+                <a:cs typeface="ADLaM Display" panose="02010000000000000000" pitchFamily="2" charset="0"/>
+              </a:rPr>
+              <a:t>다변량</a:t>
+            </a:r>
+            <a:r>
+              <a:rPr lang="ko-KR" altLang="en-US" sz="2400" dirty="0">
+                <a:latin typeface="ADLaM Display" panose="02010000000000000000" pitchFamily="2" charset="0"/>
+                <a:ea typeface="ADLaM Display" panose="02010000000000000000" pitchFamily="2" charset="0"/>
+                <a:cs typeface="ADLaM Display" panose="02010000000000000000" pitchFamily="2" charset="0"/>
+              </a:rPr>
+              <a:t> 분석</a:t>
+            </a:r>
+            <a:r>
+              <a:rPr lang="en-US" altLang="ko-KR" sz="2400" dirty="0">
+                <a:latin typeface="ADLaM Display" panose="02010000000000000000" pitchFamily="2" charset="0"/>
+                <a:ea typeface="ADLaM Display" panose="02010000000000000000" pitchFamily="2" charset="0"/>
+                <a:cs typeface="ADLaM Display" panose="02010000000000000000" pitchFamily="2" charset="0"/>
+              </a:rPr>
+              <a:t>)</a:t>
             </a:r>
             <a:endParaRPr lang="ko-KR" altLang="en-US" sz="4000" dirty="0">
               <a:latin typeface="ADLaM Display" panose="02010000000000000000" pitchFamily="2" charset="0"/>
@@ -14382,7 +14669,7 @@
           <a:lstStyle/>
           <a:p>
             <a:r>
-              <a:rPr lang="ko-KR" altLang="en-US" sz="3200" b="1"/>
+              <a:rPr lang="ko-KR" altLang="en-US" sz="3200" b="1" dirty="0"/>
               <a:t>문제 풀이</a:t>
             </a:r>
           </a:p>
@@ -14552,12 +14839,360 @@
           </a:p>
         </p:txBody>
       </p:sp>
+      <p:sp>
+        <p:nvSpPr>
+          <p:cNvPr id="3" name="TextBox 2">
+            <a:extLst>
+              <a:ext uri="{FF2B5EF4-FFF2-40B4-BE49-F238E27FC236}">
+                <a16:creationId xmlns:a16="http://schemas.microsoft.com/office/drawing/2014/main" id="{E6EFABEB-78B2-B23E-2790-1B3F29C1E80E}"/>
+              </a:ext>
+            </a:extLst>
+          </p:cNvPr>
+          <p:cNvSpPr txBox="1"/>
+          <p:nvPr/>
+        </p:nvSpPr>
+        <p:spPr>
+          <a:xfrm>
+            <a:off x="909836" y="875966"/>
+            <a:ext cx="10945216" cy="564322"/>
+          </a:xfrm>
+          <a:prstGeom prst="rect">
+            <a:avLst/>
+          </a:prstGeom>
+          <a:noFill/>
+        </p:spPr>
+        <p:txBody>
+          <a:bodyPr wrap="square" rtlCol="0">
+            <a:spAutoFit/>
+          </a:bodyPr>
+          <a:lstStyle/>
+          <a:p>
+            <a:pPr marL="285750" indent="-285750">
+              <a:lnSpc>
+                <a:spcPct val="200000"/>
+              </a:lnSpc>
+              <a:buFont typeface="Wingdings" panose="05000000000000000000" pitchFamily="2" charset="2"/>
+              <a:buChar char="v"/>
+            </a:pPr>
+            <a:r>
+              <a:rPr lang="ko-KR" altLang="en-US" dirty="0"/>
+              <a:t>통계량</a:t>
+            </a:r>
+            <a:r>
+              <a:rPr lang="en-US" altLang="ko-KR" dirty="0"/>
+              <a:t>(Statistic)</a:t>
+            </a:r>
+            <a:r>
+              <a:rPr lang="ko-KR" altLang="en-US" dirty="0"/>
+              <a:t>을 이해하지 못하면 시각화는 하지 마라</a:t>
+            </a:r>
+          </a:p>
+        </p:txBody>
+      </p:sp>
+      <p:pic>
+        <p:nvPicPr>
+          <p:cNvPr id="8" name="Picture 2">
+            <a:extLst>
+              <a:ext uri="{FF2B5EF4-FFF2-40B4-BE49-F238E27FC236}">
+                <a16:creationId xmlns:a16="http://schemas.microsoft.com/office/drawing/2014/main" id="{252B00A0-9CCA-2DC8-5D52-7E4F521D40B7}"/>
+              </a:ext>
+            </a:extLst>
+          </p:cNvPr>
+          <p:cNvPicPr>
+            <a:picLocks noChangeAspect="1" noChangeArrowheads="1"/>
+          </p:cNvPicPr>
+          <p:nvPr/>
+        </p:nvPicPr>
+        <p:blipFill>
+          <a:blip r:embed="rId3">
+            <a:extLst>
+              <a:ext uri="{28A0092B-C50C-407E-A947-70E740481C1C}">
+                <a14:useLocalDpi xmlns:a14="http://schemas.microsoft.com/office/drawing/2010/main" val="0"/>
+              </a:ext>
+            </a:extLst>
+          </a:blip>
+          <a:srcRect/>
+          <a:stretch>
+            <a:fillRect/>
+          </a:stretch>
+        </p:blipFill>
+        <p:spPr bwMode="auto">
+          <a:xfrm>
+            <a:off x="1269876" y="1503630"/>
+            <a:ext cx="6005581" cy="5301208"/>
+          </a:xfrm>
+          <a:prstGeom prst="rect">
+            <a:avLst/>
+          </a:prstGeom>
+          <a:noFill/>
+          <a:extLst>
+            <a:ext uri="{909E8E84-426E-40DD-AFC4-6F175D3DCCD1}">
+              <a14:hiddenFill xmlns:a14="http://schemas.microsoft.com/office/drawing/2010/main">
+                <a:solidFill>
+                  <a:srgbClr val="FFFFFF"/>
+                </a:solidFill>
+              </a14:hiddenFill>
+            </a:ext>
+          </a:extLst>
+        </p:spPr>
+      </p:pic>
+      <p:sp>
+        <p:nvSpPr>
+          <p:cNvPr id="10" name="TextBox 9">
+            <a:extLst>
+              <a:ext uri="{FF2B5EF4-FFF2-40B4-BE49-F238E27FC236}">
+                <a16:creationId xmlns:a16="http://schemas.microsoft.com/office/drawing/2014/main" id="{1007407D-3A2F-D569-3261-4544F333AD66}"/>
+              </a:ext>
+            </a:extLst>
+          </p:cNvPr>
+          <p:cNvSpPr txBox="1"/>
+          <p:nvPr/>
+        </p:nvSpPr>
+        <p:spPr>
+          <a:xfrm>
+            <a:off x="8398668" y="2132856"/>
+            <a:ext cx="3600400" cy="1713995"/>
+          </a:xfrm>
+          <a:prstGeom prst="rect">
+            <a:avLst/>
+          </a:prstGeom>
+          <a:noFill/>
+        </p:spPr>
+        <p:txBody>
+          <a:bodyPr wrap="square" rtlCol="0">
+            <a:spAutoFit/>
+          </a:bodyPr>
+          <a:lstStyle/>
+          <a:p>
+            <a:pPr marL="285750" indent="-285750">
+              <a:lnSpc>
+                <a:spcPct val="150000"/>
+              </a:lnSpc>
+              <a:buFont typeface="Wingdings" panose="05000000000000000000" pitchFamily="2" charset="2"/>
+              <a:buChar char="v"/>
+            </a:pPr>
+            <a:r>
+              <a:rPr lang="en-US" altLang="ko-KR" dirty="0" err="1">
+                <a:latin typeface="휴먼모음T" panose="02030504000101010101" pitchFamily="18" charset="-127"/>
+                <a:ea typeface="휴먼모음T" panose="02030504000101010101" pitchFamily="18" charset="-127"/>
+                <a:hlinkClick r:id="rId4">
+                  <a:extLst>
+                    <a:ext uri="{A12FA001-AC4F-418D-AE19-62706E023703}">
+                      <ahyp:hlinkClr xmlns:ahyp="http://schemas.microsoft.com/office/drawing/2018/hyperlinkcolor" val="tx"/>
+                    </a:ext>
+                  </a:extLst>
+                </a:hlinkClick>
+              </a:rPr>
+              <a:t>scatterplot_matrix</a:t>
+            </a:r>
+            <a:endParaRPr lang="en-US" altLang="ko-KR" dirty="0">
+              <a:latin typeface="휴먼모음T" panose="02030504000101010101" pitchFamily="18" charset="-127"/>
+              <a:ea typeface="휴먼모음T" panose="02030504000101010101" pitchFamily="18" charset="-127"/>
+            </a:endParaRPr>
+          </a:p>
+          <a:p>
+            <a:pPr marL="285750" indent="-285750">
+              <a:lnSpc>
+                <a:spcPct val="150000"/>
+              </a:lnSpc>
+              <a:buFont typeface="Wingdings" panose="05000000000000000000" pitchFamily="2" charset="2"/>
+              <a:buChar char="v"/>
+            </a:pPr>
+            <a:endParaRPr lang="en-US" altLang="ko-KR" dirty="0">
+              <a:latin typeface="휴먼모음T" panose="02030504000101010101" pitchFamily="18" charset="-127"/>
+              <a:ea typeface="휴먼모음T" panose="02030504000101010101" pitchFamily="18" charset="-127"/>
+            </a:endParaRPr>
+          </a:p>
+          <a:p>
+            <a:pPr marL="285750" indent="-285750">
+              <a:lnSpc>
+                <a:spcPct val="150000"/>
+              </a:lnSpc>
+              <a:buFont typeface="Wingdings" panose="05000000000000000000" pitchFamily="2" charset="2"/>
+              <a:buChar char="v"/>
+            </a:pPr>
+            <a:r>
+              <a:rPr lang="en-US" altLang="ko-KR" dirty="0">
+                <a:latin typeface="휴먼모음T" panose="02030504000101010101" pitchFamily="18" charset="-127"/>
+                <a:ea typeface="휴먼모음T" panose="02030504000101010101" pitchFamily="18" charset="-127"/>
+              </a:rPr>
+              <a:t>3</a:t>
+            </a:r>
+            <a:r>
+              <a:rPr lang="ko-KR" altLang="en-US" dirty="0">
+                <a:latin typeface="휴먼모음T" panose="02030504000101010101" pitchFamily="18" charset="-127"/>
+                <a:ea typeface="휴먼모음T" panose="02030504000101010101" pitchFamily="18" charset="-127"/>
+              </a:rPr>
+              <a:t>가지 </a:t>
+            </a:r>
+            <a:r>
+              <a:rPr lang="ko-KR" altLang="en-US" dirty="0" err="1">
+                <a:latin typeface="휴먼모음T" panose="02030504000101010101" pitchFamily="18" charset="-127"/>
+                <a:ea typeface="휴먼모음T" panose="02030504000101010101" pitchFamily="18" charset="-127"/>
+              </a:rPr>
+              <a:t>팽귄</a:t>
+            </a:r>
+            <a:r>
+              <a:rPr lang="ko-KR" altLang="en-US" dirty="0">
+                <a:latin typeface="휴먼모음T" panose="02030504000101010101" pitchFamily="18" charset="-127"/>
+                <a:ea typeface="휴먼모음T" panose="02030504000101010101" pitchFamily="18" charset="-127"/>
+              </a:rPr>
+              <a:t> 종류를 분류하기에 가장 적합한 변수는</a:t>
+            </a:r>
+            <a:r>
+              <a:rPr lang="en-US" altLang="ko-KR" dirty="0">
+                <a:latin typeface="휴먼모음T" panose="02030504000101010101" pitchFamily="18" charset="-127"/>
+                <a:ea typeface="휴먼모음T" panose="02030504000101010101" pitchFamily="18" charset="-127"/>
+              </a:rPr>
+              <a:t>?</a:t>
+            </a:r>
+            <a:endParaRPr lang="ko-KR" altLang="en-US" dirty="0">
+              <a:latin typeface="휴먼모음T" panose="02030504000101010101" pitchFamily="18" charset="-127"/>
+              <a:ea typeface="휴먼모음T" panose="02030504000101010101" pitchFamily="18" charset="-127"/>
+            </a:endParaRPr>
+          </a:p>
+        </p:txBody>
+      </p:sp>
+    </p:spTree>
+    <p:extLst>
+      <p:ext uri="{BB962C8B-B14F-4D97-AF65-F5344CB8AC3E}">
+        <p14:creationId xmlns:p14="http://schemas.microsoft.com/office/powerpoint/2010/main" val="4105585802"/>
+      </p:ext>
+    </p:extLst>
+  </p:cSld>
+  <p:clrMapOvr>
+    <a:masterClrMapping/>
+  </p:clrMapOvr>
+  <mc:AlternateContent xmlns:mc="http://schemas.openxmlformats.org/markup-compatibility/2006" xmlns:p14="http://schemas.microsoft.com/office/powerpoint/2010/main">
+    <mc:Choice Requires="p14">
+      <p:transition spd="med" p14:dur="700">
+        <p:fade/>
+      </p:transition>
+    </mc:Choice>
+    <mc:Fallback xmlns="">
+      <p:transition spd="med">
+        <p:fade/>
+      </p:transition>
+    </mc:Fallback>
+  </mc:AlternateContent>
+</p:sld>
+</file>
+
+<file path=ppt/slides/slide39.xml><?xml version="1.0" encoding="utf-8"?>
+<p:sld xmlns:a="http://schemas.openxmlformats.org/drawingml/2006/main" xmlns:r="http://schemas.openxmlformats.org/officeDocument/2006/relationships" xmlns:p="http://schemas.openxmlformats.org/presentationml/2006/main">
+  <p:cSld>
+    <p:spTree>
+      <p:nvGrpSpPr>
+        <p:cNvPr id="1" name="">
+          <a:extLst>
+            <a:ext uri="{FF2B5EF4-FFF2-40B4-BE49-F238E27FC236}">
+              <a16:creationId xmlns:a16="http://schemas.microsoft.com/office/drawing/2014/main" id="{504D16F6-7474-0121-A593-4FFCAB276AF0}"/>
+            </a:ext>
+          </a:extLst>
+        </p:cNvPr>
+        <p:cNvGrpSpPr/>
+        <p:nvPr/>
+      </p:nvGrpSpPr>
+      <p:grpSpPr>
+        <a:xfrm>
+          <a:off x="0" y="0"/>
+          <a:ext cx="0" cy="0"/>
+          <a:chOff x="0" y="0"/>
+          <a:chExt cx="0" cy="0"/>
+        </a:xfrm>
+      </p:grpSpPr>
+      <p:sp>
+        <p:nvSpPr>
+          <p:cNvPr id="2" name="슬라이드 번호 개체 틀 1">
+            <a:extLst>
+              <a:ext uri="{FF2B5EF4-FFF2-40B4-BE49-F238E27FC236}">
+                <a16:creationId xmlns:a16="http://schemas.microsoft.com/office/drawing/2014/main" id="{A9F9F47C-27FD-9CEF-3979-F65879F2E933}"/>
+              </a:ext>
+            </a:extLst>
+          </p:cNvPr>
+          <p:cNvSpPr>
+            <a:spLocks noGrp="1"/>
+          </p:cNvSpPr>
+          <p:nvPr>
+            <p:ph type="sldNum" sz="quarter" idx="12"/>
+          </p:nvPr>
+        </p:nvSpPr>
+        <p:spPr/>
+        <p:txBody>
+          <a:bodyPr/>
+          <a:lstStyle/>
+          <a:p>
+            <a:pPr rtl="0"/>
+            <a:fld id="{A3F31473-23EB-4724-8B59-FE6D21D89FA4}" type="slidenum">
+              <a:rPr lang="en-US" altLang="ko-KR" noProof="0" smtClean="0"/>
+              <a:t>39</a:t>
+            </a:fld>
+            <a:endParaRPr lang="en-US" altLang="ko-KR" noProof="0" dirty="0"/>
+          </a:p>
+        </p:txBody>
+      </p:sp>
+      <p:sp>
+        <p:nvSpPr>
+          <p:cNvPr id="9" name="TextBox 8">
+            <a:extLst>
+              <a:ext uri="{FF2B5EF4-FFF2-40B4-BE49-F238E27FC236}">
+                <a16:creationId xmlns:a16="http://schemas.microsoft.com/office/drawing/2014/main" id="{972F220C-21BC-1459-94F6-3A6F69259CDA}"/>
+              </a:ext>
+            </a:extLst>
+          </p:cNvPr>
+          <p:cNvSpPr txBox="1"/>
+          <p:nvPr/>
+        </p:nvSpPr>
+        <p:spPr>
+          <a:xfrm>
+            <a:off x="117748" y="260648"/>
+            <a:ext cx="10729192" cy="584775"/>
+          </a:xfrm>
+          <a:prstGeom prst="rect">
+            <a:avLst/>
+          </a:prstGeom>
+          <a:noFill/>
+        </p:spPr>
+        <p:txBody>
+          <a:bodyPr wrap="square" rtlCol="0">
+            <a:spAutoFit/>
+          </a:bodyPr>
+          <a:lstStyle/>
+          <a:p>
+            <a:r>
+              <a:rPr lang="ko-KR" altLang="en-US" sz="3200" b="1" dirty="0"/>
+              <a:t>문제 풀이</a:t>
+            </a:r>
+            <a:r>
+              <a:rPr lang="en-US" altLang="ko-KR" sz="3200" b="1" dirty="0"/>
+              <a:t>(</a:t>
+            </a:r>
+            <a:r>
+              <a:rPr lang="ko-KR" altLang="en-US" sz="3200" b="1" dirty="0"/>
+              <a:t>시각화</a:t>
+            </a:r>
+            <a:r>
+              <a:rPr lang="en-US" altLang="ko-KR" sz="3200" b="1" dirty="0"/>
+              <a:t>, Data </a:t>
+            </a:r>
+            <a:r>
+              <a:rPr lang="en-US" altLang="ko-KR" sz="3200" b="1" dirty="0" err="1"/>
+              <a:t>Visulalization</a:t>
+            </a:r>
+            <a:r>
+              <a:rPr lang="en-US" altLang="ko-KR" sz="3200" b="1" dirty="0"/>
+              <a:t>)</a:t>
+            </a:r>
+            <a:endParaRPr lang="ko-KR" altLang="en-US" sz="3200" b="1" dirty="0"/>
+          </a:p>
+        </p:txBody>
+      </p:sp>
       <p:pic>
         <p:nvPicPr>
           <p:cNvPr id="1026" name="Picture 2">
             <a:extLst>
               <a:ext uri="{FF2B5EF4-FFF2-40B4-BE49-F238E27FC236}">
-                <a16:creationId xmlns:a16="http://schemas.microsoft.com/office/drawing/2014/main" id="{58B5F73A-CBC7-1626-4F0E-24966B29D012}"/>
+                <a16:creationId xmlns:a16="http://schemas.microsoft.com/office/drawing/2014/main" id="{563C7418-EE55-3D57-35E0-08BCF0C87E3F}"/>
               </a:ext>
             </a:extLst>
           </p:cNvPr>
@@ -14604,7 +15239,7 @@
           <p:cNvPr id="3" name="TextBox 2">
             <a:extLst>
               <a:ext uri="{FF2B5EF4-FFF2-40B4-BE49-F238E27FC236}">
-                <a16:creationId xmlns:a16="http://schemas.microsoft.com/office/drawing/2014/main" id="{E6EFABEB-78B2-B23E-2790-1B3F29C1E80E}"/>
+                <a16:creationId xmlns:a16="http://schemas.microsoft.com/office/drawing/2014/main" id="{5F95D30F-E506-07F9-234A-D3315788FF0A}"/>
               </a:ext>
             </a:extLst>
           </p:cNvPr>
@@ -14614,7 +15249,7 @@
         <p:spPr>
           <a:xfrm>
             <a:off x="909836" y="875966"/>
-            <a:ext cx="10945216" cy="1118319"/>
+            <a:ext cx="10945216" cy="564322"/>
           </a:xfrm>
           <a:prstGeom prst="rect">
             <a:avLst/>
@@ -14635,28 +15270,6 @@
               <a:buChar char="v"/>
             </a:pPr>
             <a:r>
-              <a:rPr lang="ko-KR" altLang="en-US" dirty="0"/>
-              <a:t>통계량</a:t>
-            </a:r>
-            <a:r>
-              <a:rPr lang="en-US" altLang="ko-KR" dirty="0"/>
-              <a:t>(Statistic)</a:t>
-            </a:r>
-            <a:r>
-              <a:rPr lang="ko-KR" altLang="en-US" dirty="0"/>
-              <a:t>을 이해하지 못하면 시각화는 하지 마라</a:t>
-            </a:r>
-            <a:endParaRPr lang="en-US" altLang="ko-KR" dirty="0"/>
-          </a:p>
-          <a:p>
-            <a:pPr marL="285750" indent="-285750">
-              <a:lnSpc>
-                <a:spcPct val="200000"/>
-              </a:lnSpc>
-              <a:buFont typeface="Wingdings" panose="05000000000000000000" pitchFamily="2" charset="2"/>
-              <a:buChar char="v"/>
-            </a:pPr>
-            <a:r>
               <a:rPr lang="en-US" altLang="ko-KR" dirty="0"/>
               <a:t>seaborn</a:t>
             </a:r>
@@ -14704,7 +15317,7 @@
           <p:cNvPr id="6" name="TextBox 5">
             <a:extLst>
               <a:ext uri="{FF2B5EF4-FFF2-40B4-BE49-F238E27FC236}">
-                <a16:creationId xmlns:a16="http://schemas.microsoft.com/office/drawing/2014/main" id="{0557DD18-CE6A-587A-07B2-C86F815F51B5}"/>
+                <a16:creationId xmlns:a16="http://schemas.microsoft.com/office/drawing/2014/main" id="{33E569E3-FF38-E843-B65D-8620B27A6958}"/>
               </a:ext>
             </a:extLst>
           </p:cNvPr>
@@ -14748,7 +15361,7 @@
           <p:cNvPr id="1028" name="Picture 4">
             <a:extLst>
               <a:ext uri="{FF2B5EF4-FFF2-40B4-BE49-F238E27FC236}">
-                <a16:creationId xmlns:a16="http://schemas.microsoft.com/office/drawing/2014/main" id="{5C28E09D-41B6-F472-B8B1-F56ABC3D67A0}"/>
+                <a16:creationId xmlns:a16="http://schemas.microsoft.com/office/drawing/2014/main" id="{17B773A7-108D-FBA2-F491-2BAE9A5FB841}"/>
               </a:ext>
             </a:extLst>
           </p:cNvPr>
@@ -14795,7 +15408,7 @@
           <p:cNvPr id="7" name="TextBox 6">
             <a:extLst>
               <a:ext uri="{FF2B5EF4-FFF2-40B4-BE49-F238E27FC236}">
-                <a16:creationId xmlns:a16="http://schemas.microsoft.com/office/drawing/2014/main" id="{F11A536B-E0AF-AE13-E536-46C2F4FDCCE5}"/>
+                <a16:creationId xmlns:a16="http://schemas.microsoft.com/office/drawing/2014/main" id="{FF0EEF0A-F549-0076-BF6F-BC261F9085FC}"/>
               </a:ext>
             </a:extLst>
           </p:cNvPr>
@@ -14837,7 +15450,7 @@
     </p:spTree>
     <p:extLst>
       <p:ext uri="{BB962C8B-B14F-4D97-AF65-F5344CB8AC3E}">
-        <p14:creationId xmlns:p14="http://schemas.microsoft.com/office/powerpoint/2010/main" val="4105585802"/>
+        <p14:creationId xmlns:p14="http://schemas.microsoft.com/office/powerpoint/2010/main" val="4126870488"/>
       </p:ext>
     </p:extLst>
   </p:cSld>
@@ -14859,7 +15472,371 @@
 </p:sld>
 </file>
 
-<file path=ppt/slides/slide39.xml><?xml version="1.0" encoding="utf-8"?>
+<file path=ppt/slides/slide4.xml><?xml version="1.0" encoding="utf-8"?>
+<p:sld xmlns:a="http://schemas.openxmlformats.org/drawingml/2006/main" xmlns:r="http://schemas.openxmlformats.org/officeDocument/2006/relationships" xmlns:p="http://schemas.openxmlformats.org/presentationml/2006/main">
+  <p:cSld>
+    <p:spTree>
+      <p:nvGrpSpPr>
+        <p:cNvPr id="1" name=""/>
+        <p:cNvGrpSpPr/>
+        <p:nvPr/>
+      </p:nvGrpSpPr>
+      <p:grpSpPr>
+        <a:xfrm>
+          <a:off x="0" y="0"/>
+          <a:ext cx="0" cy="0"/>
+          <a:chOff x="0" y="0"/>
+          <a:chExt cx="0" cy="0"/>
+        </a:xfrm>
+      </p:grpSpPr>
+      <p:sp>
+        <p:nvSpPr>
+          <p:cNvPr id="25" name="슬라이드 번호 개체 틀 24"/>
+          <p:cNvSpPr>
+            <a:spLocks noGrp="1"/>
+          </p:cNvSpPr>
+          <p:nvPr>
+            <p:ph type="sldNum" sz="quarter" idx="12"/>
+          </p:nvPr>
+        </p:nvSpPr>
+        <p:spPr/>
+        <p:txBody>
+          <a:bodyPr/>
+          <a:lstStyle/>
+          <a:p>
+            <a:pPr rtl="0"/>
+            <a:fld id="{A3F31473-23EB-4724-8B59-FE6D21D89FA4}" type="slidenum">
+              <a:rPr lang="en-US" altLang="ko-KR" noProof="0" smtClean="0"/>
+              <a:t>4</a:t>
+            </a:fld>
+            <a:endParaRPr lang="en-US" altLang="ko-KR" noProof="0" dirty="0"/>
+          </a:p>
+        </p:txBody>
+      </p:sp>
+      <p:pic>
+        <p:nvPicPr>
+          <p:cNvPr id="1026" name="Picture 2" descr="빅데이터 시대 표본 추출이 필요할까?"/>
+          <p:cNvPicPr>
+            <a:picLocks noChangeAspect="1" noChangeArrowheads="1"/>
+          </p:cNvPicPr>
+          <p:nvPr/>
+        </p:nvPicPr>
+        <p:blipFill>
+          <a:blip r:embed="rId3">
+            <a:extLst>
+              <a:ext uri="{28A0092B-C50C-407E-A947-70E740481C1C}">
+                <a14:useLocalDpi xmlns:a14="http://schemas.microsoft.com/office/drawing/2010/main" val="0"/>
+              </a:ext>
+            </a:extLst>
+          </a:blip>
+          <a:srcRect/>
+          <a:stretch>
+            <a:fillRect/>
+          </a:stretch>
+        </p:blipFill>
+        <p:spPr bwMode="auto">
+          <a:xfrm>
+            <a:off x="2566020" y="1916832"/>
+            <a:ext cx="7304389" cy="4248472"/>
+          </a:xfrm>
+          <a:prstGeom prst="rect">
+            <a:avLst/>
+          </a:prstGeom>
+          <a:noFill/>
+          <a:extLst>
+            <a:ext uri="{909E8E84-426E-40DD-AFC4-6F175D3DCCD1}">
+              <a14:hiddenFill xmlns:a14="http://schemas.microsoft.com/office/drawing/2010/main">
+                <a:solidFill>
+                  <a:srgbClr val="FFFFFF"/>
+                </a:solidFill>
+              </a14:hiddenFill>
+            </a:ext>
+          </a:extLst>
+        </p:spPr>
+      </p:pic>
+      <p:sp>
+        <p:nvSpPr>
+          <p:cNvPr id="2" name="TextBox 1"/>
+          <p:cNvSpPr txBox="1"/>
+          <p:nvPr/>
+        </p:nvSpPr>
+        <p:spPr>
+          <a:xfrm>
+            <a:off x="333772" y="426325"/>
+            <a:ext cx="8280920" cy="1015663"/>
+          </a:xfrm>
+          <a:prstGeom prst="rect">
+            <a:avLst/>
+          </a:prstGeom>
+          <a:noFill/>
+        </p:spPr>
+        <p:txBody>
+          <a:bodyPr wrap="square" rtlCol="0">
+            <a:spAutoFit/>
+          </a:bodyPr>
+          <a:lstStyle/>
+          <a:p>
+            <a:pPr marL="285750" indent="-285750">
+              <a:lnSpc>
+                <a:spcPct val="150000"/>
+              </a:lnSpc>
+              <a:buFont typeface="Wingdings" panose="05000000000000000000" pitchFamily="2" charset="2"/>
+              <a:buChar char="§"/>
+            </a:pPr>
+            <a:r>
+              <a:rPr lang="ko-KR" altLang="en-US" sz="2000" b="1" dirty="0"/>
+              <a:t>전수조사</a:t>
+            </a:r>
+            <a:r>
+              <a:rPr lang="en-US" altLang="ko-KR" sz="2000" b="1" dirty="0"/>
+              <a:t>(Census)</a:t>
+            </a:r>
+          </a:p>
+          <a:p>
+            <a:pPr marL="285750" indent="-285750">
+              <a:lnSpc>
+                <a:spcPct val="150000"/>
+              </a:lnSpc>
+              <a:buFont typeface="Wingdings" panose="05000000000000000000" pitchFamily="2" charset="2"/>
+              <a:buChar char="§"/>
+            </a:pPr>
+            <a:r>
+              <a:rPr lang="ko-KR" altLang="en-US" sz="2000" b="1" dirty="0"/>
+              <a:t>표본조사</a:t>
+            </a:r>
+            <a:r>
+              <a:rPr lang="en-US" altLang="ko-KR" sz="2000" b="1" dirty="0"/>
+              <a:t>(Sampling)</a:t>
+            </a:r>
+          </a:p>
+        </p:txBody>
+      </p:sp>
+      <p:sp>
+        <p:nvSpPr>
+          <p:cNvPr id="3" name="직사각형 2"/>
+          <p:cNvSpPr/>
+          <p:nvPr/>
+        </p:nvSpPr>
+        <p:spPr>
+          <a:xfrm>
+            <a:off x="1053852" y="4581128"/>
+            <a:ext cx="1872629" cy="1107996"/>
+          </a:xfrm>
+          <a:prstGeom prst="rect">
+            <a:avLst/>
+          </a:prstGeom>
+        </p:spPr>
+        <p:txBody>
+          <a:bodyPr wrap="none">
+            <a:spAutoFit/>
+          </a:bodyPr>
+          <a:lstStyle/>
+          <a:p>
+            <a:r>
+              <a:rPr lang="ko-KR" altLang="en-US" b="1" dirty="0" err="1">
+                <a:solidFill>
+                  <a:srgbClr val="0070C0"/>
+                </a:solidFill>
+              </a:rPr>
+              <a:t>모수</a:t>
+            </a:r>
+            <a:r>
+              <a:rPr lang="ko-KR" altLang="en-US" b="1" dirty="0">
+                <a:solidFill>
+                  <a:srgbClr val="0070C0"/>
+                </a:solidFill>
+              </a:rPr>
+              <a:t> </a:t>
+            </a:r>
+            <a:r>
+              <a:rPr lang="en-US" altLang="ko-KR" b="1" dirty="0">
+                <a:solidFill>
+                  <a:srgbClr val="0070C0"/>
+                </a:solidFill>
+              </a:rPr>
+              <a:t>(parameter)</a:t>
+            </a:r>
+          </a:p>
+          <a:p>
+            <a:pPr marL="285750" indent="-285750">
+              <a:lnSpc>
+                <a:spcPct val="150000"/>
+              </a:lnSpc>
+              <a:buFontTx/>
+              <a:buChar char="-"/>
+            </a:pPr>
+            <a:r>
+              <a:rPr lang="ko-KR" altLang="en-US" sz="1600" b="1" dirty="0">
+                <a:solidFill>
+                  <a:srgbClr val="0070C0"/>
+                </a:solidFill>
+              </a:rPr>
+              <a:t>모집단 평균</a:t>
+            </a:r>
+            <a:endParaRPr lang="en-US" altLang="ko-KR" sz="1600" b="1" dirty="0">
+              <a:solidFill>
+                <a:srgbClr val="0070C0"/>
+              </a:solidFill>
+            </a:endParaRPr>
+          </a:p>
+          <a:p>
+            <a:pPr marL="285750" indent="-285750">
+              <a:lnSpc>
+                <a:spcPct val="150000"/>
+              </a:lnSpc>
+              <a:buFontTx/>
+              <a:buChar char="-"/>
+            </a:pPr>
+            <a:r>
+              <a:rPr lang="ko-KR" altLang="en-US" sz="1600" b="1" dirty="0">
+                <a:solidFill>
+                  <a:srgbClr val="0070C0"/>
+                </a:solidFill>
+              </a:rPr>
+              <a:t>모집단</a:t>
+            </a:r>
+            <a:r>
+              <a:rPr lang="en-US" altLang="ko-KR" sz="1600" b="1" dirty="0">
+                <a:solidFill>
+                  <a:srgbClr val="0070C0"/>
+                </a:solidFill>
+              </a:rPr>
+              <a:t> </a:t>
+            </a:r>
+            <a:r>
+              <a:rPr lang="ko-KR" altLang="en-US" sz="1600" b="1" dirty="0">
+                <a:solidFill>
+                  <a:srgbClr val="0070C0"/>
+                </a:solidFill>
+              </a:rPr>
+              <a:t>분산</a:t>
+            </a:r>
+            <a:endParaRPr lang="ko-KR" altLang="en-US" sz="1600" dirty="0">
+              <a:solidFill>
+                <a:srgbClr val="0070C0"/>
+              </a:solidFill>
+            </a:endParaRPr>
+          </a:p>
+        </p:txBody>
+      </p:sp>
+      <p:sp>
+        <p:nvSpPr>
+          <p:cNvPr id="7" name="직사각형 6"/>
+          <p:cNvSpPr/>
+          <p:nvPr/>
+        </p:nvSpPr>
+        <p:spPr>
+          <a:xfrm>
+            <a:off x="9982844" y="3284984"/>
+            <a:ext cx="1872629" cy="1107996"/>
+          </a:xfrm>
+          <a:prstGeom prst="rect">
+            <a:avLst/>
+          </a:prstGeom>
+        </p:spPr>
+        <p:txBody>
+          <a:bodyPr wrap="none">
+            <a:spAutoFit/>
+          </a:bodyPr>
+          <a:lstStyle/>
+          <a:p>
+            <a:r>
+              <a:rPr lang="ko-KR" altLang="en-US" b="1" dirty="0" err="1">
+                <a:solidFill>
+                  <a:srgbClr val="0070C0"/>
+                </a:solidFill>
+              </a:rPr>
+              <a:t>모수</a:t>
+            </a:r>
+            <a:r>
+              <a:rPr lang="ko-KR" altLang="en-US" b="1" dirty="0">
+                <a:solidFill>
+                  <a:srgbClr val="0070C0"/>
+                </a:solidFill>
+              </a:rPr>
+              <a:t> </a:t>
+            </a:r>
+            <a:r>
+              <a:rPr lang="en-US" altLang="ko-KR" b="1" dirty="0">
+                <a:solidFill>
+                  <a:srgbClr val="0070C0"/>
+                </a:solidFill>
+              </a:rPr>
+              <a:t>(parameter)</a:t>
+            </a:r>
+          </a:p>
+          <a:p>
+            <a:pPr marL="285750" indent="-285750">
+              <a:lnSpc>
+                <a:spcPct val="150000"/>
+              </a:lnSpc>
+              <a:buFontTx/>
+              <a:buChar char="-"/>
+            </a:pPr>
+            <a:r>
+              <a:rPr lang="ko-KR" altLang="en-US" sz="1600" b="1" dirty="0">
+                <a:solidFill>
+                  <a:srgbClr val="0070C0"/>
+                </a:solidFill>
+              </a:rPr>
+              <a:t>표본 평균</a:t>
+            </a:r>
+            <a:endParaRPr lang="en-US" altLang="ko-KR" sz="1600" b="1" dirty="0">
+              <a:solidFill>
+                <a:srgbClr val="0070C0"/>
+              </a:solidFill>
+            </a:endParaRPr>
+          </a:p>
+          <a:p>
+            <a:pPr marL="285750" indent="-285750">
+              <a:lnSpc>
+                <a:spcPct val="150000"/>
+              </a:lnSpc>
+              <a:buFontTx/>
+              <a:buChar char="-"/>
+            </a:pPr>
+            <a:r>
+              <a:rPr lang="ko-KR" altLang="en-US" sz="1600" b="1" dirty="0">
+                <a:solidFill>
+                  <a:srgbClr val="0070C0"/>
+                </a:solidFill>
+              </a:rPr>
+              <a:t>표본 분산 등</a:t>
+            </a:r>
+            <a:endParaRPr lang="ko-KR" altLang="en-US" sz="1600" dirty="0">
+              <a:solidFill>
+                <a:srgbClr val="0070C0"/>
+              </a:solidFill>
+            </a:endParaRPr>
+          </a:p>
+        </p:txBody>
+      </p:sp>
+    </p:spTree>
+    <p:extLst>
+      <p:ext uri="{BB962C8B-B14F-4D97-AF65-F5344CB8AC3E}">
+        <p14:creationId xmlns:p14="http://schemas.microsoft.com/office/powerpoint/2010/main" val="1326778157"/>
+      </p:ext>
+    </p:extLst>
+  </p:cSld>
+  <p:clrMapOvr>
+    <a:masterClrMapping/>
+  </p:clrMapOvr>
+  <mc:AlternateContent xmlns:mc="http://schemas.openxmlformats.org/markup-compatibility/2006" xmlns:p14="http://schemas.microsoft.com/office/powerpoint/2010/main">
+    <mc:Choice Requires="p14">
+      <p:transition spd="med" p14:dur="700">
+        <p:fade/>
+      </p:transition>
+    </mc:Choice>
+    <mc:Fallback xmlns="">
+      <p:transition spd="med">
+        <p:fade/>
+      </p:transition>
+    </mc:Fallback>
+  </mc:AlternateContent>
+</p:sld>
+</file>
+
+<file path=ppt/slides/slide40.xml><?xml version="1.0" encoding="utf-8"?>
 <p:sld xmlns:a="http://schemas.openxmlformats.org/drawingml/2006/main" xmlns:r="http://schemas.openxmlformats.org/officeDocument/2006/relationships" xmlns:p="http://schemas.openxmlformats.org/presentationml/2006/main">
   <p:cSld>
     <p:spTree>
@@ -14911,8 +15888,8 @@
         </p:blipFill>
         <p:spPr bwMode="auto">
           <a:xfrm>
-            <a:off x="1053852" y="2293351"/>
-            <a:ext cx="6493809" cy="4325868"/>
+            <a:off x="1053853" y="2293351"/>
+            <a:ext cx="4896544" cy="3261846"/>
           </a:xfrm>
           <a:prstGeom prst="rect">
             <a:avLst/>
@@ -14953,7 +15930,7 @@
             <a:pPr rtl="0"/>
             <a:fld id="{A3F31473-23EB-4724-8B59-FE6D21D89FA4}" type="slidenum">
               <a:rPr lang="en-US" altLang="ko-KR" noProof="0" smtClean="0"/>
-              <a:t>39</a:t>
+              <a:t>40</a:t>
             </a:fld>
             <a:endParaRPr lang="en-US" altLang="ko-KR" noProof="0" dirty="0"/>
           </a:p>
@@ -15141,8 +16118,8 @@
         </p:blipFill>
         <p:spPr bwMode="auto">
           <a:xfrm>
-            <a:off x="5950396" y="1998709"/>
-            <a:ext cx="6149481" cy="4048424"/>
+            <a:off x="6382444" y="2293351"/>
+            <a:ext cx="4954683" cy="3261846"/>
           </a:xfrm>
           <a:prstGeom prst="rect">
             <a:avLst/>
@@ -15184,371 +16161,7 @@
 </p:sld>
 </file>
 
-<file path=ppt/slides/slide4.xml><?xml version="1.0" encoding="utf-8"?>
-<p:sld xmlns:a="http://schemas.openxmlformats.org/drawingml/2006/main" xmlns:r="http://schemas.openxmlformats.org/officeDocument/2006/relationships" xmlns:p="http://schemas.openxmlformats.org/presentationml/2006/main">
-  <p:cSld>
-    <p:spTree>
-      <p:nvGrpSpPr>
-        <p:cNvPr id="1" name=""/>
-        <p:cNvGrpSpPr/>
-        <p:nvPr/>
-      </p:nvGrpSpPr>
-      <p:grpSpPr>
-        <a:xfrm>
-          <a:off x="0" y="0"/>
-          <a:ext cx="0" cy="0"/>
-          <a:chOff x="0" y="0"/>
-          <a:chExt cx="0" cy="0"/>
-        </a:xfrm>
-      </p:grpSpPr>
-      <p:sp>
-        <p:nvSpPr>
-          <p:cNvPr id="25" name="슬라이드 번호 개체 틀 24"/>
-          <p:cNvSpPr>
-            <a:spLocks noGrp="1"/>
-          </p:cNvSpPr>
-          <p:nvPr>
-            <p:ph type="sldNum" sz="quarter" idx="12"/>
-          </p:nvPr>
-        </p:nvSpPr>
-        <p:spPr/>
-        <p:txBody>
-          <a:bodyPr/>
-          <a:lstStyle/>
-          <a:p>
-            <a:pPr rtl="0"/>
-            <a:fld id="{A3F31473-23EB-4724-8B59-FE6D21D89FA4}" type="slidenum">
-              <a:rPr lang="en-US" altLang="ko-KR" noProof="0" smtClean="0"/>
-              <a:t>4</a:t>
-            </a:fld>
-            <a:endParaRPr lang="en-US" altLang="ko-KR" noProof="0" dirty="0"/>
-          </a:p>
-        </p:txBody>
-      </p:sp>
-      <p:pic>
-        <p:nvPicPr>
-          <p:cNvPr id="1026" name="Picture 2" descr="빅데이터 시대 표본 추출이 필요할까?"/>
-          <p:cNvPicPr>
-            <a:picLocks noChangeAspect="1" noChangeArrowheads="1"/>
-          </p:cNvPicPr>
-          <p:nvPr/>
-        </p:nvPicPr>
-        <p:blipFill>
-          <a:blip r:embed="rId3">
-            <a:extLst>
-              <a:ext uri="{28A0092B-C50C-407E-A947-70E740481C1C}">
-                <a14:useLocalDpi xmlns:a14="http://schemas.microsoft.com/office/drawing/2010/main" val="0"/>
-              </a:ext>
-            </a:extLst>
-          </a:blip>
-          <a:srcRect/>
-          <a:stretch>
-            <a:fillRect/>
-          </a:stretch>
-        </p:blipFill>
-        <p:spPr bwMode="auto">
-          <a:xfrm>
-            <a:off x="2566020" y="1916832"/>
-            <a:ext cx="7304389" cy="4248472"/>
-          </a:xfrm>
-          <a:prstGeom prst="rect">
-            <a:avLst/>
-          </a:prstGeom>
-          <a:noFill/>
-          <a:extLst>
-            <a:ext uri="{909E8E84-426E-40DD-AFC4-6F175D3DCCD1}">
-              <a14:hiddenFill xmlns:a14="http://schemas.microsoft.com/office/drawing/2010/main">
-                <a:solidFill>
-                  <a:srgbClr val="FFFFFF"/>
-                </a:solidFill>
-              </a14:hiddenFill>
-            </a:ext>
-          </a:extLst>
-        </p:spPr>
-      </p:pic>
-      <p:sp>
-        <p:nvSpPr>
-          <p:cNvPr id="2" name="TextBox 1"/>
-          <p:cNvSpPr txBox="1"/>
-          <p:nvPr/>
-        </p:nvSpPr>
-        <p:spPr>
-          <a:xfrm>
-            <a:off x="333772" y="426325"/>
-            <a:ext cx="8280920" cy="1015663"/>
-          </a:xfrm>
-          <a:prstGeom prst="rect">
-            <a:avLst/>
-          </a:prstGeom>
-          <a:noFill/>
-        </p:spPr>
-        <p:txBody>
-          <a:bodyPr wrap="square" rtlCol="0">
-            <a:spAutoFit/>
-          </a:bodyPr>
-          <a:lstStyle/>
-          <a:p>
-            <a:pPr marL="285750" indent="-285750">
-              <a:lnSpc>
-                <a:spcPct val="150000"/>
-              </a:lnSpc>
-              <a:buFont typeface="Wingdings" panose="05000000000000000000" pitchFamily="2" charset="2"/>
-              <a:buChar char="§"/>
-            </a:pPr>
-            <a:r>
-              <a:rPr lang="ko-KR" altLang="en-US" sz="2000" b="1" dirty="0"/>
-              <a:t>전수조사</a:t>
-            </a:r>
-            <a:r>
-              <a:rPr lang="en-US" altLang="ko-KR" sz="2000" b="1" dirty="0"/>
-              <a:t>(Census)</a:t>
-            </a:r>
-          </a:p>
-          <a:p>
-            <a:pPr marL="285750" indent="-285750">
-              <a:lnSpc>
-                <a:spcPct val="150000"/>
-              </a:lnSpc>
-              <a:buFont typeface="Wingdings" panose="05000000000000000000" pitchFamily="2" charset="2"/>
-              <a:buChar char="§"/>
-            </a:pPr>
-            <a:r>
-              <a:rPr lang="ko-KR" altLang="en-US" sz="2000" b="1" dirty="0"/>
-              <a:t>표본조사</a:t>
-            </a:r>
-            <a:r>
-              <a:rPr lang="en-US" altLang="ko-KR" sz="2000" b="1" dirty="0"/>
-              <a:t>(Sampling)</a:t>
-            </a:r>
-          </a:p>
-        </p:txBody>
-      </p:sp>
-      <p:sp>
-        <p:nvSpPr>
-          <p:cNvPr id="3" name="직사각형 2"/>
-          <p:cNvSpPr/>
-          <p:nvPr/>
-        </p:nvSpPr>
-        <p:spPr>
-          <a:xfrm>
-            <a:off x="1053852" y="4581128"/>
-            <a:ext cx="1872629" cy="1107996"/>
-          </a:xfrm>
-          <a:prstGeom prst="rect">
-            <a:avLst/>
-          </a:prstGeom>
-        </p:spPr>
-        <p:txBody>
-          <a:bodyPr wrap="none">
-            <a:spAutoFit/>
-          </a:bodyPr>
-          <a:lstStyle/>
-          <a:p>
-            <a:r>
-              <a:rPr lang="ko-KR" altLang="en-US" b="1" dirty="0" err="1">
-                <a:solidFill>
-                  <a:srgbClr val="0070C0"/>
-                </a:solidFill>
-              </a:rPr>
-              <a:t>모수</a:t>
-            </a:r>
-            <a:r>
-              <a:rPr lang="ko-KR" altLang="en-US" b="1" dirty="0">
-                <a:solidFill>
-                  <a:srgbClr val="0070C0"/>
-                </a:solidFill>
-              </a:rPr>
-              <a:t> </a:t>
-            </a:r>
-            <a:r>
-              <a:rPr lang="en-US" altLang="ko-KR" b="1" dirty="0">
-                <a:solidFill>
-                  <a:srgbClr val="0070C0"/>
-                </a:solidFill>
-              </a:rPr>
-              <a:t>(parameter)</a:t>
-            </a:r>
-          </a:p>
-          <a:p>
-            <a:pPr marL="285750" indent="-285750">
-              <a:lnSpc>
-                <a:spcPct val="150000"/>
-              </a:lnSpc>
-              <a:buFontTx/>
-              <a:buChar char="-"/>
-            </a:pPr>
-            <a:r>
-              <a:rPr lang="ko-KR" altLang="en-US" sz="1600" b="1" dirty="0">
-                <a:solidFill>
-                  <a:srgbClr val="0070C0"/>
-                </a:solidFill>
-              </a:rPr>
-              <a:t>모집단 평균</a:t>
-            </a:r>
-            <a:endParaRPr lang="en-US" altLang="ko-KR" sz="1600" b="1" dirty="0">
-              <a:solidFill>
-                <a:srgbClr val="0070C0"/>
-              </a:solidFill>
-            </a:endParaRPr>
-          </a:p>
-          <a:p>
-            <a:pPr marL="285750" indent="-285750">
-              <a:lnSpc>
-                <a:spcPct val="150000"/>
-              </a:lnSpc>
-              <a:buFontTx/>
-              <a:buChar char="-"/>
-            </a:pPr>
-            <a:r>
-              <a:rPr lang="ko-KR" altLang="en-US" sz="1600" b="1" dirty="0">
-                <a:solidFill>
-                  <a:srgbClr val="0070C0"/>
-                </a:solidFill>
-              </a:rPr>
-              <a:t>모집단</a:t>
-            </a:r>
-            <a:r>
-              <a:rPr lang="en-US" altLang="ko-KR" sz="1600" b="1" dirty="0">
-                <a:solidFill>
-                  <a:srgbClr val="0070C0"/>
-                </a:solidFill>
-              </a:rPr>
-              <a:t> </a:t>
-            </a:r>
-            <a:r>
-              <a:rPr lang="ko-KR" altLang="en-US" sz="1600" b="1" dirty="0">
-                <a:solidFill>
-                  <a:srgbClr val="0070C0"/>
-                </a:solidFill>
-              </a:rPr>
-              <a:t>분산</a:t>
-            </a:r>
-            <a:endParaRPr lang="ko-KR" altLang="en-US" sz="1600" dirty="0">
-              <a:solidFill>
-                <a:srgbClr val="0070C0"/>
-              </a:solidFill>
-            </a:endParaRPr>
-          </a:p>
-        </p:txBody>
-      </p:sp>
-      <p:sp>
-        <p:nvSpPr>
-          <p:cNvPr id="7" name="직사각형 6"/>
-          <p:cNvSpPr/>
-          <p:nvPr/>
-        </p:nvSpPr>
-        <p:spPr>
-          <a:xfrm>
-            <a:off x="9982844" y="3284984"/>
-            <a:ext cx="1872629" cy="1107996"/>
-          </a:xfrm>
-          <a:prstGeom prst="rect">
-            <a:avLst/>
-          </a:prstGeom>
-        </p:spPr>
-        <p:txBody>
-          <a:bodyPr wrap="none">
-            <a:spAutoFit/>
-          </a:bodyPr>
-          <a:lstStyle/>
-          <a:p>
-            <a:r>
-              <a:rPr lang="ko-KR" altLang="en-US" b="1" dirty="0" err="1">
-                <a:solidFill>
-                  <a:srgbClr val="0070C0"/>
-                </a:solidFill>
-              </a:rPr>
-              <a:t>모수</a:t>
-            </a:r>
-            <a:r>
-              <a:rPr lang="ko-KR" altLang="en-US" b="1" dirty="0">
-                <a:solidFill>
-                  <a:srgbClr val="0070C0"/>
-                </a:solidFill>
-              </a:rPr>
-              <a:t> </a:t>
-            </a:r>
-            <a:r>
-              <a:rPr lang="en-US" altLang="ko-KR" b="1" dirty="0">
-                <a:solidFill>
-                  <a:srgbClr val="0070C0"/>
-                </a:solidFill>
-              </a:rPr>
-              <a:t>(parameter)</a:t>
-            </a:r>
-          </a:p>
-          <a:p>
-            <a:pPr marL="285750" indent="-285750">
-              <a:lnSpc>
-                <a:spcPct val="150000"/>
-              </a:lnSpc>
-              <a:buFontTx/>
-              <a:buChar char="-"/>
-            </a:pPr>
-            <a:r>
-              <a:rPr lang="ko-KR" altLang="en-US" sz="1600" b="1" dirty="0">
-                <a:solidFill>
-                  <a:srgbClr val="0070C0"/>
-                </a:solidFill>
-              </a:rPr>
-              <a:t>표본 평균</a:t>
-            </a:r>
-            <a:endParaRPr lang="en-US" altLang="ko-KR" sz="1600" b="1" dirty="0">
-              <a:solidFill>
-                <a:srgbClr val="0070C0"/>
-              </a:solidFill>
-            </a:endParaRPr>
-          </a:p>
-          <a:p>
-            <a:pPr marL="285750" indent="-285750">
-              <a:lnSpc>
-                <a:spcPct val="150000"/>
-              </a:lnSpc>
-              <a:buFontTx/>
-              <a:buChar char="-"/>
-            </a:pPr>
-            <a:r>
-              <a:rPr lang="ko-KR" altLang="en-US" sz="1600" b="1" dirty="0">
-                <a:solidFill>
-                  <a:srgbClr val="0070C0"/>
-                </a:solidFill>
-              </a:rPr>
-              <a:t>표본 분산 등</a:t>
-            </a:r>
-            <a:endParaRPr lang="ko-KR" altLang="en-US" sz="1600" dirty="0">
-              <a:solidFill>
-                <a:srgbClr val="0070C0"/>
-              </a:solidFill>
-            </a:endParaRPr>
-          </a:p>
-        </p:txBody>
-      </p:sp>
-    </p:spTree>
-    <p:extLst>
-      <p:ext uri="{BB962C8B-B14F-4D97-AF65-F5344CB8AC3E}">
-        <p14:creationId xmlns:p14="http://schemas.microsoft.com/office/powerpoint/2010/main" val="1326778157"/>
-      </p:ext>
-    </p:extLst>
-  </p:cSld>
-  <p:clrMapOvr>
-    <a:masterClrMapping/>
-  </p:clrMapOvr>
-  <mc:AlternateContent xmlns:mc="http://schemas.openxmlformats.org/markup-compatibility/2006" xmlns:p14="http://schemas.microsoft.com/office/powerpoint/2010/main">
-    <mc:Choice Requires="p14">
-      <p:transition spd="med" p14:dur="700">
-        <p:fade/>
-      </p:transition>
-    </mc:Choice>
-    <mc:Fallback xmlns="">
-      <p:transition spd="med">
-        <p:fade/>
-      </p:transition>
-    </mc:Fallback>
-  </mc:AlternateContent>
-</p:sld>
-</file>
-
-<file path=ppt/slides/slide40.xml><?xml version="1.0" encoding="utf-8"?>
+<file path=ppt/slides/slide41.xml><?xml version="1.0" encoding="utf-8"?>
 <p:sld xmlns:a="http://schemas.openxmlformats.org/drawingml/2006/main" xmlns:r="http://schemas.openxmlformats.org/officeDocument/2006/relationships" xmlns:p="http://schemas.openxmlformats.org/presentationml/2006/main">
   <p:cSld>
     <p:spTree>
@@ -15595,7 +16208,7 @@
             <a:pPr rtl="0"/>
             <a:fld id="{A3F31473-23EB-4724-8B59-FE6D21D89FA4}" type="slidenum">
               <a:rPr lang="en-US" altLang="ko-KR" noProof="0" smtClean="0"/>
-              <a:t>40</a:t>
+              <a:t>41</a:t>
             </a:fld>
             <a:endParaRPr lang="en-US" altLang="ko-KR" noProof="0" dirty="0"/>
           </a:p>
@@ -15623,8 +16236,8 @@
         </p:blipFill>
         <p:spPr>
           <a:xfrm>
-            <a:off x="909836" y="1340768"/>
-            <a:ext cx="10179874" cy="4536504"/>
+            <a:off x="765820" y="2051534"/>
+            <a:ext cx="9554433" cy="4257786"/>
           </a:xfrm>
           <a:prstGeom prst="rect">
             <a:avLst/>
@@ -15633,10 +16246,10 @@
       </p:pic>
       <p:sp>
         <p:nvSpPr>
-          <p:cNvPr id="11" name="TextBox 10">
+          <p:cNvPr id="3" name="TextBox 2">
             <a:extLst>
               <a:ext uri="{FF2B5EF4-FFF2-40B4-BE49-F238E27FC236}">
-                <a16:creationId xmlns:a16="http://schemas.microsoft.com/office/drawing/2014/main" id="{A8922264-2A14-D40B-7A1A-EC319C22BF79}"/>
+                <a16:creationId xmlns:a16="http://schemas.microsoft.com/office/drawing/2014/main" id="{6D4EA872-8D66-58E8-49D4-08BFEF5EB342}"/>
               </a:ext>
             </a:extLst>
           </p:cNvPr>
@@ -15645,8 +16258,88 @@
         </p:nvSpPr>
         <p:spPr>
           <a:xfrm>
+            <a:off x="765820" y="1196752"/>
+            <a:ext cx="11233248" cy="559127"/>
+          </a:xfrm>
+          <a:prstGeom prst="rect">
+            <a:avLst/>
+          </a:prstGeom>
+          <a:solidFill>
+            <a:schemeClr val="tx1">
+              <a:lumMod val="20000"/>
+              <a:lumOff val="80000"/>
+            </a:schemeClr>
+          </a:solidFill>
+        </p:spPr>
+        <p:txBody>
+          <a:bodyPr wrap="square" rtlCol="0">
+            <a:spAutoFit/>
+          </a:bodyPr>
+          <a:lstStyle/>
+          <a:p>
+            <a:pPr marL="342900" indent="-342900">
+              <a:lnSpc>
+                <a:spcPct val="200000"/>
+              </a:lnSpc>
+              <a:buFont typeface="Wingdings" panose="05000000000000000000" pitchFamily="2" charset="2"/>
+              <a:buChar char="v"/>
+            </a:pPr>
+            <a:r>
+              <a:rPr lang="en-US" altLang="ko-KR" dirty="0" err="1">
+                <a:latin typeface="Arial Narrow" panose="020B0606020202030204" pitchFamily="34" charset="0"/>
+                <a:ea typeface="맑은 고딕 Semilight" panose="020B0502040204020203" pitchFamily="50" charset="-127"/>
+                <a:cs typeface="맑은 고딕 Semilight" panose="020B0502040204020203" pitchFamily="50" charset="-127"/>
+              </a:rPr>
+              <a:t>OpenML</a:t>
+            </a:r>
+            <a:r>
+              <a:rPr lang="ko-KR" altLang="en-US" dirty="0">
+                <a:latin typeface="Arial Narrow" panose="020B0606020202030204" pitchFamily="34" charset="0"/>
+                <a:ea typeface="맑은 고딕 Semilight" panose="020B0502040204020203" pitchFamily="50" charset="-127"/>
+                <a:cs typeface="맑은 고딕 Semilight" panose="020B0502040204020203" pitchFamily="50" charset="-127"/>
+              </a:rPr>
+              <a:t>의 </a:t>
+            </a:r>
+            <a:r>
+              <a:rPr lang="en-US" altLang="ko-KR" dirty="0">
+                <a:latin typeface="Arial Narrow" panose="020B0606020202030204" pitchFamily="34" charset="0"/>
+                <a:ea typeface="맑은 고딕 Semilight" panose="020B0502040204020203" pitchFamily="50" charset="-127"/>
+                <a:cs typeface="맑은 고딕 Semilight" panose="020B0502040204020203" pitchFamily="50" charset="-127"/>
+              </a:rPr>
+              <a:t>“blood-transfusion-service-center”</a:t>
+            </a:r>
+            <a:r>
+              <a:rPr lang="ko-KR" altLang="en-US" dirty="0">
+                <a:latin typeface="Arial Narrow" panose="020B0606020202030204" pitchFamily="34" charset="0"/>
+                <a:ea typeface="맑은 고딕 Semilight" panose="020B0502040204020203" pitchFamily="50" charset="-127"/>
+                <a:cs typeface="맑은 고딕 Semilight" panose="020B0502040204020203" pitchFamily="50" charset="-127"/>
+              </a:rPr>
+              <a:t> 데이터를 바탕으로 심층 분석보고서를 작성하여 제출하라</a:t>
+            </a:r>
+            <a:endParaRPr lang="en-US" altLang="ko-KR" dirty="0">
+              <a:latin typeface="Arial Narrow" panose="020B0606020202030204" pitchFamily="34" charset="0"/>
+              <a:ea typeface="맑은 고딕 Semilight" panose="020B0502040204020203" pitchFamily="50" charset="-127"/>
+              <a:cs typeface="맑은 고딕 Semilight" panose="020B0502040204020203" pitchFamily="50" charset="-127"/>
+            </a:endParaRPr>
+          </a:p>
+        </p:txBody>
+      </p:sp>
+      <p:sp>
+        <p:nvSpPr>
+          <p:cNvPr id="4" name="TextBox 3">
+            <a:extLst>
+              <a:ext uri="{FF2B5EF4-FFF2-40B4-BE49-F238E27FC236}">
+                <a16:creationId xmlns:a16="http://schemas.microsoft.com/office/drawing/2014/main" id="{532719AF-3CA4-831E-C287-562684977D22}"/>
+              </a:ext>
+            </a:extLst>
+          </p:cNvPr>
+          <p:cNvSpPr txBox="1"/>
+          <p:nvPr/>
+        </p:nvSpPr>
+        <p:spPr>
+          <a:xfrm>
             <a:off x="117748" y="260648"/>
-            <a:ext cx="11665296" cy="646331"/>
+            <a:ext cx="2592288" cy="584775"/>
           </a:xfrm>
           <a:prstGeom prst="rect">
             <a:avLst/>
@@ -15660,28 +16353,8 @@
           <a:lstStyle/>
           <a:p>
             <a:r>
-              <a:rPr lang="ko-KR" altLang="en-US" sz="2400" b="1" dirty="0"/>
-              <a:t>탐색적 데이터 분석</a:t>
-            </a:r>
-            <a:r>
-              <a:rPr lang="en-US" altLang="ko-KR" sz="2400" b="1" dirty="0"/>
-              <a:t>(EDA,</a:t>
-            </a:r>
-            <a:r>
-              <a:rPr lang="ko-KR" altLang="en-US" sz="2400" b="1" dirty="0"/>
-              <a:t> </a:t>
-            </a:r>
-            <a:r>
-              <a:rPr lang="en-US" altLang="ko-KR" sz="2400" b="1" dirty="0"/>
-              <a:t>Exploratory Data Analysis) </a:t>
-            </a:r>
-            <a:r>
-              <a:rPr lang="ko-KR" altLang="en-US" sz="3600" b="1" dirty="0"/>
-              <a:t>심층 </a:t>
-            </a:r>
-            <a:r>
-              <a:rPr lang="ko-KR" altLang="en-US" sz="2400" b="1" dirty="0"/>
-              <a:t>보고서작성 제출</a:t>
+              <a:rPr lang="ko-KR" altLang="en-US" sz="3200" b="1" dirty="0"/>
+              <a:t>문제 풀이</a:t>
             </a:r>
           </a:p>
         </p:txBody>
@@ -17443,6 +18116,15 @@
 </file>
 
 <file path=customXml/item1.xml><?xml version="1.0" encoding="utf-8"?>
+<?mso-contentType ?>
+<FormTemplates xmlns="http://schemas.microsoft.com/sharepoint/v3/contenttype/forms">
+  <Display>DocumentLibraryForm</Display>
+  <Edit>DocumentLibraryForm</Edit>
+  <New>DocumentLibraryForm</New>
+</FormTemplates>
+</file>
+
+<file path=customXml/item2.xml><?xml version="1.0" encoding="utf-8"?>
 <ct:contentTypeSchema xmlns:ct="http://schemas.microsoft.com/office/2006/metadata/contentType" xmlns:ma="http://schemas.microsoft.com/office/2006/metadata/properties/metaAttributes" ct:_="" ma:_="" ma:contentTypeName="Document" ma:contentTypeID="0x010100AA3F7D94069FF64A86F7DFF56D60E3BE" ma:contentTypeVersion="6" ma:contentTypeDescription="Create a new document." ma:contentTypeScope="" ma:versionID="c32302c77d4085ecf495bdddb7f5e889">
   <xsd:schema xmlns:xsd="http://www.w3.org/2001/XMLSchema" xmlns:xs="http://www.w3.org/2001/XMLSchema" xmlns:p="http://schemas.microsoft.com/office/2006/metadata/properties" xmlns:ns2="a4f35948-e619-41b3-aa29-22878b09cfd2" xmlns:ns3="40262f94-9f35-4ac3-9a90-690165a166b7" targetNamespace="http://schemas.microsoft.com/office/2006/metadata/properties" ma:root="true" ma:fieldsID="4ab5ae46be95f9d0be6107e8200be7a2" ns2:_="" ns3:_="">
     <xsd:import namespace="a4f35948-e619-41b3-aa29-22878b09cfd2"/>
@@ -17623,7 +18305,7 @@
 </ct:contentTypeSchema>
 </file>
 
-<file path=customXml/item2.xml><?xml version="1.0" encoding="utf-8"?>
+<file path=customXml/item3.xml><?xml version="1.0" encoding="utf-8"?>
 <p:properties xmlns:p="http://schemas.microsoft.com/office/2006/metadata/properties" xmlns:xsi="http://www.w3.org/2001/XMLSchema-instance" xmlns:pc="http://schemas.microsoft.com/office/infopath/2007/PartnerControls">
   <documentManagement>
     <VSO_x0020_item_x0020_id xmlns="40262f94-9f35-4ac3-9a90-690165a166b7" xsi:nil="true"/>
@@ -17634,16 +18316,15 @@
 </p:properties>
 </file>
 
-<file path=customXml/item3.xml><?xml version="1.0" encoding="utf-8"?>
-<?mso-contentType ?>
-<FormTemplates xmlns="http://schemas.microsoft.com/sharepoint/v3/contenttype/forms">
-  <Display>DocumentLibraryForm</Display>
-  <Edit>DocumentLibraryForm</Edit>
-  <New>DocumentLibraryForm</New>
-</FormTemplates>
+<file path=customXml/itemProps1.xml><?xml version="1.0" encoding="utf-8"?>
+<ds:datastoreItem xmlns:ds="http://schemas.openxmlformats.org/officeDocument/2006/customXml" ds:itemID="{7F9B8BCC-BF24-4800-92E1-9F891BBB27E6}">
+  <ds:schemaRefs>
+    <ds:schemaRef ds:uri="http://schemas.microsoft.com/sharepoint/v3/contenttype/forms"/>
+  </ds:schemaRefs>
+</ds:datastoreItem>
 </file>
 
-<file path=customXml/itemProps1.xml><?xml version="1.0" encoding="utf-8"?>
+<file path=customXml/itemProps2.xml><?xml version="1.0" encoding="utf-8"?>
 <ds:datastoreItem xmlns:ds="http://schemas.openxmlformats.org/officeDocument/2006/customXml" ds:itemID="{5CCB2C71-1ED8-4540-B003-293B5E75C71F}">
   <ds:schemaRefs>
     <ds:schemaRef ds:uri="http://schemas.microsoft.com/office/2006/metadata/contentType"/>
@@ -17662,7 +18343,7 @@
 </ds:datastoreItem>
 </file>
 
-<file path=customXml/itemProps2.xml><?xml version="1.0" encoding="utf-8"?>
+<file path=customXml/itemProps3.xml><?xml version="1.0" encoding="utf-8"?>
 <ds:datastoreItem xmlns:ds="http://schemas.openxmlformats.org/officeDocument/2006/customXml" ds:itemID="{50AACE6D-8EB6-447A-8DFD-C2C0C52916AC}">
   <ds:schemaRefs>
     <ds:schemaRef ds:uri="http://purl.org/dc/elements/1.1/"/>
@@ -17677,12 +18358,4 @@
     <ds:schemaRef ds:uri="http://purl.org/dc/dcmitype/"/>
   </ds:schemaRefs>
 </ds:datastoreItem>
-</file>
-
-<file path=customXml/itemProps3.xml><?xml version="1.0" encoding="utf-8"?>
-<ds:datastoreItem xmlns:ds="http://schemas.openxmlformats.org/officeDocument/2006/customXml" ds:itemID="{7F9B8BCC-BF24-4800-92E1-9F891BBB27E6}">
-  <ds:schemaRefs>
-    <ds:schemaRef ds:uri="http://schemas.microsoft.com/sharepoint/v3/contenttype/forms"/>
-  </ds:schemaRefs>
-</ds:datastoreItem>
 </file>